--- a/assets/plc/2026-10-30_Lesson_Internalization_Use_Student_Work_to_Adjust_Next_Learning_Experience.pptx
+++ b/assets/plc/2026-10-30_Lesson_Internalization_Use_Student_Work_to_Adjust_Next_Learning_Experience.pptx
@@ -2111,7 +2111,7 @@
                 <a:ea typeface="Inter" pitchFamily="34" charset="-122"/>
                 <a:cs typeface="Inter" pitchFamily="34" charset="-120"/>
               </a:rPr>
-              <a:t>Task, bar, source, anticipated thinking.</a:t>
+              <a:t>CUBS source, complete/partial CER, bar for mastery.</a:t>
             </a:r>
             <a:endParaRPr lang="en-US" sz="1800" dirty="0"/>
           </a:p>
@@ -2263,7 +2263,7 @@
                 <a:ea typeface="Inter" pitchFamily="34" charset="-122"/>
                 <a:cs typeface="Inter" pitchFamily="34" charset="-120"/>
               </a:rPr>
-              <a:t>Criterion, feedback, action, evidence look-for.</a:t>
+              <a:t>Feedback helps students identify, complete, or revise CER.</a:t>
             </a:r>
             <a:endParaRPr lang="en-US" sz="1800" dirty="0"/>
           </a:p>
@@ -2415,7 +2415,7 @@
                 <a:ea typeface="Inter" pitchFamily="34" charset="-122"/>
                 <a:cs typeface="Inter" pitchFamily="34" charset="-120"/>
               </a:rPr>
-              <a:t>Task, criteria, samples, feedback, revision.</a:t>
+              <a:t>Task, criteria, CER samples, feedback, revision.</a:t>
             </a:r>
             <a:endParaRPr lang="en-US" sz="1800" dirty="0"/>
           </a:p>
@@ -2544,7 +2544,7 @@
                 <a:ea typeface="Inter" pitchFamily="34" charset="-122"/>
                 <a:cs typeface="Inter" pitchFamily="34" charset="-120"/>
               </a:rPr>
-              <a:t>Triangulate evidence</a:t>
+              <a:t>Analyze student work</a:t>
             </a:r>
             <a:endParaRPr lang="en-US" sz="1800" dirty="0"/>
           </a:p>
@@ -2567,7 +2567,7 @@
                 <a:ea typeface="Inter" pitchFamily="34" charset="-122"/>
                 <a:cs typeface="Inter" pitchFamily="34" charset="-120"/>
               </a:rPr>
-              <a:t>Writing samples + unit-test evidence where available.</a:t>
+              <a:t>Completed/revised CER samples + unit-test context where available.</a:t>
             </a:r>
             <a:endParaRPr lang="en-US" sz="1800" dirty="0"/>
           </a:p>
@@ -2787,7 +2787,7 @@
                 <a:ea typeface="Inter" pitchFamily="34" charset="-122"/>
                 <a:cs typeface="Inter" pitchFamily="34" charset="-120"/>
               </a:rPr>
-              <a:t> writing benchmark + student response + contextual unit-test evidence → supported pattern → targeted next learning experience.</a:t>
+              <a:t> writing benchmark → student CUBS/CER response → feedback and revision → student-work analysis → targeted next learning experience.</a:t>
             </a:r>
             <a:endParaRPr lang="en-US" sz="2100" dirty="0"/>
           </a:p>
@@ -3677,7 +3677,7 @@
                 <a:ea typeface="Inter" pitchFamily="34" charset="-122"/>
                 <a:cs typeface="Inter" pitchFamily="34" charset="-120"/>
               </a:rPr>
-              <a:t>Start with a few de-identified writing samples from the benchmark. Add unit-test-by-standard/question evidence only when available to provide context—not to rank students, teachers, or courses.</a:t>
+              <a:t>Start with a few de-identified completed or revised CER samples from the benchmark. Add unit-test-by-standard/question evidence only when available to provide context—not to rank students, teachers, or courses.</a:t>
             </a:r>
             <a:endParaRPr lang="en-US" sz="2300" dirty="0"/>
           </a:p>
@@ -3811,7 +3811,7 @@
                 <a:ea typeface="Inter" pitchFamily="34" charset="-122"/>
                 <a:cs typeface="Inter" pitchFamily="34" charset="-120"/>
               </a:rPr>
-              <a:t>Use the same criteria from Monday–Wednesday.</a:t>
+              <a:t>Use the same criteria and bar for mastery from Monday–Wednesday.</a:t>
             </a:r>
             <a:endParaRPr lang="en-US" sz="2100" dirty="0"/>
           </a:p>
@@ -3835,7 +3835,7 @@
                 <a:ea typeface="Inter" pitchFamily="34" charset="-122"/>
                 <a:cs typeface="Inter" pitchFamily="34" charset="-120"/>
               </a:rPr>
-              <a:t>Notice accurate evidence, partial reasoning, or an access need.</a:t>
+              <a:t>Notice whether students identified and completed the claim, evidence, and reasoning.</a:t>
             </a:r>
             <a:endParaRPr lang="en-US" sz="2100" dirty="0"/>
           </a:p>

--- a/assets/plc/2026-10-30_Lesson_Internalization_Use_Student_Work_to_Adjust_Next_Learning_Experience.pptx
+++ b/assets/plc/2026-10-30_Lesson_Internalization_Use_Student_Work_to_Adjust_Next_Learning_Experience.pptx
@@ -1397,7 +1397,7 @@
     <p:bg>
       <p:bgPr>
         <a:solidFill>
-          <a:srgbClr val="202124"/>
+          <a:srgbClr val="FFFFFF"/>
         </a:solidFill>
       </p:bgPr>
     </p:bg>
@@ -1424,7 +1424,27 @@
         <p:spPr>
           <a:xfrm>
             <a:off x="0" y="0"/>
-            <a:ext cx="355600" cy="9144000"/>
+            <a:ext cx="16256000" cy="1168400"/>
+          </a:xfrm>
+          <a:prstGeom prst="rect">
+            <a:avLst/>
+          </a:prstGeom>
+          <a:solidFill>
+            <a:srgbClr val="202124"/>
+          </a:solidFill>
+          <a:ln/>
+        </p:spPr>
+      </p:sp>
+      <p:sp>
+        <p:nvSpPr>
+          <p:cNvPr id="3" name="cover-shape-2"/>
+          <p:cNvSpPr/>
+          <p:nvPr/>
+        </p:nvSpPr>
+        <p:spPr>
+          <a:xfrm>
+            <a:off x="0" y="1168400"/>
+            <a:ext cx="16256000" cy="101600"/>
           </a:xfrm>
           <a:prstGeom prst="rect">
             <a:avLst/>
@@ -1437,34 +1457,14 @@
       </p:sp>
       <p:sp>
         <p:nvSpPr>
-          <p:cNvPr id="3" name="cover-shape-2"/>
-          <p:cNvSpPr/>
-          <p:nvPr/>
-        </p:nvSpPr>
-        <p:spPr>
-          <a:xfrm>
-            <a:off x="889000" y="1168400"/>
-            <a:ext cx="1905000" cy="101600"/>
-          </a:xfrm>
-          <a:prstGeom prst="rect">
-            <a:avLst/>
-          </a:prstGeom>
-          <a:solidFill>
-            <a:srgbClr val="C41220"/>
-          </a:solidFill>
-          <a:ln/>
-        </p:spPr>
-      </p:sp>
-      <p:sp>
-        <p:nvSpPr>
           <p:cNvPr id="4" name="kicker"/>
           <p:cNvSpPr/>
           <p:nvPr/>
         </p:nvSpPr>
         <p:spPr>
           <a:xfrm>
-            <a:off x="889000" y="1600200"/>
-            <a:ext cx="12065000" cy="355600"/>
+            <a:off x="736600" y="381000"/>
+            <a:ext cx="11430000" cy="279400"/>
           </a:xfrm>
           <a:prstGeom prst="rect">
             <a:avLst/>
@@ -1480,9 +1480,9 @@
               <a:buNone/>
             </a:pPr>
             <a:r>
-              <a:rPr lang="en-US" altLang="en-US" sz="1700" dirty="0">
-                <a:solidFill>
-                  <a:srgbClr val="D1D5DB"/>
+              <a:rPr lang="en-US" altLang="en-US" sz="1600" dirty="0">
+                <a:solidFill>
+                  <a:srgbClr val="F1F3F4"/>
                 </a:solidFill>
                 <a:latin typeface="Inter" pitchFamily="34" charset="0"/>
                 <a:ea typeface="Inter" pitchFamily="34" charset="-122"/>
@@ -1490,20 +1490,20 @@
               </a:rPr>
               <a:t>SCIENCE DEPARTMENT PLC  •  FRIDAY, OCTOBER 30, 2026  •  46 MINUTES</a:t>
             </a:r>
-            <a:endParaRPr lang="en-US" sz="1700" dirty="0"/>
-          </a:p>
-        </p:txBody>
-      </p:sp>
-      <p:sp>
-        <p:nvSpPr>
-          <p:cNvPr id="5" name="cover-title"/>
-          <p:cNvSpPr/>
-          <p:nvPr/>
-        </p:nvSpPr>
-        <p:spPr>
-          <a:xfrm>
-            <a:off x="889000" y="2387600"/>
-            <a:ext cx="13335000" cy="1625600"/>
+            <a:endParaRPr lang="en-US" sz="1600" dirty="0"/>
+          </a:p>
+        </p:txBody>
+      </p:sp>
+      <p:sp>
+        <p:nvSpPr>
+          <p:cNvPr id="5" name="title"/>
+          <p:cNvSpPr/>
+          <p:nvPr/>
+        </p:nvSpPr>
+        <p:spPr>
+          <a:xfrm>
+            <a:off x="736600" y="1917700"/>
+            <a:ext cx="11811000" cy="1473200"/>
           </a:xfrm>
           <a:prstGeom prst="rect">
             <a:avLst/>
@@ -1519,62 +1519,107 @@
           <a:p>
             <a:pPr algn="l" indent="0" marL="0">
               <a:lnSpc>
-                <a:spcPts val="4860"/>
+                <a:spcPts val="4644"/>
               </a:lnSpc>
               <a:buNone/>
             </a:pPr>
             <a:r>
-              <a:rPr lang="en-US" altLang="en-US" sz="4500" dirty="0">
-                <a:solidFill>
-                  <a:srgbClr val="FFFFFF"/>
-                </a:solidFill>
-                <a:latin typeface="Inter" pitchFamily="34" charset="0"/>
-                <a:ea typeface="Inter" pitchFamily="34" charset="-122"/>
-                <a:cs typeface="Inter" pitchFamily="34" charset="-120"/>
-              </a:rPr>
-              <a:t>Writing Samples + Unit-Test Evidence</a:t>
-            </a:r>
-            <a:endParaRPr lang="en-US" sz="4500" dirty="0"/>
+              <a:rPr lang="en-US" altLang="en-US" sz="4300" dirty="0">
+                <a:solidFill>
+                  <a:srgbClr val="202124"/>
+                </a:solidFill>
+                <a:latin typeface="Inter" pitchFamily="34" charset="0"/>
+                <a:ea typeface="Inter" pitchFamily="34" charset="-122"/>
+                <a:cs typeface="Inter" pitchFamily="34" charset="-120"/>
+              </a:rPr>
+              <a:t>Completed Writing → Written Feedback</a:t>
+            </a:r>
+            <a:endParaRPr lang="en-US" sz="4300" dirty="0"/>
           </a:p>
           <a:p>
             <a:pPr algn="l" indent="0" marL="0">
               <a:lnSpc>
-                <a:spcPts val="4860"/>
+                <a:spcPts val="4644"/>
               </a:lnSpc>
               <a:buNone/>
             </a:pPr>
             <a:r>
-              <a:rPr lang="en-US" altLang="en-US" sz="4500" dirty="0">
-                <a:solidFill>
-                  <a:srgbClr val="FFFFFF"/>
-                </a:solidFill>
-                <a:latin typeface="Inter" pitchFamily="34" charset="0"/>
-                <a:ea typeface="Inter" pitchFamily="34" charset="-122"/>
-                <a:cs typeface="Inter" pitchFamily="34" charset="-120"/>
-              </a:rPr>
-              <a:t>→ A Better Next Learning Experience</a:t>
-            </a:r>
-            <a:endParaRPr lang="en-US" sz="4500" dirty="0"/>
-          </a:p>
-        </p:txBody>
-      </p:sp>
-      <p:sp>
-        <p:nvSpPr>
-          <p:cNvPr id="6" name="cover-shape-5"/>
-          <p:cNvSpPr/>
-          <p:nvPr/>
-        </p:nvSpPr>
-        <p:spPr>
-          <a:xfrm>
-            <a:off x="889000" y="4597400"/>
-            <a:ext cx="12954000" cy="9144"/>
-          </a:xfrm>
-          <a:prstGeom prst="line">
-            <a:avLst/>
-          </a:prstGeom>
-          <a:ln w="12700">
+              <a:rPr lang="en-US" altLang="en-US" sz="4300" dirty="0">
+                <a:solidFill>
+                  <a:srgbClr val="202124"/>
+                </a:solidFill>
+                <a:latin typeface="Inter" pitchFamily="34" charset="0"/>
+                <a:ea typeface="Inter" pitchFamily="34" charset="-122"/>
+                <a:cs typeface="Inter" pitchFamily="34" charset="-120"/>
+              </a:rPr>
+              <a:t>→ Next Steps for Standard Mastery</a:t>
+            </a:r>
+            <a:endParaRPr lang="en-US" sz="4300" dirty="0"/>
+          </a:p>
+        </p:txBody>
+      </p:sp>
+      <p:sp>
+        <p:nvSpPr>
+          <p:cNvPr id="6" name="subtitle"/>
+          <p:cNvSpPr/>
+          <p:nvPr/>
+        </p:nvSpPr>
+        <p:spPr>
+          <a:xfrm>
+            <a:off x="736600" y="3797300"/>
+            <a:ext cx="10820400" cy="1092200"/>
+          </a:xfrm>
+          <a:prstGeom prst="rect">
+            <a:avLst/>
+          </a:prstGeom>
+          <a:noFill/>
+          <a:ln/>
+        </p:spPr>
+        <p:txBody>
+          <a:bodyPr wrap="square" lIns="0" tIns="0" rIns="0" bIns="0" rtlCol="0" anchor="t"/>
+          <a:lstStyle/>
+          <a:p>
+            <a:pPr algn="l" indent="0" marL="0">
+              <a:lnSpc>
+                <a:spcPts val="3050"/>
+              </a:lnSpc>
+              <a:buNone/>
+            </a:pPr>
+            <a:r>
+              <a:rPr lang="en-US" altLang="en-US" sz="2500" dirty="0">
+                <a:solidFill>
+                  <a:srgbClr val="3C4043"/>
+                </a:solidFill>
+                <a:latin typeface="Inter" pitchFamily="34" charset="0"/>
+                <a:ea typeface="Inter" pitchFamily="34" charset="-122"/>
+                <a:cs typeface="Inter" pitchFamily="34" charset="-120"/>
+              </a:rPr>
+              <a:t>Analyze completed student writing from the benchmark, identify evidence against the mastery bar, provide revision-oriented written feedback, and plan a precise next learning step.</a:t>
+            </a:r>
+            <a:endParaRPr lang="en-US" sz="2500" dirty="0"/>
+          </a:p>
+        </p:txBody>
+      </p:sp>
+      <p:sp>
+        <p:nvSpPr>
+          <p:cNvPr id="7" name="cover-shape-6"/>
+          <p:cNvSpPr/>
+          <p:nvPr/>
+        </p:nvSpPr>
+        <p:spPr>
+          <a:xfrm>
+            <a:off x="12242800" y="2057400"/>
+            <a:ext cx="3200400" cy="2984500"/>
+          </a:xfrm>
+          <a:prstGeom prst="rect">
+            <a:avLst/>
+          </a:prstGeom>
+          <a:solidFill>
+            <a:srgbClr val="FCE8EA"/>
+          </a:solidFill>
+          <a:ln w="25400">
             <a:solidFill>
-              <a:srgbClr val="72777D"/>
+              <a:srgbClr val="C41220"/>
             </a:solidFill>
             <a:prstDash val="solid"/>
           </a:ln>
@@ -1582,14 +1627,120 @@
       </p:sp>
       <p:sp>
         <p:nvSpPr>
-          <p:cNvPr id="7" name="subtitle"/>
-          <p:cNvSpPr/>
-          <p:nvPr/>
-        </p:nvSpPr>
-        <p:spPr>
-          <a:xfrm>
-            <a:off x="889000" y="5016500"/>
-            <a:ext cx="10668000" cy="939800"/>
+          <p:cNvPr id="8" name="focus-label"/>
+          <p:cNvSpPr/>
+          <p:nvPr/>
+        </p:nvSpPr>
+        <p:spPr>
+          <a:xfrm>
+            <a:off x="12573000" y="2438400"/>
+            <a:ext cx="2540000" cy="254000"/>
+          </a:xfrm>
+          <a:prstGeom prst="rect">
+            <a:avLst/>
+          </a:prstGeom>
+          <a:noFill/>
+          <a:ln/>
+        </p:spPr>
+        <p:txBody>
+          <a:bodyPr wrap="square" lIns="0" tIns="0" rIns="0" bIns="0" rtlCol="0" anchor="t"/>
+          <a:lstStyle/>
+          <a:p>
+            <a:pPr algn="ctr" indent="0" marL="0">
+              <a:buNone/>
+            </a:pPr>
+            <a:r>
+              <a:rPr lang="en-US" altLang="en-US" sz="1400" dirty="0">
+                <a:solidFill>
+                  <a:srgbClr val="C41220"/>
+                </a:solidFill>
+                <a:latin typeface="Inter" pitchFamily="34" charset="0"/>
+                <a:ea typeface="Inter" pitchFamily="34" charset="-122"/>
+                <a:cs typeface="Inter" pitchFamily="34" charset="-120"/>
+              </a:rPr>
+              <a:t>FOCUS TO PROTECT</a:t>
+            </a:r>
+            <a:endParaRPr lang="en-US" sz="1400" dirty="0"/>
+          </a:p>
+        </p:txBody>
+      </p:sp>
+      <p:sp>
+        <p:nvSpPr>
+          <p:cNvPr id="9" name="focus-copy"/>
+          <p:cNvSpPr/>
+          <p:nvPr/>
+        </p:nvSpPr>
+        <p:spPr>
+          <a:xfrm>
+            <a:off x="12547600" y="3035300"/>
+            <a:ext cx="2590800" cy="1358900"/>
+          </a:xfrm>
+          <a:prstGeom prst="rect">
+            <a:avLst/>
+          </a:prstGeom>
+          <a:noFill/>
+          <a:ln/>
+        </p:spPr>
+        <p:txBody>
+          <a:bodyPr wrap="square" lIns="0" tIns="0" rIns="0" bIns="0" rtlCol="0" anchor="ctr"/>
+          <a:lstStyle/>
+          <a:p>
+            <a:pPr algn="ctr" indent="0" marL="0">
+              <a:lnSpc>
+                <a:spcPts val="2400"/>
+              </a:lnSpc>
+              <a:buNone/>
+            </a:pPr>
+            <a:r>
+              <a:rPr lang="en-US" altLang="en-US" sz="2000" dirty="0">
+                <a:solidFill>
+                  <a:srgbClr val="3C4043"/>
+                </a:solidFill>
+                <a:latin typeface="Inter" pitchFamily="34" charset="0"/>
+                <a:ea typeface="Inter" pitchFamily="34" charset="-122"/>
+                <a:cs typeface="Inter" pitchFamily="34" charset="-120"/>
+              </a:rPr>
+              <a:t>Read the work for learning. Do not rank students, teachers, classes, or courses.</a:t>
+            </a:r>
+            <a:endParaRPr lang="en-US" sz="2000" dirty="0"/>
+          </a:p>
+        </p:txBody>
+      </p:sp>
+      <p:sp>
+        <p:nvSpPr>
+          <p:cNvPr id="10" name="cover-shape-9"/>
+          <p:cNvSpPr/>
+          <p:nvPr/>
+        </p:nvSpPr>
+        <p:spPr>
+          <a:xfrm>
+            <a:off x="736600" y="5842000"/>
+            <a:ext cx="14706600" cy="1422400"/>
+          </a:xfrm>
+          <a:prstGeom prst="rect">
+            <a:avLst/>
+          </a:prstGeom>
+          <a:solidFill>
+            <a:srgbClr val="F3F4F6"/>
+          </a:solidFill>
+          <a:ln w="12700">
+            <a:solidFill>
+              <a:srgbClr val="D1D5DB"/>
+            </a:solidFill>
+            <a:prstDash val="solid"/>
+          </a:ln>
+        </p:spPr>
+      </p:sp>
+      <p:sp>
+        <p:nvSpPr>
+          <p:cNvPr id="11" name="anchor"/>
+          <p:cNvSpPr/>
+          <p:nvPr/>
+        </p:nvSpPr>
+        <p:spPr>
+          <a:xfrm>
+            <a:off x="1117600" y="6172200"/>
+            <a:ext cx="13919200" cy="787400"/>
           </a:xfrm>
           <a:prstGeom prst="rect">
             <a:avLst/>
@@ -1603,79 +1754,120 @@
           <a:p>
             <a:pPr algn="l" indent="0" marL="0">
               <a:lnSpc>
-                <a:spcPts val="2950"/>
+                <a:spcPts val="2684"/>
               </a:lnSpc>
               <a:buNone/>
             </a:pPr>
             <a:r>
-              <a:rPr lang="en-US" altLang="en-US" sz="2500" dirty="0">
-                <a:solidFill>
-                  <a:srgbClr val="F1F3F4"/>
-                </a:solidFill>
-                <a:latin typeface="Inter" pitchFamily="34" charset="0"/>
-                <a:ea typeface="Inter" pitchFamily="34" charset="-122"/>
-                <a:cs typeface="Inter" pitchFamily="34" charset="-120"/>
-              </a:rPr>
-              <a:t>Examine a small amount of evidence from the same writing benchmark and use a supported learning pattern to adjust the next lesson.</a:t>
-            </a:r>
-            <a:endParaRPr lang="en-US" sz="2500" dirty="0"/>
-          </a:p>
-        </p:txBody>
-      </p:sp>
-      <p:sp>
-        <p:nvSpPr>
-          <p:cNvPr id="8" name="cover-shape-7"/>
-          <p:cNvSpPr/>
-          <p:nvPr/>
-        </p:nvSpPr>
-        <p:spPr>
-          <a:xfrm>
-            <a:off x="11912600" y="5308600"/>
-            <a:ext cx="3098800" cy="1727200"/>
-          </a:xfrm>
-          <a:prstGeom prst="rect">
-            <a:avLst/>
-          </a:prstGeom>
-          <a:solidFill>
-            <a:srgbClr val="C41220"/>
-          </a:solidFill>
-          <a:ln/>
-        </p:spPr>
-      </p:sp>
-      <p:sp>
-        <p:nvSpPr>
-          <p:cNvPr id="9" name="focus-label"/>
-          <p:cNvSpPr/>
-          <p:nvPr/>
-        </p:nvSpPr>
-        <p:spPr>
-          <a:xfrm>
-            <a:off x="12166600" y="5588000"/>
-            <a:ext cx="2590800" cy="228600"/>
-          </a:xfrm>
-          <a:prstGeom prst="rect">
-            <a:avLst/>
-          </a:prstGeom>
-          <a:noFill/>
-          <a:ln/>
-        </p:spPr>
-        <p:txBody>
-          <a:bodyPr wrap="none" lIns="0" tIns="0" rIns="0" bIns="0" rtlCol="0" anchor="t"/>
-          <a:lstStyle/>
-          <a:p>
-            <a:pPr algn="ctr" indent="0" marL="0">
+              <a:rPr lang="en-US" altLang="en-US" sz="2200" b="1" dirty="0">
+                <a:solidFill>
+                  <a:srgbClr val="C41220"/>
+                </a:solidFill>
+                <a:latin typeface="Inter" pitchFamily="34" charset="0"/>
+                <a:ea typeface="Inter" pitchFamily="34" charset="-122"/>
+                <a:cs typeface="Inter" pitchFamily="34" charset="-120"/>
+              </a:rPr>
+              <a:t>Shared model:</a:t>
+            </a:r>
+            <a:r>
+              <a:rPr lang="en-US" altLang="en-US" sz="2200" dirty="0">
+                <a:solidFill>
+                  <a:srgbClr val="3C4043"/>
+                </a:solidFill>
+                <a:latin typeface="Inter" pitchFamily="34" charset="0"/>
+                <a:ea typeface="Inter" pitchFamily="34" charset="-122"/>
+                <a:cs typeface="Inter" pitchFamily="34" charset="-120"/>
+              </a:rPr>
+              <a:t> use completed Biology Benchmark #1 writing to examine claim, evidence, reasoning, source use, and scientific explanation; each course team uses its own comparable response.</a:t>
+            </a:r>
+            <a:endParaRPr lang="en-US" sz="2200" dirty="0"/>
+          </a:p>
+        </p:txBody>
+      </p:sp>
+      <p:sp>
+        <p:nvSpPr>
+          <p:cNvPr id="12" name="footer"/>
+          <p:cNvSpPr/>
+          <p:nvPr/>
+        </p:nvSpPr>
+        <p:spPr>
+          <a:xfrm>
+            <a:off x="736600" y="7975600"/>
+            <a:ext cx="12827000" cy="431800"/>
+          </a:xfrm>
+          <a:prstGeom prst="rect">
+            <a:avLst/>
+          </a:prstGeom>
+          <a:noFill/>
+          <a:ln/>
+        </p:spPr>
+        <p:txBody>
+          <a:bodyPr wrap="square" lIns="0" tIns="0" rIns="0" bIns="0" rtlCol="0" anchor="t"/>
+          <a:lstStyle/>
+          <a:p>
+            <a:pPr algn="l" indent="0" marL="0">
+              <a:buNone/>
+            </a:pPr>
+            <a:r>
+              <a:rPr lang="en-US" altLang="en-US" sz="2100" b="1" dirty="0">
+                <a:solidFill>
+                  <a:srgbClr val="C41220"/>
+                </a:solidFill>
+                <a:latin typeface="Inter" pitchFamily="34" charset="0"/>
+                <a:ea typeface="Inter" pitchFamily="34" charset="-122"/>
+                <a:cs typeface="Inter" pitchFamily="34" charset="-120"/>
+              </a:rPr>
+              <a:t>Lesson Internalization Tool:</a:t>
+            </a:r>
+            <a:r>
+              <a:rPr lang="en-US" altLang="en-US" sz="2100" dirty="0">
+                <a:solidFill>
+                  <a:srgbClr val="3C4043"/>
+                </a:solidFill>
+                <a:latin typeface="Inter" pitchFamily="34" charset="0"/>
+                <a:ea typeface="Inter" pitchFamily="34" charset="-122"/>
+                <a:cs typeface="Inter" pitchFamily="34" charset="-120"/>
+              </a:rPr>
+              <a:t> Every Day Questions 1, 3, and 4; Team Deep Dive Steps 3–5; After-Lesson Reflection.</a:t>
+            </a:r>
+            <a:endParaRPr lang="en-US" sz="2100" dirty="0"/>
+          </a:p>
+        </p:txBody>
+      </p:sp>
+      <p:sp>
+        <p:nvSpPr>
+          <p:cNvPr id="13" name="page"/>
+          <p:cNvSpPr/>
+          <p:nvPr/>
+        </p:nvSpPr>
+        <p:spPr>
+          <a:xfrm>
+            <a:off x="14732000" y="8432800"/>
+            <a:ext cx="736600" cy="228600"/>
+          </a:xfrm>
+          <a:prstGeom prst="rect">
+            <a:avLst/>
+          </a:prstGeom>
+          <a:noFill/>
+          <a:ln/>
+        </p:spPr>
+        <p:txBody>
+          <a:bodyPr wrap="square" lIns="0" tIns="0" rIns="0" bIns="0" rtlCol="0" anchor="t"/>
+          <a:lstStyle/>
+          <a:p>
+            <a:pPr algn="r" indent="0" marL="0">
               <a:buNone/>
             </a:pPr>
             <a:r>
               <a:rPr lang="en-US" altLang="en-US" sz="1300" dirty="0">
                 <a:solidFill>
-                  <a:srgbClr val="FDECEC"/>
-                </a:solidFill>
-                <a:latin typeface="Inter" pitchFamily="34" charset="0"/>
-                <a:ea typeface="Inter" pitchFamily="34" charset="-122"/>
-                <a:cs typeface="Inter" pitchFamily="34" charset="-120"/>
-              </a:rPr>
-              <a:t>FOCUS TO PROTECT</a:t>
+                  <a:srgbClr val="6B7280"/>
+                </a:solidFill>
+                <a:latin typeface="Inter" pitchFamily="34" charset="0"/>
+                <a:ea typeface="Inter" pitchFamily="34" charset="-122"/>
+                <a:cs typeface="Inter" pitchFamily="34" charset="-120"/>
+              </a:rPr>
+              <a:t>01</a:t>
             </a:r>
             <a:endParaRPr lang="en-US" sz="1300" dirty="0"/>
           </a:p>
@@ -1683,141 +1875,7 @@
       </p:sp>
       <p:sp>
         <p:nvSpPr>
-          <p:cNvPr id="10" name="focus-copy"/>
-          <p:cNvSpPr/>
-          <p:nvPr/>
-        </p:nvSpPr>
-        <p:spPr>
-          <a:xfrm>
-            <a:off x="12141200" y="5969000"/>
-            <a:ext cx="2641600" cy="762000"/>
-          </a:xfrm>
-          <a:prstGeom prst="rect">
-            <a:avLst/>
-          </a:prstGeom>
-          <a:noFill/>
-          <a:ln/>
-        </p:spPr>
-        <p:txBody>
-          <a:bodyPr wrap="square" lIns="0" tIns="0" rIns="0" bIns="0" rtlCol="0" anchor="t"/>
-          <a:lstStyle/>
-          <a:p>
-            <a:pPr algn="ctr" indent="0" marL="0">
-              <a:lnSpc>
-                <a:spcPts val="1972"/>
-              </a:lnSpc>
-              <a:buNone/>
-            </a:pPr>
-            <a:r>
-              <a:rPr lang="en-US" altLang="en-US" sz="1700" dirty="0">
-                <a:solidFill>
-                  <a:srgbClr val="FFFFFF"/>
-                </a:solidFill>
-                <a:latin typeface="Inter" pitchFamily="34" charset="0"/>
-                <a:ea typeface="Inter" pitchFamily="34" charset="-122"/>
-                <a:cs typeface="Inter" pitchFamily="34" charset="-120"/>
-              </a:rPr>
-              <a:t>Describe a learning pattern—not a score, label, or ranking.</a:t>
-            </a:r>
-            <a:endParaRPr lang="en-US" sz="1700" dirty="0"/>
-          </a:p>
-        </p:txBody>
-      </p:sp>
-      <p:sp>
-        <p:nvSpPr>
-          <p:cNvPr id="11" name="footer"/>
-          <p:cNvSpPr/>
-          <p:nvPr/>
-        </p:nvSpPr>
-        <p:spPr>
-          <a:xfrm>
-            <a:off x="889000" y="7493000"/>
-            <a:ext cx="12700000" cy="533400"/>
-          </a:xfrm>
-          <a:prstGeom prst="rect">
-            <a:avLst/>
-          </a:prstGeom>
-          <a:noFill/>
-          <a:ln/>
-        </p:spPr>
-        <p:txBody>
-          <a:bodyPr wrap="square" lIns="0" tIns="0" rIns="0" bIns="0" rtlCol="0" anchor="t"/>
-          <a:lstStyle/>
-          <a:p>
-            <a:pPr algn="l" indent="0" marL="0">
-              <a:lnSpc>
-                <a:spcPts val="2596"/>
-              </a:lnSpc>
-              <a:buNone/>
-            </a:pPr>
-            <a:r>
-              <a:rPr lang="en-US" altLang="en-US" sz="2200" b="1" dirty="0">
-                <a:solidFill>
-                  <a:srgbClr val="F6B4BA"/>
-                </a:solidFill>
-                <a:latin typeface="Inter" pitchFamily="34" charset="0"/>
-                <a:ea typeface="Inter" pitchFamily="34" charset="-122"/>
-                <a:cs typeface="Inter" pitchFamily="34" charset="-120"/>
-              </a:rPr>
-              <a:t>Lesson Internalization Tool:</a:t>
-            </a:r>
-            <a:r>
-              <a:rPr lang="en-US" altLang="en-US" sz="2200" dirty="0">
-                <a:solidFill>
-                  <a:srgbClr val="D1D5DB"/>
-                </a:solidFill>
-                <a:latin typeface="Inter" pitchFamily="34" charset="0"/>
-                <a:ea typeface="Inter" pitchFamily="34" charset="-122"/>
-                <a:cs typeface="Inter" pitchFamily="34" charset="-120"/>
-              </a:rPr>
-              <a:t> Every Day Questions 1, 3, and 4; Team Deep Dive Steps 3–5 and after-lesson reflection.</a:t>
-            </a:r>
-            <a:endParaRPr lang="en-US" sz="2200" dirty="0"/>
-          </a:p>
-        </p:txBody>
-      </p:sp>
-      <p:sp>
-        <p:nvSpPr>
-          <p:cNvPr id="12" name="page"/>
-          <p:cNvSpPr/>
-          <p:nvPr/>
-        </p:nvSpPr>
-        <p:spPr>
-          <a:xfrm>
-            <a:off x="14478000" y="8407400"/>
-            <a:ext cx="762000" cy="228600"/>
-          </a:xfrm>
-          <a:prstGeom prst="rect">
-            <a:avLst/>
-          </a:prstGeom>
-          <a:noFill/>
-          <a:ln/>
-        </p:spPr>
-        <p:txBody>
-          <a:bodyPr wrap="square" lIns="0" tIns="0" rIns="0" bIns="0" rtlCol="0" anchor="t"/>
-          <a:lstStyle/>
-          <a:p>
-            <a:pPr algn="r" indent="0" marL="0">
-              <a:buNone/>
-            </a:pPr>
-            <a:r>
-              <a:rPr lang="en-US" altLang="en-US" sz="1300" dirty="0">
-                <a:solidFill>
-                  <a:srgbClr val="D1D5DB"/>
-                </a:solidFill>
-                <a:latin typeface="Inter" pitchFamily="34" charset="0"/>
-                <a:ea typeface="Inter" pitchFamily="34" charset="-122"/>
-                <a:cs typeface="Inter" pitchFamily="34" charset="-120"/>
-              </a:rPr>
-              <a:t>01</a:t>
-            </a:r>
-            <a:endParaRPr lang="en-US" sz="1300" dirty="0"/>
-          </a:p>
-        </p:txBody>
-      </p:sp>
-      <p:sp>
-        <p:nvSpPr>
-          <p:cNvPr id="13" name="cover-shape-12"/>
+          <p:cNvPr id="14" name="cover-shape-13"/>
           <p:cNvSpPr/>
           <p:nvPr/>
         </p:nvSpPr>
@@ -1920,7 +1978,7 @@
                 <a:ea typeface="Inter" pitchFamily="34" charset="-122"/>
                 <a:cs typeface="Inter" pitchFamily="34" charset="-120"/>
               </a:rPr>
-              <a:t>Return to the Evidence Story</a:t>
+              <a:t>Return to the Evidence Students Produced</a:t>
             </a:r>
             <a:endParaRPr lang="en-US" sz="3000" dirty="0"/>
           </a:p>
@@ -1998,7 +2056,7 @@
                 <a:ea typeface="Inter" pitchFamily="34" charset="-122"/>
                 <a:cs typeface="Inter" pitchFamily="34" charset="-120"/>
               </a:rPr>
-              <a:t>Friday completes the week by using the evidence teachers intentionally planned to collect. The goal is an instructional adjustment, not a new or broader plan.</a:t>
+              <a:t>Friday closes the planning-to-evidence cycle by reading completed student writing and using it to strengthen the next standard-aligned learning experience.</a:t>
             </a:r>
             <a:endParaRPr lang="en-US" sz="2300" dirty="0"/>
           </a:p>
@@ -2088,7 +2146,7 @@
                 <a:ea typeface="Inter" pitchFamily="34" charset="-122"/>
                 <a:cs typeface="Inter" pitchFamily="34" charset="-120"/>
               </a:rPr>
-              <a:t>Internalize benchmark</a:t>
+              <a:t>Experience + analyze</a:t>
             </a:r>
             <a:endParaRPr lang="en-US" sz="1800" dirty="0"/>
           </a:p>
@@ -2111,7 +2169,7 @@
                 <a:ea typeface="Inter" pitchFamily="34" charset="-122"/>
                 <a:cs typeface="Inter" pitchFamily="34" charset="-120"/>
               </a:rPr>
-              <a:t>CUBS source, complete/partial CER, bar for mastery.</a:t>
+              <a:t>Teachers completed the task, CUBS analysis, and color-coded CER.</a:t>
             </a:r>
             <a:endParaRPr lang="en-US" sz="1800" dirty="0"/>
           </a:p>
@@ -2240,7 +2298,7 @@
                 <a:ea typeface="Inter" pitchFamily="34" charset="-122"/>
                 <a:cs typeface="Inter" pitchFamily="34" charset="-120"/>
               </a:rPr>
-              <a:t>Plan student action</a:t>
+              <a:t>Plan for learning</a:t>
             </a:r>
             <a:endParaRPr lang="en-US" sz="1800" dirty="0"/>
           </a:p>
@@ -2263,7 +2321,7 @@
                 <a:ea typeface="Inter" pitchFamily="34" charset="-122"/>
                 <a:cs typeface="Inter" pitchFamily="34" charset="-120"/>
               </a:rPr>
-              <a:t>Feedback helps students identify, complete, or revise CER.</a:t>
+              <a:t>Lesson arc, access, facilitation, feedback, and revision.</a:t>
             </a:r>
             <a:endParaRPr lang="en-US" sz="1800" dirty="0"/>
           </a:p>
@@ -2392,7 +2450,7 @@
                 <a:ea typeface="Inter" pitchFamily="34" charset="-122"/>
                 <a:cs typeface="Inter" pitchFamily="34" charset="-120"/>
               </a:rPr>
-              <a:t>Calibrate</a:t>
+              <a:t>Teach CUBS + CER</a:t>
             </a:r>
             <a:endParaRPr lang="en-US" sz="1800" dirty="0"/>
           </a:p>
@@ -2415,7 +2473,7 @@
                 <a:ea typeface="Inter" pitchFamily="34" charset="-122"/>
                 <a:cs typeface="Inter" pitchFamily="34" charset="-120"/>
               </a:rPr>
-              <a:t>Task, criteria, CER samples, feedback, revision.</a:t>
+              <a:t>Students analyze the source and make their response structure visible.</a:t>
             </a:r>
             <a:endParaRPr lang="en-US" sz="1800" dirty="0"/>
           </a:p>
@@ -2544,7 +2602,7 @@
                 <a:ea typeface="Inter" pitchFamily="34" charset="-122"/>
                 <a:cs typeface="Inter" pitchFamily="34" charset="-120"/>
               </a:rPr>
-              <a:t>Analyze student work</a:t>
+              <a:t>Analyze writing</a:t>
             </a:r>
             <a:endParaRPr lang="en-US" sz="1800" dirty="0"/>
           </a:p>
@@ -2567,7 +2625,7 @@
                 <a:ea typeface="Inter" pitchFamily="34" charset="-122"/>
                 <a:cs typeface="Inter" pitchFamily="34" charset="-120"/>
               </a:rPr>
-              <a:t>Completed/revised CER samples + unit-test context where available.</a:t>
+              <a:t>Read completed responses against the mastery bar and provide written feedback.</a:t>
             </a:r>
             <a:endParaRPr lang="en-US" sz="1800" dirty="0"/>
           </a:p>
@@ -2668,7 +2726,7 @@
                 <a:ea typeface="Inter" pitchFamily="34" charset="-122"/>
                 <a:cs typeface="Inter" pitchFamily="34" charset="-120"/>
               </a:rPr>
-              <a:t>NEXT EXPERIENCE</a:t>
+              <a:t>STANDARD MASTERY</a:t>
             </a:r>
             <a:endParaRPr lang="en-US" sz="1800" dirty="0"/>
           </a:p>
@@ -2691,7 +2749,7 @@
                 <a:ea typeface="Inter" pitchFamily="34" charset="-122"/>
                 <a:cs typeface="Inter" pitchFamily="34" charset="-120"/>
               </a:rPr>
-              <a:t>Respond to the learning pattern</a:t>
+              <a:t>Respond precisely</a:t>
             </a:r>
             <a:endParaRPr lang="en-US" sz="1800" dirty="0"/>
           </a:p>
@@ -2714,7 +2772,7 @@
                 <a:ea typeface="Inter" pitchFamily="34" charset="-122"/>
                 <a:cs typeface="Inter" pitchFamily="34" charset="-120"/>
               </a:rPr>
-              <a:t>Student action, teacher support, and next evidence check.</a:t>
+              <a:t>Plan one targeted student action, teacher move, and new evidence check.</a:t>
             </a:r>
             <a:endParaRPr lang="en-US" sz="1800" dirty="0"/>
           </a:p>
@@ -2735,9 +2793,14 @@
             <a:avLst/>
           </a:prstGeom>
           <a:solidFill>
-            <a:srgbClr val="202124"/>
+            <a:srgbClr val="F8F9FA"/>
           </a:solidFill>
-          <a:ln/>
+          <a:ln w="12700">
+            <a:solidFill>
+              <a:srgbClr val="D1D5DB"/>
+            </a:solidFill>
+            <a:prstDash val="solid"/>
+          </a:ln>
         </p:spPr>
       </p:sp>
       <p:sp>
@@ -2770,24 +2833,24 @@
             <a:r>
               <a:rPr lang="en-US" altLang="en-US" sz="2100" b="1" dirty="0">
                 <a:solidFill>
-                  <a:srgbClr val="F6B4BA"/>
-                </a:solidFill>
-                <a:latin typeface="Inter" pitchFamily="34" charset="0"/>
-                <a:ea typeface="Inter" pitchFamily="34" charset="-122"/>
-                <a:cs typeface="Inter" pitchFamily="34" charset="-120"/>
-              </a:rPr>
-              <a:t>Anchor:</a:t>
+                  <a:srgbClr val="3C4043"/>
+                </a:solidFill>
+                <a:latin typeface="Inter" pitchFamily="34" charset="0"/>
+                <a:ea typeface="Inter" pitchFamily="34" charset="-122"/>
+                <a:cs typeface="Inter" pitchFamily="34" charset="-120"/>
+              </a:rPr>
+              <a:t>Evidence protocol:</a:t>
             </a:r>
             <a:r>
               <a:rPr lang="en-US" altLang="en-US" sz="2100" dirty="0">
                 <a:solidFill>
-                  <a:srgbClr val="FFFFFF"/>
-                </a:solidFill>
-                <a:latin typeface="Inter" pitchFamily="34" charset="0"/>
-                <a:ea typeface="Inter" pitchFamily="34" charset="-122"/>
-                <a:cs typeface="Inter" pitchFamily="34" charset="-120"/>
-              </a:rPr>
-              <a:t> writing benchmark → student CUBS/CER response → feedback and revision → student-work analysis → targeted next learning experience.</a:t>
+                  <a:srgbClr val="3C4043"/>
+                </a:solidFill>
+                <a:latin typeface="Inter" pitchFamily="34" charset="0"/>
+                <a:ea typeface="Inter" pitchFamily="34" charset="-122"/>
+                <a:cs typeface="Inter" pitchFamily="34" charset="-120"/>
+              </a:rPr>
+              <a:t> use de-identified writing samples and the agreed task criteria. Describe what is visible in the work; do not compare people or create a broad reteach plan.</a:t>
             </a:r>
             <a:endParaRPr lang="en-US" sz="2100" dirty="0"/>
           </a:p>
@@ -2937,7 +3000,7 @@
                 <a:ea typeface="Inter" pitchFamily="34" charset="-122"/>
                 <a:cs typeface="Inter" pitchFamily="34" charset="-120"/>
               </a:rPr>
-              <a:t>Start With the Agreed Bar for Mastery</a:t>
+              <a:t>Set the Mastery Bar Before Reading the Work</a:t>
             </a:r>
             <a:endParaRPr lang="en-US" sz="3000" dirty="0"/>
           </a:p>
@@ -2976,7 +3039,7 @@
                 <a:ea typeface="Inter" pitchFamily="34" charset="-122"/>
                 <a:cs typeface="Inter" pitchFamily="34" charset="-120"/>
               </a:rPr>
-              <a:t>4:00–9:00  •  5 MIN</a:t>
+              <a:t>4:00–10:00  •  6 MIN</a:t>
             </a:r>
             <a:endParaRPr lang="en-US" sz="1600" dirty="0"/>
           </a:p>
@@ -3015,7 +3078,7 @@
                 <a:ea typeface="Inter" pitchFamily="34" charset="-122"/>
                 <a:cs typeface="Inter" pitchFamily="34" charset="-120"/>
               </a:rPr>
-              <a:t>Before interpreting the evidence, restate what students were learning, what they produced, and what the benchmark task required them to make visible.</a:t>
+              <a:t>Review what the standard and task required—not simply whether students completed every part. The shared model is Question 5 of the Biology benchmark; other teams use the equivalent demand in their own task.</a:t>
             </a:r>
             <a:endParaRPr lang="en-US" sz="2300" dirty="0"/>
           </a:p>
@@ -3079,7 +3142,7 @@
                 <a:ea typeface="Inter" pitchFamily="34" charset="-122"/>
                 <a:cs typeface="Inter" pitchFamily="34" charset="-120"/>
               </a:rPr>
-              <a:t>THE LEARNING DEMAND</a:t>
+              <a:t>THE TASK DEMAND</a:t>
             </a:r>
             <a:endParaRPr lang="en-US" sz="2700" dirty="0"/>
           </a:p>
@@ -3125,7 +3188,7 @@
                 <a:ea typeface="Inter" pitchFamily="34" charset="-122"/>
                 <a:cs typeface="Inter" pitchFamily="34" charset="-120"/>
               </a:rPr>
-              <a:t>Priority standard and science skill</a:t>
+              <a:t>HS-LS2-1: biotic/abiotic factors and carrying capacity</a:t>
             </a:r>
             <a:endParaRPr lang="en-US" sz="2200" dirty="0"/>
           </a:p>
@@ -3149,7 +3212,7 @@
                 <a:ea typeface="Inter" pitchFamily="34" charset="-122"/>
                 <a:cs typeface="Inter" pitchFamily="34" charset="-120"/>
               </a:rPr>
-              <a:t>Disciplinary literacy demand</a:t>
+              <a:t>Use the population graph and food web</a:t>
             </a:r>
             <a:endParaRPr lang="en-US" sz="2200" dirty="0"/>
           </a:p>
@@ -3173,7 +3236,7 @@
                 <a:ea typeface="Inter" pitchFamily="34" charset="-122"/>
                 <a:cs typeface="Inter" pitchFamily="34" charset="-120"/>
               </a:rPr>
-              <a:t>Writing prompt, source/evidence, and product</a:t>
+              <a:t>Predict how more frogs may change the fruit-fly population</a:t>
             </a:r>
             <a:endParaRPr lang="en-US" sz="2200" dirty="0"/>
           </a:p>
@@ -3197,7 +3260,7 @@
                 <a:ea typeface="Inter" pitchFamily="34" charset="-122"/>
                 <a:cs typeface="Inter" pitchFamily="34" charset="-120"/>
               </a:rPr>
-              <a:t>Why this work matters in the unit arc</a:t>
+              <a:t>Write a complete CER explanation</a:t>
             </a:r>
             <a:endParaRPr lang="en-US" sz="2200" dirty="0"/>
           </a:p>
@@ -3261,7 +3324,7 @@
                 <a:ea typeface="Inter" pitchFamily="34" charset="-122"/>
                 <a:cs typeface="Inter" pitchFamily="34" charset="-120"/>
               </a:rPr>
-              <a:t>THE EVIDENCE OF MASTERY</a:t>
+              <a:t>EVIDENCE OF MASTERY</a:t>
             </a:r>
             <a:endParaRPr lang="en-US" sz="2700" dirty="0"/>
           </a:p>
@@ -3307,7 +3370,7 @@
                 <a:ea typeface="Inter" pitchFamily="34" charset="-122"/>
                 <a:cs typeface="Inter" pitchFamily="34" charset="-120"/>
               </a:rPr>
-              <a:t>Accurate claim, explanation, or conclusion</a:t>
+              <a:t>Accurate claim/prediction about the population</a:t>
             </a:r>
             <a:endParaRPr lang="en-US" sz="2200" dirty="0"/>
           </a:p>
@@ -3331,7 +3394,7 @@
                 <a:ea typeface="Inter" pitchFamily="34" charset="-122"/>
                 <a:cs typeface="Inter" pitchFamily="34" charset="-120"/>
               </a:rPr>
-              <a:t>Relevant evidence selected and used precisely</a:t>
+              <a:t>Relevant evidence from both visuals</a:t>
             </a:r>
             <a:endParaRPr lang="en-US" sz="2200" dirty="0"/>
           </a:p>
@@ -3355,7 +3418,7 @@
                 <a:ea typeface="Inter" pitchFamily="34" charset="-122"/>
                 <a:cs typeface="Inter" pitchFamily="34" charset="-120"/>
               </a:rPr>
-              <a:t>Scientific reasoning that connects evidence and idea</a:t>
+              <a:t>Scientific reasoning that connects predator-prey relationships and carrying capacity</a:t>
             </a:r>
             <a:endParaRPr lang="en-US" sz="2200" dirty="0"/>
           </a:p>
@@ -3379,7 +3442,7 @@
                 <a:ea typeface="Inter" pitchFamily="34" charset="-122"/>
                 <a:cs typeface="Inter" pitchFamily="34" charset="-120"/>
               </a:rPr>
-              <a:t>Clear language, labels, or representation</a:t>
+              <a:t>Clear language that makes the logic visible</a:t>
             </a:r>
             <a:endParaRPr lang="en-US" sz="2200" dirty="0"/>
           </a:p>
@@ -3449,7 +3512,7 @@
                 <a:ea typeface="Inter" pitchFamily="34" charset="-122"/>
                 <a:cs typeface="Inter" pitchFamily="34" charset="-120"/>
               </a:rPr>
-              <a:t> Use this agreed bar before discussing what evidence suggests students need next.</a:t>
+              <a:t> Use this agreed bar before reading the writing, annotating evidence, or deciding on feedback.</a:t>
             </a:r>
             <a:endParaRPr lang="en-US" sz="1900" dirty="0"/>
           </a:p>
@@ -3575,7 +3638,7 @@
         <p:spPr>
           <a:xfrm>
             <a:off x="508000" y="292100"/>
-            <a:ext cx="11430000" cy="482600"/>
+            <a:ext cx="12065000" cy="482600"/>
           </a:xfrm>
           <a:prstGeom prst="rect">
             <a:avLst/>
@@ -3599,7 +3662,7 @@
                 <a:ea typeface="Inter" pitchFamily="34" charset="-122"/>
                 <a:cs typeface="Inter" pitchFamily="34" charset="-120"/>
               </a:rPr>
-              <a:t>Triangulate What the Evidence Shows</a:t>
+              <a:t>Analyze Completed Student Writing Against the Bar</a:t>
             </a:r>
             <a:endParaRPr lang="en-US" sz="3000" dirty="0"/>
           </a:p>
@@ -3638,7 +3701,7 @@
                 <a:ea typeface="Inter" pitchFamily="34" charset="-122"/>
                 <a:cs typeface="Inter" pitchFamily="34" charset="-120"/>
               </a:rPr>
-              <a:t>9:00–19:00  •  10 MIN</a:t>
+              <a:t>10:00–22:00  •  12 MIN</a:t>
             </a:r>
             <a:endParaRPr lang="en-US" sz="1600" dirty="0"/>
           </a:p>
@@ -3677,7 +3740,7 @@
                 <a:ea typeface="Inter" pitchFamily="34" charset="-122"/>
                 <a:cs typeface="Inter" pitchFamily="34" charset="-120"/>
               </a:rPr>
-              <a:t>Start with a few de-identified completed or revised CER samples from the benchmark. Add unit-test-by-standard/question evidence only when available to provide context—not to rank students, teachers, or courses.</a:t>
+              <a:t>Read a small, representative, de-identified set of completed benchmark responses. Annotate what is visible in the writing before deciding what written feedback or next learning experience is needed.</a:t>
             </a:r>
             <a:endParaRPr lang="en-US" sz="2300" dirty="0"/>
           </a:p>
@@ -3692,56 +3755,32 @@
         <p:spPr>
           <a:xfrm>
             <a:off x="508000" y="2730500"/>
-            <a:ext cx="6959600" cy="3873500"/>
+            <a:ext cx="4699000" cy="3873500"/>
           </a:xfrm>
           <a:prstGeom prst="rect">
             <a:avLst/>
           </a:prstGeom>
           <a:solidFill>
-            <a:srgbClr val="F8F9FA"/>
+            <a:srgbClr val="EAF5EC"/>
           </a:solidFill>
-          <a:ln w="12700">
+          <a:ln w="25400">
             <a:solidFill>
-              <a:srgbClr val="D1D5DB"/>
+              <a:srgbClr val="238636"/>
             </a:solidFill>
             <a:prstDash val="solid"/>
           </a:ln>
         </p:spPr>
       </p:sp>
-      <p:pic>
-        <p:nvPicPr>
-          <p:cNvPr id="7" name="evidence-icon-6" descr="preencoded.png">    </p:cNvPr>
-          <p:cNvPicPr>
-            <a:picLocks noChangeAspect="1"/>
-          </p:cNvPicPr>
-          <p:nvPr/>
-        </p:nvPicPr>
-        <p:blipFill>
-          <a:blip r:embed="rId1"/>
-          <a:stretch>
-            <a:fillRect/>
-          </a:stretch>
-        </p:blipFill>
-        <p:spPr>
-          <a:xfrm>
-            <a:off x="850900" y="3073400"/>
-            <a:ext cx="533400" cy="533400"/>
-          </a:xfrm>
-          <a:prstGeom prst="rect">
-            <a:avLst/>
-          </a:prstGeom>
-        </p:spPr>
-      </p:pic>
-      <p:sp>
-        <p:nvSpPr>
-          <p:cNvPr id="8" name="writing-title"/>
-          <p:cNvSpPr/>
-          <p:nvPr/>
-        </p:nvSpPr>
-        <p:spPr>
-          <a:xfrm>
-            <a:off x="1676400" y="3136900"/>
-            <a:ext cx="4953000" cy="381000"/>
+      <p:sp>
+        <p:nvSpPr>
+          <p:cNvPr id="7" name="claim-title"/>
+          <p:cNvSpPr/>
+          <p:nvPr/>
+        </p:nvSpPr>
+        <p:spPr>
+          <a:xfrm>
+            <a:off x="850900" y="3098800"/>
+            <a:ext cx="3683000" cy="381000"/>
           </a:xfrm>
           <a:prstGeom prst="rect">
             <a:avLst/>
@@ -3757,30 +3796,30 @@
               <a:buNone/>
             </a:pPr>
             <a:r>
-              <a:rPr lang="en-US" altLang="en-US" sz="2500" dirty="0">
-                <a:solidFill>
-                  <a:srgbClr val="3C4043"/>
-                </a:solidFill>
-                <a:latin typeface="Inter" pitchFamily="34" charset="0"/>
-                <a:ea typeface="Inter" pitchFamily="34" charset="-122"/>
-                <a:cs typeface="Inter" pitchFamily="34" charset="-120"/>
-              </a:rPr>
-              <a:t>SOURCE 1: WRITING SAMPLES</a:t>
-            </a:r>
-            <a:endParaRPr lang="en-US" sz="2500" dirty="0"/>
-          </a:p>
-        </p:txBody>
-      </p:sp>
-      <p:sp>
-        <p:nvSpPr>
-          <p:cNvPr id="9" name="writing-body"/>
-          <p:cNvSpPr/>
-          <p:nvPr/>
-        </p:nvSpPr>
-        <p:spPr>
-          <a:xfrm>
-            <a:off x="850900" y="4064000"/>
-            <a:ext cx="5842000" cy="1866900"/>
+              <a:rPr lang="en-US" altLang="en-US" sz="2400" dirty="0">
+                <a:solidFill>
+                  <a:srgbClr val="238636"/>
+                </a:solidFill>
+                <a:latin typeface="Inter" pitchFamily="34" charset="0"/>
+                <a:ea typeface="Inter" pitchFamily="34" charset="-122"/>
+                <a:cs typeface="Inter" pitchFamily="34" charset="-120"/>
+              </a:rPr>
+              <a:t>1. MARK WHAT IS VISIBLE</a:t>
+            </a:r>
+            <a:endParaRPr lang="en-US" sz="2400" dirty="0"/>
+          </a:p>
+        </p:txBody>
+      </p:sp>
+      <p:sp>
+        <p:nvSpPr>
+          <p:cNvPr id="8" name="claim-body"/>
+          <p:cNvSpPr/>
+          <p:nvPr/>
+        </p:nvSpPr>
+        <p:spPr>
+          <a:xfrm>
+            <a:off x="850900" y="4038600"/>
+            <a:ext cx="3683000" cy="1879600"/>
           </a:xfrm>
           <a:prstGeom prst="rect">
             <a:avLst/>
@@ -3811,7 +3850,7 @@
                 <a:ea typeface="Inter" pitchFamily="34" charset="-122"/>
                 <a:cs typeface="Inter" pitchFamily="34" charset="-120"/>
               </a:rPr>
-              <a:t>Use the same criteria and bar for mastery from Monday–Wednesday.</a:t>
+              <a:t>Claim or prediction</a:t>
             </a:r>
             <a:endParaRPr lang="en-US" sz="2100" dirty="0"/>
           </a:p>
@@ -3835,7 +3874,7 @@
                 <a:ea typeface="Inter" pitchFamily="34" charset="-122"/>
                 <a:cs typeface="Inter" pitchFamily="34" charset="-120"/>
               </a:rPr>
-              <a:t>Notice whether students identified and completed the claim, evidence, and reasoning.</a:t>
+              <a:t>Evidence from the source/visuals</a:t>
             </a:r>
             <a:endParaRPr lang="en-US" sz="2100" dirty="0"/>
           </a:p>
@@ -3859,22 +3898,204 @@
                 <a:ea typeface="Inter" pitchFamily="34" charset="-122"/>
                 <a:cs typeface="Inter" pitchFamily="34" charset="-120"/>
               </a:rPr>
-              <a:t>Describe what the work shows, not who produced it.</a:t>
+              <a:t>Reasoning that connects evidence and science idea</a:t>
             </a:r>
             <a:endParaRPr lang="en-US" sz="2100" dirty="0"/>
           </a:p>
-        </p:txBody>
-      </p:sp>
-      <p:sp>
-        <p:nvSpPr>
-          <p:cNvPr id="10" name="evidence-shape-9"/>
-          <p:cNvSpPr/>
-          <p:nvPr/>
-        </p:nvSpPr>
-        <p:spPr>
-          <a:xfrm>
-            <a:off x="8280400" y="2730500"/>
-            <a:ext cx="7467600" cy="3873500"/>
+          <a:p>
+            <a:pPr algn="l" marL="333375" indent="-333375">
+              <a:lnSpc>
+                <a:spcPts val="2646"/>
+              </a:lnSpc>
+              <a:spcBef>
+                <a:spcPts val="10"/>
+              </a:spcBef>
+              <a:buSzPct val="100000"/>
+              <a:buChar char="•"/>
+            </a:pPr>
+            <a:r>
+              <a:rPr lang="en-US" altLang="en-US" sz="2100" dirty="0">
+                <a:solidFill>
+                  <a:srgbClr val="3C4043"/>
+                </a:solidFill>
+                <a:latin typeface="Inter" pitchFamily="34" charset="0"/>
+                <a:ea typeface="Inter" pitchFamily="34" charset="-122"/>
+                <a:cs typeface="Inter" pitchFamily="34" charset="-120"/>
+              </a:rPr>
+              <a:t>Language that makes the response clear</a:t>
+            </a:r>
+            <a:endParaRPr lang="en-US" sz="2100" dirty="0"/>
+          </a:p>
+        </p:txBody>
+      </p:sp>
+      <p:sp>
+        <p:nvSpPr>
+          <p:cNvPr id="9" name="evidence-shape-8"/>
+          <p:cNvSpPr/>
+          <p:nvPr/>
+        </p:nvSpPr>
+        <p:spPr>
+          <a:xfrm>
+            <a:off x="5778500" y="2730500"/>
+            <a:ext cx="4699000" cy="3873500"/>
+          </a:xfrm>
+          <a:prstGeom prst="rect">
+            <a:avLst/>
+          </a:prstGeom>
+          <a:solidFill>
+            <a:srgbClr val="F3F4F6"/>
+          </a:solidFill>
+          <a:ln w="12700">
+            <a:solidFill>
+              <a:srgbClr val="D1D5DB"/>
+            </a:solidFill>
+            <a:prstDash val="solid"/>
+          </a:ln>
+        </p:spPr>
+      </p:sp>
+      <p:sp>
+        <p:nvSpPr>
+          <p:cNvPr id="10" name="feedback-title"/>
+          <p:cNvSpPr/>
+          <p:nvPr/>
+        </p:nvSpPr>
+        <p:spPr>
+          <a:xfrm>
+            <a:off x="6121400" y="3098800"/>
+            <a:ext cx="3683000" cy="381000"/>
+          </a:xfrm>
+          <a:prstGeom prst="rect">
+            <a:avLst/>
+          </a:prstGeom>
+          <a:noFill/>
+          <a:ln/>
+        </p:spPr>
+        <p:txBody>
+          <a:bodyPr wrap="square" lIns="0" tIns="0" rIns="0" bIns="0" rtlCol="0" anchor="t"/>
+          <a:lstStyle/>
+          <a:p>
+            <a:pPr algn="l" indent="0" marL="0">
+              <a:buNone/>
+            </a:pPr>
+            <a:r>
+              <a:rPr lang="en-US" altLang="en-US" sz="2400" dirty="0">
+                <a:solidFill>
+                  <a:srgbClr val="3C4043"/>
+                </a:solidFill>
+                <a:latin typeface="Inter" pitchFamily="34" charset="0"/>
+                <a:ea typeface="Inter" pitchFamily="34" charset="-122"/>
+                <a:cs typeface="Inter" pitchFamily="34" charset="-120"/>
+              </a:rPr>
+              <a:t>2. RECORD ONE NEED</a:t>
+            </a:r>
+            <a:endParaRPr lang="en-US" sz="2400" dirty="0"/>
+          </a:p>
+        </p:txBody>
+      </p:sp>
+      <p:sp>
+        <p:nvSpPr>
+          <p:cNvPr id="11" name="feedback-body"/>
+          <p:cNvSpPr/>
+          <p:nvPr/>
+        </p:nvSpPr>
+        <p:spPr>
+          <a:xfrm>
+            <a:off x="6121400" y="4038600"/>
+            <a:ext cx="3683000" cy="1879600"/>
+          </a:xfrm>
+          <a:prstGeom prst="rect">
+            <a:avLst/>
+          </a:prstGeom>
+          <a:noFill/>
+          <a:ln/>
+        </p:spPr>
+        <p:txBody>
+          <a:bodyPr wrap="square" lIns="0" tIns="0" rIns="0" bIns="0" rtlCol="0" anchor="t"/>
+          <a:lstStyle/>
+          <a:p>
+            <a:pPr algn="l" marL="333375" indent="-333375">
+              <a:lnSpc>
+                <a:spcPts val="2646"/>
+              </a:lnSpc>
+              <a:spcBef>
+                <a:spcPts val="10"/>
+              </a:spcBef>
+              <a:buSzPct val="100000"/>
+              <a:buChar char="•"/>
+            </a:pPr>
+            <a:r>
+              <a:rPr lang="en-US" altLang="en-US" sz="2100" dirty="0">
+                <a:solidFill>
+                  <a:srgbClr val="3C4043"/>
+                </a:solidFill>
+                <a:latin typeface="Inter" pitchFamily="34" charset="0"/>
+                <a:ea typeface="Inter" pitchFamily="34" charset="-122"/>
+                <a:cs typeface="Inter" pitchFamily="34" charset="-120"/>
+              </a:rPr>
+              <a:t>What is partial, missing, or confused?</a:t>
+            </a:r>
+            <a:endParaRPr lang="en-US" sz="2100" dirty="0"/>
+          </a:p>
+          <a:p>
+            <a:pPr algn="l" marL="333375" indent="-333375">
+              <a:lnSpc>
+                <a:spcPts val="2646"/>
+              </a:lnSpc>
+              <a:spcBef>
+                <a:spcPts val="10"/>
+              </a:spcBef>
+              <a:buSzPct val="100000"/>
+              <a:buChar char="•"/>
+            </a:pPr>
+            <a:r>
+              <a:rPr lang="en-US" altLang="en-US" sz="2100" dirty="0">
+                <a:solidFill>
+                  <a:srgbClr val="3C4043"/>
+                </a:solidFill>
+                <a:latin typeface="Inter" pitchFamily="34" charset="0"/>
+                <a:ea typeface="Inter" pitchFamily="34" charset="-122"/>
+                <a:cs typeface="Inter" pitchFamily="34" charset="-120"/>
+              </a:rPr>
+              <a:t>Is the need science, source use, or written reasoning?</a:t>
+            </a:r>
+            <a:endParaRPr lang="en-US" sz="2100" dirty="0"/>
+          </a:p>
+          <a:p>
+            <a:pPr algn="l" marL="333375" indent="-333375">
+              <a:lnSpc>
+                <a:spcPts val="2646"/>
+              </a:lnSpc>
+              <a:spcBef>
+                <a:spcPts val="10"/>
+              </a:spcBef>
+              <a:buSzPct val="100000"/>
+              <a:buChar char="•"/>
+            </a:pPr>
+            <a:r>
+              <a:rPr lang="en-US" altLang="en-US" sz="2100" dirty="0">
+                <a:solidFill>
+                  <a:srgbClr val="3C4043"/>
+                </a:solidFill>
+                <a:latin typeface="Inter" pitchFamily="34" charset="0"/>
+                <a:ea typeface="Inter" pitchFamily="34" charset="-122"/>
+                <a:cs typeface="Inter" pitchFamily="34" charset="-120"/>
+              </a:rPr>
+              <a:t>Which criterion will make the most difference now?</a:t>
+            </a:r>
+            <a:endParaRPr lang="en-US" sz="2100" dirty="0"/>
+          </a:p>
+        </p:txBody>
+      </p:sp>
+      <p:sp>
+        <p:nvSpPr>
+          <p:cNvPr id="12" name="evidence-shape-11"/>
+          <p:cNvSpPr/>
+          <p:nvPr/>
+        </p:nvSpPr>
+        <p:spPr>
+          <a:xfrm>
+            <a:off x="11049000" y="2730500"/>
+            <a:ext cx="4699000" cy="3873500"/>
           </a:xfrm>
           <a:prstGeom prst="rect">
             <a:avLst/>
@@ -3890,40 +4111,16 @@
           </a:ln>
         </p:spPr>
       </p:sp>
-      <p:pic>
-        <p:nvPicPr>
-          <p:cNvPr id="11" name="evidence-icon-10" descr="preencoded.png">    </p:cNvPr>
-          <p:cNvPicPr>
-            <a:picLocks noChangeAspect="1"/>
-          </p:cNvPicPr>
-          <p:nvPr/>
-        </p:nvPicPr>
-        <p:blipFill>
-          <a:blip r:embed="rId2"/>
-          <a:stretch>
-            <a:fillRect/>
-          </a:stretch>
-        </p:blipFill>
-        <p:spPr>
-          <a:xfrm>
-            <a:off x="8636000" y="3073400"/>
-            <a:ext cx="533400" cy="533400"/>
-          </a:xfrm>
-          <a:prstGeom prst="rect">
-            <a:avLst/>
-          </a:prstGeom>
-        </p:spPr>
-      </p:pic>
-      <p:sp>
-        <p:nvSpPr>
-          <p:cNvPr id="12" name="unit-title"/>
-          <p:cNvSpPr/>
-          <p:nvPr/>
-        </p:nvSpPr>
-        <p:spPr>
-          <a:xfrm>
-            <a:off x="9461500" y="3136900"/>
-            <a:ext cx="5461000" cy="381000"/>
+      <p:sp>
+        <p:nvSpPr>
+          <p:cNvPr id="13" name="response-title"/>
+          <p:cNvSpPr/>
+          <p:nvPr/>
+        </p:nvSpPr>
+        <p:spPr>
+          <a:xfrm>
+            <a:off x="11391900" y="3098800"/>
+            <a:ext cx="3683000" cy="381000"/>
           </a:xfrm>
           <a:prstGeom prst="rect">
             <a:avLst/>
@@ -3939,7 +4136,7 @@
               <a:buNone/>
             </a:pPr>
             <a:r>
-              <a:rPr lang="en-US" altLang="en-US" sz="2500" dirty="0">
+              <a:rPr lang="en-US" altLang="en-US" sz="2400" dirty="0">
                 <a:solidFill>
                   <a:srgbClr val="3C4043"/>
                 </a:solidFill>
@@ -3947,22 +4144,22 @@
                 <a:ea typeface="Inter" pitchFamily="34" charset="-122"/>
                 <a:cs typeface="Inter" pitchFamily="34" charset="-120"/>
               </a:rPr>
-              <a:t>SOURCE 2: UNIT-TEST CONTEXT</a:t>
-            </a:r>
-            <a:endParaRPr lang="en-US" sz="2500" dirty="0"/>
-          </a:p>
-        </p:txBody>
-      </p:sp>
-      <p:sp>
-        <p:nvSpPr>
-          <p:cNvPr id="13" name="unit-body"/>
-          <p:cNvSpPr/>
-          <p:nvPr/>
-        </p:nvSpPr>
-        <p:spPr>
-          <a:xfrm>
-            <a:off x="8636000" y="4064000"/>
-            <a:ext cx="6286500" cy="1866900"/>
+              <a:t>3. WRITE THE FEEDBACK</a:t>
+            </a:r>
+            <a:endParaRPr lang="en-US" sz="2400" dirty="0"/>
+          </a:p>
+        </p:txBody>
+      </p:sp>
+      <p:sp>
+        <p:nvSpPr>
+          <p:cNvPr id="14" name="response-body"/>
+          <p:cNvSpPr/>
+          <p:nvPr/>
+        </p:nvSpPr>
+        <p:spPr>
+          <a:xfrm>
+            <a:off x="11391900" y="4038600"/>
+            <a:ext cx="3683000" cy="1879600"/>
           </a:xfrm>
           <a:prstGeom prst="rect">
             <a:avLst/>
@@ -3993,7 +4190,7 @@
                 <a:ea typeface="Inter" pitchFamily="34" charset="-122"/>
                 <a:cs typeface="Inter" pitchFamily="34" charset="-120"/>
               </a:rPr>
-              <a:t>Review by standard or question when available.</a:t>
+              <a:t>Name the criterion</a:t>
             </a:r>
             <a:endParaRPr lang="en-US" sz="2100" dirty="0"/>
           </a:p>
@@ -4017,7 +4214,7 @@
                 <a:ea typeface="Inter" pitchFamily="34" charset="-122"/>
                 <a:cs typeface="Inter" pitchFamily="34" charset="-120"/>
               </a:rPr>
-              <a:t>Ask whether the pattern supports, complicates, or redirects the writing evidence.</a:t>
+              <a:t>Point back to the response or source</a:t>
             </a:r>
             <a:endParaRPr lang="en-US" sz="2100" dirty="0"/>
           </a:p>
@@ -4041,15 +4238,39 @@
                 <a:ea typeface="Inter" pitchFamily="34" charset="-122"/>
                 <a:cs typeface="Inter" pitchFamily="34" charset="-120"/>
               </a:rPr>
-              <a:t>Use results to clarify an instructional question—not as a ranking.</a:t>
+              <a:t>Request a specific revision action</a:t>
             </a:r>
             <a:endParaRPr lang="en-US" sz="2100" dirty="0"/>
           </a:p>
-        </p:txBody>
-      </p:sp>
-      <p:sp>
-        <p:nvSpPr>
-          <p:cNvPr id="14" name="evidence-shape-13"/>
+          <a:p>
+            <a:pPr algn="l" marL="333375" indent="-333375">
+              <a:lnSpc>
+                <a:spcPts val="2646"/>
+              </a:lnSpc>
+              <a:spcBef>
+                <a:spcPts val="10"/>
+              </a:spcBef>
+              <a:buSzPct val="100000"/>
+              <a:buChar char="•"/>
+            </a:pPr>
+            <a:r>
+              <a:rPr lang="en-US" altLang="en-US" sz="2100" dirty="0">
+                <a:solidFill>
+                  <a:srgbClr val="3C4043"/>
+                </a:solidFill>
+                <a:latin typeface="Inter" pitchFamily="34" charset="0"/>
+                <a:ea typeface="Inter" pitchFamily="34" charset="-122"/>
+                <a:cs typeface="Inter" pitchFamily="34" charset="-120"/>
+              </a:rPr>
+              <a:t>Do not provide the answer</a:t>
+            </a:r>
+            <a:endParaRPr lang="en-US" sz="2100" dirty="0"/>
+          </a:p>
+        </p:txBody>
+      </p:sp>
+      <p:sp>
+        <p:nvSpPr>
+          <p:cNvPr id="15" name="evidence-shape-14"/>
           <p:cNvSpPr/>
           <p:nvPr/>
         </p:nvSpPr>
@@ -4069,7 +4290,7 @@
       </p:sp>
       <p:sp>
         <p:nvSpPr>
-          <p:cNvPr id="15" name="evidence-note"/>
+          <p:cNvPr id="16" name="evidence-note"/>
           <p:cNvSpPr/>
           <p:nvPr/>
         </p:nvSpPr>
@@ -4100,7 +4321,7 @@
                 <a:ea typeface="Inter" pitchFamily="34" charset="-122"/>
                 <a:cs typeface="Inter" pitchFamily="34" charset="-120"/>
               </a:rPr>
-              <a:t>Evidence statement:</a:t>
+              <a:t>Annotation note:</a:t>
             </a:r>
             <a:r>
               <a:rPr lang="en-US" altLang="en-US" sz="2000" dirty="0">
@@ -4111,7 +4332,7 @@
                 <a:ea typeface="Inter" pitchFamily="34" charset="-122"/>
                 <a:cs typeface="Inter" pitchFamily="34" charset="-120"/>
               </a:rPr>
-              <a:t> “The writing samples show ___; the available unit-test evidence suggests ___; therefore we will investigate ___ in the next lesson.”</a:t>
+              <a:t> writing evidence → criterion → written feedback → student revision → information for the next mastery decision.</a:t>
             </a:r>
             <a:endParaRPr lang="en-US" sz="2000" dirty="0"/>
           </a:p>
@@ -4119,7 +4340,7 @@
       </p:sp>
       <p:sp>
         <p:nvSpPr>
-          <p:cNvPr id="16" name="page"/>
+          <p:cNvPr id="17" name="page"/>
           <p:cNvSpPr/>
           <p:nvPr/>
         </p:nvSpPr>
@@ -4158,7 +4379,7 @@
       </p:sp>
       <p:sp>
         <p:nvSpPr>
-          <p:cNvPr id="17" name="evidence-shape-16"/>
+          <p:cNvPr id="18" name="evidence-shape-17"/>
           <p:cNvSpPr/>
           <p:nvPr/>
         </p:nvSpPr>
@@ -4237,7 +4458,7 @@
         <p:spPr>
           <a:xfrm>
             <a:off x="508000" y="292100"/>
-            <a:ext cx="11430000" cy="482600"/>
+            <a:ext cx="11811000" cy="482600"/>
           </a:xfrm>
           <a:prstGeom prst="rect">
             <a:avLst/>
@@ -4261,7 +4482,7 @@
                 <a:ea typeface="Inter" pitchFamily="34" charset="-122"/>
                 <a:cs typeface="Inter" pitchFamily="34" charset="-120"/>
               </a:rPr>
-              <a:t>Identify One Supported Learning Pattern</a:t>
+              <a:t>Calibrate Written Feedback and the Revision Action</a:t>
             </a:r>
             <a:endParaRPr lang="en-US" sz="3000" dirty="0"/>
           </a:p>
@@ -4300,7 +4521,7 @@
                 <a:ea typeface="Inter" pitchFamily="34" charset="-122"/>
                 <a:cs typeface="Inter" pitchFamily="34" charset="-120"/>
               </a:rPr>
-              <a:t>19:00–31:00  •  12 MIN</a:t>
+              <a:t>22:00–30:00  •  8 MIN</a:t>
             </a:r>
             <a:endParaRPr lang="en-US" sz="1600" dirty="0"/>
           </a:p>
@@ -4339,7 +4560,7 @@
                 <a:ea typeface="Inter" pitchFamily="34" charset="-122"/>
                 <a:cs typeface="Inter" pitchFamily="34" charset="-120"/>
               </a:rPr>
-              <a:t>Use the available evidence to name one pattern that matters for the next learning experience. Stay close to the task, criterion, and student thinking.</a:t>
+              <a:t>Use the evidence from the writing to select one criterion-based comment that will help students do more of the science thinking themselves.</a:t>
             </a:r>
             <a:endParaRPr lang="en-US" sz="2300" dirty="0"/>
           </a:p>
@@ -4403,7 +4624,7 @@
                 <a:ea typeface="Inter" pitchFamily="34" charset="-122"/>
                 <a:cs typeface="Inter" pitchFamily="34" charset="-120"/>
               </a:rPr>
-              <a:t>1. NOTICE</a:t>
+              <a:t>1. DESCRIBE THE PATTERN</a:t>
             </a:r>
             <a:endParaRPr lang="en-US" sz="2400" dirty="0"/>
           </a:p>
@@ -4430,15 +4651,34 @@
           <a:bodyPr wrap="square" lIns="0" tIns="0" rIns="0" bIns="0" rtlCol="0" anchor="t"/>
           <a:lstStyle/>
           <a:p>
-            <a:pPr algn="l" marL="333375" indent="-333375">
+            <a:pPr algn="l" indent="0" marL="0">
+              <a:lnSpc>
+                <a:spcPts val="2667"/>
+              </a:lnSpc>
+              <a:buNone/>
+            </a:pPr>
+            <a:r>
+              <a:rPr lang="en-US" altLang="en-US" sz="2100" b="1" dirty="0">
+                <a:solidFill>
+                  <a:srgbClr val="3C4043"/>
+                </a:solidFill>
+                <a:latin typeface="Inter" pitchFamily="34" charset="0"/>
+                <a:ea typeface="Inter" pitchFamily="34" charset="-122"/>
+                <a:cs typeface="Inter" pitchFamily="34" charset="-120"/>
+              </a:rPr>
+              <a:t>Use evidence language:</a:t>
+            </a:r>
+            <a:endParaRPr lang="en-US" sz="2100" dirty="0"/>
+          </a:p>
+          <a:p>
+            <a:pPr algn="l" indent="0" marL="0">
               <a:lnSpc>
                 <a:spcPts val="2667"/>
               </a:lnSpc>
               <a:spcBef>
-                <a:spcPts val="10"/>
+                <a:spcPts val="1200"/>
               </a:spcBef>
-              <a:buSzPct val="100000"/>
-              <a:buChar char="•"/>
+              <a:buNone/>
             </a:pPr>
             <a:r>
               <a:rPr lang="en-US" altLang="en-US" sz="2100" dirty="0">
@@ -4449,20 +4689,125 @@
                 <a:ea typeface="Inter" pitchFamily="34" charset="-122"/>
                 <a:cs typeface="Inter" pitchFamily="34" charset="-120"/>
               </a:rPr>
-              <a:t>What is visible in the writing samples?</a:t>
+              <a:t>“The writing shows students can ___, and many still need to ___ so they can ___.”</a:t>
             </a:r>
             <a:endParaRPr lang="en-US" sz="2100" dirty="0"/>
           </a:p>
-          <a:p>
-            <a:pPr algn="l" marL="333375" indent="-333375">
+        </p:txBody>
+      </p:sp>
+      <p:sp>
+        <p:nvSpPr>
+          <p:cNvPr id="9" name="pattern-shape-8"/>
+          <p:cNvSpPr/>
+          <p:nvPr/>
+        </p:nvSpPr>
+        <p:spPr>
+          <a:xfrm>
+            <a:off x="5778500" y="2730500"/>
+            <a:ext cx="4699000" cy="3937000"/>
+          </a:xfrm>
+          <a:prstGeom prst="rect">
+            <a:avLst/>
+          </a:prstGeom>
+          <a:solidFill>
+            <a:srgbClr val="FCE8EA"/>
+          </a:solidFill>
+          <a:ln w="25400">
+            <a:solidFill>
+              <a:srgbClr val="C41220"/>
+            </a:solidFill>
+            <a:prstDash val="solid"/>
+          </a:ln>
+        </p:spPr>
+      </p:sp>
+      <p:sp>
+        <p:nvSpPr>
+          <p:cNvPr id="10" name="describe-title"/>
+          <p:cNvSpPr/>
+          <p:nvPr/>
+        </p:nvSpPr>
+        <p:spPr>
+          <a:xfrm>
+            <a:off x="6108700" y="3073400"/>
+            <a:ext cx="3810000" cy="381000"/>
+          </a:xfrm>
+          <a:prstGeom prst="rect">
+            <a:avLst/>
+          </a:prstGeom>
+          <a:noFill/>
+          <a:ln/>
+        </p:spPr>
+        <p:txBody>
+          <a:bodyPr wrap="square" lIns="0" tIns="0" rIns="0" bIns="0" rtlCol="0" anchor="t"/>
+          <a:lstStyle/>
+          <a:p>
+            <a:pPr algn="l" indent="0" marL="0">
+              <a:buNone/>
+            </a:pPr>
+            <a:r>
+              <a:rPr lang="en-US" altLang="en-US" sz="2400" dirty="0">
+                <a:solidFill>
+                  <a:srgbClr val="3C4043"/>
+                </a:solidFill>
+                <a:latin typeface="Inter" pitchFamily="34" charset="0"/>
+                <a:ea typeface="Inter" pitchFamily="34" charset="-122"/>
+                <a:cs typeface="Inter" pitchFamily="34" charset="-120"/>
+              </a:rPr>
+              <a:t>2. WRITE ONE COMMENT</a:t>
+            </a:r>
+            <a:endParaRPr lang="en-US" sz="2400" dirty="0"/>
+          </a:p>
+        </p:txBody>
+      </p:sp>
+      <p:sp>
+        <p:nvSpPr>
+          <p:cNvPr id="11" name="describe-body"/>
+          <p:cNvSpPr/>
+          <p:nvPr/>
+        </p:nvSpPr>
+        <p:spPr>
+          <a:xfrm>
+            <a:off x="6108700" y="3860800"/>
+            <a:ext cx="3810000" cy="2184400"/>
+          </a:xfrm>
+          <a:prstGeom prst="rect">
+            <a:avLst/>
+          </a:prstGeom>
+          <a:noFill/>
+          <a:ln/>
+        </p:spPr>
+        <p:txBody>
+          <a:bodyPr wrap="square" lIns="0" tIns="0" rIns="0" bIns="0" rtlCol="0" anchor="t"/>
+          <a:lstStyle/>
+          <a:p>
+            <a:pPr algn="l" indent="0" marL="0">
+              <a:lnSpc>
+                <a:spcPts val="2667"/>
+              </a:lnSpc>
+              <a:buNone/>
+            </a:pPr>
+            <a:r>
+              <a:rPr lang="en-US" altLang="en-US" sz="2100" b="1" dirty="0">
+                <a:solidFill>
+                  <a:srgbClr val="3C4043"/>
+                </a:solidFill>
+                <a:latin typeface="Inter" pitchFamily="34" charset="0"/>
+                <a:ea typeface="Inter" pitchFamily="34" charset="-122"/>
+                <a:cs typeface="Inter" pitchFamily="34" charset="-120"/>
+              </a:rPr>
+              <a:t>For example:</a:t>
+            </a:r>
+            <a:endParaRPr lang="en-US" sz="2100" dirty="0"/>
+          </a:p>
+          <a:p>
+            <a:pPr algn="l" indent="0" marL="0">
               <a:lnSpc>
                 <a:spcPts val="2667"/>
               </a:lnSpc>
               <a:spcBef>
-                <a:spcPts val="10"/>
+                <a:spcPts val="1200"/>
               </a:spcBef>
-              <a:buSzPct val="100000"/>
-              <a:buChar char="•"/>
+              <a:buNone/>
             </a:pPr>
             <a:r>
               <a:rPr lang="en-US" altLang="en-US" sz="2100" dirty="0">
@@ -4473,45 +4818,21 @@
                 <a:ea typeface="Inter" pitchFamily="34" charset="-122"/>
                 <a:cs typeface="Inter" pitchFamily="34" charset="-120"/>
               </a:rPr>
-              <a:t>Which criterion is most consistently partial or absent?</a:t>
+              <a:t>“Underline the food-web and graph evidence you used. Then revise your reasoning to explain how it supports your prediction.”</a:t>
             </a:r>
             <a:endParaRPr lang="en-US" sz="2100" dirty="0"/>
           </a:p>
-          <a:p>
-            <a:pPr algn="l" marL="333375" indent="-333375">
-              <a:lnSpc>
-                <a:spcPts val="2667"/>
-              </a:lnSpc>
-              <a:spcBef>
-                <a:spcPts val="10"/>
-              </a:spcBef>
-              <a:buSzPct val="100000"/>
-              <a:buChar char="•"/>
-            </a:pPr>
-            <a:r>
-              <a:rPr lang="en-US" altLang="en-US" sz="2100" dirty="0">
-                <a:solidFill>
-                  <a:srgbClr val="3C4043"/>
-                </a:solidFill>
-                <a:latin typeface="Inter" pitchFamily="34" charset="0"/>
-                <a:ea typeface="Inter" pitchFamily="34" charset="-122"/>
-                <a:cs typeface="Inter" pitchFamily="34" charset="-120"/>
-              </a:rPr>
-              <a:t>Does unit-test context reinforce or complicate this observation?</a:t>
-            </a:r>
-            <a:endParaRPr lang="en-US" sz="2100" dirty="0"/>
-          </a:p>
-        </p:txBody>
-      </p:sp>
-      <p:sp>
-        <p:nvSpPr>
-          <p:cNvPr id="9" name="pattern-shape-8"/>
-          <p:cNvSpPr/>
-          <p:nvPr/>
-        </p:nvSpPr>
-        <p:spPr>
-          <a:xfrm>
-            <a:off x="5778500" y="2730500"/>
+        </p:txBody>
+      </p:sp>
+      <p:sp>
+        <p:nvSpPr>
+          <p:cNvPr id="12" name="pattern-shape-11"/>
+          <p:cNvSpPr/>
+          <p:nvPr/>
+        </p:nvSpPr>
+        <p:spPr>
+          <a:xfrm>
+            <a:off x="11049000" y="2730500"/>
             <a:ext cx="4699000" cy="3937000"/>
           </a:xfrm>
           <a:prstGeom prst="rect">
@@ -4530,13 +4851,13 @@
       </p:sp>
       <p:sp>
         <p:nvSpPr>
-          <p:cNvPr id="10" name="describe-title"/>
-          <p:cNvSpPr/>
-          <p:nvPr/>
-        </p:nvSpPr>
-        <p:spPr>
-          <a:xfrm>
-            <a:off x="6108700" y="3073400"/>
+          <p:cNvPr id="13" name="act-title"/>
+          <p:cNvSpPr/>
+          <p:nvPr/>
+        </p:nvSpPr>
+        <p:spPr>
+          <a:xfrm>
+            <a:off x="11379200" y="3073400"/>
             <a:ext cx="3810000" cy="381000"/>
           </a:xfrm>
           <a:prstGeom prst="rect">
@@ -4561,7 +4882,7 @@
                 <a:ea typeface="Inter" pitchFamily="34" charset="-122"/>
                 <a:cs typeface="Inter" pitchFamily="34" charset="-120"/>
               </a:rPr>
-              <a:t>2. DESCRIBE</a:t>
+              <a:t>3. NAME THE REVISION</a:t>
             </a:r>
             <a:endParaRPr lang="en-US" sz="2400" dirty="0"/>
           </a:p>
@@ -4569,13 +4890,13 @@
       </p:sp>
       <p:sp>
         <p:nvSpPr>
-          <p:cNvPr id="11" name="describe-body"/>
-          <p:cNvSpPr/>
-          <p:nvPr/>
-        </p:nvSpPr>
-        <p:spPr>
-          <a:xfrm>
-            <a:off x="6108700" y="3860800"/>
+          <p:cNvPr id="14" name="act-body"/>
+          <p:cNvSpPr/>
+          <p:nvPr/>
+        </p:nvSpPr>
+        <p:spPr>
+          <a:xfrm>
+            <a:off x="11379200" y="3860800"/>
             <a:ext cx="3810000" cy="2184400"/>
           </a:xfrm>
           <a:prstGeom prst="rect">
@@ -4603,7 +4924,7 @@
                 <a:ea typeface="Inter" pitchFamily="34" charset="-122"/>
                 <a:cs typeface="Inter" pitchFamily="34" charset="-120"/>
               </a:rPr>
-              <a:t>Use evidence language:</a:t>
+              <a:t>Students will:</a:t>
             </a:r>
             <a:endParaRPr lang="en-US" sz="2100" dirty="0"/>
           </a:p>
@@ -4626,136 +4947,7 @@
                 <a:ea typeface="Inter" pitchFamily="34" charset="-122"/>
                 <a:cs typeface="Inter" pitchFamily="34" charset="-120"/>
               </a:rPr>
-              <a:t>“The work shows students can ___, and many still need to ___ so they can ___.”</a:t>
-            </a:r>
-            <a:endParaRPr lang="en-US" sz="2100" dirty="0"/>
-          </a:p>
-        </p:txBody>
-      </p:sp>
-      <p:sp>
-        <p:nvSpPr>
-          <p:cNvPr id="12" name="pattern-shape-11"/>
-          <p:cNvSpPr/>
-          <p:nvPr/>
-        </p:nvSpPr>
-        <p:spPr>
-          <a:xfrm>
-            <a:off x="11049000" y="2730500"/>
-            <a:ext cx="4699000" cy="3937000"/>
-          </a:xfrm>
-          <a:prstGeom prst="rect">
-            <a:avLst/>
-          </a:prstGeom>
-          <a:solidFill>
-            <a:srgbClr val="FCE8EA"/>
-          </a:solidFill>
-          <a:ln w="25400">
-            <a:solidFill>
-              <a:srgbClr val="C41220"/>
-            </a:solidFill>
-            <a:prstDash val="solid"/>
-          </a:ln>
-        </p:spPr>
-      </p:sp>
-      <p:sp>
-        <p:nvSpPr>
-          <p:cNvPr id="13" name="act-title"/>
-          <p:cNvSpPr/>
-          <p:nvPr/>
-        </p:nvSpPr>
-        <p:spPr>
-          <a:xfrm>
-            <a:off x="11379200" y="3073400"/>
-            <a:ext cx="3810000" cy="381000"/>
-          </a:xfrm>
-          <a:prstGeom prst="rect">
-            <a:avLst/>
-          </a:prstGeom>
-          <a:noFill/>
-          <a:ln/>
-        </p:spPr>
-        <p:txBody>
-          <a:bodyPr wrap="square" lIns="0" tIns="0" rIns="0" bIns="0" rtlCol="0" anchor="t"/>
-          <a:lstStyle/>
-          <a:p>
-            <a:pPr algn="l" indent="0" marL="0">
-              <a:buNone/>
-            </a:pPr>
-            <a:r>
-              <a:rPr lang="en-US" altLang="en-US" sz="2400" dirty="0">
-                <a:solidFill>
-                  <a:srgbClr val="3C4043"/>
-                </a:solidFill>
-                <a:latin typeface="Inter" pitchFamily="34" charset="0"/>
-                <a:ea typeface="Inter" pitchFamily="34" charset="-122"/>
-                <a:cs typeface="Inter" pitchFamily="34" charset="-120"/>
-              </a:rPr>
-              <a:t>3. NARROW</a:t>
-            </a:r>
-            <a:endParaRPr lang="en-US" sz="2400" dirty="0"/>
-          </a:p>
-        </p:txBody>
-      </p:sp>
-      <p:sp>
-        <p:nvSpPr>
-          <p:cNvPr id="14" name="act-body"/>
-          <p:cNvSpPr/>
-          <p:nvPr/>
-        </p:nvSpPr>
-        <p:spPr>
-          <a:xfrm>
-            <a:off x="11379200" y="3860800"/>
-            <a:ext cx="3810000" cy="2184400"/>
-          </a:xfrm>
-          <a:prstGeom prst="rect">
-            <a:avLst/>
-          </a:prstGeom>
-          <a:noFill/>
-          <a:ln/>
-        </p:spPr>
-        <p:txBody>
-          <a:bodyPr wrap="square" lIns="0" tIns="0" rIns="0" bIns="0" rtlCol="0" anchor="t"/>
-          <a:lstStyle/>
-          <a:p>
-            <a:pPr algn="l" indent="0" marL="0">
-              <a:lnSpc>
-                <a:spcPts val="2667"/>
-              </a:lnSpc>
-              <a:buNone/>
-            </a:pPr>
-            <a:r>
-              <a:rPr lang="en-US" altLang="en-US" sz="2100" b="1" dirty="0">
-                <a:solidFill>
-                  <a:srgbClr val="3C4043"/>
-                </a:solidFill>
-                <a:latin typeface="Inter" pitchFamily="34" charset="0"/>
-                <a:ea typeface="Inter" pitchFamily="34" charset="-122"/>
-                <a:cs typeface="Inter" pitchFamily="34" charset="-120"/>
-              </a:rPr>
-              <a:t>Choose one instructional question:</a:t>
-            </a:r>
-            <a:endParaRPr lang="en-US" sz="2100" dirty="0"/>
-          </a:p>
-          <a:p>
-            <a:pPr algn="l" indent="0" marL="0">
-              <a:lnSpc>
-                <a:spcPts val="2667"/>
-              </a:lnSpc>
-              <a:spcBef>
-                <a:spcPts val="1200"/>
-              </a:spcBef>
-              <a:buNone/>
-            </a:pPr>
-            <a:r>
-              <a:rPr lang="en-US" altLang="en-US" sz="2100" dirty="0">
-                <a:solidFill>
-                  <a:srgbClr val="3C4043"/>
-                </a:solidFill>
-                <a:latin typeface="Inter" pitchFamily="34" charset="0"/>
-                <a:ea typeface="Inter" pitchFamily="34" charset="-122"/>
-                <a:cs typeface="Inter" pitchFamily="34" charset="-120"/>
-              </a:rPr>
-              <a:t>What will help students strengthen this criterion while continuing to do the grade-level science thinking?</a:t>
+              <a:t>select or correct evidence, add a claim, explain a connection, revise reasoning, or clarify scientific vocabulary.</a:t>
             </a:r>
             <a:endParaRPr lang="en-US" sz="2100" dirty="0"/>
           </a:p>
@@ -4814,7 +5006,7 @@
                 <a:ea typeface="Inter" pitchFamily="34" charset="-122"/>
                 <a:cs typeface="Inter" pitchFamily="34" charset="-120"/>
               </a:rPr>
-              <a:t>Decision to record:</a:t>
+              <a:t>Feedback check:</a:t>
             </a:r>
             <a:r>
               <a:rPr lang="en-US" altLang="en-US" sz="2000" dirty="0">
@@ -4825,7 +5017,7 @@
                 <a:ea typeface="Inter" pitchFamily="34" charset="-122"/>
                 <a:cs typeface="Inter" pitchFamily="34" charset="-120"/>
               </a:rPr>
-              <a:t> “The evidence suggests students need to strengthen ______ so they can ______ in the next science task.”</a:t>
+              <a:t> Does the comment name a criterion, invite a student action, and preserve responsibility for the explanation?</a:t>
             </a:r>
             <a:endParaRPr lang="en-US" sz="2000" dirty="0"/>
           </a:p>
@@ -4975,7 +5167,7 @@
                 <a:ea typeface="Inter" pitchFamily="34" charset="-122"/>
                 <a:cs typeface="Inter" pitchFamily="34" charset="-120"/>
               </a:rPr>
-              <a:t>Adjust the Next Learning Experience</a:t>
+              <a:t>Plan a Narrow Next Step for Standard Mastery</a:t>
             </a:r>
             <a:endParaRPr lang="en-US" sz="3000" dirty="0"/>
           </a:p>
@@ -5014,7 +5206,7 @@
                 <a:ea typeface="Inter" pitchFamily="34" charset="-122"/>
                 <a:cs typeface="Inter" pitchFamily="34" charset="-120"/>
               </a:rPr>
-              <a:t>31:00–41:00  •  10 MIN</a:t>
+              <a:t>30:00–41:00  •  11 MIN</a:t>
             </a:r>
             <a:endParaRPr lang="en-US" sz="1600" dirty="0"/>
           </a:p>
@@ -5112,7 +5304,7 @@
                 <a:ea typeface="Inter" pitchFamily="34" charset="-122"/>
                 <a:cs typeface="Inter" pitchFamily="34" charset="-120"/>
               </a:rPr>
-              <a:t>10 min</a:t>
+              <a:t>11 min</a:t>
             </a:r>
             <a:endParaRPr lang="en-US" sz="6400" dirty="0"/>
           </a:p>
@@ -5176,7 +5368,7 @@
                 <a:ea typeface="Inter" pitchFamily="34" charset="-122"/>
                 <a:cs typeface="Inter" pitchFamily="34" charset="-120"/>
               </a:rPr>
-              <a:t>Work independently first. Then use course-alike colleagues to test whether the adjustment matches the evidence.</a:t>
+              <a:t>Plan independently first. Then test whether the action directly responds to the writing evidence and advances the standard.</a:t>
             </a:r>
             <a:endParaRPr lang="en-US" sz="2000" dirty="0"/>
           </a:p>
@@ -5254,7 +5446,7 @@
                 <a:ea typeface="Inter" pitchFamily="34" charset="-122"/>
                 <a:cs typeface="Inter" pitchFamily="34" charset="-120"/>
               </a:rPr>
-              <a:t> Revise, explain, compare, correct, extend, or apply learning in response to the identified need.</a:t>
+              <a:t> Revise a reasoning sentence, select stronger evidence, compare a model response, clarify vocabulary, or explain a relationship.</a:t>
             </a:r>
             <a:endParaRPr lang="en-US" sz="2100" dirty="0"/>
           </a:p>
@@ -5332,7 +5524,7 @@
                 <a:ea typeface="Inter" pitchFamily="34" charset="-122"/>
                 <a:cs typeface="Inter" pitchFamily="34" charset="-120"/>
               </a:rPr>
-              <a:t> A question, feedback prompt, model, access support, discussion structure, or next task that preserves the cognitive demand.</a:t>
+              <a:t> A written feedback prompt, short conference, focused re-read, annotated model comparison, or next task that keeps the science thinking rigorous.</a:t>
             </a:r>
             <a:endParaRPr lang="en-US" sz="2100" dirty="0"/>
           </a:p>
@@ -5410,7 +5602,7 @@
                 <a:ea typeface="Inter" pitchFamily="34" charset="-122"/>
                 <a:cs typeface="Inter" pitchFamily="34" charset="-120"/>
               </a:rPr>
-              <a:t> Identify a short response, revision, exit ticket, model, or explanation that will show whether the action worked.</a:t>
+              <a:t> Identify the brief revision, explanation, exit response, model, or data analysis that will show whether students strengthened the criterion.</a:t>
             </a:r>
             <a:endParaRPr lang="en-US" sz="2100" dirty="0"/>
           </a:p>
@@ -5477,7 +5669,7 @@
                 <a:ea typeface="Inter" pitchFamily="34" charset="-122"/>
                 <a:cs typeface="Inter" pitchFamily="34" charset="-120"/>
               </a:rPr>
-              <a:t>Next experience:</a:t>
+              <a:t>Mastery next step:</a:t>
             </a:r>
             <a:r>
               <a:rPr lang="en-US" altLang="en-US" sz="2000" dirty="0">
@@ -5488,7 +5680,7 @@
                 <a:ea typeface="Inter" pitchFamily="34" charset="-122"/>
                 <a:cs typeface="Inter" pitchFamily="34" charset="-120"/>
               </a:rPr>
-              <a:t> “Students will ______ using ______ so they can ______; evidence will be ______.”</a:t>
+              <a:t> “Students will ______ using ______ so they can demonstrate ______; evidence will be ______.”</a:t>
             </a:r>
             <a:endParaRPr lang="en-US" sz="2000" dirty="0"/>
           </a:p>
@@ -5567,7 +5759,7 @@
     <p:bg>
       <p:bgPr>
         <a:solidFill>
-          <a:srgbClr val="202124"/>
+          <a:srgbClr val="FFFFFF"/>
         </a:solidFill>
       </p:bgPr>
     </p:bg>
@@ -5594,27 +5786,27 @@
         <p:spPr>
           <a:xfrm>
             <a:off x="0" y="0"/>
-            <a:ext cx="355600" cy="9144000"/>
+            <a:ext cx="16256000" cy="1016000"/>
           </a:xfrm>
           <a:prstGeom prst="rect">
             <a:avLst/>
           </a:prstGeom>
           <a:solidFill>
-            <a:srgbClr val="C41220"/>
+            <a:srgbClr val="202124"/>
           </a:solidFill>
           <a:ln/>
         </p:spPr>
       </p:sp>
       <p:sp>
         <p:nvSpPr>
-          <p:cNvPr id="3" name="close-kicker"/>
-          <p:cNvSpPr/>
-          <p:nvPr/>
-        </p:nvSpPr>
-        <p:spPr>
-          <a:xfrm>
-            <a:off x="889000" y="1168400"/>
-            <a:ext cx="10795000" cy="330200"/>
+          <p:cNvPr id="3" name="kicker"/>
+          <p:cNvSpPr/>
+          <p:nvPr/>
+        </p:nvSpPr>
+        <p:spPr>
+          <a:xfrm>
+            <a:off x="736600" y="342900"/>
+            <a:ext cx="11430000" cy="330200"/>
           </a:xfrm>
           <a:prstGeom prst="rect">
             <a:avLst/>
@@ -5630,29 +5822,29 @@
               <a:buNone/>
             </a:pPr>
             <a:r>
-              <a:rPr lang="en-US" altLang="en-US" sz="1700" dirty="0">
-                <a:solidFill>
-                  <a:srgbClr val="D1D5DB"/>
-                </a:solidFill>
-                <a:latin typeface="Inter" pitchFamily="34" charset="0"/>
-                <a:ea typeface="Inter" pitchFamily="34" charset="-122"/>
-                <a:cs typeface="Inter" pitchFamily="34" charset="-120"/>
-              </a:rPr>
-              <a:t>CLOSE THE WEEKLY EVIDENCE CYCLE  •  41:00–46:00  •  5 MIN</a:t>
-            </a:r>
-            <a:endParaRPr lang="en-US" sz="1700" dirty="0"/>
-          </a:p>
-        </p:txBody>
-      </p:sp>
-      <p:sp>
-        <p:nvSpPr>
-          <p:cNvPr id="4" name="close-title"/>
-          <p:cNvSpPr/>
-          <p:nvPr/>
-        </p:nvSpPr>
-        <p:spPr>
-          <a:xfrm>
-            <a:off x="889000" y="1917700"/>
+              <a:rPr lang="en-US" altLang="en-US" sz="1600" dirty="0">
+                <a:solidFill>
+                  <a:srgbClr val="F1F3F4"/>
+                </a:solidFill>
+                <a:latin typeface="Inter" pitchFamily="34" charset="0"/>
+                <a:ea typeface="Inter" pitchFamily="34" charset="-122"/>
+                <a:cs typeface="Inter" pitchFamily="34" charset="-120"/>
+              </a:rPr>
+              <a:t>CLOSE THE EVIDENCE CYCLE  •  41:00–46:00  •  5 MIN</a:t>
+            </a:r>
+            <a:endParaRPr lang="en-US" sz="1600" dirty="0"/>
+          </a:p>
+        </p:txBody>
+      </p:sp>
+      <p:sp>
+        <p:nvSpPr>
+          <p:cNvPr id="4" name="title"/>
+          <p:cNvSpPr/>
+          <p:nvPr/>
+        </p:nvSpPr>
+        <p:spPr>
+          <a:xfrm>
+            <a:off x="736600" y="1689100"/>
             <a:ext cx="13081000" cy="787400"/>
           </a:xfrm>
           <a:prstGeom prst="rect">
@@ -5669,17 +5861,17 @@
               <a:buNone/>
             </a:pPr>
             <a:r>
-              <a:rPr lang="en-US" altLang="en-US" sz="4400" dirty="0">
-                <a:solidFill>
-                  <a:srgbClr val="FFFFFF"/>
-                </a:solidFill>
-                <a:latin typeface="Inter" pitchFamily="34" charset="0"/>
-                <a:ea typeface="Inter" pitchFamily="34" charset="-122"/>
-                <a:cs typeface="Inter" pitchFamily="34" charset="-120"/>
-              </a:rPr>
-              <a:t>Set one next evidence check—and keep learning visible.</a:t>
-            </a:r>
-            <a:endParaRPr lang="en-US" sz="4400" dirty="0"/>
+              <a:rPr lang="en-US" altLang="en-US" sz="4300" dirty="0">
+                <a:solidFill>
+                  <a:srgbClr val="202124"/>
+                </a:solidFill>
+                <a:latin typeface="Inter" pitchFamily="34" charset="0"/>
+                <a:ea typeface="Inter" pitchFamily="34" charset="-122"/>
+                <a:cs typeface="Inter" pitchFamily="34" charset="-120"/>
+              </a:rPr>
+              <a:t>Keep learning visible: feedback, revision, and the next evidence check.</a:t>
+            </a:r>
+            <a:endParaRPr lang="en-US" sz="4300" dirty="0"/>
           </a:p>
         </p:txBody>
       </p:sp>
@@ -5691,18 +5883,18 @@
         </p:nvSpPr>
         <p:spPr>
           <a:xfrm>
-            <a:off x="889000" y="3302000"/>
-            <a:ext cx="13716000" cy="3581400"/>
+            <a:off x="736600" y="3136900"/>
+            <a:ext cx="14706600" cy="3505200"/>
           </a:xfrm>
           <a:prstGeom prst="rect">
             <a:avLst/>
           </a:prstGeom>
           <a:solidFill>
-            <a:srgbClr val="2D2E31"/>
+            <a:srgbClr val="F3F4F6"/>
           </a:solidFill>
           <a:ln w="12700">
             <a:solidFill>
-              <a:srgbClr val="72777D"/>
+              <a:srgbClr val="D1D5DB"/>
             </a:solidFill>
             <a:prstDash val="solid"/>
           </a:ln>
@@ -5716,18 +5908,18 @@
         </p:nvSpPr>
         <p:spPr>
           <a:xfrm>
-            <a:off x="1270000" y="3746500"/>
-            <a:ext cx="3810000" cy="2413000"/>
+            <a:off x="1092200" y="3543300"/>
+            <a:ext cx="4292600" cy="2324100"/>
           </a:xfrm>
           <a:prstGeom prst="rect">
             <a:avLst/>
           </a:prstGeom>
           <a:solidFill>
-            <a:srgbClr val="3A3B3D"/>
+            <a:srgbClr val="FCE8EA"/>
           </a:solidFill>
           <a:ln w="12700">
             <a:solidFill>
-              <a:srgbClr val="62666B"/>
+              <a:srgbClr val="C41220"/>
             </a:solidFill>
             <a:prstDash val="solid"/>
           </a:ln>
@@ -5741,18 +5933,18 @@
         </p:nvSpPr>
         <p:spPr>
           <a:xfrm>
-            <a:off x="6223000" y="3746500"/>
-            <a:ext cx="3810000" cy="2413000"/>
+            <a:off x="5981700" y="3543300"/>
+            <a:ext cx="4292600" cy="2324100"/>
           </a:xfrm>
           <a:prstGeom prst="rect">
             <a:avLst/>
           </a:prstGeom>
           <a:solidFill>
-            <a:srgbClr val="3A3B3D"/>
+            <a:srgbClr val="F8F9FA"/>
           </a:solidFill>
           <a:ln w="12700">
             <a:solidFill>
-              <a:srgbClr val="62666B"/>
+              <a:srgbClr val="D1D5DB"/>
             </a:solidFill>
             <a:prstDash val="solid"/>
           </a:ln>
@@ -5766,18 +5958,18 @@
         </p:nvSpPr>
         <p:spPr>
           <a:xfrm>
-            <a:off x="11176000" y="3746500"/>
-            <a:ext cx="3048000" cy="2413000"/>
+            <a:off x="10871200" y="3543300"/>
+            <a:ext cx="4216400" cy="2324100"/>
           </a:xfrm>
           <a:prstGeom prst="rect">
             <a:avLst/>
           </a:prstGeom>
           <a:solidFill>
-            <a:srgbClr val="3A3B3D"/>
+            <a:srgbClr val="F8F9FA"/>
           </a:solidFill>
           <a:ln w="12700">
             <a:solidFill>
-              <a:srgbClr val="62666B"/>
+              <a:srgbClr val="D1D5DB"/>
             </a:solidFill>
             <a:prstDash val="solid"/>
           </a:ln>
@@ -5791,8 +5983,8 @@
         </p:nvSpPr>
         <p:spPr>
           <a:xfrm>
-            <a:off x="1574800" y="4064000"/>
-            <a:ext cx="3200400" cy="1600200"/>
+            <a:off x="1346200" y="3835400"/>
+            <a:ext cx="3784600" cy="1714500"/>
           </a:xfrm>
           <a:prstGeom prst="rect">
             <a:avLst/>
@@ -5806,45 +5998,45 @@
           <a:p>
             <a:pPr algn="l" indent="0" marL="0">
               <a:lnSpc>
-                <a:spcPts val="2562"/>
+                <a:spcPts val="1680"/>
               </a:lnSpc>
               <a:buNone/>
             </a:pPr>
             <a:r>
-              <a:rPr lang="en-US" altLang="en-US" sz="2100" b="1" dirty="0">
-                <a:solidFill>
-                  <a:srgbClr val="F6B4BA"/>
-                </a:solidFill>
-                <a:latin typeface="Inter" pitchFamily="34" charset="0"/>
-                <a:ea typeface="Inter" pitchFamily="34" charset="-122"/>
-                <a:cs typeface="Inter" pitchFamily="34" charset="-120"/>
-              </a:rPr>
-              <a:t>COLLECT</a:t>
-            </a:r>
-            <a:endParaRPr lang="en-US" sz="2100" dirty="0"/>
+              <a:rPr lang="en-US" altLang="en-US" sz="1400" b="1" dirty="0">
+                <a:solidFill>
+                  <a:srgbClr val="C41220"/>
+                </a:solidFill>
+                <a:latin typeface="Inter" pitchFamily="34" charset="0"/>
+                <a:ea typeface="Inter" pitchFamily="34" charset="-122"/>
+                <a:cs typeface="Inter" pitchFamily="34" charset="-120"/>
+              </a:rPr>
+              <a:t>RETURN</a:t>
+            </a:r>
+            <a:endParaRPr lang="en-US" sz="2000" dirty="0"/>
           </a:p>
           <a:p>
             <a:pPr algn="l" indent="0" marL="0">
               <a:lnSpc>
-                <a:spcPts val="2562"/>
+                <a:spcPts val="2400"/>
               </a:lnSpc>
               <a:spcBef>
-                <a:spcPts val="1000"/>
+                <a:spcPts val="900"/>
               </a:spcBef>
               <a:buNone/>
             </a:pPr>
             <a:r>
-              <a:rPr lang="en-US" altLang="en-US" sz="2100" dirty="0">
-                <a:solidFill>
-                  <a:srgbClr val="FFFFFF"/>
-                </a:solidFill>
-                <a:latin typeface="Inter" pitchFamily="34" charset="0"/>
-                <a:ea typeface="Inter" pitchFamily="34" charset="-122"/>
-                <a:cs typeface="Inter" pitchFamily="34" charset="-120"/>
-              </a:rPr>
-              <a:t>A brief response, revision, explanation, model, or data analysis.</a:t>
-            </a:r>
-            <a:endParaRPr lang="en-US" sz="2100" dirty="0"/>
+              <a:rPr lang="en-US" altLang="en-US" sz="2000" b="1" dirty="0">
+                <a:solidFill>
+                  <a:srgbClr val="3C4043"/>
+                </a:solidFill>
+                <a:latin typeface="Inter" pitchFamily="34" charset="0"/>
+                <a:ea typeface="Inter" pitchFamily="34" charset="-122"/>
+                <a:cs typeface="Inter" pitchFamily="34" charset="-120"/>
+              </a:rPr>
+              <a:t>Give written feedback tied to one criterion and allow a meaningful revision action.</a:t>
+            </a:r>
+            <a:endParaRPr lang="en-US" sz="2000" dirty="0"/>
           </a:p>
         </p:txBody>
       </p:sp>
@@ -5856,8 +6048,8 @@
         </p:nvSpPr>
         <p:spPr>
           <a:xfrm>
-            <a:off x="6527800" y="4064000"/>
-            <a:ext cx="3200400" cy="1600200"/>
+            <a:off x="6235700" y="3835400"/>
+            <a:ext cx="3784600" cy="1714500"/>
           </a:xfrm>
           <a:prstGeom prst="rect">
             <a:avLst/>
@@ -5871,14 +6063,14 @@
           <a:p>
             <a:pPr algn="l" indent="0" marL="0">
               <a:lnSpc>
-                <a:spcPts val="2562"/>
+                <a:spcPts val="1680"/>
               </a:lnSpc>
               <a:buNone/>
             </a:pPr>
             <a:r>
-              <a:rPr lang="en-US" altLang="en-US" sz="2100" b="1" dirty="0">
-                <a:solidFill>
-                  <a:srgbClr val="F6B4BA"/>
+              <a:rPr lang="en-US" altLang="en-US" sz="1400" b="1" dirty="0">
+                <a:solidFill>
+                  <a:srgbClr val="C41220"/>
                 </a:solidFill>
                 <a:latin typeface="Inter" pitchFamily="34" charset="0"/>
                 <a:ea typeface="Inter" pitchFamily="34" charset="-122"/>
@@ -5886,30 +6078,30 @@
               </a:rPr>
               <a:t>LOOK FOR</a:t>
             </a:r>
-            <a:endParaRPr lang="en-US" sz="2100" dirty="0"/>
+            <a:endParaRPr lang="en-US" sz="2000" dirty="0"/>
           </a:p>
           <a:p>
             <a:pPr algn="l" indent="0" marL="0">
               <a:lnSpc>
-                <a:spcPts val="2562"/>
+                <a:spcPts val="2400"/>
               </a:lnSpc>
               <a:spcBef>
-                <a:spcPts val="1000"/>
+                <a:spcPts val="900"/>
               </a:spcBef>
               <a:buNone/>
             </a:pPr>
             <a:r>
-              <a:rPr lang="en-US" altLang="en-US" sz="2100" dirty="0">
-                <a:solidFill>
-                  <a:srgbClr val="FFFFFF"/>
-                </a:solidFill>
-                <a:latin typeface="Inter" pitchFamily="34" charset="0"/>
-                <a:ea typeface="Inter" pitchFamily="34" charset="-122"/>
-                <a:cs typeface="Inter" pitchFamily="34" charset="-120"/>
-              </a:rPr>
-              <a:t>Evidence that students strengthened the selected criterion while doing the science thinking.</a:t>
-            </a:r>
-            <a:endParaRPr lang="en-US" sz="2100" dirty="0"/>
+              <a:rPr lang="en-US" altLang="en-US" sz="2000" b="1" dirty="0">
+                <a:solidFill>
+                  <a:srgbClr val="3C4043"/>
+                </a:solidFill>
+                <a:latin typeface="Inter" pitchFamily="34" charset="0"/>
+                <a:ea typeface="Inter" pitchFamily="34" charset="-122"/>
+                <a:cs typeface="Inter" pitchFamily="34" charset="-120"/>
+              </a:rPr>
+              <a:t>Evidence that students strengthened the claim, evidence use, reasoning, or science language.</a:t>
+            </a:r>
+            <a:endParaRPr lang="en-US" sz="2000" dirty="0"/>
           </a:p>
         </p:txBody>
       </p:sp>
@@ -5921,8 +6113,8 @@
         </p:nvSpPr>
         <p:spPr>
           <a:xfrm>
-            <a:off x="11480800" y="4064000"/>
-            <a:ext cx="2438400" cy="1600200"/>
+            <a:off x="11125200" y="3835400"/>
+            <a:ext cx="3708400" cy="1714500"/>
           </a:xfrm>
           <a:prstGeom prst="rect">
             <a:avLst/>
@@ -5936,14 +6128,14 @@
           <a:p>
             <a:pPr algn="l" indent="0" marL="0">
               <a:lnSpc>
-                <a:spcPts val="2562"/>
+                <a:spcPts val="1680"/>
               </a:lnSpc>
               <a:buNone/>
             </a:pPr>
             <a:r>
-              <a:rPr lang="en-US" altLang="en-US" sz="2100" b="1" dirty="0">
-                <a:solidFill>
-                  <a:srgbClr val="F6B4BA"/>
+              <a:rPr lang="en-US" altLang="en-US" sz="1400" b="1" dirty="0">
+                <a:solidFill>
+                  <a:srgbClr val="C41220"/>
                 </a:solidFill>
                 <a:latin typeface="Inter" pitchFamily="34" charset="0"/>
                 <a:ea typeface="Inter" pitchFamily="34" charset="-122"/>
@@ -5951,30 +6143,30 @@
               </a:rPr>
               <a:t>REVISIT</a:t>
             </a:r>
-            <a:endParaRPr lang="en-US" sz="2100" dirty="0"/>
+            <a:endParaRPr lang="en-US" sz="2000" dirty="0"/>
           </a:p>
           <a:p>
             <a:pPr algn="l" indent="0" marL="0">
               <a:lnSpc>
-                <a:spcPts val="2562"/>
+                <a:spcPts val="2400"/>
               </a:lnSpc>
               <a:spcBef>
-                <a:spcPts val="1000"/>
+                <a:spcPts val="900"/>
               </a:spcBef>
               <a:buNone/>
             </a:pPr>
             <a:r>
-              <a:rPr lang="en-US" altLang="en-US" sz="2100" dirty="0">
-                <a:solidFill>
-                  <a:srgbClr val="FFFFFF"/>
-                </a:solidFill>
-                <a:latin typeface="Inter" pitchFamily="34" charset="0"/>
-                <a:ea typeface="Inter" pitchFamily="34" charset="-122"/>
-                <a:cs typeface="Inter" pitchFamily="34" charset="-120"/>
-              </a:rPr>
-              <a:t>A practical course-alike moment for the next decision.</a:t>
-            </a:r>
-            <a:endParaRPr lang="en-US" sz="2100" dirty="0"/>
+              <a:rPr lang="en-US" altLang="en-US" sz="2000" b="1" dirty="0">
+                <a:solidFill>
+                  <a:srgbClr val="3C4043"/>
+                </a:solidFill>
+                <a:latin typeface="Inter" pitchFamily="34" charset="0"/>
+                <a:ea typeface="Inter" pitchFamily="34" charset="-122"/>
+                <a:cs typeface="Inter" pitchFamily="34" charset="-120"/>
+              </a:rPr>
+              <a:t>Use the new evidence to decide the next narrow learning step for standard mastery.</a:t>
+            </a:r>
+            <a:endParaRPr lang="en-US" sz="2000" dirty="0"/>
           </a:p>
         </p:txBody>
       </p:sp>
@@ -5986,8 +6178,8 @@
         </p:nvSpPr>
         <p:spPr>
           <a:xfrm>
-            <a:off x="889000" y="7429500"/>
-            <a:ext cx="13208000" cy="533400"/>
+            <a:off x="736600" y="7289800"/>
+            <a:ext cx="14198600" cy="457200"/>
           </a:xfrm>
           <a:prstGeom prst="rect">
             <a:avLst/>
@@ -5999,21 +6191,32 @@
           <a:bodyPr wrap="square" lIns="0" tIns="0" rIns="0" bIns="0" rtlCol="0" anchor="t"/>
           <a:lstStyle/>
           <a:p>
-            <a:pPr algn="l" indent="0" marL="0">
-              <a:buNone/>
-            </a:pPr>
-            <a:r>
-              <a:rPr lang="en-US" altLang="en-US" sz="2300" dirty="0">
-                <a:solidFill>
-                  <a:srgbClr val="F1F3F4"/>
-                </a:solidFill>
-                <a:latin typeface="Inter" pitchFamily="34" charset="0"/>
-                <a:ea typeface="Inter" pitchFamily="34" charset="-122"/>
-                <a:cs typeface="Inter" pitchFamily="34" charset="-120"/>
-              </a:rPr>
-              <a:t>Close the cycle: benchmark → anticipated thinking → feedback/action → calibration → evidence → next learning experience.</a:t>
-            </a:r>
-            <a:endParaRPr lang="en-US" sz="2300" dirty="0"/>
+            <a:pPr algn="ctr" indent="0" marL="0">
+              <a:buNone/>
+            </a:pPr>
+            <a:r>
+              <a:rPr lang="en-US" altLang="en-US" sz="2200" b="1" dirty="0">
+                <a:solidFill>
+                  <a:srgbClr val="C41220"/>
+                </a:solidFill>
+                <a:latin typeface="Inter" pitchFamily="34" charset="0"/>
+                <a:ea typeface="Inter" pitchFamily="34" charset="-122"/>
+                <a:cs typeface="Inter" pitchFamily="34" charset="-120"/>
+              </a:rPr>
+              <a:t>Close the week:</a:t>
+            </a:r>
+            <a:r>
+              <a:rPr lang="en-US" altLang="en-US" sz="2200" dirty="0">
+                <a:solidFill>
+                  <a:srgbClr val="3C4043"/>
+                </a:solidFill>
+                <a:latin typeface="Inter" pitchFamily="34" charset="0"/>
+                <a:ea typeface="Inter" pitchFamily="34" charset="-122"/>
+                <a:cs typeface="Inter" pitchFamily="34" charset="-120"/>
+              </a:rPr>
+              <a:t> experience the task → plan instruction → teach CUBS/CER → read writing → feedback + revision → next mastery move.</a:t>
+            </a:r>
+            <a:endParaRPr lang="en-US" sz="2200" dirty="0"/>
           </a:p>
         </p:txBody>
       </p:sp>
@@ -6025,8 +6228,8 @@
         </p:nvSpPr>
         <p:spPr>
           <a:xfrm>
-            <a:off x="14478000" y="8407400"/>
-            <a:ext cx="762000" cy="228600"/>
+            <a:off x="14732000" y="8432800"/>
+            <a:ext cx="736600" cy="228600"/>
           </a:xfrm>
           <a:prstGeom prst="rect">
             <a:avLst/>
@@ -6044,7 +6247,7 @@
             <a:r>
               <a:rPr lang="en-US" altLang="en-US" sz="1300" dirty="0">
                 <a:solidFill>
-                  <a:srgbClr val="D1D5DB"/>
+                  <a:srgbClr val="6B7280"/>
                 </a:solidFill>
                 <a:latin typeface="Inter" pitchFamily="34" charset="0"/>
                 <a:ea typeface="Inter" pitchFamily="34" charset="-122"/>

--- a/assets/plc/2026-10-30_Lesson_Internalization_Use_Student_Work_to_Adjust_Next_Learning_Experience.pptx
+++ b/assets/plc/2026-10-30_Lesson_Internalization_Use_Student_Work_to_Adjust_Next_Learning_Experience.pptx
@@ -1464,7 +1464,7 @@
         <p:spPr>
           <a:xfrm>
             <a:off x="736600" y="381000"/>
-            <a:ext cx="11430000" cy="279400"/>
+            <a:ext cx="12700000" cy="304800"/>
           </a:xfrm>
           <a:prstGeom prst="rect">
             <a:avLst/>
@@ -1502,29 +1502,27 @@
         </p:nvSpPr>
         <p:spPr>
           <a:xfrm>
-            <a:off x="736600" y="1917700"/>
-            <a:ext cx="11811000" cy="1473200"/>
-          </a:xfrm>
-          <a:prstGeom prst="rect">
-            <a:avLst/>
-          </a:prstGeom>
-          <a:noFill/>
-          <a:ln/>
-        </p:spPr>
-        <p:txBody>
-          <a:bodyPr wrap="square" lIns="0" tIns="0" rIns="0" bIns="0" rtlCol="0" anchor="t">
-            <a:normAutofit/>
-          </a:bodyPr>
+            <a:off x="736600" y="1854200"/>
+            <a:ext cx="11176000" cy="1574800"/>
+          </a:xfrm>
+          <a:prstGeom prst="rect">
+            <a:avLst/>
+          </a:prstGeom>
+          <a:noFill/>
+          <a:ln/>
+        </p:spPr>
+        <p:txBody>
+          <a:bodyPr wrap="square" lIns="0" tIns="0" rIns="0" bIns="0" rtlCol="0" anchor="t"/>
           <a:lstStyle/>
           <a:p>
             <a:pPr algn="l" indent="0" marL="0">
               <a:lnSpc>
-                <a:spcPts val="4644"/>
+                <a:spcPts val="4620"/>
               </a:lnSpc>
               <a:buNone/>
             </a:pPr>
             <a:r>
-              <a:rPr lang="en-US" altLang="en-US" sz="4300" dirty="0">
+              <a:rPr lang="en-US" altLang="en-US" sz="4200" dirty="0">
                 <a:solidFill>
                   <a:srgbClr val="202124"/>
                 </a:solidFill>
@@ -1532,19 +1530,19 @@
                 <a:ea typeface="Inter" pitchFamily="34" charset="-122"/>
                 <a:cs typeface="Inter" pitchFamily="34" charset="-120"/>
               </a:rPr>
-              <a:t>Completed Writing → Written Feedback</a:t>
-            </a:r>
-            <a:endParaRPr lang="en-US" sz="4300" dirty="0"/>
+              <a:t>Read Student Writing →</a:t>
+            </a:r>
+            <a:endParaRPr lang="en-US" sz="4200" dirty="0"/>
           </a:p>
           <a:p>
             <a:pPr algn="l" indent="0" marL="0">
               <a:lnSpc>
-                <a:spcPts val="4644"/>
+                <a:spcPts val="4620"/>
               </a:lnSpc>
               <a:buNone/>
             </a:pPr>
             <a:r>
-              <a:rPr lang="en-US" altLang="en-US" sz="4300" dirty="0">
+              <a:rPr lang="en-US" altLang="en-US" sz="4200" dirty="0">
                 <a:solidFill>
                   <a:srgbClr val="202124"/>
                 </a:solidFill>
@@ -1552,9 +1550,9 @@
                 <a:ea typeface="Inter" pitchFamily="34" charset="-122"/>
                 <a:cs typeface="Inter" pitchFamily="34" charset="-120"/>
               </a:rPr>
-              <a:t>→ Next Steps for Standard Mastery</a:t>
-            </a:r>
-            <a:endParaRPr lang="en-US" sz="4300" dirty="0"/>
+              <a:t>Give Feedback → Plan the Next Step</a:t>
+            </a:r>
+            <a:endParaRPr lang="en-US" sz="4200" dirty="0"/>
           </a:p>
         </p:txBody>
       </p:sp>
@@ -1566,8 +1564,8 @@
         </p:nvSpPr>
         <p:spPr>
           <a:xfrm>
-            <a:off x="736600" y="3797300"/>
-            <a:ext cx="10820400" cy="1092200"/>
+            <a:off x="736600" y="3759200"/>
+            <a:ext cx="10795000" cy="1219200"/>
           </a:xfrm>
           <a:prstGeom prst="rect">
             <a:avLst/>
@@ -1581,12 +1579,12 @@
           <a:p>
             <a:pPr algn="l" indent="0" marL="0">
               <a:lnSpc>
-                <a:spcPts val="3050"/>
+                <a:spcPts val="3000"/>
               </a:lnSpc>
               <a:buNone/>
             </a:pPr>
             <a:r>
-              <a:rPr lang="en-US" altLang="en-US" sz="2500" dirty="0">
+              <a:rPr lang="en-US" altLang="en-US" sz="2400" dirty="0">
                 <a:solidFill>
                   <a:srgbClr val="3C4043"/>
                 </a:solidFill>
@@ -1594,9 +1592,9 @@
                 <a:ea typeface="Inter" pitchFamily="34" charset="-122"/>
                 <a:cs typeface="Inter" pitchFamily="34" charset="-120"/>
               </a:rPr>
-              <a:t>Analyze completed student writing from the benchmark, identify evidence against the mastery bar, provide revision-oriented written feedback, and plan a precise next learning step.</a:t>
-            </a:r>
-            <a:endParaRPr lang="en-US" sz="2500" dirty="0"/>
+              <a:t>Today teachers read completed student writing against the mastery bar, write one comment students can act on, and plan one short next step toward the standard.</a:t>
+            </a:r>
+            <a:endParaRPr lang="en-US" sz="2400" dirty="0"/>
           </a:p>
         </p:txBody>
       </p:sp>
@@ -1608,8 +1606,8 @@
         </p:nvSpPr>
         <p:spPr>
           <a:xfrm>
-            <a:off x="12242800" y="2057400"/>
-            <a:ext cx="3200400" cy="2984500"/>
+            <a:off x="12242800" y="1905000"/>
+            <a:ext cx="3200400" cy="3073400"/>
           </a:xfrm>
           <a:prstGeom prst="rect">
             <a:avLst/>
@@ -1633,8 +1631,8 @@
         </p:nvSpPr>
         <p:spPr>
           <a:xfrm>
-            <a:off x="12573000" y="2438400"/>
-            <a:ext cx="2540000" cy="254000"/>
+            <a:off x="12547600" y="2260600"/>
+            <a:ext cx="2590800" cy="254000"/>
           </a:xfrm>
           <a:prstGeom prst="rect">
             <a:avLst/>
@@ -1658,7 +1656,7 @@
                 <a:ea typeface="Inter" pitchFamily="34" charset="-122"/>
                 <a:cs typeface="Inter" pitchFamily="34" charset="-120"/>
               </a:rPr>
-              <a:t>FOCUS TO PROTECT</a:t>
+              <a:t>TODAY'S PURPOSE</a:t>
             </a:r>
             <a:endParaRPr lang="en-US" sz="1400" dirty="0"/>
           </a:p>
@@ -1672,8 +1670,8 @@
         </p:nvSpPr>
         <p:spPr>
           <a:xfrm>
-            <a:off x="12547600" y="3035300"/>
-            <a:ext cx="2590800" cy="1358900"/>
+            <a:off x="12547600" y="2895600"/>
+            <a:ext cx="2590800" cy="1778000"/>
           </a:xfrm>
           <a:prstGeom prst="rect">
             <a:avLst/>
@@ -1687,7 +1685,7 @@
           <a:p>
             <a:pPr algn="ctr" indent="0" marL="0">
               <a:lnSpc>
-                <a:spcPts val="2400"/>
+                <a:spcPts val="2440"/>
               </a:lnSpc>
               <a:buNone/>
             </a:pPr>
@@ -1700,7 +1698,7 @@
                 <a:ea typeface="Inter" pitchFamily="34" charset="-122"/>
                 <a:cs typeface="Inter" pitchFamily="34" charset="-120"/>
               </a:rPr>
-              <a:t>Read the work for learning. Do not rank students, teachers, classes, or courses.</a:t>
+              <a:t>Use student work to decide the next step. Describe the work, not the student.</a:t>
             </a:r>
             <a:endParaRPr lang="en-US" sz="2000" dirty="0"/>
           </a:p>
@@ -1714,8 +1712,8 @@
         </p:nvSpPr>
         <p:spPr>
           <a:xfrm>
-            <a:off x="736600" y="5842000"/>
-            <a:ext cx="14706600" cy="1422400"/>
+            <a:off x="736600" y="5740400"/>
+            <a:ext cx="14706600" cy="1625600"/>
           </a:xfrm>
           <a:prstGeom prst="rect">
             <a:avLst/>
@@ -1733,14 +1731,14 @@
       </p:sp>
       <p:sp>
         <p:nvSpPr>
-          <p:cNvPr id="11" name="anchor"/>
-          <p:cNvSpPr/>
-          <p:nvPr/>
-        </p:nvSpPr>
-        <p:spPr>
-          <a:xfrm>
-            <a:off x="1117600" y="6172200"/>
-            <a:ext cx="13919200" cy="787400"/>
+          <p:cNvPr id="11" name="bring"/>
+          <p:cNvSpPr/>
+          <p:nvPr/>
+        </p:nvSpPr>
+        <p:spPr>
+          <a:xfrm>
+            <a:off x="1117600" y="6019800"/>
+            <a:ext cx="13970000" cy="1117600"/>
           </a:xfrm>
           <a:prstGeom prst="rect">
             <a:avLst/>
@@ -1754,7 +1752,7 @@
           <a:p>
             <a:pPr algn="l" indent="0" marL="0">
               <a:lnSpc>
-                <a:spcPts val="2684"/>
+                <a:spcPts val="2728"/>
               </a:lnSpc>
               <a:buNone/>
             </a:pPr>
@@ -1767,7 +1765,7 @@
                 <a:ea typeface="Inter" pitchFamily="34" charset="-122"/>
                 <a:cs typeface="Inter" pitchFamily="34" charset="-120"/>
               </a:rPr>
-              <a:t>Shared model:</a:t>
+              <a:t>Bring:</a:t>
             </a:r>
             <a:r>
               <a:rPr lang="en-US" altLang="en-US" sz="2200" dirty="0">
@@ -1778,10 +1776,44 @@
                 <a:ea typeface="Inter" pitchFamily="34" charset="-122"/>
                 <a:cs typeface="Inter" pitchFamily="34" charset="-120"/>
               </a:rPr>
-              <a:t> use completed Biology Benchmark #1 writing to examine claim, evidence, reasoning, source use, and scientific explanation; each course team uses its own comparable response.</a:t>
+              <a:t> 3–5 de-identified completed writing samples, the task and source, the standard, and your current feedback or revision notes.</a:t>
             </a:r>
             <a:endParaRPr lang="en-US" sz="2200" dirty="0"/>
           </a:p>
+          <a:p>
+            <a:pPr algn="l" indent="0" marL="0">
+              <a:lnSpc>
+                <a:spcPts val="2728"/>
+              </a:lnSpc>
+              <a:spcBef>
+                <a:spcPts val="800"/>
+              </a:spcBef>
+              <a:buNone/>
+            </a:pPr>
+            <a:r>
+              <a:rPr lang="en-US" altLang="en-US" sz="2200" b="1" dirty="0">
+                <a:solidFill>
+                  <a:srgbClr val="C41220"/>
+                </a:solidFill>
+                <a:latin typeface="Inter" pitchFamily="34" charset="0"/>
+                <a:ea typeface="Inter" pitchFamily="34" charset="-122"/>
+                <a:cs typeface="Inter" pitchFamily="34" charset="-120"/>
+              </a:rPr>
+              <a:t>Bring for every course:</a:t>
+            </a:r>
+            <a:r>
+              <a:rPr lang="en-US" altLang="en-US" sz="2200" dirty="0">
+                <a:solidFill>
+                  <a:srgbClr val="3C4043"/>
+                </a:solidFill>
+                <a:latin typeface="Inter" pitchFamily="34" charset="0"/>
+                <a:ea typeface="Inter" pitchFamily="34" charset="-122"/>
+                <a:cs typeface="Inter" pitchFamily="34" charset="-120"/>
+              </a:rPr>
+              <a:t> any comparable written response from your own science course.</a:t>
+            </a:r>
+            <a:endParaRPr lang="en-US" sz="2200" dirty="0"/>
+          </a:p>
         </p:txBody>
       </p:sp>
       <p:sp>
@@ -1792,8 +1824,8 @@
         </p:nvSpPr>
         <p:spPr>
           <a:xfrm>
-            <a:off x="736600" y="7975600"/>
-            <a:ext cx="12827000" cy="431800"/>
+            <a:off x="736600" y="7772400"/>
+            <a:ext cx="13970000" cy="508000"/>
           </a:xfrm>
           <a:prstGeom prst="rect">
             <a:avLst/>
@@ -1809,7 +1841,7 @@
               <a:buNone/>
             </a:pPr>
             <a:r>
-              <a:rPr lang="en-US" altLang="en-US" sz="2100" b="1" dirty="0">
+              <a:rPr lang="en-US" altLang="en-US" sz="2000" b="1" dirty="0">
                 <a:solidFill>
                   <a:srgbClr val="C41220"/>
                 </a:solidFill>
@@ -1820,7 +1852,7 @@
               <a:t>Lesson Internalization Tool:</a:t>
             </a:r>
             <a:r>
-              <a:rPr lang="en-US" altLang="en-US" sz="2100" dirty="0">
+              <a:rPr lang="en-US" altLang="en-US" sz="2000" dirty="0">
                 <a:solidFill>
                   <a:srgbClr val="3C4043"/>
                 </a:solidFill>
@@ -1828,9 +1860,9 @@
                 <a:ea typeface="Inter" pitchFamily="34" charset="-122"/>
                 <a:cs typeface="Inter" pitchFamily="34" charset="-120"/>
               </a:rPr>
-              <a:t> Every Day Questions 1, 3, and 4; Team Deep Dive Steps 3–5; After-Lesson Reflection.</a:t>
-            </a:r>
-            <a:endParaRPr lang="en-US" sz="2100" dirty="0"/>
+              <a:t> Every Day Questions 1, 3, and 4  •  Team Deep Dive Steps 3–5  •  After-Lesson Reflection.</a:t>
+            </a:r>
+            <a:endParaRPr lang="en-US" sz="2000" dirty="0"/>
           </a:p>
         </p:txBody>
       </p:sp>
@@ -1978,7 +2010,7 @@
                 <a:ea typeface="Inter" pitchFamily="34" charset="-122"/>
                 <a:cs typeface="Inter" pitchFamily="34" charset="-120"/>
               </a:rPr>
-              <a:t>Return to the Evidence Students Produced</a:t>
+              <a:t>Today's Four Steps</a:t>
             </a:r>
             <a:endParaRPr lang="en-US" sz="3000" dirty="0"/>
           </a:p>
@@ -1992,8 +2024,8 @@
         </p:nvSpPr>
         <p:spPr>
           <a:xfrm>
-            <a:off x="13081000" y="355600"/>
-            <a:ext cx="2667000" cy="304800"/>
+            <a:off x="12827000" y="355600"/>
+            <a:ext cx="2921000" cy="304800"/>
           </a:xfrm>
           <a:prstGeom prst="rect">
             <a:avLst/>
@@ -2017,7 +2049,7 @@
                 <a:ea typeface="Inter" pitchFamily="34" charset="-122"/>
                 <a:cs typeface="Inter" pitchFamily="34" charset="-120"/>
               </a:rPr>
-              <a:t>0:00–4:00  •  4 MIN</a:t>
+              <a:t>0:00–46:00  •  46 MIN</a:t>
             </a:r>
             <a:endParaRPr lang="en-US" sz="1600" dirty="0"/>
           </a:p>
@@ -2031,8 +2063,8 @@
         </p:nvSpPr>
         <p:spPr>
           <a:xfrm>
-            <a:off x="508000" y="1397000"/>
-            <a:ext cx="14351000" cy="609600"/>
+            <a:off x="508000" y="1346200"/>
+            <a:ext cx="15240000" cy="660400"/>
           </a:xfrm>
           <a:prstGeom prst="rect">
             <a:avLst/>
@@ -2056,7 +2088,7 @@
                 <a:ea typeface="Inter" pitchFamily="34" charset="-122"/>
                 <a:cs typeface="Inter" pitchFamily="34" charset="-120"/>
               </a:rPr>
-              <a:t>Friday closes the planning-to-evidence cycle by reading completed student writing and using it to strengthen the next standard-aligned learning experience.</a:t>
+              <a:t>Each step produces one product. Follow the steps in order and keep the same student writing in front of you the whole time.</a:t>
             </a:r>
             <a:endParaRPr lang="en-US" sz="2300" dirty="0"/>
           </a:p>
@@ -2070,8 +2102,8 @@
         </p:nvSpPr>
         <p:spPr>
           <a:xfrm>
-            <a:off x="508000" y="2768600"/>
-            <a:ext cx="2286000" cy="3111500"/>
+            <a:off x="508000" y="2362200"/>
+            <a:ext cx="3505200" cy="4191000"/>
           </a:xfrm>
           <a:prstGeom prst="rect">
             <a:avLst/>
@@ -2089,14 +2121,53 @@
       </p:sp>
       <p:sp>
         <p:nvSpPr>
-          <p:cNvPr id="7" name="block1"/>
-          <p:cNvSpPr/>
-          <p:nvPr/>
-        </p:nvSpPr>
-        <p:spPr>
-          <a:xfrm>
-            <a:off x="736600" y="3098800"/>
-            <a:ext cx="1828800" cy="2133600"/>
+          <p:cNvPr id="7" name="s1-label"/>
+          <p:cNvSpPr/>
+          <p:nvPr/>
+        </p:nvSpPr>
+        <p:spPr>
+          <a:xfrm>
+            <a:off x="762000" y="2667000"/>
+            <a:ext cx="2997200" cy="254000"/>
+          </a:xfrm>
+          <a:prstGeom prst="rect">
+            <a:avLst/>
+          </a:prstGeom>
+          <a:noFill/>
+          <a:ln/>
+        </p:spPr>
+        <p:txBody>
+          <a:bodyPr wrap="square" lIns="0" tIns="0" rIns="0" bIns="0" rtlCol="0" anchor="t"/>
+          <a:lstStyle/>
+          <a:p>
+            <a:pPr algn="l" indent="0" marL="0">
+              <a:buNone/>
+            </a:pPr>
+            <a:r>
+              <a:rPr lang="en-US" altLang="en-US" sz="1500" dirty="0">
+                <a:solidFill>
+                  <a:srgbClr val="C41220"/>
+                </a:solidFill>
+                <a:latin typeface="Inter" pitchFamily="34" charset="0"/>
+                <a:ea typeface="Inter" pitchFamily="34" charset="-122"/>
+                <a:cs typeface="Inter" pitchFamily="34" charset="-120"/>
+              </a:rPr>
+              <a:t>STEP 1  •  4:00–10:00</a:t>
+            </a:r>
+            <a:endParaRPr lang="en-US" sz="1500" dirty="0"/>
+          </a:p>
+        </p:txBody>
+      </p:sp>
+      <p:sp>
+        <p:nvSpPr>
+          <p:cNvPr id="8" name="s1-title"/>
+          <p:cNvSpPr/>
+          <p:nvPr/>
+        </p:nvSpPr>
+        <p:spPr>
+          <a:xfrm>
+            <a:off x="762000" y="3073400"/>
+            <a:ext cx="2997200" cy="889000"/>
           </a:xfrm>
           <a:prstGeom prst="rect">
             <a:avLst/>
@@ -2110,35 +2181,54 @@
           <a:p>
             <a:pPr algn="l" indent="0" marL="0">
               <a:lnSpc>
-                <a:spcPts val="1652"/>
+                <a:spcPts val="2800"/>
               </a:lnSpc>
               <a:buNone/>
             </a:pPr>
             <a:r>
-              <a:rPr lang="en-US" altLang="en-US" sz="1400" b="1" dirty="0">
-                <a:solidFill>
-                  <a:srgbClr val="C41220"/>
-                </a:solidFill>
-                <a:latin typeface="Inter" pitchFamily="34" charset="0"/>
-                <a:ea typeface="Inter" pitchFamily="34" charset="-122"/>
-                <a:cs typeface="Inter" pitchFamily="34" charset="-120"/>
-              </a:rPr>
-              <a:t>MONDAY</a:t>
-            </a:r>
-            <a:endParaRPr lang="en-US" sz="1800" dirty="0"/>
-          </a:p>
+              <a:rPr lang="en-US" altLang="en-US" sz="2500" dirty="0">
+                <a:solidFill>
+                  <a:srgbClr val="202124"/>
+                </a:solidFill>
+                <a:latin typeface="Inter" pitchFamily="34" charset="0"/>
+                <a:ea typeface="Inter" pitchFamily="34" charset="-122"/>
+                <a:cs typeface="Inter" pitchFamily="34" charset="-120"/>
+              </a:rPr>
+              <a:t>Set the bar for mastery</a:t>
+            </a:r>
+            <a:endParaRPr lang="en-US" sz="2500" dirty="0"/>
+          </a:p>
+        </p:txBody>
+      </p:sp>
+      <p:sp>
+        <p:nvSpPr>
+          <p:cNvPr id="9" name="s1-body"/>
+          <p:cNvSpPr/>
+          <p:nvPr/>
+        </p:nvSpPr>
+        <p:spPr>
+          <a:xfrm>
+            <a:off x="762000" y="4191000"/>
+            <a:ext cx="2997200" cy="2032000"/>
+          </a:xfrm>
+          <a:prstGeom prst="rect">
+            <a:avLst/>
+          </a:prstGeom>
+          <a:noFill/>
+          <a:ln/>
+        </p:spPr>
+        <p:txBody>
+          <a:bodyPr wrap="square" lIns="0" tIns="0" rIns="0" bIns="0" rtlCol="0" anchor="t"/>
+          <a:lstStyle/>
           <a:p>
             <a:pPr algn="l" indent="0" marL="0">
               <a:lnSpc>
-                <a:spcPts val="2596"/>
+                <a:spcPts val="2394"/>
               </a:lnSpc>
-              <a:spcBef>
-                <a:spcPts val="1200"/>
-              </a:spcBef>
-              <a:buNone/>
-            </a:pPr>
-            <a:r>
-              <a:rPr lang="en-US" altLang="en-US" sz="2200" b="1" dirty="0">
+              <a:buNone/>
+            </a:pPr>
+            <a:r>
+              <a:rPr lang="en-US" altLang="en-US" sz="1900" dirty="0">
                 <a:solidFill>
                   <a:srgbClr val="3C4043"/>
                 </a:solidFill>
@@ -2146,84 +2236,22 @@
                 <a:ea typeface="Inter" pitchFamily="34" charset="-122"/>
                 <a:cs typeface="Inter" pitchFamily="34" charset="-120"/>
               </a:rPr>
-              <a:t>Experience + analyze</a:t>
-            </a:r>
-            <a:endParaRPr lang="en-US" sz="1800" dirty="0"/>
-          </a:p>
-          <a:p>
-            <a:pPr algn="l" indent="0" marL="0">
-              <a:lnSpc>
-                <a:spcPts val="2124"/>
-              </a:lnSpc>
-              <a:spcBef>
-                <a:spcPts val="1000"/>
-              </a:spcBef>
-              <a:buNone/>
-            </a:pPr>
-            <a:r>
-              <a:rPr lang="en-US" altLang="en-US" sz="1800" dirty="0">
-                <a:solidFill>
-                  <a:srgbClr val="3C4043"/>
-                </a:solidFill>
-                <a:latin typeface="Inter" pitchFamily="34" charset="0"/>
-                <a:ea typeface="Inter" pitchFamily="34" charset="-122"/>
-                <a:cs typeface="Inter" pitchFamily="34" charset="-120"/>
-              </a:rPr>
-              <a:t>Teachers completed the task, CUBS analysis, and color-coded CER.</a:t>
-            </a:r>
-            <a:endParaRPr lang="en-US" sz="1800" dirty="0"/>
-          </a:p>
-        </p:txBody>
-      </p:sp>
-      <p:sp>
-        <p:nvSpPr>
-          <p:cNvPr id="8" name="arrow1"/>
-          <p:cNvSpPr/>
-          <p:nvPr/>
-        </p:nvSpPr>
-        <p:spPr>
-          <a:xfrm>
-            <a:off x="2870200" y="4038600"/>
-            <a:ext cx="457200" cy="533400"/>
-          </a:xfrm>
-          <a:prstGeom prst="rect">
-            <a:avLst/>
-          </a:prstGeom>
-          <a:noFill/>
-          <a:ln/>
-        </p:spPr>
-        <p:txBody>
-          <a:bodyPr wrap="square" lIns="0" tIns="0" rIns="0" bIns="0" rtlCol="0" anchor="t"/>
-          <a:lstStyle/>
-          <a:p>
-            <a:pPr algn="ctr" indent="0" marL="0">
-              <a:buNone/>
-            </a:pPr>
-            <a:r>
-              <a:rPr lang="en-US" altLang="en-US" sz="3200" dirty="0">
-                <a:solidFill>
-                  <a:srgbClr val="C41220"/>
-                </a:solidFill>
-                <a:latin typeface="Inter" pitchFamily="34" charset="0"/>
-                <a:ea typeface="Inter" pitchFamily="34" charset="-122"/>
-                <a:cs typeface="Inter" pitchFamily="34" charset="-120"/>
-              </a:rPr>
-              <a:t>→</a:t>
-            </a:r>
-            <a:endParaRPr lang="en-US" sz="3200" dirty="0"/>
-          </a:p>
-        </p:txBody>
-      </p:sp>
-      <p:sp>
-        <p:nvSpPr>
-          <p:cNvPr id="9" name="cycle-shape-8"/>
-          <p:cNvSpPr/>
-          <p:nvPr/>
-        </p:nvSpPr>
-        <p:spPr>
-          <a:xfrm>
-            <a:off x="3403600" y="2768600"/>
-            <a:ext cx="2286000" cy="3111500"/>
+              <a:t>Agree on what a strong response must include: claim, evidence, reasoning, and science language.</a:t>
+            </a:r>
+            <a:endParaRPr lang="en-US" sz="1900" dirty="0"/>
+          </a:p>
+        </p:txBody>
+      </p:sp>
+      <p:sp>
+        <p:nvSpPr>
+          <p:cNvPr id="10" name="cycle-shape-9"/>
+          <p:cNvSpPr/>
+          <p:nvPr/>
+        </p:nvSpPr>
+        <p:spPr>
+          <a:xfrm>
+            <a:off x="4419600" y="2362200"/>
+            <a:ext cx="3505200" cy="4191000"/>
           </a:xfrm>
           <a:prstGeom prst="rect">
             <a:avLst/>
@@ -2241,14 +2269,53 @@
       </p:sp>
       <p:sp>
         <p:nvSpPr>
-          <p:cNvPr id="10" name="block2"/>
-          <p:cNvSpPr/>
-          <p:nvPr/>
-        </p:nvSpPr>
-        <p:spPr>
-          <a:xfrm>
-            <a:off x="3632200" y="3098800"/>
-            <a:ext cx="1828800" cy="2133600"/>
+          <p:cNvPr id="11" name="s2-label"/>
+          <p:cNvSpPr/>
+          <p:nvPr/>
+        </p:nvSpPr>
+        <p:spPr>
+          <a:xfrm>
+            <a:off x="4673600" y="2667000"/>
+            <a:ext cx="2997200" cy="254000"/>
+          </a:xfrm>
+          <a:prstGeom prst="rect">
+            <a:avLst/>
+          </a:prstGeom>
+          <a:noFill/>
+          <a:ln/>
+        </p:spPr>
+        <p:txBody>
+          <a:bodyPr wrap="square" lIns="0" tIns="0" rIns="0" bIns="0" rtlCol="0" anchor="t"/>
+          <a:lstStyle/>
+          <a:p>
+            <a:pPr algn="l" indent="0" marL="0">
+              <a:buNone/>
+            </a:pPr>
+            <a:r>
+              <a:rPr lang="en-US" altLang="en-US" sz="1500" dirty="0">
+                <a:solidFill>
+                  <a:srgbClr val="C41220"/>
+                </a:solidFill>
+                <a:latin typeface="Inter" pitchFamily="34" charset="0"/>
+                <a:ea typeface="Inter" pitchFamily="34" charset="-122"/>
+                <a:cs typeface="Inter" pitchFamily="34" charset="-120"/>
+              </a:rPr>
+              <a:t>STEP 2  •  10:00–22:00</a:t>
+            </a:r>
+            <a:endParaRPr lang="en-US" sz="1500" dirty="0"/>
+          </a:p>
+        </p:txBody>
+      </p:sp>
+      <p:sp>
+        <p:nvSpPr>
+          <p:cNvPr id="12" name="s2-title"/>
+          <p:cNvSpPr/>
+          <p:nvPr/>
+        </p:nvSpPr>
+        <p:spPr>
+          <a:xfrm>
+            <a:off x="4673600" y="3073400"/>
+            <a:ext cx="2997200" cy="889000"/>
           </a:xfrm>
           <a:prstGeom prst="rect">
             <a:avLst/>
@@ -2262,35 +2329,54 @@
           <a:p>
             <a:pPr algn="l" indent="0" marL="0">
               <a:lnSpc>
-                <a:spcPts val="1652"/>
+                <a:spcPts val="2800"/>
               </a:lnSpc>
               <a:buNone/>
             </a:pPr>
             <a:r>
-              <a:rPr lang="en-US" altLang="en-US" sz="1400" b="1" dirty="0">
-                <a:solidFill>
-                  <a:srgbClr val="C41220"/>
-                </a:solidFill>
-                <a:latin typeface="Inter" pitchFamily="34" charset="0"/>
-                <a:ea typeface="Inter" pitchFamily="34" charset="-122"/>
-                <a:cs typeface="Inter" pitchFamily="34" charset="-120"/>
-              </a:rPr>
-              <a:t>TUESDAY</a:t>
-            </a:r>
-            <a:endParaRPr lang="en-US" sz="1800" dirty="0"/>
-          </a:p>
+              <a:rPr lang="en-US" altLang="en-US" sz="2500" dirty="0">
+                <a:solidFill>
+                  <a:srgbClr val="202124"/>
+                </a:solidFill>
+                <a:latin typeface="Inter" pitchFamily="34" charset="0"/>
+                <a:ea typeface="Inter" pitchFamily="34" charset="-122"/>
+                <a:cs typeface="Inter" pitchFamily="34" charset="-120"/>
+              </a:rPr>
+              <a:t>Read student writing</a:t>
+            </a:r>
+            <a:endParaRPr lang="en-US" sz="2500" dirty="0"/>
+          </a:p>
+        </p:txBody>
+      </p:sp>
+      <p:sp>
+        <p:nvSpPr>
+          <p:cNvPr id="13" name="s2-body"/>
+          <p:cNvSpPr/>
+          <p:nvPr/>
+        </p:nvSpPr>
+        <p:spPr>
+          <a:xfrm>
+            <a:off x="4673600" y="4191000"/>
+            <a:ext cx="2997200" cy="2032000"/>
+          </a:xfrm>
+          <a:prstGeom prst="rect">
+            <a:avLst/>
+          </a:prstGeom>
+          <a:noFill/>
+          <a:ln/>
+        </p:spPr>
+        <p:txBody>
+          <a:bodyPr wrap="square" lIns="0" tIns="0" rIns="0" bIns="0" rtlCol="0" anchor="t"/>
+          <a:lstStyle/>
           <a:p>
             <a:pPr algn="l" indent="0" marL="0">
               <a:lnSpc>
-                <a:spcPts val="2596"/>
+                <a:spcPts val="2394"/>
               </a:lnSpc>
-              <a:spcBef>
-                <a:spcPts val="1200"/>
-              </a:spcBef>
-              <a:buNone/>
-            </a:pPr>
-            <a:r>
-              <a:rPr lang="en-US" altLang="en-US" sz="2200" b="1" dirty="0">
+              <a:buNone/>
+            </a:pPr>
+            <a:r>
+              <a:rPr lang="en-US" altLang="en-US" sz="1900" dirty="0">
                 <a:solidFill>
                   <a:srgbClr val="3C4043"/>
                 </a:solidFill>
@@ -2298,84 +2384,22 @@
                 <a:ea typeface="Inter" pitchFamily="34" charset="-122"/>
                 <a:cs typeface="Inter" pitchFamily="34" charset="-120"/>
               </a:rPr>
-              <a:t>Plan for learning</a:t>
-            </a:r>
-            <a:endParaRPr lang="en-US" sz="1800" dirty="0"/>
-          </a:p>
-          <a:p>
-            <a:pPr algn="l" indent="0" marL="0">
-              <a:lnSpc>
-                <a:spcPts val="2124"/>
-              </a:lnSpc>
-              <a:spcBef>
-                <a:spcPts val="1000"/>
-              </a:spcBef>
-              <a:buNone/>
-            </a:pPr>
-            <a:r>
-              <a:rPr lang="en-US" altLang="en-US" sz="1800" dirty="0">
-                <a:solidFill>
-                  <a:srgbClr val="3C4043"/>
-                </a:solidFill>
-                <a:latin typeface="Inter" pitchFamily="34" charset="0"/>
-                <a:ea typeface="Inter" pitchFamily="34" charset="-122"/>
-                <a:cs typeface="Inter" pitchFamily="34" charset="-120"/>
-              </a:rPr>
-              <a:t>Lesson arc, access, facilitation, feedback, and revision.</a:t>
-            </a:r>
-            <a:endParaRPr lang="en-US" sz="1800" dirty="0"/>
-          </a:p>
-        </p:txBody>
-      </p:sp>
-      <p:sp>
-        <p:nvSpPr>
-          <p:cNvPr id="11" name="arrow2"/>
-          <p:cNvSpPr/>
-          <p:nvPr/>
-        </p:nvSpPr>
-        <p:spPr>
-          <a:xfrm>
-            <a:off x="5765800" y="4038600"/>
-            <a:ext cx="457200" cy="533400"/>
-          </a:xfrm>
-          <a:prstGeom prst="rect">
-            <a:avLst/>
-          </a:prstGeom>
-          <a:noFill/>
-          <a:ln/>
-        </p:spPr>
-        <p:txBody>
-          <a:bodyPr wrap="square" lIns="0" tIns="0" rIns="0" bIns="0" rtlCol="0" anchor="t"/>
-          <a:lstStyle/>
-          <a:p>
-            <a:pPr algn="ctr" indent="0" marL="0">
-              <a:buNone/>
-            </a:pPr>
-            <a:r>
-              <a:rPr lang="en-US" altLang="en-US" sz="3200" dirty="0">
-                <a:solidFill>
-                  <a:srgbClr val="C41220"/>
-                </a:solidFill>
-                <a:latin typeface="Inter" pitchFamily="34" charset="0"/>
-                <a:ea typeface="Inter" pitchFamily="34" charset="-122"/>
-                <a:cs typeface="Inter" pitchFamily="34" charset="-120"/>
-              </a:rPr>
-              <a:t>→</a:t>
-            </a:r>
-            <a:endParaRPr lang="en-US" sz="3200" dirty="0"/>
-          </a:p>
-        </p:txBody>
-      </p:sp>
-      <p:sp>
-        <p:nvSpPr>
-          <p:cNvPr id="12" name="cycle-shape-11"/>
-          <p:cNvSpPr/>
-          <p:nvPr/>
-        </p:nvSpPr>
-        <p:spPr>
-          <a:xfrm>
-            <a:off x="6299200" y="2768600"/>
-            <a:ext cx="2286000" cy="3111500"/>
+              <a:t>Mark what students can already do and name one priority need in the work.</a:t>
+            </a:r>
+            <a:endParaRPr lang="en-US" sz="1900" dirty="0"/>
+          </a:p>
+        </p:txBody>
+      </p:sp>
+      <p:sp>
+        <p:nvSpPr>
+          <p:cNvPr id="14" name="cycle-shape-13"/>
+          <p:cNvSpPr/>
+          <p:nvPr/>
+        </p:nvSpPr>
+        <p:spPr>
+          <a:xfrm>
+            <a:off x="8331200" y="2362200"/>
+            <a:ext cx="3505200" cy="4191000"/>
           </a:xfrm>
           <a:prstGeom prst="rect">
             <a:avLst/>
@@ -2393,14 +2417,53 @@
       </p:sp>
       <p:sp>
         <p:nvSpPr>
-          <p:cNvPr id="13" name="block3"/>
-          <p:cNvSpPr/>
-          <p:nvPr/>
-        </p:nvSpPr>
-        <p:spPr>
-          <a:xfrm>
-            <a:off x="6527800" y="3098800"/>
-            <a:ext cx="1828800" cy="2133600"/>
+          <p:cNvPr id="15" name="s3-label"/>
+          <p:cNvSpPr/>
+          <p:nvPr/>
+        </p:nvSpPr>
+        <p:spPr>
+          <a:xfrm>
+            <a:off x="8585200" y="2667000"/>
+            <a:ext cx="2997200" cy="254000"/>
+          </a:xfrm>
+          <a:prstGeom prst="rect">
+            <a:avLst/>
+          </a:prstGeom>
+          <a:noFill/>
+          <a:ln/>
+        </p:spPr>
+        <p:txBody>
+          <a:bodyPr wrap="square" lIns="0" tIns="0" rIns="0" bIns="0" rtlCol="0" anchor="t"/>
+          <a:lstStyle/>
+          <a:p>
+            <a:pPr algn="l" indent="0" marL="0">
+              <a:buNone/>
+            </a:pPr>
+            <a:r>
+              <a:rPr lang="en-US" altLang="en-US" sz="1500" dirty="0">
+                <a:solidFill>
+                  <a:srgbClr val="C41220"/>
+                </a:solidFill>
+                <a:latin typeface="Inter" pitchFamily="34" charset="0"/>
+                <a:ea typeface="Inter" pitchFamily="34" charset="-122"/>
+                <a:cs typeface="Inter" pitchFamily="34" charset="-120"/>
+              </a:rPr>
+              <a:t>STEP 3  •  22:00–30:00</a:t>
+            </a:r>
+            <a:endParaRPr lang="en-US" sz="1500" dirty="0"/>
+          </a:p>
+        </p:txBody>
+      </p:sp>
+      <p:sp>
+        <p:nvSpPr>
+          <p:cNvPr id="16" name="s3-title"/>
+          <p:cNvSpPr/>
+          <p:nvPr/>
+        </p:nvSpPr>
+        <p:spPr>
+          <a:xfrm>
+            <a:off x="8585200" y="3073400"/>
+            <a:ext cx="2997200" cy="889000"/>
           </a:xfrm>
           <a:prstGeom prst="rect">
             <a:avLst/>
@@ -2414,35 +2477,54 @@
           <a:p>
             <a:pPr algn="l" indent="0" marL="0">
               <a:lnSpc>
-                <a:spcPts val="1652"/>
+                <a:spcPts val="2800"/>
               </a:lnSpc>
               <a:buNone/>
             </a:pPr>
             <a:r>
-              <a:rPr lang="en-US" altLang="en-US" sz="1400" b="1" dirty="0">
-                <a:solidFill>
-                  <a:srgbClr val="C41220"/>
-                </a:solidFill>
-                <a:latin typeface="Inter" pitchFamily="34" charset="0"/>
-                <a:ea typeface="Inter" pitchFamily="34" charset="-122"/>
-                <a:cs typeface="Inter" pitchFamily="34" charset="-120"/>
-              </a:rPr>
-              <a:t>WED. PD</a:t>
-            </a:r>
-            <a:endParaRPr lang="en-US" sz="1800" dirty="0"/>
-          </a:p>
+              <a:rPr lang="en-US" altLang="en-US" sz="2500" dirty="0">
+                <a:solidFill>
+                  <a:srgbClr val="202124"/>
+                </a:solidFill>
+                <a:latin typeface="Inter" pitchFamily="34" charset="0"/>
+                <a:ea typeface="Inter" pitchFamily="34" charset="-122"/>
+                <a:cs typeface="Inter" pitchFamily="34" charset="-120"/>
+              </a:rPr>
+              <a:t>Write the feedback</a:t>
+            </a:r>
+            <a:endParaRPr lang="en-US" sz="2500" dirty="0"/>
+          </a:p>
+        </p:txBody>
+      </p:sp>
+      <p:sp>
+        <p:nvSpPr>
+          <p:cNvPr id="17" name="s3-body"/>
+          <p:cNvSpPr/>
+          <p:nvPr/>
+        </p:nvSpPr>
+        <p:spPr>
+          <a:xfrm>
+            <a:off x="8585200" y="4191000"/>
+            <a:ext cx="2997200" cy="2032000"/>
+          </a:xfrm>
+          <a:prstGeom prst="rect">
+            <a:avLst/>
+          </a:prstGeom>
+          <a:noFill/>
+          <a:ln/>
+        </p:spPr>
+        <p:txBody>
+          <a:bodyPr wrap="square" lIns="0" tIns="0" rIns="0" bIns="0" rtlCol="0" anchor="t"/>
+          <a:lstStyle/>
           <a:p>
             <a:pPr algn="l" indent="0" marL="0">
               <a:lnSpc>
-                <a:spcPts val="2596"/>
+                <a:spcPts val="2394"/>
               </a:lnSpc>
-              <a:spcBef>
-                <a:spcPts val="1200"/>
-              </a:spcBef>
-              <a:buNone/>
-            </a:pPr>
-            <a:r>
-              <a:rPr lang="en-US" altLang="en-US" sz="2200" b="1" dirty="0">
+              <a:buNone/>
+            </a:pPr>
+            <a:r>
+              <a:rPr lang="en-US" altLang="en-US" sz="1900" dirty="0">
                 <a:solidFill>
                   <a:srgbClr val="3C4043"/>
                 </a:solidFill>
@@ -2450,84 +2532,22 @@
                 <a:ea typeface="Inter" pitchFamily="34" charset="-122"/>
                 <a:cs typeface="Inter" pitchFamily="34" charset="-120"/>
               </a:rPr>
-              <a:t>Teach CUBS + CER</a:t>
-            </a:r>
-            <a:endParaRPr lang="en-US" sz="1800" dirty="0"/>
-          </a:p>
-          <a:p>
-            <a:pPr algn="l" indent="0" marL="0">
-              <a:lnSpc>
-                <a:spcPts val="2124"/>
-              </a:lnSpc>
-              <a:spcBef>
-                <a:spcPts val="1000"/>
-              </a:spcBef>
-              <a:buNone/>
-            </a:pPr>
-            <a:r>
-              <a:rPr lang="en-US" altLang="en-US" sz="1800" dirty="0">
-                <a:solidFill>
-                  <a:srgbClr val="3C4043"/>
-                </a:solidFill>
-                <a:latin typeface="Inter" pitchFamily="34" charset="0"/>
-                <a:ea typeface="Inter" pitchFamily="34" charset="-122"/>
-                <a:cs typeface="Inter" pitchFamily="34" charset="-120"/>
-              </a:rPr>
-              <a:t>Students analyze the source and make their response structure visible.</a:t>
-            </a:r>
-            <a:endParaRPr lang="en-US" sz="1800" dirty="0"/>
-          </a:p>
-        </p:txBody>
-      </p:sp>
-      <p:sp>
-        <p:nvSpPr>
-          <p:cNvPr id="14" name="arrow3"/>
-          <p:cNvSpPr/>
-          <p:nvPr/>
-        </p:nvSpPr>
-        <p:spPr>
-          <a:xfrm>
-            <a:off x="8661400" y="4038600"/>
-            <a:ext cx="457200" cy="533400"/>
-          </a:xfrm>
-          <a:prstGeom prst="rect">
-            <a:avLst/>
-          </a:prstGeom>
-          <a:noFill/>
-          <a:ln/>
-        </p:spPr>
-        <p:txBody>
-          <a:bodyPr wrap="square" lIns="0" tIns="0" rIns="0" bIns="0" rtlCol="0" anchor="t"/>
-          <a:lstStyle/>
-          <a:p>
-            <a:pPr algn="ctr" indent="0" marL="0">
-              <a:buNone/>
-            </a:pPr>
-            <a:r>
-              <a:rPr lang="en-US" altLang="en-US" sz="3200" dirty="0">
-                <a:solidFill>
-                  <a:srgbClr val="C41220"/>
-                </a:solidFill>
-                <a:latin typeface="Inter" pitchFamily="34" charset="0"/>
-                <a:ea typeface="Inter" pitchFamily="34" charset="-122"/>
-                <a:cs typeface="Inter" pitchFamily="34" charset="-120"/>
-              </a:rPr>
-              <a:t>→</a:t>
-            </a:r>
-            <a:endParaRPr lang="en-US" sz="3200" dirty="0"/>
-          </a:p>
-        </p:txBody>
-      </p:sp>
-      <p:sp>
-        <p:nvSpPr>
-          <p:cNvPr id="15" name="cycle-shape-14"/>
-          <p:cNvSpPr/>
-          <p:nvPr/>
-        </p:nvSpPr>
-        <p:spPr>
-          <a:xfrm>
-            <a:off x="9194800" y="2768600"/>
-            <a:ext cx="2286000" cy="3111500"/>
+              <a:t>Write one comment that names a criterion and asks for one action students can take.</a:t>
+            </a:r>
+            <a:endParaRPr lang="en-US" sz="1900" dirty="0"/>
+          </a:p>
+        </p:txBody>
+      </p:sp>
+      <p:sp>
+        <p:nvSpPr>
+          <p:cNvPr id="18" name="cycle-shape-17"/>
+          <p:cNvSpPr/>
+          <p:nvPr/>
+        </p:nvSpPr>
+        <p:spPr>
+          <a:xfrm>
+            <a:off x="12242800" y="2362200"/>
+            <a:ext cx="3505200" cy="4191000"/>
           </a:xfrm>
           <a:prstGeom prst="rect">
             <a:avLst/>
@@ -2545,14 +2565,53 @@
       </p:sp>
       <p:sp>
         <p:nvSpPr>
-          <p:cNvPr id="16" name="block4"/>
-          <p:cNvSpPr/>
-          <p:nvPr/>
-        </p:nvSpPr>
-        <p:spPr>
-          <a:xfrm>
-            <a:off x="9423400" y="3098800"/>
-            <a:ext cx="1828800" cy="2133600"/>
+          <p:cNvPr id="19" name="s4-label"/>
+          <p:cNvSpPr/>
+          <p:nvPr/>
+        </p:nvSpPr>
+        <p:spPr>
+          <a:xfrm>
+            <a:off x="12496800" y="2667000"/>
+            <a:ext cx="2997200" cy="254000"/>
+          </a:xfrm>
+          <a:prstGeom prst="rect">
+            <a:avLst/>
+          </a:prstGeom>
+          <a:noFill/>
+          <a:ln/>
+        </p:spPr>
+        <p:txBody>
+          <a:bodyPr wrap="square" lIns="0" tIns="0" rIns="0" bIns="0" rtlCol="0" anchor="t"/>
+          <a:lstStyle/>
+          <a:p>
+            <a:pPr algn="l" indent="0" marL="0">
+              <a:buNone/>
+            </a:pPr>
+            <a:r>
+              <a:rPr lang="en-US" altLang="en-US" sz="1500" dirty="0">
+                <a:solidFill>
+                  <a:srgbClr val="C41220"/>
+                </a:solidFill>
+                <a:latin typeface="Inter" pitchFamily="34" charset="0"/>
+                <a:ea typeface="Inter" pitchFamily="34" charset="-122"/>
+                <a:cs typeface="Inter" pitchFamily="34" charset="-120"/>
+              </a:rPr>
+              <a:t>STEP 4  •  30:00–41:00</a:t>
+            </a:r>
+            <a:endParaRPr lang="en-US" sz="1500" dirty="0"/>
+          </a:p>
+        </p:txBody>
+      </p:sp>
+      <p:sp>
+        <p:nvSpPr>
+          <p:cNvPr id="20" name="s4-title"/>
+          <p:cNvSpPr/>
+          <p:nvPr/>
+        </p:nvSpPr>
+        <p:spPr>
+          <a:xfrm>
+            <a:off x="12496800" y="3073400"/>
+            <a:ext cx="2997200" cy="889000"/>
           </a:xfrm>
           <a:prstGeom prst="rect">
             <a:avLst/>
@@ -2566,35 +2625,54 @@
           <a:p>
             <a:pPr algn="l" indent="0" marL="0">
               <a:lnSpc>
-                <a:spcPts val="1652"/>
+                <a:spcPts val="2800"/>
               </a:lnSpc>
               <a:buNone/>
             </a:pPr>
             <a:r>
-              <a:rPr lang="en-US" altLang="en-US" sz="1400" b="1" dirty="0">
-                <a:solidFill>
-                  <a:srgbClr val="C41220"/>
-                </a:solidFill>
-                <a:latin typeface="Inter" pitchFamily="34" charset="0"/>
-                <a:ea typeface="Inter" pitchFamily="34" charset="-122"/>
-                <a:cs typeface="Inter" pitchFamily="34" charset="-120"/>
-              </a:rPr>
-              <a:t>FRIDAY</a:t>
-            </a:r>
-            <a:endParaRPr lang="en-US" sz="1800" dirty="0"/>
-          </a:p>
+              <a:rPr lang="en-US" altLang="en-US" sz="2500" dirty="0">
+                <a:solidFill>
+                  <a:srgbClr val="202124"/>
+                </a:solidFill>
+                <a:latin typeface="Inter" pitchFamily="34" charset="0"/>
+                <a:ea typeface="Inter" pitchFamily="34" charset="-122"/>
+                <a:cs typeface="Inter" pitchFamily="34" charset="-120"/>
+              </a:rPr>
+              <a:t>Plan the next step</a:t>
+            </a:r>
+            <a:endParaRPr lang="en-US" sz="2500" dirty="0"/>
+          </a:p>
+        </p:txBody>
+      </p:sp>
+      <p:sp>
+        <p:nvSpPr>
+          <p:cNvPr id="21" name="s4-body"/>
+          <p:cNvSpPr/>
+          <p:nvPr/>
+        </p:nvSpPr>
+        <p:spPr>
+          <a:xfrm>
+            <a:off x="12496800" y="4191000"/>
+            <a:ext cx="2997200" cy="2032000"/>
+          </a:xfrm>
+          <a:prstGeom prst="rect">
+            <a:avLst/>
+          </a:prstGeom>
+          <a:noFill/>
+          <a:ln/>
+        </p:spPr>
+        <p:txBody>
+          <a:bodyPr wrap="square" lIns="0" tIns="0" rIns="0" bIns="0" rtlCol="0" anchor="t"/>
+          <a:lstStyle/>
           <a:p>
             <a:pPr algn="l" indent="0" marL="0">
               <a:lnSpc>
-                <a:spcPts val="2596"/>
+                <a:spcPts val="2394"/>
               </a:lnSpc>
-              <a:spcBef>
-                <a:spcPts val="1200"/>
-              </a:spcBef>
-              <a:buNone/>
-            </a:pPr>
-            <a:r>
-              <a:rPr lang="en-US" altLang="en-US" sz="2200" b="1" dirty="0">
+              <a:buNone/>
+            </a:pPr>
+            <a:r>
+              <a:rPr lang="en-US" altLang="en-US" sz="1900" dirty="0">
                 <a:solidFill>
                   <a:srgbClr val="3C4043"/>
                 </a:solidFill>
@@ -2602,84 +2680,22 @@
                 <a:ea typeface="Inter" pitchFamily="34" charset="-122"/>
                 <a:cs typeface="Inter" pitchFamily="34" charset="-120"/>
               </a:rPr>
-              <a:t>Analyze writing</a:t>
-            </a:r>
-            <a:endParaRPr lang="en-US" sz="1800" dirty="0"/>
-          </a:p>
-          <a:p>
-            <a:pPr algn="l" indent="0" marL="0">
-              <a:lnSpc>
-                <a:spcPts val="2124"/>
-              </a:lnSpc>
-              <a:spcBef>
-                <a:spcPts val="1000"/>
-              </a:spcBef>
-              <a:buNone/>
-            </a:pPr>
-            <a:r>
-              <a:rPr lang="en-US" altLang="en-US" sz="1800" dirty="0">
-                <a:solidFill>
-                  <a:srgbClr val="3C4043"/>
-                </a:solidFill>
-                <a:latin typeface="Inter" pitchFamily="34" charset="0"/>
-                <a:ea typeface="Inter" pitchFamily="34" charset="-122"/>
-                <a:cs typeface="Inter" pitchFamily="34" charset="-120"/>
-              </a:rPr>
-              <a:t>Read completed responses against the mastery bar and provide written feedback.</a:t>
-            </a:r>
-            <a:endParaRPr lang="en-US" sz="1800" dirty="0"/>
-          </a:p>
-        </p:txBody>
-      </p:sp>
-      <p:sp>
-        <p:nvSpPr>
-          <p:cNvPr id="17" name="arrow4"/>
-          <p:cNvSpPr/>
-          <p:nvPr/>
-        </p:nvSpPr>
-        <p:spPr>
-          <a:xfrm>
-            <a:off x="11557000" y="4038600"/>
-            <a:ext cx="457200" cy="533400"/>
-          </a:xfrm>
-          <a:prstGeom prst="rect">
-            <a:avLst/>
-          </a:prstGeom>
-          <a:noFill/>
-          <a:ln/>
-        </p:spPr>
-        <p:txBody>
-          <a:bodyPr wrap="square" lIns="0" tIns="0" rIns="0" bIns="0" rtlCol="0" anchor="t"/>
-          <a:lstStyle/>
-          <a:p>
-            <a:pPr algn="ctr" indent="0" marL="0">
-              <a:buNone/>
-            </a:pPr>
-            <a:r>
-              <a:rPr lang="en-US" altLang="en-US" sz="3200" dirty="0">
-                <a:solidFill>
-                  <a:srgbClr val="C41220"/>
-                </a:solidFill>
-                <a:latin typeface="Inter" pitchFamily="34" charset="0"/>
-                <a:ea typeface="Inter" pitchFamily="34" charset="-122"/>
-                <a:cs typeface="Inter" pitchFamily="34" charset="-120"/>
-              </a:rPr>
-              <a:t>→</a:t>
-            </a:r>
-            <a:endParaRPr lang="en-US" sz="3200" dirty="0"/>
-          </a:p>
-        </p:txBody>
-      </p:sp>
-      <p:sp>
-        <p:nvSpPr>
-          <p:cNvPr id="18" name="cycle-shape-17"/>
-          <p:cNvSpPr/>
-          <p:nvPr/>
-        </p:nvSpPr>
-        <p:spPr>
-          <a:xfrm>
-            <a:off x="12090400" y="2768600"/>
-            <a:ext cx="3657600" cy="3111500"/>
+              <a:t>Choose one lesson move and one short evidence check that show new learning.</a:t>
+            </a:r>
+            <a:endParaRPr lang="en-US" sz="1900" dirty="0"/>
+          </a:p>
+        </p:txBody>
+      </p:sp>
+      <p:sp>
+        <p:nvSpPr>
+          <p:cNvPr id="22" name="cycle-shape-21"/>
+          <p:cNvSpPr/>
+          <p:nvPr/>
+        </p:nvSpPr>
+        <p:spPr>
+          <a:xfrm>
+            <a:off x="508000" y="6934200"/>
+            <a:ext cx="15240000" cy="812800"/>
           </a:xfrm>
           <a:prstGeom prst="rect">
             <a:avLst/>
@@ -2692,14 +2708,14 @@
       </p:sp>
       <p:sp>
         <p:nvSpPr>
-          <p:cNvPr id="19" name="block5"/>
-          <p:cNvSpPr/>
-          <p:nvPr/>
-        </p:nvSpPr>
-        <p:spPr>
-          <a:xfrm>
-            <a:off x="12420600" y="3098800"/>
-            <a:ext cx="2997200" cy="2133600"/>
+          <p:cNvPr id="23" name="anchor"/>
+          <p:cNvSpPr/>
+          <p:nvPr/>
+        </p:nvSpPr>
+        <p:spPr>
+          <a:xfrm>
+            <a:off x="812800" y="7188200"/>
+            <a:ext cx="14605000" cy="330200"/>
           </a:xfrm>
           <a:prstGeom prst="rect">
             <a:avLst/>
@@ -2712,13 +2728,10 @@
           <a:lstStyle/>
           <a:p>
             <a:pPr algn="l" indent="0" marL="0">
-              <a:lnSpc>
-                <a:spcPts val="1652"/>
-              </a:lnSpc>
-              <a:buNone/>
-            </a:pPr>
-            <a:r>
-              <a:rPr lang="en-US" altLang="en-US" sz="1400" b="1" dirty="0">
+              <a:buNone/>
+            </a:pPr>
+            <a:r>
+              <a:rPr lang="en-US" altLang="en-US" sz="2000" b="1" dirty="0">
                 <a:solidFill>
                   <a:srgbClr val="F6B4BA"/>
                 </a:solidFill>
@@ -2726,22 +2739,10 @@
                 <a:ea typeface="Inter" pitchFamily="34" charset="-122"/>
                 <a:cs typeface="Inter" pitchFamily="34" charset="-120"/>
               </a:rPr>
-              <a:t>STANDARD MASTERY</a:t>
-            </a:r>
-            <a:endParaRPr lang="en-US" sz="1800" dirty="0"/>
-          </a:p>
-          <a:p>
-            <a:pPr algn="l" indent="0" marL="0">
-              <a:lnSpc>
-                <a:spcPts val="2596"/>
-              </a:lnSpc>
-              <a:spcBef>
-                <a:spcPts val="1200"/>
-              </a:spcBef>
-              <a:buNone/>
-            </a:pPr>
-            <a:r>
-              <a:rPr lang="en-US" altLang="en-US" sz="2200" b="1" dirty="0">
+              <a:t>Close 41:00–46:00:</a:t>
+            </a:r>
+            <a:r>
+              <a:rPr lang="en-US" altLang="en-US" sz="2000" dirty="0">
                 <a:solidFill>
                   <a:srgbClr val="FFFFFF"/>
                 </a:solidFill>
@@ -2749,116 +2750,15 @@
                 <a:ea typeface="Inter" pitchFamily="34" charset="-122"/>
                 <a:cs typeface="Inter" pitchFamily="34" charset="-120"/>
               </a:rPr>
-              <a:t>Respond precisely</a:t>
-            </a:r>
-            <a:endParaRPr lang="en-US" sz="1800" dirty="0"/>
-          </a:p>
-          <a:p>
-            <a:pPr algn="l" indent="0" marL="0">
-              <a:lnSpc>
-                <a:spcPts val="2124"/>
-              </a:lnSpc>
-              <a:spcBef>
-                <a:spcPts val="1000"/>
-              </a:spcBef>
-              <a:buNone/>
-            </a:pPr>
-            <a:r>
-              <a:rPr lang="en-US" altLang="en-US" sz="1800" dirty="0">
-                <a:solidFill>
-                  <a:srgbClr val="FFFFFF"/>
-                </a:solidFill>
-                <a:latin typeface="Inter" pitchFamily="34" charset="0"/>
-                <a:ea typeface="Inter" pitchFamily="34" charset="-122"/>
-                <a:cs typeface="Inter" pitchFamily="34" charset="-120"/>
-              </a:rPr>
-              <a:t>Plan one targeted student action, teacher move, and new evidence check.</a:t>
-            </a:r>
-            <a:endParaRPr lang="en-US" sz="1800" dirty="0"/>
-          </a:p>
-        </p:txBody>
-      </p:sp>
-      <p:sp>
-        <p:nvSpPr>
-          <p:cNvPr id="20" name="cycle-shape-19"/>
-          <p:cNvSpPr/>
-          <p:nvPr/>
-        </p:nvSpPr>
-        <p:spPr>
-          <a:xfrm>
-            <a:off x="508000" y="6731000"/>
-            <a:ext cx="15240000" cy="1168400"/>
-          </a:xfrm>
-          <a:prstGeom prst="rect">
-            <a:avLst/>
-          </a:prstGeom>
-          <a:solidFill>
-            <a:srgbClr val="F8F9FA"/>
-          </a:solidFill>
-          <a:ln w="12700">
-            <a:solidFill>
-              <a:srgbClr val="D1D5DB"/>
-            </a:solidFill>
-            <a:prstDash val="solid"/>
-          </a:ln>
-        </p:spPr>
-      </p:sp>
-      <p:sp>
-        <p:nvSpPr>
-          <p:cNvPr id="21" name="anchor"/>
-          <p:cNvSpPr/>
-          <p:nvPr/>
-        </p:nvSpPr>
-        <p:spPr>
-          <a:xfrm>
-            <a:off x="838200" y="6997700"/>
-            <a:ext cx="14414500" cy="609600"/>
-          </a:xfrm>
-          <a:prstGeom prst="rect">
-            <a:avLst/>
-          </a:prstGeom>
-          <a:noFill/>
-          <a:ln/>
-        </p:spPr>
-        <p:txBody>
-          <a:bodyPr wrap="square" lIns="0" tIns="0" rIns="0" bIns="0" rtlCol="0" anchor="t"/>
-          <a:lstStyle/>
-          <a:p>
-            <a:pPr algn="l" indent="0" marL="0">
-              <a:lnSpc>
-                <a:spcPts val="2520"/>
-              </a:lnSpc>
-              <a:buNone/>
-            </a:pPr>
-            <a:r>
-              <a:rPr lang="en-US" altLang="en-US" sz="2100" b="1" dirty="0">
-                <a:solidFill>
-                  <a:srgbClr val="3C4043"/>
-                </a:solidFill>
-                <a:latin typeface="Inter" pitchFamily="34" charset="0"/>
-                <a:ea typeface="Inter" pitchFamily="34" charset="-122"/>
-                <a:cs typeface="Inter" pitchFamily="34" charset="-120"/>
-              </a:rPr>
-              <a:t>Evidence protocol:</a:t>
-            </a:r>
-            <a:r>
-              <a:rPr lang="en-US" altLang="en-US" sz="2100" dirty="0">
-                <a:solidFill>
-                  <a:srgbClr val="3C4043"/>
-                </a:solidFill>
-                <a:latin typeface="Inter" pitchFamily="34" charset="0"/>
-                <a:ea typeface="Inter" pitchFamily="34" charset="-122"/>
-                <a:cs typeface="Inter" pitchFamily="34" charset="-120"/>
-              </a:rPr>
-              <a:t> use de-identified writing samples and the agreed task criteria. Describe what is visible in the work; do not compare people or create a broad reteach plan.</a:t>
-            </a:r>
-            <a:endParaRPr lang="en-US" sz="2100" dirty="0"/>
-          </a:p>
-        </p:txBody>
-      </p:sp>
-      <p:sp>
-        <p:nvSpPr>
-          <p:cNvPr id="22" name="page"/>
+              <a:t> confirm the feedback, the student action, and the evidence you will collect next.</a:t>
+            </a:r>
+            <a:endParaRPr lang="en-US" sz="2000" dirty="0"/>
+          </a:p>
+        </p:txBody>
+      </p:sp>
+      <p:sp>
+        <p:nvSpPr>
+          <p:cNvPr id="24" name="page"/>
           <p:cNvSpPr/>
           <p:nvPr/>
         </p:nvSpPr>
@@ -2897,7 +2797,7 @@
       </p:sp>
       <p:sp>
         <p:nvSpPr>
-          <p:cNvPr id="23" name="cycle-shape-22"/>
+          <p:cNvPr id="25" name="cycle-shape-24"/>
           <p:cNvSpPr/>
           <p:nvPr/>
         </p:nvSpPr>
@@ -3000,7 +2900,7 @@
                 <a:ea typeface="Inter" pitchFamily="34" charset="-122"/>
                 <a:cs typeface="Inter" pitchFamily="34" charset="-120"/>
               </a:rPr>
-              <a:t>Set the Mastery Bar Before Reading the Work</a:t>
+              <a:t>Step 1: Set the Bar for Mastery</a:t>
             </a:r>
             <a:endParaRPr lang="en-US" sz="3000" dirty="0"/>
           </a:p>
@@ -3014,8 +2914,8 @@
         </p:nvSpPr>
         <p:spPr>
           <a:xfrm>
-            <a:off x="13081000" y="355600"/>
-            <a:ext cx="2667000" cy="304800"/>
+            <a:off x="12827000" y="355600"/>
+            <a:ext cx="2921000" cy="304800"/>
           </a:xfrm>
           <a:prstGeom prst="rect">
             <a:avLst/>
@@ -3053,8 +2953,8 @@
         </p:nvSpPr>
         <p:spPr>
           <a:xfrm>
-            <a:off x="508000" y="1397000"/>
-            <a:ext cx="14224000" cy="673100"/>
+            <a:off x="508000" y="1320800"/>
+            <a:ext cx="15240000" cy="685800"/>
           </a:xfrm>
           <a:prstGeom prst="rect">
             <a:avLst/>
@@ -3078,7 +2978,7 @@
                 <a:ea typeface="Inter" pitchFamily="34" charset="-122"/>
                 <a:cs typeface="Inter" pitchFamily="34" charset="-120"/>
               </a:rPr>
-              <a:t>Review what the standard and task required—not simply whether students completed every part. The shared model is Question 5 of the Biology benchmark; other teams use the equivalent demand in their own task.</a:t>
+              <a:t>Agree on what a strong response must include before reading any student work. Each course team uses its own task and standard.</a:t>
             </a:r>
             <a:endParaRPr lang="en-US" sz="2300" dirty="0"/>
           </a:p>
@@ -3092,8 +2992,8 @@
         </p:nvSpPr>
         <p:spPr>
           <a:xfrm>
-            <a:off x="508000" y="2857500"/>
-            <a:ext cx="7112000" cy="3886200"/>
+            <a:off x="508000" y="2413000"/>
+            <a:ext cx="7366000" cy="4191000"/>
           </a:xfrm>
           <a:prstGeom prst="rect">
             <a:avLst/>
@@ -3117,8 +3017,8 @@
         </p:nvSpPr>
         <p:spPr>
           <a:xfrm>
-            <a:off x="850900" y="3225800"/>
-            <a:ext cx="6096000" cy="444500"/>
+            <a:off x="889000" y="2794000"/>
+            <a:ext cx="6604000" cy="457200"/>
           </a:xfrm>
           <a:prstGeom prst="rect">
             <a:avLst/>
@@ -3134,17 +3034,17 @@
               <a:buNone/>
             </a:pPr>
             <a:r>
-              <a:rPr lang="en-US" altLang="en-US" sz="2700" dirty="0">
-                <a:solidFill>
-                  <a:srgbClr val="3C4043"/>
-                </a:solidFill>
-                <a:latin typeface="Inter" pitchFamily="34" charset="0"/>
-                <a:ea typeface="Inter" pitchFamily="34" charset="-122"/>
-                <a:cs typeface="Inter" pitchFamily="34" charset="-120"/>
-              </a:rPr>
-              <a:t>THE TASK DEMAND</a:t>
-            </a:r>
-            <a:endParaRPr lang="en-US" sz="2700" dirty="0"/>
+              <a:rPr lang="en-US" altLang="en-US" sz="2600" dirty="0">
+                <a:solidFill>
+                  <a:srgbClr val="202124"/>
+                </a:solidFill>
+                <a:latin typeface="Inter" pitchFamily="34" charset="0"/>
+                <a:ea typeface="Inter" pitchFamily="34" charset="-122"/>
+                <a:cs typeface="Inter" pitchFamily="34" charset="-120"/>
+              </a:rPr>
+              <a:t>WHAT THE TASK ASKS</a:t>
+            </a:r>
+            <a:endParaRPr lang="en-US" sz="2600" dirty="0"/>
           </a:p>
         </p:txBody>
       </p:sp>
@@ -3156,22 +3056,22 @@
         </p:nvSpPr>
         <p:spPr>
           <a:xfrm>
-            <a:off x="850900" y="4064000"/>
-            <a:ext cx="5969000" cy="2209800"/>
-          </a:xfrm>
-          <a:prstGeom prst="rect">
-            <a:avLst/>
-          </a:prstGeom>
-          <a:noFill/>
-          <a:ln/>
-        </p:spPr>
-        <p:txBody>
-          <a:bodyPr wrap="square" lIns="0" tIns="0" rIns="0" bIns="0" rtlCol="0" anchor="t"/>
-          <a:lstStyle/>
-          <a:p>
-            <a:pPr algn="l" marL="349250" indent="-349250">
+            <a:off x="889000" y="3708400"/>
+            <a:ext cx="6604000" cy="2540000"/>
+          </a:xfrm>
+          <a:prstGeom prst="rect">
+            <a:avLst/>
+          </a:prstGeom>
+          <a:noFill/>
+          <a:ln/>
+        </p:spPr>
+        <p:txBody>
+          <a:bodyPr wrap="square" lIns="0" tIns="0" rIns="0" bIns="0" rtlCol="0" anchor="t"/>
+          <a:lstStyle/>
+          <a:p>
+            <a:pPr algn="l" marL="333375" indent="-333375">
               <a:lnSpc>
-                <a:spcPts val="2816"/>
+                <a:spcPts val="2730"/>
               </a:lnSpc>
               <a:spcBef>
                 <a:spcPts val="10"/>
@@ -3180,7 +3080,7 @@
               <a:buChar char="•"/>
             </a:pPr>
             <a:r>
-              <a:rPr lang="en-US" altLang="en-US" sz="2200" dirty="0">
+              <a:rPr lang="en-US" altLang="en-US" sz="2100" dirty="0">
                 <a:solidFill>
                   <a:srgbClr val="3C4043"/>
                 </a:solidFill>
@@ -3188,14 +3088,14 @@
                 <a:ea typeface="Inter" pitchFamily="34" charset="-122"/>
                 <a:cs typeface="Inter" pitchFamily="34" charset="-120"/>
               </a:rPr>
-              <a:t>HS-LS2-1: biotic/abiotic factors and carrying capacity</a:t>
-            </a:r>
-            <a:endParaRPr lang="en-US" sz="2200" dirty="0"/>
-          </a:p>
-          <a:p>
-            <a:pPr algn="l" marL="349250" indent="-349250">
+              <a:t>Use the population graph and the food web</a:t>
+            </a:r>
+            <a:endParaRPr lang="en-US" sz="2100" dirty="0"/>
+          </a:p>
+          <a:p>
+            <a:pPr algn="l" marL="333375" indent="-333375">
               <a:lnSpc>
-                <a:spcPts val="2816"/>
+                <a:spcPts val="2730"/>
               </a:lnSpc>
               <a:spcBef>
                 <a:spcPts val="10"/>
@@ -3204,7 +3104,7 @@
               <a:buChar char="•"/>
             </a:pPr>
             <a:r>
-              <a:rPr lang="en-US" altLang="en-US" sz="2200" dirty="0">
+              <a:rPr lang="en-US" altLang="en-US" sz="2100" dirty="0">
                 <a:solidFill>
                   <a:srgbClr val="3C4043"/>
                 </a:solidFill>
@@ -3212,14 +3112,14 @@
                 <a:ea typeface="Inter" pitchFamily="34" charset="-122"/>
                 <a:cs typeface="Inter" pitchFamily="34" charset="-120"/>
               </a:rPr>
-              <a:t>Use the population graph and food web</a:t>
-            </a:r>
-            <a:endParaRPr lang="en-US" sz="2200" dirty="0"/>
-          </a:p>
-          <a:p>
-            <a:pPr algn="l" marL="349250" indent="-349250">
+              <a:t>Predict how more frogs change the fruit-fly population</a:t>
+            </a:r>
+            <a:endParaRPr lang="en-US" sz="2100" dirty="0"/>
+          </a:p>
+          <a:p>
+            <a:pPr algn="l" marL="333375" indent="-333375">
               <a:lnSpc>
-                <a:spcPts val="2816"/>
+                <a:spcPts val="2730"/>
               </a:lnSpc>
               <a:spcBef>
                 <a:spcPts val="10"/>
@@ -3228,7 +3128,7 @@
               <a:buChar char="•"/>
             </a:pPr>
             <a:r>
-              <a:rPr lang="en-US" altLang="en-US" sz="2200" dirty="0">
+              <a:rPr lang="en-US" altLang="en-US" sz="2100" dirty="0">
                 <a:solidFill>
                   <a:srgbClr val="3C4043"/>
                 </a:solidFill>
@@ -3236,14 +3136,14 @@
                 <a:ea typeface="Inter" pitchFamily="34" charset="-122"/>
                 <a:cs typeface="Inter" pitchFamily="34" charset="-120"/>
               </a:rPr>
-              <a:t>Predict how more frogs may change the fruit-fly population</a:t>
-            </a:r>
-            <a:endParaRPr lang="en-US" sz="2200" dirty="0"/>
-          </a:p>
-          <a:p>
-            <a:pPr algn="l" marL="349250" indent="-349250">
+              <a:t>Explain the science idea in a written response</a:t>
+            </a:r>
+            <a:endParaRPr lang="en-US" sz="2100" dirty="0"/>
+          </a:p>
+          <a:p>
+            <a:pPr algn="l" marL="333375" indent="-333375">
               <a:lnSpc>
-                <a:spcPts val="2816"/>
+                <a:spcPts val="2730"/>
               </a:lnSpc>
               <a:spcBef>
                 <a:spcPts val="10"/>
@@ -3252,7 +3152,7 @@
               <a:buChar char="•"/>
             </a:pPr>
             <a:r>
-              <a:rPr lang="en-US" altLang="en-US" sz="2200" dirty="0">
+              <a:rPr lang="en-US" altLang="en-US" sz="2100" dirty="0">
                 <a:solidFill>
                   <a:srgbClr val="3C4043"/>
                 </a:solidFill>
@@ -3260,9 +3160,9 @@
                 <a:ea typeface="Inter" pitchFamily="34" charset="-122"/>
                 <a:cs typeface="Inter" pitchFamily="34" charset="-120"/>
               </a:rPr>
-              <a:t>Write a complete CER explanation</a:t>
-            </a:r>
-            <a:endParaRPr lang="en-US" sz="2200" dirty="0"/>
+              <a:t>Support the explanation with evidence</a:t>
+            </a:r>
+            <a:endParaRPr lang="en-US" sz="2100" dirty="0"/>
           </a:p>
         </p:txBody>
       </p:sp>
@@ -3274,8 +3174,8 @@
         </p:nvSpPr>
         <p:spPr>
           <a:xfrm>
-            <a:off x="8128000" y="2857500"/>
-            <a:ext cx="7620000" cy="3886200"/>
+            <a:off x="8382000" y="2413000"/>
+            <a:ext cx="7366000" cy="4191000"/>
           </a:xfrm>
           <a:prstGeom prst="rect">
             <a:avLst/>
@@ -3299,8 +3199,8 @@
         </p:nvSpPr>
         <p:spPr>
           <a:xfrm>
-            <a:off x="8470900" y="3225800"/>
-            <a:ext cx="6604000" cy="444500"/>
+            <a:off x="8763000" y="2794000"/>
+            <a:ext cx="6604000" cy="457200"/>
           </a:xfrm>
           <a:prstGeom prst="rect">
             <a:avLst/>
@@ -3316,17 +3216,17 @@
               <a:buNone/>
             </a:pPr>
             <a:r>
-              <a:rPr lang="en-US" altLang="en-US" sz="2700" dirty="0">
-                <a:solidFill>
-                  <a:srgbClr val="3C4043"/>
-                </a:solidFill>
-                <a:latin typeface="Inter" pitchFamily="34" charset="0"/>
-                <a:ea typeface="Inter" pitchFamily="34" charset="-122"/>
-                <a:cs typeface="Inter" pitchFamily="34" charset="-120"/>
-              </a:rPr>
-              <a:t>EVIDENCE OF MASTERY</a:t>
-            </a:r>
-            <a:endParaRPr lang="en-US" sz="2700" dirty="0"/>
+              <a:rPr lang="en-US" altLang="en-US" sz="2600" dirty="0">
+                <a:solidFill>
+                  <a:srgbClr val="202124"/>
+                </a:solidFill>
+                <a:latin typeface="Inter" pitchFamily="34" charset="0"/>
+                <a:ea typeface="Inter" pitchFamily="34" charset="-122"/>
+                <a:cs typeface="Inter" pitchFamily="34" charset="-120"/>
+              </a:rPr>
+              <a:t>WHAT A STRONG RESPONSE INCLUDES</a:t>
+            </a:r>
+            <a:endParaRPr lang="en-US" sz="2600" dirty="0"/>
           </a:p>
         </p:txBody>
       </p:sp>
@@ -3338,22 +3238,22 @@
         </p:nvSpPr>
         <p:spPr>
           <a:xfrm>
-            <a:off x="8470900" y="4064000"/>
-            <a:ext cx="6350000" cy="2209800"/>
-          </a:xfrm>
-          <a:prstGeom prst="rect">
-            <a:avLst/>
-          </a:prstGeom>
-          <a:noFill/>
-          <a:ln/>
-        </p:spPr>
-        <p:txBody>
-          <a:bodyPr wrap="square" lIns="0" tIns="0" rIns="0" bIns="0" rtlCol="0" anchor="t"/>
-          <a:lstStyle/>
-          <a:p>
-            <a:pPr algn="l" marL="349250" indent="-349250">
+            <a:off x="8763000" y="3708400"/>
+            <a:ext cx="6604000" cy="2540000"/>
+          </a:xfrm>
+          <a:prstGeom prst="rect">
+            <a:avLst/>
+          </a:prstGeom>
+          <a:noFill/>
+          <a:ln/>
+        </p:spPr>
+        <p:txBody>
+          <a:bodyPr wrap="square" lIns="0" tIns="0" rIns="0" bIns="0" rtlCol="0" anchor="t"/>
+          <a:lstStyle/>
+          <a:p>
+            <a:pPr algn="l" marL="333375" indent="-333375">
               <a:lnSpc>
-                <a:spcPts val="2816"/>
+                <a:spcPts val="2730"/>
               </a:lnSpc>
               <a:spcBef>
                 <a:spcPts val="10"/>
@@ -3362,7 +3262,7 @@
               <a:buChar char="•"/>
             </a:pPr>
             <a:r>
-              <a:rPr lang="en-US" altLang="en-US" sz="2200" dirty="0">
+              <a:rPr lang="en-US" altLang="en-US" sz="2100" dirty="0">
                 <a:solidFill>
                   <a:srgbClr val="3C4043"/>
                 </a:solidFill>
@@ -3370,14 +3270,14 @@
                 <a:ea typeface="Inter" pitchFamily="34" charset="-122"/>
                 <a:cs typeface="Inter" pitchFamily="34" charset="-120"/>
               </a:rPr>
-              <a:t>Accurate claim/prediction about the population</a:t>
-            </a:r>
-            <a:endParaRPr lang="en-US" sz="2200" dirty="0"/>
-          </a:p>
-          <a:p>
-            <a:pPr algn="l" marL="349250" indent="-349250">
+              <a:t>A clear claim or prediction</a:t>
+            </a:r>
+            <a:endParaRPr lang="en-US" sz="2100" dirty="0"/>
+          </a:p>
+          <a:p>
+            <a:pPr algn="l" marL="333375" indent="-333375">
               <a:lnSpc>
-                <a:spcPts val="2816"/>
+                <a:spcPts val="2730"/>
               </a:lnSpc>
               <a:spcBef>
                 <a:spcPts val="10"/>
@@ -3386,7 +3286,7 @@
               <a:buChar char="•"/>
             </a:pPr>
             <a:r>
-              <a:rPr lang="en-US" altLang="en-US" sz="2200" dirty="0">
+              <a:rPr lang="en-US" altLang="en-US" sz="2100" dirty="0">
                 <a:solidFill>
                   <a:srgbClr val="3C4043"/>
                 </a:solidFill>
@@ -3396,12 +3296,12 @@
               </a:rPr>
               <a:t>Relevant evidence from both visuals</a:t>
             </a:r>
-            <a:endParaRPr lang="en-US" sz="2200" dirty="0"/>
-          </a:p>
-          <a:p>
-            <a:pPr algn="l" marL="349250" indent="-349250">
+            <a:endParaRPr lang="en-US" sz="2100" dirty="0"/>
+          </a:p>
+          <a:p>
+            <a:pPr algn="l" marL="333375" indent="-333375">
               <a:lnSpc>
-                <a:spcPts val="2816"/>
+                <a:spcPts val="2730"/>
               </a:lnSpc>
               <a:spcBef>
                 <a:spcPts val="10"/>
@@ -3410,7 +3310,7 @@
               <a:buChar char="•"/>
             </a:pPr>
             <a:r>
-              <a:rPr lang="en-US" altLang="en-US" sz="2200" dirty="0">
+              <a:rPr lang="en-US" altLang="en-US" sz="2100" dirty="0">
                 <a:solidFill>
                   <a:srgbClr val="3C4043"/>
                 </a:solidFill>
@@ -3418,14 +3318,14 @@
                 <a:ea typeface="Inter" pitchFamily="34" charset="-122"/>
                 <a:cs typeface="Inter" pitchFamily="34" charset="-120"/>
               </a:rPr>
-              <a:t>Scientific reasoning that connects predator-prey relationships and carrying capacity</a:t>
-            </a:r>
-            <a:endParaRPr lang="en-US" sz="2200" dirty="0"/>
-          </a:p>
-          <a:p>
-            <a:pPr algn="l" marL="349250" indent="-349250">
+              <a:t>Reasoning that connects the evidence to the science idea</a:t>
+            </a:r>
+            <a:endParaRPr lang="en-US" sz="2100" dirty="0"/>
+          </a:p>
+          <a:p>
+            <a:pPr algn="l" marL="333375" indent="-333375">
               <a:lnSpc>
-                <a:spcPts val="2816"/>
+                <a:spcPts val="2730"/>
               </a:lnSpc>
               <a:spcBef>
                 <a:spcPts val="10"/>
@@ -3434,7 +3334,7 @@
               <a:buChar char="•"/>
             </a:pPr>
             <a:r>
-              <a:rPr lang="en-US" altLang="en-US" sz="2200" dirty="0">
+              <a:rPr lang="en-US" altLang="en-US" sz="2100" dirty="0">
                 <a:solidFill>
                   <a:srgbClr val="3C4043"/>
                 </a:solidFill>
@@ -3442,9 +3342,9 @@
                 <a:ea typeface="Inter" pitchFamily="34" charset="-122"/>
                 <a:cs typeface="Inter" pitchFamily="34" charset="-120"/>
               </a:rPr>
-              <a:t>Clear language that makes the logic visible</a:t>
-            </a:r>
-            <a:endParaRPr lang="en-US" sz="2200" dirty="0"/>
+              <a:t>Clear science language</a:t>
+            </a:r>
+            <a:endParaRPr lang="en-US" sz="2100" dirty="0"/>
           </a:p>
         </p:txBody>
       </p:sp>
@@ -3456,8 +3356,8 @@
         </p:nvSpPr>
         <p:spPr>
           <a:xfrm>
-            <a:off x="508000" y="7327900"/>
-            <a:ext cx="15240000" cy="584200"/>
+            <a:off x="508000" y="6985000"/>
+            <a:ext cx="15240000" cy="762000"/>
           </a:xfrm>
           <a:prstGeom prst="rect">
             <a:avLst/>
@@ -3476,8 +3376,8 @@
         </p:nvSpPr>
         <p:spPr>
           <a:xfrm>
-            <a:off x="812800" y="7480300"/>
-            <a:ext cx="13970000" cy="279400"/>
+            <a:off x="812800" y="7239000"/>
+            <a:ext cx="14605000" cy="304800"/>
           </a:xfrm>
           <a:prstGeom prst="rect">
             <a:avLst/>
@@ -3493,7 +3393,7 @@
               <a:buNone/>
             </a:pPr>
             <a:r>
-              <a:rPr lang="en-US" altLang="en-US" sz="1900" b="1" dirty="0">
+              <a:rPr lang="en-US" altLang="en-US" sz="2000" b="1" dirty="0">
                 <a:solidFill>
                   <a:srgbClr val="F6B4BA"/>
                 </a:solidFill>
@@ -3501,10 +3401,10 @@
                 <a:ea typeface="Inter" pitchFamily="34" charset="-122"/>
                 <a:cs typeface="Inter" pitchFamily="34" charset="-120"/>
               </a:rPr>
-              <a:t>Reminder:</a:t>
-            </a:r>
-            <a:r>
-              <a:rPr lang="en-US" altLang="en-US" sz="1900" dirty="0">
+              <a:t>Keep this bar visible</a:t>
+            </a:r>
+            <a:r>
+              <a:rPr lang="en-US" altLang="en-US" sz="2000" dirty="0">
                 <a:solidFill>
                   <a:srgbClr val="FFFFFF"/>
                 </a:solidFill>
@@ -3512,9 +3412,9 @@
                 <a:ea typeface="Inter" pitchFamily="34" charset="-122"/>
                 <a:cs typeface="Inter" pitchFamily="34" charset="-120"/>
               </a:rPr>
-              <a:t> Use this agreed bar before reading the writing, annotating evidence, or deciding on feedback.</a:t>
-            </a:r>
-            <a:endParaRPr lang="en-US" sz="1900" dirty="0"/>
+              <a:t> while you read, mark, and write feedback on student work.</a:t>
+            </a:r>
+            <a:endParaRPr lang="en-US" sz="2000" dirty="0"/>
           </a:p>
         </p:txBody>
       </p:sp>
@@ -3638,7 +3538,7 @@
         <p:spPr>
           <a:xfrm>
             <a:off x="508000" y="292100"/>
-            <a:ext cx="12065000" cy="482600"/>
+            <a:ext cx="11430000" cy="482600"/>
           </a:xfrm>
           <a:prstGeom prst="rect">
             <a:avLst/>
@@ -3662,7 +3562,7 @@
                 <a:ea typeface="Inter" pitchFamily="34" charset="-122"/>
                 <a:cs typeface="Inter" pitchFamily="34" charset="-120"/>
               </a:rPr>
-              <a:t>Analyze Completed Student Writing Against the Bar</a:t>
+              <a:t>Step 2: Read Student Writing</a:t>
             </a:r>
             <a:endParaRPr lang="en-US" sz="3000" dirty="0"/>
           </a:p>
@@ -3676,8 +3576,8 @@
         </p:nvSpPr>
         <p:spPr>
           <a:xfrm>
-            <a:off x="12954000" y="355600"/>
-            <a:ext cx="2794000" cy="304800"/>
+            <a:off x="12827000" y="355600"/>
+            <a:ext cx="2921000" cy="304800"/>
           </a:xfrm>
           <a:prstGeom prst="rect">
             <a:avLst/>
@@ -3715,8 +3615,8 @@
         </p:nvSpPr>
         <p:spPr>
           <a:xfrm>
-            <a:off x="508000" y="1397000"/>
-            <a:ext cx="14478000" cy="635000"/>
+            <a:off x="508000" y="1346200"/>
+            <a:ext cx="15240000" cy="660400"/>
           </a:xfrm>
           <a:prstGeom prst="rect">
             <a:avLst/>
@@ -3740,7 +3640,7 @@
                 <a:ea typeface="Inter" pitchFamily="34" charset="-122"/>
                 <a:cs typeface="Inter" pitchFamily="34" charset="-120"/>
               </a:rPr>
-              <a:t>Read a small, representative, de-identified set of completed benchmark responses. Annotate what is visible in the writing before deciding what written feedback or next learning experience is needed.</a:t>
+              <a:t>Read 3–5 de-identified samples and use three marks only. Mark the work, not the student.</a:t>
             </a:r>
             <a:endParaRPr lang="en-US" sz="2300" dirty="0"/>
           </a:p>
@@ -3754,8 +3654,8 @@
         </p:nvSpPr>
         <p:spPr>
           <a:xfrm>
-            <a:off x="508000" y="2730500"/>
-            <a:ext cx="4699000" cy="3873500"/>
+            <a:off x="508000" y="2413000"/>
+            <a:ext cx="4699000" cy="4064000"/>
           </a:xfrm>
           <a:prstGeom prst="rect">
             <a:avLst/>
@@ -3773,14 +3673,14 @@
       </p:sp>
       <p:sp>
         <p:nvSpPr>
-          <p:cNvPr id="7" name="claim-title"/>
-          <p:cNvSpPr/>
-          <p:nvPr/>
-        </p:nvSpPr>
-        <p:spPr>
-          <a:xfrm>
-            <a:off x="850900" y="3098800"/>
-            <a:ext cx="3683000" cy="381000"/>
+          <p:cNvPr id="7" name="m1-title"/>
+          <p:cNvSpPr/>
+          <p:nvPr/>
+        </p:nvSpPr>
+        <p:spPr>
+          <a:xfrm>
+            <a:off x="889000" y="2794000"/>
+            <a:ext cx="3937000" cy="431800"/>
           </a:xfrm>
           <a:prstGeom prst="rect">
             <a:avLst/>
@@ -3796,7 +3696,7 @@
               <a:buNone/>
             </a:pPr>
             <a:r>
-              <a:rPr lang="en-US" altLang="en-US" sz="2400" dirty="0">
+              <a:rPr lang="en-US" altLang="en-US" sz="2500" dirty="0">
                 <a:solidFill>
                   <a:srgbClr val="238636"/>
                 </a:solidFill>
@@ -3804,42 +3704,38 @@
                 <a:ea typeface="Inter" pitchFamily="34" charset="-122"/>
                 <a:cs typeface="Inter" pitchFamily="34" charset="-120"/>
               </a:rPr>
-              <a:t>1. MARK WHAT IS VISIBLE</a:t>
-            </a:r>
-            <a:endParaRPr lang="en-US" sz="2400" dirty="0"/>
-          </a:p>
-        </p:txBody>
-      </p:sp>
-      <p:sp>
-        <p:nvSpPr>
-          <p:cNvPr id="8" name="claim-body"/>
-          <p:cNvSpPr/>
-          <p:nvPr/>
-        </p:nvSpPr>
-        <p:spPr>
-          <a:xfrm>
-            <a:off x="850900" y="4038600"/>
-            <a:ext cx="3683000" cy="1879600"/>
-          </a:xfrm>
-          <a:prstGeom prst="rect">
-            <a:avLst/>
-          </a:prstGeom>
-          <a:noFill/>
-          <a:ln/>
-        </p:spPr>
-        <p:txBody>
-          <a:bodyPr wrap="square" lIns="0" tIns="0" rIns="0" bIns="0" rtlCol="0" anchor="t"/>
-          <a:lstStyle/>
-          <a:p>
-            <a:pPr algn="l" marL="333375" indent="-333375">
+              <a:t>✓ What students can do</a:t>
+            </a:r>
+            <a:endParaRPr lang="en-US" sz="2500" dirty="0"/>
+          </a:p>
+        </p:txBody>
+      </p:sp>
+      <p:sp>
+        <p:nvSpPr>
+          <p:cNvPr id="8" name="m1-body"/>
+          <p:cNvSpPr/>
+          <p:nvPr/>
+        </p:nvSpPr>
+        <p:spPr>
+          <a:xfrm>
+            <a:off x="889000" y="3632200"/>
+            <a:ext cx="3937000" cy="2540000"/>
+          </a:xfrm>
+          <a:prstGeom prst="rect">
+            <a:avLst/>
+          </a:prstGeom>
+          <a:noFill/>
+          <a:ln/>
+        </p:spPr>
+        <p:txBody>
+          <a:bodyPr wrap="square" lIns="0" tIns="0" rIns="0" bIns="0" rtlCol="0" anchor="t"/>
+          <a:lstStyle/>
+          <a:p>
+            <a:pPr algn="l" indent="0" marL="0">
               <a:lnSpc>
-                <a:spcPts val="2646"/>
+                <a:spcPts val="2730"/>
               </a:lnSpc>
-              <a:spcBef>
-                <a:spcPts val="10"/>
-              </a:spcBef>
-              <a:buSzPct val="100000"/>
-              <a:buChar char="•"/>
+              <a:buNone/>
             </a:pPr>
             <a:r>
               <a:rPr lang="en-US" altLang="en-US" sz="2100" dirty="0">
@@ -3850,82 +3746,10 @@
                 <a:ea typeface="Inter" pitchFamily="34" charset="-122"/>
                 <a:cs typeface="Inter" pitchFamily="34" charset="-120"/>
               </a:rPr>
-              <a:t>Claim or prediction</a:t>
+              <a:t>Mark the parts that are already present: a claim, evidence from the source, reasoning, or clear science language.</a:t>
             </a:r>
             <a:endParaRPr lang="en-US" sz="2100" dirty="0"/>
           </a:p>
-          <a:p>
-            <a:pPr algn="l" marL="333375" indent="-333375">
-              <a:lnSpc>
-                <a:spcPts val="2646"/>
-              </a:lnSpc>
-              <a:spcBef>
-                <a:spcPts val="10"/>
-              </a:spcBef>
-              <a:buSzPct val="100000"/>
-              <a:buChar char="•"/>
-            </a:pPr>
-            <a:r>
-              <a:rPr lang="en-US" altLang="en-US" sz="2100" dirty="0">
-                <a:solidFill>
-                  <a:srgbClr val="3C4043"/>
-                </a:solidFill>
-                <a:latin typeface="Inter" pitchFamily="34" charset="0"/>
-                <a:ea typeface="Inter" pitchFamily="34" charset="-122"/>
-                <a:cs typeface="Inter" pitchFamily="34" charset="-120"/>
-              </a:rPr>
-              <a:t>Evidence from the source/visuals</a:t>
-            </a:r>
-            <a:endParaRPr lang="en-US" sz="2100" dirty="0"/>
-          </a:p>
-          <a:p>
-            <a:pPr algn="l" marL="333375" indent="-333375">
-              <a:lnSpc>
-                <a:spcPts val="2646"/>
-              </a:lnSpc>
-              <a:spcBef>
-                <a:spcPts val="10"/>
-              </a:spcBef>
-              <a:buSzPct val="100000"/>
-              <a:buChar char="•"/>
-            </a:pPr>
-            <a:r>
-              <a:rPr lang="en-US" altLang="en-US" sz="2100" dirty="0">
-                <a:solidFill>
-                  <a:srgbClr val="3C4043"/>
-                </a:solidFill>
-                <a:latin typeface="Inter" pitchFamily="34" charset="0"/>
-                <a:ea typeface="Inter" pitchFamily="34" charset="-122"/>
-                <a:cs typeface="Inter" pitchFamily="34" charset="-120"/>
-              </a:rPr>
-              <a:t>Reasoning that connects evidence and science idea</a:t>
-            </a:r>
-            <a:endParaRPr lang="en-US" sz="2100" dirty="0"/>
-          </a:p>
-          <a:p>
-            <a:pPr algn="l" marL="333375" indent="-333375">
-              <a:lnSpc>
-                <a:spcPts val="2646"/>
-              </a:lnSpc>
-              <a:spcBef>
-                <a:spcPts val="10"/>
-              </a:spcBef>
-              <a:buSzPct val="100000"/>
-              <a:buChar char="•"/>
-            </a:pPr>
-            <a:r>
-              <a:rPr lang="en-US" altLang="en-US" sz="2100" dirty="0">
-                <a:solidFill>
-                  <a:srgbClr val="3C4043"/>
-                </a:solidFill>
-                <a:latin typeface="Inter" pitchFamily="34" charset="0"/>
-                <a:ea typeface="Inter" pitchFamily="34" charset="-122"/>
-                <a:cs typeface="Inter" pitchFamily="34" charset="-120"/>
-              </a:rPr>
-              <a:t>Language that makes the response clear</a:t>
-            </a:r>
-            <a:endParaRPr lang="en-US" sz="2100" dirty="0"/>
-          </a:p>
         </p:txBody>
       </p:sp>
       <p:sp>
@@ -3936,8 +3760,8 @@
         </p:nvSpPr>
         <p:spPr>
           <a:xfrm>
-            <a:off x="5778500" y="2730500"/>
-            <a:ext cx="4699000" cy="3873500"/>
+            <a:off x="5778500" y="2413000"/>
+            <a:ext cx="4699000" cy="4064000"/>
           </a:xfrm>
           <a:prstGeom prst="rect">
             <a:avLst/>
@@ -3955,14 +3779,14 @@
       </p:sp>
       <p:sp>
         <p:nvSpPr>
-          <p:cNvPr id="10" name="feedback-title"/>
-          <p:cNvSpPr/>
-          <p:nvPr/>
-        </p:nvSpPr>
-        <p:spPr>
-          <a:xfrm>
-            <a:off x="6121400" y="3098800"/>
-            <a:ext cx="3683000" cy="381000"/>
+          <p:cNvPr id="10" name="m2-title"/>
+          <p:cNvSpPr/>
+          <p:nvPr/>
+        </p:nvSpPr>
+        <p:spPr>
+          <a:xfrm>
+            <a:off x="6159500" y="2794000"/>
+            <a:ext cx="3937000" cy="431800"/>
           </a:xfrm>
           <a:prstGeom prst="rect">
             <a:avLst/>
@@ -3978,7 +3802,49 @@
               <a:buNone/>
             </a:pPr>
             <a:r>
-              <a:rPr lang="en-US" altLang="en-US" sz="2400" dirty="0">
+              <a:rPr lang="en-US" altLang="en-US" sz="2500" dirty="0">
+                <a:solidFill>
+                  <a:srgbClr val="202124"/>
+                </a:solidFill>
+                <a:latin typeface="Inter" pitchFamily="34" charset="0"/>
+                <a:ea typeface="Inter" pitchFamily="34" charset="-122"/>
+                <a:cs typeface="Inter" pitchFamily="34" charset="-120"/>
+              </a:rPr>
+              <a:t>△ One priority need</a:t>
+            </a:r>
+            <a:endParaRPr lang="en-US" sz="2500" dirty="0"/>
+          </a:p>
+        </p:txBody>
+      </p:sp>
+      <p:sp>
+        <p:nvSpPr>
+          <p:cNvPr id="11" name="m2-body"/>
+          <p:cNvSpPr/>
+          <p:nvPr/>
+        </p:nvSpPr>
+        <p:spPr>
+          <a:xfrm>
+            <a:off x="6159500" y="3632200"/>
+            <a:ext cx="3937000" cy="2540000"/>
+          </a:xfrm>
+          <a:prstGeom prst="rect">
+            <a:avLst/>
+          </a:prstGeom>
+          <a:noFill/>
+          <a:ln/>
+        </p:spPr>
+        <p:txBody>
+          <a:bodyPr wrap="square" lIns="0" tIns="0" rIns="0" bIns="0" rtlCol="0" anchor="t"/>
+          <a:lstStyle/>
+          <a:p>
+            <a:pPr algn="l" indent="0" marL="0">
+              <a:lnSpc>
+                <a:spcPts val="2730"/>
+              </a:lnSpc>
+              <a:buNone/>
+            </a:pPr>
+            <a:r>
+              <a:rPr lang="en-US" altLang="en-US" sz="2100" dirty="0">
                 <a:solidFill>
                   <a:srgbClr val="3C4043"/>
                 </a:solidFill>
@@ -3986,104 +3852,10 @@
                 <a:ea typeface="Inter" pitchFamily="34" charset="-122"/>
                 <a:cs typeface="Inter" pitchFamily="34" charset="-120"/>
               </a:rPr>
-              <a:t>2. RECORD ONE NEED</a:t>
-            </a:r>
-            <a:endParaRPr lang="en-US" sz="2400" dirty="0"/>
-          </a:p>
-        </p:txBody>
-      </p:sp>
-      <p:sp>
-        <p:nvSpPr>
-          <p:cNvPr id="11" name="feedback-body"/>
-          <p:cNvSpPr/>
-          <p:nvPr/>
-        </p:nvSpPr>
-        <p:spPr>
-          <a:xfrm>
-            <a:off x="6121400" y="4038600"/>
-            <a:ext cx="3683000" cy="1879600"/>
-          </a:xfrm>
-          <a:prstGeom prst="rect">
-            <a:avLst/>
-          </a:prstGeom>
-          <a:noFill/>
-          <a:ln/>
-        </p:spPr>
-        <p:txBody>
-          <a:bodyPr wrap="square" lIns="0" tIns="0" rIns="0" bIns="0" rtlCol="0" anchor="t"/>
-          <a:lstStyle/>
-          <a:p>
-            <a:pPr algn="l" marL="333375" indent="-333375">
-              <a:lnSpc>
-                <a:spcPts val="2646"/>
-              </a:lnSpc>
-              <a:spcBef>
-                <a:spcPts val="10"/>
-              </a:spcBef>
-              <a:buSzPct val="100000"/>
-              <a:buChar char="•"/>
-            </a:pPr>
-            <a:r>
-              <a:rPr lang="en-US" altLang="en-US" sz="2100" dirty="0">
-                <a:solidFill>
-                  <a:srgbClr val="3C4043"/>
-                </a:solidFill>
-                <a:latin typeface="Inter" pitchFamily="34" charset="0"/>
-                <a:ea typeface="Inter" pitchFamily="34" charset="-122"/>
-                <a:cs typeface="Inter" pitchFamily="34" charset="-120"/>
-              </a:rPr>
-              <a:t>What is partial, missing, or confused?</a:t>
+              <a:t>Mark what is partial, missing, or confused, then decide whether the need is science, source use, or written reasoning.</a:t>
             </a:r>
             <a:endParaRPr lang="en-US" sz="2100" dirty="0"/>
           </a:p>
-          <a:p>
-            <a:pPr algn="l" marL="333375" indent="-333375">
-              <a:lnSpc>
-                <a:spcPts val="2646"/>
-              </a:lnSpc>
-              <a:spcBef>
-                <a:spcPts val="10"/>
-              </a:spcBef>
-              <a:buSzPct val="100000"/>
-              <a:buChar char="•"/>
-            </a:pPr>
-            <a:r>
-              <a:rPr lang="en-US" altLang="en-US" sz="2100" dirty="0">
-                <a:solidFill>
-                  <a:srgbClr val="3C4043"/>
-                </a:solidFill>
-                <a:latin typeface="Inter" pitchFamily="34" charset="0"/>
-                <a:ea typeface="Inter" pitchFamily="34" charset="-122"/>
-                <a:cs typeface="Inter" pitchFamily="34" charset="-120"/>
-              </a:rPr>
-              <a:t>Is the need science, source use, or written reasoning?</a:t>
-            </a:r>
-            <a:endParaRPr lang="en-US" sz="2100" dirty="0"/>
-          </a:p>
-          <a:p>
-            <a:pPr algn="l" marL="333375" indent="-333375">
-              <a:lnSpc>
-                <a:spcPts val="2646"/>
-              </a:lnSpc>
-              <a:spcBef>
-                <a:spcPts val="10"/>
-              </a:spcBef>
-              <a:buSzPct val="100000"/>
-              <a:buChar char="•"/>
-            </a:pPr>
-            <a:r>
-              <a:rPr lang="en-US" altLang="en-US" sz="2100" dirty="0">
-                <a:solidFill>
-                  <a:srgbClr val="3C4043"/>
-                </a:solidFill>
-                <a:latin typeface="Inter" pitchFamily="34" charset="0"/>
-                <a:ea typeface="Inter" pitchFamily="34" charset="-122"/>
-                <a:cs typeface="Inter" pitchFamily="34" charset="-120"/>
-              </a:rPr>
-              <a:t>Which criterion will make the most difference now?</a:t>
-            </a:r>
-            <a:endParaRPr lang="en-US" sz="2100" dirty="0"/>
-          </a:p>
         </p:txBody>
       </p:sp>
       <p:sp>
@@ -4094,8 +3866,8 @@
         </p:nvSpPr>
         <p:spPr>
           <a:xfrm>
-            <a:off x="11049000" y="2730500"/>
-            <a:ext cx="4699000" cy="3873500"/>
+            <a:off x="11049000" y="2413000"/>
+            <a:ext cx="4699000" cy="4064000"/>
           </a:xfrm>
           <a:prstGeom prst="rect">
             <a:avLst/>
@@ -4113,14 +3885,14 @@
       </p:sp>
       <p:sp>
         <p:nvSpPr>
-          <p:cNvPr id="13" name="response-title"/>
-          <p:cNvSpPr/>
-          <p:nvPr/>
-        </p:nvSpPr>
-        <p:spPr>
-          <a:xfrm>
-            <a:off x="11391900" y="3098800"/>
-            <a:ext cx="3683000" cy="381000"/>
+          <p:cNvPr id="13" name="m3-title"/>
+          <p:cNvSpPr/>
+          <p:nvPr/>
+        </p:nvSpPr>
+        <p:spPr>
+          <a:xfrm>
+            <a:off x="11430000" y="2794000"/>
+            <a:ext cx="3937000" cy="431800"/>
           </a:xfrm>
           <a:prstGeom prst="rect">
             <a:avLst/>
@@ -4136,7 +3908,49 @@
               <a:buNone/>
             </a:pPr>
             <a:r>
-              <a:rPr lang="en-US" altLang="en-US" sz="2400" dirty="0">
+              <a:rPr lang="en-US" altLang="en-US" sz="2500" dirty="0">
+                <a:solidFill>
+                  <a:srgbClr val="202124"/>
+                </a:solidFill>
+                <a:latin typeface="Inter" pitchFamily="34" charset="0"/>
+                <a:ea typeface="Inter" pitchFamily="34" charset="-122"/>
+                <a:cs typeface="Inter" pitchFamily="34" charset="-120"/>
+              </a:rPr>
+              <a:t>→ The criterion to name</a:t>
+            </a:r>
+            <a:endParaRPr lang="en-US" sz="2500" dirty="0"/>
+          </a:p>
+        </p:txBody>
+      </p:sp>
+      <p:sp>
+        <p:nvSpPr>
+          <p:cNvPr id="14" name="m3-body"/>
+          <p:cNvSpPr/>
+          <p:nvPr/>
+        </p:nvSpPr>
+        <p:spPr>
+          <a:xfrm>
+            <a:off x="11430000" y="3632200"/>
+            <a:ext cx="3937000" cy="2540000"/>
+          </a:xfrm>
+          <a:prstGeom prst="rect">
+            <a:avLst/>
+          </a:prstGeom>
+          <a:noFill/>
+          <a:ln/>
+        </p:spPr>
+        <p:txBody>
+          <a:bodyPr wrap="square" lIns="0" tIns="0" rIns="0" bIns="0" rtlCol="0" anchor="t"/>
+          <a:lstStyle/>
+          <a:p>
+            <a:pPr algn="l" indent="0" marL="0">
+              <a:lnSpc>
+                <a:spcPts val="2730"/>
+              </a:lnSpc>
+              <a:buNone/>
+            </a:pPr>
+            <a:r>
+              <a:rPr lang="en-US" altLang="en-US" sz="2100" dirty="0">
                 <a:solidFill>
                   <a:srgbClr val="3C4043"/>
                 </a:solidFill>
@@ -4144,128 +3958,10 @@
                 <a:ea typeface="Inter" pitchFamily="34" charset="-122"/>
                 <a:cs typeface="Inter" pitchFamily="34" charset="-120"/>
               </a:rPr>
-              <a:t>3. WRITE THE FEEDBACK</a:t>
-            </a:r>
-            <a:endParaRPr lang="en-US" sz="2400" dirty="0"/>
-          </a:p>
-        </p:txBody>
-      </p:sp>
-      <p:sp>
-        <p:nvSpPr>
-          <p:cNvPr id="14" name="response-body"/>
-          <p:cNvSpPr/>
-          <p:nvPr/>
-        </p:nvSpPr>
-        <p:spPr>
-          <a:xfrm>
-            <a:off x="11391900" y="4038600"/>
-            <a:ext cx="3683000" cy="1879600"/>
-          </a:xfrm>
-          <a:prstGeom prst="rect">
-            <a:avLst/>
-          </a:prstGeom>
-          <a:noFill/>
-          <a:ln/>
-        </p:spPr>
-        <p:txBody>
-          <a:bodyPr wrap="square" lIns="0" tIns="0" rIns="0" bIns="0" rtlCol="0" anchor="t"/>
-          <a:lstStyle/>
-          <a:p>
-            <a:pPr algn="l" marL="333375" indent="-333375">
-              <a:lnSpc>
-                <a:spcPts val="2646"/>
-              </a:lnSpc>
-              <a:spcBef>
-                <a:spcPts val="10"/>
-              </a:spcBef>
-              <a:buSzPct val="100000"/>
-              <a:buChar char="•"/>
-            </a:pPr>
-            <a:r>
-              <a:rPr lang="en-US" altLang="en-US" sz="2100" dirty="0">
-                <a:solidFill>
-                  <a:srgbClr val="3C4043"/>
-                </a:solidFill>
-                <a:latin typeface="Inter" pitchFamily="34" charset="0"/>
-                <a:ea typeface="Inter" pitchFamily="34" charset="-122"/>
-                <a:cs typeface="Inter" pitchFamily="34" charset="-120"/>
-              </a:rPr>
-              <a:t>Name the criterion</a:t>
+              <a:t>Choose the one criterion that will help students most right now. You will use it in the written feedback.</a:t>
             </a:r>
             <a:endParaRPr lang="en-US" sz="2100" dirty="0"/>
           </a:p>
-          <a:p>
-            <a:pPr algn="l" marL="333375" indent="-333375">
-              <a:lnSpc>
-                <a:spcPts val="2646"/>
-              </a:lnSpc>
-              <a:spcBef>
-                <a:spcPts val="10"/>
-              </a:spcBef>
-              <a:buSzPct val="100000"/>
-              <a:buChar char="•"/>
-            </a:pPr>
-            <a:r>
-              <a:rPr lang="en-US" altLang="en-US" sz="2100" dirty="0">
-                <a:solidFill>
-                  <a:srgbClr val="3C4043"/>
-                </a:solidFill>
-                <a:latin typeface="Inter" pitchFamily="34" charset="0"/>
-                <a:ea typeface="Inter" pitchFamily="34" charset="-122"/>
-                <a:cs typeface="Inter" pitchFamily="34" charset="-120"/>
-              </a:rPr>
-              <a:t>Point back to the response or source</a:t>
-            </a:r>
-            <a:endParaRPr lang="en-US" sz="2100" dirty="0"/>
-          </a:p>
-          <a:p>
-            <a:pPr algn="l" marL="333375" indent="-333375">
-              <a:lnSpc>
-                <a:spcPts val="2646"/>
-              </a:lnSpc>
-              <a:spcBef>
-                <a:spcPts val="10"/>
-              </a:spcBef>
-              <a:buSzPct val="100000"/>
-              <a:buChar char="•"/>
-            </a:pPr>
-            <a:r>
-              <a:rPr lang="en-US" altLang="en-US" sz="2100" dirty="0">
-                <a:solidFill>
-                  <a:srgbClr val="3C4043"/>
-                </a:solidFill>
-                <a:latin typeface="Inter" pitchFamily="34" charset="0"/>
-                <a:ea typeface="Inter" pitchFamily="34" charset="-122"/>
-                <a:cs typeface="Inter" pitchFamily="34" charset="-120"/>
-              </a:rPr>
-              <a:t>Request a specific revision action</a:t>
-            </a:r>
-            <a:endParaRPr lang="en-US" sz="2100" dirty="0"/>
-          </a:p>
-          <a:p>
-            <a:pPr algn="l" marL="333375" indent="-333375">
-              <a:lnSpc>
-                <a:spcPts val="2646"/>
-              </a:lnSpc>
-              <a:spcBef>
-                <a:spcPts val="10"/>
-              </a:spcBef>
-              <a:buSzPct val="100000"/>
-              <a:buChar char="•"/>
-            </a:pPr>
-            <a:r>
-              <a:rPr lang="en-US" altLang="en-US" sz="2100" dirty="0">
-                <a:solidFill>
-                  <a:srgbClr val="3C4043"/>
-                </a:solidFill>
-                <a:latin typeface="Inter" pitchFamily="34" charset="0"/>
-                <a:ea typeface="Inter" pitchFamily="34" charset="-122"/>
-                <a:cs typeface="Inter" pitchFamily="34" charset="-120"/>
-              </a:rPr>
-              <a:t>Do not provide the answer</a:t>
-            </a:r>
-            <a:endParaRPr lang="en-US" sz="2100" dirty="0"/>
-          </a:p>
         </p:txBody>
       </p:sp>
       <p:sp>
@@ -4276,8 +3972,8 @@
         </p:nvSpPr>
         <p:spPr>
           <a:xfrm>
-            <a:off x="508000" y="7200900"/>
-            <a:ext cx="15240000" cy="711200"/>
+            <a:off x="508000" y="6858000"/>
+            <a:ext cx="15240000" cy="838200"/>
           </a:xfrm>
           <a:prstGeom prst="rect">
             <a:avLst/>
@@ -4290,14 +3986,14 @@
       </p:sp>
       <p:sp>
         <p:nvSpPr>
-          <p:cNvPr id="16" name="evidence-note"/>
-          <p:cNvSpPr/>
-          <p:nvPr/>
-        </p:nvSpPr>
-        <p:spPr>
-          <a:xfrm>
-            <a:off x="812800" y="7391400"/>
-            <a:ext cx="14097000" cy="355600"/>
+          <p:cNvPr id="16" name="rule"/>
+          <p:cNvSpPr/>
+          <p:nvPr/>
+        </p:nvSpPr>
+        <p:spPr>
+          <a:xfrm>
+            <a:off x="812800" y="7137400"/>
+            <a:ext cx="14605000" cy="330200"/>
           </a:xfrm>
           <a:prstGeom prst="rect">
             <a:avLst/>
@@ -4321,7 +4017,7 @@
                 <a:ea typeface="Inter" pitchFamily="34" charset="-122"/>
                 <a:cs typeface="Inter" pitchFamily="34" charset="-120"/>
               </a:rPr>
-              <a:t>Annotation note:</a:t>
+              <a:t>Ground rule:</a:t>
             </a:r>
             <a:r>
               <a:rPr lang="en-US" altLang="en-US" sz="2000" dirty="0">
@@ -4332,7 +4028,7 @@
                 <a:ea typeface="Inter" pitchFamily="34" charset="-122"/>
                 <a:cs typeface="Inter" pitchFamily="34" charset="-120"/>
               </a:rPr>
-              <a:t> writing evidence → criterion → written feedback → student revision → information for the next mastery decision.</a:t>
+              <a:t> describe the work. Do not rank students, teachers, classes, or courses.</a:t>
             </a:r>
             <a:endParaRPr lang="en-US" sz="2000" dirty="0"/>
           </a:p>
@@ -4458,7 +4154,7 @@
         <p:spPr>
           <a:xfrm>
             <a:off x="508000" y="292100"/>
-            <a:ext cx="11811000" cy="482600"/>
+            <a:ext cx="11430000" cy="482600"/>
           </a:xfrm>
           <a:prstGeom prst="rect">
             <a:avLst/>
@@ -4482,7 +4178,7 @@
                 <a:ea typeface="Inter" pitchFamily="34" charset="-122"/>
                 <a:cs typeface="Inter" pitchFamily="34" charset="-120"/>
               </a:rPr>
-              <a:t>Calibrate Written Feedback and the Revision Action</a:t>
+              <a:t>Step 3: Write the Feedback</a:t>
             </a:r>
             <a:endParaRPr lang="en-US" sz="3000" dirty="0"/>
           </a:p>
@@ -4535,8 +4231,8 @@
         </p:nvSpPr>
         <p:spPr>
           <a:xfrm>
-            <a:off x="508000" y="1397000"/>
-            <a:ext cx="14224000" cy="622300"/>
+            <a:off x="508000" y="1320800"/>
+            <a:ext cx="15240000" cy="685800"/>
           </a:xfrm>
           <a:prstGeom prst="rect">
             <a:avLst/>
@@ -4560,7 +4256,7 @@
                 <a:ea typeface="Inter" pitchFamily="34" charset="-122"/>
                 <a:cs typeface="Inter" pitchFamily="34" charset="-120"/>
               </a:rPr>
-              <a:t>Use the evidence from the writing to select one criterion-based comment that will help students do more of the science thinking themselves.</a:t>
+              <a:t>Write one short comment. Use the same three parts every time so students know what to do next.</a:t>
             </a:r>
             <a:endParaRPr lang="en-US" sz="2300" dirty="0"/>
           </a:p>
@@ -4574,8 +4270,8 @@
         </p:nvSpPr>
         <p:spPr>
           <a:xfrm>
-            <a:off x="508000" y="2730500"/>
-            <a:ext cx="4699000" cy="3937000"/>
+            <a:off x="508000" y="2336800"/>
+            <a:ext cx="4902200" cy="4267200"/>
           </a:xfrm>
           <a:prstGeom prst="rect">
             <a:avLst/>
@@ -4593,14 +4289,14 @@
       </p:sp>
       <p:sp>
         <p:nvSpPr>
-          <p:cNvPr id="7" name="look-title"/>
-          <p:cNvSpPr/>
-          <p:nvPr/>
-        </p:nvSpPr>
-        <p:spPr>
-          <a:xfrm>
-            <a:off x="838200" y="3073400"/>
-            <a:ext cx="3810000" cy="381000"/>
+          <p:cNvPr id="7" name="p1-title"/>
+          <p:cNvSpPr/>
+          <p:nvPr/>
+        </p:nvSpPr>
+        <p:spPr>
+          <a:xfrm>
+            <a:off x="889000" y="2692400"/>
+            <a:ext cx="4191000" cy="431800"/>
           </a:xfrm>
           <a:prstGeom prst="rect">
             <a:avLst/>
@@ -4616,30 +4312,30 @@
               <a:buNone/>
             </a:pPr>
             <a:r>
-              <a:rPr lang="en-US" altLang="en-US" sz="2400" dirty="0">
-                <a:solidFill>
-                  <a:srgbClr val="3C4043"/>
-                </a:solidFill>
-                <a:latin typeface="Inter" pitchFamily="34" charset="0"/>
-                <a:ea typeface="Inter" pitchFamily="34" charset="-122"/>
-                <a:cs typeface="Inter" pitchFamily="34" charset="-120"/>
-              </a:rPr>
-              <a:t>1. DESCRIBE THE PATTERN</a:t>
-            </a:r>
-            <a:endParaRPr lang="en-US" sz="2400" dirty="0"/>
-          </a:p>
-        </p:txBody>
-      </p:sp>
-      <p:sp>
-        <p:nvSpPr>
-          <p:cNvPr id="8" name="look-body"/>
-          <p:cNvSpPr/>
-          <p:nvPr/>
-        </p:nvSpPr>
-        <p:spPr>
-          <a:xfrm>
-            <a:off x="838200" y="3860800"/>
-            <a:ext cx="3810000" cy="2184400"/>
+              <a:rPr lang="en-US" altLang="en-US" sz="2500" dirty="0">
+                <a:solidFill>
+                  <a:srgbClr val="202124"/>
+                </a:solidFill>
+                <a:latin typeface="Inter" pitchFamily="34" charset="0"/>
+                <a:ea typeface="Inter" pitchFamily="34" charset="-122"/>
+                <a:cs typeface="Inter" pitchFamily="34" charset="-120"/>
+              </a:rPr>
+              <a:t>1. Name the criterion</a:t>
+            </a:r>
+            <a:endParaRPr lang="en-US" sz="2500" dirty="0"/>
+          </a:p>
+        </p:txBody>
+      </p:sp>
+      <p:sp>
+        <p:nvSpPr>
+          <p:cNvPr id="8" name="p1-body"/>
+          <p:cNvSpPr/>
+          <p:nvPr/>
+        </p:nvSpPr>
+        <p:spPr>
+          <a:xfrm>
+            <a:off x="889000" y="3505200"/>
+            <a:ext cx="4191000" cy="1397000"/>
           </a:xfrm>
           <a:prstGeom prst="rect">
             <a:avLst/>
@@ -4653,12 +4349,12 @@
           <a:p>
             <a:pPr algn="l" indent="0" marL="0">
               <a:lnSpc>
-                <a:spcPts val="2667"/>
+                <a:spcPts val="2688"/>
               </a:lnSpc>
               <a:buNone/>
             </a:pPr>
             <a:r>
-              <a:rPr lang="en-US" altLang="en-US" sz="2100" b="1" dirty="0">
+              <a:rPr lang="en-US" altLang="en-US" sz="2100" dirty="0">
                 <a:solidFill>
                   <a:srgbClr val="3C4043"/>
                 </a:solidFill>
@@ -4666,21 +4362,169 @@
                 <a:ea typeface="Inter" pitchFamily="34" charset="-122"/>
                 <a:cs typeface="Inter" pitchFamily="34" charset="-120"/>
               </a:rPr>
-              <a:t>Use evidence language:</a:t>
+              <a:t>Tell students which part of the response you are responding to.</a:t>
             </a:r>
             <a:endParaRPr lang="en-US" sz="2100" dirty="0"/>
           </a:p>
+        </p:txBody>
+      </p:sp>
+      <p:sp>
+        <p:nvSpPr>
+          <p:cNvPr id="9" name="p1-ex"/>
+          <p:cNvSpPr/>
+          <p:nvPr/>
+        </p:nvSpPr>
+        <p:spPr>
+          <a:xfrm>
+            <a:off x="889000" y="5130800"/>
+            <a:ext cx="4191000" cy="1219200"/>
+          </a:xfrm>
+          <a:prstGeom prst="rect">
+            <a:avLst/>
+          </a:prstGeom>
+          <a:noFill/>
+          <a:ln/>
+        </p:spPr>
+        <p:txBody>
+          <a:bodyPr wrap="square" lIns="0" tIns="0" rIns="0" bIns="0" rtlCol="0" anchor="t"/>
+          <a:lstStyle/>
           <a:p>
             <a:pPr algn="l" indent="0" marL="0">
               <a:lnSpc>
-                <a:spcPts val="2667"/>
+                <a:spcPts val="2356"/>
+              </a:lnSpc>
+              <a:buNone/>
+            </a:pPr>
+            <a:r>
+              <a:rPr lang="en-US" altLang="en-US" sz="1900" b="1" dirty="0">
+                <a:solidFill>
+                  <a:srgbClr val="C41220"/>
+                </a:solidFill>
+                <a:latin typeface="Inter" pitchFamily="34" charset="0"/>
+                <a:ea typeface="Inter" pitchFamily="34" charset="-122"/>
+                <a:cs typeface="Inter" pitchFamily="34" charset="-120"/>
+              </a:rPr>
+              <a:t>Example:</a:t>
+            </a:r>
+            <a:endParaRPr lang="en-US" sz="1900" dirty="0"/>
+          </a:p>
+          <a:p>
+            <a:pPr algn="l" indent="0" marL="0">
+              <a:lnSpc>
+                <a:spcPts val="2356"/>
               </a:lnSpc>
               <a:spcBef>
-                <a:spcPts val="1200"/>
+                <a:spcPts val="600"/>
               </a:spcBef>
               <a:buNone/>
             </a:pPr>
             <a:r>
+              <a:rPr lang="en-US" altLang="en-US" sz="1900" dirty="0">
+                <a:solidFill>
+                  <a:srgbClr val="C41220"/>
+                </a:solidFill>
+                <a:latin typeface="Inter" pitchFamily="34" charset="0"/>
+                <a:ea typeface="Inter" pitchFamily="34" charset="-122"/>
+                <a:cs typeface="Inter" pitchFamily="34" charset="-120"/>
+              </a:rPr>
+              <a:t>“Your claim is clear.”</a:t>
+            </a:r>
+            <a:endParaRPr lang="en-US" sz="1900" dirty="0"/>
+          </a:p>
+        </p:txBody>
+      </p:sp>
+      <p:sp>
+        <p:nvSpPr>
+          <p:cNvPr id="10" name="pattern-shape-9"/>
+          <p:cNvSpPr/>
+          <p:nvPr/>
+        </p:nvSpPr>
+        <p:spPr>
+          <a:xfrm>
+            <a:off x="5676900" y="2336800"/>
+            <a:ext cx="4902200" cy="4267200"/>
+          </a:xfrm>
+          <a:prstGeom prst="rect">
+            <a:avLst/>
+          </a:prstGeom>
+          <a:solidFill>
+            <a:srgbClr val="F3F4F6"/>
+          </a:solidFill>
+          <a:ln w="12700">
+            <a:solidFill>
+              <a:srgbClr val="D1D5DB"/>
+            </a:solidFill>
+            <a:prstDash val="solid"/>
+          </a:ln>
+        </p:spPr>
+      </p:sp>
+      <p:sp>
+        <p:nvSpPr>
+          <p:cNvPr id="11" name="p2-title"/>
+          <p:cNvSpPr/>
+          <p:nvPr/>
+        </p:nvSpPr>
+        <p:spPr>
+          <a:xfrm>
+            <a:off x="6057900" y="2692400"/>
+            <a:ext cx="4191000" cy="431800"/>
+          </a:xfrm>
+          <a:prstGeom prst="rect">
+            <a:avLst/>
+          </a:prstGeom>
+          <a:noFill/>
+          <a:ln/>
+        </p:spPr>
+        <p:txBody>
+          <a:bodyPr wrap="square" lIns="0" tIns="0" rIns="0" bIns="0" rtlCol="0" anchor="t"/>
+          <a:lstStyle/>
+          <a:p>
+            <a:pPr algn="l" indent="0" marL="0">
+              <a:buNone/>
+            </a:pPr>
+            <a:r>
+              <a:rPr lang="en-US" altLang="en-US" sz="2500" dirty="0">
+                <a:solidFill>
+                  <a:srgbClr val="202124"/>
+                </a:solidFill>
+                <a:latin typeface="Inter" pitchFamily="34" charset="0"/>
+                <a:ea typeface="Inter" pitchFamily="34" charset="-122"/>
+                <a:cs typeface="Inter" pitchFamily="34" charset="-120"/>
+              </a:rPr>
+              <a:t>2. Point to the work</a:t>
+            </a:r>
+            <a:endParaRPr lang="en-US" sz="2500" dirty="0"/>
+          </a:p>
+        </p:txBody>
+      </p:sp>
+      <p:sp>
+        <p:nvSpPr>
+          <p:cNvPr id="12" name="p2-body"/>
+          <p:cNvSpPr/>
+          <p:nvPr/>
+        </p:nvSpPr>
+        <p:spPr>
+          <a:xfrm>
+            <a:off x="6057900" y="3505200"/>
+            <a:ext cx="4191000" cy="1397000"/>
+          </a:xfrm>
+          <a:prstGeom prst="rect">
+            <a:avLst/>
+          </a:prstGeom>
+          <a:noFill/>
+          <a:ln/>
+        </p:spPr>
+        <p:txBody>
+          <a:bodyPr wrap="square" lIns="0" tIns="0" rIns="0" bIns="0" rtlCol="0" anchor="t"/>
+          <a:lstStyle/>
+          <a:p>
+            <a:pPr algn="l" indent="0" marL="0">
+              <a:lnSpc>
+                <a:spcPts val="2688"/>
+              </a:lnSpc>
+              <a:buNone/>
+            </a:pPr>
+            <a:r>
               <a:rPr lang="en-US" altLang="en-US" sz="2100" dirty="0">
                 <a:solidFill>
                   <a:srgbClr val="3C4043"/>
@@ -4689,7 +4533,7 @@
                 <a:ea typeface="Inter" pitchFamily="34" charset="-122"/>
                 <a:cs typeface="Inter" pitchFamily="34" charset="-120"/>
               </a:rPr>
-              <a:t>“The writing shows students can ___, and many still need to ___ so they can ___.”</a:t>
+              <a:t>Send students back to their own writing or the source instead of giving the answer.</a:t>
             </a:r>
             <a:endParaRPr lang="en-US" sz="2100" dirty="0"/>
           </a:p>
@@ -4697,14 +4541,79 @@
       </p:sp>
       <p:sp>
         <p:nvSpPr>
-          <p:cNvPr id="9" name="pattern-shape-8"/>
-          <p:cNvSpPr/>
-          <p:nvPr/>
-        </p:nvSpPr>
-        <p:spPr>
-          <a:xfrm>
-            <a:off x="5778500" y="2730500"/>
-            <a:ext cx="4699000" cy="3937000"/>
+          <p:cNvPr id="13" name="p2-ex"/>
+          <p:cNvSpPr/>
+          <p:nvPr/>
+        </p:nvSpPr>
+        <p:spPr>
+          <a:xfrm>
+            <a:off x="6057900" y="5130800"/>
+            <a:ext cx="4191000" cy="1219200"/>
+          </a:xfrm>
+          <a:prstGeom prst="rect">
+            <a:avLst/>
+          </a:prstGeom>
+          <a:noFill/>
+          <a:ln/>
+        </p:spPr>
+        <p:txBody>
+          <a:bodyPr wrap="square" lIns="0" tIns="0" rIns="0" bIns="0" rtlCol="0" anchor="t"/>
+          <a:lstStyle/>
+          <a:p>
+            <a:pPr algn="l" indent="0" marL="0">
+              <a:lnSpc>
+                <a:spcPts val="2356"/>
+              </a:lnSpc>
+              <a:buNone/>
+            </a:pPr>
+            <a:r>
+              <a:rPr lang="en-US" altLang="en-US" sz="1900" b="1" dirty="0">
+                <a:solidFill>
+                  <a:srgbClr val="C41220"/>
+                </a:solidFill>
+                <a:latin typeface="Inter" pitchFamily="34" charset="0"/>
+                <a:ea typeface="Inter" pitchFamily="34" charset="-122"/>
+                <a:cs typeface="Inter" pitchFamily="34" charset="-120"/>
+              </a:rPr>
+              <a:t>Example:</a:t>
+            </a:r>
+            <a:endParaRPr lang="en-US" sz="1900" dirty="0"/>
+          </a:p>
+          <a:p>
+            <a:pPr algn="l" indent="0" marL="0">
+              <a:lnSpc>
+                <a:spcPts val="2356"/>
+              </a:lnSpc>
+              <a:spcBef>
+                <a:spcPts val="600"/>
+              </a:spcBef>
+              <a:buNone/>
+            </a:pPr>
+            <a:r>
+              <a:rPr lang="en-US" altLang="en-US" sz="1900" dirty="0">
+                <a:solidFill>
+                  <a:srgbClr val="C41220"/>
+                </a:solidFill>
+                <a:latin typeface="Inter" pitchFamily="34" charset="0"/>
+                <a:ea typeface="Inter" pitchFamily="34" charset="-122"/>
+                <a:cs typeface="Inter" pitchFamily="34" charset="-120"/>
+              </a:rPr>
+              <a:t>“Underline the graph and food-web evidence you used.”</a:t>
+            </a:r>
+            <a:endParaRPr lang="en-US" sz="1900" dirty="0"/>
+          </a:p>
+        </p:txBody>
+      </p:sp>
+      <p:sp>
+        <p:nvSpPr>
+          <p:cNvPr id="14" name="pattern-shape-13"/>
+          <p:cNvSpPr/>
+          <p:nvPr/>
+        </p:nvSpPr>
+        <p:spPr>
+          <a:xfrm>
+            <a:off x="10845800" y="2336800"/>
+            <a:ext cx="4902200" cy="4267200"/>
           </a:xfrm>
           <a:prstGeom prst="rect">
             <a:avLst/>
@@ -4722,14 +4631,14 @@
       </p:sp>
       <p:sp>
         <p:nvSpPr>
-          <p:cNvPr id="10" name="describe-title"/>
-          <p:cNvSpPr/>
-          <p:nvPr/>
-        </p:nvSpPr>
-        <p:spPr>
-          <a:xfrm>
-            <a:off x="6108700" y="3073400"/>
-            <a:ext cx="3810000" cy="381000"/>
+          <p:cNvPr id="15" name="p3-title"/>
+          <p:cNvSpPr/>
+          <p:nvPr/>
+        </p:nvSpPr>
+        <p:spPr>
+          <a:xfrm>
+            <a:off x="11226800" y="2692400"/>
+            <a:ext cx="4191000" cy="431800"/>
           </a:xfrm>
           <a:prstGeom prst="rect">
             <a:avLst/>
@@ -4745,30 +4654,30 @@
               <a:buNone/>
             </a:pPr>
             <a:r>
-              <a:rPr lang="en-US" altLang="en-US" sz="2400" dirty="0">
-                <a:solidFill>
-                  <a:srgbClr val="3C4043"/>
-                </a:solidFill>
-                <a:latin typeface="Inter" pitchFamily="34" charset="0"/>
-                <a:ea typeface="Inter" pitchFamily="34" charset="-122"/>
-                <a:cs typeface="Inter" pitchFamily="34" charset="-120"/>
-              </a:rPr>
-              <a:t>2. WRITE ONE COMMENT</a:t>
-            </a:r>
-            <a:endParaRPr lang="en-US" sz="2400" dirty="0"/>
-          </a:p>
-        </p:txBody>
-      </p:sp>
-      <p:sp>
-        <p:nvSpPr>
-          <p:cNvPr id="11" name="describe-body"/>
-          <p:cNvSpPr/>
-          <p:nvPr/>
-        </p:nvSpPr>
-        <p:spPr>
-          <a:xfrm>
-            <a:off x="6108700" y="3860800"/>
-            <a:ext cx="3810000" cy="2184400"/>
+              <a:rPr lang="en-US" altLang="en-US" sz="2500" dirty="0">
+                <a:solidFill>
+                  <a:srgbClr val="202124"/>
+                </a:solidFill>
+                <a:latin typeface="Inter" pitchFamily="34" charset="0"/>
+                <a:ea typeface="Inter" pitchFamily="34" charset="-122"/>
+                <a:cs typeface="Inter" pitchFamily="34" charset="-120"/>
+              </a:rPr>
+              <a:t>3. Ask for one action</a:t>
+            </a:r>
+            <a:endParaRPr lang="en-US" sz="2500" dirty="0"/>
+          </a:p>
+        </p:txBody>
+      </p:sp>
+      <p:sp>
+        <p:nvSpPr>
+          <p:cNvPr id="16" name="p3-body"/>
+          <p:cNvSpPr/>
+          <p:nvPr/>
+        </p:nvSpPr>
+        <p:spPr>
+          <a:xfrm>
+            <a:off x="11226800" y="3505200"/>
+            <a:ext cx="4191000" cy="1397000"/>
           </a:xfrm>
           <a:prstGeom prst="rect">
             <a:avLst/>
@@ -4782,12 +4691,12 @@
           <a:p>
             <a:pPr algn="l" indent="0" marL="0">
               <a:lnSpc>
-                <a:spcPts val="2667"/>
+                <a:spcPts val="2688"/>
               </a:lnSpc>
               <a:buNone/>
             </a:pPr>
             <a:r>
-              <a:rPr lang="en-US" altLang="en-US" sz="2100" b="1" dirty="0">
+              <a:rPr lang="en-US" altLang="en-US" sz="2100" dirty="0">
                 <a:solidFill>
                   <a:srgbClr val="3C4043"/>
                 </a:solidFill>
@@ -4795,174 +4704,87 @@
                 <a:ea typeface="Inter" pitchFamily="34" charset="-122"/>
                 <a:cs typeface="Inter" pitchFamily="34" charset="-120"/>
               </a:rPr>
-              <a:t>For example:</a:t>
+              <a:t>Ask for one specific revision students can complete on their own.</a:t>
             </a:r>
             <a:endParaRPr lang="en-US" sz="2100" dirty="0"/>
           </a:p>
+        </p:txBody>
+      </p:sp>
+      <p:sp>
+        <p:nvSpPr>
+          <p:cNvPr id="17" name="p3-ex"/>
+          <p:cNvSpPr/>
+          <p:nvPr/>
+        </p:nvSpPr>
+        <p:spPr>
+          <a:xfrm>
+            <a:off x="11226800" y="5130800"/>
+            <a:ext cx="4191000" cy="1219200"/>
+          </a:xfrm>
+          <a:prstGeom prst="rect">
+            <a:avLst/>
+          </a:prstGeom>
+          <a:noFill/>
+          <a:ln/>
+        </p:spPr>
+        <p:txBody>
+          <a:bodyPr wrap="square" lIns="0" tIns="0" rIns="0" bIns="0" rtlCol="0" anchor="t"/>
+          <a:lstStyle/>
           <a:p>
             <a:pPr algn="l" indent="0" marL="0">
               <a:lnSpc>
-                <a:spcPts val="2667"/>
+                <a:spcPts val="2356"/>
+              </a:lnSpc>
+              <a:buNone/>
+            </a:pPr>
+            <a:r>
+              <a:rPr lang="en-US" altLang="en-US" sz="1900" b="1" dirty="0">
+                <a:solidFill>
+                  <a:srgbClr val="C41220"/>
+                </a:solidFill>
+                <a:latin typeface="Inter" pitchFamily="34" charset="0"/>
+                <a:ea typeface="Inter" pitchFamily="34" charset="-122"/>
+                <a:cs typeface="Inter" pitchFamily="34" charset="-120"/>
+              </a:rPr>
+              <a:t>Example:</a:t>
+            </a:r>
+            <a:endParaRPr lang="en-US" sz="1900" dirty="0"/>
+          </a:p>
+          <a:p>
+            <a:pPr algn="l" indent="0" marL="0">
+              <a:lnSpc>
+                <a:spcPts val="2356"/>
               </a:lnSpc>
               <a:spcBef>
-                <a:spcPts val="1200"/>
+                <a:spcPts val="600"/>
               </a:spcBef>
               <a:buNone/>
             </a:pPr>
             <a:r>
-              <a:rPr lang="en-US" altLang="en-US" sz="2100" dirty="0">
-                <a:solidFill>
-                  <a:srgbClr val="3C4043"/>
-                </a:solidFill>
-                <a:latin typeface="Inter" pitchFamily="34" charset="0"/>
-                <a:ea typeface="Inter" pitchFamily="34" charset="-122"/>
-                <a:cs typeface="Inter" pitchFamily="34" charset="-120"/>
-              </a:rPr>
-              <a:t>“Underline the food-web and graph evidence you used. Then revise your reasoning to explain how it supports your prediction.”</a:t>
-            </a:r>
-            <a:endParaRPr lang="en-US" sz="2100" dirty="0"/>
-          </a:p>
-        </p:txBody>
-      </p:sp>
-      <p:sp>
-        <p:nvSpPr>
-          <p:cNvPr id="12" name="pattern-shape-11"/>
-          <p:cNvSpPr/>
-          <p:nvPr/>
-        </p:nvSpPr>
-        <p:spPr>
-          <a:xfrm>
-            <a:off x="11049000" y="2730500"/>
-            <a:ext cx="4699000" cy="3937000"/>
-          </a:xfrm>
-          <a:prstGeom prst="rect">
-            <a:avLst/>
-          </a:prstGeom>
-          <a:solidFill>
-            <a:srgbClr val="F3F4F6"/>
-          </a:solidFill>
-          <a:ln w="12700">
-            <a:solidFill>
-              <a:srgbClr val="D1D5DB"/>
-            </a:solidFill>
-            <a:prstDash val="solid"/>
-          </a:ln>
-        </p:spPr>
-      </p:sp>
-      <p:sp>
-        <p:nvSpPr>
-          <p:cNvPr id="13" name="act-title"/>
-          <p:cNvSpPr/>
-          <p:nvPr/>
-        </p:nvSpPr>
-        <p:spPr>
-          <a:xfrm>
-            <a:off x="11379200" y="3073400"/>
-            <a:ext cx="3810000" cy="381000"/>
-          </a:xfrm>
-          <a:prstGeom prst="rect">
-            <a:avLst/>
-          </a:prstGeom>
-          <a:noFill/>
-          <a:ln/>
-        </p:spPr>
-        <p:txBody>
-          <a:bodyPr wrap="square" lIns="0" tIns="0" rIns="0" bIns="0" rtlCol="0" anchor="t"/>
-          <a:lstStyle/>
-          <a:p>
-            <a:pPr algn="l" indent="0" marL="0">
-              <a:buNone/>
-            </a:pPr>
-            <a:r>
-              <a:rPr lang="en-US" altLang="en-US" sz="2400" dirty="0">
-                <a:solidFill>
-                  <a:srgbClr val="3C4043"/>
-                </a:solidFill>
-                <a:latin typeface="Inter" pitchFamily="34" charset="0"/>
-                <a:ea typeface="Inter" pitchFamily="34" charset="-122"/>
-                <a:cs typeface="Inter" pitchFamily="34" charset="-120"/>
-              </a:rPr>
-              <a:t>3. NAME THE REVISION</a:t>
-            </a:r>
-            <a:endParaRPr lang="en-US" sz="2400" dirty="0"/>
-          </a:p>
-        </p:txBody>
-      </p:sp>
-      <p:sp>
-        <p:nvSpPr>
-          <p:cNvPr id="14" name="act-body"/>
-          <p:cNvSpPr/>
-          <p:nvPr/>
-        </p:nvSpPr>
-        <p:spPr>
-          <a:xfrm>
-            <a:off x="11379200" y="3860800"/>
-            <a:ext cx="3810000" cy="2184400"/>
-          </a:xfrm>
-          <a:prstGeom prst="rect">
-            <a:avLst/>
-          </a:prstGeom>
-          <a:noFill/>
-          <a:ln/>
-        </p:spPr>
-        <p:txBody>
-          <a:bodyPr wrap="square" lIns="0" tIns="0" rIns="0" bIns="0" rtlCol="0" anchor="t"/>
-          <a:lstStyle/>
-          <a:p>
-            <a:pPr algn="l" indent="0" marL="0">
-              <a:lnSpc>
-                <a:spcPts val="2667"/>
-              </a:lnSpc>
-              <a:buNone/>
-            </a:pPr>
-            <a:r>
-              <a:rPr lang="en-US" altLang="en-US" sz="2100" b="1" dirty="0">
-                <a:solidFill>
-                  <a:srgbClr val="3C4043"/>
-                </a:solidFill>
-                <a:latin typeface="Inter" pitchFamily="34" charset="0"/>
-                <a:ea typeface="Inter" pitchFamily="34" charset="-122"/>
-                <a:cs typeface="Inter" pitchFamily="34" charset="-120"/>
-              </a:rPr>
-              <a:t>Students will:</a:t>
-            </a:r>
-            <a:endParaRPr lang="en-US" sz="2100" dirty="0"/>
-          </a:p>
-          <a:p>
-            <a:pPr algn="l" indent="0" marL="0">
-              <a:lnSpc>
-                <a:spcPts val="2667"/>
-              </a:lnSpc>
-              <a:spcBef>
-                <a:spcPts val="1200"/>
-              </a:spcBef>
-              <a:buNone/>
-            </a:pPr>
-            <a:r>
-              <a:rPr lang="en-US" altLang="en-US" sz="2100" dirty="0">
-                <a:solidFill>
-                  <a:srgbClr val="3C4043"/>
-                </a:solidFill>
-                <a:latin typeface="Inter" pitchFamily="34" charset="0"/>
-                <a:ea typeface="Inter" pitchFamily="34" charset="-122"/>
-                <a:cs typeface="Inter" pitchFamily="34" charset="-120"/>
-              </a:rPr>
-              <a:t>select or correct evidence, add a claim, explain a connection, revise reasoning, or clarify scientific vocabulary.</a:t>
-            </a:r>
-            <a:endParaRPr lang="en-US" sz="2100" dirty="0"/>
-          </a:p>
-        </p:txBody>
-      </p:sp>
-      <p:sp>
-        <p:nvSpPr>
-          <p:cNvPr id="15" name="pattern-shape-14"/>
-          <p:cNvSpPr/>
-          <p:nvPr/>
-        </p:nvSpPr>
-        <p:spPr>
-          <a:xfrm>
-            <a:off x="508000" y="7239000"/>
-            <a:ext cx="15240000" cy="673100"/>
+              <a:rPr lang="en-US" altLang="en-US" sz="1900" dirty="0">
+                <a:solidFill>
+                  <a:srgbClr val="C41220"/>
+                </a:solidFill>
+                <a:latin typeface="Inter" pitchFamily="34" charset="0"/>
+                <a:ea typeface="Inter" pitchFamily="34" charset="-122"/>
+                <a:cs typeface="Inter" pitchFamily="34" charset="-120"/>
+              </a:rPr>
+              <a:t>“Then revise your reasoning to explain how that evidence supports your prediction.”</a:t>
+            </a:r>
+            <a:endParaRPr lang="en-US" sz="1900" dirty="0"/>
+          </a:p>
+        </p:txBody>
+      </p:sp>
+      <p:sp>
+        <p:nvSpPr>
+          <p:cNvPr id="18" name="pattern-shape-17"/>
+          <p:cNvSpPr/>
+          <p:nvPr/>
+        </p:nvSpPr>
+        <p:spPr>
+          <a:xfrm>
+            <a:off x="508000" y="6959600"/>
+            <a:ext cx="15240000" cy="736600"/>
           </a:xfrm>
           <a:prstGeom prst="rect">
             <a:avLst/>
@@ -4975,14 +4797,14 @@
       </p:sp>
       <p:sp>
         <p:nvSpPr>
-          <p:cNvPr id="16" name="pattern-decision"/>
-          <p:cNvSpPr/>
-          <p:nvPr/>
-        </p:nvSpPr>
-        <p:spPr>
-          <a:xfrm>
-            <a:off x="812800" y="7416800"/>
-            <a:ext cx="14224000" cy="330200"/>
+          <p:cNvPr id="19" name="check"/>
+          <p:cNvSpPr/>
+          <p:nvPr/>
+        </p:nvSpPr>
+        <p:spPr>
+          <a:xfrm>
+            <a:off x="812800" y="7213600"/>
+            <a:ext cx="14605000" cy="304800"/>
           </a:xfrm>
           <a:prstGeom prst="rect">
             <a:avLst/>
@@ -5006,7 +4828,7 @@
                 <a:ea typeface="Inter" pitchFamily="34" charset="-122"/>
                 <a:cs typeface="Inter" pitchFamily="34" charset="-120"/>
               </a:rPr>
-              <a:t>Feedback check:</a:t>
+              <a:t>Check:</a:t>
             </a:r>
             <a:r>
               <a:rPr lang="en-US" altLang="en-US" sz="2000" dirty="0">
@@ -5017,7 +4839,7 @@
                 <a:ea typeface="Inter" pitchFamily="34" charset="-122"/>
                 <a:cs typeface="Inter" pitchFamily="34" charset="-120"/>
               </a:rPr>
-              <a:t> Does the comment name a criterion, invite a student action, and preserve responsibility for the explanation?</a:t>
+              <a:t> can the student act on this comment without asking what to do?</a:t>
             </a:r>
             <a:endParaRPr lang="en-US" sz="2000" dirty="0"/>
           </a:p>
@@ -5025,7 +4847,7 @@
       </p:sp>
       <p:sp>
         <p:nvSpPr>
-          <p:cNvPr id="17" name="page"/>
+          <p:cNvPr id="20" name="page"/>
           <p:cNvSpPr/>
           <p:nvPr/>
         </p:nvSpPr>
@@ -5064,7 +4886,7 @@
       </p:sp>
       <p:sp>
         <p:nvSpPr>
-          <p:cNvPr id="18" name="pattern-shape-17"/>
+          <p:cNvPr id="21" name="pattern-shape-20"/>
           <p:cNvSpPr/>
           <p:nvPr/>
         </p:nvSpPr>
@@ -5167,7 +4989,7 @@
                 <a:ea typeface="Inter" pitchFamily="34" charset="-122"/>
                 <a:cs typeface="Inter" pitchFamily="34" charset="-120"/>
               </a:rPr>
-              <a:t>Plan a Narrow Next Step for Standard Mastery</a:t>
+              <a:t>Step 4: Plan the Next Step</a:t>
             </a:r>
             <a:endParaRPr lang="en-US" sz="3000" dirty="0"/>
           </a:p>
@@ -5214,176 +5036,53 @@
       </p:sp>
       <p:sp>
         <p:nvSpPr>
-          <p:cNvPr id="5" name="next-shape-4"/>
-          <p:cNvSpPr/>
-          <p:nvPr/>
-        </p:nvSpPr>
-        <p:spPr>
-          <a:xfrm>
-            <a:off x="508000" y="1574800"/>
-            <a:ext cx="3810000" cy="5613400"/>
-          </a:xfrm>
-          <a:prstGeom prst="rect">
-            <a:avLst/>
-          </a:prstGeom>
-          <a:solidFill>
-            <a:srgbClr val="C41220"/>
-          </a:solidFill>
-          <a:ln/>
-        </p:spPr>
-      </p:sp>
-      <p:sp>
-        <p:nvSpPr>
-          <p:cNvPr id="6" name="work-label"/>
-          <p:cNvSpPr/>
-          <p:nvPr/>
-        </p:nvSpPr>
-        <p:spPr>
-          <a:xfrm>
-            <a:off x="838200" y="2222500"/>
-            <a:ext cx="3149600" cy="279400"/>
-          </a:xfrm>
-          <a:prstGeom prst="rect">
-            <a:avLst/>
-          </a:prstGeom>
-          <a:noFill/>
-          <a:ln/>
-        </p:spPr>
-        <p:txBody>
-          <a:bodyPr wrap="square" lIns="0" tIns="0" rIns="0" bIns="0" rtlCol="0" anchor="t"/>
-          <a:lstStyle/>
-          <a:p>
-            <a:pPr algn="ctr" indent="0" marL="0">
-              <a:buNone/>
-            </a:pPr>
-            <a:r>
-              <a:rPr lang="en-US" altLang="en-US" sz="1700" dirty="0">
-                <a:solidFill>
-                  <a:srgbClr val="FDECEC"/>
-                </a:solidFill>
-                <a:latin typeface="Inter" pitchFamily="34" charset="0"/>
-                <a:ea typeface="Inter" pitchFamily="34" charset="-122"/>
-                <a:cs typeface="Inter" pitchFamily="34" charset="-120"/>
-              </a:rPr>
-              <a:t>PROTECTED INDIVIDUAL-FIRST WORK</a:t>
-            </a:r>
-            <a:endParaRPr lang="en-US" sz="1700" dirty="0"/>
-          </a:p>
-        </p:txBody>
-      </p:sp>
-      <p:sp>
-        <p:nvSpPr>
-          <p:cNvPr id="7" name="work-time"/>
-          <p:cNvSpPr/>
-          <p:nvPr/>
-        </p:nvSpPr>
-        <p:spPr>
-          <a:xfrm>
-            <a:off x="838200" y="3048000"/>
-            <a:ext cx="3149600" cy="1206500"/>
-          </a:xfrm>
-          <a:prstGeom prst="rect">
-            <a:avLst/>
-          </a:prstGeom>
-          <a:noFill/>
-          <a:ln/>
-        </p:spPr>
-        <p:txBody>
-          <a:bodyPr wrap="square" lIns="0" tIns="0" rIns="0" bIns="0" rtlCol="0" anchor="t"/>
-          <a:lstStyle/>
-          <a:p>
-            <a:pPr algn="ctr" indent="0" marL="0">
-              <a:buNone/>
-            </a:pPr>
-            <a:r>
-              <a:rPr lang="en-US" altLang="en-US" sz="6400" dirty="0">
-                <a:solidFill>
-                  <a:srgbClr val="FFFFFF"/>
-                </a:solidFill>
-                <a:latin typeface="Inter" pitchFamily="34" charset="0"/>
-                <a:ea typeface="Inter" pitchFamily="34" charset="-122"/>
-                <a:cs typeface="Inter" pitchFamily="34" charset="-120"/>
-              </a:rPr>
-              <a:t>11 min</a:t>
-            </a:r>
-            <a:endParaRPr lang="en-US" sz="6400" dirty="0"/>
-          </a:p>
-        </p:txBody>
-      </p:sp>
-      <p:sp>
-        <p:nvSpPr>
-          <p:cNvPr id="8" name="next-shape-7"/>
-          <p:cNvSpPr/>
-          <p:nvPr/>
-        </p:nvSpPr>
-        <p:spPr>
-          <a:xfrm>
-            <a:off x="1054100" y="4889500"/>
-            <a:ext cx="2717800" cy="9144"/>
-          </a:xfrm>
-          <a:prstGeom prst="line">
-            <a:avLst/>
-          </a:prstGeom>
-          <a:ln w="25400">
-            <a:solidFill>
-              <a:srgbClr val="F6B4BA"/>
-            </a:solidFill>
-            <a:prstDash val="solid"/>
-          </a:ln>
-        </p:spPr>
-      </p:sp>
-      <p:sp>
-        <p:nvSpPr>
-          <p:cNvPr id="9" name="work-directions"/>
-          <p:cNvSpPr/>
-          <p:nvPr/>
-        </p:nvSpPr>
-        <p:spPr>
-          <a:xfrm>
-            <a:off x="838200" y="5308600"/>
-            <a:ext cx="3149600" cy="1117600"/>
-          </a:xfrm>
-          <a:prstGeom prst="rect">
-            <a:avLst/>
-          </a:prstGeom>
-          <a:noFill/>
-          <a:ln/>
-        </p:spPr>
-        <p:txBody>
-          <a:bodyPr wrap="square" lIns="0" tIns="0" rIns="0" bIns="0" rtlCol="0" anchor="t"/>
-          <a:lstStyle/>
-          <a:p>
-            <a:pPr algn="ctr" indent="0" marL="0">
-              <a:lnSpc>
-                <a:spcPts val="2480"/>
-              </a:lnSpc>
-              <a:buNone/>
-            </a:pPr>
-            <a:r>
-              <a:rPr lang="en-US" altLang="en-US" sz="2000" dirty="0">
-                <a:solidFill>
-                  <a:srgbClr val="FFFFFF"/>
-                </a:solidFill>
-                <a:latin typeface="Inter" pitchFamily="34" charset="0"/>
-                <a:ea typeface="Inter" pitchFamily="34" charset="-122"/>
-                <a:cs typeface="Inter" pitchFamily="34" charset="-120"/>
-              </a:rPr>
-              <a:t>Plan independently first. Then test whether the action directly responds to the writing evidence and advances the standard.</a:t>
-            </a:r>
-            <a:endParaRPr lang="en-US" sz="2000" dirty="0"/>
-          </a:p>
-        </p:txBody>
-      </p:sp>
-      <p:sp>
-        <p:nvSpPr>
-          <p:cNvPr id="10" name="next-shape-9"/>
-          <p:cNvSpPr/>
-          <p:nvPr/>
-        </p:nvSpPr>
-        <p:spPr>
-          <a:xfrm>
-            <a:off x="4902200" y="1574800"/>
-            <a:ext cx="10845800" cy="1257300"/>
+          <p:cNvPr id="5" name="intro"/>
+          <p:cNvSpPr/>
+          <p:nvPr/>
+        </p:nvSpPr>
+        <p:spPr>
+          <a:xfrm>
+            <a:off x="508000" y="1320800"/>
+            <a:ext cx="15240000" cy="635000"/>
+          </a:xfrm>
+          <a:prstGeom prst="rect">
+            <a:avLst/>
+          </a:prstGeom>
+          <a:noFill/>
+          <a:ln/>
+        </p:spPr>
+        <p:txBody>
+          <a:bodyPr wrap="square" lIns="0" tIns="0" rIns="0" bIns="0" rtlCol="0" anchor="t"/>
+          <a:lstStyle/>
+          <a:p>
+            <a:pPr algn="l" indent="0" marL="0">
+              <a:buNone/>
+            </a:pPr>
+            <a:r>
+              <a:rPr lang="en-US" altLang="en-US" sz="2300" dirty="0">
+                <a:solidFill>
+                  <a:srgbClr val="3C4043"/>
+                </a:solidFill>
+                <a:latin typeface="Inter" pitchFamily="34" charset="0"/>
+                <a:ea typeface="Inter" pitchFamily="34" charset="-122"/>
+                <a:cs typeface="Inter" pitchFamily="34" charset="-120"/>
+              </a:rPr>
+              <a:t>Choose one action for each column. Keep the response short and tied to the same standard.</a:t>
+            </a:r>
+            <a:endParaRPr lang="en-US" sz="2300" dirty="0"/>
+          </a:p>
+        </p:txBody>
+      </p:sp>
+      <p:sp>
+        <p:nvSpPr>
+          <p:cNvPr id="6" name="next-shape-5"/>
+          <p:cNvSpPr/>
+          <p:nvPr/>
+        </p:nvSpPr>
+        <p:spPr>
+          <a:xfrm>
+            <a:off x="508000" y="2260600"/>
+            <a:ext cx="4902200" cy="4191000"/>
           </a:xfrm>
           <a:prstGeom prst="rect">
             <a:avLst/>
@@ -5401,14 +5100,14 @@
       </p:sp>
       <p:sp>
         <p:nvSpPr>
-          <p:cNvPr id="11" name="plan1"/>
-          <p:cNvSpPr/>
-          <p:nvPr/>
-        </p:nvSpPr>
-        <p:spPr>
-          <a:xfrm>
-            <a:off x="5257800" y="1854200"/>
-            <a:ext cx="9652000" cy="660400"/>
+          <p:cNvPr id="7" name="n1-title"/>
+          <p:cNvSpPr/>
+          <p:nvPr/>
+        </p:nvSpPr>
+        <p:spPr>
+          <a:xfrm>
+            <a:off x="889000" y="2616200"/>
+            <a:ext cx="4191000" cy="431800"/>
           </a:xfrm>
           <a:prstGeom prst="rect">
             <a:avLst/>
@@ -5421,22 +5120,54 @@
           <a:lstStyle/>
           <a:p>
             <a:pPr algn="l" indent="0" marL="0">
+              <a:buNone/>
+            </a:pPr>
+            <a:r>
+              <a:rPr lang="en-US" altLang="en-US" sz="2500" dirty="0">
+                <a:solidFill>
+                  <a:srgbClr val="202124"/>
+                </a:solidFill>
+                <a:latin typeface="Inter" pitchFamily="34" charset="0"/>
+                <a:ea typeface="Inter" pitchFamily="34" charset="-122"/>
+                <a:cs typeface="Inter" pitchFamily="34" charset="-120"/>
+              </a:rPr>
+              <a:t>Students will…</a:t>
+            </a:r>
+            <a:endParaRPr lang="en-US" sz="2500" dirty="0"/>
+          </a:p>
+        </p:txBody>
+      </p:sp>
+      <p:sp>
+        <p:nvSpPr>
+          <p:cNvPr id="8" name="n1-body"/>
+          <p:cNvSpPr/>
+          <p:nvPr/>
+        </p:nvSpPr>
+        <p:spPr>
+          <a:xfrm>
+            <a:off x="889000" y="3403600"/>
+            <a:ext cx="4191000" cy="2794000"/>
+          </a:xfrm>
+          <a:prstGeom prst="rect">
+            <a:avLst/>
+          </a:prstGeom>
+          <a:noFill/>
+          <a:ln/>
+        </p:spPr>
+        <p:txBody>
+          <a:bodyPr wrap="square" lIns="0" tIns="0" rIns="0" bIns="0" rtlCol="0" anchor="t"/>
+          <a:lstStyle/>
+          <a:p>
+            <a:pPr algn="l" marL="333375" indent="-333375">
               <a:lnSpc>
-                <a:spcPts val="2520"/>
+                <a:spcPts val="2730"/>
               </a:lnSpc>
-              <a:buNone/>
-            </a:pPr>
-            <a:r>
-              <a:rPr lang="en-US" altLang="en-US" sz="2100" b="1" dirty="0">
-                <a:solidFill>
-                  <a:srgbClr val="C41220"/>
-                </a:solidFill>
-                <a:latin typeface="Inter" pitchFamily="34" charset="0"/>
-                <a:ea typeface="Inter" pitchFamily="34" charset="-122"/>
-                <a:cs typeface="Inter" pitchFamily="34" charset="-120"/>
-              </a:rPr>
-              <a:t>1. Choose the student action.</a:t>
-            </a:r>
+              <a:spcBef>
+                <a:spcPts val="10"/>
+              </a:spcBef>
+              <a:buSzPct val="100000"/>
+              <a:buChar char="•"/>
+            </a:pPr>
             <a:r>
               <a:rPr lang="en-US" altLang="en-US" sz="2100" dirty="0">
                 <a:solidFill>
@@ -5446,22 +5177,94 @@
                 <a:ea typeface="Inter" pitchFamily="34" charset="-122"/>
                 <a:cs typeface="Inter" pitchFamily="34" charset="-120"/>
               </a:rPr>
-              <a:t> Revise a reasoning sentence, select stronger evidence, compare a model response, clarify vocabulary, or explain a relationship.</a:t>
+              <a:t>Revise one reasoning sentence</a:t>
             </a:r>
             <a:endParaRPr lang="en-US" sz="2100" dirty="0"/>
           </a:p>
-        </p:txBody>
-      </p:sp>
-      <p:sp>
-        <p:nvSpPr>
-          <p:cNvPr id="12" name="next-shape-11"/>
-          <p:cNvSpPr/>
-          <p:nvPr/>
-        </p:nvSpPr>
-        <p:spPr>
-          <a:xfrm>
-            <a:off x="4902200" y="3111500"/>
-            <a:ext cx="10845800" cy="1257300"/>
+          <a:p>
+            <a:pPr algn="l" marL="333375" indent="-333375">
+              <a:lnSpc>
+                <a:spcPts val="2730"/>
+              </a:lnSpc>
+              <a:spcBef>
+                <a:spcPts val="10"/>
+              </a:spcBef>
+              <a:buSzPct val="100000"/>
+              <a:buChar char="•"/>
+            </a:pPr>
+            <a:r>
+              <a:rPr lang="en-US" altLang="en-US" sz="2100" dirty="0">
+                <a:solidFill>
+                  <a:srgbClr val="3C4043"/>
+                </a:solidFill>
+                <a:latin typeface="Inter" pitchFamily="34" charset="0"/>
+                <a:ea typeface="Inter" pitchFamily="34" charset="-122"/>
+                <a:cs typeface="Inter" pitchFamily="34" charset="-120"/>
+              </a:rPr>
+              <a:t>Add or correct evidence</a:t>
+            </a:r>
+            <a:endParaRPr lang="en-US" sz="2100" dirty="0"/>
+          </a:p>
+          <a:p>
+            <a:pPr algn="l" marL="333375" indent="-333375">
+              <a:lnSpc>
+                <a:spcPts val="2730"/>
+              </a:lnSpc>
+              <a:spcBef>
+                <a:spcPts val="10"/>
+              </a:spcBef>
+              <a:buSzPct val="100000"/>
+              <a:buChar char="•"/>
+            </a:pPr>
+            <a:r>
+              <a:rPr lang="en-US" altLang="en-US" sz="2100" dirty="0">
+                <a:solidFill>
+                  <a:srgbClr val="3C4043"/>
+                </a:solidFill>
+                <a:latin typeface="Inter" pitchFamily="34" charset="0"/>
+                <a:ea typeface="Inter" pitchFamily="34" charset="-122"/>
+                <a:cs typeface="Inter" pitchFamily="34" charset="-120"/>
+              </a:rPr>
+              <a:t>Compare their response to a model</a:t>
+            </a:r>
+            <a:endParaRPr lang="en-US" sz="2100" dirty="0"/>
+          </a:p>
+          <a:p>
+            <a:pPr algn="l" marL="333375" indent="-333375">
+              <a:lnSpc>
+                <a:spcPts val="2730"/>
+              </a:lnSpc>
+              <a:spcBef>
+                <a:spcPts val="10"/>
+              </a:spcBef>
+              <a:buSzPct val="100000"/>
+              <a:buChar char="•"/>
+            </a:pPr>
+            <a:r>
+              <a:rPr lang="en-US" altLang="en-US" sz="2100" dirty="0">
+                <a:solidFill>
+                  <a:srgbClr val="3C4043"/>
+                </a:solidFill>
+                <a:latin typeface="Inter" pitchFamily="34" charset="0"/>
+                <a:ea typeface="Inter" pitchFamily="34" charset="-122"/>
+                <a:cs typeface="Inter" pitchFamily="34" charset="-120"/>
+              </a:rPr>
+              <a:t>Clarify science vocabulary</a:t>
+            </a:r>
+            <a:endParaRPr lang="en-US" sz="2100" dirty="0"/>
+          </a:p>
+        </p:txBody>
+      </p:sp>
+      <p:sp>
+        <p:nvSpPr>
+          <p:cNvPr id="9" name="next-shape-8"/>
+          <p:cNvSpPr/>
+          <p:nvPr/>
+        </p:nvSpPr>
+        <p:spPr>
+          <a:xfrm>
+            <a:off x="5676900" y="2260600"/>
+            <a:ext cx="4902200" cy="4191000"/>
           </a:xfrm>
           <a:prstGeom prst="rect">
             <a:avLst/>
@@ -5479,14 +5282,14 @@
       </p:sp>
       <p:sp>
         <p:nvSpPr>
-          <p:cNvPr id="13" name="plan2"/>
-          <p:cNvSpPr/>
-          <p:nvPr/>
-        </p:nvSpPr>
-        <p:spPr>
-          <a:xfrm>
-            <a:off x="5257800" y="3390900"/>
-            <a:ext cx="9652000" cy="660400"/>
+          <p:cNvPr id="10" name="n2-title"/>
+          <p:cNvSpPr/>
+          <p:nvPr/>
+        </p:nvSpPr>
+        <p:spPr>
+          <a:xfrm>
+            <a:off x="6057900" y="2616200"/>
+            <a:ext cx="4191000" cy="431800"/>
           </a:xfrm>
           <a:prstGeom prst="rect">
             <a:avLst/>
@@ -5499,22 +5302,54 @@
           <a:lstStyle/>
           <a:p>
             <a:pPr algn="l" indent="0" marL="0">
+              <a:buNone/>
+            </a:pPr>
+            <a:r>
+              <a:rPr lang="en-US" altLang="en-US" sz="2500" dirty="0">
+                <a:solidFill>
+                  <a:srgbClr val="202124"/>
+                </a:solidFill>
+                <a:latin typeface="Inter" pitchFamily="34" charset="0"/>
+                <a:ea typeface="Inter" pitchFamily="34" charset="-122"/>
+                <a:cs typeface="Inter" pitchFamily="34" charset="-120"/>
+              </a:rPr>
+              <a:t>The teacher will…</a:t>
+            </a:r>
+            <a:endParaRPr lang="en-US" sz="2500" dirty="0"/>
+          </a:p>
+        </p:txBody>
+      </p:sp>
+      <p:sp>
+        <p:nvSpPr>
+          <p:cNvPr id="11" name="n2-body"/>
+          <p:cNvSpPr/>
+          <p:nvPr/>
+        </p:nvSpPr>
+        <p:spPr>
+          <a:xfrm>
+            <a:off x="6057900" y="3403600"/>
+            <a:ext cx="4191000" cy="2794000"/>
+          </a:xfrm>
+          <a:prstGeom prst="rect">
+            <a:avLst/>
+          </a:prstGeom>
+          <a:noFill/>
+          <a:ln/>
+        </p:spPr>
+        <p:txBody>
+          <a:bodyPr wrap="square" lIns="0" tIns="0" rIns="0" bIns="0" rtlCol="0" anchor="t"/>
+          <a:lstStyle/>
+          <a:p>
+            <a:pPr algn="l" marL="333375" indent="-333375">
               <a:lnSpc>
-                <a:spcPts val="2520"/>
+                <a:spcPts val="2730"/>
               </a:lnSpc>
-              <a:buNone/>
-            </a:pPr>
-            <a:r>
-              <a:rPr lang="en-US" altLang="en-US" sz="2100" b="1" dirty="0">
-                <a:solidFill>
-                  <a:srgbClr val="C41220"/>
-                </a:solidFill>
-                <a:latin typeface="Inter" pitchFamily="34" charset="0"/>
-                <a:ea typeface="Inter" pitchFamily="34" charset="-122"/>
-                <a:cs typeface="Inter" pitchFamily="34" charset="-120"/>
-              </a:rPr>
-              <a:t>2. Choose the teacher move.</a:t>
-            </a:r>
+              <a:spcBef>
+                <a:spcPts val="10"/>
+              </a:spcBef>
+              <a:buSzPct val="100000"/>
+              <a:buChar char="•"/>
+            </a:pPr>
             <a:r>
               <a:rPr lang="en-US" altLang="en-US" sz="2100" dirty="0">
                 <a:solidFill>
@@ -5524,75 +5359,21 @@
                 <a:ea typeface="Inter" pitchFamily="34" charset="-122"/>
                 <a:cs typeface="Inter" pitchFamily="34" charset="-120"/>
               </a:rPr>
-              <a:t> A written feedback prompt, short conference, focused re-read, annotated model comparison, or next task that keeps the science thinking rigorous.</a:t>
+              <a:t>Return the written comment</a:t>
             </a:r>
             <a:endParaRPr lang="en-US" sz="2100" dirty="0"/>
           </a:p>
-        </p:txBody>
-      </p:sp>
-      <p:sp>
-        <p:nvSpPr>
-          <p:cNvPr id="14" name="next-shape-13"/>
-          <p:cNvSpPr/>
-          <p:nvPr/>
-        </p:nvSpPr>
-        <p:spPr>
-          <a:xfrm>
-            <a:off x="4902200" y="4648200"/>
-            <a:ext cx="10845800" cy="1257300"/>
-          </a:xfrm>
-          <a:prstGeom prst="rect">
-            <a:avLst/>
-          </a:prstGeom>
-          <a:solidFill>
-            <a:srgbClr val="F3F4F6"/>
-          </a:solidFill>
-          <a:ln w="12700">
-            <a:solidFill>
-              <a:srgbClr val="D1D5DB"/>
-            </a:solidFill>
-            <a:prstDash val="solid"/>
-          </a:ln>
-        </p:spPr>
-      </p:sp>
-      <p:sp>
-        <p:nvSpPr>
-          <p:cNvPr id="15" name="plan3"/>
-          <p:cNvSpPr/>
-          <p:nvPr/>
-        </p:nvSpPr>
-        <p:spPr>
-          <a:xfrm>
-            <a:off x="5257800" y="4927600"/>
-            <a:ext cx="9652000" cy="660400"/>
-          </a:xfrm>
-          <a:prstGeom prst="rect">
-            <a:avLst/>
-          </a:prstGeom>
-          <a:noFill/>
-          <a:ln/>
-        </p:spPr>
-        <p:txBody>
-          <a:bodyPr wrap="square" lIns="0" tIns="0" rIns="0" bIns="0" rtlCol="0" anchor="t"/>
-          <a:lstStyle/>
-          <a:p>
-            <a:pPr algn="l" indent="0" marL="0">
+          <a:p>
+            <a:pPr algn="l" marL="333375" indent="-333375">
               <a:lnSpc>
-                <a:spcPts val="2520"/>
+                <a:spcPts val="2730"/>
               </a:lnSpc>
-              <a:buNone/>
-            </a:pPr>
-            <a:r>
-              <a:rPr lang="en-US" altLang="en-US" sz="2100" b="1" dirty="0">
-                <a:solidFill>
-                  <a:srgbClr val="C41220"/>
-                </a:solidFill>
-                <a:latin typeface="Inter" pitchFamily="34" charset="0"/>
-                <a:ea typeface="Inter" pitchFamily="34" charset="-122"/>
-                <a:cs typeface="Inter" pitchFamily="34" charset="-120"/>
-              </a:rPr>
-              <a:t>3. Plan the evidence check.</a:t>
-            </a:r>
+              <a:spcBef>
+                <a:spcPts val="10"/>
+              </a:spcBef>
+              <a:buSzPct val="100000"/>
+              <a:buChar char="•"/>
+            </a:pPr>
             <a:r>
               <a:rPr lang="en-US" altLang="en-US" sz="2100" dirty="0">
                 <a:solidFill>
@@ -5602,22 +5383,70 @@
                 <a:ea typeface="Inter" pitchFamily="34" charset="-122"/>
                 <a:cs typeface="Inter" pitchFamily="34" charset="-120"/>
               </a:rPr>
-              <a:t> Identify the brief revision, explanation, exit response, model, or data analysis that will show whether students strengthened the criterion.</a:t>
+              <a:t>Hold a short conference</a:t>
             </a:r>
             <a:endParaRPr lang="en-US" sz="2100" dirty="0"/>
           </a:p>
-        </p:txBody>
-      </p:sp>
-      <p:sp>
-        <p:nvSpPr>
-          <p:cNvPr id="16" name="next-shape-15"/>
-          <p:cNvSpPr/>
-          <p:nvPr/>
-        </p:nvSpPr>
-        <p:spPr>
-          <a:xfrm>
-            <a:off x="4902200" y="6184900"/>
-            <a:ext cx="10845800" cy="1003300"/>
+          <a:p>
+            <a:pPr algn="l" marL="333375" indent="-333375">
+              <a:lnSpc>
+                <a:spcPts val="2730"/>
+              </a:lnSpc>
+              <a:spcBef>
+                <a:spcPts val="10"/>
+              </a:spcBef>
+              <a:buSzPct val="100000"/>
+              <a:buChar char="•"/>
+            </a:pPr>
+            <a:r>
+              <a:rPr lang="en-US" altLang="en-US" sz="2100" dirty="0">
+                <a:solidFill>
+                  <a:srgbClr val="3C4043"/>
+                </a:solidFill>
+                <a:latin typeface="Inter" pitchFamily="34" charset="0"/>
+                <a:ea typeface="Inter" pitchFamily="34" charset="-122"/>
+                <a:cs typeface="Inter" pitchFamily="34" charset="-120"/>
+              </a:rPr>
+              <a:t>Re-read a focused passage or model</a:t>
+            </a:r>
+            <a:endParaRPr lang="en-US" sz="2100" dirty="0"/>
+          </a:p>
+          <a:p>
+            <a:pPr algn="l" marL="333375" indent="-333375">
+              <a:lnSpc>
+                <a:spcPts val="2730"/>
+              </a:lnSpc>
+              <a:spcBef>
+                <a:spcPts val="10"/>
+              </a:spcBef>
+              <a:buSzPct val="100000"/>
+              <a:buChar char="•"/>
+            </a:pPr>
+            <a:r>
+              <a:rPr lang="en-US" altLang="en-US" sz="2100" dirty="0">
+                <a:solidFill>
+                  <a:srgbClr val="3C4043"/>
+                </a:solidFill>
+                <a:latin typeface="Inter" pitchFamily="34" charset="0"/>
+                <a:ea typeface="Inter" pitchFamily="34" charset="-122"/>
+                <a:cs typeface="Inter" pitchFamily="34" charset="-120"/>
+              </a:rPr>
+              <a:t>Re-teach one reasoning move</a:t>
+            </a:r>
+            <a:endParaRPr lang="en-US" sz="2100" dirty="0"/>
+          </a:p>
+        </p:txBody>
+      </p:sp>
+      <p:sp>
+        <p:nvSpPr>
+          <p:cNvPr id="12" name="next-shape-11"/>
+          <p:cNvSpPr/>
+          <p:nvPr/>
+        </p:nvSpPr>
+        <p:spPr>
+          <a:xfrm>
+            <a:off x="10845800" y="2260600"/>
+            <a:ext cx="4902200" cy="4191000"/>
           </a:xfrm>
           <a:prstGeom prst="rect">
             <a:avLst/>
@@ -5635,14 +5464,14 @@
       </p:sp>
       <p:sp>
         <p:nvSpPr>
-          <p:cNvPr id="17" name="plan4"/>
-          <p:cNvSpPr/>
-          <p:nvPr/>
-        </p:nvSpPr>
-        <p:spPr>
-          <a:xfrm>
-            <a:off x="5257800" y="6451600"/>
-            <a:ext cx="9652000" cy="495300"/>
+          <p:cNvPr id="13" name="n3-title"/>
+          <p:cNvSpPr/>
+          <p:nvPr/>
+        </p:nvSpPr>
+        <p:spPr>
+          <a:xfrm>
+            <a:off x="11226800" y="2616200"/>
+            <a:ext cx="4191000" cy="431800"/>
           </a:xfrm>
           <a:prstGeom prst="rect">
             <a:avLst/>
@@ -5655,32 +5484,206 @@
           <a:lstStyle/>
           <a:p>
             <a:pPr algn="l" indent="0" marL="0">
+              <a:buNone/>
+            </a:pPr>
+            <a:r>
+              <a:rPr lang="en-US" altLang="en-US" sz="2500" dirty="0">
+                <a:solidFill>
+                  <a:srgbClr val="202124"/>
+                </a:solidFill>
+                <a:latin typeface="Inter" pitchFamily="34" charset="0"/>
+                <a:ea typeface="Inter" pitchFamily="34" charset="-122"/>
+                <a:cs typeface="Inter" pitchFamily="34" charset="-120"/>
+              </a:rPr>
+              <a:t>Evidence will be…</a:t>
+            </a:r>
+            <a:endParaRPr lang="en-US" sz="2500" dirty="0"/>
+          </a:p>
+        </p:txBody>
+      </p:sp>
+      <p:sp>
+        <p:nvSpPr>
+          <p:cNvPr id="14" name="n3-body"/>
+          <p:cNvSpPr/>
+          <p:nvPr/>
+        </p:nvSpPr>
+        <p:spPr>
+          <a:xfrm>
+            <a:off x="11226800" y="3403600"/>
+            <a:ext cx="4191000" cy="2794000"/>
+          </a:xfrm>
+          <a:prstGeom prst="rect">
+            <a:avLst/>
+          </a:prstGeom>
+          <a:noFill/>
+          <a:ln/>
+        </p:spPr>
+        <p:txBody>
+          <a:bodyPr wrap="square" lIns="0" tIns="0" rIns="0" bIns="0" rtlCol="0" anchor="t"/>
+          <a:lstStyle/>
+          <a:p>
+            <a:pPr algn="l" marL="333375" indent="-333375">
               <a:lnSpc>
-                <a:spcPts val="2360"/>
+                <a:spcPts val="2730"/>
               </a:lnSpc>
+              <a:spcBef>
+                <a:spcPts val="10"/>
+              </a:spcBef>
+              <a:buSzPct val="100000"/>
+              <a:buChar char="•"/>
+            </a:pPr>
+            <a:r>
+              <a:rPr lang="en-US" altLang="en-US" sz="2100" dirty="0">
+                <a:solidFill>
+                  <a:srgbClr val="3C4043"/>
+                </a:solidFill>
+                <a:latin typeface="Inter" pitchFamily="34" charset="0"/>
+                <a:ea typeface="Inter" pitchFamily="34" charset="-122"/>
+                <a:cs typeface="Inter" pitchFamily="34" charset="-120"/>
+              </a:rPr>
+              <a:t>A revised response or sentence</a:t>
+            </a:r>
+            <a:endParaRPr lang="en-US" sz="2100" dirty="0"/>
+          </a:p>
+          <a:p>
+            <a:pPr algn="l" marL="333375" indent="-333375">
+              <a:lnSpc>
+                <a:spcPts val="2730"/>
+              </a:lnSpc>
+              <a:spcBef>
+                <a:spcPts val="10"/>
+              </a:spcBef>
+              <a:buSzPct val="100000"/>
+              <a:buChar char="•"/>
+            </a:pPr>
+            <a:r>
+              <a:rPr lang="en-US" altLang="en-US" sz="2100" dirty="0">
+                <a:solidFill>
+                  <a:srgbClr val="3C4043"/>
+                </a:solidFill>
+                <a:latin typeface="Inter" pitchFamily="34" charset="0"/>
+                <a:ea typeface="Inter" pitchFamily="34" charset="-122"/>
+                <a:cs typeface="Inter" pitchFamily="34" charset="-120"/>
+              </a:rPr>
+              <a:t>A short exit explanation</a:t>
+            </a:r>
+            <a:endParaRPr lang="en-US" sz="2100" dirty="0"/>
+          </a:p>
+          <a:p>
+            <a:pPr algn="l" marL="333375" indent="-333375">
+              <a:lnSpc>
+                <a:spcPts val="2730"/>
+              </a:lnSpc>
+              <a:spcBef>
+                <a:spcPts val="10"/>
+              </a:spcBef>
+              <a:buSzPct val="100000"/>
+              <a:buChar char="•"/>
+            </a:pPr>
+            <a:r>
+              <a:rPr lang="en-US" altLang="en-US" sz="2100" dirty="0">
+                <a:solidFill>
+                  <a:srgbClr val="3C4043"/>
+                </a:solidFill>
+                <a:latin typeface="Inter" pitchFamily="34" charset="0"/>
+                <a:ea typeface="Inter" pitchFamily="34" charset="-122"/>
+                <a:cs typeface="Inter" pitchFamily="34" charset="-120"/>
+              </a:rPr>
+              <a:t>A completed model or data analysis</a:t>
+            </a:r>
+            <a:endParaRPr lang="en-US" sz="2100" dirty="0"/>
+          </a:p>
+          <a:p>
+            <a:pPr algn="l" marL="333375" indent="-333375">
+              <a:lnSpc>
+                <a:spcPts val="2730"/>
+              </a:lnSpc>
+              <a:spcBef>
+                <a:spcPts val="10"/>
+              </a:spcBef>
+              <a:buSzPct val="100000"/>
+              <a:buChar char="•"/>
+            </a:pPr>
+            <a:r>
+              <a:rPr lang="en-US" altLang="en-US" sz="2100" dirty="0">
+                <a:solidFill>
+                  <a:srgbClr val="3C4043"/>
+                </a:solidFill>
+                <a:latin typeface="Inter" pitchFamily="34" charset="0"/>
+                <a:ea typeface="Inter" pitchFamily="34" charset="-122"/>
+                <a:cs typeface="Inter" pitchFamily="34" charset="-120"/>
+              </a:rPr>
+              <a:t>One warm-up or checkpoint item</a:t>
+            </a:r>
+            <a:endParaRPr lang="en-US" sz="2100" dirty="0"/>
+          </a:p>
+        </p:txBody>
+      </p:sp>
+      <p:sp>
+        <p:nvSpPr>
+          <p:cNvPr id="15" name="next-shape-14"/>
+          <p:cNvSpPr/>
+          <p:nvPr/>
+        </p:nvSpPr>
+        <p:spPr>
+          <a:xfrm>
+            <a:off x="508000" y="6858000"/>
+            <a:ext cx="15240000" cy="838200"/>
+          </a:xfrm>
+          <a:prstGeom prst="rect">
+            <a:avLst/>
+          </a:prstGeom>
+          <a:solidFill>
+            <a:srgbClr val="202124"/>
+          </a:solidFill>
+          <a:ln/>
+        </p:spPr>
+      </p:sp>
+      <p:sp>
+        <p:nvSpPr>
+          <p:cNvPr id="16" name="commit"/>
+          <p:cNvSpPr/>
+          <p:nvPr/>
+        </p:nvSpPr>
+        <p:spPr>
+          <a:xfrm>
+            <a:off x="812800" y="7137400"/>
+            <a:ext cx="14605000" cy="330200"/>
+          </a:xfrm>
+          <a:prstGeom prst="rect">
+            <a:avLst/>
+          </a:prstGeom>
+          <a:noFill/>
+          <a:ln/>
+        </p:spPr>
+        <p:txBody>
+          <a:bodyPr wrap="square" lIns="0" tIns="0" rIns="0" bIns="0" rtlCol="0" anchor="t"/>
+          <a:lstStyle/>
+          <a:p>
+            <a:pPr algn="l" indent="0" marL="0">
               <a:buNone/>
             </a:pPr>
             <a:r>
               <a:rPr lang="en-US" altLang="en-US" sz="2000" b="1" dirty="0">
                 <a:solidFill>
-                  <a:srgbClr val="C41220"/>
-                </a:solidFill>
-                <a:latin typeface="Inter" pitchFamily="34" charset="0"/>
-                <a:ea typeface="Inter" pitchFamily="34" charset="-122"/>
-                <a:cs typeface="Inter" pitchFamily="34" charset="-120"/>
-              </a:rPr>
-              <a:t>Mastery next step:</a:t>
+                  <a:srgbClr val="F6B4BA"/>
+                </a:solidFill>
+                <a:latin typeface="Inter" pitchFamily="34" charset="0"/>
+                <a:ea typeface="Inter" pitchFamily="34" charset="-122"/>
+                <a:cs typeface="Inter" pitchFamily="34" charset="-120"/>
+              </a:rPr>
+              <a:t>Write it down:</a:t>
             </a:r>
             <a:r>
               <a:rPr lang="en-US" altLang="en-US" sz="2000" dirty="0">
                 <a:solidFill>
-                  <a:srgbClr val="3C4043"/>
-                </a:solidFill>
-                <a:latin typeface="Inter" pitchFamily="34" charset="0"/>
-                <a:ea typeface="Inter" pitchFamily="34" charset="-122"/>
-                <a:cs typeface="Inter" pitchFamily="34" charset="-120"/>
-              </a:rPr>
-              <a:t> “Students will ______ using ______ so they can demonstrate ______; evidence will be ______.”</a:t>
+                  <a:srgbClr val="FFFFFF"/>
+                </a:solidFill>
+                <a:latin typeface="Inter" pitchFamily="34" charset="0"/>
+                <a:ea typeface="Inter" pitchFamily="34" charset="-122"/>
+                <a:cs typeface="Inter" pitchFamily="34" charset="-120"/>
+              </a:rPr>
+              <a:t> “Students will ______ using ______, and I will see it in ______.”</a:t>
             </a:r>
             <a:endParaRPr lang="en-US" sz="2000" dirty="0"/>
           </a:p>
@@ -5688,7 +5691,7 @@
       </p:sp>
       <p:sp>
         <p:nvSpPr>
-          <p:cNvPr id="18" name="page"/>
+          <p:cNvPr id="17" name="page"/>
           <p:cNvSpPr/>
           <p:nvPr/>
         </p:nvSpPr>
@@ -5727,7 +5730,7 @@
       </p:sp>
       <p:sp>
         <p:nvSpPr>
-          <p:cNvPr id="19" name="next-shape-18"/>
+          <p:cNvPr id="18" name="next-shape-17"/>
           <p:cNvSpPr/>
           <p:nvPr/>
         </p:nvSpPr>
@@ -5805,7 +5808,7 @@
         </p:nvSpPr>
         <p:spPr>
           <a:xfrm>
-            <a:off x="736600" y="342900"/>
+            <a:off x="736600" y="355600"/>
             <a:ext cx="11430000" cy="330200"/>
           </a:xfrm>
           <a:prstGeom prst="rect">
@@ -5830,7 +5833,7 @@
                 <a:ea typeface="Inter" pitchFamily="34" charset="-122"/>
                 <a:cs typeface="Inter" pitchFamily="34" charset="-120"/>
               </a:rPr>
-              <a:t>CLOSE THE EVIDENCE CYCLE  •  41:00–46:00  •  5 MIN</a:t>
+              <a:t>CLOSE  •  41:00–46:00  •  5 MIN</a:t>
             </a:r>
             <a:endParaRPr lang="en-US" sz="1600" dirty="0"/>
           </a:p>
@@ -5844,8 +5847,8 @@
         </p:nvSpPr>
         <p:spPr>
           <a:xfrm>
-            <a:off x="736600" y="1689100"/>
-            <a:ext cx="13081000" cy="787400"/>
+            <a:off x="736600" y="1651000"/>
+            <a:ext cx="13970000" cy="787400"/>
           </a:xfrm>
           <a:prstGeom prst="rect">
             <a:avLst/>
@@ -5861,7 +5864,7 @@
               <a:buNone/>
             </a:pPr>
             <a:r>
-              <a:rPr lang="en-US" altLang="en-US" sz="4300" dirty="0">
+              <a:rPr lang="en-US" altLang="en-US" sz="4200" dirty="0">
                 <a:solidFill>
                   <a:srgbClr val="202124"/>
                 </a:solidFill>
@@ -5869,22 +5872,151 @@
                 <a:ea typeface="Inter" pitchFamily="34" charset="-122"/>
                 <a:cs typeface="Inter" pitchFamily="34" charset="-120"/>
               </a:rPr>
-              <a:t>Keep learning visible: feedback, revision, and the next evidence check.</a:t>
-            </a:r>
-            <a:endParaRPr lang="en-US" sz="4300" dirty="0"/>
-          </a:p>
-        </p:txBody>
-      </p:sp>
-      <p:sp>
-        <p:nvSpPr>
-          <p:cNvPr id="5" name="close-shape-4"/>
-          <p:cNvSpPr/>
-          <p:nvPr/>
-        </p:nvSpPr>
-        <p:spPr>
-          <a:xfrm>
-            <a:off x="736600" y="3136900"/>
-            <a:ext cx="14706600" cy="3505200"/>
+              <a:t>What happens next with the student work</a:t>
+            </a:r>
+            <a:endParaRPr lang="en-US" sz="4200" dirty="0"/>
+          </a:p>
+        </p:txBody>
+      </p:sp>
+      <p:sp>
+        <p:nvSpPr>
+          <p:cNvPr id="5" name="subtitle"/>
+          <p:cNvSpPr/>
+          <p:nvPr/>
+        </p:nvSpPr>
+        <p:spPr>
+          <a:xfrm>
+            <a:off x="736600" y="2692400"/>
+            <a:ext cx="13970000" cy="508000"/>
+          </a:xfrm>
+          <a:prstGeom prst="rect">
+            <a:avLst/>
+          </a:prstGeom>
+          <a:noFill/>
+          <a:ln/>
+        </p:spPr>
+        <p:txBody>
+          <a:bodyPr wrap="square" lIns="0" tIns="0" rIns="0" bIns="0" rtlCol="0" anchor="t"/>
+          <a:lstStyle/>
+          <a:p>
+            <a:pPr algn="l" indent="0" marL="0">
+              <a:buNone/>
+            </a:pPr>
+            <a:r>
+              <a:rPr lang="en-US" altLang="en-US" sz="2300" dirty="0">
+                <a:solidFill>
+                  <a:srgbClr val="3C4043"/>
+                </a:solidFill>
+                <a:latin typeface="Inter" pitchFamily="34" charset="0"/>
+                <a:ea typeface="Inter" pitchFamily="34" charset="-122"/>
+                <a:cs typeface="Inter" pitchFamily="34" charset="-120"/>
+              </a:rPr>
+              <a:t>Three short commitments before leaving today.</a:t>
+            </a:r>
+            <a:endParaRPr lang="en-US" sz="2300" dirty="0"/>
+          </a:p>
+        </p:txBody>
+      </p:sp>
+      <p:sp>
+        <p:nvSpPr>
+          <p:cNvPr id="6" name="close-shape-5"/>
+          <p:cNvSpPr/>
+          <p:nvPr/>
+        </p:nvSpPr>
+        <p:spPr>
+          <a:xfrm>
+            <a:off x="736600" y="3530600"/>
+            <a:ext cx="4699000" cy="2895600"/>
+          </a:xfrm>
+          <a:prstGeom prst="rect">
+            <a:avLst/>
+          </a:prstGeom>
+          <a:solidFill>
+            <a:srgbClr val="FCE8EA"/>
+          </a:solidFill>
+          <a:ln w="25400">
+            <a:solidFill>
+              <a:srgbClr val="C41220"/>
+            </a:solidFill>
+            <a:prstDash val="solid"/>
+          </a:ln>
+        </p:spPr>
+      </p:sp>
+      <p:sp>
+        <p:nvSpPr>
+          <p:cNvPr id="7" name="c1"/>
+          <p:cNvSpPr/>
+          <p:nvPr/>
+        </p:nvSpPr>
+        <p:spPr>
+          <a:xfrm>
+            <a:off x="1117600" y="3886200"/>
+            <a:ext cx="3937000" cy="2184400"/>
+          </a:xfrm>
+          <a:prstGeom prst="rect">
+            <a:avLst/>
+          </a:prstGeom>
+          <a:noFill/>
+          <a:ln/>
+        </p:spPr>
+        <p:txBody>
+          <a:bodyPr wrap="square" lIns="0" tIns="0" rIns="0" bIns="0" rtlCol="0" anchor="t"/>
+          <a:lstStyle/>
+          <a:p>
+            <a:pPr algn="l" indent="0" marL="0">
+              <a:lnSpc>
+                <a:spcPts val="1920"/>
+              </a:lnSpc>
+              <a:buNone/>
+            </a:pPr>
+            <a:r>
+              <a:rPr lang="en-US" altLang="en-US" sz="1500" b="1" dirty="0">
+                <a:solidFill>
+                  <a:srgbClr val="C41220"/>
+                </a:solidFill>
+                <a:latin typeface="Inter" pitchFamily="34" charset="0"/>
+                <a:ea typeface="Inter" pitchFamily="34" charset="-122"/>
+                <a:cs typeface="Inter" pitchFamily="34" charset="-120"/>
+              </a:rPr>
+              <a:t>1. RETURN</a:t>
+            </a:r>
+            <a:endParaRPr lang="en-US" sz="2100" dirty="0"/>
+          </a:p>
+          <a:p>
+            <a:pPr algn="l" indent="0" marL="0">
+              <a:lnSpc>
+                <a:spcPts val="2688"/>
+              </a:lnSpc>
+              <a:spcBef>
+                <a:spcPts val="1000"/>
+              </a:spcBef>
+              <a:buNone/>
+            </a:pPr>
+            <a:r>
+              <a:rPr lang="en-US" altLang="en-US" sz="2100" dirty="0">
+                <a:solidFill>
+                  <a:srgbClr val="3C4043"/>
+                </a:solidFill>
+                <a:latin typeface="Inter" pitchFamily="34" charset="0"/>
+                <a:ea typeface="Inter" pitchFamily="34" charset="-122"/>
+                <a:cs typeface="Inter" pitchFamily="34" charset="-120"/>
+              </a:rPr>
+              <a:t>Give the written comment and allow time for the student revision.</a:t>
+            </a:r>
+            <a:endParaRPr lang="en-US" sz="2100" dirty="0"/>
+          </a:p>
+        </p:txBody>
+      </p:sp>
+      <p:sp>
+        <p:nvSpPr>
+          <p:cNvPr id="8" name="close-shape-7"/>
+          <p:cNvSpPr/>
+          <p:nvPr/>
+        </p:nvSpPr>
+        <p:spPr>
+          <a:xfrm>
+            <a:off x="5778500" y="3530600"/>
+            <a:ext cx="4699000" cy="2895600"/>
           </a:xfrm>
           <a:prstGeom prst="rect">
             <a:avLst/>
@@ -5902,45 +6034,85 @@
       </p:sp>
       <p:sp>
         <p:nvSpPr>
-          <p:cNvPr id="6" name="close-shape-5"/>
-          <p:cNvSpPr/>
-          <p:nvPr/>
-        </p:nvSpPr>
-        <p:spPr>
-          <a:xfrm>
-            <a:off x="1092200" y="3543300"/>
-            <a:ext cx="4292600" cy="2324100"/>
+          <p:cNvPr id="9" name="c2"/>
+          <p:cNvSpPr/>
+          <p:nvPr/>
+        </p:nvSpPr>
+        <p:spPr>
+          <a:xfrm>
+            <a:off x="6159500" y="3886200"/>
+            <a:ext cx="3937000" cy="2184400"/>
+          </a:xfrm>
+          <a:prstGeom prst="rect">
+            <a:avLst/>
+          </a:prstGeom>
+          <a:noFill/>
+          <a:ln/>
+        </p:spPr>
+        <p:txBody>
+          <a:bodyPr wrap="square" lIns="0" tIns="0" rIns="0" bIns="0" rtlCol="0" anchor="t"/>
+          <a:lstStyle/>
+          <a:p>
+            <a:pPr algn="l" indent="0" marL="0">
+              <a:lnSpc>
+                <a:spcPts val="1920"/>
+              </a:lnSpc>
+              <a:buNone/>
+            </a:pPr>
+            <a:r>
+              <a:rPr lang="en-US" altLang="en-US" sz="1500" b="1" dirty="0">
+                <a:solidFill>
+                  <a:srgbClr val="C41220"/>
+                </a:solidFill>
+                <a:latin typeface="Inter" pitchFamily="34" charset="0"/>
+                <a:ea typeface="Inter" pitchFamily="34" charset="-122"/>
+                <a:cs typeface="Inter" pitchFamily="34" charset="-120"/>
+              </a:rPr>
+              <a:t>2. LOOK FOR</a:t>
+            </a:r>
+            <a:endParaRPr lang="en-US" sz="2100" dirty="0"/>
+          </a:p>
+          <a:p>
+            <a:pPr algn="l" indent="0" marL="0">
+              <a:lnSpc>
+                <a:spcPts val="2688"/>
+              </a:lnSpc>
+              <a:spcBef>
+                <a:spcPts val="1000"/>
+              </a:spcBef>
+              <a:buNone/>
+            </a:pPr>
+            <a:r>
+              <a:rPr lang="en-US" altLang="en-US" sz="2100" dirty="0">
+                <a:solidFill>
+                  <a:srgbClr val="3C4043"/>
+                </a:solidFill>
+                <a:latin typeface="Inter" pitchFamily="34" charset="0"/>
+                <a:ea typeface="Inter" pitchFamily="34" charset="-122"/>
+                <a:cs typeface="Inter" pitchFamily="34" charset="-120"/>
+              </a:rPr>
+              <a:t>Check whether the claim, evidence, reasoning, or language improved.</a:t>
+            </a:r>
+            <a:endParaRPr lang="en-US" sz="2100" dirty="0"/>
+          </a:p>
+        </p:txBody>
+      </p:sp>
+      <p:sp>
+        <p:nvSpPr>
+          <p:cNvPr id="10" name="close-shape-9"/>
+          <p:cNvSpPr/>
+          <p:nvPr/>
+        </p:nvSpPr>
+        <p:spPr>
+          <a:xfrm>
+            <a:off x="10820400" y="3530600"/>
+            <a:ext cx="4927600" cy="2895600"/>
           </a:xfrm>
           <a:prstGeom prst="rect">
             <a:avLst/>
           </a:prstGeom>
           <a:solidFill>
-            <a:srgbClr val="FCE8EA"/>
-          </a:solidFill>
-          <a:ln w="12700">
-            <a:solidFill>
-              <a:srgbClr val="C41220"/>
-            </a:solidFill>
-            <a:prstDash val="solid"/>
-          </a:ln>
-        </p:spPr>
-      </p:sp>
-      <p:sp>
-        <p:nvSpPr>
-          <p:cNvPr id="7" name="close-shape-6"/>
-          <p:cNvSpPr/>
-          <p:nvPr/>
-        </p:nvSpPr>
-        <p:spPr>
-          <a:xfrm>
-            <a:off x="5981700" y="3543300"/>
-            <a:ext cx="4292600" cy="2324100"/>
-          </a:xfrm>
-          <a:prstGeom prst="rect">
-            <a:avLst/>
-          </a:prstGeom>
-          <a:solidFill>
-            <a:srgbClr val="F8F9FA"/>
+            <a:srgbClr val="F3F4F6"/>
           </a:solidFill>
           <a:ln w="12700">
             <a:solidFill>
@@ -5952,39 +6124,14 @@
       </p:sp>
       <p:sp>
         <p:nvSpPr>
-          <p:cNvPr id="8" name="close-shape-7"/>
-          <p:cNvSpPr/>
-          <p:nvPr/>
-        </p:nvSpPr>
-        <p:spPr>
-          <a:xfrm>
-            <a:off x="10871200" y="3543300"/>
-            <a:ext cx="4216400" cy="2324100"/>
-          </a:xfrm>
-          <a:prstGeom prst="rect">
-            <a:avLst/>
-          </a:prstGeom>
-          <a:solidFill>
-            <a:srgbClr val="F8F9FA"/>
-          </a:solidFill>
-          <a:ln w="12700">
-            <a:solidFill>
-              <a:srgbClr val="D1D5DB"/>
-            </a:solidFill>
-            <a:prstDash val="solid"/>
-          </a:ln>
-        </p:spPr>
-      </p:sp>
-      <p:sp>
-        <p:nvSpPr>
-          <p:cNvPr id="9" name="collect"/>
-          <p:cNvSpPr/>
-          <p:nvPr/>
-        </p:nvSpPr>
-        <p:spPr>
-          <a:xfrm>
-            <a:off x="1346200" y="3835400"/>
-            <a:ext cx="3784600" cy="1714500"/>
+          <p:cNvPr id="11" name="c3"/>
+          <p:cNvSpPr/>
+          <p:nvPr/>
+        </p:nvSpPr>
+        <p:spPr>
+          <a:xfrm>
+            <a:off x="11201400" y="3886200"/>
+            <a:ext cx="4165600" cy="2184400"/>
           </a:xfrm>
           <a:prstGeom prst="rect">
             <a:avLst/>
@@ -5998,12 +6145,12 @@
           <a:p>
             <a:pPr algn="l" indent="0" marL="0">
               <a:lnSpc>
-                <a:spcPts val="1680"/>
+                <a:spcPts val="1920"/>
               </a:lnSpc>
               <a:buNone/>
             </a:pPr>
             <a:r>
-              <a:rPr lang="en-US" altLang="en-US" sz="1400" b="1" dirty="0">
+              <a:rPr lang="en-US" altLang="en-US" sz="1500" b="1" dirty="0">
                 <a:solidFill>
                   <a:srgbClr val="C41220"/>
                 </a:solidFill>
@@ -6011,22 +6158,22 @@
                 <a:ea typeface="Inter" pitchFamily="34" charset="-122"/>
                 <a:cs typeface="Inter" pitchFamily="34" charset="-120"/>
               </a:rPr>
-              <a:t>RETURN</a:t>
-            </a:r>
-            <a:endParaRPr lang="en-US" sz="2000" dirty="0"/>
+              <a:t>3. DECIDE</a:t>
+            </a:r>
+            <a:endParaRPr lang="en-US" sz="2100" dirty="0"/>
           </a:p>
           <a:p>
             <a:pPr algn="l" indent="0" marL="0">
               <a:lnSpc>
-                <a:spcPts val="2400"/>
+                <a:spcPts val="2688"/>
               </a:lnSpc>
               <a:spcBef>
-                <a:spcPts val="900"/>
+                <a:spcPts val="1000"/>
               </a:spcBef>
               <a:buNone/>
             </a:pPr>
             <a:r>
-              <a:rPr lang="en-US" altLang="en-US" sz="2000" b="1" dirty="0">
+              <a:rPr lang="en-US" altLang="en-US" sz="2100" dirty="0">
                 <a:solidFill>
                   <a:srgbClr val="3C4043"/>
                 </a:solidFill>
@@ -6034,7 +6181,66 @@
                 <a:ea typeface="Inter" pitchFamily="34" charset="-122"/>
                 <a:cs typeface="Inter" pitchFamily="34" charset="-120"/>
               </a:rPr>
-              <a:t>Give written feedback tied to one criterion and allow a meaningful revision action.</a:t>
+              <a:t>Use the new evidence to choose the next small step toward the standard.</a:t>
+            </a:r>
+            <a:endParaRPr lang="en-US" sz="2100" dirty="0"/>
+          </a:p>
+        </p:txBody>
+      </p:sp>
+      <p:sp>
+        <p:nvSpPr>
+          <p:cNvPr id="12" name="close-shape-11"/>
+          <p:cNvSpPr/>
+          <p:nvPr/>
+        </p:nvSpPr>
+        <p:spPr>
+          <a:xfrm>
+            <a:off x="736600" y="6934200"/>
+            <a:ext cx="15011400" cy="838200"/>
+          </a:xfrm>
+          <a:prstGeom prst="rect">
+            <a:avLst/>
+          </a:prstGeom>
+          <a:solidFill>
+            <a:srgbClr val="202124"/>
+          </a:solidFill>
+          <a:ln/>
+        </p:spPr>
+      </p:sp>
+      <p:sp>
+        <p:nvSpPr>
+          <p:cNvPr id="13" name="bottom"/>
+          <p:cNvSpPr/>
+          <p:nvPr/>
+        </p:nvSpPr>
+        <p:spPr>
+          <a:xfrm>
+            <a:off x="1117600" y="7188200"/>
+            <a:ext cx="14224000" cy="330200"/>
+          </a:xfrm>
+          <a:prstGeom prst="rect">
+            <a:avLst/>
+          </a:prstGeom>
+          <a:noFill/>
+          <a:ln/>
+        </p:spPr>
+        <p:txBody>
+          <a:bodyPr wrap="square" lIns="0" tIns="0" rIns="0" bIns="0" rtlCol="0" anchor="t"/>
+          <a:lstStyle/>
+          <a:p>
+            <a:pPr algn="l" indent="0" marL="0">
+              <a:buNone/>
+            </a:pPr>
+            <a:r>
+              <a:rPr lang="en-US" altLang="en-US" sz="2000" dirty="0">
+                <a:solidFill>
+                  <a:srgbClr val="FFFFFF"/>
+                </a:solidFill>
+                <a:latin typeface="Inter" pitchFamily="34" charset="0"/>
+                <a:ea typeface="Inter" pitchFamily="34" charset="-122"/>
+                <a:cs typeface="Inter" pitchFamily="34" charset="-120"/>
+              </a:rPr>
+              <a:t>Today: read the writing → write the feedback → plan the next step. Keep the writing samples for the next PLC.</a:t>
             </a:r>
             <a:endParaRPr lang="en-US" sz="2000" dirty="0"/>
           </a:p>
@@ -6042,187 +6248,7 @@
       </p:sp>
       <p:sp>
         <p:nvSpPr>
-          <p:cNvPr id="10" name="look"/>
-          <p:cNvSpPr/>
-          <p:nvPr/>
-        </p:nvSpPr>
-        <p:spPr>
-          <a:xfrm>
-            <a:off x="6235700" y="3835400"/>
-            <a:ext cx="3784600" cy="1714500"/>
-          </a:xfrm>
-          <a:prstGeom prst="rect">
-            <a:avLst/>
-          </a:prstGeom>
-          <a:noFill/>
-          <a:ln/>
-        </p:spPr>
-        <p:txBody>
-          <a:bodyPr wrap="square" lIns="0" tIns="0" rIns="0" bIns="0" rtlCol="0" anchor="t"/>
-          <a:lstStyle/>
-          <a:p>
-            <a:pPr algn="l" indent="0" marL="0">
-              <a:lnSpc>
-                <a:spcPts val="1680"/>
-              </a:lnSpc>
-              <a:buNone/>
-            </a:pPr>
-            <a:r>
-              <a:rPr lang="en-US" altLang="en-US" sz="1400" b="1" dirty="0">
-                <a:solidFill>
-                  <a:srgbClr val="C41220"/>
-                </a:solidFill>
-                <a:latin typeface="Inter" pitchFamily="34" charset="0"/>
-                <a:ea typeface="Inter" pitchFamily="34" charset="-122"/>
-                <a:cs typeface="Inter" pitchFamily="34" charset="-120"/>
-              </a:rPr>
-              <a:t>LOOK FOR</a:t>
-            </a:r>
-            <a:endParaRPr lang="en-US" sz="2000" dirty="0"/>
-          </a:p>
-          <a:p>
-            <a:pPr algn="l" indent="0" marL="0">
-              <a:lnSpc>
-                <a:spcPts val="2400"/>
-              </a:lnSpc>
-              <a:spcBef>
-                <a:spcPts val="900"/>
-              </a:spcBef>
-              <a:buNone/>
-            </a:pPr>
-            <a:r>
-              <a:rPr lang="en-US" altLang="en-US" sz="2000" b="1" dirty="0">
-                <a:solidFill>
-                  <a:srgbClr val="3C4043"/>
-                </a:solidFill>
-                <a:latin typeface="Inter" pitchFamily="34" charset="0"/>
-                <a:ea typeface="Inter" pitchFamily="34" charset="-122"/>
-                <a:cs typeface="Inter" pitchFamily="34" charset="-120"/>
-              </a:rPr>
-              <a:t>Evidence that students strengthened the claim, evidence use, reasoning, or science language.</a:t>
-            </a:r>
-            <a:endParaRPr lang="en-US" sz="2000" dirty="0"/>
-          </a:p>
-        </p:txBody>
-      </p:sp>
-      <p:sp>
-        <p:nvSpPr>
-          <p:cNvPr id="11" name="revisit"/>
-          <p:cNvSpPr/>
-          <p:nvPr/>
-        </p:nvSpPr>
-        <p:spPr>
-          <a:xfrm>
-            <a:off x="11125200" y="3835400"/>
-            <a:ext cx="3708400" cy="1714500"/>
-          </a:xfrm>
-          <a:prstGeom prst="rect">
-            <a:avLst/>
-          </a:prstGeom>
-          <a:noFill/>
-          <a:ln/>
-        </p:spPr>
-        <p:txBody>
-          <a:bodyPr wrap="square" lIns="0" tIns="0" rIns="0" bIns="0" rtlCol="0" anchor="t"/>
-          <a:lstStyle/>
-          <a:p>
-            <a:pPr algn="l" indent="0" marL="0">
-              <a:lnSpc>
-                <a:spcPts val="1680"/>
-              </a:lnSpc>
-              <a:buNone/>
-            </a:pPr>
-            <a:r>
-              <a:rPr lang="en-US" altLang="en-US" sz="1400" b="1" dirty="0">
-                <a:solidFill>
-                  <a:srgbClr val="C41220"/>
-                </a:solidFill>
-                <a:latin typeface="Inter" pitchFamily="34" charset="0"/>
-                <a:ea typeface="Inter" pitchFamily="34" charset="-122"/>
-                <a:cs typeface="Inter" pitchFamily="34" charset="-120"/>
-              </a:rPr>
-              <a:t>REVISIT</a:t>
-            </a:r>
-            <a:endParaRPr lang="en-US" sz="2000" dirty="0"/>
-          </a:p>
-          <a:p>
-            <a:pPr algn="l" indent="0" marL="0">
-              <a:lnSpc>
-                <a:spcPts val="2400"/>
-              </a:lnSpc>
-              <a:spcBef>
-                <a:spcPts val="900"/>
-              </a:spcBef>
-              <a:buNone/>
-            </a:pPr>
-            <a:r>
-              <a:rPr lang="en-US" altLang="en-US" sz="2000" b="1" dirty="0">
-                <a:solidFill>
-                  <a:srgbClr val="3C4043"/>
-                </a:solidFill>
-                <a:latin typeface="Inter" pitchFamily="34" charset="0"/>
-                <a:ea typeface="Inter" pitchFamily="34" charset="-122"/>
-                <a:cs typeface="Inter" pitchFamily="34" charset="-120"/>
-              </a:rPr>
-              <a:t>Use the new evidence to decide the next narrow learning step for standard mastery.</a:t>
-            </a:r>
-            <a:endParaRPr lang="en-US" sz="2000" dirty="0"/>
-          </a:p>
-        </p:txBody>
-      </p:sp>
-      <p:sp>
-        <p:nvSpPr>
-          <p:cNvPr id="12" name="bottom"/>
-          <p:cNvSpPr/>
-          <p:nvPr/>
-        </p:nvSpPr>
-        <p:spPr>
-          <a:xfrm>
-            <a:off x="736600" y="7289800"/>
-            <a:ext cx="14198600" cy="457200"/>
-          </a:xfrm>
-          <a:prstGeom prst="rect">
-            <a:avLst/>
-          </a:prstGeom>
-          <a:noFill/>
-          <a:ln/>
-        </p:spPr>
-        <p:txBody>
-          <a:bodyPr wrap="square" lIns="0" tIns="0" rIns="0" bIns="0" rtlCol="0" anchor="t"/>
-          <a:lstStyle/>
-          <a:p>
-            <a:pPr algn="ctr" indent="0" marL="0">
-              <a:buNone/>
-            </a:pPr>
-            <a:r>
-              <a:rPr lang="en-US" altLang="en-US" sz="2200" b="1" dirty="0">
-                <a:solidFill>
-                  <a:srgbClr val="C41220"/>
-                </a:solidFill>
-                <a:latin typeface="Inter" pitchFamily="34" charset="0"/>
-                <a:ea typeface="Inter" pitchFamily="34" charset="-122"/>
-                <a:cs typeface="Inter" pitchFamily="34" charset="-120"/>
-              </a:rPr>
-              <a:t>Close the week:</a:t>
-            </a:r>
-            <a:r>
-              <a:rPr lang="en-US" altLang="en-US" sz="2200" dirty="0">
-                <a:solidFill>
-                  <a:srgbClr val="3C4043"/>
-                </a:solidFill>
-                <a:latin typeface="Inter" pitchFamily="34" charset="0"/>
-                <a:ea typeface="Inter" pitchFamily="34" charset="-122"/>
-                <a:cs typeface="Inter" pitchFamily="34" charset="-120"/>
-              </a:rPr>
-              <a:t> experience the task → plan instruction → teach CUBS/CER → read writing → feedback + revision → next mastery move.</a:t>
-            </a:r>
-            <a:endParaRPr lang="en-US" sz="2200" dirty="0"/>
-          </a:p>
-        </p:txBody>
-      </p:sp>
-      <p:sp>
-        <p:nvSpPr>
-          <p:cNvPr id="13" name="page"/>
+          <p:cNvPr id="14" name="page"/>
           <p:cNvSpPr/>
           <p:nvPr/>
         </p:nvSpPr>
@@ -6261,7 +6287,7 @@
       </p:sp>
       <p:sp>
         <p:nvSpPr>
-          <p:cNvPr id="14" name="close-shape-13"/>
+          <p:cNvPr id="15" name="close-shape-14"/>
           <p:cNvSpPr/>
           <p:nvPr/>
         </p:nvSpPr>

--- a/assets/plc/2026-10-30_Lesson_Internalization_Use_Student_Work_to_Adjust_Next_Learning_Experience.pptx
+++ b/assets/plc/2026-10-30_Lesson_Internalization_Use_Student_Work_to_Adjust_Next_Learning_Experience.pptx
@@ -12,16 +12,17 @@
     <p:sldId id="260" r:id="rId6"/>
     <p:sldId id="261" r:id="rId7"/>
     <p:sldId id="262" r:id="rId8"/>
+    <p:sldId id="263" r:id="rId9"/>
   </p:sldIdLst>
   <p:notesMasterIdLst>
-    <p:notesMasterId r:id="rId9"/>
+    <p:notesMasterId r:id="rId10"/>
   </p:notesMasterIdLst>
   <p:sldSz cx="16256000" cy="9144000"/>
   <p:notesSz cx="9144000" cy="16256000"/>
   <p:embeddedFontLst>
     <p:embeddedFont>
       <p:font typeface="Inter" charset="-122" pitchFamily="34"/>
-      <p:regular r:id="rId14"/>
+      <p:regular r:id="rId15"/>
     </p:embeddedFont>
   </p:embeddedFontLst>
   <p:defaultTextStyle>
@@ -1066,6 +1067,94 @@
             <a:fld id="{F7021451-1387-4CA6-816F-3879F97B5CBC}" type="slidenum">
               <a:rPr lang="en-US"/>
               <a:t>7</a:t>
+            </a:fld>
+            <a:endParaRPr lang="en-US"/>
+          </a:p>
+        </p:txBody>
+      </p:sp>
+    </p:spTree>
+    <p:extLst>
+      <p:ext uri="{BB962C8B-B14F-4D97-AF65-F5344CB8AC3E}">
+        <p14:creationId xmlns:p14="http://schemas.microsoft.com/office/powerpoint/2010/main" val="1024086991"/>
+      </p:ext>
+    </p:extLst>
+  </p:cSld>
+  <p:clrMapOvr>
+    <a:masterClrMapping/>
+  </p:clrMapOvr>
+</p:notes>
+</file>
+
+<file path=ppt/notesSlides/notesSlide8.xml><?xml version="1.0" encoding="utf-8"?>
+<p:notes xmlns:a="http://schemas.openxmlformats.org/drawingml/2006/main" xmlns:r="http://schemas.openxmlformats.org/officeDocument/2006/relationships" xmlns:p="http://schemas.openxmlformats.org/presentationml/2006/main">
+  <p:cSld>
+    <p:spTree>
+      <p:nvGrpSpPr>
+        <p:cNvPr id="1" name=""/>
+        <p:cNvGrpSpPr/>
+        <p:nvPr/>
+      </p:nvGrpSpPr>
+      <p:grpSpPr>
+        <a:xfrm>
+          <a:off x="0" y="0"/>
+          <a:ext cx="0" cy="0"/>
+          <a:chOff x="0" y="0"/>
+          <a:chExt cx="0" cy="0"/>
+        </a:xfrm>
+      </p:grpSpPr>
+      <p:sp>
+        <p:nvSpPr>
+          <p:cNvPr id="2" name="Slide Image Placeholder 1"/>
+          <p:cNvSpPr>
+            <a:spLocks noGrp="1" noRot="1" noChangeAspect="1"/>
+          </p:cNvSpPr>
+          <p:nvPr>
+            <p:ph type="sldImg"/>
+          </p:nvPr>
+        </p:nvSpPr>
+        <p:spPr/>
+      </p:sp>
+      <p:sp>
+        <p:nvSpPr>
+          <p:cNvPr id="3" name="Notes Placeholder 2"/>
+          <p:cNvSpPr>
+            <a:spLocks noGrp="1"/>
+          </p:cNvSpPr>
+          <p:nvPr>
+            <p:ph type="body" idx="1"/>
+          </p:nvPr>
+        </p:nvSpPr>
+        <p:spPr/>
+        <p:txBody>
+          <a:bodyPr/>
+          <a:lstStyle/>
+          <a:p>
+            <a:r>
+              <a:rPr lang="en-US" dirty="0"/>
+              <a:t/>
+            </a:r>
+            <a:endParaRPr lang="en-US" dirty="0"/>
+          </a:p>
+        </p:txBody>
+      </p:sp>
+      <p:sp>
+        <p:nvSpPr>
+          <p:cNvPr id="4" name="Slide Number Placeholder 3"/>
+          <p:cNvSpPr>
+            <a:spLocks noGrp="1"/>
+          </p:cNvSpPr>
+          <p:nvPr>
+            <p:ph type="sldNum" sz="quarter" idx="10"/>
+          </p:nvPr>
+        </p:nvSpPr>
+        <p:spPr/>
+        <p:txBody>
+          <a:bodyPr/>
+          <a:lstStyle/>
+          <a:p>
+            <a:fld id="{F7021451-1387-4CA6-816F-3879F97B5CBC}" type="slidenum">
+              <a:rPr lang="en-US"/>
+              <a:t>8</a:t>
             </a:fld>
             <a:endParaRPr lang="en-US"/>
           </a:p>
@@ -1463,7 +1552,7 @@
         </p:nvSpPr>
         <p:spPr>
           <a:xfrm>
-            <a:off x="736600" y="381000"/>
+            <a:off x="736600" y="406400"/>
             <a:ext cx="12700000" cy="304800"/>
           </a:xfrm>
           <a:prstGeom prst="rect">
@@ -1502,8 +1591,8 @@
         </p:nvSpPr>
         <p:spPr>
           <a:xfrm>
-            <a:off x="736600" y="1854200"/>
-            <a:ext cx="11176000" cy="1574800"/>
+            <a:off x="736600" y="1676400"/>
+            <a:ext cx="11176000" cy="1905000"/>
           </a:xfrm>
           <a:prstGeom prst="rect">
             <a:avLst/>
@@ -1517,12 +1606,12 @@
           <a:p>
             <a:pPr algn="l" indent="0" marL="0">
               <a:lnSpc>
-                <a:spcPts val="4620"/>
+                <a:spcPts val="4400"/>
               </a:lnSpc>
               <a:buNone/>
             </a:pPr>
             <a:r>
-              <a:rPr lang="en-US" altLang="en-US" sz="4200" dirty="0">
+              <a:rPr lang="en-US" altLang="en-US" sz="4000" dirty="0">
                 <a:solidFill>
                   <a:srgbClr val="202124"/>
                 </a:solidFill>
@@ -1530,19 +1619,19 @@
                 <a:ea typeface="Inter" pitchFamily="34" charset="-122"/>
                 <a:cs typeface="Inter" pitchFamily="34" charset="-120"/>
               </a:rPr>
-              <a:t>Read Student Writing →</a:t>
-            </a:r>
-            <a:endParaRPr lang="en-US" sz="4200" dirty="0"/>
+              <a:t>Use the Rubric to Read Student Writing</a:t>
+            </a:r>
+            <a:endParaRPr lang="en-US" sz="4000" dirty="0"/>
           </a:p>
           <a:p>
             <a:pPr algn="l" indent="0" marL="0">
               <a:lnSpc>
-                <a:spcPts val="4620"/>
+                <a:spcPts val="4400"/>
               </a:lnSpc>
               <a:buNone/>
             </a:pPr>
             <a:r>
-              <a:rPr lang="en-US" altLang="en-US" sz="4200" dirty="0">
+              <a:rPr lang="en-US" altLang="en-US" sz="4000" dirty="0">
                 <a:solidFill>
                   <a:srgbClr val="202124"/>
                 </a:solidFill>
@@ -1550,9 +1639,9 @@
                 <a:ea typeface="Inter" pitchFamily="34" charset="-122"/>
                 <a:cs typeface="Inter" pitchFamily="34" charset="-120"/>
               </a:rPr>
-              <a:t>Give Feedback → Plan the Next Step</a:t>
-            </a:r>
-            <a:endParaRPr lang="en-US" sz="4200" dirty="0"/>
+              <a:t>and Plan the Next Step</a:t>
+            </a:r>
+            <a:endParaRPr lang="en-US" sz="4000" dirty="0"/>
           </a:p>
         </p:txBody>
       </p:sp>
@@ -1564,8 +1653,8 @@
         </p:nvSpPr>
         <p:spPr>
           <a:xfrm>
-            <a:off x="736600" y="3759200"/>
-            <a:ext cx="10795000" cy="1219200"/>
+            <a:off x="736600" y="3708400"/>
+            <a:ext cx="10922000" cy="1168400"/>
           </a:xfrm>
           <a:prstGeom prst="rect">
             <a:avLst/>
@@ -1579,12 +1668,12 @@
           <a:p>
             <a:pPr algn="l" indent="0" marL="0">
               <a:lnSpc>
-                <a:spcPts val="3000"/>
+                <a:spcPts val="2944"/>
               </a:lnSpc>
               <a:buNone/>
             </a:pPr>
             <a:r>
-              <a:rPr lang="en-US" altLang="en-US" sz="2400" dirty="0">
+              <a:rPr lang="en-US" altLang="en-US" sz="2300" dirty="0">
                 <a:solidFill>
                   <a:srgbClr val="3C4043"/>
                 </a:solidFill>
@@ -1592,9 +1681,9 @@
                 <a:ea typeface="Inter" pitchFamily="34" charset="-122"/>
                 <a:cs typeface="Inter" pitchFamily="34" charset="-120"/>
               </a:rPr>
-              <a:t>Today teachers read completed student writing against the mastery bar, write one comment students can act on, and plan one short next step toward the standard.</a:t>
-            </a:r>
-            <a:endParaRPr lang="en-US" sz="2400" dirty="0"/>
+              <a:t>The rubric is the anchor today. Teachers read completed student writing against the rubric, give feedback students can act on, and choose one next instructional step.</a:t>
+            </a:r>
+            <a:endParaRPr lang="en-US" sz="2300" dirty="0"/>
           </a:p>
         </p:txBody>
       </p:sp>
@@ -1606,8 +1695,8 @@
         </p:nvSpPr>
         <p:spPr>
           <a:xfrm>
-            <a:off x="12242800" y="1905000"/>
-            <a:ext cx="3200400" cy="3073400"/>
+            <a:off x="12242800" y="1676400"/>
+            <a:ext cx="3200400" cy="3200400"/>
           </a:xfrm>
           <a:prstGeom prst="rect">
             <a:avLst/>
@@ -1631,7 +1720,7 @@
         </p:nvSpPr>
         <p:spPr>
           <a:xfrm>
-            <a:off x="12547600" y="2260600"/>
+            <a:off x="12547600" y="2006600"/>
             <a:ext cx="2590800" cy="254000"/>
           </a:xfrm>
           <a:prstGeom prst="rect">
@@ -1670,8 +1759,8 @@
         </p:nvSpPr>
         <p:spPr>
           <a:xfrm>
-            <a:off x="12547600" y="2895600"/>
-            <a:ext cx="2590800" cy="1778000"/>
+            <a:off x="12547600" y="2616200"/>
+            <a:ext cx="2590800" cy="1930400"/>
           </a:xfrm>
           <a:prstGeom prst="rect">
             <a:avLst/>
@@ -1685,7 +1774,7 @@
           <a:p>
             <a:pPr algn="ctr" indent="0" marL="0">
               <a:lnSpc>
-                <a:spcPts val="2440"/>
+                <a:spcPts val="2480"/>
               </a:lnSpc>
               <a:buNone/>
             </a:pPr>
@@ -1698,7 +1787,7 @@
                 <a:ea typeface="Inter" pitchFamily="34" charset="-122"/>
                 <a:cs typeface="Inter" pitchFamily="34" charset="-120"/>
               </a:rPr>
-              <a:t>Use student work to decide the next step. Describe the work, not the student.</a:t>
+              <a:t>Same rubric. Same bar. Feedback from evidence, not impressions.</a:t>
             </a:r>
             <a:endParaRPr lang="en-US" sz="2000" dirty="0"/>
           </a:p>
@@ -1712,8 +1801,8 @@
         </p:nvSpPr>
         <p:spPr>
           <a:xfrm>
-            <a:off x="736600" y="5740400"/>
-            <a:ext cx="14706600" cy="1625600"/>
+            <a:off x="736600" y="5130800"/>
+            <a:ext cx="14706600" cy="1854200"/>
           </a:xfrm>
           <a:prstGeom prst="rect">
             <a:avLst/>
@@ -1737,8 +1826,8 @@
         </p:nvSpPr>
         <p:spPr>
           <a:xfrm>
-            <a:off x="1117600" y="6019800"/>
-            <a:ext cx="13970000" cy="1117600"/>
+            <a:off x="1117600" y="5308600"/>
+            <a:ext cx="13970000" cy="1524000"/>
           </a:xfrm>
           <a:prstGeom prst="rect">
             <a:avLst/>
@@ -1752,12 +1841,12 @@
           <a:p>
             <a:pPr algn="l" indent="0" marL="0">
               <a:lnSpc>
-                <a:spcPts val="2728"/>
+                <a:spcPts val="2480"/>
               </a:lnSpc>
               <a:buNone/>
             </a:pPr>
             <a:r>
-              <a:rPr lang="en-US" altLang="en-US" sz="2200" b="1" dirty="0">
+              <a:rPr lang="en-US" altLang="en-US" sz="2000" b="1" dirty="0">
                 <a:solidFill>
                   <a:srgbClr val="C41220"/>
                 </a:solidFill>
@@ -1768,7 +1857,7 @@
               <a:t>Bring:</a:t>
             </a:r>
             <a:r>
-              <a:rPr lang="en-US" altLang="en-US" sz="2200" dirty="0">
+              <a:rPr lang="en-US" altLang="en-US" sz="2000" dirty="0">
                 <a:solidFill>
                   <a:srgbClr val="3C4043"/>
                 </a:solidFill>
@@ -1776,22 +1865,22 @@
                 <a:ea typeface="Inter" pitchFamily="34" charset="-122"/>
                 <a:cs typeface="Inter" pitchFamily="34" charset="-120"/>
               </a:rPr>
-              <a:t> 3–5 de-identified completed writing samples, the task and source, the standard, and your current feedback or revision notes.</a:t>
-            </a:r>
-            <a:endParaRPr lang="en-US" sz="2200" dirty="0"/>
+              <a:t> 3–5 completed student writing samples, the task and source, and the rubric or success criteria you use.</a:t>
+            </a:r>
+            <a:endParaRPr lang="en-US" sz="2000" dirty="0"/>
           </a:p>
           <a:p>
             <a:pPr algn="l" indent="0" marL="0">
               <a:lnSpc>
-                <a:spcPts val="2728"/>
+                <a:spcPts val="2480"/>
               </a:lnSpc>
               <a:spcBef>
-                <a:spcPts val="800"/>
+                <a:spcPts val="600"/>
               </a:spcBef>
               <a:buNone/>
             </a:pPr>
             <a:r>
-              <a:rPr lang="en-US" altLang="en-US" sz="2200" b="1" dirty="0">
+              <a:rPr lang="en-US" altLang="en-US" sz="2000" b="1" dirty="0">
                 <a:solidFill>
                   <a:srgbClr val="C41220"/>
                 </a:solidFill>
@@ -1799,10 +1888,10 @@
                 <a:ea typeface="Inter" pitchFamily="34" charset="-122"/>
                 <a:cs typeface="Inter" pitchFamily="34" charset="-120"/>
               </a:rPr>
-              <a:t>Bring for every course:</a:t>
-            </a:r>
-            <a:r>
-              <a:rPr lang="en-US" altLang="en-US" sz="2200" dirty="0">
+              <a:t>Biology example:</a:t>
+            </a:r>
+            <a:r>
+              <a:rPr lang="en-US" altLang="en-US" sz="2000" dirty="0">
                 <a:solidFill>
                   <a:srgbClr val="3C4043"/>
                 </a:solidFill>
@@ -1810,38 +1899,100 @@
                 <a:ea typeface="Inter" pitchFamily="34" charset="-122"/>
                 <a:cs typeface="Inter" pitchFamily="34" charset="-120"/>
               </a:rPr>
-              <a:t> any comparable written response from your own science course.</a:t>
-            </a:r>
-            <a:endParaRPr lang="en-US" sz="2200" dirty="0"/>
-          </a:p>
-        </p:txBody>
-      </p:sp>
-      <p:sp>
-        <p:nvSpPr>
-          <p:cNvPr id="12" name="footer"/>
-          <p:cNvSpPr/>
-          <p:nvPr/>
-        </p:nvSpPr>
-        <p:spPr>
-          <a:xfrm>
-            <a:off x="736600" y="7772400"/>
-            <a:ext cx="13970000" cy="508000"/>
-          </a:xfrm>
-          <a:prstGeom prst="rect">
-            <a:avLst/>
-          </a:prstGeom>
-          <a:noFill/>
-          <a:ln/>
-        </p:spPr>
-        <p:txBody>
-          <a:bodyPr wrap="square" lIns="0" tIns="0" rIns="0" bIns="0" rtlCol="0" anchor="t"/>
-          <a:lstStyle/>
-          <a:p>
-            <a:pPr algn="l" indent="0" marL="0">
-              <a:buNone/>
-            </a:pPr>
-            <a:r>
-              <a:rPr lang="en-US" altLang="en-US" sz="2000" b="1" dirty="0">
+              <a:t> Benchmark #1 rubric, 10 points — Claim 1, Evidence 1, Reasoning 1, short response 2. Other courses bring their own rubric.</a:t>
+            </a:r>
+            <a:endParaRPr lang="en-US" sz="2000" dirty="0"/>
+          </a:p>
+        </p:txBody>
+      </p:sp>
+      <p:sp>
+        <p:nvSpPr>
+          <p:cNvPr id="12" name="cover-shape-11"/>
+          <p:cNvSpPr/>
+          <p:nvPr/>
+        </p:nvSpPr>
+        <p:spPr>
+          <a:xfrm>
+            <a:off x="736600" y="7061200"/>
+            <a:ext cx="14706600" cy="711200"/>
+          </a:xfrm>
+          <a:prstGeom prst="rect">
+            <a:avLst/>
+          </a:prstGeom>
+          <a:solidFill>
+            <a:srgbClr val="202124"/>
+          </a:solidFill>
+          <a:ln/>
+        </p:spPr>
+      </p:sp>
+      <p:sp>
+        <p:nvSpPr>
+          <p:cNvPr id="13" name="rule"/>
+          <p:cNvSpPr/>
+          <p:nvPr/>
+        </p:nvSpPr>
+        <p:spPr>
+          <a:xfrm>
+            <a:off x="1117600" y="7277100"/>
+            <a:ext cx="13970000" cy="330200"/>
+          </a:xfrm>
+          <a:prstGeom prst="rect">
+            <a:avLst/>
+          </a:prstGeom>
+          <a:noFill/>
+          <a:ln/>
+        </p:spPr>
+        <p:txBody>
+          <a:bodyPr wrap="square" lIns="0" tIns="0" rIns="0" bIns="0" rtlCol="0" anchor="t"/>
+          <a:lstStyle/>
+          <a:p>
+            <a:pPr algn="l" indent="0" marL="0">
+              <a:buNone/>
+            </a:pPr>
+            <a:r>
+              <a:rPr lang="en-US" altLang="en-US" sz="1900" dirty="0">
+                <a:solidFill>
+                  <a:srgbClr val="FFFFFF"/>
+                </a:solidFill>
+                <a:latin typeface="Inter" pitchFamily="34" charset="0"/>
+                <a:ea typeface="Inter" pitchFamily="34" charset="-122"/>
+                <a:cs typeface="Inter" pitchFamily="34" charset="-120"/>
+              </a:rPr>
+              <a:t>The rubric describes the writing. It never ranks students, teachers, classes, or courses.</a:t>
+            </a:r>
+            <a:endParaRPr lang="en-US" sz="1900" dirty="0"/>
+          </a:p>
+        </p:txBody>
+      </p:sp>
+      <p:sp>
+        <p:nvSpPr>
+          <p:cNvPr id="14" name="footer"/>
+          <p:cNvSpPr/>
+          <p:nvPr/>
+        </p:nvSpPr>
+        <p:spPr>
+          <a:xfrm>
+            <a:off x="736600" y="7899400"/>
+            <a:ext cx="13716000" cy="1117600"/>
+          </a:xfrm>
+          <a:prstGeom prst="rect">
+            <a:avLst/>
+          </a:prstGeom>
+          <a:noFill/>
+          <a:ln/>
+        </p:spPr>
+        <p:txBody>
+          <a:bodyPr wrap="square" lIns="0" tIns="0" rIns="0" bIns="0" rtlCol="0" anchor="t"/>
+          <a:lstStyle/>
+          <a:p>
+            <a:pPr algn="l" indent="0" marL="0">
+              <a:lnSpc>
+                <a:spcPts val="2232"/>
+              </a:lnSpc>
+              <a:buNone/>
+            </a:pPr>
+            <a:r>
+              <a:rPr lang="en-US" altLang="en-US" sz="1800" b="1" dirty="0">
                 <a:solidFill>
                   <a:srgbClr val="C41220"/>
                 </a:solidFill>
@@ -1849,10 +2000,44 @@
                 <a:ea typeface="Inter" pitchFamily="34" charset="-122"/>
                 <a:cs typeface="Inter" pitchFamily="34" charset="-120"/>
               </a:rPr>
+              <a:t>Balanced view:</a:t>
+            </a:r>
+            <a:r>
+              <a:rPr lang="en-US" altLang="en-US" sz="1800" dirty="0">
+                <a:solidFill>
+                  <a:srgbClr val="3C4043"/>
+                </a:solidFill>
+                <a:latin typeface="Inter" pitchFamily="34" charset="0"/>
+                <a:ea typeface="Inter" pitchFamily="34" charset="-122"/>
+                <a:cs typeface="Inter" pitchFamily="34" charset="-120"/>
+              </a:rPr>
+              <a:t> The rubric sets the shared bar and is used every time. It works alongside what the writing shows and what teachers know about their students.</a:t>
+            </a:r>
+            <a:endParaRPr lang="en-US" sz="1800" dirty="0"/>
+          </a:p>
+          <a:p>
+            <a:pPr algn="l" indent="0" marL="0">
+              <a:lnSpc>
+                <a:spcPts val="2232"/>
+              </a:lnSpc>
+              <a:spcBef>
+                <a:spcPts val="500"/>
+              </a:spcBef>
+              <a:buNone/>
+            </a:pPr>
+            <a:r>
+              <a:rPr lang="en-US" altLang="en-US" sz="1800" b="1" dirty="0">
+                <a:solidFill>
+                  <a:srgbClr val="C41220"/>
+                </a:solidFill>
+                <a:latin typeface="Inter" pitchFamily="34" charset="0"/>
+                <a:ea typeface="Inter" pitchFamily="34" charset="-122"/>
+                <a:cs typeface="Inter" pitchFamily="34" charset="-120"/>
+              </a:rPr>
               <a:t>Lesson Internalization Tool:</a:t>
             </a:r>
             <a:r>
-              <a:rPr lang="en-US" altLang="en-US" sz="2000" dirty="0">
+              <a:rPr lang="en-US" altLang="en-US" sz="1800" dirty="0">
                 <a:solidFill>
                   <a:srgbClr val="3C4043"/>
                 </a:solidFill>
@@ -1862,13 +2047,13 @@
               </a:rPr>
               <a:t> Every Day Questions 1, 3, and 4  •  Team Deep Dive Steps 3–5  •  After-Lesson Reflection.</a:t>
             </a:r>
-            <a:endParaRPr lang="en-US" sz="2000" dirty="0"/>
-          </a:p>
-        </p:txBody>
-      </p:sp>
-      <p:sp>
-        <p:nvSpPr>
-          <p:cNvPr id="13" name="page"/>
+            <a:endParaRPr lang="en-US" sz="1800" dirty="0"/>
+          </a:p>
+        </p:txBody>
+      </p:sp>
+      <p:sp>
+        <p:nvSpPr>
+          <p:cNvPr id="15" name="page"/>
           <p:cNvSpPr/>
           <p:nvPr/>
         </p:nvSpPr>
@@ -1907,7 +2092,7 @@
       </p:sp>
       <p:sp>
         <p:nvSpPr>
-          <p:cNvPr id="14" name="cover-shape-13"/>
+          <p:cNvPr id="16" name="cover-shape-15"/>
           <p:cNvSpPr/>
           <p:nvPr/>
         </p:nvSpPr>
@@ -2010,7 +2195,7 @@
                 <a:ea typeface="Inter" pitchFamily="34" charset="-122"/>
                 <a:cs typeface="Inter" pitchFamily="34" charset="-120"/>
               </a:rPr>
-              <a:t>Today's Four Steps</a:t>
+              <a:t>Today's Five Steps</a:t>
             </a:r>
             <a:endParaRPr lang="en-US" sz="3000" dirty="0"/>
           </a:p>
@@ -2063,24 +2248,24 @@
         </p:nvSpPr>
         <p:spPr>
           <a:xfrm>
-            <a:off x="508000" y="1346200"/>
-            <a:ext cx="15240000" cy="660400"/>
-          </a:xfrm>
-          <a:prstGeom prst="rect">
-            <a:avLst/>
-          </a:prstGeom>
-          <a:noFill/>
-          <a:ln/>
-        </p:spPr>
-        <p:txBody>
-          <a:bodyPr wrap="square" lIns="0" tIns="0" rIns="0" bIns="0" rtlCol="0" anchor="t"/>
-          <a:lstStyle/>
-          <a:p>
-            <a:pPr algn="l" indent="0" marL="0">
-              <a:buNone/>
-            </a:pPr>
-            <a:r>
-              <a:rPr lang="en-US" altLang="en-US" sz="2300" dirty="0">
+            <a:off x="508000" y="1320800"/>
+            <a:ext cx="15240000" cy="685800"/>
+          </a:xfrm>
+          <a:prstGeom prst="rect">
+            <a:avLst/>
+          </a:prstGeom>
+          <a:noFill/>
+          <a:ln/>
+        </p:spPr>
+        <p:txBody>
+          <a:bodyPr wrap="square" lIns="0" tIns="0" rIns="0" bIns="0" rtlCol="0" anchor="t"/>
+          <a:lstStyle/>
+          <a:p>
+            <a:pPr algn="l" indent="0" marL="0">
+              <a:buNone/>
+            </a:pPr>
+            <a:r>
+              <a:rPr lang="en-US" altLang="en-US" sz="2200" dirty="0">
                 <a:solidFill>
                   <a:srgbClr val="3C4043"/>
                 </a:solidFill>
@@ -2088,9 +2273,9 @@
                 <a:ea typeface="Inter" pitchFamily="34" charset="-122"/>
                 <a:cs typeface="Inter" pitchFamily="34" charset="-120"/>
               </a:rPr>
-              <a:t>Each step produces one product. Follow the steps in order and keep the same student writing in front of you the whole time.</a:t>
-            </a:r>
-            <a:endParaRPr lang="en-US" sz="2300" dirty="0"/>
+              <a:t>The rubric comes first. Every step uses the same rubric, the same student writing, and the same standard.</a:t>
+            </a:r>
+            <a:endParaRPr lang="en-US" sz="2200" dirty="0"/>
           </a:p>
         </p:txBody>
       </p:sp>
@@ -2103,7 +2288,155 @@
         <p:spPr>
           <a:xfrm>
             <a:off x="508000" y="2362200"/>
-            <a:ext cx="3505200" cy="4191000"/>
+            <a:ext cx="2844800" cy="4191000"/>
+          </a:xfrm>
+          <a:prstGeom prst="rect">
+            <a:avLst/>
+          </a:prstGeom>
+          <a:solidFill>
+            <a:srgbClr val="FCE8EA"/>
+          </a:solidFill>
+          <a:ln w="25400">
+            <a:solidFill>
+              <a:srgbClr val="C41220"/>
+            </a:solidFill>
+            <a:prstDash val="solid"/>
+          </a:ln>
+        </p:spPr>
+      </p:sp>
+      <p:sp>
+        <p:nvSpPr>
+          <p:cNvPr id="7" name="s1-label"/>
+          <p:cNvSpPr/>
+          <p:nvPr/>
+        </p:nvSpPr>
+        <p:spPr>
+          <a:xfrm>
+            <a:off x="711200" y="2641600"/>
+            <a:ext cx="2438400" cy="228600"/>
+          </a:xfrm>
+          <a:prstGeom prst="rect">
+            <a:avLst/>
+          </a:prstGeom>
+          <a:noFill/>
+          <a:ln/>
+        </p:spPr>
+        <p:txBody>
+          <a:bodyPr wrap="square" lIns="0" tIns="0" rIns="0" bIns="0" rtlCol="0" anchor="t"/>
+          <a:lstStyle/>
+          <a:p>
+            <a:pPr algn="l" indent="0" marL="0">
+              <a:buNone/>
+            </a:pPr>
+            <a:r>
+              <a:rPr lang="en-US" altLang="en-US" sz="1400" dirty="0">
+                <a:solidFill>
+                  <a:srgbClr val="C41220"/>
+                </a:solidFill>
+                <a:latin typeface="Inter" pitchFamily="34" charset="0"/>
+                <a:ea typeface="Inter" pitchFamily="34" charset="-122"/>
+                <a:cs typeface="Inter" pitchFamily="34" charset="-120"/>
+              </a:rPr>
+              <a:t>STEP 1  •  4–10 MIN</a:t>
+            </a:r>
+            <a:endParaRPr lang="en-US" sz="1400" dirty="0"/>
+          </a:p>
+        </p:txBody>
+      </p:sp>
+      <p:sp>
+        <p:nvSpPr>
+          <p:cNvPr id="8" name="s1-title"/>
+          <p:cNvSpPr/>
+          <p:nvPr/>
+        </p:nvSpPr>
+        <p:spPr>
+          <a:xfrm>
+            <a:off x="711200" y="3022600"/>
+            <a:ext cx="2438400" cy="889000"/>
+          </a:xfrm>
+          <a:prstGeom prst="rect">
+            <a:avLst/>
+          </a:prstGeom>
+          <a:noFill/>
+          <a:ln/>
+        </p:spPr>
+        <p:txBody>
+          <a:bodyPr wrap="square" lIns="0" tIns="0" rIns="0" bIns="0" rtlCol="0" anchor="t"/>
+          <a:lstStyle/>
+          <a:p>
+            <a:pPr algn="l" indent="0" marL="0">
+              <a:lnSpc>
+                <a:spcPts val="2352"/>
+              </a:lnSpc>
+              <a:buNone/>
+            </a:pPr>
+            <a:r>
+              <a:rPr lang="en-US" altLang="en-US" sz="2100" dirty="0">
+                <a:solidFill>
+                  <a:srgbClr val="202124"/>
+                </a:solidFill>
+                <a:latin typeface="Inter" pitchFamily="34" charset="0"/>
+                <a:ea typeface="Inter" pitchFamily="34" charset="-122"/>
+                <a:cs typeface="Inter" pitchFamily="34" charset="-120"/>
+              </a:rPr>
+              <a:t>Start with the rubric</a:t>
+            </a:r>
+            <a:endParaRPr lang="en-US" sz="2100" dirty="0"/>
+          </a:p>
+        </p:txBody>
+      </p:sp>
+      <p:sp>
+        <p:nvSpPr>
+          <p:cNvPr id="9" name="s1-body"/>
+          <p:cNvSpPr/>
+          <p:nvPr/>
+        </p:nvSpPr>
+        <p:spPr>
+          <a:xfrm>
+            <a:off x="711200" y="4038600"/>
+            <a:ext cx="2438400" cy="2336800"/>
+          </a:xfrm>
+          <a:prstGeom prst="rect">
+            <a:avLst/>
+          </a:prstGeom>
+          <a:noFill/>
+          <a:ln/>
+        </p:spPr>
+        <p:txBody>
+          <a:bodyPr wrap="square" lIns="0" tIns="0" rIns="0" bIns="0" rtlCol="0" anchor="t"/>
+          <a:lstStyle/>
+          <a:p>
+            <a:pPr algn="l" indent="0" marL="0">
+              <a:lnSpc>
+                <a:spcPts val="2268"/>
+              </a:lnSpc>
+              <a:buNone/>
+            </a:pPr>
+            <a:r>
+              <a:rPr lang="en-US" altLang="en-US" sz="1800" dirty="0">
+                <a:solidFill>
+                  <a:srgbClr val="3C4043"/>
+                </a:solidFill>
+                <a:latin typeface="Inter" pitchFamily="34" charset="0"/>
+                <a:ea typeface="Inter" pitchFamily="34" charset="-122"/>
+                <a:cs typeface="Inter" pitchFamily="34" charset="-120"/>
+              </a:rPr>
+              <a:t>Name the task and standard, then underline the one or two criteria you will review.</a:t>
+            </a:r>
+            <a:endParaRPr lang="en-US" sz="1800" dirty="0"/>
+          </a:p>
+        </p:txBody>
+      </p:sp>
+      <p:sp>
+        <p:nvSpPr>
+          <p:cNvPr id="10" name="cycle-shape-9"/>
+          <p:cNvSpPr/>
+          <p:nvPr/>
+        </p:nvSpPr>
+        <p:spPr>
+          <a:xfrm>
+            <a:off x="3606800" y="2362200"/>
+            <a:ext cx="2844800" cy="4191000"/>
           </a:xfrm>
           <a:prstGeom prst="rect">
             <a:avLst/>
@@ -2121,30 +2454,30 @@
       </p:sp>
       <p:sp>
         <p:nvSpPr>
-          <p:cNvPr id="7" name="s1-label"/>
-          <p:cNvSpPr/>
-          <p:nvPr/>
-        </p:nvSpPr>
-        <p:spPr>
-          <a:xfrm>
-            <a:off x="762000" y="2667000"/>
-            <a:ext cx="2997200" cy="254000"/>
-          </a:xfrm>
-          <a:prstGeom prst="rect">
-            <a:avLst/>
-          </a:prstGeom>
-          <a:noFill/>
-          <a:ln/>
-        </p:spPr>
-        <p:txBody>
-          <a:bodyPr wrap="square" lIns="0" tIns="0" rIns="0" bIns="0" rtlCol="0" anchor="t"/>
-          <a:lstStyle/>
-          <a:p>
-            <a:pPr algn="l" indent="0" marL="0">
-              <a:buNone/>
-            </a:pPr>
-            <a:r>
-              <a:rPr lang="en-US" altLang="en-US" sz="1500" dirty="0">
+          <p:cNvPr id="11" name="s2-label"/>
+          <p:cNvSpPr/>
+          <p:nvPr/>
+        </p:nvSpPr>
+        <p:spPr>
+          <a:xfrm>
+            <a:off x="3810000" y="2641600"/>
+            <a:ext cx="2438400" cy="228600"/>
+          </a:xfrm>
+          <a:prstGeom prst="rect">
+            <a:avLst/>
+          </a:prstGeom>
+          <a:noFill/>
+          <a:ln/>
+        </p:spPr>
+        <p:txBody>
+          <a:bodyPr wrap="square" lIns="0" tIns="0" rIns="0" bIns="0" rtlCol="0" anchor="t"/>
+          <a:lstStyle/>
+          <a:p>
+            <a:pPr algn="l" indent="0" marL="0">
+              <a:buNone/>
+            </a:pPr>
+            <a:r>
+              <a:rPr lang="en-US" altLang="en-US" sz="1400" dirty="0">
                 <a:solidFill>
                   <a:srgbClr val="C41220"/>
                 </a:solidFill>
@@ -2152,22 +2485,22 @@
                 <a:ea typeface="Inter" pitchFamily="34" charset="-122"/>
                 <a:cs typeface="Inter" pitchFamily="34" charset="-120"/>
               </a:rPr>
-              <a:t>STEP 1  •  4:00–10:00</a:t>
-            </a:r>
-            <a:endParaRPr lang="en-US" sz="1500" dirty="0"/>
-          </a:p>
-        </p:txBody>
-      </p:sp>
-      <p:sp>
-        <p:nvSpPr>
-          <p:cNvPr id="8" name="s1-title"/>
-          <p:cNvSpPr/>
-          <p:nvPr/>
-        </p:nvSpPr>
-        <p:spPr>
-          <a:xfrm>
-            <a:off x="762000" y="3073400"/>
-            <a:ext cx="2997200" cy="889000"/>
+              <a:t>STEP 2  •  10–22 MIN</a:t>
+            </a:r>
+            <a:endParaRPr lang="en-US" sz="1400" dirty="0"/>
+          </a:p>
+        </p:txBody>
+      </p:sp>
+      <p:sp>
+        <p:nvSpPr>
+          <p:cNvPr id="12" name="s2-title"/>
+          <p:cNvSpPr/>
+          <p:nvPr/>
+        </p:nvSpPr>
+        <p:spPr>
+          <a:xfrm>
+            <a:off x="3810000" y="3022600"/>
+            <a:ext cx="2438400" cy="889000"/>
           </a:xfrm>
           <a:prstGeom prst="rect">
             <a:avLst/>
@@ -2181,12 +2514,12 @@
           <a:p>
             <a:pPr algn="l" indent="0" marL="0">
               <a:lnSpc>
-                <a:spcPts val="2800"/>
+                <a:spcPts val="2352"/>
               </a:lnSpc>
               <a:buNone/>
             </a:pPr>
             <a:r>
-              <a:rPr lang="en-US" altLang="en-US" sz="2500" dirty="0">
+              <a:rPr lang="en-US" altLang="en-US" sz="2100" dirty="0">
                 <a:solidFill>
                   <a:srgbClr val="202124"/>
                 </a:solidFill>
@@ -2194,22 +2527,22 @@
                 <a:ea typeface="Inter" pitchFamily="34" charset="-122"/>
                 <a:cs typeface="Inter" pitchFamily="34" charset="-120"/>
               </a:rPr>
-              <a:t>Set the bar for mastery</a:t>
-            </a:r>
-            <a:endParaRPr lang="en-US" sz="2500" dirty="0"/>
-          </a:p>
-        </p:txBody>
-      </p:sp>
-      <p:sp>
-        <p:nvSpPr>
-          <p:cNvPr id="9" name="s1-body"/>
-          <p:cNvSpPr/>
-          <p:nvPr/>
-        </p:nvSpPr>
-        <p:spPr>
-          <a:xfrm>
-            <a:off x="762000" y="4191000"/>
-            <a:ext cx="2997200" cy="2032000"/>
+              <a:t>Read the samples</a:t>
+            </a:r>
+            <a:endParaRPr lang="en-US" sz="2100" dirty="0"/>
+          </a:p>
+        </p:txBody>
+      </p:sp>
+      <p:sp>
+        <p:nvSpPr>
+          <p:cNvPr id="13" name="s2-body"/>
+          <p:cNvSpPr/>
+          <p:nvPr/>
+        </p:nvSpPr>
+        <p:spPr>
+          <a:xfrm>
+            <a:off x="3810000" y="4038600"/>
+            <a:ext cx="2438400" cy="2336800"/>
           </a:xfrm>
           <a:prstGeom prst="rect">
             <a:avLst/>
@@ -2223,12 +2556,12 @@
           <a:p>
             <a:pPr algn="l" indent="0" marL="0">
               <a:lnSpc>
-                <a:spcPts val="2394"/>
+                <a:spcPts val="2268"/>
               </a:lnSpc>
               <a:buNone/>
             </a:pPr>
             <a:r>
-              <a:rPr lang="en-US" altLang="en-US" sz="1900" dirty="0">
+              <a:rPr lang="en-US" altLang="en-US" sz="1800" dirty="0">
                 <a:solidFill>
                   <a:srgbClr val="3C4043"/>
                 </a:solidFill>
@@ -2236,22 +2569,22 @@
                 <a:ea typeface="Inter" pitchFamily="34" charset="-122"/>
                 <a:cs typeface="Inter" pitchFamily="34" charset="-120"/>
               </a:rPr>
-              <a:t>Agree on what a strong response must include: claim, evidence, reasoning, and science language.</a:t>
-            </a:r>
-            <a:endParaRPr lang="en-US" sz="1900" dirty="0"/>
-          </a:p>
-        </p:txBody>
-      </p:sp>
-      <p:sp>
-        <p:nvSpPr>
-          <p:cNvPr id="10" name="cycle-shape-9"/>
-          <p:cNvSpPr/>
-          <p:nvPr/>
-        </p:nvSpPr>
-        <p:spPr>
-          <a:xfrm>
-            <a:off x="4419600" y="2362200"/>
-            <a:ext cx="3505200" cy="4191000"/>
+              <a:t>Read 3–5 student writing samples and mark what the writing shows against the rubric.</a:t>
+            </a:r>
+            <a:endParaRPr lang="en-US" sz="1800" dirty="0"/>
+          </a:p>
+        </p:txBody>
+      </p:sp>
+      <p:sp>
+        <p:nvSpPr>
+          <p:cNvPr id="14" name="cycle-shape-13"/>
+          <p:cNvSpPr/>
+          <p:nvPr/>
+        </p:nvSpPr>
+        <p:spPr>
+          <a:xfrm>
+            <a:off x="6705600" y="2362200"/>
+            <a:ext cx="2844800" cy="4191000"/>
           </a:xfrm>
           <a:prstGeom prst="rect">
             <a:avLst/>
@@ -2269,30 +2602,30 @@
       </p:sp>
       <p:sp>
         <p:nvSpPr>
-          <p:cNvPr id="11" name="s2-label"/>
-          <p:cNvSpPr/>
-          <p:nvPr/>
-        </p:nvSpPr>
-        <p:spPr>
-          <a:xfrm>
-            <a:off x="4673600" y="2667000"/>
-            <a:ext cx="2997200" cy="254000"/>
-          </a:xfrm>
-          <a:prstGeom prst="rect">
-            <a:avLst/>
-          </a:prstGeom>
-          <a:noFill/>
-          <a:ln/>
-        </p:spPr>
-        <p:txBody>
-          <a:bodyPr wrap="square" lIns="0" tIns="0" rIns="0" bIns="0" rtlCol="0" anchor="t"/>
-          <a:lstStyle/>
-          <a:p>
-            <a:pPr algn="l" indent="0" marL="0">
-              <a:buNone/>
-            </a:pPr>
-            <a:r>
-              <a:rPr lang="en-US" altLang="en-US" sz="1500" dirty="0">
+          <p:cNvPr id="15" name="s3-label"/>
+          <p:cNvSpPr/>
+          <p:nvPr/>
+        </p:nvSpPr>
+        <p:spPr>
+          <a:xfrm>
+            <a:off x="6908800" y="2641600"/>
+            <a:ext cx="2438400" cy="228600"/>
+          </a:xfrm>
+          <a:prstGeom prst="rect">
+            <a:avLst/>
+          </a:prstGeom>
+          <a:noFill/>
+          <a:ln/>
+        </p:spPr>
+        <p:txBody>
+          <a:bodyPr wrap="square" lIns="0" tIns="0" rIns="0" bIns="0" rtlCol="0" anchor="t"/>
+          <a:lstStyle/>
+          <a:p>
+            <a:pPr algn="l" indent="0" marL="0">
+              <a:buNone/>
+            </a:pPr>
+            <a:r>
+              <a:rPr lang="en-US" altLang="en-US" sz="1400" dirty="0">
                 <a:solidFill>
                   <a:srgbClr val="C41220"/>
                 </a:solidFill>
@@ -2300,22 +2633,22 @@
                 <a:ea typeface="Inter" pitchFamily="34" charset="-122"/>
                 <a:cs typeface="Inter" pitchFamily="34" charset="-120"/>
               </a:rPr>
-              <a:t>STEP 2  •  10:00–22:00</a:t>
-            </a:r>
-            <a:endParaRPr lang="en-US" sz="1500" dirty="0"/>
-          </a:p>
-        </p:txBody>
-      </p:sp>
-      <p:sp>
-        <p:nvSpPr>
-          <p:cNvPr id="12" name="s2-title"/>
-          <p:cNvSpPr/>
-          <p:nvPr/>
-        </p:nvSpPr>
-        <p:spPr>
-          <a:xfrm>
-            <a:off x="4673600" y="3073400"/>
-            <a:ext cx="2997200" cy="889000"/>
+              <a:t>STEP 3  •  22–30 MIN</a:t>
+            </a:r>
+            <a:endParaRPr lang="en-US" sz="1400" dirty="0"/>
+          </a:p>
+        </p:txBody>
+      </p:sp>
+      <p:sp>
+        <p:nvSpPr>
+          <p:cNvPr id="16" name="s3-title"/>
+          <p:cNvSpPr/>
+          <p:nvPr/>
+        </p:nvSpPr>
+        <p:spPr>
+          <a:xfrm>
+            <a:off x="6908800" y="3022600"/>
+            <a:ext cx="2438400" cy="889000"/>
           </a:xfrm>
           <a:prstGeom prst="rect">
             <a:avLst/>
@@ -2329,12 +2662,12 @@
           <a:p>
             <a:pPr algn="l" indent="0" marL="0">
               <a:lnSpc>
-                <a:spcPts val="2800"/>
+                <a:spcPts val="2352"/>
               </a:lnSpc>
               <a:buNone/>
             </a:pPr>
             <a:r>
-              <a:rPr lang="en-US" altLang="en-US" sz="2500" dirty="0">
+              <a:rPr lang="en-US" altLang="en-US" sz="2100" dirty="0">
                 <a:solidFill>
                   <a:srgbClr val="202124"/>
                 </a:solidFill>
@@ -2342,22 +2675,22 @@
                 <a:ea typeface="Inter" pitchFamily="34" charset="-122"/>
                 <a:cs typeface="Inter" pitchFamily="34" charset="-120"/>
               </a:rPr>
-              <a:t>Read student writing</a:t>
-            </a:r>
-            <a:endParaRPr lang="en-US" sz="2500" dirty="0"/>
-          </a:p>
-        </p:txBody>
-      </p:sp>
-      <p:sp>
-        <p:nvSpPr>
-          <p:cNvPr id="13" name="s2-body"/>
-          <p:cNvSpPr/>
-          <p:nvPr/>
-        </p:nvSpPr>
-        <p:spPr>
-          <a:xfrm>
-            <a:off x="4673600" y="4191000"/>
-            <a:ext cx="2997200" cy="2032000"/>
+              <a:t>Name the priority need</a:t>
+            </a:r>
+            <a:endParaRPr lang="en-US" sz="2100" dirty="0"/>
+          </a:p>
+        </p:txBody>
+      </p:sp>
+      <p:sp>
+        <p:nvSpPr>
+          <p:cNvPr id="17" name="s3-body"/>
+          <p:cNvSpPr/>
+          <p:nvPr/>
+        </p:nvSpPr>
+        <p:spPr>
+          <a:xfrm>
+            <a:off x="6908800" y="4038600"/>
+            <a:ext cx="2438400" cy="2336800"/>
           </a:xfrm>
           <a:prstGeom prst="rect">
             <a:avLst/>
@@ -2371,12 +2704,12 @@
           <a:p>
             <a:pPr algn="l" indent="0" marL="0">
               <a:lnSpc>
-                <a:spcPts val="2394"/>
+                <a:spcPts val="2268"/>
               </a:lnSpc>
               <a:buNone/>
             </a:pPr>
             <a:r>
-              <a:rPr lang="en-US" altLang="en-US" sz="1900" dirty="0">
+              <a:rPr lang="en-US" altLang="en-US" sz="1800" dirty="0">
                 <a:solidFill>
                   <a:srgbClr val="3C4043"/>
                 </a:solidFill>
@@ -2384,22 +2717,22 @@
                 <a:ea typeface="Inter" pitchFamily="34" charset="-122"/>
                 <a:cs typeface="Inter" pitchFamily="34" charset="-120"/>
               </a:rPr>
-              <a:t>Mark what students can already do and name one priority need in the work.</a:t>
-            </a:r>
-            <a:endParaRPr lang="en-US" sz="1900" dirty="0"/>
-          </a:p>
-        </p:txBody>
-      </p:sp>
-      <p:sp>
-        <p:nvSpPr>
-          <p:cNvPr id="14" name="cycle-shape-13"/>
-          <p:cNvSpPr/>
-          <p:nvPr/>
-        </p:nvSpPr>
-        <p:spPr>
-          <a:xfrm>
-            <a:off x="8331200" y="2362200"/>
-            <a:ext cx="3505200" cy="4191000"/>
+              <a:t>State one strength and one rubric criterion that most needs work right now.</a:t>
+            </a:r>
+            <a:endParaRPr lang="en-US" sz="1800" dirty="0"/>
+          </a:p>
+        </p:txBody>
+      </p:sp>
+      <p:sp>
+        <p:nvSpPr>
+          <p:cNvPr id="18" name="cycle-shape-17"/>
+          <p:cNvSpPr/>
+          <p:nvPr/>
+        </p:nvSpPr>
+        <p:spPr>
+          <a:xfrm>
+            <a:off x="9804400" y="2362200"/>
+            <a:ext cx="2844800" cy="4191000"/>
           </a:xfrm>
           <a:prstGeom prst="rect">
             <a:avLst/>
@@ -2417,30 +2750,30 @@
       </p:sp>
       <p:sp>
         <p:nvSpPr>
-          <p:cNvPr id="15" name="s3-label"/>
-          <p:cNvSpPr/>
-          <p:nvPr/>
-        </p:nvSpPr>
-        <p:spPr>
-          <a:xfrm>
-            <a:off x="8585200" y="2667000"/>
-            <a:ext cx="2997200" cy="254000"/>
-          </a:xfrm>
-          <a:prstGeom prst="rect">
-            <a:avLst/>
-          </a:prstGeom>
-          <a:noFill/>
-          <a:ln/>
-        </p:spPr>
-        <p:txBody>
-          <a:bodyPr wrap="square" lIns="0" tIns="0" rIns="0" bIns="0" rtlCol="0" anchor="t"/>
-          <a:lstStyle/>
-          <a:p>
-            <a:pPr algn="l" indent="0" marL="0">
-              <a:buNone/>
-            </a:pPr>
-            <a:r>
-              <a:rPr lang="en-US" altLang="en-US" sz="1500" dirty="0">
+          <p:cNvPr id="19" name="s4-label"/>
+          <p:cNvSpPr/>
+          <p:nvPr/>
+        </p:nvSpPr>
+        <p:spPr>
+          <a:xfrm>
+            <a:off x="10007600" y="2641600"/>
+            <a:ext cx="2438400" cy="228600"/>
+          </a:xfrm>
+          <a:prstGeom prst="rect">
+            <a:avLst/>
+          </a:prstGeom>
+          <a:noFill/>
+          <a:ln/>
+        </p:spPr>
+        <p:txBody>
+          <a:bodyPr wrap="square" lIns="0" tIns="0" rIns="0" bIns="0" rtlCol="0" anchor="t"/>
+          <a:lstStyle/>
+          <a:p>
+            <a:pPr algn="l" indent="0" marL="0">
+              <a:buNone/>
+            </a:pPr>
+            <a:r>
+              <a:rPr lang="en-US" altLang="en-US" sz="1400" dirty="0">
                 <a:solidFill>
                   <a:srgbClr val="C41220"/>
                 </a:solidFill>
@@ -2448,22 +2781,22 @@
                 <a:ea typeface="Inter" pitchFamily="34" charset="-122"/>
                 <a:cs typeface="Inter" pitchFamily="34" charset="-120"/>
               </a:rPr>
-              <a:t>STEP 3  •  22:00–30:00</a:t>
-            </a:r>
-            <a:endParaRPr lang="en-US" sz="1500" dirty="0"/>
-          </a:p>
-        </p:txBody>
-      </p:sp>
-      <p:sp>
-        <p:nvSpPr>
-          <p:cNvPr id="16" name="s3-title"/>
-          <p:cNvSpPr/>
-          <p:nvPr/>
-        </p:nvSpPr>
-        <p:spPr>
-          <a:xfrm>
-            <a:off x="8585200" y="3073400"/>
-            <a:ext cx="2997200" cy="889000"/>
+              <a:t>STEP 4  •  30–37 MIN</a:t>
+            </a:r>
+            <a:endParaRPr lang="en-US" sz="1400" dirty="0"/>
+          </a:p>
+        </p:txBody>
+      </p:sp>
+      <p:sp>
+        <p:nvSpPr>
+          <p:cNvPr id="20" name="s4-title"/>
+          <p:cNvSpPr/>
+          <p:nvPr/>
+        </p:nvSpPr>
+        <p:spPr>
+          <a:xfrm>
+            <a:off x="10007600" y="3022600"/>
+            <a:ext cx="2438400" cy="889000"/>
           </a:xfrm>
           <a:prstGeom prst="rect">
             <a:avLst/>
@@ -2477,12 +2810,12 @@
           <a:p>
             <a:pPr algn="l" indent="0" marL="0">
               <a:lnSpc>
-                <a:spcPts val="2800"/>
+                <a:spcPts val="2352"/>
               </a:lnSpc>
               <a:buNone/>
             </a:pPr>
             <a:r>
-              <a:rPr lang="en-US" altLang="en-US" sz="2500" dirty="0">
+              <a:rPr lang="en-US" altLang="en-US" sz="2100" dirty="0">
                 <a:solidFill>
                   <a:srgbClr val="202124"/>
                 </a:solidFill>
@@ -2492,20 +2825,20 @@
               </a:rPr>
               <a:t>Write the feedback</a:t>
             </a:r>
-            <a:endParaRPr lang="en-US" sz="2500" dirty="0"/>
-          </a:p>
-        </p:txBody>
-      </p:sp>
-      <p:sp>
-        <p:nvSpPr>
-          <p:cNvPr id="17" name="s3-body"/>
-          <p:cNvSpPr/>
-          <p:nvPr/>
-        </p:nvSpPr>
-        <p:spPr>
-          <a:xfrm>
-            <a:off x="8585200" y="4191000"/>
-            <a:ext cx="2997200" cy="2032000"/>
+            <a:endParaRPr lang="en-US" sz="2100" dirty="0"/>
+          </a:p>
+        </p:txBody>
+      </p:sp>
+      <p:sp>
+        <p:nvSpPr>
+          <p:cNvPr id="21" name="s4-body"/>
+          <p:cNvSpPr/>
+          <p:nvPr/>
+        </p:nvSpPr>
+        <p:spPr>
+          <a:xfrm>
+            <a:off x="10007600" y="4038600"/>
+            <a:ext cx="2438400" cy="2336800"/>
           </a:xfrm>
           <a:prstGeom prst="rect">
             <a:avLst/>
@@ -2519,12 +2852,12 @@
           <a:p>
             <a:pPr algn="l" indent="0" marL="0">
               <a:lnSpc>
-                <a:spcPts val="2394"/>
+                <a:spcPts val="2268"/>
               </a:lnSpc>
               <a:buNone/>
             </a:pPr>
             <a:r>
-              <a:rPr lang="en-US" altLang="en-US" sz="1900" dirty="0">
+              <a:rPr lang="en-US" altLang="en-US" sz="1800" dirty="0">
                 <a:solidFill>
                   <a:srgbClr val="3C4043"/>
                 </a:solidFill>
@@ -2532,32 +2865,32 @@
                 <a:ea typeface="Inter" pitchFamily="34" charset="-122"/>
                 <a:cs typeface="Inter" pitchFamily="34" charset="-120"/>
               </a:rPr>
-              <a:t>Write one comment that names a criterion and asks for one action students can take.</a:t>
-            </a:r>
-            <a:endParaRPr lang="en-US" sz="1900" dirty="0"/>
-          </a:p>
-        </p:txBody>
-      </p:sp>
-      <p:sp>
-        <p:nvSpPr>
-          <p:cNvPr id="18" name="cycle-shape-17"/>
-          <p:cNvSpPr/>
-          <p:nvPr/>
-        </p:nvSpPr>
-        <p:spPr>
-          <a:xfrm>
-            <a:off x="12242800" y="2362200"/>
-            <a:ext cx="3505200" cy="4191000"/>
+              <a:t>Name the criterion, point to the work, and ask for one revision. Do not give the answer.</a:t>
+            </a:r>
+            <a:endParaRPr lang="en-US" sz="1800" dirty="0"/>
+          </a:p>
+        </p:txBody>
+      </p:sp>
+      <p:sp>
+        <p:nvSpPr>
+          <p:cNvPr id="22" name="cycle-shape-21"/>
+          <p:cNvSpPr/>
+          <p:nvPr/>
+        </p:nvSpPr>
+        <p:spPr>
+          <a:xfrm>
+            <a:off x="12903200" y="2362200"/>
+            <a:ext cx="2844800" cy="4191000"/>
           </a:xfrm>
           <a:prstGeom prst="rect">
             <a:avLst/>
           </a:prstGeom>
           <a:solidFill>
-            <a:srgbClr val="FCE8EA"/>
+            <a:srgbClr val="F3F4F6"/>
           </a:solidFill>
-          <a:ln w="25400">
+          <a:ln w="12700">
             <a:solidFill>
-              <a:srgbClr val="C41220"/>
+              <a:srgbClr val="D1D5DB"/>
             </a:solidFill>
             <a:prstDash val="solid"/>
           </a:ln>
@@ -2565,30 +2898,30 @@
       </p:sp>
       <p:sp>
         <p:nvSpPr>
-          <p:cNvPr id="19" name="s4-label"/>
-          <p:cNvSpPr/>
-          <p:nvPr/>
-        </p:nvSpPr>
-        <p:spPr>
-          <a:xfrm>
-            <a:off x="12496800" y="2667000"/>
-            <a:ext cx="2997200" cy="254000"/>
-          </a:xfrm>
-          <a:prstGeom prst="rect">
-            <a:avLst/>
-          </a:prstGeom>
-          <a:noFill/>
-          <a:ln/>
-        </p:spPr>
-        <p:txBody>
-          <a:bodyPr wrap="square" lIns="0" tIns="0" rIns="0" bIns="0" rtlCol="0" anchor="t"/>
-          <a:lstStyle/>
-          <a:p>
-            <a:pPr algn="l" indent="0" marL="0">
-              <a:buNone/>
-            </a:pPr>
-            <a:r>
-              <a:rPr lang="en-US" altLang="en-US" sz="1500" dirty="0">
+          <p:cNvPr id="23" name="s5-label"/>
+          <p:cNvSpPr/>
+          <p:nvPr/>
+        </p:nvSpPr>
+        <p:spPr>
+          <a:xfrm>
+            <a:off x="13106400" y="2641600"/>
+            <a:ext cx="2438400" cy="228600"/>
+          </a:xfrm>
+          <a:prstGeom prst="rect">
+            <a:avLst/>
+          </a:prstGeom>
+          <a:noFill/>
+          <a:ln/>
+        </p:spPr>
+        <p:txBody>
+          <a:bodyPr wrap="square" lIns="0" tIns="0" rIns="0" bIns="0" rtlCol="0" anchor="t"/>
+          <a:lstStyle/>
+          <a:p>
+            <a:pPr algn="l" indent="0" marL="0">
+              <a:buNone/>
+            </a:pPr>
+            <a:r>
+              <a:rPr lang="en-US" altLang="en-US" sz="1400" dirty="0">
                 <a:solidFill>
                   <a:srgbClr val="C41220"/>
                 </a:solidFill>
@@ -2596,22 +2929,22 @@
                 <a:ea typeface="Inter" pitchFamily="34" charset="-122"/>
                 <a:cs typeface="Inter" pitchFamily="34" charset="-120"/>
               </a:rPr>
-              <a:t>STEP 4  •  30:00–41:00</a:t>
-            </a:r>
-            <a:endParaRPr lang="en-US" sz="1500" dirty="0"/>
-          </a:p>
-        </p:txBody>
-      </p:sp>
-      <p:sp>
-        <p:nvSpPr>
-          <p:cNvPr id="20" name="s4-title"/>
-          <p:cNvSpPr/>
-          <p:nvPr/>
-        </p:nvSpPr>
-        <p:spPr>
-          <a:xfrm>
-            <a:off x="12496800" y="3073400"/>
-            <a:ext cx="2997200" cy="889000"/>
+              <a:t>STEP 5  •  37–43 MIN</a:t>
+            </a:r>
+            <a:endParaRPr lang="en-US" sz="1400" dirty="0"/>
+          </a:p>
+        </p:txBody>
+      </p:sp>
+      <p:sp>
+        <p:nvSpPr>
+          <p:cNvPr id="24" name="s5-title"/>
+          <p:cNvSpPr/>
+          <p:nvPr/>
+        </p:nvSpPr>
+        <p:spPr>
+          <a:xfrm>
+            <a:off x="13106400" y="3022600"/>
+            <a:ext cx="2438400" cy="889000"/>
           </a:xfrm>
           <a:prstGeom prst="rect">
             <a:avLst/>
@@ -2625,12 +2958,12 @@
           <a:p>
             <a:pPr algn="l" indent="0" marL="0">
               <a:lnSpc>
-                <a:spcPts val="2800"/>
+                <a:spcPts val="2352"/>
               </a:lnSpc>
               <a:buNone/>
             </a:pPr>
             <a:r>
-              <a:rPr lang="en-US" altLang="en-US" sz="2500" dirty="0">
+              <a:rPr lang="en-US" altLang="en-US" sz="2100" dirty="0">
                 <a:solidFill>
                   <a:srgbClr val="202124"/>
                 </a:solidFill>
@@ -2640,20 +2973,20 @@
               </a:rPr>
               <a:t>Plan the next step</a:t>
             </a:r>
-            <a:endParaRPr lang="en-US" sz="2500" dirty="0"/>
-          </a:p>
-        </p:txBody>
-      </p:sp>
-      <p:sp>
-        <p:nvSpPr>
-          <p:cNvPr id="21" name="s4-body"/>
-          <p:cNvSpPr/>
-          <p:nvPr/>
-        </p:nvSpPr>
-        <p:spPr>
-          <a:xfrm>
-            <a:off x="12496800" y="4191000"/>
-            <a:ext cx="2997200" cy="2032000"/>
+            <a:endParaRPr lang="en-US" sz="2100" dirty="0"/>
+          </a:p>
+        </p:txBody>
+      </p:sp>
+      <p:sp>
+        <p:nvSpPr>
+          <p:cNvPr id="25" name="s5-body"/>
+          <p:cNvSpPr/>
+          <p:nvPr/>
+        </p:nvSpPr>
+        <p:spPr>
+          <a:xfrm>
+            <a:off x="13106400" y="4038600"/>
+            <a:ext cx="2438400" cy="2336800"/>
           </a:xfrm>
           <a:prstGeom prst="rect">
             <a:avLst/>
@@ -2667,12 +3000,12 @@
           <a:p>
             <a:pPr algn="l" indent="0" marL="0">
               <a:lnSpc>
-                <a:spcPts val="2394"/>
+                <a:spcPts val="2268"/>
               </a:lnSpc>
               <a:buNone/>
             </a:pPr>
             <a:r>
-              <a:rPr lang="en-US" altLang="en-US" sz="1900" dirty="0">
+              <a:rPr lang="en-US" altLang="en-US" sz="1800" dirty="0">
                 <a:solidFill>
                   <a:srgbClr val="3C4043"/>
                 </a:solidFill>
@@ -2680,15 +3013,15 @@
                 <a:ea typeface="Inter" pitchFamily="34" charset="-122"/>
                 <a:cs typeface="Inter" pitchFamily="34" charset="-120"/>
               </a:rPr>
-              <a:t>Choose one lesson move and one short evidence check that show new learning.</a:t>
-            </a:r>
-            <a:endParaRPr lang="en-US" sz="1900" dirty="0"/>
-          </a:p>
-        </p:txBody>
-      </p:sp>
-      <p:sp>
-        <p:nvSpPr>
-          <p:cNvPr id="22" name="cycle-shape-21"/>
+              <a:t>Choose one next instructional step and one short check that shows the criterion improved.</a:t>
+            </a:r>
+            <a:endParaRPr lang="en-US" sz="1800" dirty="0"/>
+          </a:p>
+        </p:txBody>
+      </p:sp>
+      <p:sp>
+        <p:nvSpPr>
+          <p:cNvPr id="26" name="cycle-shape-25"/>
           <p:cNvSpPr/>
           <p:nvPr/>
         </p:nvSpPr>
@@ -2708,30 +3041,30 @@
       </p:sp>
       <p:sp>
         <p:nvSpPr>
-          <p:cNvPr id="23" name="anchor"/>
-          <p:cNvSpPr/>
-          <p:nvPr/>
-        </p:nvSpPr>
-        <p:spPr>
-          <a:xfrm>
-            <a:off x="812800" y="7188200"/>
-            <a:ext cx="14605000" cy="330200"/>
-          </a:xfrm>
-          <a:prstGeom prst="rect">
-            <a:avLst/>
-          </a:prstGeom>
-          <a:noFill/>
-          <a:ln/>
-        </p:spPr>
-        <p:txBody>
-          <a:bodyPr wrap="square" lIns="0" tIns="0" rIns="0" bIns="0" rtlCol="0" anchor="t"/>
-          <a:lstStyle/>
-          <a:p>
-            <a:pPr algn="l" indent="0" marL="0">
-              <a:buNone/>
-            </a:pPr>
-            <a:r>
-              <a:rPr lang="en-US" altLang="en-US" sz="2000" b="1" dirty="0">
+          <p:cNvPr id="27" name="anchor"/>
+          <p:cNvSpPr/>
+          <p:nvPr/>
+        </p:nvSpPr>
+        <p:spPr>
+          <a:xfrm>
+            <a:off x="812800" y="7137400"/>
+            <a:ext cx="14605000" cy="431800"/>
+          </a:xfrm>
+          <a:prstGeom prst="rect">
+            <a:avLst/>
+          </a:prstGeom>
+          <a:noFill/>
+          <a:ln/>
+        </p:spPr>
+        <p:txBody>
+          <a:bodyPr wrap="square" lIns="0" tIns="0" rIns="0" bIns="0" rtlCol="0" anchor="t"/>
+          <a:lstStyle/>
+          <a:p>
+            <a:pPr algn="l" indent="0" marL="0">
+              <a:buNone/>
+            </a:pPr>
+            <a:r>
+              <a:rPr lang="en-US" altLang="en-US" sz="1900" b="1" dirty="0">
                 <a:solidFill>
                   <a:srgbClr val="F6B4BA"/>
                 </a:solidFill>
@@ -2739,10 +3072,10 @@
                 <a:ea typeface="Inter" pitchFamily="34" charset="-122"/>
                 <a:cs typeface="Inter" pitchFamily="34" charset="-120"/>
               </a:rPr>
-              <a:t>Close 41:00–46:00:</a:t>
-            </a:r>
-            <a:r>
-              <a:rPr lang="en-US" altLang="en-US" sz="2000" dirty="0">
+              <a:t>Why the rubric:</a:t>
+            </a:r>
+            <a:r>
+              <a:rPr lang="en-US" altLang="en-US" sz="1900" dirty="0">
                 <a:solidFill>
                   <a:srgbClr val="FFFFFF"/>
                 </a:solidFill>
@@ -2750,15 +3083,15 @@
                 <a:ea typeface="Inter" pitchFamily="34" charset="-122"/>
                 <a:cs typeface="Inter" pitchFamily="34" charset="-120"/>
               </a:rPr>
-              <a:t> confirm the feedback, the student action, and the evidence you will collect next.</a:t>
-            </a:r>
-            <a:endParaRPr lang="en-US" sz="2000" dirty="0"/>
-          </a:p>
-        </p:txBody>
-      </p:sp>
-      <p:sp>
-        <p:nvSpPr>
-          <p:cNvPr id="24" name="page"/>
+              <a:t> it gives everyone the same definition of strong writing, so it is used every time — alongside what the writing shows and what you know about your students. It is not for ranking.</a:t>
+            </a:r>
+            <a:endParaRPr lang="en-US" sz="1900" dirty="0"/>
+          </a:p>
+        </p:txBody>
+      </p:sp>
+      <p:sp>
+        <p:nvSpPr>
+          <p:cNvPr id="28" name="page"/>
           <p:cNvSpPr/>
           <p:nvPr/>
         </p:nvSpPr>
@@ -2797,7 +3130,7 @@
       </p:sp>
       <p:sp>
         <p:nvSpPr>
-          <p:cNvPr id="25" name="cycle-shape-24"/>
+          <p:cNvPr id="29" name="cycle-shape-28"/>
           <p:cNvSpPr/>
           <p:nvPr/>
         </p:nvSpPr>
@@ -2900,7 +3233,7 @@
                 <a:ea typeface="Inter" pitchFamily="34" charset="-122"/>
                 <a:cs typeface="Inter" pitchFamily="34" charset="-120"/>
               </a:rPr>
-              <a:t>Step 1: Set the Bar for Mastery</a:t>
+              <a:t>Step 1: Start With the Rubric</a:t>
             </a:r>
             <a:endParaRPr lang="en-US" sz="3000" dirty="0"/>
           </a:p>
@@ -2939,7 +3272,7 @@
                 <a:ea typeface="Inter" pitchFamily="34" charset="-122"/>
                 <a:cs typeface="Inter" pitchFamily="34" charset="-120"/>
               </a:rPr>
-              <a:t>4:00–10:00  •  6 MIN</a:t>
+              <a:t>4–10 MIN  •  6 MIN</a:t>
             </a:r>
             <a:endParaRPr lang="en-US" sz="1600" dirty="0"/>
           </a:p>
@@ -2970,7 +3303,7 @@
               <a:buNone/>
             </a:pPr>
             <a:r>
-              <a:rPr lang="en-US" altLang="en-US" sz="2300" dirty="0">
+              <a:rPr lang="en-US" altLang="en-US" sz="2200" dirty="0">
                 <a:solidFill>
                   <a:srgbClr val="3C4043"/>
                 </a:solidFill>
@@ -2978,9 +3311,9 @@
                 <a:ea typeface="Inter" pitchFamily="34" charset="-122"/>
                 <a:cs typeface="Inter" pitchFamily="34" charset="-120"/>
               </a:rPr>
-              <a:t>Agree on what a strong response must include before reading any student work. Each course team uses its own task and standard.</a:t>
-            </a:r>
-            <a:endParaRPr lang="en-US" sz="2300" dirty="0"/>
+              <a:t>Open your rubric or success criteria. Name the task and standard, then underline the one or two criteria you will review today.</a:t>
+            </a:r>
+            <a:endParaRPr lang="en-US" sz="2200" dirty="0"/>
           </a:p>
         </p:txBody>
       </p:sp>
@@ -2992,8 +3325,8 @@
         </p:nvSpPr>
         <p:spPr>
           <a:xfrm>
-            <a:off x="508000" y="2413000"/>
-            <a:ext cx="7366000" cy="4191000"/>
+            <a:off x="508000" y="2362200"/>
+            <a:ext cx="7366000" cy="4267200"/>
           </a:xfrm>
           <a:prstGeom prst="rect">
             <a:avLst/>
@@ -3017,24 +3350,24 @@
         </p:nvSpPr>
         <p:spPr>
           <a:xfrm>
-            <a:off x="889000" y="2794000"/>
-            <a:ext cx="6604000" cy="457200"/>
-          </a:xfrm>
-          <a:prstGeom prst="rect">
-            <a:avLst/>
-          </a:prstGeom>
-          <a:noFill/>
-          <a:ln/>
-        </p:spPr>
-        <p:txBody>
-          <a:bodyPr wrap="square" lIns="0" tIns="0" rIns="0" bIns="0" rtlCol="0" anchor="t"/>
-          <a:lstStyle/>
-          <a:p>
-            <a:pPr algn="l" indent="0" marL="0">
-              <a:buNone/>
-            </a:pPr>
-            <a:r>
-              <a:rPr lang="en-US" altLang="en-US" sz="2600" dirty="0">
+            <a:off x="889000" y="2692400"/>
+            <a:ext cx="6604000" cy="431800"/>
+          </a:xfrm>
+          <a:prstGeom prst="rect">
+            <a:avLst/>
+          </a:prstGeom>
+          <a:noFill/>
+          <a:ln/>
+        </p:spPr>
+        <p:txBody>
+          <a:bodyPr wrap="square" lIns="0" tIns="0" rIns="0" bIns="0" rtlCol="0" anchor="t"/>
+          <a:lstStyle/>
+          <a:p>
+            <a:pPr algn="l" indent="0" marL="0">
+              <a:buNone/>
+            </a:pPr>
+            <a:r>
+              <a:rPr lang="en-US" altLang="en-US" sz="2500" dirty="0">
                 <a:solidFill>
                   <a:srgbClr val="202124"/>
                 </a:solidFill>
@@ -3042,9 +3375,9 @@
                 <a:ea typeface="Inter" pitchFamily="34" charset="-122"/>
                 <a:cs typeface="Inter" pitchFamily="34" charset="-120"/>
               </a:rPr>
-              <a:t>WHAT THE TASK ASKS</a:t>
-            </a:r>
-            <a:endParaRPr lang="en-US" sz="2600" dirty="0"/>
+              <a:t>DO THIS FIRST</a:t>
+            </a:r>
+            <a:endParaRPr lang="en-US" sz="2500" dirty="0"/>
           </a:p>
         </p:txBody>
       </p:sp>
@@ -3056,22 +3389,22 @@
         </p:nvSpPr>
         <p:spPr>
           <a:xfrm>
-            <a:off x="889000" y="3708400"/>
-            <a:ext cx="6604000" cy="2540000"/>
-          </a:xfrm>
-          <a:prstGeom prst="rect">
-            <a:avLst/>
-          </a:prstGeom>
-          <a:noFill/>
-          <a:ln/>
-        </p:spPr>
-        <p:txBody>
-          <a:bodyPr wrap="square" lIns="0" tIns="0" rIns="0" bIns="0" rtlCol="0" anchor="t"/>
-          <a:lstStyle/>
-          <a:p>
-            <a:pPr algn="l" marL="333375" indent="-333375">
+            <a:off x="889000" y="3454400"/>
+            <a:ext cx="6604000" cy="2895600"/>
+          </a:xfrm>
+          <a:prstGeom prst="rect">
+            <a:avLst/>
+          </a:prstGeom>
+          <a:noFill/>
+          <a:ln/>
+        </p:spPr>
+        <p:txBody>
+          <a:bodyPr wrap="square" lIns="0" tIns="0" rIns="0" bIns="0" rtlCol="0" anchor="t"/>
+          <a:lstStyle/>
+          <a:p>
+            <a:pPr algn="l" marL="317500" indent="-317500">
               <a:lnSpc>
-                <a:spcPts val="2730"/>
+                <a:spcPts val="2560"/>
               </a:lnSpc>
               <a:spcBef>
                 <a:spcPts val="10"/>
@@ -3080,7 +3413,7 @@
               <a:buChar char="•"/>
             </a:pPr>
             <a:r>
-              <a:rPr lang="en-US" altLang="en-US" sz="2100" dirty="0">
+              <a:rPr lang="en-US" altLang="en-US" sz="2000" dirty="0">
                 <a:solidFill>
                   <a:srgbClr val="3C4043"/>
                 </a:solidFill>
@@ -3088,14 +3421,14 @@
                 <a:ea typeface="Inter" pitchFamily="34" charset="-122"/>
                 <a:cs typeface="Inter" pitchFamily="34" charset="-120"/>
               </a:rPr>
-              <a:t>Use the population graph and the food web</a:t>
-            </a:r>
-            <a:endParaRPr lang="en-US" sz="2100" dirty="0"/>
-          </a:p>
-          <a:p>
-            <a:pPr algn="l" marL="333375" indent="-333375">
+              <a:t>Write the task, standard, and student product on the form</a:t>
+            </a:r>
+            <a:endParaRPr lang="en-US" sz="2000" dirty="0"/>
+          </a:p>
+          <a:p>
+            <a:pPr algn="l" marL="317500" indent="-317500">
               <a:lnSpc>
-                <a:spcPts val="2730"/>
+                <a:spcPts val="2560"/>
               </a:lnSpc>
               <a:spcBef>
                 <a:spcPts val="10"/>
@@ -3104,7 +3437,7 @@
               <a:buChar char="•"/>
             </a:pPr>
             <a:r>
-              <a:rPr lang="en-US" altLang="en-US" sz="2100" dirty="0">
+              <a:rPr lang="en-US" altLang="en-US" sz="2000" dirty="0">
                 <a:solidFill>
                   <a:srgbClr val="3C4043"/>
                 </a:solidFill>
@@ -3112,14 +3445,14 @@
                 <a:ea typeface="Inter" pitchFamily="34" charset="-122"/>
                 <a:cs typeface="Inter" pitchFamily="34" charset="-120"/>
               </a:rPr>
-              <a:t>Predict how more frogs change the fruit-fly population</a:t>
-            </a:r>
-            <a:endParaRPr lang="en-US" sz="2100" dirty="0"/>
-          </a:p>
-          <a:p>
-            <a:pPr algn="l" marL="333375" indent="-333375">
+              <a:t>Underline the 1–2 criteria you will look at today</a:t>
+            </a:r>
+            <a:endParaRPr lang="en-US" sz="2000" dirty="0"/>
+          </a:p>
+          <a:p>
+            <a:pPr algn="l" marL="317500" indent="-317500">
               <a:lnSpc>
-                <a:spcPts val="2730"/>
+                <a:spcPts val="2560"/>
               </a:lnSpc>
               <a:spcBef>
                 <a:spcPts val="10"/>
@@ -3128,7 +3461,7 @@
               <a:buChar char="•"/>
             </a:pPr>
             <a:r>
-              <a:rPr lang="en-US" altLang="en-US" sz="2100" dirty="0">
+              <a:rPr lang="en-US" altLang="en-US" sz="2000" dirty="0">
                 <a:solidFill>
                   <a:srgbClr val="3C4043"/>
                 </a:solidFill>
@@ -3136,14 +3469,14 @@
                 <a:ea typeface="Inter" pitchFamily="34" charset="-122"/>
                 <a:cs typeface="Inter" pitchFamily="34" charset="-120"/>
               </a:rPr>
-              <a:t>Explain the science idea in a written response</a:t>
-            </a:r>
-            <a:endParaRPr lang="en-US" sz="2100" dirty="0"/>
-          </a:p>
-          <a:p>
-            <a:pPr algn="l" marL="333375" indent="-333375">
+              <a:t>Read those criteria out loud as a team</a:t>
+            </a:r>
+            <a:endParaRPr lang="en-US" sz="2000" dirty="0"/>
+          </a:p>
+          <a:p>
+            <a:pPr algn="l" marL="317500" indent="-317500">
               <a:lnSpc>
-                <a:spcPts val="2730"/>
+                <a:spcPts val="2560"/>
               </a:lnSpc>
               <a:spcBef>
                 <a:spcPts val="10"/>
@@ -3152,7 +3485,7 @@
               <a:buChar char="•"/>
             </a:pPr>
             <a:r>
-              <a:rPr lang="en-US" altLang="en-US" sz="2100" dirty="0">
+              <a:rPr lang="en-US" altLang="en-US" sz="2000" dirty="0">
                 <a:solidFill>
                   <a:srgbClr val="3C4043"/>
                 </a:solidFill>
@@ -3160,9 +3493,9 @@
                 <a:ea typeface="Inter" pitchFamily="34" charset="-122"/>
                 <a:cs typeface="Inter" pitchFamily="34" charset="-120"/>
               </a:rPr>
-              <a:t>Support the explanation with evidence</a:t>
-            </a:r>
-            <a:endParaRPr lang="en-US" sz="2100" dirty="0"/>
+              <a:t>Agree on one example of meeting the criterion</a:t>
+            </a:r>
+            <a:endParaRPr lang="en-US" sz="2000" dirty="0"/>
           </a:p>
         </p:txBody>
       </p:sp>
@@ -3174,8 +3507,8 @@
         </p:nvSpPr>
         <p:spPr>
           <a:xfrm>
-            <a:off x="8382000" y="2413000"/>
-            <a:ext cx="7366000" cy="4191000"/>
+            <a:off x="8382000" y="2362200"/>
+            <a:ext cx="7366000" cy="4267200"/>
           </a:xfrm>
           <a:prstGeom prst="rect">
             <a:avLst/>
@@ -3199,24 +3532,24 @@
         </p:nvSpPr>
         <p:spPr>
           <a:xfrm>
-            <a:off x="8763000" y="2794000"/>
-            <a:ext cx="6604000" cy="457200"/>
-          </a:xfrm>
-          <a:prstGeom prst="rect">
-            <a:avLst/>
-          </a:prstGeom>
-          <a:noFill/>
-          <a:ln/>
-        </p:spPr>
-        <p:txBody>
-          <a:bodyPr wrap="square" lIns="0" tIns="0" rIns="0" bIns="0" rtlCol="0" anchor="t"/>
-          <a:lstStyle/>
-          <a:p>
-            <a:pPr algn="l" indent="0" marL="0">
-              <a:buNone/>
-            </a:pPr>
-            <a:r>
-              <a:rPr lang="en-US" altLang="en-US" sz="2600" dirty="0">
+            <a:off x="8763000" y="2692400"/>
+            <a:ext cx="6604000" cy="431800"/>
+          </a:xfrm>
+          <a:prstGeom prst="rect">
+            <a:avLst/>
+          </a:prstGeom>
+          <a:noFill/>
+          <a:ln/>
+        </p:spPr>
+        <p:txBody>
+          <a:bodyPr wrap="square" lIns="0" tIns="0" rIns="0" bIns="0" rtlCol="0" anchor="t"/>
+          <a:lstStyle/>
+          <a:p>
+            <a:pPr algn="l" indent="0" marL="0">
+              <a:buNone/>
+            </a:pPr>
+            <a:r>
+              <a:rPr lang="en-US" altLang="en-US" sz="2500" dirty="0">
                 <a:solidFill>
                   <a:srgbClr val="202124"/>
                 </a:solidFill>
@@ -3224,9 +3557,9 @@
                 <a:ea typeface="Inter" pitchFamily="34" charset="-122"/>
                 <a:cs typeface="Inter" pitchFamily="34" charset="-120"/>
               </a:rPr>
-              <a:t>WHAT A STRONG RESPONSE INCLUDES</a:t>
-            </a:r>
-            <a:endParaRPr lang="en-US" sz="2600" dirty="0"/>
+              <a:t>BIOLOGY EXAMPLE</a:t>
+            </a:r>
+            <a:endParaRPr lang="en-US" sz="2500" dirty="0"/>
           </a:p>
         </p:txBody>
       </p:sp>
@@ -3238,22 +3571,42 @@
         </p:nvSpPr>
         <p:spPr>
           <a:xfrm>
-            <a:off x="8763000" y="3708400"/>
-            <a:ext cx="6604000" cy="2540000"/>
-          </a:xfrm>
-          <a:prstGeom prst="rect">
-            <a:avLst/>
-          </a:prstGeom>
-          <a:noFill/>
-          <a:ln/>
-        </p:spPr>
-        <p:txBody>
-          <a:bodyPr wrap="square" lIns="0" tIns="0" rIns="0" bIns="0" rtlCol="0" anchor="t"/>
-          <a:lstStyle/>
-          <a:p>
-            <a:pPr algn="l" marL="333375" indent="-333375">
+            <a:off x="8763000" y="3454400"/>
+            <a:ext cx="6604000" cy="2895600"/>
+          </a:xfrm>
+          <a:prstGeom prst="rect">
+            <a:avLst/>
+          </a:prstGeom>
+          <a:noFill/>
+          <a:ln/>
+        </p:spPr>
+        <p:txBody>
+          <a:bodyPr wrap="square" lIns="0" tIns="0" rIns="0" bIns="0" rtlCol="0" anchor="t"/>
+          <a:lstStyle/>
+          <a:p>
+            <a:pPr algn="l" indent="0" marL="0">
               <a:lnSpc>
-                <a:spcPts val="2730"/>
+                <a:spcPts val="2560"/>
+              </a:lnSpc>
+              <a:buNone/>
+            </a:pPr>
+            <a:r>
+              <a:rPr lang="en-US" altLang="en-US" sz="2000" dirty="0">
+                <a:solidFill>
+                  <a:srgbClr val="3C4043"/>
+                </a:solidFill>
+                <a:latin typeface="Inter" pitchFamily="34" charset="0"/>
+                <a:ea typeface="Inter" pitchFamily="34" charset="-122"/>
+                <a:cs typeface="Inter" pitchFamily="34" charset="-120"/>
+              </a:rPr>
+              <a:t>Benchmark #1 rubric, 10 points:</a:t>
+            </a:r>
+            <a:endParaRPr lang="en-US" sz="2000" dirty="0"/>
+          </a:p>
+          <a:p>
+            <a:pPr algn="l" marL="317500" indent="-317500">
+              <a:lnSpc>
+                <a:spcPts val="2560"/>
               </a:lnSpc>
               <a:spcBef>
                 <a:spcPts val="10"/>
@@ -3262,7 +3615,18 @@
               <a:buChar char="•"/>
             </a:pPr>
             <a:r>
-              <a:rPr lang="en-US" altLang="en-US" sz="2100" dirty="0">
+              <a:rPr lang="en-US" altLang="en-US" sz="2000" b="1" dirty="0">
+                <a:solidFill>
+                  <a:srgbClr val="D81B60"/>
+                </a:solidFill>
+                <a:latin typeface="Inter" pitchFamily="34" charset="0"/>
+                <a:ea typeface="Inter" pitchFamily="34" charset="-122"/>
+                <a:cs typeface="Inter" pitchFamily="34" charset="-120"/>
+              </a:rPr>
+              <a:t>Claim 1</a:t>
+            </a:r>
+            <a:r>
+              <a:rPr lang="en-US" altLang="en-US" sz="2000" dirty="0">
                 <a:solidFill>
                   <a:srgbClr val="3C4043"/>
                 </a:solidFill>
@@ -3270,14 +3634,14 @@
                 <a:ea typeface="Inter" pitchFamily="34" charset="-122"/>
                 <a:cs typeface="Inter" pitchFamily="34" charset="-120"/>
               </a:rPr>
-              <a:t>A clear claim or prediction</a:t>
-            </a:r>
-            <a:endParaRPr lang="en-US" sz="2100" dirty="0"/>
-          </a:p>
-          <a:p>
-            <a:pPr algn="l" marL="333375" indent="-333375">
+              <a:t> — prediction stated</a:t>
+            </a:r>
+            <a:endParaRPr lang="en-US" sz="2000" dirty="0"/>
+          </a:p>
+          <a:p>
+            <a:pPr algn="l" marL="317500" indent="-317500">
               <a:lnSpc>
-                <a:spcPts val="2730"/>
+                <a:spcPts val="2560"/>
               </a:lnSpc>
               <a:spcBef>
                 <a:spcPts val="10"/>
@@ -3286,7 +3650,18 @@
               <a:buChar char="•"/>
             </a:pPr>
             <a:r>
-              <a:rPr lang="en-US" altLang="en-US" sz="2100" dirty="0">
+              <a:rPr lang="en-US" altLang="en-US" sz="2000" b="1" dirty="0">
+                <a:solidFill>
+                  <a:srgbClr val="238636"/>
+                </a:solidFill>
+                <a:latin typeface="Inter" pitchFamily="34" charset="0"/>
+                <a:ea typeface="Inter" pitchFamily="34" charset="-122"/>
+                <a:cs typeface="Inter" pitchFamily="34" charset="-120"/>
+              </a:rPr>
+              <a:t>Evidence 1</a:t>
+            </a:r>
+            <a:r>
+              <a:rPr lang="en-US" altLang="en-US" sz="2000" dirty="0">
                 <a:solidFill>
                   <a:srgbClr val="3C4043"/>
                 </a:solidFill>
@@ -3294,14 +3669,14 @@
                 <a:ea typeface="Inter" pitchFamily="34" charset="-122"/>
                 <a:cs typeface="Inter" pitchFamily="34" charset="-120"/>
               </a:rPr>
-              <a:t>Relevant evidence from both visuals</a:t>
-            </a:r>
-            <a:endParaRPr lang="en-US" sz="2100" dirty="0"/>
-          </a:p>
-          <a:p>
-            <a:pPr algn="l" marL="333375" indent="-333375">
+              <a:t> — graph detail used accurately</a:t>
+            </a:r>
+            <a:endParaRPr lang="en-US" sz="2000" dirty="0"/>
+          </a:p>
+          <a:p>
+            <a:pPr algn="l" marL="317500" indent="-317500">
               <a:lnSpc>
-                <a:spcPts val="2730"/>
+                <a:spcPts val="2560"/>
               </a:lnSpc>
               <a:spcBef>
                 <a:spcPts val="10"/>
@@ -3310,7 +3685,18 @@
               <a:buChar char="•"/>
             </a:pPr>
             <a:r>
-              <a:rPr lang="en-US" altLang="en-US" sz="2100" dirty="0">
+              <a:rPr lang="en-US" altLang="en-US" sz="2000" b="1" dirty="0">
+                <a:solidFill>
+                  <a:srgbClr val="238636"/>
+                </a:solidFill>
+                <a:latin typeface="Inter" pitchFamily="34" charset="0"/>
+                <a:ea typeface="Inter" pitchFamily="34" charset="-122"/>
+                <a:cs typeface="Inter" pitchFamily="34" charset="-120"/>
+              </a:rPr>
+              <a:t>Evidence 1</a:t>
+            </a:r>
+            <a:r>
+              <a:rPr lang="en-US" altLang="en-US" sz="2000" dirty="0">
                 <a:solidFill>
                   <a:srgbClr val="3C4043"/>
                 </a:solidFill>
@@ -3318,14 +3704,14 @@
                 <a:ea typeface="Inter" pitchFamily="34" charset="-122"/>
                 <a:cs typeface="Inter" pitchFamily="34" charset="-120"/>
               </a:rPr>
-              <a:t>Reasoning that connects the evidence to the science idea</a:t>
-            </a:r>
-            <a:endParaRPr lang="en-US" sz="2100" dirty="0"/>
-          </a:p>
-          <a:p>
-            <a:pPr algn="l" marL="333375" indent="-333375">
+              <a:t> — food web quoted correctly</a:t>
+            </a:r>
+            <a:endParaRPr lang="en-US" sz="2000" dirty="0"/>
+          </a:p>
+          <a:p>
+            <a:pPr algn="l" marL="317500" indent="-317500">
               <a:lnSpc>
-                <a:spcPts val="2730"/>
+                <a:spcPts val="2560"/>
               </a:lnSpc>
               <a:spcBef>
                 <a:spcPts val="10"/>
@@ -3334,7 +3720,18 @@
               <a:buChar char="•"/>
             </a:pPr>
             <a:r>
-              <a:rPr lang="en-US" altLang="en-US" sz="2100" dirty="0">
+              <a:rPr lang="en-US" altLang="en-US" sz="2000" b="1" dirty="0">
+                <a:solidFill>
+                  <a:srgbClr val="1D4ED8"/>
+                </a:solidFill>
+                <a:latin typeface="Inter" pitchFamily="34" charset="0"/>
+                <a:ea typeface="Inter" pitchFamily="34" charset="-122"/>
+                <a:cs typeface="Inter" pitchFamily="34" charset="-120"/>
+              </a:rPr>
+              <a:t>Reasoning 1</a:t>
+            </a:r>
+            <a:r>
+              <a:rPr lang="en-US" altLang="en-US" sz="2000" dirty="0">
                 <a:solidFill>
                   <a:srgbClr val="3C4043"/>
                 </a:solidFill>
@@ -3342,9 +3739,9 @@
                 <a:ea typeface="Inter" pitchFamily="34" charset="-122"/>
                 <a:cs typeface="Inter" pitchFamily="34" charset="-120"/>
               </a:rPr>
-              <a:t>Clear science language</a:t>
-            </a:r>
-            <a:endParaRPr lang="en-US" sz="2100" dirty="0"/>
+              <a:t> — evidence linked to the science idea</a:t>
+            </a:r>
+            <a:endParaRPr lang="en-US" sz="2000" dirty="0"/>
           </a:p>
         </p:txBody>
       </p:sp>
@@ -3356,8 +3753,8 @@
         </p:nvSpPr>
         <p:spPr>
           <a:xfrm>
-            <a:off x="508000" y="6985000"/>
-            <a:ext cx="15240000" cy="762000"/>
+            <a:off x="508000" y="6908800"/>
+            <a:ext cx="15240000" cy="838200"/>
           </a:xfrm>
           <a:prstGeom prst="rect">
             <a:avLst/>
@@ -3376,35 +3773,24 @@
         </p:nvSpPr>
         <p:spPr>
           <a:xfrm>
-            <a:off x="812800" y="7239000"/>
-            <a:ext cx="14605000" cy="304800"/>
-          </a:xfrm>
-          <a:prstGeom prst="rect">
-            <a:avLst/>
-          </a:prstGeom>
-          <a:noFill/>
-          <a:ln/>
-        </p:spPr>
-        <p:txBody>
-          <a:bodyPr wrap="square" lIns="0" tIns="0" rIns="0" bIns="0" rtlCol="0" anchor="t"/>
-          <a:lstStyle/>
-          <a:p>
-            <a:pPr algn="l" indent="0" marL="0">
-              <a:buNone/>
-            </a:pPr>
-            <a:r>
-              <a:rPr lang="en-US" altLang="en-US" sz="2000" b="1" dirty="0">
-                <a:solidFill>
-                  <a:srgbClr val="F6B4BA"/>
-                </a:solidFill>
-                <a:latin typeface="Inter" pitchFamily="34" charset="0"/>
-                <a:ea typeface="Inter" pitchFamily="34" charset="-122"/>
-                <a:cs typeface="Inter" pitchFamily="34" charset="-120"/>
-              </a:rPr>
-              <a:t>Keep this bar visible</a:t>
-            </a:r>
-            <a:r>
-              <a:rPr lang="en-US" altLang="en-US" sz="2000" dirty="0">
+            <a:off x="812800" y="7112000"/>
+            <a:ext cx="14605000" cy="457200"/>
+          </a:xfrm>
+          <a:prstGeom prst="rect">
+            <a:avLst/>
+          </a:prstGeom>
+          <a:noFill/>
+          <a:ln/>
+        </p:spPr>
+        <p:txBody>
+          <a:bodyPr wrap="square" lIns="0" tIns="0" rIns="0" bIns="0" rtlCol="0" anchor="t"/>
+          <a:lstStyle/>
+          <a:p>
+            <a:pPr algn="l" indent="0" marL="0">
+              <a:buNone/>
+            </a:pPr>
+            <a:r>
+              <a:rPr lang="en-US" altLang="en-US" sz="1900" dirty="0">
                 <a:solidFill>
                   <a:srgbClr val="FFFFFF"/>
                 </a:solidFill>
@@ -3412,9 +3798,9 @@
                 <a:ea typeface="Inter" pitchFamily="34" charset="-122"/>
                 <a:cs typeface="Inter" pitchFamily="34" charset="-120"/>
               </a:rPr>
-              <a:t> while you read, mark, and write feedback on student work.</a:t>
-            </a:r>
-            <a:endParaRPr lang="en-US" sz="2000" dirty="0"/>
+              <a:t>Other courses use their own rubric or success criteria; the steps are the same. The rubric leads, and what you notice in the writing and know about your students matters too.</a:t>
+            </a:r>
+            <a:endParaRPr lang="en-US" sz="1900" dirty="0"/>
           </a:p>
         </p:txBody>
       </p:sp>
@@ -3562,7 +3948,7 @@
                 <a:ea typeface="Inter" pitchFamily="34" charset="-122"/>
                 <a:cs typeface="Inter" pitchFamily="34" charset="-120"/>
               </a:rPr>
-              <a:t>Step 2: Read Student Writing</a:t>
+              <a:t>Step 2: Read 3–5 Samples With the Rubric</a:t>
             </a:r>
             <a:endParaRPr lang="en-US" sz="3000" dirty="0"/>
           </a:p>
@@ -3601,7 +3987,7 @@
                 <a:ea typeface="Inter" pitchFamily="34" charset="-122"/>
                 <a:cs typeface="Inter" pitchFamily="34" charset="-120"/>
               </a:rPr>
-              <a:t>10:00–22:00  •  12 MIN</a:t>
+              <a:t>10–22 MIN  •  12 MIN</a:t>
             </a:r>
             <a:endParaRPr lang="en-US" sz="1600" dirty="0"/>
           </a:p>
@@ -3615,24 +4001,24 @@
         </p:nvSpPr>
         <p:spPr>
           <a:xfrm>
-            <a:off x="508000" y="1346200"/>
-            <a:ext cx="15240000" cy="660400"/>
-          </a:xfrm>
-          <a:prstGeom prst="rect">
-            <a:avLst/>
-          </a:prstGeom>
-          <a:noFill/>
-          <a:ln/>
-        </p:spPr>
-        <p:txBody>
-          <a:bodyPr wrap="square" lIns="0" tIns="0" rIns="0" bIns="0" rtlCol="0" anchor="t"/>
-          <a:lstStyle/>
-          <a:p>
-            <a:pPr algn="l" indent="0" marL="0">
-              <a:buNone/>
-            </a:pPr>
-            <a:r>
-              <a:rPr lang="en-US" altLang="en-US" sz="2300" dirty="0">
+            <a:off x="508000" y="1320800"/>
+            <a:ext cx="15240000" cy="685800"/>
+          </a:xfrm>
+          <a:prstGeom prst="rect">
+            <a:avLst/>
+          </a:prstGeom>
+          <a:noFill/>
+          <a:ln/>
+        </p:spPr>
+        <p:txBody>
+          <a:bodyPr wrap="square" lIns="0" tIns="0" rIns="0" bIns="0" rtlCol="0" anchor="t"/>
+          <a:lstStyle/>
+          <a:p>
+            <a:pPr algn="l" indent="0" marL="0">
+              <a:buNone/>
+            </a:pPr>
+            <a:r>
+              <a:rPr lang="en-US" altLang="en-US" sz="2200" dirty="0">
                 <a:solidFill>
                   <a:srgbClr val="3C4043"/>
                 </a:solidFill>
@@ -3640,9 +4026,9 @@
                 <a:ea typeface="Inter" pitchFamily="34" charset="-122"/>
                 <a:cs typeface="Inter" pitchFamily="34" charset="-120"/>
               </a:rPr>
-              <a:t>Read 3–5 de-identified samples and use three marks only. Mark the work, not the student.</a:t>
-            </a:r>
-            <a:endParaRPr lang="en-US" sz="2300" dirty="0"/>
+              <a:t>Read each sample next to the rubric. Describe what is written in the piece before deciding what to do about it.</a:t>
+            </a:r>
+            <a:endParaRPr lang="en-US" sz="2200" dirty="0"/>
           </a:p>
         </p:txBody>
       </p:sp>
@@ -3654,8 +4040,8 @@
         </p:nvSpPr>
         <p:spPr>
           <a:xfrm>
-            <a:off x="508000" y="2413000"/>
-            <a:ext cx="4699000" cy="4064000"/>
+            <a:off x="508000" y="2336800"/>
+            <a:ext cx="7366000" cy="4191000"/>
           </a:xfrm>
           <a:prstGeom prst="rect">
             <a:avLst/>
@@ -3673,14 +4059,14 @@
       </p:sp>
       <p:sp>
         <p:nvSpPr>
-          <p:cNvPr id="7" name="m1-title"/>
-          <p:cNvSpPr/>
-          <p:nvPr/>
-        </p:nvSpPr>
-        <p:spPr>
-          <a:xfrm>
-            <a:off x="889000" y="2794000"/>
-            <a:ext cx="3937000" cy="431800"/>
+          <p:cNvPr id="7" name="left-title"/>
+          <p:cNvSpPr/>
+          <p:nvPr/>
+        </p:nvSpPr>
+        <p:spPr>
+          <a:xfrm>
+            <a:off x="889000" y="2667000"/>
+            <a:ext cx="6604000" cy="431800"/>
           </a:xfrm>
           <a:prstGeom prst="rect">
             <a:avLst/>
@@ -3704,7 +4090,7 @@
                 <a:ea typeface="Inter" pitchFamily="34" charset="-122"/>
                 <a:cs typeface="Inter" pitchFamily="34" charset="-120"/>
               </a:rPr>
-              <a:t>✓ What students can do</a:t>
+              <a:t>WHAT IS PRESENT</a:t>
             </a:r>
             <a:endParaRPr lang="en-US" sz="2500" dirty="0"/>
           </a:p>
@@ -3712,33 +4098,37 @@
       </p:sp>
       <p:sp>
         <p:nvSpPr>
-          <p:cNvPr id="8" name="m1-body"/>
-          <p:cNvSpPr/>
-          <p:nvPr/>
-        </p:nvSpPr>
-        <p:spPr>
-          <a:xfrm>
-            <a:off x="889000" y="3632200"/>
-            <a:ext cx="3937000" cy="2540000"/>
-          </a:xfrm>
-          <a:prstGeom prst="rect">
-            <a:avLst/>
-          </a:prstGeom>
-          <a:noFill/>
-          <a:ln/>
-        </p:spPr>
-        <p:txBody>
-          <a:bodyPr wrap="square" lIns="0" tIns="0" rIns="0" bIns="0" rtlCol="0" anchor="t"/>
-          <a:lstStyle/>
-          <a:p>
-            <a:pPr algn="l" indent="0" marL="0">
+          <p:cNvPr id="8" name="left-body"/>
+          <p:cNvSpPr/>
+          <p:nvPr/>
+        </p:nvSpPr>
+        <p:spPr>
+          <a:xfrm>
+            <a:off x="889000" y="3403600"/>
+            <a:ext cx="6604000" cy="2895600"/>
+          </a:xfrm>
+          <a:prstGeom prst="rect">
+            <a:avLst/>
+          </a:prstGeom>
+          <a:noFill/>
+          <a:ln/>
+        </p:spPr>
+        <p:txBody>
+          <a:bodyPr wrap="square" lIns="0" tIns="0" rIns="0" bIns="0" rtlCol="0" anchor="t"/>
+          <a:lstStyle/>
+          <a:p>
+            <a:pPr algn="l" marL="317500" indent="-317500">
               <a:lnSpc>
-                <a:spcPts val="2730"/>
+                <a:spcPts val="2560"/>
               </a:lnSpc>
-              <a:buNone/>
-            </a:pPr>
-            <a:r>
-              <a:rPr lang="en-US" altLang="en-US" sz="2100" dirty="0">
+              <a:spcBef>
+                <a:spcPts val="10"/>
+              </a:spcBef>
+              <a:buSzPct val="100000"/>
+              <a:buChar char="•"/>
+            </a:pPr>
+            <a:r>
+              <a:rPr lang="en-US" altLang="en-US" sz="2000" dirty="0">
                 <a:solidFill>
                   <a:srgbClr val="3C4043"/>
                 </a:solidFill>
@@ -3746,9 +4136,81 @@
                 <a:ea typeface="Inter" pitchFamily="34" charset="-122"/>
                 <a:cs typeface="Inter" pitchFamily="34" charset="-120"/>
               </a:rPr>
-              <a:t>Mark the parts that are already present: a claim, evidence from the source, reasoning, or clear science language.</a:t>
-            </a:r>
-            <a:endParaRPr lang="en-US" sz="2100" dirty="0"/>
+              <a:t>Quote the line or phrase that shows the criterion</a:t>
+            </a:r>
+            <a:endParaRPr lang="en-US" sz="2000" dirty="0"/>
+          </a:p>
+          <a:p>
+            <a:pPr algn="l" marL="317500" indent="-317500">
+              <a:lnSpc>
+                <a:spcPts val="2560"/>
+              </a:lnSpc>
+              <a:spcBef>
+                <a:spcPts val="10"/>
+              </a:spcBef>
+              <a:buSzPct val="100000"/>
+              <a:buChar char="•"/>
+            </a:pPr>
+            <a:r>
+              <a:rPr lang="en-US" altLang="en-US" sz="2000" dirty="0">
+                <a:solidFill>
+                  <a:srgbClr val="3C4043"/>
+                </a:solidFill>
+                <a:latin typeface="Inter" pitchFamily="34" charset="0"/>
+                <a:ea typeface="Inter" pitchFamily="34" charset="-122"/>
+                <a:cs typeface="Inter" pitchFamily="34" charset="-120"/>
+              </a:rPr>
+              <a:t>Note the criterion number or name beside it</a:t>
+            </a:r>
+            <a:endParaRPr lang="en-US" sz="2000" dirty="0"/>
+          </a:p>
+          <a:p>
+            <a:pPr algn="l" marL="317500" indent="-317500">
+              <a:lnSpc>
+                <a:spcPts val="2560"/>
+              </a:lnSpc>
+              <a:spcBef>
+                <a:spcPts val="10"/>
+              </a:spcBef>
+              <a:buSzPct val="100000"/>
+              <a:buChar char="•"/>
+            </a:pPr>
+            <a:r>
+              <a:rPr lang="en-US" altLang="en-US" sz="2000" dirty="0">
+                <a:solidFill>
+                  <a:srgbClr val="3C4043"/>
+                </a:solidFill>
+                <a:latin typeface="Inter" pitchFamily="34" charset="0"/>
+                <a:ea typeface="Inter" pitchFamily="34" charset="-122"/>
+                <a:cs typeface="Inter" pitchFamily="34" charset="-120"/>
+              </a:rPr>
+              <a:t>Mark what the student did well in one sentence</a:t>
+            </a:r>
+            <a:endParaRPr lang="en-US" sz="2000" dirty="0"/>
+          </a:p>
+          <a:p>
+            <a:pPr algn="l" marL="317500" indent="-317500">
+              <a:lnSpc>
+                <a:spcPts val="2560"/>
+              </a:lnSpc>
+              <a:spcBef>
+                <a:spcPts val="10"/>
+              </a:spcBef>
+              <a:buSzPct val="100000"/>
+              <a:buChar char="•"/>
+            </a:pPr>
+            <a:r>
+              <a:rPr lang="en-US" altLang="en-US" sz="2000" dirty="0">
+                <a:solidFill>
+                  <a:srgbClr val="3C4043"/>
+                </a:solidFill>
+                <a:latin typeface="Inter" pitchFamily="34" charset="0"/>
+                <a:ea typeface="Inter" pitchFamily="34" charset="-122"/>
+                <a:cs typeface="Inter" pitchFamily="34" charset="-120"/>
+              </a:rPr>
+              <a:t>Repeat for each of the 3–5 samples</a:t>
+            </a:r>
+            <a:endParaRPr lang="en-US" sz="2000" dirty="0"/>
           </a:p>
         </p:txBody>
       </p:sp>
@@ -3760,114 +4222,8 @@
         </p:nvSpPr>
         <p:spPr>
           <a:xfrm>
-            <a:off x="5778500" y="2413000"/>
-            <a:ext cx="4699000" cy="4064000"/>
-          </a:xfrm>
-          <a:prstGeom prst="rect">
-            <a:avLst/>
-          </a:prstGeom>
-          <a:solidFill>
-            <a:srgbClr val="F3F4F6"/>
-          </a:solidFill>
-          <a:ln w="12700">
-            <a:solidFill>
-              <a:srgbClr val="D1D5DB"/>
-            </a:solidFill>
-            <a:prstDash val="solid"/>
-          </a:ln>
-        </p:spPr>
-      </p:sp>
-      <p:sp>
-        <p:nvSpPr>
-          <p:cNvPr id="10" name="m2-title"/>
-          <p:cNvSpPr/>
-          <p:nvPr/>
-        </p:nvSpPr>
-        <p:spPr>
-          <a:xfrm>
-            <a:off x="6159500" y="2794000"/>
-            <a:ext cx="3937000" cy="431800"/>
-          </a:xfrm>
-          <a:prstGeom prst="rect">
-            <a:avLst/>
-          </a:prstGeom>
-          <a:noFill/>
-          <a:ln/>
-        </p:spPr>
-        <p:txBody>
-          <a:bodyPr wrap="square" lIns="0" tIns="0" rIns="0" bIns="0" rtlCol="0" anchor="t"/>
-          <a:lstStyle/>
-          <a:p>
-            <a:pPr algn="l" indent="0" marL="0">
-              <a:buNone/>
-            </a:pPr>
-            <a:r>
-              <a:rPr lang="en-US" altLang="en-US" sz="2500" dirty="0">
-                <a:solidFill>
-                  <a:srgbClr val="202124"/>
-                </a:solidFill>
-                <a:latin typeface="Inter" pitchFamily="34" charset="0"/>
-                <a:ea typeface="Inter" pitchFamily="34" charset="-122"/>
-                <a:cs typeface="Inter" pitchFamily="34" charset="-120"/>
-              </a:rPr>
-              <a:t>△ One priority need</a:t>
-            </a:r>
-            <a:endParaRPr lang="en-US" sz="2500" dirty="0"/>
-          </a:p>
-        </p:txBody>
-      </p:sp>
-      <p:sp>
-        <p:nvSpPr>
-          <p:cNvPr id="11" name="m2-body"/>
-          <p:cNvSpPr/>
-          <p:nvPr/>
-        </p:nvSpPr>
-        <p:spPr>
-          <a:xfrm>
-            <a:off x="6159500" y="3632200"/>
-            <a:ext cx="3937000" cy="2540000"/>
-          </a:xfrm>
-          <a:prstGeom prst="rect">
-            <a:avLst/>
-          </a:prstGeom>
-          <a:noFill/>
-          <a:ln/>
-        </p:spPr>
-        <p:txBody>
-          <a:bodyPr wrap="square" lIns="0" tIns="0" rIns="0" bIns="0" rtlCol="0" anchor="t"/>
-          <a:lstStyle/>
-          <a:p>
-            <a:pPr algn="l" indent="0" marL="0">
-              <a:lnSpc>
-                <a:spcPts val="2730"/>
-              </a:lnSpc>
-              <a:buNone/>
-            </a:pPr>
-            <a:r>
-              <a:rPr lang="en-US" altLang="en-US" sz="2100" dirty="0">
-                <a:solidFill>
-                  <a:srgbClr val="3C4043"/>
-                </a:solidFill>
-                <a:latin typeface="Inter" pitchFamily="34" charset="0"/>
-                <a:ea typeface="Inter" pitchFamily="34" charset="-122"/>
-                <a:cs typeface="Inter" pitchFamily="34" charset="-120"/>
-              </a:rPr>
-              <a:t>Mark what is partial, missing, or confused, then decide whether the need is science, source use, or written reasoning.</a:t>
-            </a:r>
-            <a:endParaRPr lang="en-US" sz="2100" dirty="0"/>
-          </a:p>
-        </p:txBody>
-      </p:sp>
-      <p:sp>
-        <p:nvSpPr>
-          <p:cNvPr id="12" name="evidence-shape-11"/>
-          <p:cNvSpPr/>
-          <p:nvPr/>
-        </p:nvSpPr>
-        <p:spPr>
-          <a:xfrm>
-            <a:off x="11049000" y="2413000"/>
-            <a:ext cx="4699000" cy="4064000"/>
+            <a:off x="8382000" y="2336800"/>
+            <a:ext cx="7366000" cy="4191000"/>
           </a:xfrm>
           <a:prstGeom prst="rect">
             <a:avLst/>
@@ -3885,14 +4241,14 @@
       </p:sp>
       <p:sp>
         <p:nvSpPr>
-          <p:cNvPr id="13" name="m3-title"/>
-          <p:cNvSpPr/>
-          <p:nvPr/>
-        </p:nvSpPr>
-        <p:spPr>
-          <a:xfrm>
-            <a:off x="11430000" y="2794000"/>
-            <a:ext cx="3937000" cy="431800"/>
+          <p:cNvPr id="10" name="right-title"/>
+          <p:cNvSpPr/>
+          <p:nvPr/>
+        </p:nvSpPr>
+        <p:spPr>
+          <a:xfrm>
+            <a:off x="8763000" y="2667000"/>
+            <a:ext cx="6604000" cy="431800"/>
           </a:xfrm>
           <a:prstGeom prst="rect">
             <a:avLst/>
@@ -3916,7 +4272,7 @@
                 <a:ea typeface="Inter" pitchFamily="34" charset="-122"/>
                 <a:cs typeface="Inter" pitchFamily="34" charset="-120"/>
               </a:rPr>
-              <a:t>→ The criterion to name</a:t>
+              <a:t>WHAT IS MISSING OR PARTIAL</a:t>
             </a:r>
             <a:endParaRPr lang="en-US" sz="2500" dirty="0"/>
           </a:p>
@@ -3924,33 +4280,37 @@
       </p:sp>
       <p:sp>
         <p:nvSpPr>
-          <p:cNvPr id="14" name="m3-body"/>
-          <p:cNvSpPr/>
-          <p:nvPr/>
-        </p:nvSpPr>
-        <p:spPr>
-          <a:xfrm>
-            <a:off x="11430000" y="3632200"/>
-            <a:ext cx="3937000" cy="2540000"/>
-          </a:xfrm>
-          <a:prstGeom prst="rect">
-            <a:avLst/>
-          </a:prstGeom>
-          <a:noFill/>
-          <a:ln/>
-        </p:spPr>
-        <p:txBody>
-          <a:bodyPr wrap="square" lIns="0" tIns="0" rIns="0" bIns="0" rtlCol="0" anchor="t"/>
-          <a:lstStyle/>
-          <a:p>
-            <a:pPr algn="l" indent="0" marL="0">
+          <p:cNvPr id="11" name="right-body"/>
+          <p:cNvSpPr/>
+          <p:nvPr/>
+        </p:nvSpPr>
+        <p:spPr>
+          <a:xfrm>
+            <a:off x="8763000" y="3403600"/>
+            <a:ext cx="6604000" cy="2895600"/>
+          </a:xfrm>
+          <a:prstGeom prst="rect">
+            <a:avLst/>
+          </a:prstGeom>
+          <a:noFill/>
+          <a:ln/>
+        </p:spPr>
+        <p:txBody>
+          <a:bodyPr wrap="square" lIns="0" tIns="0" rIns="0" bIns="0" rtlCol="0" anchor="t"/>
+          <a:lstStyle/>
+          <a:p>
+            <a:pPr algn="l" marL="317500" indent="-317500">
               <a:lnSpc>
-                <a:spcPts val="2730"/>
+                <a:spcPts val="2560"/>
               </a:lnSpc>
-              <a:buNone/>
-            </a:pPr>
-            <a:r>
-              <a:rPr lang="en-US" altLang="en-US" sz="2100" dirty="0">
+              <a:spcBef>
+                <a:spcPts val="10"/>
+              </a:spcBef>
+              <a:buSzPct val="100000"/>
+              <a:buChar char="•"/>
+            </a:pPr>
+            <a:r>
+              <a:rPr lang="en-US" altLang="en-US" sz="2000" dirty="0">
                 <a:solidFill>
                   <a:srgbClr val="3C4043"/>
                 </a:solidFill>
@@ -3958,22 +4318,94 @@
                 <a:ea typeface="Inter" pitchFamily="34" charset="-122"/>
                 <a:cs typeface="Inter" pitchFamily="34" charset="-120"/>
               </a:rPr>
-              <a:t>Choose the one criterion that will help students most right now. You will use it in the written feedback.</a:t>
-            </a:r>
-            <a:endParaRPr lang="en-US" sz="2100" dirty="0"/>
-          </a:p>
-        </p:txBody>
-      </p:sp>
-      <p:sp>
-        <p:nvSpPr>
-          <p:cNvPr id="15" name="evidence-shape-14"/>
+              <a:t>Name the criterion that is not yet met</a:t>
+            </a:r>
+            <a:endParaRPr lang="en-US" sz="2000" dirty="0"/>
+          </a:p>
+          <a:p>
+            <a:pPr algn="l" marL="317500" indent="-317500">
+              <a:lnSpc>
+                <a:spcPts val="2560"/>
+              </a:lnSpc>
+              <a:spcBef>
+                <a:spcPts val="10"/>
+              </a:spcBef>
+              <a:buSzPct val="100000"/>
+              <a:buChar char="•"/>
+            </a:pPr>
+            <a:r>
+              <a:rPr lang="en-US" altLang="en-US" sz="2000" dirty="0">
+                <a:solidFill>
+                  <a:srgbClr val="3C4043"/>
+                </a:solidFill>
+                <a:latin typeface="Inter" pitchFamily="34" charset="0"/>
+                <a:ea typeface="Inter" pitchFamily="34" charset="-122"/>
+                <a:cs typeface="Inter" pitchFamily="34" charset="-120"/>
+              </a:rPr>
+              <a:t>Say whether the gap is claim, evidence, reasoning, or science language</a:t>
+            </a:r>
+            <a:endParaRPr lang="en-US" sz="2000" dirty="0"/>
+          </a:p>
+          <a:p>
+            <a:pPr algn="l" marL="317500" indent="-317500">
+              <a:lnSpc>
+                <a:spcPts val="2560"/>
+              </a:lnSpc>
+              <a:spcBef>
+                <a:spcPts val="10"/>
+              </a:spcBef>
+              <a:buSzPct val="100000"/>
+              <a:buChar char="•"/>
+            </a:pPr>
+            <a:r>
+              <a:rPr lang="en-US" altLang="en-US" sz="2000" dirty="0">
+                <a:solidFill>
+                  <a:srgbClr val="3C4043"/>
+                </a:solidFill>
+                <a:latin typeface="Inter" pitchFamily="34" charset="0"/>
+                <a:ea typeface="Inter" pitchFamily="34" charset="-122"/>
+                <a:cs typeface="Inter" pitchFamily="34" charset="-120"/>
+              </a:rPr>
+              <a:t>Keep it about the writing, not the student</a:t>
+            </a:r>
+            <a:endParaRPr lang="en-US" sz="2000" dirty="0"/>
+          </a:p>
+          <a:p>
+            <a:pPr algn="l" marL="317500" indent="-317500">
+              <a:lnSpc>
+                <a:spcPts val="2560"/>
+              </a:lnSpc>
+              <a:spcBef>
+                <a:spcPts val="10"/>
+              </a:spcBef>
+              <a:buSzPct val="100000"/>
+              <a:buChar char="•"/>
+            </a:pPr>
+            <a:r>
+              <a:rPr lang="en-US" altLang="en-US" sz="2000" dirty="0">
+                <a:solidFill>
+                  <a:srgbClr val="3C4043"/>
+                </a:solidFill>
+                <a:latin typeface="Inter" pitchFamily="34" charset="0"/>
+                <a:ea typeface="Inter" pitchFamily="34" charset="-122"/>
+                <a:cs typeface="Inter" pitchFamily="34" charset="-120"/>
+              </a:rPr>
+              <a:t>Use the rubric wording so the team compares the same thing</a:t>
+            </a:r>
+            <a:endParaRPr lang="en-US" sz="2000" dirty="0"/>
+          </a:p>
+        </p:txBody>
+      </p:sp>
+      <p:sp>
+        <p:nvSpPr>
+          <p:cNvPr id="12" name="evidence-shape-11"/>
           <p:cNvSpPr/>
           <p:nvPr/>
         </p:nvSpPr>
         <p:spPr>
           <a:xfrm>
             <a:off x="508000" y="6858000"/>
-            <a:ext cx="15240000" cy="838200"/>
+            <a:ext cx="15240000" cy="889000"/>
           </a:xfrm>
           <a:prstGeom prst="rect">
             <a:avLst/>
@@ -3986,39 +4418,28 @@
       </p:sp>
       <p:sp>
         <p:nvSpPr>
-          <p:cNvPr id="16" name="rule"/>
-          <p:cNvSpPr/>
-          <p:nvPr/>
-        </p:nvSpPr>
-        <p:spPr>
-          <a:xfrm>
-            <a:off x="812800" y="7137400"/>
-            <a:ext cx="14605000" cy="330200"/>
-          </a:xfrm>
-          <a:prstGeom prst="rect">
-            <a:avLst/>
-          </a:prstGeom>
-          <a:noFill/>
-          <a:ln/>
-        </p:spPr>
-        <p:txBody>
-          <a:bodyPr wrap="square" lIns="0" tIns="0" rIns="0" bIns="0" rtlCol="0" anchor="t"/>
-          <a:lstStyle/>
-          <a:p>
-            <a:pPr algn="l" indent="0" marL="0">
-              <a:buNone/>
-            </a:pPr>
-            <a:r>
-              <a:rPr lang="en-US" altLang="en-US" sz="2000" b="1" dirty="0">
-                <a:solidFill>
-                  <a:srgbClr val="F6B4BA"/>
-                </a:solidFill>
-                <a:latin typeface="Inter" pitchFamily="34" charset="0"/>
-                <a:ea typeface="Inter" pitchFamily="34" charset="-122"/>
-                <a:cs typeface="Inter" pitchFamily="34" charset="-120"/>
-              </a:rPr>
-              <a:t>Ground rule:</a:t>
-            </a:r>
+          <p:cNvPr id="13" name="rule"/>
+          <p:cNvSpPr/>
+          <p:nvPr/>
+        </p:nvSpPr>
+        <p:spPr>
+          <a:xfrm>
+            <a:off x="812800" y="7112000"/>
+            <a:ext cx="14605000" cy="406400"/>
+          </a:xfrm>
+          <a:prstGeom prst="rect">
+            <a:avLst/>
+          </a:prstGeom>
+          <a:noFill/>
+          <a:ln/>
+        </p:spPr>
+        <p:txBody>
+          <a:bodyPr wrap="square" lIns="0" tIns="0" rIns="0" bIns="0" rtlCol="0" anchor="t"/>
+          <a:lstStyle/>
+          <a:p>
+            <a:pPr algn="l" indent="0" marL="0">
+              <a:buNone/>
+            </a:pPr>
             <a:r>
               <a:rPr lang="en-US" altLang="en-US" sz="2000" dirty="0">
                 <a:solidFill>
@@ -4028,7 +4449,7 @@
                 <a:ea typeface="Inter" pitchFamily="34" charset="-122"/>
                 <a:cs typeface="Inter" pitchFamily="34" charset="-120"/>
               </a:rPr>
-              <a:t> describe the work. Do not rank students, teachers, classes, or courses.</a:t>
+              <a:t>Describe the work. Do not rank students, teachers, classes, or courses, and do not sum up a course by one sample.</a:t>
             </a:r>
             <a:endParaRPr lang="en-US" sz="2000" dirty="0"/>
           </a:p>
@@ -4036,7 +4457,7 @@
       </p:sp>
       <p:sp>
         <p:nvSpPr>
-          <p:cNvPr id="17" name="page"/>
+          <p:cNvPr id="14" name="page"/>
           <p:cNvSpPr/>
           <p:nvPr/>
         </p:nvSpPr>
@@ -4075,7 +4496,7 @@
       </p:sp>
       <p:sp>
         <p:nvSpPr>
-          <p:cNvPr id="18" name="evidence-shape-17"/>
+          <p:cNvPr id="15" name="evidence-shape-14"/>
           <p:cNvSpPr/>
           <p:nvPr/>
         </p:nvSpPr>
@@ -4178,7 +4599,7 @@
                 <a:ea typeface="Inter" pitchFamily="34" charset="-122"/>
                 <a:cs typeface="Inter" pitchFamily="34" charset="-120"/>
               </a:rPr>
-              <a:t>Step 3: Write the Feedback</a:t>
+              <a:t>Step 3: Name One Pattern and One Priority Need</a:t>
             </a:r>
             <a:endParaRPr lang="en-US" sz="3000" dirty="0"/>
           </a:p>
@@ -4217,7 +4638,7 @@
                 <a:ea typeface="Inter" pitchFamily="34" charset="-122"/>
                 <a:cs typeface="Inter" pitchFamily="34" charset="-120"/>
               </a:rPr>
-              <a:t>22:00–30:00  •  8 MIN</a:t>
+              <a:t>22–30 MIN  •  8 MIN</a:t>
             </a:r>
             <a:endParaRPr lang="en-US" sz="1600" dirty="0"/>
           </a:p>
@@ -4248,7 +4669,7 @@
               <a:buNone/>
             </a:pPr>
             <a:r>
-              <a:rPr lang="en-US" altLang="en-US" sz="2300" dirty="0">
+              <a:rPr lang="en-US" altLang="en-US" sz="2200" dirty="0">
                 <a:solidFill>
                   <a:srgbClr val="3C4043"/>
                 </a:solidFill>
@@ -4256,9 +4677,9 @@
                 <a:ea typeface="Inter" pitchFamily="34" charset="-122"/>
                 <a:cs typeface="Inter" pitchFamily="34" charset="-120"/>
               </a:rPr>
-              <a:t>Write one short comment. Use the same three parts every time so students know what to do next.</a:t>
-            </a:r>
-            <a:endParaRPr lang="en-US" sz="2300" dirty="0"/>
+              <a:t>Across the samples, look for one pattern. Then choose the single need that will help students most right now.</a:t>
+            </a:r>
+            <a:endParaRPr lang="en-US" sz="2200" dirty="0"/>
           </a:p>
         </p:txBody>
       </p:sp>
@@ -4312,7 +4733,7 @@
               <a:buNone/>
             </a:pPr>
             <a:r>
-              <a:rPr lang="en-US" altLang="en-US" sz="2500" dirty="0">
+              <a:rPr lang="en-US" altLang="en-US" sz="2400" dirty="0">
                 <a:solidFill>
                   <a:srgbClr val="202124"/>
                 </a:solidFill>
@@ -4320,9 +4741,9 @@
                 <a:ea typeface="Inter" pitchFamily="34" charset="-122"/>
                 <a:cs typeface="Inter" pitchFamily="34" charset="-120"/>
               </a:rPr>
-              <a:t>1. Name the criterion</a:t>
-            </a:r>
-            <a:endParaRPr lang="en-US" sz="2500" dirty="0"/>
+              <a:t>1. Look across samples</a:t>
+            </a:r>
+            <a:endParaRPr lang="en-US" sz="2400" dirty="0"/>
           </a:p>
         </p:txBody>
       </p:sp>
@@ -4334,8 +4755,8 @@
         </p:nvSpPr>
         <p:spPr>
           <a:xfrm>
-            <a:off x="889000" y="3505200"/>
-            <a:ext cx="4191000" cy="1397000"/>
+            <a:off x="889000" y="3454400"/>
+            <a:ext cx="4191000" cy="2921000"/>
           </a:xfrm>
           <a:prstGeom prst="rect">
             <a:avLst/>
@@ -4349,12 +4770,12 @@
           <a:p>
             <a:pPr algn="l" indent="0" marL="0">
               <a:lnSpc>
-                <a:spcPts val="2688"/>
+                <a:spcPts val="2560"/>
               </a:lnSpc>
               <a:buNone/>
             </a:pPr>
             <a:r>
-              <a:rPr lang="en-US" altLang="en-US" sz="2100" dirty="0">
+              <a:rPr lang="en-US" altLang="en-US" sz="2000" dirty="0">
                 <a:solidFill>
                   <a:srgbClr val="3C4043"/>
                 </a:solidFill>
@@ -4362,80 +4783,87 @@
                 <a:ea typeface="Inter" pitchFamily="34" charset="-122"/>
                 <a:cs typeface="Inter" pitchFamily="34" charset="-120"/>
               </a:rPr>
-              <a:t>Tell students which part of the response you are responding to.</a:t>
-            </a:r>
-            <a:endParaRPr lang="en-US" sz="2100" dirty="0"/>
-          </a:p>
-        </p:txBody>
-      </p:sp>
-      <p:sp>
-        <p:nvSpPr>
-          <p:cNvPr id="9" name="p1-ex"/>
-          <p:cNvSpPr/>
-          <p:nvPr/>
-        </p:nvSpPr>
-        <p:spPr>
-          <a:xfrm>
-            <a:off x="889000" y="5130800"/>
-            <a:ext cx="4191000" cy="1219200"/>
-          </a:xfrm>
-          <a:prstGeom prst="rect">
-            <a:avLst/>
-          </a:prstGeom>
-          <a:noFill/>
-          <a:ln/>
-        </p:spPr>
-        <p:txBody>
-          <a:bodyPr wrap="square" lIns="0" tIns="0" rIns="0" bIns="0" rtlCol="0" anchor="t"/>
-          <a:lstStyle/>
-          <a:p>
-            <a:pPr algn="l" indent="0" marL="0">
+              <a:t>Ask:</a:t>
+            </a:r>
+            <a:endParaRPr lang="en-US" sz="2000" dirty="0"/>
+          </a:p>
+          <a:p>
+            <a:pPr algn="l" marL="317500" indent="-317500">
               <a:lnSpc>
-                <a:spcPts val="2356"/>
-              </a:lnSpc>
-              <a:buNone/>
-            </a:pPr>
-            <a:r>
-              <a:rPr lang="en-US" altLang="en-US" sz="1900" b="1" dirty="0">
-                <a:solidFill>
-                  <a:srgbClr val="C41220"/>
-                </a:solidFill>
-                <a:latin typeface="Inter" pitchFamily="34" charset="0"/>
-                <a:ea typeface="Inter" pitchFamily="34" charset="-122"/>
-                <a:cs typeface="Inter" pitchFamily="34" charset="-120"/>
-              </a:rPr>
-              <a:t>Example:</a:t>
-            </a:r>
-            <a:endParaRPr lang="en-US" sz="1900" dirty="0"/>
-          </a:p>
-          <a:p>
-            <a:pPr algn="l" indent="0" marL="0">
-              <a:lnSpc>
-                <a:spcPts val="2356"/>
+                <a:spcPts val="2560"/>
               </a:lnSpc>
               <a:spcBef>
-                <a:spcPts val="600"/>
+                <a:spcPts val="10"/>
               </a:spcBef>
-              <a:buNone/>
-            </a:pPr>
-            <a:r>
-              <a:rPr lang="en-US" altLang="en-US" sz="1900" dirty="0">
-                <a:solidFill>
-                  <a:srgbClr val="C41220"/>
-                </a:solidFill>
-                <a:latin typeface="Inter" pitchFamily="34" charset="0"/>
-                <a:ea typeface="Inter" pitchFamily="34" charset="-122"/>
-                <a:cs typeface="Inter" pitchFamily="34" charset="-120"/>
-              </a:rPr>
-              <a:t>“Your claim is clear.”</a:t>
-            </a:r>
-            <a:endParaRPr lang="en-US" sz="1900" dirty="0"/>
-          </a:p>
-        </p:txBody>
-      </p:sp>
-      <p:sp>
-        <p:nvSpPr>
-          <p:cNvPr id="10" name="pattern-shape-9"/>
+              <a:buSzPct val="100000"/>
+              <a:buChar char="•"/>
+            </a:pPr>
+            <a:r>
+              <a:rPr lang="en-US" altLang="en-US" sz="2000" dirty="0">
+                <a:solidFill>
+                  <a:srgbClr val="3C4043"/>
+                </a:solidFill>
+                <a:latin typeface="Inter" pitchFamily="34" charset="0"/>
+                <a:ea typeface="Inter" pitchFamily="34" charset="-122"/>
+                <a:cs typeface="Inter" pitchFamily="34" charset="-120"/>
+              </a:rPr>
+              <a:t>Which criterion is strong in most papers?</a:t>
+            </a:r>
+            <a:endParaRPr lang="en-US" sz="2000" dirty="0"/>
+          </a:p>
+          <a:p>
+            <a:pPr algn="l" marL="317500" indent="-317500">
+              <a:lnSpc>
+                <a:spcPts val="2560"/>
+              </a:lnSpc>
+              <a:spcBef>
+                <a:spcPts val="10"/>
+              </a:spcBef>
+              <a:buSzPct val="100000"/>
+              <a:buChar char="•"/>
+            </a:pPr>
+            <a:r>
+              <a:rPr lang="en-US" altLang="en-US" sz="2000" dirty="0">
+                <a:solidFill>
+                  <a:srgbClr val="3C4043"/>
+                </a:solidFill>
+                <a:latin typeface="Inter" pitchFamily="34" charset="0"/>
+                <a:ea typeface="Inter" pitchFamily="34" charset="-122"/>
+                <a:cs typeface="Inter" pitchFamily="34" charset="-120"/>
+              </a:rPr>
+              <a:t>Which criterion is weak in most papers?</a:t>
+            </a:r>
+            <a:endParaRPr lang="en-US" sz="2000" dirty="0"/>
+          </a:p>
+          <a:p>
+            <a:pPr algn="l" marL="317500" indent="-317500">
+              <a:lnSpc>
+                <a:spcPts val="2560"/>
+              </a:lnSpc>
+              <a:spcBef>
+                <a:spcPts val="10"/>
+              </a:spcBef>
+              <a:buSzPct val="100000"/>
+              <a:buChar char="•"/>
+            </a:pPr>
+            <a:r>
+              <a:rPr lang="en-US" altLang="en-US" sz="2000" dirty="0">
+                <a:solidFill>
+                  <a:srgbClr val="3C4043"/>
+                </a:solidFill>
+                <a:latin typeface="Inter" pitchFamily="34" charset="0"/>
+                <a:ea typeface="Inter" pitchFamily="34" charset="-122"/>
+                <a:cs typeface="Inter" pitchFamily="34" charset="-120"/>
+              </a:rPr>
+              <a:t>Which gap appears in three or more samples?</a:t>
+            </a:r>
+            <a:endParaRPr lang="en-US" sz="2000" dirty="0"/>
+          </a:p>
+        </p:txBody>
+      </p:sp>
+      <p:sp>
+        <p:nvSpPr>
+          <p:cNvPr id="9" name="pattern-shape-8"/>
           <p:cNvSpPr/>
           <p:nvPr/>
         </p:nvSpPr>
@@ -4460,7 +4888,7 @@
       </p:sp>
       <p:sp>
         <p:nvSpPr>
-          <p:cNvPr id="11" name="p2-title"/>
+          <p:cNvPr id="10" name="p2-title"/>
           <p:cNvSpPr/>
           <p:nvPr/>
         </p:nvSpPr>
@@ -4483,7 +4911,7 @@
               <a:buNone/>
             </a:pPr>
             <a:r>
-              <a:rPr lang="en-US" altLang="en-US" sz="2500" dirty="0">
+              <a:rPr lang="en-US" altLang="en-US" sz="2400" dirty="0">
                 <a:solidFill>
                   <a:srgbClr val="202124"/>
                 </a:solidFill>
@@ -4491,22 +4919,22 @@
                 <a:ea typeface="Inter" pitchFamily="34" charset="-122"/>
                 <a:cs typeface="Inter" pitchFamily="34" charset="-120"/>
               </a:rPr>
-              <a:t>2. Point to the work</a:t>
-            </a:r>
-            <a:endParaRPr lang="en-US" sz="2500" dirty="0"/>
-          </a:p>
-        </p:txBody>
-      </p:sp>
-      <p:sp>
-        <p:nvSpPr>
-          <p:cNvPr id="12" name="p2-body"/>
-          <p:cNvSpPr/>
-          <p:nvPr/>
-        </p:nvSpPr>
-        <p:spPr>
-          <a:xfrm>
-            <a:off x="6057900" y="3505200"/>
-            <a:ext cx="4191000" cy="1397000"/>
+              <a:t>2. Write one sentence</a:t>
+            </a:r>
+            <a:endParaRPr lang="en-US" sz="2400" dirty="0"/>
+          </a:p>
+        </p:txBody>
+      </p:sp>
+      <p:sp>
+        <p:nvSpPr>
+          <p:cNvPr id="11" name="p2-body"/>
+          <p:cNvSpPr/>
+          <p:nvPr/>
+        </p:nvSpPr>
+        <p:spPr>
+          <a:xfrm>
+            <a:off x="6057900" y="3454400"/>
+            <a:ext cx="4191000" cy="2921000"/>
           </a:xfrm>
           <a:prstGeom prst="rect">
             <a:avLst/>
@@ -4520,12 +4948,12 @@
           <a:p>
             <a:pPr algn="l" indent="0" marL="0">
               <a:lnSpc>
-                <a:spcPts val="2688"/>
+                <a:spcPts val="2560"/>
               </a:lnSpc>
               <a:buNone/>
             </a:pPr>
             <a:r>
-              <a:rPr lang="en-US" altLang="en-US" sz="2100" dirty="0">
+              <a:rPr lang="en-US" altLang="en-US" sz="2000" dirty="0">
                 <a:solidFill>
                   <a:srgbClr val="3C4043"/>
                 </a:solidFill>
@@ -4533,80 +4961,38 @@
                 <a:ea typeface="Inter" pitchFamily="34" charset="-122"/>
                 <a:cs typeface="Inter" pitchFamily="34" charset="-120"/>
               </a:rPr>
-              <a:t>Send students back to their own writing or the source instead of giving the answer.</a:t>
-            </a:r>
-            <a:endParaRPr lang="en-US" sz="2100" dirty="0"/>
-          </a:p>
-        </p:txBody>
-      </p:sp>
-      <p:sp>
-        <p:nvSpPr>
-          <p:cNvPr id="13" name="p2-ex"/>
-          <p:cNvSpPr/>
-          <p:nvPr/>
-        </p:nvSpPr>
-        <p:spPr>
-          <a:xfrm>
-            <a:off x="6057900" y="5130800"/>
-            <a:ext cx="4191000" cy="1219200"/>
-          </a:xfrm>
-          <a:prstGeom prst="rect">
-            <a:avLst/>
-          </a:prstGeom>
-          <a:noFill/>
-          <a:ln/>
-        </p:spPr>
-        <p:txBody>
-          <a:bodyPr wrap="square" lIns="0" tIns="0" rIns="0" bIns="0" rtlCol="0" anchor="t"/>
-          <a:lstStyle/>
+              <a:t>“Students can ______, but most need ______ in the criterion of ______.”</a:t>
+            </a:r>
+            <a:endParaRPr lang="en-US" sz="2000" dirty="0"/>
+          </a:p>
           <a:p>
             <a:pPr algn="l" indent="0" marL="0">
               <a:lnSpc>
-                <a:spcPts val="2356"/>
-              </a:lnSpc>
-              <a:buNone/>
-            </a:pPr>
-            <a:r>
-              <a:rPr lang="en-US" altLang="en-US" sz="1900" b="1" dirty="0">
-                <a:solidFill>
-                  <a:srgbClr val="C41220"/>
-                </a:solidFill>
-                <a:latin typeface="Inter" pitchFamily="34" charset="0"/>
-                <a:ea typeface="Inter" pitchFamily="34" charset="-122"/>
-                <a:cs typeface="Inter" pitchFamily="34" charset="-120"/>
-              </a:rPr>
-              <a:t>Example:</a:t>
-            </a:r>
-            <a:endParaRPr lang="en-US" sz="1900" dirty="0"/>
-          </a:p>
-          <a:p>
-            <a:pPr algn="l" indent="0" marL="0">
-              <a:lnSpc>
-                <a:spcPts val="2356"/>
+                <a:spcPts val="2560"/>
               </a:lnSpc>
               <a:spcBef>
-                <a:spcPts val="600"/>
+                <a:spcPts val="1000"/>
               </a:spcBef>
               <a:buNone/>
             </a:pPr>
             <a:r>
-              <a:rPr lang="en-US" altLang="en-US" sz="1900" dirty="0">
-                <a:solidFill>
-                  <a:srgbClr val="C41220"/>
-                </a:solidFill>
-                <a:latin typeface="Inter" pitchFamily="34" charset="0"/>
-                <a:ea typeface="Inter" pitchFamily="34" charset="-122"/>
-                <a:cs typeface="Inter" pitchFamily="34" charset="-120"/>
-              </a:rPr>
-              <a:t>“Underline the graph and food-web evidence you used.”</a:t>
-            </a:r>
-            <a:endParaRPr lang="en-US" sz="1900" dirty="0"/>
-          </a:p>
-        </p:txBody>
-      </p:sp>
-      <p:sp>
-        <p:nvSpPr>
-          <p:cNvPr id="14" name="pattern-shape-13"/>
+              <a:rPr lang="en-US" altLang="en-US" sz="2000" dirty="0">
+                <a:solidFill>
+                  <a:srgbClr val="3C4043"/>
+                </a:solidFill>
+                <a:latin typeface="Inter" pitchFamily="34" charset="0"/>
+                <a:ea typeface="Inter" pitchFamily="34" charset="-122"/>
+                <a:cs typeface="Inter" pitchFamily="34" charset="-120"/>
+              </a:rPr>
+              <a:t>Use the rubric wording in the blank so the need is measurable.</a:t>
+            </a:r>
+            <a:endParaRPr lang="en-US" sz="2000" dirty="0"/>
+          </a:p>
+        </p:txBody>
+      </p:sp>
+      <p:sp>
+        <p:nvSpPr>
+          <p:cNvPr id="12" name="pattern-shape-11"/>
           <p:cNvSpPr/>
           <p:nvPr/>
         </p:nvSpPr>
@@ -4631,7 +5017,7 @@
       </p:sp>
       <p:sp>
         <p:nvSpPr>
-          <p:cNvPr id="15" name="p3-title"/>
+          <p:cNvPr id="13" name="p3-title"/>
           <p:cNvSpPr/>
           <p:nvPr/>
         </p:nvSpPr>
@@ -4654,7 +5040,7 @@
               <a:buNone/>
             </a:pPr>
             <a:r>
-              <a:rPr lang="en-US" altLang="en-US" sz="2500" dirty="0">
+              <a:rPr lang="en-US" altLang="en-US" sz="2400" dirty="0">
                 <a:solidFill>
                   <a:srgbClr val="202124"/>
                 </a:solidFill>
@@ -4662,122 +5048,157 @@
                 <a:ea typeface="Inter" pitchFamily="34" charset="-122"/>
                 <a:cs typeface="Inter" pitchFamily="34" charset="-120"/>
               </a:rPr>
-              <a:t>3. Ask for one action</a:t>
-            </a:r>
-            <a:endParaRPr lang="en-US" sz="2500" dirty="0"/>
-          </a:p>
-        </p:txBody>
-      </p:sp>
-      <p:sp>
-        <p:nvSpPr>
-          <p:cNvPr id="16" name="p3-body"/>
-          <p:cNvSpPr/>
-          <p:nvPr/>
-        </p:nvSpPr>
-        <p:spPr>
-          <a:xfrm>
-            <a:off x="11226800" y="3505200"/>
-            <a:ext cx="4191000" cy="1397000"/>
-          </a:xfrm>
-          <a:prstGeom prst="rect">
-            <a:avLst/>
-          </a:prstGeom>
-          <a:noFill/>
-          <a:ln/>
-        </p:spPr>
-        <p:txBody>
-          <a:bodyPr wrap="square" lIns="0" tIns="0" rIns="0" bIns="0" rtlCol="0" anchor="t"/>
-          <a:lstStyle/>
-          <a:p>
-            <a:pPr algn="l" indent="0" marL="0">
+              <a:t>3. Keep it narrow</a:t>
+            </a:r>
+            <a:endParaRPr lang="en-US" sz="2400" dirty="0"/>
+          </a:p>
+        </p:txBody>
+      </p:sp>
+      <p:sp>
+        <p:nvSpPr>
+          <p:cNvPr id="14" name="p3-body"/>
+          <p:cNvSpPr/>
+          <p:nvPr/>
+        </p:nvSpPr>
+        <p:spPr>
+          <a:xfrm>
+            <a:off x="11226800" y="3429000"/>
+            <a:ext cx="4191000" cy="2971800"/>
+          </a:xfrm>
+          <a:prstGeom prst="rect">
+            <a:avLst/>
+          </a:prstGeom>
+          <a:noFill/>
+          <a:ln/>
+        </p:spPr>
+        <p:txBody>
+          <a:bodyPr wrap="square" lIns="0" tIns="0" rIns="0" bIns="0" rtlCol="0" anchor="t"/>
+          <a:lstStyle/>
+          <a:p>
+            <a:pPr algn="l" marL="301625" indent="-301625">
               <a:lnSpc>
-                <a:spcPts val="2688"/>
-              </a:lnSpc>
-              <a:buNone/>
-            </a:pPr>
-            <a:r>
-              <a:rPr lang="en-US" altLang="en-US" sz="2100" dirty="0">
-                <a:solidFill>
-                  <a:srgbClr val="3C4043"/>
-                </a:solidFill>
-                <a:latin typeface="Inter" pitchFamily="34" charset="0"/>
-                <a:ea typeface="Inter" pitchFamily="34" charset="-122"/>
-                <a:cs typeface="Inter" pitchFamily="34" charset="-120"/>
-              </a:rPr>
-              <a:t>Ask for one specific revision students can complete on their own.</a:t>
-            </a:r>
-            <a:endParaRPr lang="en-US" sz="2100" dirty="0"/>
-          </a:p>
-        </p:txBody>
-      </p:sp>
-      <p:sp>
-        <p:nvSpPr>
-          <p:cNvPr id="17" name="p3-ex"/>
-          <p:cNvSpPr/>
-          <p:nvPr/>
-        </p:nvSpPr>
-        <p:spPr>
-          <a:xfrm>
-            <a:off x="11226800" y="5130800"/>
-            <a:ext cx="4191000" cy="1219200"/>
-          </a:xfrm>
-          <a:prstGeom prst="rect">
-            <a:avLst/>
-          </a:prstGeom>
-          <a:noFill/>
-          <a:ln/>
-        </p:spPr>
-        <p:txBody>
-          <a:bodyPr wrap="square" lIns="0" tIns="0" rIns="0" bIns="0" rtlCol="0" anchor="t"/>
-          <a:lstStyle/>
-          <a:p>
-            <a:pPr algn="l" indent="0" marL="0">
-              <a:lnSpc>
-                <a:spcPts val="2356"/>
-              </a:lnSpc>
-              <a:buNone/>
-            </a:pPr>
-            <a:r>
-              <a:rPr lang="en-US" altLang="en-US" sz="1900" b="1" dirty="0">
-                <a:solidFill>
-                  <a:srgbClr val="C41220"/>
-                </a:solidFill>
-                <a:latin typeface="Inter" pitchFamily="34" charset="0"/>
-                <a:ea typeface="Inter" pitchFamily="34" charset="-122"/>
-                <a:cs typeface="Inter" pitchFamily="34" charset="-120"/>
-              </a:rPr>
-              <a:t>Example:</a:t>
-            </a:r>
-            <a:endParaRPr lang="en-US" sz="1900" dirty="0"/>
-          </a:p>
-          <a:p>
-            <a:pPr algn="l" indent="0" marL="0">
-              <a:lnSpc>
-                <a:spcPts val="2356"/>
+                <a:spcPts val="2394"/>
               </a:lnSpc>
               <a:spcBef>
-                <a:spcPts val="600"/>
+                <a:spcPts val="10"/>
               </a:spcBef>
-              <a:buNone/>
+              <a:buSzPct val="100000"/>
+              <a:buChar char="•"/>
             </a:pPr>
             <a:r>
               <a:rPr lang="en-US" altLang="en-US" sz="1900" dirty="0">
                 <a:solidFill>
-                  <a:srgbClr val="C41220"/>
-                </a:solidFill>
-                <a:latin typeface="Inter" pitchFamily="34" charset="0"/>
-                <a:ea typeface="Inter" pitchFamily="34" charset="-122"/>
-                <a:cs typeface="Inter" pitchFamily="34" charset="-120"/>
-              </a:rPr>
-              <a:t>“Then revise your reasoning to explain how that evidence supports your prediction.”</a:t>
+                  <a:srgbClr val="3C4043"/>
+                </a:solidFill>
+                <a:latin typeface="Inter" pitchFamily="34" charset="0"/>
+                <a:ea typeface="Inter" pitchFamily="34" charset="-122"/>
+                <a:cs typeface="Inter" pitchFamily="34" charset="-120"/>
+              </a:rPr>
+              <a:t>One need only — not a list</a:t>
             </a:r>
             <a:endParaRPr lang="en-US" sz="1900" dirty="0"/>
           </a:p>
-        </p:txBody>
-      </p:sp>
-      <p:sp>
-        <p:nvSpPr>
-          <p:cNvPr id="18" name="pattern-shape-17"/>
+          <a:p>
+            <a:pPr algn="l" marL="301625" indent="-301625">
+              <a:lnSpc>
+                <a:spcPts val="2394"/>
+              </a:lnSpc>
+              <a:spcBef>
+                <a:spcPts val="10"/>
+              </a:spcBef>
+              <a:buSzPct val="100000"/>
+              <a:buChar char="•"/>
+            </a:pPr>
+            <a:r>
+              <a:rPr lang="en-US" altLang="en-US" sz="1900" dirty="0">
+                <a:solidFill>
+                  <a:srgbClr val="3C4043"/>
+                </a:solidFill>
+                <a:latin typeface="Inter" pitchFamily="34" charset="0"/>
+                <a:ea typeface="Inter" pitchFamily="34" charset="-122"/>
+                <a:cs typeface="Inter" pitchFamily="34" charset="-120"/>
+              </a:rPr>
+              <a:t>Criterion-based, not general</a:t>
+            </a:r>
+            <a:endParaRPr lang="en-US" sz="1900" dirty="0"/>
+          </a:p>
+          <a:p>
+            <a:pPr algn="l" marL="301625" indent="-301625">
+              <a:lnSpc>
+                <a:spcPts val="2394"/>
+              </a:lnSpc>
+              <a:spcBef>
+                <a:spcPts val="10"/>
+              </a:spcBef>
+              <a:buSzPct val="100000"/>
+              <a:buChar char="•"/>
+            </a:pPr>
+            <a:r>
+              <a:rPr lang="en-US" altLang="en-US" sz="1900" dirty="0">
+                <a:solidFill>
+                  <a:srgbClr val="3C4043"/>
+                </a:solidFill>
+                <a:latin typeface="Inter" pitchFamily="34" charset="0"/>
+                <a:ea typeface="Inter" pitchFamily="34" charset="-122"/>
+                <a:cs typeface="Inter" pitchFamily="34" charset="-120"/>
+              </a:rPr>
+              <a:t>Fixable in one revision</a:t>
+            </a:r>
+            <a:endParaRPr lang="en-US" sz="1900" dirty="0"/>
+          </a:p>
+          <a:p>
+            <a:pPr algn="l" marL="301625" indent="-301625">
+              <a:lnSpc>
+                <a:spcPts val="2394"/>
+              </a:lnSpc>
+              <a:spcBef>
+                <a:spcPts val="10"/>
+              </a:spcBef>
+              <a:buSzPct val="100000"/>
+              <a:buChar char="•"/>
+            </a:pPr>
+            <a:r>
+              <a:rPr lang="en-US" altLang="en-US" sz="1900" dirty="0">
+                <a:solidFill>
+                  <a:srgbClr val="3C4043"/>
+                </a:solidFill>
+                <a:latin typeface="Inter" pitchFamily="34" charset="0"/>
+                <a:ea typeface="Inter" pitchFamily="34" charset="-122"/>
+                <a:cs typeface="Inter" pitchFamily="34" charset="-120"/>
+              </a:rPr>
+              <a:t>Not a broad reteach plan</a:t>
+            </a:r>
+            <a:endParaRPr lang="en-US" sz="1900" dirty="0"/>
+          </a:p>
+          <a:p>
+            <a:pPr algn="l" marL="301625" indent="-301625">
+              <a:lnSpc>
+                <a:spcPts val="2394"/>
+              </a:lnSpc>
+              <a:spcBef>
+                <a:spcPts val="10"/>
+              </a:spcBef>
+              <a:buSzPct val="100000"/>
+              <a:buChar char="•"/>
+            </a:pPr>
+            <a:r>
+              <a:rPr lang="en-US" altLang="en-US" sz="1900" dirty="0">
+                <a:solidFill>
+                  <a:srgbClr val="3C4043"/>
+                </a:solidFill>
+                <a:latin typeface="Inter" pitchFamily="34" charset="0"/>
+                <a:ea typeface="Inter" pitchFamily="34" charset="-122"/>
+                <a:cs typeface="Inter" pitchFamily="34" charset="-120"/>
+              </a:rPr>
+              <a:t>Shape it with what you know about your students</a:t>
+            </a:r>
+            <a:endParaRPr lang="en-US" sz="1900" dirty="0"/>
+          </a:p>
+        </p:txBody>
+      </p:sp>
+      <p:sp>
+        <p:nvSpPr>
+          <p:cNvPr id="15" name="pattern-shape-14"/>
           <p:cNvSpPr/>
           <p:nvPr/>
         </p:nvSpPr>
@@ -4797,7 +5218,7 @@
       </p:sp>
       <p:sp>
         <p:nvSpPr>
-          <p:cNvPr id="19" name="check"/>
+          <p:cNvPr id="16" name="check"/>
           <p:cNvSpPr/>
           <p:nvPr/>
         </p:nvSpPr>
@@ -4839,7 +5260,7 @@
                 <a:ea typeface="Inter" pitchFamily="34" charset="-122"/>
                 <a:cs typeface="Inter" pitchFamily="34" charset="-120"/>
               </a:rPr>
-              <a:t> can the student act on this comment without asking what to do?</a:t>
+              <a:t> can the need be pointed to in the rubric and seen in the student writing?</a:t>
             </a:r>
             <a:endParaRPr lang="en-US" sz="2000" dirty="0"/>
           </a:p>
@@ -4847,7 +5268,7 @@
       </p:sp>
       <p:sp>
         <p:nvSpPr>
-          <p:cNvPr id="20" name="page"/>
+          <p:cNvPr id="17" name="page"/>
           <p:cNvSpPr/>
           <p:nvPr/>
         </p:nvSpPr>
@@ -4886,7 +5307,7 @@
       </p:sp>
       <p:sp>
         <p:nvSpPr>
-          <p:cNvPr id="21" name="pattern-shape-20"/>
+          <p:cNvPr id="18" name="pattern-shape-17"/>
           <p:cNvSpPr/>
           <p:nvPr/>
         </p:nvSpPr>
@@ -4989,7 +5410,7 @@
                 <a:ea typeface="Inter" pitchFamily="34" charset="-122"/>
                 <a:cs typeface="Inter" pitchFamily="34" charset="-120"/>
               </a:rPr>
-              <a:t>Step 4: Plan the Next Step</a:t>
+              <a:t>Step 4: Write Feedback Students Can Use</a:t>
             </a:r>
             <a:endParaRPr lang="en-US" sz="3000" dirty="0"/>
           </a:p>
@@ -5028,7 +5449,7 @@
                 <a:ea typeface="Inter" pitchFamily="34" charset="-122"/>
                 <a:cs typeface="Inter" pitchFamily="34" charset="-120"/>
               </a:rPr>
-              <a:t>30:00–41:00  •  11 MIN</a:t>
+              <a:t>30–37 MIN  •  7 MIN</a:t>
             </a:r>
             <a:endParaRPr lang="en-US" sz="1600" dirty="0"/>
           </a:p>
@@ -5043,23 +5464,23 @@
         <p:spPr>
           <a:xfrm>
             <a:off x="508000" y="1320800"/>
-            <a:ext cx="15240000" cy="635000"/>
-          </a:xfrm>
-          <a:prstGeom prst="rect">
-            <a:avLst/>
-          </a:prstGeom>
-          <a:noFill/>
-          <a:ln/>
-        </p:spPr>
-        <p:txBody>
-          <a:bodyPr wrap="square" lIns="0" tIns="0" rIns="0" bIns="0" rtlCol="0" anchor="t"/>
-          <a:lstStyle/>
-          <a:p>
-            <a:pPr algn="l" indent="0" marL="0">
-              <a:buNone/>
-            </a:pPr>
-            <a:r>
-              <a:rPr lang="en-US" altLang="en-US" sz="2300" dirty="0">
+            <a:ext cx="15240000" cy="685800"/>
+          </a:xfrm>
+          <a:prstGeom prst="rect">
+            <a:avLst/>
+          </a:prstGeom>
+          <a:noFill/>
+          <a:ln/>
+        </p:spPr>
+        <p:txBody>
+          <a:bodyPr wrap="square" lIns="0" tIns="0" rIns="0" bIns="0" rtlCol="0" anchor="t"/>
+          <a:lstStyle/>
+          <a:p>
+            <a:pPr algn="l" indent="0" marL="0">
+              <a:buNone/>
+            </a:pPr>
+            <a:r>
+              <a:rPr lang="en-US" altLang="en-US" sz="2200" dirty="0">
                 <a:solidFill>
                   <a:srgbClr val="3C4043"/>
                 </a:solidFill>
@@ -5067,9 +5488,9 @@
                 <a:ea typeface="Inter" pitchFamily="34" charset="-122"/>
                 <a:cs typeface="Inter" pitchFamily="34" charset="-120"/>
               </a:rPr>
-              <a:t>Choose one action for each column. Keep the response short and tied to the same standard.</a:t>
-            </a:r>
-            <a:endParaRPr lang="en-US" sz="2300" dirty="0"/>
+              <a:t>Write one short comment on the sample. It should send the student back to the rubric and back to their own writing.</a:t>
+            </a:r>
+            <a:endParaRPr lang="en-US" sz="2200" dirty="0"/>
           </a:p>
         </p:txBody>
       </p:sp>
@@ -5081,8 +5502,8 @@
         </p:nvSpPr>
         <p:spPr>
           <a:xfrm>
-            <a:off x="508000" y="2260600"/>
-            <a:ext cx="4902200" cy="4191000"/>
+            <a:off x="508000" y="2286000"/>
+            <a:ext cx="4902200" cy="4318000"/>
           </a:xfrm>
           <a:prstGeom prst="rect">
             <a:avLst/>
@@ -5123,7 +5544,7 @@
               <a:buNone/>
             </a:pPr>
             <a:r>
-              <a:rPr lang="en-US" altLang="en-US" sz="2500" dirty="0">
+              <a:rPr lang="en-US" altLang="en-US" sz="2400" dirty="0">
                 <a:solidFill>
                   <a:srgbClr val="202124"/>
                 </a:solidFill>
@@ -5131,9 +5552,9 @@
                 <a:ea typeface="Inter" pitchFamily="34" charset="-122"/>
                 <a:cs typeface="Inter" pitchFamily="34" charset="-120"/>
               </a:rPr>
-              <a:t>Students will…</a:t>
-            </a:r>
-            <a:endParaRPr lang="en-US" sz="2500" dirty="0"/>
+              <a:t>1. Name the criterion</a:t>
+            </a:r>
+            <a:endParaRPr lang="en-US" sz="2400" dirty="0"/>
           </a:p>
         </p:txBody>
       </p:sp>
@@ -5145,126 +5566,115 @@
         </p:nvSpPr>
         <p:spPr>
           <a:xfrm>
-            <a:off x="889000" y="3403600"/>
-            <a:ext cx="4191000" cy="2794000"/>
-          </a:xfrm>
-          <a:prstGeom prst="rect">
-            <a:avLst/>
-          </a:prstGeom>
-          <a:noFill/>
-          <a:ln/>
-        </p:spPr>
-        <p:txBody>
-          <a:bodyPr wrap="square" lIns="0" tIns="0" rIns="0" bIns="0" rtlCol="0" anchor="t"/>
-          <a:lstStyle/>
-          <a:p>
-            <a:pPr algn="l" marL="333375" indent="-333375">
+            <a:off x="889000" y="3378200"/>
+            <a:ext cx="4191000" cy="1346200"/>
+          </a:xfrm>
+          <a:prstGeom prst="rect">
+            <a:avLst/>
+          </a:prstGeom>
+          <a:noFill/>
+          <a:ln/>
+        </p:spPr>
+        <p:txBody>
+          <a:bodyPr wrap="square" lIns="0" tIns="0" rIns="0" bIns="0" rtlCol="0" anchor="t"/>
+          <a:lstStyle/>
+          <a:p>
+            <a:pPr algn="l" indent="0" marL="0">
               <a:lnSpc>
-                <a:spcPts val="2730"/>
+                <a:spcPts val="2520"/>
+              </a:lnSpc>
+              <a:buNone/>
+            </a:pPr>
+            <a:r>
+              <a:rPr lang="en-US" altLang="en-US" sz="2000" dirty="0">
+                <a:solidFill>
+                  <a:srgbClr val="3C4043"/>
+                </a:solidFill>
+                <a:latin typeface="Inter" pitchFamily="34" charset="0"/>
+                <a:ea typeface="Inter" pitchFamily="34" charset="-122"/>
+                <a:cs typeface="Inter" pitchFamily="34" charset="-120"/>
+              </a:rPr>
+              <a:t>Say which rubric criterion the comment is about.</a:t>
+            </a:r>
+            <a:endParaRPr lang="en-US" sz="2000" dirty="0"/>
+          </a:p>
+        </p:txBody>
+      </p:sp>
+      <p:sp>
+        <p:nvSpPr>
+          <p:cNvPr id="9" name="n1-ex"/>
+          <p:cNvSpPr/>
+          <p:nvPr/>
+        </p:nvSpPr>
+        <p:spPr>
+          <a:xfrm>
+            <a:off x="889000" y="4851400"/>
+            <a:ext cx="4191000" cy="1524000"/>
+          </a:xfrm>
+          <a:prstGeom prst="rect">
+            <a:avLst/>
+          </a:prstGeom>
+          <a:noFill/>
+          <a:ln/>
+        </p:spPr>
+        <p:txBody>
+          <a:bodyPr wrap="square" lIns="0" tIns="0" rIns="0" bIns="0" rtlCol="0" anchor="t"/>
+          <a:lstStyle/>
+          <a:p>
+            <a:pPr algn="l" indent="0" marL="0">
+              <a:lnSpc>
+                <a:spcPts val="2356"/>
+              </a:lnSpc>
+              <a:buNone/>
+            </a:pPr>
+            <a:r>
+              <a:rPr lang="en-US" altLang="en-US" sz="1900" b="1" dirty="0">
+                <a:solidFill>
+                  <a:srgbClr val="C41220"/>
+                </a:solidFill>
+                <a:latin typeface="Inter" pitchFamily="34" charset="0"/>
+                <a:ea typeface="Inter" pitchFamily="34" charset="-122"/>
+                <a:cs typeface="Inter" pitchFamily="34" charset="-120"/>
+              </a:rPr>
+              <a:t>Example:</a:t>
+            </a:r>
+            <a:endParaRPr lang="en-US" sz="1900" dirty="0"/>
+          </a:p>
+          <a:p>
+            <a:pPr algn="l" indent="0" marL="0">
+              <a:lnSpc>
+                <a:spcPts val="2356"/>
               </a:lnSpc>
               <a:spcBef>
-                <a:spcPts val="10"/>
+                <a:spcPts val="600"/>
               </a:spcBef>
-              <a:buSzPct val="100000"/>
-              <a:buChar char="•"/>
-            </a:pPr>
-            <a:r>
-              <a:rPr lang="en-US" altLang="en-US" sz="2100" dirty="0">
-                <a:solidFill>
-                  <a:srgbClr val="3C4043"/>
-                </a:solidFill>
-                <a:latin typeface="Inter" pitchFamily="34" charset="0"/>
-                <a:ea typeface="Inter" pitchFamily="34" charset="-122"/>
-                <a:cs typeface="Inter" pitchFamily="34" charset="-120"/>
-              </a:rPr>
-              <a:t>Revise one reasoning sentence</a:t>
-            </a:r>
-            <a:endParaRPr lang="en-US" sz="2100" dirty="0"/>
-          </a:p>
-          <a:p>
-            <a:pPr algn="l" marL="333375" indent="-333375">
-              <a:lnSpc>
-                <a:spcPts val="2730"/>
-              </a:lnSpc>
-              <a:spcBef>
-                <a:spcPts val="10"/>
-              </a:spcBef>
-              <a:buSzPct val="100000"/>
-              <a:buChar char="•"/>
-            </a:pPr>
-            <a:r>
-              <a:rPr lang="en-US" altLang="en-US" sz="2100" dirty="0">
-                <a:solidFill>
-                  <a:srgbClr val="3C4043"/>
-                </a:solidFill>
-                <a:latin typeface="Inter" pitchFamily="34" charset="0"/>
-                <a:ea typeface="Inter" pitchFamily="34" charset="-122"/>
-                <a:cs typeface="Inter" pitchFamily="34" charset="-120"/>
-              </a:rPr>
-              <a:t>Add or correct evidence</a:t>
-            </a:r>
-            <a:endParaRPr lang="en-US" sz="2100" dirty="0"/>
-          </a:p>
-          <a:p>
-            <a:pPr algn="l" marL="333375" indent="-333375">
-              <a:lnSpc>
-                <a:spcPts val="2730"/>
-              </a:lnSpc>
-              <a:spcBef>
-                <a:spcPts val="10"/>
-              </a:spcBef>
-              <a:buSzPct val="100000"/>
-              <a:buChar char="•"/>
-            </a:pPr>
-            <a:r>
-              <a:rPr lang="en-US" altLang="en-US" sz="2100" dirty="0">
-                <a:solidFill>
-                  <a:srgbClr val="3C4043"/>
-                </a:solidFill>
-                <a:latin typeface="Inter" pitchFamily="34" charset="0"/>
-                <a:ea typeface="Inter" pitchFamily="34" charset="-122"/>
-                <a:cs typeface="Inter" pitchFamily="34" charset="-120"/>
-              </a:rPr>
-              <a:t>Compare their response to a model</a:t>
-            </a:r>
-            <a:endParaRPr lang="en-US" sz="2100" dirty="0"/>
-          </a:p>
-          <a:p>
-            <a:pPr algn="l" marL="333375" indent="-333375">
-              <a:lnSpc>
-                <a:spcPts val="2730"/>
-              </a:lnSpc>
-              <a:spcBef>
-                <a:spcPts val="10"/>
-              </a:spcBef>
-              <a:buSzPct val="100000"/>
-              <a:buChar char="•"/>
-            </a:pPr>
-            <a:r>
-              <a:rPr lang="en-US" altLang="en-US" sz="2100" dirty="0">
-                <a:solidFill>
-                  <a:srgbClr val="3C4043"/>
-                </a:solidFill>
-                <a:latin typeface="Inter" pitchFamily="34" charset="0"/>
-                <a:ea typeface="Inter" pitchFamily="34" charset="-122"/>
-                <a:cs typeface="Inter" pitchFamily="34" charset="-120"/>
-              </a:rPr>
-              <a:t>Clarify science vocabulary</a:t>
-            </a:r>
-            <a:endParaRPr lang="en-US" sz="2100" dirty="0"/>
-          </a:p>
-        </p:txBody>
-      </p:sp>
-      <p:sp>
-        <p:nvSpPr>
-          <p:cNvPr id="9" name="next-shape-8"/>
-          <p:cNvSpPr/>
-          <p:nvPr/>
-        </p:nvSpPr>
-        <p:spPr>
-          <a:xfrm>
-            <a:off x="5676900" y="2260600"/>
-            <a:ext cx="4902200" cy="4191000"/>
+              <a:buNone/>
+            </a:pPr>
+            <a:r>
+              <a:rPr lang="en-US" altLang="en-US" sz="1900" dirty="0">
+                <a:solidFill>
+                  <a:srgbClr val="C41220"/>
+                </a:solidFill>
+                <a:latin typeface="Inter" pitchFamily="34" charset="0"/>
+                <a:ea typeface="Inter" pitchFamily="34" charset="-122"/>
+                <a:cs typeface="Inter" pitchFamily="34" charset="-120"/>
+              </a:rPr>
+              <a:t>“This is your claim, and it is clear.”</a:t>
+            </a:r>
+            <a:endParaRPr lang="en-US" sz="1900" dirty="0"/>
+          </a:p>
+        </p:txBody>
+      </p:sp>
+      <p:sp>
+        <p:nvSpPr>
+          <p:cNvPr id="10" name="next-shape-9"/>
+          <p:cNvSpPr/>
+          <p:nvPr/>
+        </p:nvSpPr>
+        <p:spPr>
+          <a:xfrm>
+            <a:off x="5676900" y="2286000"/>
+            <a:ext cx="4902200" cy="4318000"/>
           </a:xfrm>
           <a:prstGeom prst="rect">
             <a:avLst/>
@@ -5282,7 +5692,7 @@
       </p:sp>
       <p:sp>
         <p:nvSpPr>
-          <p:cNvPr id="10" name="n2-title"/>
+          <p:cNvPr id="11" name="n2-title"/>
           <p:cNvSpPr/>
           <p:nvPr/>
         </p:nvSpPr>
@@ -5305,7 +5715,7 @@
               <a:buNone/>
             </a:pPr>
             <a:r>
-              <a:rPr lang="en-US" altLang="en-US" sz="2500" dirty="0">
+              <a:rPr lang="en-US" altLang="en-US" sz="2400" dirty="0">
                 <a:solidFill>
                   <a:srgbClr val="202124"/>
                 </a:solidFill>
@@ -5313,140 +5723,129 @@
                 <a:ea typeface="Inter" pitchFamily="34" charset="-122"/>
                 <a:cs typeface="Inter" pitchFamily="34" charset="-120"/>
               </a:rPr>
-              <a:t>The teacher will…</a:t>
-            </a:r>
-            <a:endParaRPr lang="en-US" sz="2500" dirty="0"/>
-          </a:p>
-        </p:txBody>
-      </p:sp>
-      <p:sp>
-        <p:nvSpPr>
-          <p:cNvPr id="11" name="n2-body"/>
-          <p:cNvSpPr/>
-          <p:nvPr/>
-        </p:nvSpPr>
-        <p:spPr>
-          <a:xfrm>
-            <a:off x="6057900" y="3403600"/>
-            <a:ext cx="4191000" cy="2794000"/>
-          </a:xfrm>
-          <a:prstGeom prst="rect">
-            <a:avLst/>
-          </a:prstGeom>
-          <a:noFill/>
-          <a:ln/>
-        </p:spPr>
-        <p:txBody>
-          <a:bodyPr wrap="square" lIns="0" tIns="0" rIns="0" bIns="0" rtlCol="0" anchor="t"/>
-          <a:lstStyle/>
-          <a:p>
-            <a:pPr algn="l" marL="333375" indent="-333375">
+              <a:t>2. Point to their work</a:t>
+            </a:r>
+            <a:endParaRPr lang="en-US" sz="2400" dirty="0"/>
+          </a:p>
+        </p:txBody>
+      </p:sp>
+      <p:sp>
+        <p:nvSpPr>
+          <p:cNvPr id="12" name="n2-body"/>
+          <p:cNvSpPr/>
+          <p:nvPr/>
+        </p:nvSpPr>
+        <p:spPr>
+          <a:xfrm>
+            <a:off x="6057900" y="3378200"/>
+            <a:ext cx="4191000" cy="1346200"/>
+          </a:xfrm>
+          <a:prstGeom prst="rect">
+            <a:avLst/>
+          </a:prstGeom>
+          <a:noFill/>
+          <a:ln/>
+        </p:spPr>
+        <p:txBody>
+          <a:bodyPr wrap="square" lIns="0" tIns="0" rIns="0" bIns="0" rtlCol="0" anchor="t"/>
+          <a:lstStyle/>
+          <a:p>
+            <a:pPr algn="l" indent="0" marL="0">
               <a:lnSpc>
-                <a:spcPts val="2730"/>
+                <a:spcPts val="2520"/>
+              </a:lnSpc>
+              <a:buNone/>
+            </a:pPr>
+            <a:r>
+              <a:rPr lang="en-US" altLang="en-US" sz="2000" dirty="0">
+                <a:solidFill>
+                  <a:srgbClr val="3C4043"/>
+                </a:solidFill>
+                <a:latin typeface="Inter" pitchFamily="34" charset="0"/>
+                <a:ea typeface="Inter" pitchFamily="34" charset="-122"/>
+                <a:cs typeface="Inter" pitchFamily="34" charset="-120"/>
+              </a:rPr>
+              <a:t>Quote or point to the student's own words, graph detail, or food-web arrow.</a:t>
+            </a:r>
+            <a:endParaRPr lang="en-US" sz="2000" dirty="0"/>
+          </a:p>
+        </p:txBody>
+      </p:sp>
+      <p:sp>
+        <p:nvSpPr>
+          <p:cNvPr id="13" name="n2-ex"/>
+          <p:cNvSpPr/>
+          <p:nvPr/>
+        </p:nvSpPr>
+        <p:spPr>
+          <a:xfrm>
+            <a:off x="6057900" y="4851400"/>
+            <a:ext cx="4191000" cy="1524000"/>
+          </a:xfrm>
+          <a:prstGeom prst="rect">
+            <a:avLst/>
+          </a:prstGeom>
+          <a:noFill/>
+          <a:ln/>
+        </p:spPr>
+        <p:txBody>
+          <a:bodyPr wrap="square" lIns="0" tIns="0" rIns="0" bIns="0" rtlCol="0" anchor="t"/>
+          <a:lstStyle/>
+          <a:p>
+            <a:pPr algn="l" indent="0" marL="0">
+              <a:lnSpc>
+                <a:spcPts val="2356"/>
+              </a:lnSpc>
+              <a:buNone/>
+            </a:pPr>
+            <a:r>
+              <a:rPr lang="en-US" altLang="en-US" sz="1900" b="1" dirty="0">
+                <a:solidFill>
+                  <a:srgbClr val="C41220"/>
+                </a:solidFill>
+                <a:latin typeface="Inter" pitchFamily="34" charset="0"/>
+                <a:ea typeface="Inter" pitchFamily="34" charset="-122"/>
+                <a:cs typeface="Inter" pitchFamily="34" charset="-120"/>
+              </a:rPr>
+              <a:t>Example:</a:t>
+            </a:r>
+            <a:endParaRPr lang="en-US" sz="1900" dirty="0"/>
+          </a:p>
+          <a:p>
+            <a:pPr algn="l" indent="0" marL="0">
+              <a:lnSpc>
+                <a:spcPts val="2356"/>
               </a:lnSpc>
               <a:spcBef>
-                <a:spcPts val="10"/>
+                <a:spcPts val="600"/>
               </a:spcBef>
-              <a:buSzPct val="100000"/>
-              <a:buChar char="•"/>
-            </a:pPr>
-            <a:r>
-              <a:rPr lang="en-US" altLang="en-US" sz="2100" dirty="0">
-                <a:solidFill>
-                  <a:srgbClr val="3C4043"/>
-                </a:solidFill>
-                <a:latin typeface="Inter" pitchFamily="34" charset="0"/>
-                <a:ea typeface="Inter" pitchFamily="34" charset="-122"/>
-                <a:cs typeface="Inter" pitchFamily="34" charset="-120"/>
-              </a:rPr>
-              <a:t>Return the written comment</a:t>
-            </a:r>
-            <a:endParaRPr lang="en-US" sz="2100" dirty="0"/>
-          </a:p>
-          <a:p>
-            <a:pPr algn="l" marL="333375" indent="-333375">
-              <a:lnSpc>
-                <a:spcPts val="2730"/>
-              </a:lnSpc>
-              <a:spcBef>
-                <a:spcPts val="10"/>
-              </a:spcBef>
-              <a:buSzPct val="100000"/>
-              <a:buChar char="•"/>
-            </a:pPr>
-            <a:r>
-              <a:rPr lang="en-US" altLang="en-US" sz="2100" dirty="0">
-                <a:solidFill>
-                  <a:srgbClr val="3C4043"/>
-                </a:solidFill>
-                <a:latin typeface="Inter" pitchFamily="34" charset="0"/>
-                <a:ea typeface="Inter" pitchFamily="34" charset="-122"/>
-                <a:cs typeface="Inter" pitchFamily="34" charset="-120"/>
-              </a:rPr>
-              <a:t>Hold a short conference</a:t>
-            </a:r>
-            <a:endParaRPr lang="en-US" sz="2100" dirty="0"/>
-          </a:p>
-          <a:p>
-            <a:pPr algn="l" marL="333375" indent="-333375">
-              <a:lnSpc>
-                <a:spcPts val="2730"/>
-              </a:lnSpc>
-              <a:spcBef>
-                <a:spcPts val="10"/>
-              </a:spcBef>
-              <a:buSzPct val="100000"/>
-              <a:buChar char="•"/>
-            </a:pPr>
-            <a:r>
-              <a:rPr lang="en-US" altLang="en-US" sz="2100" dirty="0">
-                <a:solidFill>
-                  <a:srgbClr val="3C4043"/>
-                </a:solidFill>
-                <a:latin typeface="Inter" pitchFamily="34" charset="0"/>
-                <a:ea typeface="Inter" pitchFamily="34" charset="-122"/>
-                <a:cs typeface="Inter" pitchFamily="34" charset="-120"/>
-              </a:rPr>
-              <a:t>Re-read a focused passage or model</a:t>
-            </a:r>
-            <a:endParaRPr lang="en-US" sz="2100" dirty="0"/>
-          </a:p>
-          <a:p>
-            <a:pPr algn="l" marL="333375" indent="-333375">
-              <a:lnSpc>
-                <a:spcPts val="2730"/>
-              </a:lnSpc>
-              <a:spcBef>
-                <a:spcPts val="10"/>
-              </a:spcBef>
-              <a:buSzPct val="100000"/>
-              <a:buChar char="•"/>
-            </a:pPr>
-            <a:r>
-              <a:rPr lang="en-US" altLang="en-US" sz="2100" dirty="0">
-                <a:solidFill>
-                  <a:srgbClr val="3C4043"/>
-                </a:solidFill>
-                <a:latin typeface="Inter" pitchFamily="34" charset="0"/>
-                <a:ea typeface="Inter" pitchFamily="34" charset="-122"/>
-                <a:cs typeface="Inter" pitchFamily="34" charset="-120"/>
-              </a:rPr>
-              <a:t>Re-teach one reasoning move</a:t>
-            </a:r>
-            <a:endParaRPr lang="en-US" sz="2100" dirty="0"/>
-          </a:p>
-        </p:txBody>
-      </p:sp>
-      <p:sp>
-        <p:nvSpPr>
-          <p:cNvPr id="12" name="next-shape-11"/>
-          <p:cNvSpPr/>
-          <p:nvPr/>
-        </p:nvSpPr>
-        <p:spPr>
-          <a:xfrm>
-            <a:off x="10845800" y="2260600"/>
-            <a:ext cx="4902200" cy="4191000"/>
+              <a:buNone/>
+            </a:pPr>
+            <a:r>
+              <a:rPr lang="en-US" altLang="en-US" sz="1900" dirty="0">
+                <a:solidFill>
+                  <a:srgbClr val="C41220"/>
+                </a:solidFill>
+                <a:latin typeface="Inter" pitchFamily="34" charset="0"/>
+                <a:ea typeface="Inter" pitchFamily="34" charset="-122"/>
+                <a:cs typeface="Inter" pitchFamily="34" charset="-120"/>
+              </a:rPr>
+              <a:t>“You wrote that frogs eat fruit flies.”</a:t>
+            </a:r>
+            <a:endParaRPr lang="en-US" sz="1900" dirty="0"/>
+          </a:p>
+        </p:txBody>
+      </p:sp>
+      <p:sp>
+        <p:nvSpPr>
+          <p:cNvPr id="14" name="next-shape-13"/>
+          <p:cNvSpPr/>
+          <p:nvPr/>
+        </p:nvSpPr>
+        <p:spPr>
+          <a:xfrm>
+            <a:off x="10845800" y="2286000"/>
+            <a:ext cx="4902200" cy="4318000"/>
           </a:xfrm>
           <a:prstGeom prst="rect">
             <a:avLst/>
@@ -5464,7 +5863,7 @@
       </p:sp>
       <p:sp>
         <p:nvSpPr>
-          <p:cNvPr id="13" name="n3-title"/>
+          <p:cNvPr id="15" name="n3-title"/>
           <p:cNvSpPr/>
           <p:nvPr/>
         </p:nvSpPr>
@@ -5487,7 +5886,7 @@
               <a:buNone/>
             </a:pPr>
             <a:r>
-              <a:rPr lang="en-US" altLang="en-US" sz="2500" dirty="0">
+              <a:rPr lang="en-US" altLang="en-US" sz="2400" dirty="0">
                 <a:solidFill>
                   <a:srgbClr val="202124"/>
                 </a:solidFill>
@@ -5495,140 +5894,129 @@
                 <a:ea typeface="Inter" pitchFamily="34" charset="-122"/>
                 <a:cs typeface="Inter" pitchFamily="34" charset="-120"/>
               </a:rPr>
-              <a:t>Evidence will be…</a:t>
-            </a:r>
-            <a:endParaRPr lang="en-US" sz="2500" dirty="0"/>
-          </a:p>
-        </p:txBody>
-      </p:sp>
-      <p:sp>
-        <p:nvSpPr>
-          <p:cNvPr id="14" name="n3-body"/>
-          <p:cNvSpPr/>
-          <p:nvPr/>
-        </p:nvSpPr>
-        <p:spPr>
-          <a:xfrm>
-            <a:off x="11226800" y="3403600"/>
-            <a:ext cx="4191000" cy="2794000"/>
-          </a:xfrm>
-          <a:prstGeom prst="rect">
-            <a:avLst/>
-          </a:prstGeom>
-          <a:noFill/>
-          <a:ln/>
-        </p:spPr>
-        <p:txBody>
-          <a:bodyPr wrap="square" lIns="0" tIns="0" rIns="0" bIns="0" rtlCol="0" anchor="t"/>
-          <a:lstStyle/>
-          <a:p>
-            <a:pPr algn="l" marL="333375" indent="-333375">
+              <a:t>3. Ask for one revision</a:t>
+            </a:r>
+            <a:endParaRPr lang="en-US" sz="2400" dirty="0"/>
+          </a:p>
+        </p:txBody>
+      </p:sp>
+      <p:sp>
+        <p:nvSpPr>
+          <p:cNvPr id="16" name="n3-body"/>
+          <p:cNvSpPr/>
+          <p:nvPr/>
+        </p:nvSpPr>
+        <p:spPr>
+          <a:xfrm>
+            <a:off x="11226800" y="3378200"/>
+            <a:ext cx="4191000" cy="1346200"/>
+          </a:xfrm>
+          <a:prstGeom prst="rect">
+            <a:avLst/>
+          </a:prstGeom>
+          <a:noFill/>
+          <a:ln/>
+        </p:spPr>
+        <p:txBody>
+          <a:bodyPr wrap="square" lIns="0" tIns="0" rIns="0" bIns="0" rtlCol="0" anchor="t"/>
+          <a:lstStyle/>
+          <a:p>
+            <a:pPr algn="l" indent="0" marL="0">
               <a:lnSpc>
-                <a:spcPts val="2730"/>
+                <a:spcPts val="2520"/>
+              </a:lnSpc>
+              <a:buNone/>
+            </a:pPr>
+            <a:r>
+              <a:rPr lang="en-US" altLang="en-US" sz="2000" dirty="0">
+                <a:solidFill>
+                  <a:srgbClr val="3C4043"/>
+                </a:solidFill>
+                <a:latin typeface="Inter" pitchFamily="34" charset="0"/>
+                <a:ea typeface="Inter" pitchFamily="34" charset="-122"/>
+                <a:cs typeface="Inter" pitchFamily="34" charset="-120"/>
+              </a:rPr>
+              <a:t>Ask for one change the student can make. Do not give the answer or write it for them.</a:t>
+            </a:r>
+            <a:endParaRPr lang="en-US" sz="2000" dirty="0"/>
+          </a:p>
+        </p:txBody>
+      </p:sp>
+      <p:sp>
+        <p:nvSpPr>
+          <p:cNvPr id="17" name="n3-ex"/>
+          <p:cNvSpPr/>
+          <p:nvPr/>
+        </p:nvSpPr>
+        <p:spPr>
+          <a:xfrm>
+            <a:off x="11226800" y="4851400"/>
+            <a:ext cx="4191000" cy="1524000"/>
+          </a:xfrm>
+          <a:prstGeom prst="rect">
+            <a:avLst/>
+          </a:prstGeom>
+          <a:noFill/>
+          <a:ln/>
+        </p:spPr>
+        <p:txBody>
+          <a:bodyPr wrap="square" lIns="0" tIns="0" rIns="0" bIns="0" rtlCol="0" anchor="t"/>
+          <a:lstStyle/>
+          <a:p>
+            <a:pPr algn="l" indent="0" marL="0">
+              <a:lnSpc>
+                <a:spcPts val="2356"/>
+              </a:lnSpc>
+              <a:buNone/>
+            </a:pPr>
+            <a:r>
+              <a:rPr lang="en-US" altLang="en-US" sz="1900" b="1" dirty="0">
+                <a:solidFill>
+                  <a:srgbClr val="C41220"/>
+                </a:solidFill>
+                <a:latin typeface="Inter" pitchFamily="34" charset="0"/>
+                <a:ea typeface="Inter" pitchFamily="34" charset="-122"/>
+                <a:cs typeface="Inter" pitchFamily="34" charset="-120"/>
+              </a:rPr>
+              <a:t>Example:</a:t>
+            </a:r>
+            <a:endParaRPr lang="en-US" sz="1900" dirty="0"/>
+          </a:p>
+          <a:p>
+            <a:pPr algn="l" indent="0" marL="0">
+              <a:lnSpc>
+                <a:spcPts val="2356"/>
               </a:lnSpc>
               <a:spcBef>
-                <a:spcPts val="10"/>
+                <a:spcPts val="600"/>
               </a:spcBef>
-              <a:buSzPct val="100000"/>
-              <a:buChar char="•"/>
-            </a:pPr>
-            <a:r>
-              <a:rPr lang="en-US" altLang="en-US" sz="2100" dirty="0">
-                <a:solidFill>
-                  <a:srgbClr val="3C4043"/>
-                </a:solidFill>
-                <a:latin typeface="Inter" pitchFamily="34" charset="0"/>
-                <a:ea typeface="Inter" pitchFamily="34" charset="-122"/>
-                <a:cs typeface="Inter" pitchFamily="34" charset="-120"/>
-              </a:rPr>
-              <a:t>A revised response or sentence</a:t>
-            </a:r>
-            <a:endParaRPr lang="en-US" sz="2100" dirty="0"/>
-          </a:p>
-          <a:p>
-            <a:pPr algn="l" marL="333375" indent="-333375">
-              <a:lnSpc>
-                <a:spcPts val="2730"/>
-              </a:lnSpc>
-              <a:spcBef>
-                <a:spcPts val="10"/>
-              </a:spcBef>
-              <a:buSzPct val="100000"/>
-              <a:buChar char="•"/>
-            </a:pPr>
-            <a:r>
-              <a:rPr lang="en-US" altLang="en-US" sz="2100" dirty="0">
-                <a:solidFill>
-                  <a:srgbClr val="3C4043"/>
-                </a:solidFill>
-                <a:latin typeface="Inter" pitchFamily="34" charset="0"/>
-                <a:ea typeface="Inter" pitchFamily="34" charset="-122"/>
-                <a:cs typeface="Inter" pitchFamily="34" charset="-120"/>
-              </a:rPr>
-              <a:t>A short exit explanation</a:t>
-            </a:r>
-            <a:endParaRPr lang="en-US" sz="2100" dirty="0"/>
-          </a:p>
-          <a:p>
-            <a:pPr algn="l" marL="333375" indent="-333375">
-              <a:lnSpc>
-                <a:spcPts val="2730"/>
-              </a:lnSpc>
-              <a:spcBef>
-                <a:spcPts val="10"/>
-              </a:spcBef>
-              <a:buSzPct val="100000"/>
-              <a:buChar char="•"/>
-            </a:pPr>
-            <a:r>
-              <a:rPr lang="en-US" altLang="en-US" sz="2100" dirty="0">
-                <a:solidFill>
-                  <a:srgbClr val="3C4043"/>
-                </a:solidFill>
-                <a:latin typeface="Inter" pitchFamily="34" charset="0"/>
-                <a:ea typeface="Inter" pitchFamily="34" charset="-122"/>
-                <a:cs typeface="Inter" pitchFamily="34" charset="-120"/>
-              </a:rPr>
-              <a:t>A completed model or data analysis</a:t>
-            </a:r>
-            <a:endParaRPr lang="en-US" sz="2100" dirty="0"/>
-          </a:p>
-          <a:p>
-            <a:pPr algn="l" marL="333375" indent="-333375">
-              <a:lnSpc>
-                <a:spcPts val="2730"/>
-              </a:lnSpc>
-              <a:spcBef>
-                <a:spcPts val="10"/>
-              </a:spcBef>
-              <a:buSzPct val="100000"/>
-              <a:buChar char="•"/>
-            </a:pPr>
-            <a:r>
-              <a:rPr lang="en-US" altLang="en-US" sz="2100" dirty="0">
-                <a:solidFill>
-                  <a:srgbClr val="3C4043"/>
-                </a:solidFill>
-                <a:latin typeface="Inter" pitchFamily="34" charset="0"/>
-                <a:ea typeface="Inter" pitchFamily="34" charset="-122"/>
-                <a:cs typeface="Inter" pitchFamily="34" charset="-120"/>
-              </a:rPr>
-              <a:t>One warm-up or checkpoint item</a:t>
-            </a:r>
-            <a:endParaRPr lang="en-US" sz="2100" dirty="0"/>
-          </a:p>
-        </p:txBody>
-      </p:sp>
-      <p:sp>
-        <p:nvSpPr>
-          <p:cNvPr id="15" name="next-shape-14"/>
-          <p:cNvSpPr/>
-          <p:nvPr/>
-        </p:nvSpPr>
-        <p:spPr>
-          <a:xfrm>
-            <a:off x="508000" y="6858000"/>
-            <a:ext cx="15240000" cy="838200"/>
+              <a:buNone/>
+            </a:pPr>
+            <a:r>
+              <a:rPr lang="en-US" altLang="en-US" sz="1900" dirty="0">
+                <a:solidFill>
+                  <a:srgbClr val="C41220"/>
+                </a:solidFill>
+                <a:latin typeface="Inter" pitchFamily="34" charset="0"/>
+                <a:ea typeface="Inter" pitchFamily="34" charset="-122"/>
+                <a:cs typeface="Inter" pitchFamily="34" charset="-120"/>
+              </a:rPr>
+              <a:t>“Now explain how that makes the fruit-fly population drop.”</a:t>
+            </a:r>
+            <a:endParaRPr lang="en-US" sz="1900" dirty="0"/>
+          </a:p>
+        </p:txBody>
+      </p:sp>
+      <p:sp>
+        <p:nvSpPr>
+          <p:cNvPr id="18" name="next-shape-17"/>
+          <p:cNvSpPr/>
+          <p:nvPr/>
+        </p:nvSpPr>
+        <p:spPr>
+          <a:xfrm>
+            <a:off x="508000" y="6959600"/>
+            <a:ext cx="15240000" cy="736600"/>
           </a:xfrm>
           <a:prstGeom prst="rect">
             <a:avLst/>
@@ -5641,14 +6029,14 @@
       </p:sp>
       <p:sp>
         <p:nvSpPr>
-          <p:cNvPr id="16" name="commit"/>
-          <p:cNvSpPr/>
-          <p:nvPr/>
-        </p:nvSpPr>
-        <p:spPr>
-          <a:xfrm>
-            <a:off x="812800" y="7137400"/>
-            <a:ext cx="14605000" cy="330200"/>
+          <p:cNvPr id="19" name="check"/>
+          <p:cNvSpPr/>
+          <p:nvPr/>
+        </p:nvSpPr>
+        <p:spPr>
+          <a:xfrm>
+            <a:off x="812800" y="7213600"/>
+            <a:ext cx="14605000" cy="304800"/>
           </a:xfrm>
           <a:prstGeom prst="rect">
             <a:avLst/>
@@ -5672,7 +6060,7 @@
                 <a:ea typeface="Inter" pitchFamily="34" charset="-122"/>
                 <a:cs typeface="Inter" pitchFamily="34" charset="-120"/>
               </a:rPr>
-              <a:t>Write it down:</a:t>
+              <a:t>Check:</a:t>
             </a:r>
             <a:r>
               <a:rPr lang="en-US" altLang="en-US" sz="2000" dirty="0">
@@ -5683,7 +6071,7 @@
                 <a:ea typeface="Inter" pitchFamily="34" charset="-122"/>
                 <a:cs typeface="Inter" pitchFamily="34" charset="-120"/>
               </a:rPr>
-              <a:t> “Students will ______ using ______, and I will see it in ______.”</a:t>
+              <a:t> does the comment name a criterion, point to the work, and ask for one action?</a:t>
             </a:r>
             <a:endParaRPr lang="en-US" sz="2000" dirty="0"/>
           </a:p>
@@ -5691,7 +6079,7 @@
       </p:sp>
       <p:sp>
         <p:nvSpPr>
-          <p:cNvPr id="17" name="page"/>
+          <p:cNvPr id="20" name="page"/>
           <p:cNvSpPr/>
           <p:nvPr/>
         </p:nvSpPr>
@@ -5730,7 +6118,7 @@
       </p:sp>
       <p:sp>
         <p:nvSpPr>
-          <p:cNvPr id="18" name="next-shape-17"/>
+          <p:cNvPr id="21" name="next-shape-20"/>
           <p:cNvSpPr/>
           <p:nvPr/>
         </p:nvSpPr>
@@ -5782,7 +6170,7 @@
       </p:grpSpPr>
       <p:sp>
         <p:nvSpPr>
-          <p:cNvPr id="2" name="close-shape-1"/>
+          <p:cNvPr id="2" name="plan-shape-1"/>
           <p:cNvSpPr/>
           <p:nvPr/>
         </p:nvSpPr>
@@ -5802,14 +6190,14 @@
       </p:sp>
       <p:sp>
         <p:nvSpPr>
-          <p:cNvPr id="3" name="kicker"/>
-          <p:cNvSpPr/>
-          <p:nvPr/>
-        </p:nvSpPr>
-        <p:spPr>
-          <a:xfrm>
-            <a:off x="736600" y="355600"/>
-            <a:ext cx="11430000" cy="330200"/>
+          <p:cNvPr id="3" name="header-title"/>
+          <p:cNvSpPr/>
+          <p:nvPr/>
+        </p:nvSpPr>
+        <p:spPr>
+          <a:xfrm>
+            <a:off x="508000" y="292100"/>
+            <a:ext cx="11430000" cy="482600"/>
           </a:xfrm>
           <a:prstGeom prst="rect">
             <a:avLst/>
@@ -5825,6 +6213,45 @@
               <a:buNone/>
             </a:pPr>
             <a:r>
+              <a:rPr lang="en-US" altLang="en-US" sz="3000" dirty="0">
+                <a:solidFill>
+                  <a:srgbClr val="FFFFFF"/>
+                </a:solidFill>
+                <a:latin typeface="Inter" pitchFamily="34" charset="0"/>
+                <a:ea typeface="Inter" pitchFamily="34" charset="-122"/>
+                <a:cs typeface="Inter" pitchFamily="34" charset="-120"/>
+              </a:rPr>
+              <a:t>Step 5: Plan the Next Instructional Step</a:t>
+            </a:r>
+            <a:endParaRPr lang="en-US" sz="3000" dirty="0"/>
+          </a:p>
+        </p:txBody>
+      </p:sp>
+      <p:sp>
+        <p:nvSpPr>
+          <p:cNvPr id="4" name="time"/>
+          <p:cNvSpPr/>
+          <p:nvPr/>
+        </p:nvSpPr>
+        <p:spPr>
+          <a:xfrm>
+            <a:off x="12827000" y="355600"/>
+            <a:ext cx="2921000" cy="304800"/>
+          </a:xfrm>
+          <a:prstGeom prst="rect">
+            <a:avLst/>
+          </a:prstGeom>
+          <a:noFill/>
+          <a:ln/>
+        </p:spPr>
+        <p:txBody>
+          <a:bodyPr wrap="square" lIns="0" tIns="0" rIns="0" bIns="0" rtlCol="0" anchor="t"/>
+          <a:lstStyle/>
+          <a:p>
+            <a:pPr algn="r" indent="0" marL="0">
+              <a:buNone/>
+            </a:pPr>
+            <a:r>
               <a:rPr lang="en-US" altLang="en-US" sz="1600" dirty="0">
                 <a:solidFill>
                   <a:srgbClr val="F1F3F4"/>
@@ -5833,7 +6260,7 @@
                 <a:ea typeface="Inter" pitchFamily="34" charset="-122"/>
                 <a:cs typeface="Inter" pitchFamily="34" charset="-120"/>
               </a:rPr>
-              <a:t>CLOSE  •  41:00–46:00  •  5 MIN</a:t>
+              <a:t>37–43 MIN  •  6 MIN</a:t>
             </a:r>
             <a:endParaRPr lang="en-US" sz="1600" dirty="0"/>
           </a:p>
@@ -5841,30 +6268,94 @@
       </p:sp>
       <p:sp>
         <p:nvSpPr>
-          <p:cNvPr id="4" name="title"/>
-          <p:cNvSpPr/>
-          <p:nvPr/>
-        </p:nvSpPr>
-        <p:spPr>
-          <a:xfrm>
-            <a:off x="736600" y="1651000"/>
-            <a:ext cx="13970000" cy="787400"/>
-          </a:xfrm>
-          <a:prstGeom prst="rect">
-            <a:avLst/>
-          </a:prstGeom>
-          <a:noFill/>
-          <a:ln/>
-        </p:spPr>
-        <p:txBody>
-          <a:bodyPr wrap="square" lIns="0" tIns="0" rIns="0" bIns="0" rtlCol="0" anchor="t"/>
-          <a:lstStyle/>
-          <a:p>
-            <a:pPr algn="l" indent="0" marL="0">
-              <a:buNone/>
-            </a:pPr>
-            <a:r>
-              <a:rPr lang="en-US" altLang="en-US" sz="4200" dirty="0">
+          <p:cNvPr id="5" name="intro"/>
+          <p:cNvSpPr/>
+          <p:nvPr/>
+        </p:nvSpPr>
+        <p:spPr>
+          <a:xfrm>
+            <a:off x="508000" y="1320800"/>
+            <a:ext cx="15240000" cy="685800"/>
+          </a:xfrm>
+          <a:prstGeom prst="rect">
+            <a:avLst/>
+          </a:prstGeom>
+          <a:noFill/>
+          <a:ln/>
+        </p:spPr>
+        <p:txBody>
+          <a:bodyPr wrap="square" lIns="0" tIns="0" rIns="0" bIns="0" rtlCol="0" anchor="t"/>
+          <a:lstStyle/>
+          <a:p>
+            <a:pPr algn="l" indent="0" marL="0">
+              <a:buNone/>
+            </a:pPr>
+            <a:r>
+              <a:rPr lang="en-US" altLang="en-US" sz="2200" dirty="0">
+                <a:solidFill>
+                  <a:srgbClr val="3C4043"/>
+                </a:solidFill>
+                <a:latin typeface="Inter" pitchFamily="34" charset="0"/>
+                <a:ea typeface="Inter" pitchFamily="34" charset="-122"/>
+                <a:cs typeface="Inter" pitchFamily="34" charset="-120"/>
+              </a:rPr>
+              <a:t>Choose one step that targets the priority criterion. Keep it small enough to teach in the next lesson or two.</a:t>
+            </a:r>
+            <a:endParaRPr lang="en-US" sz="2200" dirty="0"/>
+          </a:p>
+        </p:txBody>
+      </p:sp>
+      <p:sp>
+        <p:nvSpPr>
+          <p:cNvPr id="6" name="plan-shape-5"/>
+          <p:cNvSpPr/>
+          <p:nvPr/>
+        </p:nvSpPr>
+        <p:spPr>
+          <a:xfrm>
+            <a:off x="508000" y="2286000"/>
+            <a:ext cx="7366000" cy="4191000"/>
+          </a:xfrm>
+          <a:prstGeom prst="rect">
+            <a:avLst/>
+          </a:prstGeom>
+          <a:solidFill>
+            <a:srgbClr val="F3F4F6"/>
+          </a:solidFill>
+          <a:ln w="12700">
+            <a:solidFill>
+              <a:srgbClr val="D1D5DB"/>
+            </a:solidFill>
+            <a:prstDash val="solid"/>
+          </a:ln>
+        </p:spPr>
+      </p:sp>
+      <p:sp>
+        <p:nvSpPr>
+          <p:cNvPr id="7" name="left-title"/>
+          <p:cNvSpPr/>
+          <p:nvPr/>
+        </p:nvSpPr>
+        <p:spPr>
+          <a:xfrm>
+            <a:off x="889000" y="2616200"/>
+            <a:ext cx="6604000" cy="431800"/>
+          </a:xfrm>
+          <a:prstGeom prst="rect">
+            <a:avLst/>
+          </a:prstGeom>
+          <a:noFill/>
+          <a:ln/>
+        </p:spPr>
+        <p:txBody>
+          <a:bodyPr wrap="square" lIns="0" tIns="0" rIns="0" bIns="0" rtlCol="0" anchor="t"/>
+          <a:lstStyle/>
+          <a:p>
+            <a:pPr algn="l" indent="0" marL="0">
+              <a:buNone/>
+            </a:pPr>
+            <a:r>
+              <a:rPr lang="en-US" altLang="en-US" sz="2500" dirty="0">
                 <a:solidFill>
                   <a:srgbClr val="202124"/>
                 </a:solidFill>
@@ -5872,38 +6363,45 @@
                 <a:ea typeface="Inter" pitchFamily="34" charset="-122"/>
                 <a:cs typeface="Inter" pitchFamily="34" charset="-120"/>
               </a:rPr>
-              <a:t>What happens next with the student work</a:t>
-            </a:r>
-            <a:endParaRPr lang="en-US" sz="4200" dirty="0"/>
-          </a:p>
-        </p:txBody>
-      </p:sp>
-      <p:sp>
-        <p:nvSpPr>
-          <p:cNvPr id="5" name="subtitle"/>
-          <p:cNvSpPr/>
-          <p:nvPr/>
-        </p:nvSpPr>
-        <p:spPr>
-          <a:xfrm>
-            <a:off x="736600" y="2692400"/>
-            <a:ext cx="13970000" cy="508000"/>
-          </a:xfrm>
-          <a:prstGeom prst="rect">
-            <a:avLst/>
-          </a:prstGeom>
-          <a:noFill/>
-          <a:ln/>
-        </p:spPr>
-        <p:txBody>
-          <a:bodyPr wrap="square" lIns="0" tIns="0" rIns="0" bIns="0" rtlCol="0" anchor="t"/>
-          <a:lstStyle/>
-          <a:p>
-            <a:pPr algn="l" indent="0" marL="0">
-              <a:buNone/>
-            </a:pPr>
-            <a:r>
-              <a:rPr lang="en-US" altLang="en-US" sz="2300" dirty="0">
+              <a:t>PICK ONE</a:t>
+            </a:r>
+            <a:endParaRPr lang="en-US" sz="2500" dirty="0"/>
+          </a:p>
+        </p:txBody>
+      </p:sp>
+      <p:sp>
+        <p:nvSpPr>
+          <p:cNvPr id="8" name="left-body"/>
+          <p:cNvSpPr/>
+          <p:nvPr/>
+        </p:nvSpPr>
+        <p:spPr>
+          <a:xfrm>
+            <a:off x="889000" y="3352800"/>
+            <a:ext cx="6604000" cy="2921000"/>
+          </a:xfrm>
+          <a:prstGeom prst="rect">
+            <a:avLst/>
+          </a:prstGeom>
+          <a:noFill/>
+          <a:ln/>
+        </p:spPr>
+        <p:txBody>
+          <a:bodyPr wrap="square" lIns="0" tIns="0" rIns="0" bIns="0" rtlCol="0" anchor="t"/>
+          <a:lstStyle/>
+          <a:p>
+            <a:pPr algn="l" marL="317500" indent="-317500">
+              <a:lnSpc>
+                <a:spcPts val="2560"/>
+              </a:lnSpc>
+              <a:spcBef>
+                <a:spcPts val="10"/>
+              </a:spcBef>
+              <a:buSzPct val="100000"/>
+              <a:buChar char="•"/>
+            </a:pPr>
+            <a:r>
+              <a:rPr lang="en-US" altLang="en-US" sz="2000" dirty="0">
                 <a:solidFill>
                   <a:srgbClr val="3C4043"/>
                 </a:solidFill>
@@ -5911,22 +6409,118 @@
                 <a:ea typeface="Inter" pitchFamily="34" charset="-122"/>
                 <a:cs typeface="Inter" pitchFamily="34" charset="-120"/>
               </a:rPr>
-              <a:t>Three short commitments before leaving today.</a:t>
-            </a:r>
-            <a:endParaRPr lang="en-US" sz="2300" dirty="0"/>
-          </a:p>
-        </p:txBody>
-      </p:sp>
-      <p:sp>
-        <p:nvSpPr>
-          <p:cNvPr id="6" name="close-shape-5"/>
-          <p:cNvSpPr/>
-          <p:nvPr/>
-        </p:nvSpPr>
-        <p:spPr>
-          <a:xfrm>
-            <a:off x="736600" y="3530600"/>
-            <a:ext cx="4699000" cy="2895600"/>
+              <a:t>Re-teach one reasoning move with a model</a:t>
+            </a:r>
+            <a:endParaRPr lang="en-US" sz="2000" dirty="0"/>
+          </a:p>
+          <a:p>
+            <a:pPr algn="l" marL="317500" indent="-317500">
+              <a:lnSpc>
+                <a:spcPts val="2560"/>
+              </a:lnSpc>
+              <a:spcBef>
+                <a:spcPts val="10"/>
+              </a:spcBef>
+              <a:buSzPct val="100000"/>
+              <a:buChar char="•"/>
+            </a:pPr>
+            <a:r>
+              <a:rPr lang="en-US" altLang="en-US" sz="2000" dirty="0">
+                <a:solidFill>
+                  <a:srgbClr val="3C4043"/>
+                </a:solidFill>
+                <a:latin typeface="Inter" pitchFamily="34" charset="0"/>
+                <a:ea typeface="Inter" pitchFamily="34" charset="-122"/>
+                <a:cs typeface="Inter" pitchFamily="34" charset="-120"/>
+              </a:rPr>
+              <a:t>Practice selecting the strongest evidence</a:t>
+            </a:r>
+            <a:endParaRPr lang="en-US" sz="2000" dirty="0"/>
+          </a:p>
+          <a:p>
+            <a:pPr algn="l" marL="317500" indent="-317500">
+              <a:lnSpc>
+                <a:spcPts val="2560"/>
+              </a:lnSpc>
+              <a:spcBef>
+                <a:spcPts val="10"/>
+              </a:spcBef>
+              <a:buSzPct val="100000"/>
+              <a:buChar char="•"/>
+            </a:pPr>
+            <a:r>
+              <a:rPr lang="en-US" altLang="en-US" sz="2000" dirty="0">
+                <a:solidFill>
+                  <a:srgbClr val="3C4043"/>
+                </a:solidFill>
+                <a:latin typeface="Inter" pitchFamily="34" charset="0"/>
+                <a:ea typeface="Inter" pitchFamily="34" charset="-122"/>
+                <a:cs typeface="Inter" pitchFamily="34" charset="-120"/>
+              </a:rPr>
+              <a:t>Model how to link evidence to the claim</a:t>
+            </a:r>
+            <a:endParaRPr lang="en-US" sz="2000" dirty="0"/>
+          </a:p>
+          <a:p>
+            <a:pPr algn="l" marL="317500" indent="-317500">
+              <a:lnSpc>
+                <a:spcPts val="2560"/>
+              </a:lnSpc>
+              <a:spcBef>
+                <a:spcPts val="10"/>
+              </a:spcBef>
+              <a:buSzPct val="100000"/>
+              <a:buChar char="•"/>
+            </a:pPr>
+            <a:r>
+              <a:rPr lang="en-US" altLang="en-US" sz="2000" dirty="0">
+                <a:solidFill>
+                  <a:srgbClr val="3C4043"/>
+                </a:solidFill>
+                <a:latin typeface="Inter" pitchFamily="34" charset="0"/>
+                <a:ea typeface="Inter" pitchFamily="34" charset="-122"/>
+                <a:cs typeface="Inter" pitchFamily="34" charset="-120"/>
+              </a:rPr>
+              <a:t>Run a short revision cycle on one paragraph</a:t>
+            </a:r>
+            <a:endParaRPr lang="en-US" sz="2000" dirty="0"/>
+          </a:p>
+          <a:p>
+            <a:pPr algn="l" marL="317500" indent="-317500">
+              <a:lnSpc>
+                <a:spcPts val="2560"/>
+              </a:lnSpc>
+              <a:spcBef>
+                <a:spcPts val="10"/>
+              </a:spcBef>
+              <a:buSzPct val="100000"/>
+              <a:buChar char="•"/>
+            </a:pPr>
+            <a:r>
+              <a:rPr lang="en-US" altLang="en-US" sz="2000" dirty="0">
+                <a:solidFill>
+                  <a:srgbClr val="3C4043"/>
+                </a:solidFill>
+                <a:latin typeface="Inter" pitchFamily="34" charset="0"/>
+                <a:ea typeface="Inter" pitchFamily="34" charset="-122"/>
+                <a:cs typeface="Inter" pitchFamily="34" charset="-120"/>
+              </a:rPr>
+              <a:t>Clarify one science term students misuse</a:t>
+            </a:r>
+            <a:endParaRPr lang="en-US" sz="2000" dirty="0"/>
+          </a:p>
+        </p:txBody>
+      </p:sp>
+      <p:sp>
+        <p:nvSpPr>
+          <p:cNvPr id="9" name="plan-shape-8"/>
+          <p:cNvSpPr/>
+          <p:nvPr/>
+        </p:nvSpPr>
+        <p:spPr>
+          <a:xfrm>
+            <a:off x="8382000" y="2286000"/>
+            <a:ext cx="7366000" cy="4191000"/>
           </a:xfrm>
           <a:prstGeom prst="rect">
             <a:avLst/>
@@ -5944,14 +6538,483 @@
       </p:sp>
       <p:sp>
         <p:nvSpPr>
+          <p:cNvPr id="10" name="right-title"/>
+          <p:cNvSpPr/>
+          <p:nvPr/>
+        </p:nvSpPr>
+        <p:spPr>
+          <a:xfrm>
+            <a:off x="8763000" y="2616200"/>
+            <a:ext cx="6604000" cy="431800"/>
+          </a:xfrm>
+          <a:prstGeom prst="rect">
+            <a:avLst/>
+          </a:prstGeom>
+          <a:noFill/>
+          <a:ln/>
+        </p:spPr>
+        <p:txBody>
+          <a:bodyPr wrap="square" lIns="0" tIns="0" rIns="0" bIns="0" rtlCol="0" anchor="t"/>
+          <a:lstStyle/>
+          <a:p>
+            <a:pPr algn="l" indent="0" marL="0">
+              <a:buNone/>
+            </a:pPr>
+            <a:r>
+              <a:rPr lang="en-US" altLang="en-US" sz="2500" dirty="0">
+                <a:solidFill>
+                  <a:srgbClr val="202124"/>
+                </a:solidFill>
+                <a:latin typeface="Inter" pitchFamily="34" charset="0"/>
+                <a:ea typeface="Inter" pitchFamily="34" charset="-122"/>
+                <a:cs typeface="Inter" pitchFamily="34" charset="-120"/>
+              </a:rPr>
+              <a:t>THEN SAY HOW YOU WILL KNOW</a:t>
+            </a:r>
+            <a:endParaRPr lang="en-US" sz="2500" dirty="0"/>
+          </a:p>
+        </p:txBody>
+      </p:sp>
+      <p:sp>
+        <p:nvSpPr>
+          <p:cNvPr id="11" name="right-body"/>
+          <p:cNvSpPr/>
+          <p:nvPr/>
+        </p:nvSpPr>
+        <p:spPr>
+          <a:xfrm>
+            <a:off x="8763000" y="3352800"/>
+            <a:ext cx="6604000" cy="2921000"/>
+          </a:xfrm>
+          <a:prstGeom prst="rect">
+            <a:avLst/>
+          </a:prstGeom>
+          <a:noFill/>
+          <a:ln/>
+        </p:spPr>
+        <p:txBody>
+          <a:bodyPr wrap="square" lIns="0" tIns="0" rIns="0" bIns="0" rtlCol="0" anchor="t"/>
+          <a:lstStyle/>
+          <a:p>
+            <a:pPr algn="l" marL="317500" indent="-317500">
+              <a:lnSpc>
+                <a:spcPts val="2560"/>
+              </a:lnSpc>
+              <a:spcBef>
+                <a:spcPts val="10"/>
+              </a:spcBef>
+              <a:buSzPct val="100000"/>
+              <a:buChar char="•"/>
+            </a:pPr>
+            <a:r>
+              <a:rPr lang="en-US" altLang="en-US" sz="2000" dirty="0">
+                <a:solidFill>
+                  <a:srgbClr val="3C4043"/>
+                </a:solidFill>
+                <a:latin typeface="Inter" pitchFamily="34" charset="0"/>
+                <a:ea typeface="Inter" pitchFamily="34" charset="-122"/>
+                <a:cs typeface="Inter" pitchFamily="34" charset="-120"/>
+              </a:rPr>
+              <a:t>What students will produce</a:t>
+            </a:r>
+            <a:endParaRPr lang="en-US" sz="2000" dirty="0"/>
+          </a:p>
+          <a:p>
+            <a:pPr algn="l" marL="317500" indent="-317500">
+              <a:lnSpc>
+                <a:spcPts val="2560"/>
+              </a:lnSpc>
+              <a:spcBef>
+                <a:spcPts val="10"/>
+              </a:spcBef>
+              <a:buSzPct val="100000"/>
+              <a:buChar char="•"/>
+            </a:pPr>
+            <a:r>
+              <a:rPr lang="en-US" altLang="en-US" sz="2000" dirty="0">
+                <a:solidFill>
+                  <a:srgbClr val="3C4043"/>
+                </a:solidFill>
+                <a:latin typeface="Inter" pitchFamily="34" charset="0"/>
+                <a:ea typeface="Inter" pitchFamily="34" charset="-122"/>
+                <a:cs typeface="Inter" pitchFamily="34" charset="-120"/>
+              </a:rPr>
+              <a:t>Which criterion the work must show</a:t>
+            </a:r>
+            <a:endParaRPr lang="en-US" sz="2000" dirty="0"/>
+          </a:p>
+          <a:p>
+            <a:pPr algn="l" marL="317500" indent="-317500">
+              <a:lnSpc>
+                <a:spcPts val="2560"/>
+              </a:lnSpc>
+              <a:spcBef>
+                <a:spcPts val="10"/>
+              </a:spcBef>
+              <a:buSzPct val="100000"/>
+              <a:buChar char="•"/>
+            </a:pPr>
+            <a:r>
+              <a:rPr lang="en-US" altLang="en-US" sz="2000" dirty="0">
+                <a:solidFill>
+                  <a:srgbClr val="3C4043"/>
+                </a:solidFill>
+                <a:latin typeface="Inter" pitchFamily="34" charset="0"/>
+                <a:ea typeface="Inter" pitchFamily="34" charset="-122"/>
+                <a:cs typeface="Inter" pitchFamily="34" charset="-120"/>
+              </a:rPr>
+              <a:t>When you will collect it</a:t>
+            </a:r>
+            <a:endParaRPr lang="en-US" sz="2000" dirty="0"/>
+          </a:p>
+          <a:p>
+            <a:pPr algn="l" marL="317500" indent="-317500">
+              <a:lnSpc>
+                <a:spcPts val="2560"/>
+              </a:lnSpc>
+              <a:spcBef>
+                <a:spcPts val="10"/>
+              </a:spcBef>
+              <a:buSzPct val="100000"/>
+              <a:buChar char="•"/>
+            </a:pPr>
+            <a:r>
+              <a:rPr lang="en-US" altLang="en-US" sz="2000" dirty="0">
+                <a:solidFill>
+                  <a:srgbClr val="3C4043"/>
+                </a:solidFill>
+                <a:latin typeface="Inter" pitchFamily="34" charset="0"/>
+                <a:ea typeface="Inter" pitchFamily="34" charset="-122"/>
+                <a:cs typeface="Inter" pitchFamily="34" charset="-120"/>
+              </a:rPr>
+              <a:t>What you will look for in the work</a:t>
+            </a:r>
+            <a:endParaRPr lang="en-US" sz="2000" dirty="0"/>
+          </a:p>
+        </p:txBody>
+      </p:sp>
+      <p:sp>
+        <p:nvSpPr>
+          <p:cNvPr id="12" name="plan-shape-11"/>
+          <p:cNvSpPr/>
+          <p:nvPr/>
+        </p:nvSpPr>
+        <p:spPr>
+          <a:xfrm>
+            <a:off x="508000" y="6858000"/>
+            <a:ext cx="15240000" cy="838200"/>
+          </a:xfrm>
+          <a:prstGeom prst="rect">
+            <a:avLst/>
+          </a:prstGeom>
+          <a:solidFill>
+            <a:srgbClr val="202124"/>
+          </a:solidFill>
+          <a:ln/>
+        </p:spPr>
+      </p:sp>
+      <p:sp>
+        <p:nvSpPr>
+          <p:cNvPr id="13" name="commit"/>
+          <p:cNvSpPr/>
+          <p:nvPr/>
+        </p:nvSpPr>
+        <p:spPr>
+          <a:xfrm>
+            <a:off x="812800" y="7112000"/>
+            <a:ext cx="14605000" cy="355600"/>
+          </a:xfrm>
+          <a:prstGeom prst="rect">
+            <a:avLst/>
+          </a:prstGeom>
+          <a:noFill/>
+          <a:ln/>
+        </p:spPr>
+        <p:txBody>
+          <a:bodyPr wrap="square" lIns="0" tIns="0" rIns="0" bIns="0" rtlCol="0" anchor="t"/>
+          <a:lstStyle/>
+          <a:p>
+            <a:pPr algn="l" indent="0" marL="0">
+              <a:buNone/>
+            </a:pPr>
+            <a:r>
+              <a:rPr lang="en-US" altLang="en-US" sz="2000" dirty="0">
+                <a:solidFill>
+                  <a:srgbClr val="FFFFFF"/>
+                </a:solidFill>
+                <a:latin typeface="Inter" pitchFamily="34" charset="0"/>
+                <a:ea typeface="Inter" pitchFamily="34" charset="-122"/>
+                <a:cs typeface="Inter" pitchFamily="34" charset="-120"/>
+              </a:rPr>
+              <a:t>Complete the one-page writing analysis tool: task and standard, strengths, pattern, priority need, feedback, next step.</a:t>
+            </a:r>
+            <a:endParaRPr lang="en-US" sz="2000" dirty="0"/>
+          </a:p>
+        </p:txBody>
+      </p:sp>
+      <p:sp>
+        <p:nvSpPr>
+          <p:cNvPr id="14" name="page"/>
+          <p:cNvSpPr/>
+          <p:nvPr/>
+        </p:nvSpPr>
+        <p:spPr>
+          <a:xfrm>
+            <a:off x="14986000" y="8445500"/>
+            <a:ext cx="762000" cy="228600"/>
+          </a:xfrm>
+          <a:prstGeom prst="rect">
+            <a:avLst/>
+          </a:prstGeom>
+          <a:noFill/>
+          <a:ln/>
+        </p:spPr>
+        <p:txBody>
+          <a:bodyPr wrap="square" lIns="0" tIns="0" rIns="0" bIns="0" rtlCol="0" anchor="t"/>
+          <a:lstStyle/>
+          <a:p>
+            <a:pPr algn="r" indent="0" marL="0">
+              <a:buNone/>
+            </a:pPr>
+            <a:r>
+              <a:rPr lang="en-US" altLang="en-US" sz="1300" dirty="0">
+                <a:solidFill>
+                  <a:srgbClr val="3C4043"/>
+                </a:solidFill>
+                <a:latin typeface="Inter" pitchFamily="34" charset="0"/>
+                <a:ea typeface="Inter" pitchFamily="34" charset="-122"/>
+                <a:cs typeface="Inter" pitchFamily="34" charset="-120"/>
+              </a:rPr>
+              <a:t>07</a:t>
+            </a:r>
+            <a:endParaRPr lang="en-US" sz="1300" dirty="0"/>
+          </a:p>
+        </p:txBody>
+      </p:sp>
+      <p:sp>
+        <p:nvSpPr>
+          <p:cNvPr id="15" name="plan-shape-14"/>
+          <p:cNvSpPr/>
+          <p:nvPr/>
+        </p:nvSpPr>
+        <p:spPr>
+          <a:xfrm>
+            <a:off x="0" y="9067800"/>
+            <a:ext cx="16256000" cy="76200"/>
+          </a:xfrm>
+          <a:prstGeom prst="rect">
+            <a:avLst/>
+          </a:prstGeom>
+          <a:solidFill>
+            <a:srgbClr val="C41220"/>
+          </a:solidFill>
+          <a:ln/>
+        </p:spPr>
+      </p:sp>
+    </p:spTree>
+  </p:cSld>
+  <p:clrMapOvr>
+    <a:masterClrMapping/>
+  </p:clrMapOvr>
+</p:sld>
+</file>
+
+<file path=ppt/slides/slide8.xml><?xml version="1.0" encoding="utf-8"?>
+<p:sld xmlns:a="http://schemas.openxmlformats.org/drawingml/2006/main" xmlns:r="http://schemas.openxmlformats.org/officeDocument/2006/relationships" xmlns:p="http://schemas.openxmlformats.org/presentationml/2006/main">
+  <p:cSld name="Slide 8">
+    <p:bg>
+      <p:bgPr>
+        <a:solidFill>
+          <a:srgbClr val="FFFFFF"/>
+        </a:solidFill>
+      </p:bgPr>
+    </p:bg>
+    <p:spTree>
+      <p:nvGrpSpPr>
+        <p:cNvPr id="1" name=""/>
+        <p:cNvGrpSpPr/>
+        <p:nvPr/>
+      </p:nvGrpSpPr>
+      <p:grpSpPr>
+        <a:xfrm>
+          <a:off x="0" y="0"/>
+          <a:ext cx="0" cy="0"/>
+          <a:chOff x="0" y="0"/>
+          <a:chExt cx="0" cy="0"/>
+        </a:xfrm>
+      </p:grpSpPr>
+      <p:sp>
+        <p:nvSpPr>
+          <p:cNvPr id="2" name="close-shape-1"/>
+          <p:cNvSpPr/>
+          <p:nvPr/>
+        </p:nvSpPr>
+        <p:spPr>
+          <a:xfrm>
+            <a:off x="0" y="0"/>
+            <a:ext cx="16256000" cy="1016000"/>
+          </a:xfrm>
+          <a:prstGeom prst="rect">
+            <a:avLst/>
+          </a:prstGeom>
+          <a:solidFill>
+            <a:srgbClr val="202124"/>
+          </a:solidFill>
+          <a:ln/>
+        </p:spPr>
+      </p:sp>
+      <p:sp>
+        <p:nvSpPr>
+          <p:cNvPr id="3" name="kicker"/>
+          <p:cNvSpPr/>
+          <p:nvPr/>
+        </p:nvSpPr>
+        <p:spPr>
+          <a:xfrm>
+            <a:off x="508000" y="355600"/>
+            <a:ext cx="11430000" cy="330200"/>
+          </a:xfrm>
+          <a:prstGeom prst="rect">
+            <a:avLst/>
+          </a:prstGeom>
+          <a:noFill/>
+          <a:ln/>
+        </p:spPr>
+        <p:txBody>
+          <a:bodyPr wrap="none" lIns="0" tIns="0" rIns="0" bIns="0" rtlCol="0" anchor="t"/>
+          <a:lstStyle/>
+          <a:p>
+            <a:pPr algn="l" indent="0" marL="0">
+              <a:buNone/>
+            </a:pPr>
+            <a:r>
+              <a:rPr lang="en-US" altLang="en-US" sz="1600" dirty="0">
+                <a:solidFill>
+                  <a:srgbClr val="F1F3F4"/>
+                </a:solidFill>
+                <a:latin typeface="Inter" pitchFamily="34" charset="0"/>
+                <a:ea typeface="Inter" pitchFamily="34" charset="-122"/>
+                <a:cs typeface="Inter" pitchFamily="34" charset="-120"/>
+              </a:rPr>
+              <a:t>CLOSE  •  43–46 MIN  •  3 MIN</a:t>
+            </a:r>
+            <a:endParaRPr lang="en-US" sz="1600" dirty="0"/>
+          </a:p>
+        </p:txBody>
+      </p:sp>
+      <p:sp>
+        <p:nvSpPr>
+          <p:cNvPr id="4" name="title"/>
+          <p:cNvSpPr/>
+          <p:nvPr/>
+        </p:nvSpPr>
+        <p:spPr>
+          <a:xfrm>
+            <a:off x="736600" y="1600200"/>
+            <a:ext cx="13970000" cy="762000"/>
+          </a:xfrm>
+          <a:prstGeom prst="rect">
+            <a:avLst/>
+          </a:prstGeom>
+          <a:noFill/>
+          <a:ln/>
+        </p:spPr>
+        <p:txBody>
+          <a:bodyPr wrap="square" lIns="0" tIns="0" rIns="0" bIns="0" rtlCol="0" anchor="t"/>
+          <a:lstStyle/>
+          <a:p>
+            <a:pPr algn="l" indent="0" marL="0">
+              <a:buNone/>
+            </a:pPr>
+            <a:r>
+              <a:rPr lang="en-US" altLang="en-US" sz="4000" dirty="0">
+                <a:solidFill>
+                  <a:srgbClr val="202124"/>
+                </a:solidFill>
+                <a:latin typeface="Inter" pitchFamily="34" charset="0"/>
+                <a:ea typeface="Inter" pitchFamily="34" charset="-122"/>
+                <a:cs typeface="Inter" pitchFamily="34" charset="-120"/>
+              </a:rPr>
+              <a:t>Rubric → Samples → Pattern → Feedback → Next Step</a:t>
+            </a:r>
+            <a:endParaRPr lang="en-US" sz="4000" dirty="0"/>
+          </a:p>
+        </p:txBody>
+      </p:sp>
+      <p:sp>
+        <p:nvSpPr>
+          <p:cNvPr id="5" name="subtitle"/>
+          <p:cNvSpPr/>
+          <p:nvPr/>
+        </p:nvSpPr>
+        <p:spPr>
+          <a:xfrm>
+            <a:off x="736600" y="2590800"/>
+            <a:ext cx="13970000" cy="508000"/>
+          </a:xfrm>
+          <a:prstGeom prst="rect">
+            <a:avLst/>
+          </a:prstGeom>
+          <a:noFill/>
+          <a:ln/>
+        </p:spPr>
+        <p:txBody>
+          <a:bodyPr wrap="square" lIns="0" tIns="0" rIns="0" bIns="0" rtlCol="0" anchor="t"/>
+          <a:lstStyle/>
+          <a:p>
+            <a:pPr algn="l" indent="0" marL="0">
+              <a:buNone/>
+            </a:pPr>
+            <a:r>
+              <a:rPr lang="en-US" altLang="en-US" sz="2200" dirty="0">
+                <a:solidFill>
+                  <a:srgbClr val="3C4043"/>
+                </a:solidFill>
+                <a:latin typeface="Inter" pitchFamily="34" charset="0"/>
+                <a:ea typeface="Inter" pitchFamily="34" charset="-122"/>
+                <a:cs typeface="Inter" pitchFamily="34" charset="-120"/>
+              </a:rPr>
+              <a:t>Three commitments before leaving, and the form goes with you.</a:t>
+            </a:r>
+            <a:endParaRPr lang="en-US" sz="2200" dirty="0"/>
+          </a:p>
+        </p:txBody>
+      </p:sp>
+      <p:sp>
+        <p:nvSpPr>
+          <p:cNvPr id="6" name="close-shape-5"/>
+          <p:cNvSpPr/>
+          <p:nvPr/>
+        </p:nvSpPr>
+        <p:spPr>
+          <a:xfrm>
+            <a:off x="736600" y="3403600"/>
+            <a:ext cx="4699000" cy="2971800"/>
+          </a:xfrm>
+          <a:prstGeom prst="rect">
+            <a:avLst/>
+          </a:prstGeom>
+          <a:solidFill>
+            <a:srgbClr val="FCE8EA"/>
+          </a:solidFill>
+          <a:ln w="25400">
+            <a:solidFill>
+              <a:srgbClr val="C41220"/>
+            </a:solidFill>
+            <a:prstDash val="solid"/>
+          </a:ln>
+        </p:spPr>
+      </p:sp>
+      <p:sp>
+        <p:nvSpPr>
           <p:cNvPr id="7" name="c1"/>
           <p:cNvSpPr/>
           <p:nvPr/>
         </p:nvSpPr>
         <p:spPr>
           <a:xfrm>
-            <a:off x="1117600" y="3886200"/>
-            <a:ext cx="3937000" cy="2184400"/>
+            <a:off x="1117600" y="3733800"/>
+            <a:ext cx="3937000" cy="2362200"/>
           </a:xfrm>
           <a:prstGeom prst="rect">
             <a:avLst/>
@@ -5965,7 +7028,7 @@
           <a:p>
             <a:pPr algn="l" indent="0" marL="0">
               <a:lnSpc>
-                <a:spcPts val="1920"/>
+                <a:spcPts val="1890"/>
               </a:lnSpc>
               <a:buNone/>
             </a:pPr>
@@ -5980,12 +7043,12 @@
               </a:rPr>
               <a:t>1. RETURN</a:t>
             </a:r>
-            <a:endParaRPr lang="en-US" sz="2100" dirty="0"/>
+            <a:endParaRPr lang="en-US" sz="2000" dirty="0"/>
           </a:p>
           <a:p>
             <a:pPr algn="l" indent="0" marL="0">
               <a:lnSpc>
-                <a:spcPts val="2688"/>
+                <a:spcPts val="2520"/>
               </a:lnSpc>
               <a:spcBef>
                 <a:spcPts val="1000"/>
@@ -5993,7 +7056,7 @@
               <a:buNone/>
             </a:pPr>
             <a:r>
-              <a:rPr lang="en-US" altLang="en-US" sz="2100" dirty="0">
+              <a:rPr lang="en-US" altLang="en-US" sz="2000" dirty="0">
                 <a:solidFill>
                   <a:srgbClr val="3C4043"/>
                 </a:solidFill>
@@ -6001,9 +7064,9 @@
                 <a:ea typeface="Inter" pitchFamily="34" charset="-122"/>
                 <a:cs typeface="Inter" pitchFamily="34" charset="-120"/>
               </a:rPr>
-              <a:t>Give the written comment and allow time for the student revision.</a:t>
-            </a:r>
-            <a:endParaRPr lang="en-US" sz="2100" dirty="0"/>
+              <a:t>Give the written comment back and give students time to revise.</a:t>
+            </a:r>
+            <a:endParaRPr lang="en-US" sz="2000" dirty="0"/>
           </a:p>
         </p:txBody>
       </p:sp>
@@ -6015,8 +7078,8 @@
         </p:nvSpPr>
         <p:spPr>
           <a:xfrm>
-            <a:off x="5778500" y="3530600"/>
-            <a:ext cx="4699000" cy="2895600"/>
+            <a:off x="5778500" y="3403600"/>
+            <a:ext cx="4699000" cy="2971800"/>
           </a:xfrm>
           <a:prstGeom prst="rect">
             <a:avLst/>
@@ -6040,8 +7103,8 @@
         </p:nvSpPr>
         <p:spPr>
           <a:xfrm>
-            <a:off x="6159500" y="3886200"/>
-            <a:ext cx="3937000" cy="2184400"/>
+            <a:off x="6159500" y="3733800"/>
+            <a:ext cx="3937000" cy="2362200"/>
           </a:xfrm>
           <a:prstGeom prst="rect">
             <a:avLst/>
@@ -6055,7 +7118,7 @@
           <a:p>
             <a:pPr algn="l" indent="0" marL="0">
               <a:lnSpc>
-                <a:spcPts val="1920"/>
+                <a:spcPts val="1890"/>
               </a:lnSpc>
               <a:buNone/>
             </a:pPr>
@@ -6070,12 +7133,12 @@
               </a:rPr>
               <a:t>2. LOOK FOR</a:t>
             </a:r>
-            <a:endParaRPr lang="en-US" sz="2100" dirty="0"/>
+            <a:endParaRPr lang="en-US" sz="2000" dirty="0"/>
           </a:p>
           <a:p>
             <a:pPr algn="l" indent="0" marL="0">
               <a:lnSpc>
-                <a:spcPts val="2688"/>
+                <a:spcPts val="2520"/>
               </a:lnSpc>
               <a:spcBef>
                 <a:spcPts val="1000"/>
@@ -6083,7 +7146,7 @@
               <a:buNone/>
             </a:pPr>
             <a:r>
-              <a:rPr lang="en-US" altLang="en-US" sz="2100" dirty="0">
+              <a:rPr lang="en-US" altLang="en-US" sz="2000" dirty="0">
                 <a:solidFill>
                   <a:srgbClr val="3C4043"/>
                 </a:solidFill>
@@ -6091,9 +7154,9 @@
                 <a:ea typeface="Inter" pitchFamily="34" charset="-122"/>
                 <a:cs typeface="Inter" pitchFamily="34" charset="-120"/>
               </a:rPr>
-              <a:t>Check whether the claim, evidence, reasoning, or language improved.</a:t>
-            </a:r>
-            <a:endParaRPr lang="en-US" sz="2100" dirty="0"/>
+              <a:t>Check the same criterion in the revised work, using the rubric.</a:t>
+            </a:r>
+            <a:endParaRPr lang="en-US" sz="2000" dirty="0"/>
           </a:p>
         </p:txBody>
       </p:sp>
@@ -6105,8 +7168,8 @@
         </p:nvSpPr>
         <p:spPr>
           <a:xfrm>
-            <a:off x="10820400" y="3530600"/>
-            <a:ext cx="4927600" cy="2895600"/>
+            <a:off x="10820400" y="3403600"/>
+            <a:ext cx="4927600" cy="2971800"/>
           </a:xfrm>
           <a:prstGeom prst="rect">
             <a:avLst/>
@@ -6130,8 +7193,8 @@
         </p:nvSpPr>
         <p:spPr>
           <a:xfrm>
-            <a:off x="11201400" y="3886200"/>
-            <a:ext cx="4165600" cy="2184400"/>
+            <a:off x="11201400" y="3733800"/>
+            <a:ext cx="4165600" cy="2362200"/>
           </a:xfrm>
           <a:prstGeom prst="rect">
             <a:avLst/>
@@ -6145,7 +7208,7 @@
           <a:p>
             <a:pPr algn="l" indent="0" marL="0">
               <a:lnSpc>
-                <a:spcPts val="1920"/>
+                <a:spcPts val="1890"/>
               </a:lnSpc>
               <a:buNone/>
             </a:pPr>
@@ -6158,14 +7221,14 @@
                 <a:ea typeface="Inter" pitchFamily="34" charset="-122"/>
                 <a:cs typeface="Inter" pitchFamily="34" charset="-120"/>
               </a:rPr>
-              <a:t>3. DECIDE</a:t>
-            </a:r>
-            <a:endParaRPr lang="en-US" sz="2100" dirty="0"/>
+              <a:t>3. BRING BACK</a:t>
+            </a:r>
+            <a:endParaRPr lang="en-US" sz="2000" dirty="0"/>
           </a:p>
           <a:p>
             <a:pPr algn="l" indent="0" marL="0">
               <a:lnSpc>
-                <a:spcPts val="2688"/>
+                <a:spcPts val="2520"/>
               </a:lnSpc>
               <a:spcBef>
                 <a:spcPts val="1000"/>
@@ -6173,7 +7236,7 @@
               <a:buNone/>
             </a:pPr>
             <a:r>
-              <a:rPr lang="en-US" altLang="en-US" sz="2100" dirty="0">
+              <a:rPr lang="en-US" altLang="en-US" sz="2000" dirty="0">
                 <a:solidFill>
                   <a:srgbClr val="3C4043"/>
                 </a:solidFill>
@@ -6181,9 +7244,9 @@
                 <a:ea typeface="Inter" pitchFamily="34" charset="-122"/>
                 <a:cs typeface="Inter" pitchFamily="34" charset="-120"/>
               </a:rPr>
-              <a:t>Use the new evidence to choose the next small step toward the standard.</a:t>
-            </a:r>
-            <a:endParaRPr lang="en-US" sz="2100" dirty="0"/>
+              <a:t>Bring the form and a few revised samples to the next PLC.</a:t>
+            </a:r>
+            <a:endParaRPr lang="en-US" sz="2000" dirty="0"/>
           </a:p>
         </p:txBody>
       </p:sp>
@@ -6195,8 +7258,8 @@
         </p:nvSpPr>
         <p:spPr>
           <a:xfrm>
-            <a:off x="736600" y="6934200"/>
-            <a:ext cx="15011400" cy="838200"/>
+            <a:off x="736600" y="6807200"/>
+            <a:ext cx="15011400" cy="965200"/>
           </a:xfrm>
           <a:prstGeom prst="rect">
             <a:avLst/>
@@ -6215,8 +7278,8 @@
         </p:nvSpPr>
         <p:spPr>
           <a:xfrm>
-            <a:off x="1117600" y="7188200"/>
-            <a:ext cx="14224000" cy="330200"/>
+            <a:off x="1117600" y="7010400"/>
+            <a:ext cx="14224000" cy="609600"/>
           </a:xfrm>
           <a:prstGeom prst="rect">
             <a:avLst/>
@@ -6240,7 +7303,27 @@
                 <a:ea typeface="Inter" pitchFamily="34" charset="-122"/>
                 <a:cs typeface="Inter" pitchFamily="34" charset="-120"/>
               </a:rPr>
-              <a:t>Today: read the writing → write the feedback → plan the next step. Keep the writing samples for the next PLC.</a:t>
+              <a:t>Today the rubric led the work. Keep the samples and the form — the next PLC starts with your evidence.</a:t>
+            </a:r>
+            <a:endParaRPr lang="en-US" sz="2000" dirty="0"/>
+          </a:p>
+          <a:p>
+            <a:pPr algn="l" indent="0" marL="0">
+              <a:spcBef>
+                <a:spcPts val="600"/>
+              </a:spcBef>
+              <a:buNone/>
+            </a:pPr>
+            <a:r>
+              <a:rPr lang="en-US" altLang="en-US" sz="2000" dirty="0">
+                <a:solidFill>
+                  <a:srgbClr val="F6B4BA"/>
+                </a:solidFill>
+                <a:latin typeface="Inter" pitchFamily="34" charset="0"/>
+                <a:ea typeface="Inter" pitchFamily="34" charset="-122"/>
+                <a:cs typeface="Inter" pitchFamily="34" charset="-120"/>
+              </a:rPr>
+              <a:t>Aligned with the Lesson Internalization Protocol.</a:t>
             </a:r>
             <a:endParaRPr lang="en-US" sz="2000" dirty="0"/>
           </a:p>
@@ -6279,7 +7362,7 @@
                 <a:ea typeface="Inter" pitchFamily="34" charset="-122"/>
                 <a:cs typeface="Inter" pitchFamily="34" charset="-120"/>
               </a:rPr>
-              <a:t>07</a:t>
+              <a:t>08</a:t>
             </a:r>
             <a:endParaRPr lang="en-US" sz="1300" dirty="0"/>
           </a:p>

--- a/assets/plc/2026-10-30_Lesson_Internalization_Use_Student_Work_to_Adjust_Next_Learning_Experience.pptx
+++ b/assets/plc/2026-10-30_Lesson_Internalization_Use_Student_Work_to_Adjust_Next_Learning_Experience.pptx
@@ -5260,7 +5260,7 @@
                 <a:ea typeface="Inter" pitchFamily="34" charset="-122"/>
                 <a:cs typeface="Inter" pitchFamily="34" charset="-120"/>
               </a:rPr>
-              <a:t> can the need be pointed to in the rubric and seen in the student writing?</a:t>
+              <a:t> Can you see this need in the student writing and connect it to the rubric?</a:t>
             </a:r>
             <a:endParaRPr lang="en-US" sz="2000" dirty="0"/>
           </a:p>

--- a/assets/plc/2026-10-30_Lesson_Internalization_Use_Student_Work_to_Adjust_Next_Learning_Experience.pptx
+++ b/assets/plc/2026-10-30_Lesson_Internalization_Use_Student_Work_to_Adjust_Next_Learning_Experience.pptx
@@ -5410,7 +5410,7 @@
                 <a:ea typeface="Inter" pitchFamily="34" charset="-122"/>
                 <a:cs typeface="Inter" pitchFamily="34" charset="-120"/>
               </a:rPr>
-              <a:t>Step 4: Write Feedback Students Can Use</a:t>
+              <a:t>Step 4: Give Clear Feedback</a:t>
             </a:r>
             <a:endParaRPr lang="en-US" sz="3000" dirty="0"/>
           </a:p>
@@ -5488,7 +5488,7 @@
                 <a:ea typeface="Inter" pitchFamily="34" charset="-122"/>
                 <a:cs typeface="Inter" pitchFamily="34" charset="-120"/>
               </a:rPr>
-              <a:t>Write one short comment on the sample. It should send the student back to the rubric and back to their own writing.</a:t>
+              <a:t>Write one short comment. Tell the student what is missing, where to look, and what to do next.</a:t>
             </a:r>
             <a:endParaRPr lang="en-US" sz="2200" dirty="0"/>
           </a:p>
@@ -5552,7 +5552,7 @@
                 <a:ea typeface="Inter" pitchFamily="34" charset="-122"/>
                 <a:cs typeface="Inter" pitchFamily="34" charset="-120"/>
               </a:rPr>
-              <a:t>1. Name the criterion</a:t>
+              <a:t>1. Say what is missing</a:t>
             </a:r>
             <a:endParaRPr lang="en-US" sz="2400" dirty="0"/>
           </a:p>
@@ -5566,8 +5566,8 @@
         </p:nvSpPr>
         <p:spPr>
           <a:xfrm>
-            <a:off x="889000" y="3378200"/>
-            <a:ext cx="4191000" cy="1346200"/>
+            <a:off x="889000" y="3352800"/>
+            <a:ext cx="4191000" cy="1320800"/>
           </a:xfrm>
           <a:prstGeom prst="rect">
             <a:avLst/>
@@ -5594,7 +5594,7 @@
                 <a:ea typeface="Inter" pitchFamily="34" charset="-122"/>
                 <a:cs typeface="Inter" pitchFamily="34" charset="-120"/>
               </a:rPr>
-              <a:t>Say which rubric criterion the comment is about.</a:t>
+              <a:t>Use the rubric word. Name the part of the response that needs work.</a:t>
             </a:r>
             <a:endParaRPr lang="en-US" sz="2000" dirty="0"/>
           </a:p>
@@ -5609,7 +5609,7 @@
         <p:spPr>
           <a:xfrm>
             <a:off x="889000" y="4851400"/>
-            <a:ext cx="4191000" cy="1524000"/>
+            <a:ext cx="4191000" cy="1498600"/>
           </a:xfrm>
           <a:prstGeom prst="rect">
             <a:avLst/>
@@ -5659,7 +5659,7 @@
                 <a:ea typeface="Inter" pitchFamily="34" charset="-122"/>
                 <a:cs typeface="Inter" pitchFamily="34" charset="-120"/>
               </a:rPr>
-              <a:t>“This is your claim, and it is clear.”</a:t>
+              <a:t>“Your reasoning is missing.”</a:t>
             </a:r>
             <a:endParaRPr lang="en-US" sz="1900" dirty="0"/>
           </a:p>
@@ -5723,7 +5723,7 @@
                 <a:ea typeface="Inter" pitchFamily="34" charset="-122"/>
                 <a:cs typeface="Inter" pitchFamily="34" charset="-120"/>
               </a:rPr>
-              <a:t>2. Point to their work</a:t>
+              <a:t>2. Tell them where to look</a:t>
             </a:r>
             <a:endParaRPr lang="en-US" sz="2400" dirty="0"/>
           </a:p>
@@ -5737,8 +5737,8 @@
         </p:nvSpPr>
         <p:spPr>
           <a:xfrm>
-            <a:off x="6057900" y="3378200"/>
-            <a:ext cx="4191000" cy="1346200"/>
+            <a:off x="6057900" y="3352800"/>
+            <a:ext cx="4191000" cy="1320800"/>
           </a:xfrm>
           <a:prstGeom prst="rect">
             <a:avLst/>
@@ -5765,7 +5765,7 @@
                 <a:ea typeface="Inter" pitchFamily="34" charset="-122"/>
                 <a:cs typeface="Inter" pitchFamily="34" charset="-120"/>
               </a:rPr>
-              <a:t>Quote or point to the student's own words, graph detail, or food-web arrow.</a:t>
+              <a:t>Point students to their writing, graph, model, article, or data table.</a:t>
             </a:r>
             <a:endParaRPr lang="en-US" sz="2000" dirty="0"/>
           </a:p>
@@ -5780,7 +5780,7 @@
         <p:spPr>
           <a:xfrm>
             <a:off x="6057900" y="4851400"/>
-            <a:ext cx="4191000" cy="1524000"/>
+            <a:ext cx="4191000" cy="1498600"/>
           </a:xfrm>
           <a:prstGeom prst="rect">
             <a:avLst/>
@@ -5830,7 +5830,7 @@
                 <a:ea typeface="Inter" pitchFamily="34" charset="-122"/>
                 <a:cs typeface="Inter" pitchFamily="34" charset="-120"/>
               </a:rPr>
-              <a:t>“You wrote that frogs eat fruit flies.”</a:t>
+              <a:t>“Look at the graph and food web you used.”</a:t>
             </a:r>
             <a:endParaRPr lang="en-US" sz="1900" dirty="0"/>
           </a:p>
@@ -5894,7 +5894,7 @@
                 <a:ea typeface="Inter" pitchFamily="34" charset="-122"/>
                 <a:cs typeface="Inter" pitchFamily="34" charset="-120"/>
               </a:rPr>
-              <a:t>3. Ask for one revision</a:t>
+              <a:t>3. Tell them what to do</a:t>
             </a:r>
             <a:endParaRPr lang="en-US" sz="2400" dirty="0"/>
           </a:p>
@@ -5908,8 +5908,8 @@
         </p:nvSpPr>
         <p:spPr>
           <a:xfrm>
-            <a:off x="11226800" y="3378200"/>
-            <a:ext cx="4191000" cy="1346200"/>
+            <a:off x="11226800" y="3352800"/>
+            <a:ext cx="4191000" cy="1320800"/>
           </a:xfrm>
           <a:prstGeom prst="rect">
             <a:avLst/>
@@ -5936,7 +5936,7 @@
                 <a:ea typeface="Inter" pitchFamily="34" charset="-122"/>
                 <a:cs typeface="Inter" pitchFamily="34" charset="-120"/>
               </a:rPr>
-              <a:t>Ask for one change the student can make. Do not give the answer or write it for them.</a:t>
+              <a:t>Ask for one clear revision. Do not give the answer or write it for them.</a:t>
             </a:r>
             <a:endParaRPr lang="en-US" sz="2000" dirty="0"/>
           </a:p>
@@ -5951,7 +5951,7 @@
         <p:spPr>
           <a:xfrm>
             <a:off x="11226800" y="4851400"/>
-            <a:ext cx="4191000" cy="1524000"/>
+            <a:ext cx="4191000" cy="1498600"/>
           </a:xfrm>
           <a:prstGeom prst="rect">
             <a:avLst/>
@@ -6001,7 +6001,7 @@
                 <a:ea typeface="Inter" pitchFamily="34" charset="-122"/>
                 <a:cs typeface="Inter" pitchFamily="34" charset="-120"/>
               </a:rPr>
-              <a:t>“Now explain how that makes the fruit-fly population drop.”</a:t>
+              <a:t>“Add one sentence that explains how the evidence supports your claim.”</a:t>
             </a:r>
             <a:endParaRPr lang="en-US" sz="1900" dirty="0"/>
           </a:p>
@@ -6035,24 +6035,24 @@
         </p:nvSpPr>
         <p:spPr>
           <a:xfrm>
-            <a:off x="812800" y="7213600"/>
-            <a:ext cx="14605000" cy="304800"/>
-          </a:xfrm>
-          <a:prstGeom prst="rect">
-            <a:avLst/>
-          </a:prstGeom>
-          <a:noFill/>
-          <a:ln/>
-        </p:spPr>
-        <p:txBody>
-          <a:bodyPr wrap="square" lIns="0" tIns="0" rIns="0" bIns="0" rtlCol="0" anchor="t"/>
-          <a:lstStyle/>
-          <a:p>
-            <a:pPr algn="l" indent="0" marL="0">
-              <a:buNone/>
-            </a:pPr>
-            <a:r>
-              <a:rPr lang="en-US" altLang="en-US" sz="2000" b="1" dirty="0">
+            <a:off x="812800" y="7188200"/>
+            <a:ext cx="14605000" cy="330200"/>
+          </a:xfrm>
+          <a:prstGeom prst="rect">
+            <a:avLst/>
+          </a:prstGeom>
+          <a:noFill/>
+          <a:ln/>
+        </p:spPr>
+        <p:txBody>
+          <a:bodyPr wrap="square" lIns="0" tIns="0" rIns="0" bIns="0" rtlCol="0" anchor="t"/>
+          <a:lstStyle/>
+          <a:p>
+            <a:pPr algn="l" indent="0" marL="0">
+              <a:buNone/>
+            </a:pPr>
+            <a:r>
+              <a:rPr lang="en-US" altLang="en-US" sz="1900" b="1" dirty="0">
                 <a:solidFill>
                   <a:srgbClr val="F6B4BA"/>
                 </a:solidFill>
@@ -6060,10 +6060,10 @@
                 <a:ea typeface="Inter" pitchFamily="34" charset="-122"/>
                 <a:cs typeface="Inter" pitchFamily="34" charset="-120"/>
               </a:rPr>
-              <a:t>Check:</a:t>
-            </a:r>
-            <a:r>
-              <a:rPr lang="en-US" altLang="en-US" sz="2000" dirty="0">
+              <a:t>Use this frame:</a:t>
+            </a:r>
+            <a:r>
+              <a:rPr lang="en-US" altLang="en-US" sz="1900" dirty="0">
                 <a:solidFill>
                   <a:srgbClr val="FFFFFF"/>
                 </a:solidFill>
@@ -6071,9 +6071,9 @@
                 <a:ea typeface="Inter" pitchFamily="34" charset="-122"/>
                 <a:cs typeface="Inter" pitchFamily="34" charset="-120"/>
               </a:rPr>
-              <a:t> does the comment name a criterion, point to the work, and ask for one action?</a:t>
-            </a:r>
-            <a:endParaRPr lang="en-US" sz="2000" dirty="0"/>
+              <a:t> “You need to ______. Look at ______. Add or revise ______.”</a:t>
+            </a:r>
+            <a:endParaRPr lang="en-US" sz="1900" dirty="0"/>
           </a:p>
         </p:txBody>
       </p:sp>

--- a/assets/plc/2026-10-30_Lesson_Internalization_Use_Student_Work_to_Adjust_Next_Learning_Experience.pptx
+++ b/assets/plc/2026-10-30_Lesson_Internalization_Use_Student_Work_to_Adjust_Next_Learning_Experience.pptx
@@ -1592,22 +1592,19 @@
         <p:spPr>
           <a:xfrm>
             <a:off x="736600" y="1676400"/>
-            <a:ext cx="11176000" cy="1905000"/>
-          </a:xfrm>
-          <a:prstGeom prst="rect">
-            <a:avLst/>
-          </a:prstGeom>
-          <a:noFill/>
-          <a:ln/>
-        </p:spPr>
-        <p:txBody>
-          <a:bodyPr wrap="square" lIns="0" tIns="0" rIns="0" bIns="0" rtlCol="0" anchor="t"/>
-          <a:lstStyle/>
-          <a:p>
-            <a:pPr algn="l" indent="0" marL="0">
-              <a:lnSpc>
-                <a:spcPts val="4400"/>
-              </a:lnSpc>
+            <a:ext cx="14732000" cy="660400"/>
+          </a:xfrm>
+          <a:prstGeom prst="rect">
+            <a:avLst/>
+          </a:prstGeom>
+          <a:noFill/>
+          <a:ln/>
+        </p:spPr>
+        <p:txBody>
+          <a:bodyPr wrap="none" lIns="0" tIns="0" rIns="0" bIns="0" rtlCol="0" anchor="t"/>
+          <a:lstStyle/>
+          <a:p>
+            <a:pPr algn="l" indent="0" marL="0">
               <a:buNone/>
             </a:pPr>
             <a:r>
@@ -1623,26 +1620,6 @@
             </a:r>
             <a:endParaRPr lang="en-US" sz="4000" dirty="0"/>
           </a:p>
-          <a:p>
-            <a:pPr algn="l" indent="0" marL="0">
-              <a:lnSpc>
-                <a:spcPts val="4400"/>
-              </a:lnSpc>
-              <a:buNone/>
-            </a:pPr>
-            <a:r>
-              <a:rPr lang="en-US" altLang="en-US" sz="4000" dirty="0">
-                <a:solidFill>
-                  <a:srgbClr val="202124"/>
-                </a:solidFill>
-                <a:latin typeface="Inter" pitchFamily="34" charset="0"/>
-                <a:ea typeface="Inter" pitchFamily="34" charset="-122"/>
-                <a:cs typeface="Inter" pitchFamily="34" charset="-120"/>
-              </a:rPr>
-              <a:t>and Plan the Next Step</a:t>
-            </a:r>
-            <a:endParaRPr lang="en-US" sz="4000" dirty="0"/>
-          </a:p>
         </p:txBody>
       </p:sp>
       <p:sp>
@@ -1653,27 +1630,24 @@
         </p:nvSpPr>
         <p:spPr>
           <a:xfrm>
-            <a:off x="736600" y="3708400"/>
-            <a:ext cx="10922000" cy="1168400"/>
-          </a:xfrm>
-          <a:prstGeom prst="rect">
-            <a:avLst/>
-          </a:prstGeom>
-          <a:noFill/>
-          <a:ln/>
-        </p:spPr>
-        <p:txBody>
-          <a:bodyPr wrap="square" lIns="0" tIns="0" rIns="0" bIns="0" rtlCol="0" anchor="t"/>
-          <a:lstStyle/>
-          <a:p>
-            <a:pPr algn="l" indent="0" marL="0">
-              <a:lnSpc>
-                <a:spcPts val="2944"/>
-              </a:lnSpc>
-              <a:buNone/>
-            </a:pPr>
-            <a:r>
-              <a:rPr lang="en-US" altLang="en-US" sz="2300" dirty="0">
+            <a:off x="736600" y="2514600"/>
+            <a:ext cx="14224000" cy="558800"/>
+          </a:xfrm>
+          <a:prstGeom prst="rect">
+            <a:avLst/>
+          </a:prstGeom>
+          <a:noFill/>
+          <a:ln/>
+        </p:spPr>
+        <p:txBody>
+          <a:bodyPr wrap="square" lIns="0" tIns="0" rIns="0" bIns="0" rtlCol="0" anchor="t"/>
+          <a:lstStyle/>
+          <a:p>
+            <a:pPr algn="l" indent="0" marL="0">
+              <a:buNone/>
+            </a:pPr>
+            <a:r>
+              <a:rPr lang="en-US" altLang="en-US" sz="2500" dirty="0">
                 <a:solidFill>
                   <a:srgbClr val="3C4043"/>
                 </a:solidFill>
@@ -1681,9 +1655,9 @@
                 <a:ea typeface="Inter" pitchFamily="34" charset="-122"/>
                 <a:cs typeface="Inter" pitchFamily="34" charset="-120"/>
               </a:rPr>
-              <a:t>The rubric is the anchor today. Teachers read completed student writing against the rubric, give feedback students can act on, and choose one next instructional step.</a:t>
-            </a:r>
-            <a:endParaRPr lang="en-US" sz="2300" dirty="0"/>
+              <a:t>Give clear feedback. Plan one next step.</a:t>
+            </a:r>
+            <a:endParaRPr lang="en-US" sz="2500" dirty="0"/>
           </a:p>
         </p:txBody>
       </p:sp>
@@ -1695,8 +1669,8 @@
         </p:nvSpPr>
         <p:spPr>
           <a:xfrm>
-            <a:off x="12242800" y="1676400"/>
-            <a:ext cx="3200400" cy="3200400"/>
+            <a:off x="736600" y="3556000"/>
+            <a:ext cx="4572000" cy="3708400"/>
           </a:xfrm>
           <a:prstGeom prst="rect">
             <a:avLst/>
@@ -1714,26 +1688,26 @@
       </p:sp>
       <p:sp>
         <p:nvSpPr>
-          <p:cNvPr id="8" name="focus-label"/>
-          <p:cNvSpPr/>
-          <p:nvPr/>
-        </p:nvSpPr>
-        <p:spPr>
-          <a:xfrm>
-            <a:off x="12547600" y="2006600"/>
-            <a:ext cx="2590800" cy="254000"/>
-          </a:xfrm>
-          <a:prstGeom prst="rect">
-            <a:avLst/>
-          </a:prstGeom>
-          <a:noFill/>
-          <a:ln/>
-        </p:spPr>
-        <p:txBody>
-          <a:bodyPr wrap="square" lIns="0" tIns="0" rIns="0" bIns="0" rtlCol="0" anchor="t"/>
-          <a:lstStyle/>
-          <a:p>
-            <a:pPr algn="ctr" indent="0" marL="0">
+          <p:cNvPr id="8" name="bring-label"/>
+          <p:cNvSpPr/>
+          <p:nvPr/>
+        </p:nvSpPr>
+        <p:spPr>
+          <a:xfrm>
+            <a:off x="1092200" y="3911600"/>
+            <a:ext cx="3860800" cy="254000"/>
+          </a:xfrm>
+          <a:prstGeom prst="rect">
+            <a:avLst/>
+          </a:prstGeom>
+          <a:noFill/>
+          <a:ln/>
+        </p:spPr>
+        <p:txBody>
+          <a:bodyPr wrap="square" lIns="0" tIns="0" rIns="0" bIns="0" rtlCol="0" anchor="t"/>
+          <a:lstStyle/>
+          <a:p>
+            <a:pPr algn="l" indent="0" marL="0">
               <a:buNone/>
             </a:pPr>
             <a:r>
@@ -1745,7 +1719,7 @@
                 <a:ea typeface="Inter" pitchFamily="34" charset="-122"/>
                 <a:cs typeface="Inter" pitchFamily="34" charset="-120"/>
               </a:rPr>
-              <a:t>TODAY'S PURPOSE</a:t>
+              <a:t>BRING</a:t>
             </a:r>
             <a:endParaRPr lang="en-US" sz="1400" dirty="0"/>
           </a:p>
@@ -1753,33 +1727,72 @@
       </p:sp>
       <p:sp>
         <p:nvSpPr>
-          <p:cNvPr id="9" name="focus-copy"/>
-          <p:cNvSpPr/>
-          <p:nvPr/>
-        </p:nvSpPr>
-        <p:spPr>
-          <a:xfrm>
-            <a:off x="12547600" y="2616200"/>
-            <a:ext cx="2590800" cy="1930400"/>
-          </a:xfrm>
-          <a:prstGeom prst="rect">
-            <a:avLst/>
-          </a:prstGeom>
-          <a:noFill/>
-          <a:ln/>
-        </p:spPr>
-        <p:txBody>
-          <a:bodyPr wrap="square" lIns="0" tIns="0" rIns="0" bIns="0" rtlCol="0" anchor="ctr"/>
-          <a:lstStyle/>
-          <a:p>
-            <a:pPr algn="ctr" indent="0" marL="0">
+          <p:cNvPr id="9" name="bring-title"/>
+          <p:cNvSpPr/>
+          <p:nvPr/>
+        </p:nvSpPr>
+        <p:spPr>
+          <a:xfrm>
+            <a:off x="1092200" y="4343400"/>
+            <a:ext cx="3860800" cy="431800"/>
+          </a:xfrm>
+          <a:prstGeom prst="rect">
+            <a:avLst/>
+          </a:prstGeom>
+          <a:noFill/>
+          <a:ln/>
+        </p:spPr>
+        <p:txBody>
+          <a:bodyPr wrap="square" lIns="0" tIns="0" rIns="0" bIns="0" rtlCol="0" anchor="t"/>
+          <a:lstStyle/>
+          <a:p>
+            <a:pPr algn="l" indent="0" marL="0">
+              <a:buNone/>
+            </a:pPr>
+            <a:r>
+              <a:rPr lang="en-US" altLang="en-US" sz="2500" dirty="0">
+                <a:solidFill>
+                  <a:srgbClr val="202124"/>
+                </a:solidFill>
+                <a:latin typeface="Inter" pitchFamily="34" charset="0"/>
+                <a:ea typeface="Inter" pitchFamily="34" charset="-122"/>
+                <a:cs typeface="Inter" pitchFamily="34" charset="-120"/>
+              </a:rPr>
+              <a:t>Your materials</a:t>
+            </a:r>
+            <a:endParaRPr lang="en-US" sz="2500" dirty="0"/>
+          </a:p>
+        </p:txBody>
+      </p:sp>
+      <p:sp>
+        <p:nvSpPr>
+          <p:cNvPr id="10" name="bring-body"/>
+          <p:cNvSpPr/>
+          <p:nvPr/>
+        </p:nvSpPr>
+        <p:spPr>
+          <a:xfrm>
+            <a:off x="1092200" y="5130800"/>
+            <a:ext cx="3860800" cy="1676400"/>
+          </a:xfrm>
+          <a:prstGeom prst="rect">
+            <a:avLst/>
+          </a:prstGeom>
+          <a:noFill/>
+          <a:ln/>
+        </p:spPr>
+        <p:txBody>
+          <a:bodyPr wrap="square" lIns="0" tIns="0" rIns="0" bIns="0" rtlCol="0" anchor="t"/>
+          <a:lstStyle/>
+          <a:p>
+            <a:pPr algn="l" indent="0" marL="0">
               <a:lnSpc>
-                <a:spcPts val="2480"/>
+                <a:spcPts val="2688"/>
               </a:lnSpc>
               <a:buNone/>
             </a:pPr>
             <a:r>
-              <a:rPr lang="en-US" altLang="en-US" sz="2000" dirty="0">
+              <a:rPr lang="en-US" altLang="en-US" sz="2100" dirty="0">
                 <a:solidFill>
                   <a:srgbClr val="3C4043"/>
                 </a:solidFill>
@@ -1787,22 +1800,68 @@
                 <a:ea typeface="Inter" pitchFamily="34" charset="-122"/>
                 <a:cs typeface="Inter" pitchFamily="34" charset="-120"/>
               </a:rPr>
-              <a:t>Same rubric. Same bar. Feedback from evidence, not impressions.</a:t>
-            </a:r>
-            <a:endParaRPr lang="en-US" sz="2000" dirty="0"/>
-          </a:p>
-        </p:txBody>
-      </p:sp>
-      <p:sp>
-        <p:nvSpPr>
-          <p:cNvPr id="10" name="cover-shape-9"/>
-          <p:cNvSpPr/>
-          <p:nvPr/>
-        </p:nvSpPr>
-        <p:spPr>
-          <a:xfrm>
-            <a:off x="736600" y="5130800"/>
-            <a:ext cx="14706600" cy="1854200"/>
+              <a:t>• 3–5 student writing samples</a:t>
+            </a:r>
+            <a:endParaRPr lang="en-US" sz="2100" dirty="0"/>
+          </a:p>
+          <a:p>
+            <a:pPr algn="l" indent="0" marL="0">
+              <a:lnSpc>
+                <a:spcPts val="2688"/>
+              </a:lnSpc>
+              <a:spcBef>
+                <a:spcPts val="700"/>
+              </a:spcBef>
+              <a:buNone/>
+            </a:pPr>
+            <a:r>
+              <a:rPr lang="en-US" altLang="en-US" sz="2100" dirty="0">
+                <a:solidFill>
+                  <a:srgbClr val="3C4043"/>
+                </a:solidFill>
+                <a:latin typeface="Inter" pitchFamily="34" charset="0"/>
+                <a:ea typeface="Inter" pitchFamily="34" charset="-122"/>
+                <a:cs typeface="Inter" pitchFamily="34" charset="-120"/>
+              </a:rPr>
+              <a:t>• Task + standard</a:t>
+            </a:r>
+            <a:endParaRPr lang="en-US" sz="2100" dirty="0"/>
+          </a:p>
+          <a:p>
+            <a:pPr algn="l" indent="0" marL="0">
+              <a:lnSpc>
+                <a:spcPts val="2688"/>
+              </a:lnSpc>
+              <a:spcBef>
+                <a:spcPts val="700"/>
+              </a:spcBef>
+              <a:buNone/>
+            </a:pPr>
+            <a:r>
+              <a:rPr lang="en-US" altLang="en-US" sz="2100" dirty="0">
+                <a:solidFill>
+                  <a:srgbClr val="3C4043"/>
+                </a:solidFill>
+                <a:latin typeface="Inter" pitchFamily="34" charset="0"/>
+                <a:ea typeface="Inter" pitchFamily="34" charset="-122"/>
+                <a:cs typeface="Inter" pitchFamily="34" charset="-120"/>
+              </a:rPr>
+              <a:t>• Rubric or success criteria</a:t>
+            </a:r>
+            <a:endParaRPr lang="en-US" sz="2100" dirty="0"/>
+          </a:p>
+        </p:txBody>
+      </p:sp>
+      <p:sp>
+        <p:nvSpPr>
+          <p:cNvPr id="11" name="cover-shape-10"/>
+          <p:cNvSpPr/>
+          <p:nvPr/>
+        </p:nvSpPr>
+        <p:spPr>
+          <a:xfrm>
+            <a:off x="5842000" y="3556000"/>
+            <a:ext cx="4572000" cy="3708400"/>
           </a:xfrm>
           <a:prstGeom prst="rect">
             <a:avLst/>
@@ -1820,14 +1879,92 @@
       </p:sp>
       <p:sp>
         <p:nvSpPr>
-          <p:cNvPr id="11" name="bring"/>
-          <p:cNvSpPr/>
-          <p:nvPr/>
-        </p:nvSpPr>
-        <p:spPr>
-          <a:xfrm>
-            <a:off x="1117600" y="5308600"/>
-            <a:ext cx="13970000" cy="1524000"/>
+          <p:cNvPr id="12" name="do-label"/>
+          <p:cNvSpPr/>
+          <p:nvPr/>
+        </p:nvSpPr>
+        <p:spPr>
+          <a:xfrm>
+            <a:off x="6197600" y="3911600"/>
+            <a:ext cx="3860800" cy="254000"/>
+          </a:xfrm>
+          <a:prstGeom prst="rect">
+            <a:avLst/>
+          </a:prstGeom>
+          <a:noFill/>
+          <a:ln/>
+        </p:spPr>
+        <p:txBody>
+          <a:bodyPr wrap="square" lIns="0" tIns="0" rIns="0" bIns="0" rtlCol="0" anchor="t"/>
+          <a:lstStyle/>
+          <a:p>
+            <a:pPr algn="l" indent="0" marL="0">
+              <a:buNone/>
+            </a:pPr>
+            <a:r>
+              <a:rPr lang="en-US" altLang="en-US" sz="1400" dirty="0">
+                <a:solidFill>
+                  <a:srgbClr val="C41220"/>
+                </a:solidFill>
+                <a:latin typeface="Inter" pitchFamily="34" charset="0"/>
+                <a:ea typeface="Inter" pitchFamily="34" charset="-122"/>
+                <a:cs typeface="Inter" pitchFamily="34" charset="-120"/>
+              </a:rPr>
+              <a:t>DO TODAY</a:t>
+            </a:r>
+            <a:endParaRPr lang="en-US" sz="1400" dirty="0"/>
+          </a:p>
+        </p:txBody>
+      </p:sp>
+      <p:sp>
+        <p:nvSpPr>
+          <p:cNvPr id="13" name="do-title"/>
+          <p:cNvSpPr/>
+          <p:nvPr/>
+        </p:nvSpPr>
+        <p:spPr>
+          <a:xfrm>
+            <a:off x="6197600" y="4343400"/>
+            <a:ext cx="3860800" cy="431800"/>
+          </a:xfrm>
+          <a:prstGeom prst="rect">
+            <a:avLst/>
+          </a:prstGeom>
+          <a:noFill/>
+          <a:ln/>
+        </p:spPr>
+        <p:txBody>
+          <a:bodyPr wrap="square" lIns="0" tIns="0" rIns="0" bIns="0" rtlCol="0" anchor="t"/>
+          <a:lstStyle/>
+          <a:p>
+            <a:pPr algn="l" indent="0" marL="0">
+              <a:buNone/>
+            </a:pPr>
+            <a:r>
+              <a:rPr lang="en-US" altLang="en-US" sz="2500" dirty="0">
+                <a:solidFill>
+                  <a:srgbClr val="202124"/>
+                </a:solidFill>
+                <a:latin typeface="Inter" pitchFamily="34" charset="0"/>
+                <a:ea typeface="Inter" pitchFamily="34" charset="-122"/>
+                <a:cs typeface="Inter" pitchFamily="34" charset="-120"/>
+              </a:rPr>
+              <a:t>Use the five steps</a:t>
+            </a:r>
+            <a:endParaRPr lang="en-US" sz="2500" dirty="0"/>
+          </a:p>
+        </p:txBody>
+      </p:sp>
+      <p:sp>
+        <p:nvSpPr>
+          <p:cNvPr id="14" name="do-body"/>
+          <p:cNvSpPr/>
+          <p:nvPr/>
+        </p:nvSpPr>
+        <p:spPr>
+          <a:xfrm>
+            <a:off x="6197600" y="5130800"/>
+            <a:ext cx="3860800" cy="1676400"/>
           </a:xfrm>
           <a:prstGeom prst="rect">
             <a:avLst/>
@@ -1841,23 +1978,12 @@
           <a:p>
             <a:pPr algn="l" indent="0" marL="0">
               <a:lnSpc>
-                <a:spcPts val="2480"/>
+                <a:spcPts val="2688"/>
               </a:lnSpc>
               <a:buNone/>
             </a:pPr>
             <a:r>
-              <a:rPr lang="en-US" altLang="en-US" sz="2000" b="1" dirty="0">
-                <a:solidFill>
-                  <a:srgbClr val="C41220"/>
-                </a:solidFill>
-                <a:latin typeface="Inter" pitchFamily="34" charset="0"/>
-                <a:ea typeface="Inter" pitchFamily="34" charset="-122"/>
-                <a:cs typeface="Inter" pitchFamily="34" charset="-120"/>
-              </a:rPr>
-              <a:t>Bring:</a:t>
-            </a:r>
-            <a:r>
-              <a:rPr lang="en-US" altLang="en-US" sz="2000" dirty="0">
+              <a:rPr lang="en-US" altLang="en-US" sz="2100" dirty="0">
                 <a:solidFill>
                   <a:srgbClr val="3C4043"/>
                 </a:solidFill>
@@ -1865,22 +1991,109 @@
                 <a:ea typeface="Inter" pitchFamily="34" charset="-122"/>
                 <a:cs typeface="Inter" pitchFamily="34" charset="-120"/>
               </a:rPr>
-              <a:t> 3–5 completed student writing samples, the task and source, and the rubric or success criteria you use.</a:t>
-            </a:r>
-            <a:endParaRPr lang="en-US" sz="2000" dirty="0"/>
+              <a:t>Read the rubric.</a:t>
+            </a:r>
+            <a:endParaRPr lang="en-US" sz="2100" dirty="0"/>
           </a:p>
           <a:p>
             <a:pPr algn="l" indent="0" marL="0">
               <a:lnSpc>
-                <a:spcPts val="2480"/>
+                <a:spcPts val="2688"/>
               </a:lnSpc>
               <a:spcBef>
-                <a:spcPts val="600"/>
+                <a:spcPts val="700"/>
               </a:spcBef>
               <a:buNone/>
             </a:pPr>
             <a:r>
-              <a:rPr lang="en-US" altLang="en-US" sz="2000" b="1" dirty="0">
+              <a:rPr lang="en-US" altLang="en-US" sz="2100" dirty="0">
+                <a:solidFill>
+                  <a:srgbClr val="3C4043"/>
+                </a:solidFill>
+                <a:latin typeface="Inter" pitchFamily="34" charset="0"/>
+                <a:ea typeface="Inter" pitchFamily="34" charset="-122"/>
+                <a:cs typeface="Inter" pitchFamily="34" charset="-120"/>
+              </a:rPr>
+              <a:t>Read the writing.</a:t>
+            </a:r>
+            <a:endParaRPr lang="en-US" sz="2100" dirty="0"/>
+          </a:p>
+          <a:p>
+            <a:pPr algn="l" indent="0" marL="0">
+              <a:lnSpc>
+                <a:spcPts val="2688"/>
+              </a:lnSpc>
+              <a:spcBef>
+                <a:spcPts val="700"/>
+              </a:spcBef>
+              <a:buNone/>
+            </a:pPr>
+            <a:r>
+              <a:rPr lang="en-US" altLang="en-US" sz="2100" dirty="0">
+                <a:solidFill>
+                  <a:srgbClr val="3C4043"/>
+                </a:solidFill>
+                <a:latin typeface="Inter" pitchFamily="34" charset="0"/>
+                <a:ea typeface="Inter" pitchFamily="34" charset="-122"/>
+                <a:cs typeface="Inter" pitchFamily="34" charset="-120"/>
+              </a:rPr>
+              <a:t>Choose one need.</a:t>
+            </a:r>
+            <a:endParaRPr lang="en-US" sz="2100" dirty="0"/>
+          </a:p>
+        </p:txBody>
+      </p:sp>
+      <p:sp>
+        <p:nvSpPr>
+          <p:cNvPr id="15" name="cover-shape-14"/>
+          <p:cNvSpPr/>
+          <p:nvPr/>
+        </p:nvSpPr>
+        <p:spPr>
+          <a:xfrm>
+            <a:off x="10947400" y="3556000"/>
+            <a:ext cx="4572000" cy="3708400"/>
+          </a:xfrm>
+          <a:prstGeom prst="rect">
+            <a:avLst/>
+          </a:prstGeom>
+          <a:solidFill>
+            <a:srgbClr val="F3F4F6"/>
+          </a:solidFill>
+          <a:ln w="12700">
+            <a:solidFill>
+              <a:srgbClr val="D1D5DB"/>
+            </a:solidFill>
+            <a:prstDash val="solid"/>
+          </a:ln>
+        </p:spPr>
+      </p:sp>
+      <p:sp>
+        <p:nvSpPr>
+          <p:cNvPr id="16" name="leave-label"/>
+          <p:cNvSpPr/>
+          <p:nvPr/>
+        </p:nvSpPr>
+        <p:spPr>
+          <a:xfrm>
+            <a:off x="11303000" y="3911600"/>
+            <a:ext cx="3860800" cy="254000"/>
+          </a:xfrm>
+          <a:prstGeom prst="rect">
+            <a:avLst/>
+          </a:prstGeom>
+          <a:noFill/>
+          <a:ln/>
+        </p:spPr>
+        <p:txBody>
+          <a:bodyPr wrap="square" lIns="0" tIns="0" rIns="0" bIns="0" rtlCol="0" anchor="t"/>
+          <a:lstStyle/>
+          <a:p>
+            <a:pPr algn="l" indent="0" marL="0">
+              <a:buNone/>
+            </a:pPr>
+            <a:r>
+              <a:rPr lang="en-US" altLang="en-US" sz="1400" dirty="0">
                 <a:solidFill>
                   <a:srgbClr val="C41220"/>
                 </a:solidFill>
@@ -1888,10 +2101,80 @@
                 <a:ea typeface="Inter" pitchFamily="34" charset="-122"/>
                 <a:cs typeface="Inter" pitchFamily="34" charset="-120"/>
               </a:rPr>
-              <a:t>Biology example:</a:t>
-            </a:r>
-            <a:r>
-              <a:rPr lang="en-US" altLang="en-US" sz="2000" dirty="0">
+              <a:t>LEAVE WITH</a:t>
+            </a:r>
+            <a:endParaRPr lang="en-US" sz="1400" dirty="0"/>
+          </a:p>
+        </p:txBody>
+      </p:sp>
+      <p:sp>
+        <p:nvSpPr>
+          <p:cNvPr id="17" name="leave-title"/>
+          <p:cNvSpPr/>
+          <p:nvPr/>
+        </p:nvSpPr>
+        <p:spPr>
+          <a:xfrm>
+            <a:off x="11303000" y="4343400"/>
+            <a:ext cx="3860800" cy="431800"/>
+          </a:xfrm>
+          <a:prstGeom prst="rect">
+            <a:avLst/>
+          </a:prstGeom>
+          <a:noFill/>
+          <a:ln/>
+        </p:spPr>
+        <p:txBody>
+          <a:bodyPr wrap="square" lIns="0" tIns="0" rIns="0" bIns="0" rtlCol="0" anchor="t"/>
+          <a:lstStyle/>
+          <a:p>
+            <a:pPr algn="l" indent="0" marL="0">
+              <a:buNone/>
+            </a:pPr>
+            <a:r>
+              <a:rPr lang="en-US" altLang="en-US" sz="2500" dirty="0">
+                <a:solidFill>
+                  <a:srgbClr val="202124"/>
+                </a:solidFill>
+                <a:latin typeface="Inter" pitchFamily="34" charset="0"/>
+                <a:ea typeface="Inter" pitchFamily="34" charset="-122"/>
+                <a:cs typeface="Inter" pitchFamily="34" charset="-120"/>
+              </a:rPr>
+              <a:t>A clear plan</a:t>
+            </a:r>
+            <a:endParaRPr lang="en-US" sz="2500" dirty="0"/>
+          </a:p>
+        </p:txBody>
+      </p:sp>
+      <p:sp>
+        <p:nvSpPr>
+          <p:cNvPr id="18" name="leave-body"/>
+          <p:cNvSpPr/>
+          <p:nvPr/>
+        </p:nvSpPr>
+        <p:spPr>
+          <a:xfrm>
+            <a:off x="11303000" y="5130800"/>
+            <a:ext cx="3860800" cy="1676400"/>
+          </a:xfrm>
+          <a:prstGeom prst="rect">
+            <a:avLst/>
+          </a:prstGeom>
+          <a:noFill/>
+          <a:ln/>
+        </p:spPr>
+        <p:txBody>
+          <a:bodyPr wrap="square" lIns="0" tIns="0" rIns="0" bIns="0" rtlCol="0" anchor="t"/>
+          <a:lstStyle/>
+          <a:p>
+            <a:pPr algn="l" indent="0" marL="0">
+              <a:lnSpc>
+                <a:spcPts val="2688"/>
+              </a:lnSpc>
+              <a:buNone/>
+            </a:pPr>
+            <a:r>
+              <a:rPr lang="en-US" altLang="en-US" sz="2100" dirty="0">
                 <a:solidFill>
                   <a:srgbClr val="3C4043"/>
                 </a:solidFill>
@@ -1899,22 +2182,68 @@
                 <a:ea typeface="Inter" pitchFamily="34" charset="-122"/>
                 <a:cs typeface="Inter" pitchFamily="34" charset="-120"/>
               </a:rPr>
-              <a:t> Benchmark #1 rubric, 10 points — Claim 1, Evidence 1, Reasoning 1, short response 2. Other courses bring their own rubric.</a:t>
-            </a:r>
-            <a:endParaRPr lang="en-US" sz="2000" dirty="0"/>
-          </a:p>
-        </p:txBody>
-      </p:sp>
-      <p:sp>
-        <p:nvSpPr>
-          <p:cNvPr id="12" name="cover-shape-11"/>
-          <p:cNvSpPr/>
-          <p:nvPr/>
-        </p:nvSpPr>
-        <p:spPr>
-          <a:xfrm>
-            <a:off x="736600" y="7061200"/>
-            <a:ext cx="14706600" cy="711200"/>
+              <a:t>One feedback comment.</a:t>
+            </a:r>
+            <a:endParaRPr lang="en-US" sz="2100" dirty="0"/>
+          </a:p>
+          <a:p>
+            <a:pPr algn="l" indent="0" marL="0">
+              <a:lnSpc>
+                <a:spcPts val="2688"/>
+              </a:lnSpc>
+              <a:spcBef>
+                <a:spcPts val="700"/>
+              </a:spcBef>
+              <a:buNone/>
+            </a:pPr>
+            <a:r>
+              <a:rPr lang="en-US" altLang="en-US" sz="2100" dirty="0">
+                <a:solidFill>
+                  <a:srgbClr val="3C4043"/>
+                </a:solidFill>
+                <a:latin typeface="Inter" pitchFamily="34" charset="0"/>
+                <a:ea typeface="Inter" pitchFamily="34" charset="-122"/>
+                <a:cs typeface="Inter" pitchFamily="34" charset="-120"/>
+              </a:rPr>
+              <a:t>One next step.</a:t>
+            </a:r>
+            <a:endParaRPr lang="en-US" sz="2100" dirty="0"/>
+          </a:p>
+          <a:p>
+            <a:pPr algn="l" indent="0" marL="0">
+              <a:lnSpc>
+                <a:spcPts val="2688"/>
+              </a:lnSpc>
+              <a:spcBef>
+                <a:spcPts val="700"/>
+              </a:spcBef>
+              <a:buNone/>
+            </a:pPr>
+            <a:r>
+              <a:rPr lang="en-US" altLang="en-US" sz="2100" dirty="0">
+                <a:solidFill>
+                  <a:srgbClr val="3C4043"/>
+                </a:solidFill>
+                <a:latin typeface="Inter" pitchFamily="34" charset="0"/>
+                <a:ea typeface="Inter" pitchFamily="34" charset="-122"/>
+                <a:cs typeface="Inter" pitchFamily="34" charset="-120"/>
+              </a:rPr>
+              <a:t>One evidence check.</a:t>
+            </a:r>
+            <a:endParaRPr lang="en-US" sz="2100" dirty="0"/>
+          </a:p>
+        </p:txBody>
+      </p:sp>
+      <p:sp>
+        <p:nvSpPr>
+          <p:cNvPr id="19" name="cover-shape-18"/>
+          <p:cNvSpPr/>
+          <p:nvPr/>
+        </p:nvSpPr>
+        <p:spPr>
+          <a:xfrm>
+            <a:off x="736600" y="7747000"/>
+            <a:ext cx="14782800" cy="736600"/>
           </a:xfrm>
           <a:prstGeom prst="rect">
             <a:avLst/>
@@ -1927,28 +2256,39 @@
       </p:sp>
       <p:sp>
         <p:nvSpPr>
-          <p:cNvPr id="13" name="rule"/>
-          <p:cNvSpPr/>
-          <p:nvPr/>
-        </p:nvSpPr>
-        <p:spPr>
-          <a:xfrm>
-            <a:off x="1117600" y="7277100"/>
-            <a:ext cx="13970000" cy="330200"/>
-          </a:xfrm>
-          <a:prstGeom prst="rect">
-            <a:avLst/>
-          </a:prstGeom>
-          <a:noFill/>
-          <a:ln/>
-        </p:spPr>
-        <p:txBody>
-          <a:bodyPr wrap="square" lIns="0" tIns="0" rIns="0" bIns="0" rtlCol="0" anchor="t"/>
-          <a:lstStyle/>
-          <a:p>
-            <a:pPr algn="l" indent="0" marL="0">
-              <a:buNone/>
-            </a:pPr>
+          <p:cNvPr id="20" name="note"/>
+          <p:cNvSpPr/>
+          <p:nvPr/>
+        </p:nvSpPr>
+        <p:spPr>
+          <a:xfrm>
+            <a:off x="1092200" y="7962900"/>
+            <a:ext cx="14071600" cy="355600"/>
+          </a:xfrm>
+          <a:prstGeom prst="rect">
+            <a:avLst/>
+          </a:prstGeom>
+          <a:noFill/>
+          <a:ln/>
+        </p:spPr>
+        <p:txBody>
+          <a:bodyPr wrap="square" lIns="0" tIns="0" rIns="0" bIns="0" rtlCol="0" anchor="t"/>
+          <a:lstStyle/>
+          <a:p>
+            <a:pPr algn="l" indent="0" marL="0">
+              <a:buNone/>
+            </a:pPr>
+            <a:r>
+              <a:rPr lang="en-US" altLang="en-US" sz="1900" b="1" dirty="0">
+                <a:solidFill>
+                  <a:srgbClr val="F6B4BA"/>
+                </a:solidFill>
+                <a:latin typeface="Inter" pitchFamily="34" charset="0"/>
+                <a:ea typeface="Inter" pitchFamily="34" charset="-122"/>
+                <a:cs typeface="Inter" pitchFamily="34" charset="-120"/>
+              </a:rPr>
+              <a:t>Use your course rubric:</a:t>
+            </a:r>
             <a:r>
               <a:rPr lang="en-US" altLang="en-US" sz="1900" dirty="0">
                 <a:solidFill>
@@ -1958,7 +2298,7 @@
                 <a:ea typeface="Inter" pitchFamily="34" charset="-122"/>
                 <a:cs typeface="Inter" pitchFamily="34" charset="-120"/>
               </a:rPr>
-              <a:t>The rubric describes the writing. It never ranks students, teachers, classes, or courses.</a:t>
+              <a:t> Biology may use Benchmark #1; other courses use their own rubric or success criteria.</a:t>
             </a:r>
             <a:endParaRPr lang="en-US" sz="1900" dirty="0"/>
           </a:p>
@@ -1966,100 +2306,52 @@
       </p:sp>
       <p:sp>
         <p:nvSpPr>
-          <p:cNvPr id="14" name="footer"/>
-          <p:cNvSpPr/>
-          <p:nvPr/>
-        </p:nvSpPr>
-        <p:spPr>
-          <a:xfrm>
-            <a:off x="736600" y="7899400"/>
-            <a:ext cx="13716000" cy="1117600"/>
-          </a:xfrm>
-          <a:prstGeom prst="rect">
-            <a:avLst/>
-          </a:prstGeom>
-          <a:noFill/>
-          <a:ln/>
-        </p:spPr>
-        <p:txBody>
-          <a:bodyPr wrap="square" lIns="0" tIns="0" rIns="0" bIns="0" rtlCol="0" anchor="t"/>
-          <a:lstStyle/>
-          <a:p>
-            <a:pPr algn="l" indent="0" marL="0">
-              <a:lnSpc>
-                <a:spcPts val="2232"/>
-              </a:lnSpc>
-              <a:buNone/>
-            </a:pPr>
-            <a:r>
-              <a:rPr lang="en-US" altLang="en-US" sz="1800" b="1" dirty="0">
-                <a:solidFill>
-                  <a:srgbClr val="C41220"/>
-                </a:solidFill>
-                <a:latin typeface="Inter" pitchFamily="34" charset="0"/>
-                <a:ea typeface="Inter" pitchFamily="34" charset="-122"/>
-                <a:cs typeface="Inter" pitchFamily="34" charset="-120"/>
-              </a:rPr>
-              <a:t>Balanced view:</a:t>
-            </a:r>
-            <a:r>
-              <a:rPr lang="en-US" altLang="en-US" sz="1800" dirty="0">
-                <a:solidFill>
-                  <a:srgbClr val="3C4043"/>
-                </a:solidFill>
-                <a:latin typeface="Inter" pitchFamily="34" charset="0"/>
-                <a:ea typeface="Inter" pitchFamily="34" charset="-122"/>
-                <a:cs typeface="Inter" pitchFamily="34" charset="-120"/>
-              </a:rPr>
-              <a:t> The rubric sets the shared bar and is used every time. It works alongside what the writing shows and what teachers know about their students.</a:t>
-            </a:r>
-            <a:endParaRPr lang="en-US" sz="1800" dirty="0"/>
-          </a:p>
-          <a:p>
-            <a:pPr algn="l" indent="0" marL="0">
-              <a:lnSpc>
-                <a:spcPts val="2232"/>
-              </a:lnSpc>
-              <a:spcBef>
-                <a:spcPts val="500"/>
-              </a:spcBef>
-              <a:buNone/>
-            </a:pPr>
-            <a:r>
-              <a:rPr lang="en-US" altLang="en-US" sz="1800" b="1" dirty="0">
-                <a:solidFill>
-                  <a:srgbClr val="C41220"/>
-                </a:solidFill>
-                <a:latin typeface="Inter" pitchFamily="34" charset="0"/>
-                <a:ea typeface="Inter" pitchFamily="34" charset="-122"/>
-                <a:cs typeface="Inter" pitchFamily="34" charset="-120"/>
-              </a:rPr>
-              <a:t>Lesson Internalization Tool:</a:t>
-            </a:r>
-            <a:r>
-              <a:rPr lang="en-US" altLang="en-US" sz="1800" dirty="0">
-                <a:solidFill>
-                  <a:srgbClr val="3C4043"/>
-                </a:solidFill>
-                <a:latin typeface="Inter" pitchFamily="34" charset="0"/>
-                <a:ea typeface="Inter" pitchFamily="34" charset="-122"/>
-                <a:cs typeface="Inter" pitchFamily="34" charset="-120"/>
-              </a:rPr>
-              <a:t> Every Day Questions 1, 3, and 4  •  Team Deep Dive Steps 3–5  •  After-Lesson Reflection.</a:t>
-            </a:r>
-            <a:endParaRPr lang="en-US" sz="1800" dirty="0"/>
-          </a:p>
-        </p:txBody>
-      </p:sp>
-      <p:sp>
-        <p:nvSpPr>
-          <p:cNvPr id="15" name="page"/>
-          <p:cNvSpPr/>
-          <p:nvPr/>
-        </p:nvSpPr>
-        <p:spPr>
-          <a:xfrm>
-            <a:off x="14732000" y="8432800"/>
+          <p:cNvPr id="21" name="lit"/>
+          <p:cNvSpPr/>
+          <p:nvPr/>
+        </p:nvSpPr>
+        <p:spPr>
+          <a:xfrm>
+            <a:off x="736600" y="8686800"/>
+            <a:ext cx="13208000" cy="228600"/>
+          </a:xfrm>
+          <a:prstGeom prst="rect">
+            <a:avLst/>
+          </a:prstGeom>
+          <a:noFill/>
+          <a:ln/>
+        </p:spPr>
+        <p:txBody>
+          <a:bodyPr wrap="square" lIns="0" tIns="0" rIns="0" bIns="0" rtlCol="0" anchor="t"/>
+          <a:lstStyle/>
+          <a:p>
+            <a:pPr algn="l" indent="0" marL="0">
+              <a:buNone/>
+            </a:pPr>
+            <a:r>
+              <a:rPr lang="en-US" altLang="en-US" sz="1300" dirty="0">
+                <a:solidFill>
+                  <a:srgbClr val="6B7280"/>
+                </a:solidFill>
+                <a:latin typeface="Inter" pitchFamily="34" charset="0"/>
+                <a:ea typeface="Inter" pitchFamily="34" charset="-122"/>
+                <a:cs typeface="Inter" pitchFamily="34" charset="-120"/>
+              </a:rPr>
+              <a:t>LESSON INTERNALIZATION PROTOCOL  •  QUESTIONS 1, 3, 4  •  AFTER-LESSON REFLECTION</a:t>
+            </a:r>
+            <a:endParaRPr lang="en-US" sz="1300" dirty="0"/>
+          </a:p>
+        </p:txBody>
+      </p:sp>
+      <p:sp>
+        <p:nvSpPr>
+          <p:cNvPr id="22" name="page"/>
+          <p:cNvSpPr/>
+          <p:nvPr/>
+        </p:nvSpPr>
+        <p:spPr>
+          <a:xfrm>
+            <a:off x="14732000" y="8661400"/>
             <a:ext cx="736600" cy="228600"/>
           </a:xfrm>
           <a:prstGeom prst="rect">
@@ -2092,7 +2384,7 @@
       </p:sp>
       <p:sp>
         <p:nvSpPr>
-          <p:cNvPr id="16" name="cover-shape-15"/>
+          <p:cNvPr id="23" name="cover-shape-22"/>
           <p:cNvSpPr/>
           <p:nvPr/>
         </p:nvSpPr>
@@ -3280,26 +3572,210 @@
       </p:sp>
       <p:sp>
         <p:nvSpPr>
-          <p:cNvPr id="5" name="intro"/>
+          <p:cNvPr id="5" name="lit"/>
           <p:cNvSpPr/>
           <p:nvPr/>
         </p:nvSpPr>
         <p:spPr>
           <a:xfrm>
             <a:off x="508000" y="1320800"/>
-            <a:ext cx="15240000" cy="685800"/>
-          </a:xfrm>
-          <a:prstGeom prst="rect">
-            <a:avLst/>
-          </a:prstGeom>
-          <a:noFill/>
-          <a:ln/>
-        </p:spPr>
-        <p:txBody>
-          <a:bodyPr wrap="square" lIns="0" tIns="0" rIns="0" bIns="0" rtlCol="0" anchor="t"/>
-          <a:lstStyle/>
-          <a:p>
-            <a:pPr algn="l" indent="0" marL="0">
+            <a:ext cx="15240000" cy="228600"/>
+          </a:xfrm>
+          <a:prstGeom prst="rect">
+            <a:avLst/>
+          </a:prstGeom>
+          <a:noFill/>
+          <a:ln/>
+        </p:spPr>
+        <p:txBody>
+          <a:bodyPr wrap="square" lIns="0" tIns="0" rIns="0" bIns="0" rtlCol="0" anchor="t"/>
+          <a:lstStyle/>
+          <a:p>
+            <a:pPr algn="l" indent="0" marL="0">
+              <a:buNone/>
+            </a:pPr>
+            <a:r>
+              <a:rPr lang="en-US" altLang="en-US" sz="1400" dirty="0">
+                <a:solidFill>
+                  <a:srgbClr val="C41220"/>
+                </a:solidFill>
+                <a:latin typeface="Inter" pitchFamily="34" charset="0"/>
+                <a:ea typeface="Inter" pitchFamily="34" charset="-122"/>
+                <a:cs typeface="Inter" pitchFamily="34" charset="-120"/>
+              </a:rPr>
+              <a:t>LESSON INTERNALIZATION QUESTION 1</a:t>
+            </a:r>
+            <a:endParaRPr lang="en-US" sz="1400" dirty="0"/>
+          </a:p>
+        </p:txBody>
+      </p:sp>
+      <p:sp>
+        <p:nvSpPr>
+          <p:cNvPr id="6" name="intro"/>
+          <p:cNvSpPr/>
+          <p:nvPr/>
+        </p:nvSpPr>
+        <p:spPr>
+          <a:xfrm>
+            <a:off x="508000" y="1651000"/>
+            <a:ext cx="15240000" cy="482600"/>
+          </a:xfrm>
+          <a:prstGeom prst="rect">
+            <a:avLst/>
+          </a:prstGeom>
+          <a:noFill/>
+          <a:ln/>
+        </p:spPr>
+        <p:txBody>
+          <a:bodyPr wrap="square" lIns="0" tIns="0" rIns="0" bIns="0" rtlCol="0" anchor="t"/>
+          <a:lstStyle/>
+          <a:p>
+            <a:pPr algn="l" indent="0" marL="0">
+              <a:buNone/>
+            </a:pPr>
+            <a:r>
+              <a:rPr lang="en-US" altLang="en-US" sz="2100" dirty="0">
+                <a:solidFill>
+                  <a:srgbClr val="3C4043"/>
+                </a:solidFill>
+                <a:latin typeface="Inter" pitchFamily="34" charset="0"/>
+                <a:ea typeface="Inter" pitchFamily="34" charset="-122"/>
+                <a:cs typeface="Inter" pitchFamily="34" charset="-120"/>
+              </a:rPr>
+              <a:t>What are students learning, and how will we know they learned it?</a:t>
+            </a:r>
+            <a:endParaRPr lang="en-US" sz="2100" dirty="0"/>
+          </a:p>
+        </p:txBody>
+      </p:sp>
+      <p:sp>
+        <p:nvSpPr>
+          <p:cNvPr id="7" name="mastery-shape-6"/>
+          <p:cNvSpPr/>
+          <p:nvPr/>
+        </p:nvSpPr>
+        <p:spPr>
+          <a:xfrm>
+            <a:off x="508000" y="2336800"/>
+            <a:ext cx="4902200" cy="4089400"/>
+          </a:xfrm>
+          <a:prstGeom prst="rect">
+            <a:avLst/>
+          </a:prstGeom>
+          <a:solidFill>
+            <a:srgbClr val="FCE8EA"/>
+          </a:solidFill>
+          <a:ln w="25400">
+            <a:solidFill>
+              <a:srgbClr val="C41220"/>
+            </a:solidFill>
+            <a:prstDash val="solid"/>
+          </a:ln>
+        </p:spPr>
+      </p:sp>
+      <p:sp>
+        <p:nvSpPr>
+          <p:cNvPr id="8" name="one-label"/>
+          <p:cNvSpPr/>
+          <p:nvPr/>
+        </p:nvSpPr>
+        <p:spPr>
+          <a:xfrm>
+            <a:off x="889000" y="2667000"/>
+            <a:ext cx="4191000" cy="254000"/>
+          </a:xfrm>
+          <a:prstGeom prst="rect">
+            <a:avLst/>
+          </a:prstGeom>
+          <a:noFill/>
+          <a:ln/>
+        </p:spPr>
+        <p:txBody>
+          <a:bodyPr wrap="square" lIns="0" tIns="0" rIns="0" bIns="0" rtlCol="0" anchor="t"/>
+          <a:lstStyle/>
+          <a:p>
+            <a:pPr algn="l" indent="0" marL="0">
+              <a:buNone/>
+            </a:pPr>
+            <a:r>
+              <a:rPr lang="en-US" altLang="en-US" sz="1400" dirty="0">
+                <a:solidFill>
+                  <a:srgbClr val="C41220"/>
+                </a:solidFill>
+                <a:latin typeface="Inter" pitchFamily="34" charset="0"/>
+                <a:ea typeface="Inter" pitchFamily="34" charset="-122"/>
+                <a:cs typeface="Inter" pitchFamily="34" charset="-120"/>
+              </a:rPr>
+              <a:t>1</a:t>
+            </a:r>
+            <a:endParaRPr lang="en-US" sz="1400" dirty="0"/>
+          </a:p>
+        </p:txBody>
+      </p:sp>
+      <p:sp>
+        <p:nvSpPr>
+          <p:cNvPr id="9" name="one-title"/>
+          <p:cNvSpPr/>
+          <p:nvPr/>
+        </p:nvSpPr>
+        <p:spPr>
+          <a:xfrm>
+            <a:off x="889000" y="3124200"/>
+            <a:ext cx="4191000" cy="431800"/>
+          </a:xfrm>
+          <a:prstGeom prst="rect">
+            <a:avLst/>
+          </a:prstGeom>
+          <a:noFill/>
+          <a:ln/>
+        </p:spPr>
+        <p:txBody>
+          <a:bodyPr wrap="square" lIns="0" tIns="0" rIns="0" bIns="0" rtlCol="0" anchor="t"/>
+          <a:lstStyle/>
+          <a:p>
+            <a:pPr algn="l" indent="0" marL="0">
+              <a:buNone/>
+            </a:pPr>
+            <a:r>
+              <a:rPr lang="en-US" altLang="en-US" sz="2500" dirty="0">
+                <a:solidFill>
+                  <a:srgbClr val="202124"/>
+                </a:solidFill>
+                <a:latin typeface="Inter" pitchFamily="34" charset="0"/>
+                <a:ea typeface="Inter" pitchFamily="34" charset="-122"/>
+                <a:cs typeface="Inter" pitchFamily="34" charset="-120"/>
+              </a:rPr>
+              <a:t>Name the task</a:t>
+            </a:r>
+            <a:endParaRPr lang="en-US" sz="2500" dirty="0"/>
+          </a:p>
+        </p:txBody>
+      </p:sp>
+      <p:sp>
+        <p:nvSpPr>
+          <p:cNvPr id="10" name="one-body"/>
+          <p:cNvSpPr/>
+          <p:nvPr/>
+        </p:nvSpPr>
+        <p:spPr>
+          <a:xfrm>
+            <a:off x="889000" y="4064000"/>
+            <a:ext cx="4191000" cy="1625600"/>
+          </a:xfrm>
+          <a:prstGeom prst="rect">
+            <a:avLst/>
+          </a:prstGeom>
+          <a:noFill/>
+          <a:ln/>
+        </p:spPr>
+        <p:txBody>
+          <a:bodyPr wrap="square" lIns="0" tIns="0" rIns="0" bIns="0" rtlCol="0" anchor="t"/>
+          <a:lstStyle/>
+          <a:p>
+            <a:pPr algn="l" indent="0" marL="0">
+              <a:lnSpc>
+                <a:spcPts val="2816"/>
+              </a:lnSpc>
               <a:buNone/>
             </a:pPr>
             <a:r>
@@ -3311,7 +3787,7 @@
                 <a:ea typeface="Inter" pitchFamily="34" charset="-122"/>
                 <a:cs typeface="Inter" pitchFamily="34" charset="-120"/>
               </a:rPr>
-              <a:t>Open your rubric or success criteria. Name the task and standard, then underline the one or two criteria you will review today.</a:t>
+              <a:t>Write the task, standard, and student product on the form.</a:t>
             </a:r>
             <a:endParaRPr lang="en-US" sz="2200" dirty="0"/>
           </a:p>
@@ -3319,14 +3795,14 @@
       </p:sp>
       <p:sp>
         <p:nvSpPr>
-          <p:cNvPr id="6" name="mastery-shape-5"/>
-          <p:cNvSpPr/>
-          <p:nvPr/>
-        </p:nvSpPr>
-        <p:spPr>
-          <a:xfrm>
-            <a:off x="508000" y="2362200"/>
-            <a:ext cx="7366000" cy="4267200"/>
+          <p:cNvPr id="11" name="mastery-shape-10"/>
+          <p:cNvSpPr/>
+          <p:nvPr/>
+        </p:nvSpPr>
+        <p:spPr>
+          <a:xfrm>
+            <a:off x="5676900" y="2336800"/>
+            <a:ext cx="4902200" cy="4089400"/>
           </a:xfrm>
           <a:prstGeom prst="rect">
             <a:avLst/>
@@ -3344,14 +3820,53 @@
       </p:sp>
       <p:sp>
         <p:nvSpPr>
-          <p:cNvPr id="7" name="left-title"/>
-          <p:cNvSpPr/>
-          <p:nvPr/>
-        </p:nvSpPr>
-        <p:spPr>
-          <a:xfrm>
-            <a:off x="889000" y="2692400"/>
-            <a:ext cx="6604000" cy="431800"/>
+          <p:cNvPr id="12" name="two-label"/>
+          <p:cNvSpPr/>
+          <p:nvPr/>
+        </p:nvSpPr>
+        <p:spPr>
+          <a:xfrm>
+            <a:off x="6057900" y="2667000"/>
+            <a:ext cx="4191000" cy="254000"/>
+          </a:xfrm>
+          <a:prstGeom prst="rect">
+            <a:avLst/>
+          </a:prstGeom>
+          <a:noFill/>
+          <a:ln/>
+        </p:spPr>
+        <p:txBody>
+          <a:bodyPr wrap="square" lIns="0" tIns="0" rIns="0" bIns="0" rtlCol="0" anchor="t"/>
+          <a:lstStyle/>
+          <a:p>
+            <a:pPr algn="l" indent="0" marL="0">
+              <a:buNone/>
+            </a:pPr>
+            <a:r>
+              <a:rPr lang="en-US" altLang="en-US" sz="1400" dirty="0">
+                <a:solidFill>
+                  <a:srgbClr val="C41220"/>
+                </a:solidFill>
+                <a:latin typeface="Inter" pitchFamily="34" charset="0"/>
+                <a:ea typeface="Inter" pitchFamily="34" charset="-122"/>
+                <a:cs typeface="Inter" pitchFamily="34" charset="-120"/>
+              </a:rPr>
+              <a:t>2</a:t>
+            </a:r>
+            <a:endParaRPr lang="en-US" sz="1400" dirty="0"/>
+          </a:p>
+        </p:txBody>
+      </p:sp>
+      <p:sp>
+        <p:nvSpPr>
+          <p:cNvPr id="13" name="two-title"/>
+          <p:cNvSpPr/>
+          <p:nvPr/>
+        </p:nvSpPr>
+        <p:spPr>
+          <a:xfrm>
+            <a:off x="6057900" y="3124200"/>
+            <a:ext cx="4191000" cy="431800"/>
           </a:xfrm>
           <a:prstGeom prst="rect">
             <a:avLst/>
@@ -3375,7 +3890,7 @@
                 <a:ea typeface="Inter" pitchFamily="34" charset="-122"/>
                 <a:cs typeface="Inter" pitchFamily="34" charset="-120"/>
               </a:rPr>
-              <a:t>DO THIS FIRST</a:t>
+              <a:t>Underline the criteria</a:t>
             </a:r>
             <a:endParaRPr lang="en-US" sz="2500" dirty="0"/>
           </a:p>
@@ -3383,37 +3898,33 @@
       </p:sp>
       <p:sp>
         <p:nvSpPr>
-          <p:cNvPr id="8" name="left-body"/>
-          <p:cNvSpPr/>
-          <p:nvPr/>
-        </p:nvSpPr>
-        <p:spPr>
-          <a:xfrm>
-            <a:off x="889000" y="3454400"/>
-            <a:ext cx="6604000" cy="2895600"/>
-          </a:xfrm>
-          <a:prstGeom prst="rect">
-            <a:avLst/>
-          </a:prstGeom>
-          <a:noFill/>
-          <a:ln/>
-        </p:spPr>
-        <p:txBody>
-          <a:bodyPr wrap="square" lIns="0" tIns="0" rIns="0" bIns="0" rtlCol="0" anchor="t"/>
-          <a:lstStyle/>
-          <a:p>
-            <a:pPr algn="l" marL="317500" indent="-317500">
+          <p:cNvPr id="14" name="two-body"/>
+          <p:cNvSpPr/>
+          <p:nvPr/>
+        </p:nvSpPr>
+        <p:spPr>
+          <a:xfrm>
+            <a:off x="6057900" y="4064000"/>
+            <a:ext cx="4191000" cy="1625600"/>
+          </a:xfrm>
+          <a:prstGeom prst="rect">
+            <a:avLst/>
+          </a:prstGeom>
+          <a:noFill/>
+          <a:ln/>
+        </p:spPr>
+        <p:txBody>
+          <a:bodyPr wrap="square" lIns="0" tIns="0" rIns="0" bIns="0" rtlCol="0" anchor="t"/>
+          <a:lstStyle/>
+          <a:p>
+            <a:pPr algn="l" indent="0" marL="0">
               <a:lnSpc>
-                <a:spcPts val="2560"/>
+                <a:spcPts val="2816"/>
               </a:lnSpc>
-              <a:spcBef>
-                <a:spcPts val="10"/>
-              </a:spcBef>
-              <a:buSzPct val="100000"/>
-              <a:buChar char="•"/>
-            </a:pPr>
-            <a:r>
-              <a:rPr lang="en-US" altLang="en-US" sz="2000" dirty="0">
+              <a:buNone/>
+            </a:pPr>
+            <a:r>
+              <a:rPr lang="en-US" altLang="en-US" sz="2200" dirty="0">
                 <a:solidFill>
                   <a:srgbClr val="3C4043"/>
                 </a:solidFill>
@@ -3421,104 +3932,32 @@
                 <a:ea typeface="Inter" pitchFamily="34" charset="-122"/>
                 <a:cs typeface="Inter" pitchFamily="34" charset="-120"/>
               </a:rPr>
-              <a:t>Write the task, standard, and student product on the form</a:t>
-            </a:r>
-            <a:endParaRPr lang="en-US" sz="2000" dirty="0"/>
-          </a:p>
-          <a:p>
-            <a:pPr algn="l" marL="317500" indent="-317500">
-              <a:lnSpc>
-                <a:spcPts val="2560"/>
-              </a:lnSpc>
-              <a:spcBef>
-                <a:spcPts val="10"/>
-              </a:spcBef>
-              <a:buSzPct val="100000"/>
-              <a:buChar char="•"/>
-            </a:pPr>
-            <a:r>
-              <a:rPr lang="en-US" altLang="en-US" sz="2000" dirty="0">
-                <a:solidFill>
-                  <a:srgbClr val="3C4043"/>
-                </a:solidFill>
-                <a:latin typeface="Inter" pitchFamily="34" charset="0"/>
-                <a:ea typeface="Inter" pitchFamily="34" charset="-122"/>
-                <a:cs typeface="Inter" pitchFamily="34" charset="-120"/>
-              </a:rPr>
-              <a:t>Underline the 1–2 criteria you will look at today</a:t>
-            </a:r>
-            <a:endParaRPr lang="en-US" sz="2000" dirty="0"/>
-          </a:p>
-          <a:p>
-            <a:pPr algn="l" marL="317500" indent="-317500">
-              <a:lnSpc>
-                <a:spcPts val="2560"/>
-              </a:lnSpc>
-              <a:spcBef>
-                <a:spcPts val="10"/>
-              </a:spcBef>
-              <a:buSzPct val="100000"/>
-              <a:buChar char="•"/>
-            </a:pPr>
-            <a:r>
-              <a:rPr lang="en-US" altLang="en-US" sz="2000" dirty="0">
-                <a:solidFill>
-                  <a:srgbClr val="3C4043"/>
-                </a:solidFill>
-                <a:latin typeface="Inter" pitchFamily="34" charset="0"/>
-                <a:ea typeface="Inter" pitchFamily="34" charset="-122"/>
-                <a:cs typeface="Inter" pitchFamily="34" charset="-120"/>
-              </a:rPr>
-              <a:t>Read those criteria out loud as a team</a:t>
-            </a:r>
-            <a:endParaRPr lang="en-US" sz="2000" dirty="0"/>
-          </a:p>
-          <a:p>
-            <a:pPr algn="l" marL="317500" indent="-317500">
-              <a:lnSpc>
-                <a:spcPts val="2560"/>
-              </a:lnSpc>
-              <a:spcBef>
-                <a:spcPts val="10"/>
-              </a:spcBef>
-              <a:buSzPct val="100000"/>
-              <a:buChar char="•"/>
-            </a:pPr>
-            <a:r>
-              <a:rPr lang="en-US" altLang="en-US" sz="2000" dirty="0">
-                <a:solidFill>
-                  <a:srgbClr val="3C4043"/>
-                </a:solidFill>
-                <a:latin typeface="Inter" pitchFamily="34" charset="0"/>
-                <a:ea typeface="Inter" pitchFamily="34" charset="-122"/>
-                <a:cs typeface="Inter" pitchFamily="34" charset="-120"/>
-              </a:rPr>
-              <a:t>Agree on one example of meeting the criterion</a:t>
-            </a:r>
-            <a:endParaRPr lang="en-US" sz="2000" dirty="0"/>
-          </a:p>
-        </p:txBody>
-      </p:sp>
-      <p:sp>
-        <p:nvSpPr>
-          <p:cNvPr id="9" name="mastery-shape-8"/>
-          <p:cNvSpPr/>
-          <p:nvPr/>
-        </p:nvSpPr>
-        <p:spPr>
-          <a:xfrm>
-            <a:off x="8382000" y="2362200"/>
-            <a:ext cx="7366000" cy="4267200"/>
+              <a:t>Mark the one or two rubric criteria you will review today.</a:t>
+            </a:r>
+            <a:endParaRPr lang="en-US" sz="2200" dirty="0"/>
+          </a:p>
+        </p:txBody>
+      </p:sp>
+      <p:sp>
+        <p:nvSpPr>
+          <p:cNvPr id="15" name="mastery-shape-14"/>
+          <p:cNvSpPr/>
+          <p:nvPr/>
+        </p:nvSpPr>
+        <p:spPr>
+          <a:xfrm>
+            <a:off x="10845800" y="2336800"/>
+            <a:ext cx="4902200" cy="4089400"/>
           </a:xfrm>
           <a:prstGeom prst="rect">
             <a:avLst/>
           </a:prstGeom>
           <a:solidFill>
-            <a:srgbClr val="FCE8EA"/>
+            <a:srgbClr val="F3F4F6"/>
           </a:solidFill>
-          <a:ln w="25400">
+          <a:ln w="12700">
             <a:solidFill>
-              <a:srgbClr val="C41220"/>
+              <a:srgbClr val="D1D5DB"/>
             </a:solidFill>
             <a:prstDash val="solid"/>
           </a:ln>
@@ -3526,14 +3965,53 @@
       </p:sp>
       <p:sp>
         <p:nvSpPr>
-          <p:cNvPr id="10" name="right-title"/>
-          <p:cNvSpPr/>
-          <p:nvPr/>
-        </p:nvSpPr>
-        <p:spPr>
-          <a:xfrm>
-            <a:off x="8763000" y="2692400"/>
-            <a:ext cx="6604000" cy="431800"/>
+          <p:cNvPr id="16" name="three-label"/>
+          <p:cNvSpPr/>
+          <p:nvPr/>
+        </p:nvSpPr>
+        <p:spPr>
+          <a:xfrm>
+            <a:off x="11226800" y="2667000"/>
+            <a:ext cx="4191000" cy="254000"/>
+          </a:xfrm>
+          <a:prstGeom prst="rect">
+            <a:avLst/>
+          </a:prstGeom>
+          <a:noFill/>
+          <a:ln/>
+        </p:spPr>
+        <p:txBody>
+          <a:bodyPr wrap="square" lIns="0" tIns="0" rIns="0" bIns="0" rtlCol="0" anchor="t"/>
+          <a:lstStyle/>
+          <a:p>
+            <a:pPr algn="l" indent="0" marL="0">
+              <a:buNone/>
+            </a:pPr>
+            <a:r>
+              <a:rPr lang="en-US" altLang="en-US" sz="1400" dirty="0">
+                <a:solidFill>
+                  <a:srgbClr val="C41220"/>
+                </a:solidFill>
+                <a:latin typeface="Inter" pitchFamily="34" charset="0"/>
+                <a:ea typeface="Inter" pitchFamily="34" charset="-122"/>
+                <a:cs typeface="Inter" pitchFamily="34" charset="-120"/>
+              </a:rPr>
+              <a:t>3</a:t>
+            </a:r>
+            <a:endParaRPr lang="en-US" sz="1400" dirty="0"/>
+          </a:p>
+        </p:txBody>
+      </p:sp>
+      <p:sp>
+        <p:nvSpPr>
+          <p:cNvPr id="17" name="three-title"/>
+          <p:cNvSpPr/>
+          <p:nvPr/>
+        </p:nvSpPr>
+        <p:spPr>
+          <a:xfrm>
+            <a:off x="11226800" y="3124200"/>
+            <a:ext cx="4191000" cy="431800"/>
           </a:xfrm>
           <a:prstGeom prst="rect">
             <a:avLst/>
@@ -3557,7 +4035,7 @@
                 <a:ea typeface="Inter" pitchFamily="34" charset="-122"/>
                 <a:cs typeface="Inter" pitchFamily="34" charset="-120"/>
               </a:rPr>
-              <a:t>BIOLOGY EXAMPLE</a:t>
+              <a:t>Read them aloud</a:t>
             </a:r>
             <a:endParaRPr lang="en-US" sz="2500" dirty="0"/>
           </a:p>
@@ -3565,14 +4043,14 @@
       </p:sp>
       <p:sp>
         <p:nvSpPr>
-          <p:cNvPr id="11" name="right-body"/>
-          <p:cNvSpPr/>
-          <p:nvPr/>
-        </p:nvSpPr>
-        <p:spPr>
-          <a:xfrm>
-            <a:off x="8763000" y="3454400"/>
-            <a:ext cx="6604000" cy="2895600"/>
+          <p:cNvPr id="18" name="three-body"/>
+          <p:cNvSpPr/>
+          <p:nvPr/>
+        </p:nvSpPr>
+        <p:spPr>
+          <a:xfrm>
+            <a:off x="11226800" y="4064000"/>
+            <a:ext cx="4191000" cy="1625600"/>
           </a:xfrm>
           <a:prstGeom prst="rect">
             <a:avLst/>
@@ -3586,12 +4064,12 @@
           <a:p>
             <a:pPr algn="l" indent="0" marL="0">
               <a:lnSpc>
-                <a:spcPts val="2560"/>
+                <a:spcPts val="2816"/>
               </a:lnSpc>
               <a:buNone/>
             </a:pPr>
             <a:r>
-              <a:rPr lang="en-US" altLang="en-US" sz="2000" dirty="0">
+              <a:rPr lang="en-US" altLang="en-US" sz="2200" dirty="0">
                 <a:solidFill>
                   <a:srgbClr val="3C4043"/>
                 </a:solidFill>
@@ -3599,162 +4077,22 @@
                 <a:ea typeface="Inter" pitchFamily="34" charset="-122"/>
                 <a:cs typeface="Inter" pitchFamily="34" charset="-120"/>
               </a:rPr>
-              <a:t>Benchmark #1 rubric, 10 points:</a:t>
-            </a:r>
-            <a:endParaRPr lang="en-US" sz="2000" dirty="0"/>
-          </a:p>
-          <a:p>
-            <a:pPr algn="l" marL="317500" indent="-317500">
-              <a:lnSpc>
-                <a:spcPts val="2560"/>
-              </a:lnSpc>
-              <a:spcBef>
-                <a:spcPts val="10"/>
-              </a:spcBef>
-              <a:buSzPct val="100000"/>
-              <a:buChar char="•"/>
-            </a:pPr>
-            <a:r>
-              <a:rPr lang="en-US" altLang="en-US" sz="2000" b="1" dirty="0">
-                <a:solidFill>
-                  <a:srgbClr val="D81B60"/>
-                </a:solidFill>
-                <a:latin typeface="Inter" pitchFamily="34" charset="0"/>
-                <a:ea typeface="Inter" pitchFamily="34" charset="-122"/>
-                <a:cs typeface="Inter" pitchFamily="34" charset="-120"/>
-              </a:rPr>
-              <a:t>Claim 1</a:t>
-            </a:r>
-            <a:r>
-              <a:rPr lang="en-US" altLang="en-US" sz="2000" dirty="0">
-                <a:solidFill>
-                  <a:srgbClr val="3C4043"/>
-                </a:solidFill>
-                <a:latin typeface="Inter" pitchFamily="34" charset="0"/>
-                <a:ea typeface="Inter" pitchFamily="34" charset="-122"/>
-                <a:cs typeface="Inter" pitchFamily="34" charset="-120"/>
-              </a:rPr>
-              <a:t> — prediction stated</a:t>
-            </a:r>
-            <a:endParaRPr lang="en-US" sz="2000" dirty="0"/>
-          </a:p>
-          <a:p>
-            <a:pPr algn="l" marL="317500" indent="-317500">
-              <a:lnSpc>
-                <a:spcPts val="2560"/>
-              </a:lnSpc>
-              <a:spcBef>
-                <a:spcPts val="10"/>
-              </a:spcBef>
-              <a:buSzPct val="100000"/>
-              <a:buChar char="•"/>
-            </a:pPr>
-            <a:r>
-              <a:rPr lang="en-US" altLang="en-US" sz="2000" b="1" dirty="0">
-                <a:solidFill>
-                  <a:srgbClr val="238636"/>
-                </a:solidFill>
-                <a:latin typeface="Inter" pitchFamily="34" charset="0"/>
-                <a:ea typeface="Inter" pitchFamily="34" charset="-122"/>
-                <a:cs typeface="Inter" pitchFamily="34" charset="-120"/>
-              </a:rPr>
-              <a:t>Evidence 1</a:t>
-            </a:r>
-            <a:r>
-              <a:rPr lang="en-US" altLang="en-US" sz="2000" dirty="0">
-                <a:solidFill>
-                  <a:srgbClr val="3C4043"/>
-                </a:solidFill>
-                <a:latin typeface="Inter" pitchFamily="34" charset="0"/>
-                <a:ea typeface="Inter" pitchFamily="34" charset="-122"/>
-                <a:cs typeface="Inter" pitchFamily="34" charset="-120"/>
-              </a:rPr>
-              <a:t> — graph detail used accurately</a:t>
-            </a:r>
-            <a:endParaRPr lang="en-US" sz="2000" dirty="0"/>
-          </a:p>
-          <a:p>
-            <a:pPr algn="l" marL="317500" indent="-317500">
-              <a:lnSpc>
-                <a:spcPts val="2560"/>
-              </a:lnSpc>
-              <a:spcBef>
-                <a:spcPts val="10"/>
-              </a:spcBef>
-              <a:buSzPct val="100000"/>
-              <a:buChar char="•"/>
-            </a:pPr>
-            <a:r>
-              <a:rPr lang="en-US" altLang="en-US" sz="2000" b="1" dirty="0">
-                <a:solidFill>
-                  <a:srgbClr val="238636"/>
-                </a:solidFill>
-                <a:latin typeface="Inter" pitchFamily="34" charset="0"/>
-                <a:ea typeface="Inter" pitchFamily="34" charset="-122"/>
-                <a:cs typeface="Inter" pitchFamily="34" charset="-120"/>
-              </a:rPr>
-              <a:t>Evidence 1</a:t>
-            </a:r>
-            <a:r>
-              <a:rPr lang="en-US" altLang="en-US" sz="2000" dirty="0">
-                <a:solidFill>
-                  <a:srgbClr val="3C4043"/>
-                </a:solidFill>
-                <a:latin typeface="Inter" pitchFamily="34" charset="0"/>
-                <a:ea typeface="Inter" pitchFamily="34" charset="-122"/>
-                <a:cs typeface="Inter" pitchFamily="34" charset="-120"/>
-              </a:rPr>
-              <a:t> — food web quoted correctly</a:t>
-            </a:r>
-            <a:endParaRPr lang="en-US" sz="2000" dirty="0"/>
-          </a:p>
-          <a:p>
-            <a:pPr algn="l" marL="317500" indent="-317500">
-              <a:lnSpc>
-                <a:spcPts val="2560"/>
-              </a:lnSpc>
-              <a:spcBef>
-                <a:spcPts val="10"/>
-              </a:spcBef>
-              <a:buSzPct val="100000"/>
-              <a:buChar char="•"/>
-            </a:pPr>
-            <a:r>
-              <a:rPr lang="en-US" altLang="en-US" sz="2000" b="1" dirty="0">
-                <a:solidFill>
-                  <a:srgbClr val="1D4ED8"/>
-                </a:solidFill>
-                <a:latin typeface="Inter" pitchFamily="34" charset="0"/>
-                <a:ea typeface="Inter" pitchFamily="34" charset="-122"/>
-                <a:cs typeface="Inter" pitchFamily="34" charset="-120"/>
-              </a:rPr>
-              <a:t>Reasoning 1</a:t>
-            </a:r>
-            <a:r>
-              <a:rPr lang="en-US" altLang="en-US" sz="2000" dirty="0">
-                <a:solidFill>
-                  <a:srgbClr val="3C4043"/>
-                </a:solidFill>
-                <a:latin typeface="Inter" pitchFamily="34" charset="0"/>
-                <a:ea typeface="Inter" pitchFamily="34" charset="-122"/>
-                <a:cs typeface="Inter" pitchFamily="34" charset="-120"/>
-              </a:rPr>
-              <a:t> — evidence linked to the science idea</a:t>
-            </a:r>
-            <a:endParaRPr lang="en-US" sz="2000" dirty="0"/>
-          </a:p>
-        </p:txBody>
-      </p:sp>
-      <p:sp>
-        <p:nvSpPr>
-          <p:cNvPr id="12" name="mastery-shape-11"/>
-          <p:cNvSpPr/>
-          <p:nvPr/>
-        </p:nvSpPr>
-        <p:spPr>
-          <a:xfrm>
-            <a:off x="508000" y="6908800"/>
-            <a:ext cx="15240000" cy="838200"/>
+              <a:t>Agree as a team: what does this criterion look like in student writing?</a:t>
+            </a:r>
+            <a:endParaRPr lang="en-US" sz="2200" dirty="0"/>
+          </a:p>
+        </p:txBody>
+      </p:sp>
+      <p:sp>
+        <p:nvSpPr>
+          <p:cNvPr id="19" name="mastery-shape-18"/>
+          <p:cNvSpPr/>
+          <p:nvPr/>
+        </p:nvSpPr>
+        <p:spPr>
+          <a:xfrm>
+            <a:off x="508000" y="6959600"/>
+            <a:ext cx="15240000" cy="787400"/>
           </a:xfrm>
           <a:prstGeom prst="rect">
             <a:avLst/>
@@ -3767,30 +4105,41 @@
       </p:sp>
       <p:sp>
         <p:nvSpPr>
-          <p:cNvPr id="13" name="reminder"/>
-          <p:cNvSpPr/>
-          <p:nvPr/>
-        </p:nvSpPr>
-        <p:spPr>
-          <a:xfrm>
-            <a:off x="812800" y="7112000"/>
-            <a:ext cx="14605000" cy="457200"/>
-          </a:xfrm>
-          <a:prstGeom prst="rect">
-            <a:avLst/>
-          </a:prstGeom>
-          <a:noFill/>
-          <a:ln/>
-        </p:spPr>
-        <p:txBody>
-          <a:bodyPr wrap="square" lIns="0" tIns="0" rIns="0" bIns="0" rtlCol="0" anchor="t"/>
-          <a:lstStyle/>
-          <a:p>
-            <a:pPr algn="l" indent="0" marL="0">
-              <a:buNone/>
-            </a:pPr>
-            <a:r>
-              <a:rPr lang="en-US" altLang="en-US" sz="1900" dirty="0">
+          <p:cNvPr id="20" name="leave"/>
+          <p:cNvSpPr/>
+          <p:nvPr/>
+        </p:nvSpPr>
+        <p:spPr>
+          <a:xfrm>
+            <a:off x="812800" y="7188200"/>
+            <a:ext cx="14605000" cy="355600"/>
+          </a:xfrm>
+          <a:prstGeom prst="rect">
+            <a:avLst/>
+          </a:prstGeom>
+          <a:noFill/>
+          <a:ln/>
+        </p:spPr>
+        <p:txBody>
+          <a:bodyPr wrap="square" lIns="0" tIns="0" rIns="0" bIns="0" rtlCol="0" anchor="t"/>
+          <a:lstStyle/>
+          <a:p>
+            <a:pPr algn="l" indent="0" marL="0">
+              <a:buNone/>
+            </a:pPr>
+            <a:r>
+              <a:rPr lang="en-US" altLang="en-US" sz="2000" b="1" dirty="0">
+                <a:solidFill>
+                  <a:srgbClr val="F6B4BA"/>
+                </a:solidFill>
+                <a:latin typeface="Inter" pitchFamily="34" charset="0"/>
+                <a:ea typeface="Inter" pitchFamily="34" charset="-122"/>
+                <a:cs typeface="Inter" pitchFamily="34" charset="-120"/>
+              </a:rPr>
+              <a:t>Leave this step with:</a:t>
+            </a:r>
+            <a:r>
+              <a:rPr lang="en-US" altLang="en-US" sz="2000" dirty="0">
                 <a:solidFill>
                   <a:srgbClr val="FFFFFF"/>
                 </a:solidFill>
@@ -3798,15 +4147,15 @@
                 <a:ea typeface="Inter" pitchFamily="34" charset="-122"/>
                 <a:cs typeface="Inter" pitchFamily="34" charset="-120"/>
               </a:rPr>
-              <a:t>Other courses use their own rubric or success criteria; the steps are the same. The rubric leads, and what you notice in the writing and know about your students matters too.</a:t>
-            </a:r>
-            <a:endParaRPr lang="en-US" sz="1900" dirty="0"/>
-          </a:p>
-        </p:txBody>
-      </p:sp>
-      <p:sp>
-        <p:nvSpPr>
-          <p:cNvPr id="14" name="page"/>
+              <a:t> task, standard, student product, and one or two criteria marked.</a:t>
+            </a:r>
+            <a:endParaRPr lang="en-US" sz="2000" dirty="0"/>
+          </a:p>
+        </p:txBody>
+      </p:sp>
+      <p:sp>
+        <p:nvSpPr>
+          <p:cNvPr id="21" name="page"/>
           <p:cNvSpPr/>
           <p:nvPr/>
         </p:nvSpPr>
@@ -3845,7 +4194,7 @@
       </p:sp>
       <p:sp>
         <p:nvSpPr>
-          <p:cNvPr id="15" name="mastery-shape-14"/>
+          <p:cNvPr id="22" name="mastery-shape-21"/>
           <p:cNvSpPr/>
           <p:nvPr/>
         </p:nvSpPr>
@@ -3948,7 +4297,7 @@
                 <a:ea typeface="Inter" pitchFamily="34" charset="-122"/>
                 <a:cs typeface="Inter" pitchFamily="34" charset="-120"/>
               </a:rPr>
-              <a:t>Step 2: Read 3–5 Samples With the Rubric</a:t>
+              <a:t>Step 2: Read the Samples</a:t>
             </a:r>
             <a:endParaRPr lang="en-US" sz="3000" dirty="0"/>
           </a:p>
@@ -3995,30 +4344,69 @@
       </p:sp>
       <p:sp>
         <p:nvSpPr>
-          <p:cNvPr id="5" name="intro"/>
+          <p:cNvPr id="5" name="lit"/>
           <p:cNvSpPr/>
           <p:nvPr/>
         </p:nvSpPr>
         <p:spPr>
           <a:xfrm>
             <a:off x="508000" y="1320800"/>
-            <a:ext cx="15240000" cy="685800"/>
-          </a:xfrm>
-          <a:prstGeom prst="rect">
-            <a:avLst/>
-          </a:prstGeom>
-          <a:noFill/>
-          <a:ln/>
-        </p:spPr>
-        <p:txBody>
-          <a:bodyPr wrap="square" lIns="0" tIns="0" rIns="0" bIns="0" rtlCol="0" anchor="t"/>
-          <a:lstStyle/>
-          <a:p>
-            <a:pPr algn="l" indent="0" marL="0">
-              <a:buNone/>
-            </a:pPr>
-            <a:r>
-              <a:rPr lang="en-US" altLang="en-US" sz="2200" dirty="0">
+            <a:ext cx="15240000" cy="228600"/>
+          </a:xfrm>
+          <a:prstGeom prst="rect">
+            <a:avLst/>
+          </a:prstGeom>
+          <a:noFill/>
+          <a:ln/>
+        </p:spPr>
+        <p:txBody>
+          <a:bodyPr wrap="square" lIns="0" tIns="0" rIns="0" bIns="0" rtlCol="0" anchor="t"/>
+          <a:lstStyle/>
+          <a:p>
+            <a:pPr algn="l" indent="0" marL="0">
+              <a:buNone/>
+            </a:pPr>
+            <a:r>
+              <a:rPr lang="en-US" altLang="en-US" sz="1400" dirty="0">
+                <a:solidFill>
+                  <a:srgbClr val="C41220"/>
+                </a:solidFill>
+                <a:latin typeface="Inter" pitchFamily="34" charset="0"/>
+                <a:ea typeface="Inter" pitchFamily="34" charset="-122"/>
+                <a:cs typeface="Inter" pitchFamily="34" charset="-120"/>
+              </a:rPr>
+              <a:t>AFTER-LESSON REFLECTION</a:t>
+            </a:r>
+            <a:endParaRPr lang="en-US" sz="1400" dirty="0"/>
+          </a:p>
+        </p:txBody>
+      </p:sp>
+      <p:sp>
+        <p:nvSpPr>
+          <p:cNvPr id="6" name="intro"/>
+          <p:cNvSpPr/>
+          <p:nvPr/>
+        </p:nvSpPr>
+        <p:spPr>
+          <a:xfrm>
+            <a:off x="508000" y="1651000"/>
+            <a:ext cx="15240000" cy="482600"/>
+          </a:xfrm>
+          <a:prstGeom prst="rect">
+            <a:avLst/>
+          </a:prstGeom>
+          <a:noFill/>
+          <a:ln/>
+        </p:spPr>
+        <p:txBody>
+          <a:bodyPr wrap="square" lIns="0" tIns="0" rIns="0" bIns="0" rtlCol="0" anchor="t"/>
+          <a:lstStyle/>
+          <a:p>
+            <a:pPr algn="l" indent="0" marL="0">
+              <a:buNone/>
+            </a:pPr>
+            <a:r>
+              <a:rPr lang="en-US" altLang="en-US" sz="2100" dirty="0">
                 <a:solidFill>
                   <a:srgbClr val="3C4043"/>
                 </a:solidFill>
@@ -4026,22 +4414,22 @@
                 <a:ea typeface="Inter" pitchFamily="34" charset="-122"/>
                 <a:cs typeface="Inter" pitchFamily="34" charset="-120"/>
               </a:rPr>
-              <a:t>Read each sample next to the rubric. Describe what is written in the piece before deciding what to do about it.</a:t>
-            </a:r>
-            <a:endParaRPr lang="en-US" sz="2200" dirty="0"/>
-          </a:p>
-        </p:txBody>
-      </p:sp>
-      <p:sp>
-        <p:nvSpPr>
-          <p:cNvPr id="6" name="evidence-shape-5"/>
+              <a:t>What does the student work show about the rubric criteria?</a:t>
+            </a:r>
+            <a:endParaRPr lang="en-US" sz="2100" dirty="0"/>
+          </a:p>
+        </p:txBody>
+      </p:sp>
+      <p:sp>
+        <p:nvSpPr>
+          <p:cNvPr id="7" name="evidence-shape-6"/>
           <p:cNvSpPr/>
           <p:nvPr/>
         </p:nvSpPr>
         <p:spPr>
           <a:xfrm>
             <a:off x="508000" y="2336800"/>
-            <a:ext cx="7366000" cy="4191000"/>
+            <a:ext cx="4902200" cy="4089400"/>
           </a:xfrm>
           <a:prstGeom prst="rect">
             <a:avLst/>
@@ -4059,14 +4447,53 @@
       </p:sp>
       <p:sp>
         <p:nvSpPr>
-          <p:cNvPr id="7" name="left-title"/>
+          <p:cNvPr id="8" name="one-label"/>
           <p:cNvSpPr/>
           <p:nvPr/>
         </p:nvSpPr>
         <p:spPr>
           <a:xfrm>
             <a:off x="889000" y="2667000"/>
-            <a:ext cx="6604000" cy="431800"/>
+            <a:ext cx="4191000" cy="254000"/>
+          </a:xfrm>
+          <a:prstGeom prst="rect">
+            <a:avLst/>
+          </a:prstGeom>
+          <a:noFill/>
+          <a:ln/>
+        </p:spPr>
+        <p:txBody>
+          <a:bodyPr wrap="square" lIns="0" tIns="0" rIns="0" bIns="0" rtlCol="0" anchor="t"/>
+          <a:lstStyle/>
+          <a:p>
+            <a:pPr algn="l" indent="0" marL="0">
+              <a:buNone/>
+            </a:pPr>
+            <a:r>
+              <a:rPr lang="en-US" altLang="en-US" sz="1400" dirty="0">
+                <a:solidFill>
+                  <a:srgbClr val="238636"/>
+                </a:solidFill>
+                <a:latin typeface="Inter" pitchFamily="34" charset="0"/>
+                <a:ea typeface="Inter" pitchFamily="34" charset="-122"/>
+                <a:cs typeface="Inter" pitchFamily="34" charset="-120"/>
+              </a:rPr>
+              <a:t>1</a:t>
+            </a:r>
+            <a:endParaRPr lang="en-US" sz="1400" dirty="0"/>
+          </a:p>
+        </p:txBody>
+      </p:sp>
+      <p:sp>
+        <p:nvSpPr>
+          <p:cNvPr id="9" name="one-title"/>
+          <p:cNvSpPr/>
+          <p:nvPr/>
+        </p:nvSpPr>
+        <p:spPr>
+          <a:xfrm>
+            <a:off x="889000" y="3124200"/>
+            <a:ext cx="4191000" cy="431800"/>
           </a:xfrm>
           <a:prstGeom prst="rect">
             <a:avLst/>
@@ -4084,13 +4511,13 @@
             <a:r>
               <a:rPr lang="en-US" altLang="en-US" sz="2500" dirty="0">
                 <a:solidFill>
-                  <a:srgbClr val="238636"/>
-                </a:solidFill>
-                <a:latin typeface="Inter" pitchFamily="34" charset="0"/>
-                <a:ea typeface="Inter" pitchFamily="34" charset="-122"/>
-                <a:cs typeface="Inter" pitchFamily="34" charset="-120"/>
-              </a:rPr>
-              <a:t>WHAT IS PRESENT</a:t>
+                  <a:srgbClr val="202124"/>
+                </a:solidFill>
+                <a:latin typeface="Inter" pitchFamily="34" charset="0"/>
+                <a:ea typeface="Inter" pitchFamily="34" charset="-122"/>
+                <a:cs typeface="Inter" pitchFamily="34" charset="-120"/>
+              </a:rPr>
+              <a:t>Read one sample</a:t>
             </a:r>
             <a:endParaRPr lang="en-US" sz="2500" dirty="0"/>
           </a:p>
@@ -4098,37 +4525,33 @@
       </p:sp>
       <p:sp>
         <p:nvSpPr>
-          <p:cNvPr id="8" name="left-body"/>
-          <p:cNvSpPr/>
-          <p:nvPr/>
-        </p:nvSpPr>
-        <p:spPr>
-          <a:xfrm>
-            <a:off x="889000" y="3403600"/>
-            <a:ext cx="6604000" cy="2895600"/>
-          </a:xfrm>
-          <a:prstGeom prst="rect">
-            <a:avLst/>
-          </a:prstGeom>
-          <a:noFill/>
-          <a:ln/>
-        </p:spPr>
-        <p:txBody>
-          <a:bodyPr wrap="square" lIns="0" tIns="0" rIns="0" bIns="0" rtlCol="0" anchor="t"/>
-          <a:lstStyle/>
-          <a:p>
-            <a:pPr algn="l" marL="317500" indent="-317500">
+          <p:cNvPr id="10" name="one-body"/>
+          <p:cNvSpPr/>
+          <p:nvPr/>
+        </p:nvSpPr>
+        <p:spPr>
+          <a:xfrm>
+            <a:off x="889000" y="4064000"/>
+            <a:ext cx="4191000" cy="1625600"/>
+          </a:xfrm>
+          <a:prstGeom prst="rect">
+            <a:avLst/>
+          </a:prstGeom>
+          <a:noFill/>
+          <a:ln/>
+        </p:spPr>
+        <p:txBody>
+          <a:bodyPr wrap="square" lIns="0" tIns="0" rIns="0" bIns="0" rtlCol="0" anchor="t"/>
+          <a:lstStyle/>
+          <a:p>
+            <a:pPr algn="l" indent="0" marL="0">
               <a:lnSpc>
-                <a:spcPts val="2560"/>
+                <a:spcPts val="2816"/>
               </a:lnSpc>
-              <a:spcBef>
-                <a:spcPts val="10"/>
-              </a:spcBef>
-              <a:buSzPct val="100000"/>
-              <a:buChar char="•"/>
-            </a:pPr>
-            <a:r>
-              <a:rPr lang="en-US" altLang="en-US" sz="2000" dirty="0">
+              <a:buNone/>
+            </a:pPr>
+            <a:r>
+              <a:rPr lang="en-US" altLang="en-US" sz="2200" dirty="0">
                 <a:solidFill>
                   <a:srgbClr val="3C4043"/>
                 </a:solidFill>
@@ -4136,23 +4559,144 @@
                 <a:ea typeface="Inter" pitchFamily="34" charset="-122"/>
                 <a:cs typeface="Inter" pitchFamily="34" charset="-120"/>
               </a:rPr>
-              <a:t>Quote the line or phrase that shows the criterion</a:t>
-            </a:r>
-            <a:endParaRPr lang="en-US" sz="2000" dirty="0"/>
-          </a:p>
-          <a:p>
-            <a:pPr algn="l" marL="317500" indent="-317500">
+              <a:t>Read the sample once. Keep the rubric open beside it.</a:t>
+            </a:r>
+            <a:endParaRPr lang="en-US" sz="2200" dirty="0"/>
+          </a:p>
+        </p:txBody>
+      </p:sp>
+      <p:sp>
+        <p:nvSpPr>
+          <p:cNvPr id="11" name="evidence-shape-10"/>
+          <p:cNvSpPr/>
+          <p:nvPr/>
+        </p:nvSpPr>
+        <p:spPr>
+          <a:xfrm>
+            <a:off x="5676900" y="2336800"/>
+            <a:ext cx="4902200" cy="4089400"/>
+          </a:xfrm>
+          <a:prstGeom prst="rect">
+            <a:avLst/>
+          </a:prstGeom>
+          <a:solidFill>
+            <a:srgbClr val="F3F4F6"/>
+          </a:solidFill>
+          <a:ln w="12700">
+            <a:solidFill>
+              <a:srgbClr val="D1D5DB"/>
+            </a:solidFill>
+            <a:prstDash val="solid"/>
+          </a:ln>
+        </p:spPr>
+      </p:sp>
+      <p:sp>
+        <p:nvSpPr>
+          <p:cNvPr id="12" name="two-label"/>
+          <p:cNvSpPr/>
+          <p:nvPr/>
+        </p:nvSpPr>
+        <p:spPr>
+          <a:xfrm>
+            <a:off x="6057900" y="2667000"/>
+            <a:ext cx="4191000" cy="254000"/>
+          </a:xfrm>
+          <a:prstGeom prst="rect">
+            <a:avLst/>
+          </a:prstGeom>
+          <a:noFill/>
+          <a:ln/>
+        </p:spPr>
+        <p:txBody>
+          <a:bodyPr wrap="square" lIns="0" tIns="0" rIns="0" bIns="0" rtlCol="0" anchor="t"/>
+          <a:lstStyle/>
+          <a:p>
+            <a:pPr algn="l" indent="0" marL="0">
+              <a:buNone/>
+            </a:pPr>
+            <a:r>
+              <a:rPr lang="en-US" altLang="en-US" sz="1400" dirty="0">
+                <a:solidFill>
+                  <a:srgbClr val="C41220"/>
+                </a:solidFill>
+                <a:latin typeface="Inter" pitchFamily="34" charset="0"/>
+                <a:ea typeface="Inter" pitchFamily="34" charset="-122"/>
+                <a:cs typeface="Inter" pitchFamily="34" charset="-120"/>
+              </a:rPr>
+              <a:t>2</a:t>
+            </a:r>
+            <a:endParaRPr lang="en-US" sz="1400" dirty="0"/>
+          </a:p>
+        </p:txBody>
+      </p:sp>
+      <p:sp>
+        <p:nvSpPr>
+          <p:cNvPr id="13" name="two-title"/>
+          <p:cNvSpPr/>
+          <p:nvPr/>
+        </p:nvSpPr>
+        <p:spPr>
+          <a:xfrm>
+            <a:off x="6057900" y="3124200"/>
+            <a:ext cx="4191000" cy="431800"/>
+          </a:xfrm>
+          <a:prstGeom prst="rect">
+            <a:avLst/>
+          </a:prstGeom>
+          <a:noFill/>
+          <a:ln/>
+        </p:spPr>
+        <p:txBody>
+          <a:bodyPr wrap="square" lIns="0" tIns="0" rIns="0" bIns="0" rtlCol="0" anchor="t"/>
+          <a:lstStyle/>
+          <a:p>
+            <a:pPr algn="l" indent="0" marL="0">
+              <a:buNone/>
+            </a:pPr>
+            <a:r>
+              <a:rPr lang="en-US" altLang="en-US" sz="2500" dirty="0">
+                <a:solidFill>
+                  <a:srgbClr val="202124"/>
+                </a:solidFill>
+                <a:latin typeface="Inter" pitchFamily="34" charset="0"/>
+                <a:ea typeface="Inter" pitchFamily="34" charset="-122"/>
+                <a:cs typeface="Inter" pitchFamily="34" charset="-120"/>
+              </a:rPr>
+              <a:t>Mark what you see</a:t>
+            </a:r>
+            <a:endParaRPr lang="en-US" sz="2500" dirty="0"/>
+          </a:p>
+        </p:txBody>
+      </p:sp>
+      <p:sp>
+        <p:nvSpPr>
+          <p:cNvPr id="14" name="two-body"/>
+          <p:cNvSpPr/>
+          <p:nvPr/>
+        </p:nvSpPr>
+        <p:spPr>
+          <a:xfrm>
+            <a:off x="6057900" y="4064000"/>
+            <a:ext cx="4191000" cy="1625600"/>
+          </a:xfrm>
+          <a:prstGeom prst="rect">
+            <a:avLst/>
+          </a:prstGeom>
+          <a:noFill/>
+          <a:ln/>
+        </p:spPr>
+        <p:txBody>
+          <a:bodyPr wrap="square" lIns="0" tIns="0" rIns="0" bIns="0" rtlCol="0" anchor="t"/>
+          <a:lstStyle/>
+          <a:p>
+            <a:pPr algn="l" indent="0" marL="0">
               <a:lnSpc>
-                <a:spcPts val="2560"/>
+                <a:spcPts val="2816"/>
               </a:lnSpc>
-              <a:spcBef>
-                <a:spcPts val="10"/>
-              </a:spcBef>
-              <a:buSzPct val="100000"/>
-              <a:buChar char="•"/>
-            </a:pPr>
-            <a:r>
-              <a:rPr lang="en-US" altLang="en-US" sz="2000" dirty="0">
+              <a:buNone/>
+            </a:pPr>
+            <a:r>
+              <a:rPr lang="en-US" altLang="en-US" sz="2200" dirty="0">
                 <a:solidFill>
                   <a:srgbClr val="3C4043"/>
                 </a:solidFill>
@@ -4160,70 +4704,22 @@
                 <a:ea typeface="Inter" pitchFamily="34" charset="-122"/>
                 <a:cs typeface="Inter" pitchFamily="34" charset="-120"/>
               </a:rPr>
-              <a:t>Note the criterion number or name beside it</a:t>
-            </a:r>
-            <a:endParaRPr lang="en-US" sz="2000" dirty="0"/>
-          </a:p>
-          <a:p>
-            <a:pPr algn="l" marL="317500" indent="-317500">
-              <a:lnSpc>
-                <a:spcPts val="2560"/>
-              </a:lnSpc>
-              <a:spcBef>
-                <a:spcPts val="10"/>
-              </a:spcBef>
-              <a:buSzPct val="100000"/>
-              <a:buChar char="•"/>
-            </a:pPr>
-            <a:r>
-              <a:rPr lang="en-US" altLang="en-US" sz="2000" dirty="0">
-                <a:solidFill>
-                  <a:srgbClr val="3C4043"/>
-                </a:solidFill>
-                <a:latin typeface="Inter" pitchFamily="34" charset="0"/>
-                <a:ea typeface="Inter" pitchFamily="34" charset="-122"/>
-                <a:cs typeface="Inter" pitchFamily="34" charset="-120"/>
-              </a:rPr>
-              <a:t>Mark what the student did well in one sentence</a:t>
-            </a:r>
-            <a:endParaRPr lang="en-US" sz="2000" dirty="0"/>
-          </a:p>
-          <a:p>
-            <a:pPr algn="l" marL="317500" indent="-317500">
-              <a:lnSpc>
-                <a:spcPts val="2560"/>
-              </a:lnSpc>
-              <a:spcBef>
-                <a:spcPts val="10"/>
-              </a:spcBef>
-              <a:buSzPct val="100000"/>
-              <a:buChar char="•"/>
-            </a:pPr>
-            <a:r>
-              <a:rPr lang="en-US" altLang="en-US" sz="2000" dirty="0">
-                <a:solidFill>
-                  <a:srgbClr val="3C4043"/>
-                </a:solidFill>
-                <a:latin typeface="Inter" pitchFamily="34" charset="0"/>
-                <a:ea typeface="Inter" pitchFamily="34" charset="-122"/>
-                <a:cs typeface="Inter" pitchFamily="34" charset="-120"/>
-              </a:rPr>
-              <a:t>Repeat for each of the 3–5 samples</a:t>
-            </a:r>
-            <a:endParaRPr lang="en-US" sz="2000" dirty="0"/>
-          </a:p>
-        </p:txBody>
-      </p:sp>
-      <p:sp>
-        <p:nvSpPr>
-          <p:cNvPr id="9" name="evidence-shape-8"/>
-          <p:cNvSpPr/>
-          <p:nvPr/>
-        </p:nvSpPr>
-        <p:spPr>
-          <a:xfrm>
-            <a:off x="8382000" y="2336800"/>
-            <a:ext cx="7366000" cy="4191000"/>
+              <a:t>Underline or quote one line that shows the criterion.</a:t>
+            </a:r>
+            <a:endParaRPr lang="en-US" sz="2200" dirty="0"/>
+          </a:p>
+        </p:txBody>
+      </p:sp>
+      <p:sp>
+        <p:nvSpPr>
+          <p:cNvPr id="15" name="evidence-shape-14"/>
+          <p:cNvSpPr/>
+          <p:nvPr/>
+        </p:nvSpPr>
+        <p:spPr>
+          <a:xfrm>
+            <a:off x="10845800" y="2336800"/>
+            <a:ext cx="4902200" cy="4089400"/>
           </a:xfrm>
           <a:prstGeom prst="rect">
             <a:avLst/>
@@ -4241,14 +4737,53 @@
       </p:sp>
       <p:sp>
         <p:nvSpPr>
-          <p:cNvPr id="10" name="right-title"/>
-          <p:cNvSpPr/>
-          <p:nvPr/>
-        </p:nvSpPr>
-        <p:spPr>
-          <a:xfrm>
-            <a:off x="8763000" y="2667000"/>
-            <a:ext cx="6604000" cy="431800"/>
+          <p:cNvPr id="16" name="three-label"/>
+          <p:cNvSpPr/>
+          <p:nvPr/>
+        </p:nvSpPr>
+        <p:spPr>
+          <a:xfrm>
+            <a:off x="11226800" y="2667000"/>
+            <a:ext cx="4191000" cy="254000"/>
+          </a:xfrm>
+          <a:prstGeom prst="rect">
+            <a:avLst/>
+          </a:prstGeom>
+          <a:noFill/>
+          <a:ln/>
+        </p:spPr>
+        <p:txBody>
+          <a:bodyPr wrap="square" lIns="0" tIns="0" rIns="0" bIns="0" rtlCol="0" anchor="t"/>
+          <a:lstStyle/>
+          <a:p>
+            <a:pPr algn="l" indent="0" marL="0">
+              <a:buNone/>
+            </a:pPr>
+            <a:r>
+              <a:rPr lang="en-US" altLang="en-US" sz="1400" dirty="0">
+                <a:solidFill>
+                  <a:srgbClr val="C41220"/>
+                </a:solidFill>
+                <a:latin typeface="Inter" pitchFamily="34" charset="0"/>
+                <a:ea typeface="Inter" pitchFamily="34" charset="-122"/>
+                <a:cs typeface="Inter" pitchFamily="34" charset="-120"/>
+              </a:rPr>
+              <a:t>3</a:t>
+            </a:r>
+            <a:endParaRPr lang="en-US" sz="1400" dirty="0"/>
+          </a:p>
+        </p:txBody>
+      </p:sp>
+      <p:sp>
+        <p:nvSpPr>
+          <p:cNvPr id="17" name="three-title"/>
+          <p:cNvSpPr/>
+          <p:nvPr/>
+        </p:nvSpPr>
+        <p:spPr>
+          <a:xfrm>
+            <a:off x="11226800" y="3124200"/>
+            <a:ext cx="4191000" cy="431800"/>
           </a:xfrm>
           <a:prstGeom prst="rect">
             <a:avLst/>
@@ -4272,7 +4807,7 @@
                 <a:ea typeface="Inter" pitchFamily="34" charset="-122"/>
                 <a:cs typeface="Inter" pitchFamily="34" charset="-120"/>
               </a:rPr>
-              <a:t>WHAT IS MISSING OR PARTIAL</a:t>
+              <a:t>Mark the gap</a:t>
             </a:r>
             <a:endParaRPr lang="en-US" sz="2500" dirty="0"/>
           </a:p>
@@ -4280,37 +4815,33 @@
       </p:sp>
       <p:sp>
         <p:nvSpPr>
-          <p:cNvPr id="11" name="right-body"/>
-          <p:cNvSpPr/>
-          <p:nvPr/>
-        </p:nvSpPr>
-        <p:spPr>
-          <a:xfrm>
-            <a:off x="8763000" y="3403600"/>
-            <a:ext cx="6604000" cy="2895600"/>
-          </a:xfrm>
-          <a:prstGeom prst="rect">
-            <a:avLst/>
-          </a:prstGeom>
-          <a:noFill/>
-          <a:ln/>
-        </p:spPr>
-        <p:txBody>
-          <a:bodyPr wrap="square" lIns="0" tIns="0" rIns="0" bIns="0" rtlCol="0" anchor="t"/>
-          <a:lstStyle/>
-          <a:p>
-            <a:pPr algn="l" marL="317500" indent="-317500">
+          <p:cNvPr id="18" name="three-body"/>
+          <p:cNvSpPr/>
+          <p:nvPr/>
+        </p:nvSpPr>
+        <p:spPr>
+          <a:xfrm>
+            <a:off x="11226800" y="4064000"/>
+            <a:ext cx="4191000" cy="1625600"/>
+          </a:xfrm>
+          <a:prstGeom prst="rect">
+            <a:avLst/>
+          </a:prstGeom>
+          <a:noFill/>
+          <a:ln/>
+        </p:spPr>
+        <p:txBody>
+          <a:bodyPr wrap="square" lIns="0" tIns="0" rIns="0" bIns="0" rtlCol="0" anchor="t"/>
+          <a:lstStyle/>
+          <a:p>
+            <a:pPr algn="l" indent="0" marL="0">
               <a:lnSpc>
-                <a:spcPts val="2560"/>
+                <a:spcPts val="2816"/>
               </a:lnSpc>
-              <a:spcBef>
-                <a:spcPts val="10"/>
-              </a:spcBef>
-              <a:buSzPct val="100000"/>
-              <a:buChar char="•"/>
-            </a:pPr>
-            <a:r>
-              <a:rPr lang="en-US" altLang="en-US" sz="2000" dirty="0">
+              <a:buNone/>
+            </a:pPr>
+            <a:r>
+              <a:rPr lang="en-US" altLang="en-US" sz="2200" dirty="0">
                 <a:solidFill>
                   <a:srgbClr val="3C4043"/>
                 </a:solidFill>
@@ -4318,94 +4849,22 @@
                 <a:ea typeface="Inter" pitchFamily="34" charset="-122"/>
                 <a:cs typeface="Inter" pitchFamily="34" charset="-120"/>
               </a:rPr>
-              <a:t>Name the criterion that is not yet met</a:t>
-            </a:r>
-            <a:endParaRPr lang="en-US" sz="2000" dirty="0"/>
-          </a:p>
-          <a:p>
-            <a:pPr algn="l" marL="317500" indent="-317500">
-              <a:lnSpc>
-                <a:spcPts val="2560"/>
-              </a:lnSpc>
-              <a:spcBef>
-                <a:spcPts val="10"/>
-              </a:spcBef>
-              <a:buSzPct val="100000"/>
-              <a:buChar char="•"/>
-            </a:pPr>
-            <a:r>
-              <a:rPr lang="en-US" altLang="en-US" sz="2000" dirty="0">
-                <a:solidFill>
-                  <a:srgbClr val="3C4043"/>
-                </a:solidFill>
-                <a:latin typeface="Inter" pitchFamily="34" charset="0"/>
-                <a:ea typeface="Inter" pitchFamily="34" charset="-122"/>
-                <a:cs typeface="Inter" pitchFamily="34" charset="-120"/>
-              </a:rPr>
-              <a:t>Say whether the gap is claim, evidence, reasoning, or science language</a:t>
-            </a:r>
-            <a:endParaRPr lang="en-US" sz="2000" dirty="0"/>
-          </a:p>
-          <a:p>
-            <a:pPr algn="l" marL="317500" indent="-317500">
-              <a:lnSpc>
-                <a:spcPts val="2560"/>
-              </a:lnSpc>
-              <a:spcBef>
-                <a:spcPts val="10"/>
-              </a:spcBef>
-              <a:buSzPct val="100000"/>
-              <a:buChar char="•"/>
-            </a:pPr>
-            <a:r>
-              <a:rPr lang="en-US" altLang="en-US" sz="2000" dirty="0">
-                <a:solidFill>
-                  <a:srgbClr val="3C4043"/>
-                </a:solidFill>
-                <a:latin typeface="Inter" pitchFamily="34" charset="0"/>
-                <a:ea typeface="Inter" pitchFamily="34" charset="-122"/>
-                <a:cs typeface="Inter" pitchFamily="34" charset="-120"/>
-              </a:rPr>
-              <a:t>Keep it about the writing, not the student</a:t>
-            </a:r>
-            <a:endParaRPr lang="en-US" sz="2000" dirty="0"/>
-          </a:p>
-          <a:p>
-            <a:pPr algn="l" marL="317500" indent="-317500">
-              <a:lnSpc>
-                <a:spcPts val="2560"/>
-              </a:lnSpc>
-              <a:spcBef>
-                <a:spcPts val="10"/>
-              </a:spcBef>
-              <a:buSzPct val="100000"/>
-              <a:buChar char="•"/>
-            </a:pPr>
-            <a:r>
-              <a:rPr lang="en-US" altLang="en-US" sz="2000" dirty="0">
-                <a:solidFill>
-                  <a:srgbClr val="3C4043"/>
-                </a:solidFill>
-                <a:latin typeface="Inter" pitchFamily="34" charset="0"/>
-                <a:ea typeface="Inter" pitchFamily="34" charset="-122"/>
-                <a:cs typeface="Inter" pitchFamily="34" charset="-120"/>
-              </a:rPr>
-              <a:t>Use the rubric wording so the team compares the same thing</a:t>
-            </a:r>
-            <a:endParaRPr lang="en-US" sz="2000" dirty="0"/>
-          </a:p>
-        </p:txBody>
-      </p:sp>
-      <p:sp>
-        <p:nvSpPr>
-          <p:cNvPr id="12" name="evidence-shape-11"/>
-          <p:cNvSpPr/>
-          <p:nvPr/>
-        </p:nvSpPr>
-        <p:spPr>
-          <a:xfrm>
-            <a:off x="508000" y="6858000"/>
-            <a:ext cx="15240000" cy="889000"/>
+              <a:t>Name the rubric criterion that is missing or only partly shown.</a:t>
+            </a:r>
+            <a:endParaRPr lang="en-US" sz="2200" dirty="0"/>
+          </a:p>
+        </p:txBody>
+      </p:sp>
+      <p:sp>
+        <p:nvSpPr>
+          <p:cNvPr id="19" name="evidence-shape-18"/>
+          <p:cNvSpPr/>
+          <p:nvPr/>
+        </p:nvSpPr>
+        <p:spPr>
+          <a:xfrm>
+            <a:off x="508000" y="6959600"/>
+            <a:ext cx="15240000" cy="787400"/>
           </a:xfrm>
           <a:prstGeom prst="rect">
             <a:avLst/>
@@ -4418,28 +4877,39 @@
       </p:sp>
       <p:sp>
         <p:nvSpPr>
-          <p:cNvPr id="13" name="rule"/>
-          <p:cNvSpPr/>
-          <p:nvPr/>
-        </p:nvSpPr>
-        <p:spPr>
-          <a:xfrm>
-            <a:off x="812800" y="7112000"/>
-            <a:ext cx="14605000" cy="406400"/>
-          </a:xfrm>
-          <a:prstGeom prst="rect">
-            <a:avLst/>
-          </a:prstGeom>
-          <a:noFill/>
-          <a:ln/>
-        </p:spPr>
-        <p:txBody>
-          <a:bodyPr wrap="square" lIns="0" tIns="0" rIns="0" bIns="0" rtlCol="0" anchor="t"/>
-          <a:lstStyle/>
-          <a:p>
-            <a:pPr algn="l" indent="0" marL="0">
-              <a:buNone/>
-            </a:pPr>
+          <p:cNvPr id="20" name="leave"/>
+          <p:cNvSpPr/>
+          <p:nvPr/>
+        </p:nvSpPr>
+        <p:spPr>
+          <a:xfrm>
+            <a:off x="812800" y="7188200"/>
+            <a:ext cx="14605000" cy="355600"/>
+          </a:xfrm>
+          <a:prstGeom prst="rect">
+            <a:avLst/>
+          </a:prstGeom>
+          <a:noFill/>
+          <a:ln/>
+        </p:spPr>
+        <p:txBody>
+          <a:bodyPr wrap="square" lIns="0" tIns="0" rIns="0" bIns="0" rtlCol="0" anchor="t"/>
+          <a:lstStyle/>
+          <a:p>
+            <a:pPr algn="l" indent="0" marL="0">
+              <a:buNone/>
+            </a:pPr>
+            <a:r>
+              <a:rPr lang="en-US" altLang="en-US" sz="2000" b="1" dirty="0">
+                <a:solidFill>
+                  <a:srgbClr val="B6E3BF"/>
+                </a:solidFill>
+                <a:latin typeface="Inter" pitchFamily="34" charset="0"/>
+                <a:ea typeface="Inter" pitchFamily="34" charset="-122"/>
+                <a:cs typeface="Inter" pitchFamily="34" charset="-120"/>
+              </a:rPr>
+              <a:t>Repeat for 3–5 samples.</a:t>
+            </a:r>
             <a:r>
               <a:rPr lang="en-US" altLang="en-US" sz="2000" dirty="0">
                 <a:solidFill>
@@ -4449,7 +4919,7 @@
                 <a:ea typeface="Inter" pitchFamily="34" charset="-122"/>
                 <a:cs typeface="Inter" pitchFamily="34" charset="-120"/>
               </a:rPr>
-              <a:t>Describe the work. Do not rank students, teachers, classes, or courses, and do not sum up a course by one sample.</a:t>
+              <a:t> Leave this step with evidence of one strength and one need.</a:t>
             </a:r>
             <a:endParaRPr lang="en-US" sz="2000" dirty="0"/>
           </a:p>
@@ -4457,7 +4927,7 @@
       </p:sp>
       <p:sp>
         <p:nvSpPr>
-          <p:cNvPr id="14" name="page"/>
+          <p:cNvPr id="21" name="page"/>
           <p:cNvSpPr/>
           <p:nvPr/>
         </p:nvSpPr>
@@ -4496,7 +4966,7 @@
       </p:sp>
       <p:sp>
         <p:nvSpPr>
-          <p:cNvPr id="15" name="evidence-shape-14"/>
+          <p:cNvPr id="22" name="evidence-shape-21"/>
           <p:cNvSpPr/>
           <p:nvPr/>
         </p:nvSpPr>
@@ -4599,7 +5069,7 @@
                 <a:ea typeface="Inter" pitchFamily="34" charset="-122"/>
                 <a:cs typeface="Inter" pitchFamily="34" charset="-120"/>
               </a:rPr>
-              <a:t>Step 3: Name One Pattern and One Priority Need</a:t>
+              <a:t>Step 3: Name One Priority Need</a:t>
             </a:r>
             <a:endParaRPr lang="en-US" sz="3000" dirty="0"/>
           </a:p>
@@ -4646,30 +5116,69 @@
       </p:sp>
       <p:sp>
         <p:nvSpPr>
-          <p:cNvPr id="5" name="intro"/>
+          <p:cNvPr id="5" name="lit"/>
           <p:cNvSpPr/>
           <p:nvPr/>
         </p:nvSpPr>
         <p:spPr>
           <a:xfrm>
             <a:off x="508000" y="1320800"/>
-            <a:ext cx="15240000" cy="685800"/>
-          </a:xfrm>
-          <a:prstGeom prst="rect">
-            <a:avLst/>
-          </a:prstGeom>
-          <a:noFill/>
-          <a:ln/>
-        </p:spPr>
-        <p:txBody>
-          <a:bodyPr wrap="square" lIns="0" tIns="0" rIns="0" bIns="0" rtlCol="0" anchor="t"/>
-          <a:lstStyle/>
-          <a:p>
-            <a:pPr algn="l" indent="0" marL="0">
-              <a:buNone/>
-            </a:pPr>
-            <a:r>
-              <a:rPr lang="en-US" altLang="en-US" sz="2200" dirty="0">
+            <a:ext cx="15240000" cy="228600"/>
+          </a:xfrm>
+          <a:prstGeom prst="rect">
+            <a:avLst/>
+          </a:prstGeom>
+          <a:noFill/>
+          <a:ln/>
+        </p:spPr>
+        <p:txBody>
+          <a:bodyPr wrap="square" lIns="0" tIns="0" rIns="0" bIns="0" rtlCol="0" anchor="t"/>
+          <a:lstStyle/>
+          <a:p>
+            <a:pPr algn="l" indent="0" marL="0">
+              <a:buNone/>
+            </a:pPr>
+            <a:r>
+              <a:rPr lang="en-US" altLang="en-US" sz="1400" dirty="0">
+                <a:solidFill>
+                  <a:srgbClr val="C41220"/>
+                </a:solidFill>
+                <a:latin typeface="Inter" pitchFamily="34" charset="0"/>
+                <a:ea typeface="Inter" pitchFamily="34" charset="-122"/>
+                <a:cs typeface="Inter" pitchFamily="34" charset="-120"/>
+              </a:rPr>
+              <a:t>AFTER-LESSON REFLECTION</a:t>
+            </a:r>
+            <a:endParaRPr lang="en-US" sz="1400" dirty="0"/>
+          </a:p>
+        </p:txBody>
+      </p:sp>
+      <p:sp>
+        <p:nvSpPr>
+          <p:cNvPr id="6" name="intro"/>
+          <p:cNvSpPr/>
+          <p:nvPr/>
+        </p:nvSpPr>
+        <p:spPr>
+          <a:xfrm>
+            <a:off x="508000" y="1651000"/>
+            <a:ext cx="15240000" cy="482600"/>
+          </a:xfrm>
+          <a:prstGeom prst="rect">
+            <a:avLst/>
+          </a:prstGeom>
+          <a:noFill/>
+          <a:ln/>
+        </p:spPr>
+        <p:txBody>
+          <a:bodyPr wrap="square" lIns="0" tIns="0" rIns="0" bIns="0" rtlCol="0" anchor="t"/>
+          <a:lstStyle/>
+          <a:p>
+            <a:pPr algn="l" indent="0" marL="0">
+              <a:buNone/>
+            </a:pPr>
+            <a:r>
+              <a:rPr lang="en-US" altLang="en-US" sz="2100" dirty="0">
                 <a:solidFill>
                   <a:srgbClr val="3C4043"/>
                 </a:solidFill>
@@ -4677,22 +5186,22 @@
                 <a:ea typeface="Inter" pitchFamily="34" charset="-122"/>
                 <a:cs typeface="Inter" pitchFamily="34" charset="-120"/>
               </a:rPr>
-              <a:t>Across the samples, look for one pattern. Then choose the single need that will help students most right now.</a:t>
-            </a:r>
-            <a:endParaRPr lang="en-US" sz="2200" dirty="0"/>
-          </a:p>
-        </p:txBody>
-      </p:sp>
-      <p:sp>
-        <p:nvSpPr>
-          <p:cNvPr id="6" name="pattern-shape-5"/>
+              <a:t>Which rubric need appears most often, and should guide the next response?</a:t>
+            </a:r>
+            <a:endParaRPr lang="en-US" sz="2100" dirty="0"/>
+          </a:p>
+        </p:txBody>
+      </p:sp>
+      <p:sp>
+        <p:nvSpPr>
+          <p:cNvPr id="7" name="pattern-shape-6"/>
           <p:cNvSpPr/>
           <p:nvPr/>
         </p:nvSpPr>
         <p:spPr>
           <a:xfrm>
             <a:off x="508000" y="2336800"/>
-            <a:ext cx="4902200" cy="4267200"/>
+            <a:ext cx="4902200" cy="4089400"/>
           </a:xfrm>
           <a:prstGeom prst="rect">
             <a:avLst/>
@@ -4710,13 +5219,52 @@
       </p:sp>
       <p:sp>
         <p:nvSpPr>
-          <p:cNvPr id="7" name="p1-title"/>
-          <p:cNvSpPr/>
-          <p:nvPr/>
-        </p:nvSpPr>
-        <p:spPr>
-          <a:xfrm>
-            <a:off x="889000" y="2692400"/>
+          <p:cNvPr id="8" name="one-label"/>
+          <p:cNvSpPr/>
+          <p:nvPr/>
+        </p:nvSpPr>
+        <p:spPr>
+          <a:xfrm>
+            <a:off x="889000" y="2667000"/>
+            <a:ext cx="4191000" cy="254000"/>
+          </a:xfrm>
+          <a:prstGeom prst="rect">
+            <a:avLst/>
+          </a:prstGeom>
+          <a:noFill/>
+          <a:ln/>
+        </p:spPr>
+        <p:txBody>
+          <a:bodyPr wrap="square" lIns="0" tIns="0" rIns="0" bIns="0" rtlCol="0" anchor="t"/>
+          <a:lstStyle/>
+          <a:p>
+            <a:pPr algn="l" indent="0" marL="0">
+              <a:buNone/>
+            </a:pPr>
+            <a:r>
+              <a:rPr lang="en-US" altLang="en-US" sz="1400" dirty="0">
+                <a:solidFill>
+                  <a:srgbClr val="C41220"/>
+                </a:solidFill>
+                <a:latin typeface="Inter" pitchFamily="34" charset="0"/>
+                <a:ea typeface="Inter" pitchFamily="34" charset="-122"/>
+                <a:cs typeface="Inter" pitchFamily="34" charset="-120"/>
+              </a:rPr>
+              <a:t>1</a:t>
+            </a:r>
+            <a:endParaRPr lang="en-US" sz="1400" dirty="0"/>
+          </a:p>
+        </p:txBody>
+      </p:sp>
+      <p:sp>
+        <p:nvSpPr>
+          <p:cNvPr id="9" name="one-title"/>
+          <p:cNvSpPr/>
+          <p:nvPr/>
+        </p:nvSpPr>
+        <p:spPr>
+          <a:xfrm>
+            <a:off x="889000" y="3124200"/>
             <a:ext cx="4191000" cy="431800"/>
           </a:xfrm>
           <a:prstGeom prst="rect">
@@ -4733,7 +5281,7 @@
               <a:buNone/>
             </a:pPr>
             <a:r>
-              <a:rPr lang="en-US" altLang="en-US" sz="2400" dirty="0">
+              <a:rPr lang="en-US" altLang="en-US" sz="2500" dirty="0">
                 <a:solidFill>
                   <a:srgbClr val="202124"/>
                 </a:solidFill>
@@ -4741,22 +5289,22 @@
                 <a:ea typeface="Inter" pitchFamily="34" charset="-122"/>
                 <a:cs typeface="Inter" pitchFamily="34" charset="-120"/>
               </a:rPr>
-              <a:t>1. Look across samples</a:t>
-            </a:r>
-            <a:endParaRPr lang="en-US" sz="2400" dirty="0"/>
-          </a:p>
-        </p:txBody>
-      </p:sp>
-      <p:sp>
-        <p:nvSpPr>
-          <p:cNvPr id="8" name="p1-body"/>
-          <p:cNvSpPr/>
-          <p:nvPr/>
-        </p:nvSpPr>
-        <p:spPr>
-          <a:xfrm>
-            <a:off x="889000" y="3454400"/>
-            <a:ext cx="4191000" cy="2921000"/>
+              <a:t>Look for repeats</a:t>
+            </a:r>
+            <a:endParaRPr lang="en-US" sz="2500" dirty="0"/>
+          </a:p>
+        </p:txBody>
+      </p:sp>
+      <p:sp>
+        <p:nvSpPr>
+          <p:cNvPr id="10" name="one-body"/>
+          <p:cNvSpPr/>
+          <p:nvPr/>
+        </p:nvSpPr>
+        <p:spPr>
+          <a:xfrm>
+            <a:off x="889000" y="4064000"/>
+            <a:ext cx="4191000" cy="1625600"/>
           </a:xfrm>
           <a:prstGeom prst="rect">
             <a:avLst/>
@@ -4770,12 +5318,12 @@
           <a:p>
             <a:pPr algn="l" indent="0" marL="0">
               <a:lnSpc>
-                <a:spcPts val="2560"/>
+                <a:spcPts val="2816"/>
               </a:lnSpc>
               <a:buNone/>
             </a:pPr>
             <a:r>
-              <a:rPr lang="en-US" altLang="en-US" sz="2000" dirty="0">
+              <a:rPr lang="en-US" altLang="en-US" sz="2200" dirty="0">
                 <a:solidFill>
                   <a:srgbClr val="3C4043"/>
                 </a:solidFill>
@@ -4783,104 +5331,32 @@
                 <a:ea typeface="Inter" pitchFamily="34" charset="-122"/>
                 <a:cs typeface="Inter" pitchFamily="34" charset="-120"/>
               </a:rPr>
-              <a:t>Ask:</a:t>
-            </a:r>
-            <a:endParaRPr lang="en-US" sz="2000" dirty="0"/>
-          </a:p>
-          <a:p>
-            <a:pPr algn="l" marL="317500" indent="-317500">
-              <a:lnSpc>
-                <a:spcPts val="2560"/>
-              </a:lnSpc>
-              <a:spcBef>
-                <a:spcPts val="10"/>
-              </a:spcBef>
-              <a:buSzPct val="100000"/>
-              <a:buChar char="•"/>
-            </a:pPr>
-            <a:r>
-              <a:rPr lang="en-US" altLang="en-US" sz="2000" dirty="0">
-                <a:solidFill>
-                  <a:srgbClr val="3C4043"/>
-                </a:solidFill>
-                <a:latin typeface="Inter" pitchFamily="34" charset="0"/>
-                <a:ea typeface="Inter" pitchFamily="34" charset="-122"/>
-                <a:cs typeface="Inter" pitchFamily="34" charset="-120"/>
-              </a:rPr>
-              <a:t>Which criterion is strong in most papers?</a:t>
-            </a:r>
-            <a:endParaRPr lang="en-US" sz="2000" dirty="0"/>
-          </a:p>
-          <a:p>
-            <a:pPr algn="l" marL="317500" indent="-317500">
-              <a:lnSpc>
-                <a:spcPts val="2560"/>
-              </a:lnSpc>
-              <a:spcBef>
-                <a:spcPts val="10"/>
-              </a:spcBef>
-              <a:buSzPct val="100000"/>
-              <a:buChar char="•"/>
-            </a:pPr>
-            <a:r>
-              <a:rPr lang="en-US" altLang="en-US" sz="2000" dirty="0">
-                <a:solidFill>
-                  <a:srgbClr val="3C4043"/>
-                </a:solidFill>
-                <a:latin typeface="Inter" pitchFamily="34" charset="0"/>
-                <a:ea typeface="Inter" pitchFamily="34" charset="-122"/>
-                <a:cs typeface="Inter" pitchFamily="34" charset="-120"/>
-              </a:rPr>
-              <a:t>Which criterion is weak in most papers?</a:t>
-            </a:r>
-            <a:endParaRPr lang="en-US" sz="2000" dirty="0"/>
-          </a:p>
-          <a:p>
-            <a:pPr algn="l" marL="317500" indent="-317500">
-              <a:lnSpc>
-                <a:spcPts val="2560"/>
-              </a:lnSpc>
-              <a:spcBef>
-                <a:spcPts val="10"/>
-              </a:spcBef>
-              <a:buSzPct val="100000"/>
-              <a:buChar char="•"/>
-            </a:pPr>
-            <a:r>
-              <a:rPr lang="en-US" altLang="en-US" sz="2000" dirty="0">
-                <a:solidFill>
-                  <a:srgbClr val="3C4043"/>
-                </a:solidFill>
-                <a:latin typeface="Inter" pitchFamily="34" charset="0"/>
-                <a:ea typeface="Inter" pitchFamily="34" charset="-122"/>
-                <a:cs typeface="Inter" pitchFamily="34" charset="-120"/>
-              </a:rPr>
-              <a:t>Which gap appears in three or more samples?</a:t>
-            </a:r>
-            <a:endParaRPr lang="en-US" sz="2000" dirty="0"/>
-          </a:p>
-        </p:txBody>
-      </p:sp>
-      <p:sp>
-        <p:nvSpPr>
-          <p:cNvPr id="9" name="pattern-shape-8"/>
+              <a:t>What do you see in more than one sample?</a:t>
+            </a:r>
+            <a:endParaRPr lang="en-US" sz="2200" dirty="0"/>
+          </a:p>
+        </p:txBody>
+      </p:sp>
+      <p:sp>
+        <p:nvSpPr>
+          <p:cNvPr id="11" name="pattern-shape-10"/>
           <p:cNvSpPr/>
           <p:nvPr/>
         </p:nvSpPr>
         <p:spPr>
           <a:xfrm>
             <a:off x="5676900" y="2336800"/>
-            <a:ext cx="4902200" cy="4267200"/>
+            <a:ext cx="4902200" cy="4089400"/>
           </a:xfrm>
           <a:prstGeom prst="rect">
             <a:avLst/>
           </a:prstGeom>
           <a:solidFill>
-            <a:srgbClr val="F3F4F6"/>
+            <a:srgbClr val="EAF5EC"/>
           </a:solidFill>
-          <a:ln w="12700">
+          <a:ln w="25400">
             <a:solidFill>
-              <a:srgbClr val="D1D5DB"/>
+              <a:srgbClr val="238636"/>
             </a:solidFill>
             <a:prstDash val="solid"/>
           </a:ln>
@@ -4888,13 +5364,52 @@
       </p:sp>
       <p:sp>
         <p:nvSpPr>
-          <p:cNvPr id="10" name="p2-title"/>
-          <p:cNvSpPr/>
-          <p:nvPr/>
-        </p:nvSpPr>
-        <p:spPr>
-          <a:xfrm>
-            <a:off x="6057900" y="2692400"/>
+          <p:cNvPr id="12" name="two-label"/>
+          <p:cNvSpPr/>
+          <p:nvPr/>
+        </p:nvSpPr>
+        <p:spPr>
+          <a:xfrm>
+            <a:off x="6057900" y="2667000"/>
+            <a:ext cx="4191000" cy="254000"/>
+          </a:xfrm>
+          <a:prstGeom prst="rect">
+            <a:avLst/>
+          </a:prstGeom>
+          <a:noFill/>
+          <a:ln/>
+        </p:spPr>
+        <p:txBody>
+          <a:bodyPr wrap="square" lIns="0" tIns="0" rIns="0" bIns="0" rtlCol="0" anchor="t"/>
+          <a:lstStyle/>
+          <a:p>
+            <a:pPr algn="l" indent="0" marL="0">
+              <a:buNone/>
+            </a:pPr>
+            <a:r>
+              <a:rPr lang="en-US" altLang="en-US" sz="1400" dirty="0">
+                <a:solidFill>
+                  <a:srgbClr val="238636"/>
+                </a:solidFill>
+                <a:latin typeface="Inter" pitchFamily="34" charset="0"/>
+                <a:ea typeface="Inter" pitchFamily="34" charset="-122"/>
+                <a:cs typeface="Inter" pitchFamily="34" charset="-120"/>
+              </a:rPr>
+              <a:t>2</a:t>
+            </a:r>
+            <a:endParaRPr lang="en-US" sz="1400" dirty="0"/>
+          </a:p>
+        </p:txBody>
+      </p:sp>
+      <p:sp>
+        <p:nvSpPr>
+          <p:cNvPr id="13" name="two-title"/>
+          <p:cNvSpPr/>
+          <p:nvPr/>
+        </p:nvSpPr>
+        <p:spPr>
+          <a:xfrm>
+            <a:off x="6057900" y="3124200"/>
             <a:ext cx="4191000" cy="431800"/>
           </a:xfrm>
           <a:prstGeom prst="rect">
@@ -4911,7 +5426,7 @@
               <a:buNone/>
             </a:pPr>
             <a:r>
-              <a:rPr lang="en-US" altLang="en-US" sz="2400" dirty="0">
+              <a:rPr lang="en-US" altLang="en-US" sz="2500" dirty="0">
                 <a:solidFill>
                   <a:srgbClr val="202124"/>
                 </a:solidFill>
@@ -4919,22 +5434,22 @@
                 <a:ea typeface="Inter" pitchFamily="34" charset="-122"/>
                 <a:cs typeface="Inter" pitchFamily="34" charset="-120"/>
               </a:rPr>
-              <a:t>2. Write one sentence</a:t>
-            </a:r>
-            <a:endParaRPr lang="en-US" sz="2400" dirty="0"/>
-          </a:p>
-        </p:txBody>
-      </p:sp>
-      <p:sp>
-        <p:nvSpPr>
-          <p:cNvPr id="11" name="p2-body"/>
-          <p:cNvSpPr/>
-          <p:nvPr/>
-        </p:nvSpPr>
-        <p:spPr>
-          <a:xfrm>
-            <a:off x="6057900" y="3454400"/>
-            <a:ext cx="4191000" cy="2921000"/>
+              <a:t>Name one strength</a:t>
+            </a:r>
+            <a:endParaRPr lang="en-US" sz="2500" dirty="0"/>
+          </a:p>
+        </p:txBody>
+      </p:sp>
+      <p:sp>
+        <p:nvSpPr>
+          <p:cNvPr id="14" name="two-body"/>
+          <p:cNvSpPr/>
+          <p:nvPr/>
+        </p:nvSpPr>
+        <p:spPr>
+          <a:xfrm>
+            <a:off x="6057900" y="4064000"/>
+            <a:ext cx="4191000" cy="1625600"/>
           </a:xfrm>
           <a:prstGeom prst="rect">
             <a:avLst/>
@@ -4948,12 +5463,12 @@
           <a:p>
             <a:pPr algn="l" indent="0" marL="0">
               <a:lnSpc>
-                <a:spcPts val="2560"/>
+                <a:spcPts val="2816"/>
               </a:lnSpc>
               <a:buNone/>
             </a:pPr>
             <a:r>
-              <a:rPr lang="en-US" altLang="en-US" sz="2000" dirty="0">
+              <a:rPr lang="en-US" altLang="en-US" sz="2200" dirty="0">
                 <a:solidFill>
                   <a:srgbClr val="3C4043"/>
                 </a:solidFill>
@@ -4961,45 +5476,22 @@
                 <a:ea typeface="Inter" pitchFamily="34" charset="-122"/>
                 <a:cs typeface="Inter" pitchFamily="34" charset="-120"/>
               </a:rPr>
-              <a:t>“Students can ______, but most need ______ in the criterion of ______.”</a:t>
-            </a:r>
-            <a:endParaRPr lang="en-US" sz="2000" dirty="0"/>
-          </a:p>
-          <a:p>
-            <a:pPr algn="l" indent="0" marL="0">
-              <a:lnSpc>
-                <a:spcPts val="2560"/>
-              </a:lnSpc>
-              <a:spcBef>
-                <a:spcPts val="1000"/>
-              </a:spcBef>
-              <a:buNone/>
-            </a:pPr>
-            <a:r>
-              <a:rPr lang="en-US" altLang="en-US" sz="2000" dirty="0">
-                <a:solidFill>
-                  <a:srgbClr val="3C4043"/>
-                </a:solidFill>
-                <a:latin typeface="Inter" pitchFamily="34" charset="0"/>
-                <a:ea typeface="Inter" pitchFamily="34" charset="-122"/>
-                <a:cs typeface="Inter" pitchFamily="34" charset="-120"/>
-              </a:rPr>
-              <a:t>Use the rubric wording in the blank so the need is measurable.</a:t>
-            </a:r>
-            <a:endParaRPr lang="en-US" sz="2000" dirty="0"/>
-          </a:p>
-        </p:txBody>
-      </p:sp>
-      <p:sp>
-        <p:nvSpPr>
-          <p:cNvPr id="12" name="pattern-shape-11"/>
+              <a:t>Finish the sentence: “Students can ______.”</a:t>
+            </a:r>
+            <a:endParaRPr lang="en-US" sz="2200" dirty="0"/>
+          </a:p>
+        </p:txBody>
+      </p:sp>
+      <p:sp>
+        <p:nvSpPr>
+          <p:cNvPr id="15" name="pattern-shape-14"/>
           <p:cNvSpPr/>
           <p:nvPr/>
         </p:nvSpPr>
         <p:spPr>
           <a:xfrm>
             <a:off x="10845800" y="2336800"/>
-            <a:ext cx="4902200" cy="4267200"/>
+            <a:ext cx="4902200" cy="4089400"/>
           </a:xfrm>
           <a:prstGeom prst="rect">
             <a:avLst/>
@@ -5017,13 +5509,52 @@
       </p:sp>
       <p:sp>
         <p:nvSpPr>
-          <p:cNvPr id="13" name="p3-title"/>
-          <p:cNvSpPr/>
-          <p:nvPr/>
-        </p:nvSpPr>
-        <p:spPr>
-          <a:xfrm>
-            <a:off x="11226800" y="2692400"/>
+          <p:cNvPr id="16" name="three-label"/>
+          <p:cNvSpPr/>
+          <p:nvPr/>
+        </p:nvSpPr>
+        <p:spPr>
+          <a:xfrm>
+            <a:off x="11226800" y="2667000"/>
+            <a:ext cx="4191000" cy="254000"/>
+          </a:xfrm>
+          <a:prstGeom prst="rect">
+            <a:avLst/>
+          </a:prstGeom>
+          <a:noFill/>
+          <a:ln/>
+        </p:spPr>
+        <p:txBody>
+          <a:bodyPr wrap="square" lIns="0" tIns="0" rIns="0" bIns="0" rtlCol="0" anchor="t"/>
+          <a:lstStyle/>
+          <a:p>
+            <a:pPr algn="l" indent="0" marL="0">
+              <a:buNone/>
+            </a:pPr>
+            <a:r>
+              <a:rPr lang="en-US" altLang="en-US" sz="1400" dirty="0">
+                <a:solidFill>
+                  <a:srgbClr val="C41220"/>
+                </a:solidFill>
+                <a:latin typeface="Inter" pitchFamily="34" charset="0"/>
+                <a:ea typeface="Inter" pitchFamily="34" charset="-122"/>
+                <a:cs typeface="Inter" pitchFamily="34" charset="-120"/>
+              </a:rPr>
+              <a:t>3</a:t>
+            </a:r>
+            <a:endParaRPr lang="en-US" sz="1400" dirty="0"/>
+          </a:p>
+        </p:txBody>
+      </p:sp>
+      <p:sp>
+        <p:nvSpPr>
+          <p:cNvPr id="17" name="three-title"/>
+          <p:cNvSpPr/>
+          <p:nvPr/>
+        </p:nvSpPr>
+        <p:spPr>
+          <a:xfrm>
+            <a:off x="11226800" y="3124200"/>
             <a:ext cx="4191000" cy="431800"/>
           </a:xfrm>
           <a:prstGeom prst="rect">
@@ -5040,7 +5571,7 @@
               <a:buNone/>
             </a:pPr>
             <a:r>
-              <a:rPr lang="en-US" altLang="en-US" sz="2400" dirty="0">
+              <a:rPr lang="en-US" altLang="en-US" sz="2500" dirty="0">
                 <a:solidFill>
                   <a:srgbClr val="202124"/>
                 </a:solidFill>
@@ -5048,45 +5579,41 @@
                 <a:ea typeface="Inter" pitchFamily="34" charset="-122"/>
                 <a:cs typeface="Inter" pitchFamily="34" charset="-120"/>
               </a:rPr>
-              <a:t>3. Keep it narrow</a:t>
-            </a:r>
-            <a:endParaRPr lang="en-US" sz="2400" dirty="0"/>
-          </a:p>
-        </p:txBody>
-      </p:sp>
-      <p:sp>
-        <p:nvSpPr>
-          <p:cNvPr id="14" name="p3-body"/>
-          <p:cNvSpPr/>
-          <p:nvPr/>
-        </p:nvSpPr>
-        <p:spPr>
-          <a:xfrm>
-            <a:off x="11226800" y="3429000"/>
-            <a:ext cx="4191000" cy="2971800"/>
-          </a:xfrm>
-          <a:prstGeom prst="rect">
-            <a:avLst/>
-          </a:prstGeom>
-          <a:noFill/>
-          <a:ln/>
-        </p:spPr>
-        <p:txBody>
-          <a:bodyPr wrap="square" lIns="0" tIns="0" rIns="0" bIns="0" rtlCol="0" anchor="t"/>
-          <a:lstStyle/>
-          <a:p>
-            <a:pPr algn="l" marL="301625" indent="-301625">
+              <a:t>Choose one need</a:t>
+            </a:r>
+            <a:endParaRPr lang="en-US" sz="2500" dirty="0"/>
+          </a:p>
+        </p:txBody>
+      </p:sp>
+      <p:sp>
+        <p:nvSpPr>
+          <p:cNvPr id="18" name="three-body"/>
+          <p:cNvSpPr/>
+          <p:nvPr/>
+        </p:nvSpPr>
+        <p:spPr>
+          <a:xfrm>
+            <a:off x="11226800" y="4064000"/>
+            <a:ext cx="4191000" cy="1625600"/>
+          </a:xfrm>
+          <a:prstGeom prst="rect">
+            <a:avLst/>
+          </a:prstGeom>
+          <a:noFill/>
+          <a:ln/>
+        </p:spPr>
+        <p:txBody>
+          <a:bodyPr wrap="square" lIns="0" tIns="0" rIns="0" bIns="0" rtlCol="0" anchor="t"/>
+          <a:lstStyle/>
+          <a:p>
+            <a:pPr algn="l" indent="0" marL="0">
               <a:lnSpc>
-                <a:spcPts val="2394"/>
+                <a:spcPts val="2816"/>
               </a:lnSpc>
-              <a:spcBef>
-                <a:spcPts val="10"/>
-              </a:spcBef>
-              <a:buSzPct val="100000"/>
-              <a:buChar char="•"/>
-            </a:pPr>
-            <a:r>
-              <a:rPr lang="en-US" altLang="en-US" sz="1900" dirty="0">
+              <a:buNone/>
+            </a:pPr>
+            <a:r>
+              <a:rPr lang="en-US" altLang="en-US" sz="2200" dirty="0">
                 <a:solidFill>
                   <a:srgbClr val="3C4043"/>
                 </a:solidFill>
@@ -5094,118 +5621,22 @@
                 <a:ea typeface="Inter" pitchFamily="34" charset="-122"/>
                 <a:cs typeface="Inter" pitchFamily="34" charset="-120"/>
               </a:rPr>
-              <a:t>One need only — not a list</a:t>
-            </a:r>
-            <a:endParaRPr lang="en-US" sz="1900" dirty="0"/>
-          </a:p>
-          <a:p>
-            <a:pPr algn="l" marL="301625" indent="-301625">
-              <a:lnSpc>
-                <a:spcPts val="2394"/>
-              </a:lnSpc>
-              <a:spcBef>
-                <a:spcPts val="10"/>
-              </a:spcBef>
-              <a:buSzPct val="100000"/>
-              <a:buChar char="•"/>
-            </a:pPr>
-            <a:r>
-              <a:rPr lang="en-US" altLang="en-US" sz="1900" dirty="0">
-                <a:solidFill>
-                  <a:srgbClr val="3C4043"/>
-                </a:solidFill>
-                <a:latin typeface="Inter" pitchFamily="34" charset="0"/>
-                <a:ea typeface="Inter" pitchFamily="34" charset="-122"/>
-                <a:cs typeface="Inter" pitchFamily="34" charset="-120"/>
-              </a:rPr>
-              <a:t>Criterion-based, not general</a:t>
-            </a:r>
-            <a:endParaRPr lang="en-US" sz="1900" dirty="0"/>
-          </a:p>
-          <a:p>
-            <a:pPr algn="l" marL="301625" indent="-301625">
-              <a:lnSpc>
-                <a:spcPts val="2394"/>
-              </a:lnSpc>
-              <a:spcBef>
-                <a:spcPts val="10"/>
-              </a:spcBef>
-              <a:buSzPct val="100000"/>
-              <a:buChar char="•"/>
-            </a:pPr>
-            <a:r>
-              <a:rPr lang="en-US" altLang="en-US" sz="1900" dirty="0">
-                <a:solidFill>
-                  <a:srgbClr val="3C4043"/>
-                </a:solidFill>
-                <a:latin typeface="Inter" pitchFamily="34" charset="0"/>
-                <a:ea typeface="Inter" pitchFamily="34" charset="-122"/>
-                <a:cs typeface="Inter" pitchFamily="34" charset="-120"/>
-              </a:rPr>
-              <a:t>Fixable in one revision</a:t>
-            </a:r>
-            <a:endParaRPr lang="en-US" sz="1900" dirty="0"/>
-          </a:p>
-          <a:p>
-            <a:pPr algn="l" marL="301625" indent="-301625">
-              <a:lnSpc>
-                <a:spcPts val="2394"/>
-              </a:lnSpc>
-              <a:spcBef>
-                <a:spcPts val="10"/>
-              </a:spcBef>
-              <a:buSzPct val="100000"/>
-              <a:buChar char="•"/>
-            </a:pPr>
-            <a:r>
-              <a:rPr lang="en-US" altLang="en-US" sz="1900" dirty="0">
-                <a:solidFill>
-                  <a:srgbClr val="3C4043"/>
-                </a:solidFill>
-                <a:latin typeface="Inter" pitchFamily="34" charset="0"/>
-                <a:ea typeface="Inter" pitchFamily="34" charset="-122"/>
-                <a:cs typeface="Inter" pitchFamily="34" charset="-120"/>
-              </a:rPr>
-              <a:t>Not a broad reteach plan</a:t>
-            </a:r>
-            <a:endParaRPr lang="en-US" sz="1900" dirty="0"/>
-          </a:p>
-          <a:p>
-            <a:pPr algn="l" marL="301625" indent="-301625">
-              <a:lnSpc>
-                <a:spcPts val="2394"/>
-              </a:lnSpc>
-              <a:spcBef>
-                <a:spcPts val="10"/>
-              </a:spcBef>
-              <a:buSzPct val="100000"/>
-              <a:buChar char="•"/>
-            </a:pPr>
-            <a:r>
-              <a:rPr lang="en-US" altLang="en-US" sz="1900" dirty="0">
-                <a:solidFill>
-                  <a:srgbClr val="3C4043"/>
-                </a:solidFill>
-                <a:latin typeface="Inter" pitchFamily="34" charset="0"/>
-                <a:ea typeface="Inter" pitchFamily="34" charset="-122"/>
-                <a:cs typeface="Inter" pitchFamily="34" charset="-120"/>
-              </a:rPr>
-              <a:t>Shape it with what you know about your students</a:t>
-            </a:r>
-            <a:endParaRPr lang="en-US" sz="1900" dirty="0"/>
-          </a:p>
-        </p:txBody>
-      </p:sp>
-      <p:sp>
-        <p:nvSpPr>
-          <p:cNvPr id="15" name="pattern-shape-14"/>
+              <a:t>Finish the sentence: “Students need ______.” Use the rubric words.</a:t>
+            </a:r>
+            <a:endParaRPr lang="en-US" sz="2200" dirty="0"/>
+          </a:p>
+        </p:txBody>
+      </p:sp>
+      <p:sp>
+        <p:nvSpPr>
+          <p:cNvPr id="19" name="pattern-shape-18"/>
           <p:cNvSpPr/>
           <p:nvPr/>
         </p:nvSpPr>
         <p:spPr>
           <a:xfrm>
             <a:off x="508000" y="6959600"/>
-            <a:ext cx="15240000" cy="736600"/>
+            <a:ext cx="15240000" cy="787400"/>
           </a:xfrm>
           <a:prstGeom prst="rect">
             <a:avLst/>
@@ -5218,14 +5649,14 @@
       </p:sp>
       <p:sp>
         <p:nvSpPr>
-          <p:cNvPr id="16" name="check"/>
-          <p:cNvSpPr/>
-          <p:nvPr/>
-        </p:nvSpPr>
-        <p:spPr>
-          <a:xfrm>
-            <a:off x="812800" y="7213600"/>
-            <a:ext cx="14605000" cy="304800"/>
+          <p:cNvPr id="20" name="check"/>
+          <p:cNvSpPr/>
+          <p:nvPr/>
+        </p:nvSpPr>
+        <p:spPr>
+          <a:xfrm>
+            <a:off x="812800" y="7188200"/>
+            <a:ext cx="14605000" cy="355600"/>
           </a:xfrm>
           <a:prstGeom prst="rect">
             <a:avLst/>
@@ -5260,7 +5691,7 @@
                 <a:ea typeface="Inter" pitchFamily="34" charset="-122"/>
                 <a:cs typeface="Inter" pitchFamily="34" charset="-120"/>
               </a:rPr>
-              <a:t> Can you see this need in the student writing and connect it to the rubric?</a:t>
+              <a:t> Can you see the need in the writing and connect it to the rubric?</a:t>
             </a:r>
             <a:endParaRPr lang="en-US" sz="2000" dirty="0"/>
           </a:p>
@@ -5268,7 +5699,7 @@
       </p:sp>
       <p:sp>
         <p:nvSpPr>
-          <p:cNvPr id="17" name="page"/>
+          <p:cNvPr id="21" name="page"/>
           <p:cNvSpPr/>
           <p:nvPr/>
         </p:nvSpPr>
@@ -5307,7 +5738,7 @@
       </p:sp>
       <p:sp>
         <p:nvSpPr>
-          <p:cNvPr id="18" name="pattern-shape-17"/>
+          <p:cNvPr id="22" name="pattern-shape-21"/>
           <p:cNvSpPr/>
           <p:nvPr/>
         </p:nvSpPr>
@@ -5457,26 +5888,210 @@
       </p:sp>
       <p:sp>
         <p:nvSpPr>
-          <p:cNvPr id="5" name="intro"/>
+          <p:cNvPr id="5" name="lit"/>
           <p:cNvSpPr/>
           <p:nvPr/>
         </p:nvSpPr>
         <p:spPr>
           <a:xfrm>
             <a:off x="508000" y="1320800"/>
-            <a:ext cx="15240000" cy="685800"/>
-          </a:xfrm>
-          <a:prstGeom prst="rect">
-            <a:avLst/>
-          </a:prstGeom>
-          <a:noFill/>
-          <a:ln/>
-        </p:spPr>
-        <p:txBody>
-          <a:bodyPr wrap="square" lIns="0" tIns="0" rIns="0" bIns="0" rtlCol="0" anchor="t"/>
-          <a:lstStyle/>
-          <a:p>
-            <a:pPr algn="l" indent="0" marL="0">
+            <a:ext cx="15240000" cy="228600"/>
+          </a:xfrm>
+          <a:prstGeom prst="rect">
+            <a:avLst/>
+          </a:prstGeom>
+          <a:noFill/>
+          <a:ln/>
+        </p:spPr>
+        <p:txBody>
+          <a:bodyPr wrap="square" lIns="0" tIns="0" rIns="0" bIns="0" rtlCol="0" anchor="t"/>
+          <a:lstStyle/>
+          <a:p>
+            <a:pPr algn="l" indent="0" marL="0">
+              <a:buNone/>
+            </a:pPr>
+            <a:r>
+              <a:rPr lang="en-US" altLang="en-US" sz="1400" dirty="0">
+                <a:solidFill>
+                  <a:srgbClr val="C41220"/>
+                </a:solidFill>
+                <a:latin typeface="Inter" pitchFamily="34" charset="0"/>
+                <a:ea typeface="Inter" pitchFamily="34" charset="-122"/>
+                <a:cs typeface="Inter" pitchFamily="34" charset="-120"/>
+              </a:rPr>
+              <a:t>LESSON INTERNALIZATION QUESTION 3</a:t>
+            </a:r>
+            <a:endParaRPr lang="en-US" sz="1400" dirty="0"/>
+          </a:p>
+        </p:txBody>
+      </p:sp>
+      <p:sp>
+        <p:nvSpPr>
+          <p:cNvPr id="6" name="intro"/>
+          <p:cNvSpPr/>
+          <p:nvPr/>
+        </p:nvSpPr>
+        <p:spPr>
+          <a:xfrm>
+            <a:off x="508000" y="1651000"/>
+            <a:ext cx="15240000" cy="482600"/>
+          </a:xfrm>
+          <a:prstGeom prst="rect">
+            <a:avLst/>
+          </a:prstGeom>
+          <a:noFill/>
+          <a:ln/>
+        </p:spPr>
+        <p:txBody>
+          <a:bodyPr wrap="square" lIns="0" tIns="0" rIns="0" bIns="0" rtlCol="0" anchor="t"/>
+          <a:lstStyle/>
+          <a:p>
+            <a:pPr algn="l" indent="0" marL="0">
+              <a:buNone/>
+            </a:pPr>
+            <a:r>
+              <a:rPr lang="en-US" altLang="en-US" sz="2100" dirty="0">
+                <a:solidFill>
+                  <a:srgbClr val="3C4043"/>
+                </a:solidFill>
+                <a:latin typeface="Inter" pitchFamily="34" charset="0"/>
+                <a:ea typeface="Inter" pitchFamily="34" charset="-122"/>
+                <a:cs typeface="Inter" pitchFamily="34" charset="-120"/>
+              </a:rPr>
+              <a:t>What feedback move will help students improve their writing?</a:t>
+            </a:r>
+            <a:endParaRPr lang="en-US" sz="2100" dirty="0"/>
+          </a:p>
+        </p:txBody>
+      </p:sp>
+      <p:sp>
+        <p:nvSpPr>
+          <p:cNvPr id="7" name="next-shape-6"/>
+          <p:cNvSpPr/>
+          <p:nvPr/>
+        </p:nvSpPr>
+        <p:spPr>
+          <a:xfrm>
+            <a:off x="508000" y="2336800"/>
+            <a:ext cx="4902200" cy="4089400"/>
+          </a:xfrm>
+          <a:prstGeom prst="rect">
+            <a:avLst/>
+          </a:prstGeom>
+          <a:solidFill>
+            <a:srgbClr val="FCE8EA"/>
+          </a:solidFill>
+          <a:ln w="25400">
+            <a:solidFill>
+              <a:srgbClr val="C41220"/>
+            </a:solidFill>
+            <a:prstDash val="solid"/>
+          </a:ln>
+        </p:spPr>
+      </p:sp>
+      <p:sp>
+        <p:nvSpPr>
+          <p:cNvPr id="8" name="one-label"/>
+          <p:cNvSpPr/>
+          <p:nvPr/>
+        </p:nvSpPr>
+        <p:spPr>
+          <a:xfrm>
+            <a:off x="889000" y="2667000"/>
+            <a:ext cx="4191000" cy="254000"/>
+          </a:xfrm>
+          <a:prstGeom prst="rect">
+            <a:avLst/>
+          </a:prstGeom>
+          <a:noFill/>
+          <a:ln/>
+        </p:spPr>
+        <p:txBody>
+          <a:bodyPr wrap="square" lIns="0" tIns="0" rIns="0" bIns="0" rtlCol="0" anchor="t"/>
+          <a:lstStyle/>
+          <a:p>
+            <a:pPr algn="l" indent="0" marL="0">
+              <a:buNone/>
+            </a:pPr>
+            <a:r>
+              <a:rPr lang="en-US" altLang="en-US" sz="1400" dirty="0">
+                <a:solidFill>
+                  <a:srgbClr val="C41220"/>
+                </a:solidFill>
+                <a:latin typeface="Inter" pitchFamily="34" charset="0"/>
+                <a:ea typeface="Inter" pitchFamily="34" charset="-122"/>
+                <a:cs typeface="Inter" pitchFamily="34" charset="-120"/>
+              </a:rPr>
+              <a:t>1</a:t>
+            </a:r>
+            <a:endParaRPr lang="en-US" sz="1400" dirty="0"/>
+          </a:p>
+        </p:txBody>
+      </p:sp>
+      <p:sp>
+        <p:nvSpPr>
+          <p:cNvPr id="9" name="one-title"/>
+          <p:cNvSpPr/>
+          <p:nvPr/>
+        </p:nvSpPr>
+        <p:spPr>
+          <a:xfrm>
+            <a:off x="889000" y="3124200"/>
+            <a:ext cx="4191000" cy="431800"/>
+          </a:xfrm>
+          <a:prstGeom prst="rect">
+            <a:avLst/>
+          </a:prstGeom>
+          <a:noFill/>
+          <a:ln/>
+        </p:spPr>
+        <p:txBody>
+          <a:bodyPr wrap="square" lIns="0" tIns="0" rIns="0" bIns="0" rtlCol="0" anchor="t"/>
+          <a:lstStyle/>
+          <a:p>
+            <a:pPr algn="l" indent="0" marL="0">
+              <a:buNone/>
+            </a:pPr>
+            <a:r>
+              <a:rPr lang="en-US" altLang="en-US" sz="2500" dirty="0">
+                <a:solidFill>
+                  <a:srgbClr val="202124"/>
+                </a:solidFill>
+                <a:latin typeface="Inter" pitchFamily="34" charset="0"/>
+                <a:ea typeface="Inter" pitchFamily="34" charset="-122"/>
+                <a:cs typeface="Inter" pitchFamily="34" charset="-120"/>
+              </a:rPr>
+              <a:t>Say what is missing</a:t>
+            </a:r>
+            <a:endParaRPr lang="en-US" sz="2500" dirty="0"/>
+          </a:p>
+        </p:txBody>
+      </p:sp>
+      <p:sp>
+        <p:nvSpPr>
+          <p:cNvPr id="10" name="one-body"/>
+          <p:cNvSpPr/>
+          <p:nvPr/>
+        </p:nvSpPr>
+        <p:spPr>
+          <a:xfrm>
+            <a:off x="889000" y="4064000"/>
+            <a:ext cx="4191000" cy="1625600"/>
+          </a:xfrm>
+          <a:prstGeom prst="rect">
+            <a:avLst/>
+          </a:prstGeom>
+          <a:noFill/>
+          <a:ln/>
+        </p:spPr>
+        <p:txBody>
+          <a:bodyPr wrap="square" lIns="0" tIns="0" rIns="0" bIns="0" rtlCol="0" anchor="t"/>
+          <a:lstStyle/>
+          <a:p>
+            <a:pPr algn="l" indent="0" marL="0">
+              <a:lnSpc>
+                <a:spcPts val="2816"/>
+              </a:lnSpc>
               <a:buNone/>
             </a:pPr>
             <a:r>
@@ -5488,7 +6103,7 @@
                 <a:ea typeface="Inter" pitchFamily="34" charset="-122"/>
                 <a:cs typeface="Inter" pitchFamily="34" charset="-120"/>
               </a:rPr>
-              <a:t>Write one short comment. Tell the student what is missing, where to look, and what to do next.</a:t>
+              <a:t>Use the rubric word: “Your reasoning is missing.”</a:t>
             </a:r>
             <a:endParaRPr lang="en-US" sz="2200" dirty="0"/>
           </a:p>
@@ -5496,14 +6111,14 @@
       </p:sp>
       <p:sp>
         <p:nvSpPr>
-          <p:cNvPr id="6" name="next-shape-5"/>
-          <p:cNvSpPr/>
-          <p:nvPr/>
-        </p:nvSpPr>
-        <p:spPr>
-          <a:xfrm>
-            <a:off x="508000" y="2286000"/>
-            <a:ext cx="4902200" cy="4318000"/>
+          <p:cNvPr id="11" name="next-shape-10"/>
+          <p:cNvSpPr/>
+          <p:nvPr/>
+        </p:nvSpPr>
+        <p:spPr>
+          <a:xfrm>
+            <a:off x="5676900" y="2336800"/>
+            <a:ext cx="4902200" cy="4089400"/>
           </a:xfrm>
           <a:prstGeom prst="rect">
             <a:avLst/>
@@ -5521,13 +6136,52 @@
       </p:sp>
       <p:sp>
         <p:nvSpPr>
-          <p:cNvPr id="7" name="n1-title"/>
-          <p:cNvSpPr/>
-          <p:nvPr/>
-        </p:nvSpPr>
-        <p:spPr>
-          <a:xfrm>
-            <a:off x="889000" y="2616200"/>
+          <p:cNvPr id="12" name="two-label"/>
+          <p:cNvSpPr/>
+          <p:nvPr/>
+        </p:nvSpPr>
+        <p:spPr>
+          <a:xfrm>
+            <a:off x="6057900" y="2667000"/>
+            <a:ext cx="4191000" cy="254000"/>
+          </a:xfrm>
+          <a:prstGeom prst="rect">
+            <a:avLst/>
+          </a:prstGeom>
+          <a:noFill/>
+          <a:ln/>
+        </p:spPr>
+        <p:txBody>
+          <a:bodyPr wrap="square" lIns="0" tIns="0" rIns="0" bIns="0" rtlCol="0" anchor="t"/>
+          <a:lstStyle/>
+          <a:p>
+            <a:pPr algn="l" indent="0" marL="0">
+              <a:buNone/>
+            </a:pPr>
+            <a:r>
+              <a:rPr lang="en-US" altLang="en-US" sz="1400" dirty="0">
+                <a:solidFill>
+                  <a:srgbClr val="C41220"/>
+                </a:solidFill>
+                <a:latin typeface="Inter" pitchFamily="34" charset="0"/>
+                <a:ea typeface="Inter" pitchFamily="34" charset="-122"/>
+                <a:cs typeface="Inter" pitchFamily="34" charset="-120"/>
+              </a:rPr>
+              <a:t>2</a:t>
+            </a:r>
+            <a:endParaRPr lang="en-US" sz="1400" dirty="0"/>
+          </a:p>
+        </p:txBody>
+      </p:sp>
+      <p:sp>
+        <p:nvSpPr>
+          <p:cNvPr id="13" name="two-title"/>
+          <p:cNvSpPr/>
+          <p:nvPr/>
+        </p:nvSpPr>
+        <p:spPr>
+          <a:xfrm>
+            <a:off x="6057900" y="3124200"/>
             <a:ext cx="4191000" cy="431800"/>
           </a:xfrm>
           <a:prstGeom prst="rect">
@@ -5544,7 +6198,7 @@
               <a:buNone/>
             </a:pPr>
             <a:r>
-              <a:rPr lang="en-US" altLang="en-US" sz="2400" dirty="0">
+              <a:rPr lang="en-US" altLang="en-US" sz="2500" dirty="0">
                 <a:solidFill>
                   <a:srgbClr val="202124"/>
                 </a:solidFill>
@@ -5552,22 +6206,22 @@
                 <a:ea typeface="Inter" pitchFamily="34" charset="-122"/>
                 <a:cs typeface="Inter" pitchFamily="34" charset="-120"/>
               </a:rPr>
-              <a:t>1. Say what is missing</a:t>
-            </a:r>
-            <a:endParaRPr lang="en-US" sz="2400" dirty="0"/>
-          </a:p>
-        </p:txBody>
-      </p:sp>
-      <p:sp>
-        <p:nvSpPr>
-          <p:cNvPr id="8" name="n1-body"/>
-          <p:cNvSpPr/>
-          <p:nvPr/>
-        </p:nvSpPr>
-        <p:spPr>
-          <a:xfrm>
-            <a:off x="889000" y="3352800"/>
-            <a:ext cx="4191000" cy="1320800"/>
+              <a:t>Tell where to look</a:t>
+            </a:r>
+            <a:endParaRPr lang="en-US" sz="2500" dirty="0"/>
+          </a:p>
+        </p:txBody>
+      </p:sp>
+      <p:sp>
+        <p:nvSpPr>
+          <p:cNvPr id="14" name="two-body"/>
+          <p:cNvSpPr/>
+          <p:nvPr/>
+        </p:nvSpPr>
+        <p:spPr>
+          <a:xfrm>
+            <a:off x="6057900" y="4064000"/>
+            <a:ext cx="4191000" cy="1625600"/>
           </a:xfrm>
           <a:prstGeom prst="rect">
             <a:avLst/>
@@ -5581,12 +6235,12 @@
           <a:p>
             <a:pPr algn="l" indent="0" marL="0">
               <a:lnSpc>
-                <a:spcPts val="2520"/>
+                <a:spcPts val="2816"/>
               </a:lnSpc>
               <a:buNone/>
             </a:pPr>
             <a:r>
-              <a:rPr lang="en-US" altLang="en-US" sz="2000" dirty="0">
+              <a:rPr lang="en-US" altLang="en-US" sz="2200" dirty="0">
                 <a:solidFill>
                   <a:srgbClr val="3C4043"/>
                 </a:solidFill>
@@ -5594,87 +6248,22 @@
                 <a:ea typeface="Inter" pitchFamily="34" charset="-122"/>
                 <a:cs typeface="Inter" pitchFamily="34" charset="-120"/>
               </a:rPr>
-              <a:t>Use the rubric word. Name the part of the response that needs work.</a:t>
-            </a:r>
-            <a:endParaRPr lang="en-US" sz="2000" dirty="0"/>
-          </a:p>
-        </p:txBody>
-      </p:sp>
-      <p:sp>
-        <p:nvSpPr>
-          <p:cNvPr id="9" name="n1-ex"/>
-          <p:cNvSpPr/>
-          <p:nvPr/>
-        </p:nvSpPr>
-        <p:spPr>
-          <a:xfrm>
-            <a:off x="889000" y="4851400"/>
-            <a:ext cx="4191000" cy="1498600"/>
-          </a:xfrm>
-          <a:prstGeom prst="rect">
-            <a:avLst/>
-          </a:prstGeom>
-          <a:noFill/>
-          <a:ln/>
-        </p:spPr>
-        <p:txBody>
-          <a:bodyPr wrap="square" lIns="0" tIns="0" rIns="0" bIns="0" rtlCol="0" anchor="t"/>
-          <a:lstStyle/>
-          <a:p>
-            <a:pPr algn="l" indent="0" marL="0">
-              <a:lnSpc>
-                <a:spcPts val="2356"/>
-              </a:lnSpc>
-              <a:buNone/>
-            </a:pPr>
-            <a:r>
-              <a:rPr lang="en-US" altLang="en-US" sz="1900" b="1" dirty="0">
-                <a:solidFill>
-                  <a:srgbClr val="C41220"/>
-                </a:solidFill>
-                <a:latin typeface="Inter" pitchFamily="34" charset="0"/>
-                <a:ea typeface="Inter" pitchFamily="34" charset="-122"/>
-                <a:cs typeface="Inter" pitchFamily="34" charset="-120"/>
-              </a:rPr>
-              <a:t>Example:</a:t>
-            </a:r>
-            <a:endParaRPr lang="en-US" sz="1900" dirty="0"/>
-          </a:p>
-          <a:p>
-            <a:pPr algn="l" indent="0" marL="0">
-              <a:lnSpc>
-                <a:spcPts val="2356"/>
-              </a:lnSpc>
-              <a:spcBef>
-                <a:spcPts val="600"/>
-              </a:spcBef>
-              <a:buNone/>
-            </a:pPr>
-            <a:r>
-              <a:rPr lang="en-US" altLang="en-US" sz="1900" dirty="0">
-                <a:solidFill>
-                  <a:srgbClr val="C41220"/>
-                </a:solidFill>
-                <a:latin typeface="Inter" pitchFamily="34" charset="0"/>
-                <a:ea typeface="Inter" pitchFamily="34" charset="-122"/>
-                <a:cs typeface="Inter" pitchFamily="34" charset="-120"/>
-              </a:rPr>
-              <a:t>“Your reasoning is missing.”</a:t>
-            </a:r>
-            <a:endParaRPr lang="en-US" sz="1900" dirty="0"/>
-          </a:p>
-        </p:txBody>
-      </p:sp>
-      <p:sp>
-        <p:nvSpPr>
-          <p:cNvPr id="10" name="next-shape-9"/>
-          <p:cNvSpPr/>
-          <p:nvPr/>
-        </p:nvSpPr>
-        <p:spPr>
-          <a:xfrm>
-            <a:off x="5676900" y="2286000"/>
-            <a:ext cx="4902200" cy="4318000"/>
+              <a:t>Point to the writing or source: “Look at your graph.”</a:t>
+            </a:r>
+            <a:endParaRPr lang="en-US" sz="2200" dirty="0"/>
+          </a:p>
+        </p:txBody>
+      </p:sp>
+      <p:sp>
+        <p:nvSpPr>
+          <p:cNvPr id="15" name="next-shape-14"/>
+          <p:cNvSpPr/>
+          <p:nvPr/>
+        </p:nvSpPr>
+        <p:spPr>
+          <a:xfrm>
+            <a:off x="10845800" y="2336800"/>
+            <a:ext cx="4902200" cy="4089400"/>
           </a:xfrm>
           <a:prstGeom prst="rect">
             <a:avLst/>
@@ -5692,13 +6281,52 @@
       </p:sp>
       <p:sp>
         <p:nvSpPr>
-          <p:cNvPr id="11" name="n2-title"/>
-          <p:cNvSpPr/>
-          <p:nvPr/>
-        </p:nvSpPr>
-        <p:spPr>
-          <a:xfrm>
-            <a:off x="6057900" y="2616200"/>
+          <p:cNvPr id="16" name="three-label"/>
+          <p:cNvSpPr/>
+          <p:nvPr/>
+        </p:nvSpPr>
+        <p:spPr>
+          <a:xfrm>
+            <a:off x="11226800" y="2667000"/>
+            <a:ext cx="4191000" cy="254000"/>
+          </a:xfrm>
+          <a:prstGeom prst="rect">
+            <a:avLst/>
+          </a:prstGeom>
+          <a:noFill/>
+          <a:ln/>
+        </p:spPr>
+        <p:txBody>
+          <a:bodyPr wrap="square" lIns="0" tIns="0" rIns="0" bIns="0" rtlCol="0" anchor="t"/>
+          <a:lstStyle/>
+          <a:p>
+            <a:pPr algn="l" indent="0" marL="0">
+              <a:buNone/>
+            </a:pPr>
+            <a:r>
+              <a:rPr lang="en-US" altLang="en-US" sz="1400" dirty="0">
+                <a:solidFill>
+                  <a:srgbClr val="C41220"/>
+                </a:solidFill>
+                <a:latin typeface="Inter" pitchFamily="34" charset="0"/>
+                <a:ea typeface="Inter" pitchFamily="34" charset="-122"/>
+                <a:cs typeface="Inter" pitchFamily="34" charset="-120"/>
+              </a:rPr>
+              <a:t>3</a:t>
+            </a:r>
+            <a:endParaRPr lang="en-US" sz="1400" dirty="0"/>
+          </a:p>
+        </p:txBody>
+      </p:sp>
+      <p:sp>
+        <p:nvSpPr>
+          <p:cNvPr id="17" name="three-title"/>
+          <p:cNvSpPr/>
+          <p:nvPr/>
+        </p:nvSpPr>
+        <p:spPr>
+          <a:xfrm>
+            <a:off x="11226800" y="3124200"/>
             <a:ext cx="4191000" cy="431800"/>
           </a:xfrm>
           <a:prstGeom prst="rect">
@@ -5715,7 +6343,7 @@
               <a:buNone/>
             </a:pPr>
             <a:r>
-              <a:rPr lang="en-US" altLang="en-US" sz="2400" dirty="0">
+              <a:rPr lang="en-US" altLang="en-US" sz="2500" dirty="0">
                 <a:solidFill>
                   <a:srgbClr val="202124"/>
                 </a:solidFill>
@@ -5723,22 +6351,22 @@
                 <a:ea typeface="Inter" pitchFamily="34" charset="-122"/>
                 <a:cs typeface="Inter" pitchFamily="34" charset="-120"/>
               </a:rPr>
-              <a:t>2. Tell them where to look</a:t>
-            </a:r>
-            <a:endParaRPr lang="en-US" sz="2400" dirty="0"/>
-          </a:p>
-        </p:txBody>
-      </p:sp>
-      <p:sp>
-        <p:nvSpPr>
-          <p:cNvPr id="12" name="n2-body"/>
-          <p:cNvSpPr/>
-          <p:nvPr/>
-        </p:nvSpPr>
-        <p:spPr>
-          <a:xfrm>
-            <a:off x="6057900" y="3352800"/>
-            <a:ext cx="4191000" cy="1320800"/>
+              <a:t>Tell what to revise</a:t>
+            </a:r>
+            <a:endParaRPr lang="en-US" sz="2500" dirty="0"/>
+          </a:p>
+        </p:txBody>
+      </p:sp>
+      <p:sp>
+        <p:nvSpPr>
+          <p:cNvPr id="18" name="three-body"/>
+          <p:cNvSpPr/>
+          <p:nvPr/>
+        </p:nvSpPr>
+        <p:spPr>
+          <a:xfrm>
+            <a:off x="11226800" y="4064000"/>
+            <a:ext cx="4191000" cy="1625600"/>
           </a:xfrm>
           <a:prstGeom prst="rect">
             <a:avLst/>
@@ -5752,12 +6380,12 @@
           <a:p>
             <a:pPr algn="l" indent="0" marL="0">
               <a:lnSpc>
-                <a:spcPts val="2520"/>
+                <a:spcPts val="2816"/>
               </a:lnSpc>
               <a:buNone/>
             </a:pPr>
             <a:r>
-              <a:rPr lang="en-US" altLang="en-US" sz="2000" dirty="0">
+              <a:rPr lang="en-US" altLang="en-US" sz="2200" dirty="0">
                 <a:solidFill>
                   <a:srgbClr val="3C4043"/>
                 </a:solidFill>
@@ -5765,258 +6393,22 @@
                 <a:ea typeface="Inter" pitchFamily="34" charset="-122"/>
                 <a:cs typeface="Inter" pitchFamily="34" charset="-120"/>
               </a:rPr>
-              <a:t>Point students to their writing, graph, model, article, or data table.</a:t>
-            </a:r>
-            <a:endParaRPr lang="en-US" sz="2000" dirty="0"/>
-          </a:p>
-        </p:txBody>
-      </p:sp>
-      <p:sp>
-        <p:nvSpPr>
-          <p:cNvPr id="13" name="n2-ex"/>
-          <p:cNvSpPr/>
-          <p:nvPr/>
-        </p:nvSpPr>
-        <p:spPr>
-          <a:xfrm>
-            <a:off x="6057900" y="4851400"/>
-            <a:ext cx="4191000" cy="1498600"/>
-          </a:xfrm>
-          <a:prstGeom prst="rect">
-            <a:avLst/>
-          </a:prstGeom>
-          <a:noFill/>
-          <a:ln/>
-        </p:spPr>
-        <p:txBody>
-          <a:bodyPr wrap="square" lIns="0" tIns="0" rIns="0" bIns="0" rtlCol="0" anchor="t"/>
-          <a:lstStyle/>
-          <a:p>
-            <a:pPr algn="l" indent="0" marL="0">
-              <a:lnSpc>
-                <a:spcPts val="2356"/>
-              </a:lnSpc>
-              <a:buNone/>
-            </a:pPr>
-            <a:r>
-              <a:rPr lang="en-US" altLang="en-US" sz="1900" b="1" dirty="0">
-                <a:solidFill>
-                  <a:srgbClr val="C41220"/>
-                </a:solidFill>
-                <a:latin typeface="Inter" pitchFamily="34" charset="0"/>
-                <a:ea typeface="Inter" pitchFamily="34" charset="-122"/>
-                <a:cs typeface="Inter" pitchFamily="34" charset="-120"/>
-              </a:rPr>
-              <a:t>Example:</a:t>
-            </a:r>
-            <a:endParaRPr lang="en-US" sz="1900" dirty="0"/>
-          </a:p>
-          <a:p>
-            <a:pPr algn="l" indent="0" marL="0">
-              <a:lnSpc>
-                <a:spcPts val="2356"/>
-              </a:lnSpc>
-              <a:spcBef>
-                <a:spcPts val="600"/>
-              </a:spcBef>
-              <a:buNone/>
-            </a:pPr>
-            <a:r>
-              <a:rPr lang="en-US" altLang="en-US" sz="1900" dirty="0">
-                <a:solidFill>
-                  <a:srgbClr val="C41220"/>
-                </a:solidFill>
-                <a:latin typeface="Inter" pitchFamily="34" charset="0"/>
-                <a:ea typeface="Inter" pitchFamily="34" charset="-122"/>
-                <a:cs typeface="Inter" pitchFamily="34" charset="-120"/>
-              </a:rPr>
-              <a:t>“Look at the graph and food web you used.”</a:t>
-            </a:r>
-            <a:endParaRPr lang="en-US" sz="1900" dirty="0"/>
-          </a:p>
-        </p:txBody>
-      </p:sp>
-      <p:sp>
-        <p:nvSpPr>
-          <p:cNvPr id="14" name="next-shape-13"/>
-          <p:cNvSpPr/>
-          <p:nvPr/>
-        </p:nvSpPr>
-        <p:spPr>
-          <a:xfrm>
-            <a:off x="10845800" y="2286000"/>
-            <a:ext cx="4902200" cy="4318000"/>
-          </a:xfrm>
-          <a:prstGeom prst="rect">
-            <a:avLst/>
-          </a:prstGeom>
-          <a:solidFill>
-            <a:srgbClr val="FCE8EA"/>
-          </a:solidFill>
-          <a:ln w="25400">
-            <a:solidFill>
-              <a:srgbClr val="C41220"/>
-            </a:solidFill>
-            <a:prstDash val="solid"/>
-          </a:ln>
-        </p:spPr>
-      </p:sp>
-      <p:sp>
-        <p:nvSpPr>
-          <p:cNvPr id="15" name="n3-title"/>
-          <p:cNvSpPr/>
-          <p:nvPr/>
-        </p:nvSpPr>
-        <p:spPr>
-          <a:xfrm>
-            <a:off x="11226800" y="2616200"/>
-            <a:ext cx="4191000" cy="431800"/>
-          </a:xfrm>
-          <a:prstGeom prst="rect">
-            <a:avLst/>
-          </a:prstGeom>
-          <a:noFill/>
-          <a:ln/>
-        </p:spPr>
-        <p:txBody>
-          <a:bodyPr wrap="square" lIns="0" tIns="0" rIns="0" bIns="0" rtlCol="0" anchor="t"/>
-          <a:lstStyle/>
-          <a:p>
-            <a:pPr algn="l" indent="0" marL="0">
-              <a:buNone/>
-            </a:pPr>
-            <a:r>
-              <a:rPr lang="en-US" altLang="en-US" sz="2400" dirty="0">
-                <a:solidFill>
-                  <a:srgbClr val="202124"/>
-                </a:solidFill>
-                <a:latin typeface="Inter" pitchFamily="34" charset="0"/>
-                <a:ea typeface="Inter" pitchFamily="34" charset="-122"/>
-                <a:cs typeface="Inter" pitchFamily="34" charset="-120"/>
-              </a:rPr>
-              <a:t>3. Tell them what to do</a:t>
-            </a:r>
-            <a:endParaRPr lang="en-US" sz="2400" dirty="0"/>
-          </a:p>
-        </p:txBody>
-      </p:sp>
-      <p:sp>
-        <p:nvSpPr>
-          <p:cNvPr id="16" name="n3-body"/>
-          <p:cNvSpPr/>
-          <p:nvPr/>
-        </p:nvSpPr>
-        <p:spPr>
-          <a:xfrm>
-            <a:off x="11226800" y="3352800"/>
-            <a:ext cx="4191000" cy="1320800"/>
-          </a:xfrm>
-          <a:prstGeom prst="rect">
-            <a:avLst/>
-          </a:prstGeom>
-          <a:noFill/>
-          <a:ln/>
-        </p:spPr>
-        <p:txBody>
-          <a:bodyPr wrap="square" lIns="0" tIns="0" rIns="0" bIns="0" rtlCol="0" anchor="t"/>
-          <a:lstStyle/>
-          <a:p>
-            <a:pPr algn="l" indent="0" marL="0">
-              <a:lnSpc>
-                <a:spcPts val="2520"/>
-              </a:lnSpc>
-              <a:buNone/>
-            </a:pPr>
-            <a:r>
-              <a:rPr lang="en-US" altLang="en-US" sz="2000" dirty="0">
-                <a:solidFill>
-                  <a:srgbClr val="3C4043"/>
-                </a:solidFill>
-                <a:latin typeface="Inter" pitchFamily="34" charset="0"/>
-                <a:ea typeface="Inter" pitchFamily="34" charset="-122"/>
-                <a:cs typeface="Inter" pitchFamily="34" charset="-120"/>
-              </a:rPr>
-              <a:t>Ask for one clear revision. Do not give the answer or write it for them.</a:t>
-            </a:r>
-            <a:endParaRPr lang="en-US" sz="2000" dirty="0"/>
-          </a:p>
-        </p:txBody>
-      </p:sp>
-      <p:sp>
-        <p:nvSpPr>
-          <p:cNvPr id="17" name="n3-ex"/>
-          <p:cNvSpPr/>
-          <p:nvPr/>
-        </p:nvSpPr>
-        <p:spPr>
-          <a:xfrm>
-            <a:off x="11226800" y="4851400"/>
-            <a:ext cx="4191000" cy="1498600"/>
-          </a:xfrm>
-          <a:prstGeom prst="rect">
-            <a:avLst/>
-          </a:prstGeom>
-          <a:noFill/>
-          <a:ln/>
-        </p:spPr>
-        <p:txBody>
-          <a:bodyPr wrap="square" lIns="0" tIns="0" rIns="0" bIns="0" rtlCol="0" anchor="t"/>
-          <a:lstStyle/>
-          <a:p>
-            <a:pPr algn="l" indent="0" marL="0">
-              <a:lnSpc>
-                <a:spcPts val="2356"/>
-              </a:lnSpc>
-              <a:buNone/>
-            </a:pPr>
-            <a:r>
-              <a:rPr lang="en-US" altLang="en-US" sz="1900" b="1" dirty="0">
-                <a:solidFill>
-                  <a:srgbClr val="C41220"/>
-                </a:solidFill>
-                <a:latin typeface="Inter" pitchFamily="34" charset="0"/>
-                <a:ea typeface="Inter" pitchFamily="34" charset="-122"/>
-                <a:cs typeface="Inter" pitchFamily="34" charset="-120"/>
-              </a:rPr>
-              <a:t>Example:</a:t>
-            </a:r>
-            <a:endParaRPr lang="en-US" sz="1900" dirty="0"/>
-          </a:p>
-          <a:p>
-            <a:pPr algn="l" indent="0" marL="0">
-              <a:lnSpc>
-                <a:spcPts val="2356"/>
-              </a:lnSpc>
-              <a:spcBef>
-                <a:spcPts val="600"/>
-              </a:spcBef>
-              <a:buNone/>
-            </a:pPr>
-            <a:r>
-              <a:rPr lang="en-US" altLang="en-US" sz="1900" dirty="0">
-                <a:solidFill>
-                  <a:srgbClr val="C41220"/>
-                </a:solidFill>
-                <a:latin typeface="Inter" pitchFamily="34" charset="0"/>
-                <a:ea typeface="Inter" pitchFamily="34" charset="-122"/>
-                <a:cs typeface="Inter" pitchFamily="34" charset="-120"/>
-              </a:rPr>
-              <a:t>“Add one sentence that explains how the evidence supports your claim.”</a:t>
-            </a:r>
-            <a:endParaRPr lang="en-US" sz="1900" dirty="0"/>
-          </a:p>
-        </p:txBody>
-      </p:sp>
-      <p:sp>
-        <p:nvSpPr>
-          <p:cNvPr id="18" name="next-shape-17"/>
+              <a:t>Ask for one action: “Add one sentence that explains why.”</a:t>
+            </a:r>
+            <a:endParaRPr lang="en-US" sz="2200" dirty="0"/>
+          </a:p>
+        </p:txBody>
+      </p:sp>
+      <p:sp>
+        <p:nvSpPr>
+          <p:cNvPr id="19" name="next-shape-18"/>
           <p:cNvSpPr/>
           <p:nvPr/>
         </p:nvSpPr>
         <p:spPr>
           <a:xfrm>
             <a:off x="508000" y="6959600"/>
-            <a:ext cx="15240000" cy="736600"/>
+            <a:ext cx="15240000" cy="787400"/>
           </a:xfrm>
           <a:prstGeom prst="rect">
             <a:avLst/>
@@ -6029,30 +6421,30 @@
       </p:sp>
       <p:sp>
         <p:nvSpPr>
-          <p:cNvPr id="19" name="check"/>
+          <p:cNvPr id="20" name="frame"/>
           <p:cNvSpPr/>
           <p:nvPr/>
         </p:nvSpPr>
         <p:spPr>
           <a:xfrm>
             <a:off x="812800" y="7188200"/>
-            <a:ext cx="14605000" cy="330200"/>
-          </a:xfrm>
-          <a:prstGeom prst="rect">
-            <a:avLst/>
-          </a:prstGeom>
-          <a:noFill/>
-          <a:ln/>
-        </p:spPr>
-        <p:txBody>
-          <a:bodyPr wrap="square" lIns="0" tIns="0" rIns="0" bIns="0" rtlCol="0" anchor="t"/>
-          <a:lstStyle/>
-          <a:p>
-            <a:pPr algn="l" indent="0" marL="0">
-              <a:buNone/>
-            </a:pPr>
-            <a:r>
-              <a:rPr lang="en-US" altLang="en-US" sz="1900" b="1" dirty="0">
+            <a:ext cx="14605000" cy="355600"/>
+          </a:xfrm>
+          <a:prstGeom prst="rect">
+            <a:avLst/>
+          </a:prstGeom>
+          <a:noFill/>
+          <a:ln/>
+        </p:spPr>
+        <p:txBody>
+          <a:bodyPr wrap="square" lIns="0" tIns="0" rIns="0" bIns="0" rtlCol="0" anchor="t"/>
+          <a:lstStyle/>
+          <a:p>
+            <a:pPr algn="l" indent="0" marL="0">
+              <a:buNone/>
+            </a:pPr>
+            <a:r>
+              <a:rPr lang="en-US" altLang="en-US" sz="2000" b="1" dirty="0">
                 <a:solidFill>
                   <a:srgbClr val="F6B4BA"/>
                 </a:solidFill>
@@ -6063,7 +6455,7 @@
               <a:t>Use this frame:</a:t>
             </a:r>
             <a:r>
-              <a:rPr lang="en-US" altLang="en-US" sz="1900" dirty="0">
+              <a:rPr lang="en-US" altLang="en-US" sz="2000" dirty="0">
                 <a:solidFill>
                   <a:srgbClr val="FFFFFF"/>
                 </a:solidFill>
@@ -6073,13 +6465,13 @@
               </a:rPr>
               <a:t> “You need to ______. Look at ______. Add or revise ______.”</a:t>
             </a:r>
-            <a:endParaRPr lang="en-US" sz="1900" dirty="0"/>
-          </a:p>
-        </p:txBody>
-      </p:sp>
-      <p:sp>
-        <p:nvSpPr>
-          <p:cNvPr id="20" name="page"/>
+            <a:endParaRPr lang="en-US" sz="2000" dirty="0"/>
+          </a:p>
+        </p:txBody>
+      </p:sp>
+      <p:sp>
+        <p:nvSpPr>
+          <p:cNvPr id="21" name="page"/>
           <p:cNvSpPr/>
           <p:nvPr/>
         </p:nvSpPr>
@@ -6118,7 +6510,7 @@
       </p:sp>
       <p:sp>
         <p:nvSpPr>
-          <p:cNvPr id="21" name="next-shape-20"/>
+          <p:cNvPr id="22" name="next-shape-21"/>
           <p:cNvSpPr/>
           <p:nvPr/>
         </p:nvSpPr>
@@ -6221,7 +6613,7 @@
                 <a:ea typeface="Inter" pitchFamily="34" charset="-122"/>
                 <a:cs typeface="Inter" pitchFamily="34" charset="-120"/>
               </a:rPr>
-              <a:t>Step 5: Plan the Next Instructional Step</a:t>
+              <a:t>Step 5: Plan the Next Step</a:t>
             </a:r>
             <a:endParaRPr lang="en-US" sz="3000" dirty="0"/>
           </a:p>
@@ -6268,26 +6660,210 @@
       </p:sp>
       <p:sp>
         <p:nvSpPr>
-          <p:cNvPr id="5" name="intro"/>
+          <p:cNvPr id="5" name="lit"/>
           <p:cNvSpPr/>
           <p:nvPr/>
         </p:nvSpPr>
         <p:spPr>
           <a:xfrm>
             <a:off x="508000" y="1320800"/>
-            <a:ext cx="15240000" cy="685800"/>
-          </a:xfrm>
-          <a:prstGeom prst="rect">
-            <a:avLst/>
-          </a:prstGeom>
-          <a:noFill/>
-          <a:ln/>
-        </p:spPr>
-        <p:txBody>
-          <a:bodyPr wrap="square" lIns="0" tIns="0" rIns="0" bIns="0" rtlCol="0" anchor="t"/>
-          <a:lstStyle/>
-          <a:p>
-            <a:pPr algn="l" indent="0" marL="0">
+            <a:ext cx="15240000" cy="228600"/>
+          </a:xfrm>
+          <a:prstGeom prst="rect">
+            <a:avLst/>
+          </a:prstGeom>
+          <a:noFill/>
+          <a:ln/>
+        </p:spPr>
+        <p:txBody>
+          <a:bodyPr wrap="square" lIns="0" tIns="0" rIns="0" bIns="0" rtlCol="0" anchor="t"/>
+          <a:lstStyle/>
+          <a:p>
+            <a:pPr algn="l" indent="0" marL="0">
+              <a:buNone/>
+            </a:pPr>
+            <a:r>
+              <a:rPr lang="en-US" altLang="en-US" sz="1400" dirty="0">
+                <a:solidFill>
+                  <a:srgbClr val="C41220"/>
+                </a:solidFill>
+                <a:latin typeface="Inter" pitchFamily="34" charset="0"/>
+                <a:ea typeface="Inter" pitchFamily="34" charset="-122"/>
+                <a:cs typeface="Inter" pitchFamily="34" charset="-120"/>
+              </a:rPr>
+              <a:t>AFTER-LESSON REFLECTION</a:t>
+            </a:r>
+            <a:endParaRPr lang="en-US" sz="1400" dirty="0"/>
+          </a:p>
+        </p:txBody>
+      </p:sp>
+      <p:sp>
+        <p:nvSpPr>
+          <p:cNvPr id="6" name="intro"/>
+          <p:cNvSpPr/>
+          <p:nvPr/>
+        </p:nvSpPr>
+        <p:spPr>
+          <a:xfrm>
+            <a:off x="508000" y="1651000"/>
+            <a:ext cx="15240000" cy="482600"/>
+          </a:xfrm>
+          <a:prstGeom prst="rect">
+            <a:avLst/>
+          </a:prstGeom>
+          <a:noFill/>
+          <a:ln/>
+        </p:spPr>
+        <p:txBody>
+          <a:bodyPr wrap="square" lIns="0" tIns="0" rIns="0" bIns="0" rtlCol="0" anchor="t"/>
+          <a:lstStyle/>
+          <a:p>
+            <a:pPr algn="l" indent="0" marL="0">
+              <a:buNone/>
+            </a:pPr>
+            <a:r>
+              <a:rPr lang="en-US" altLang="en-US" sz="2100" dirty="0">
+                <a:solidFill>
+                  <a:srgbClr val="3C4043"/>
+                </a:solidFill>
+                <a:latin typeface="Inter" pitchFamily="34" charset="0"/>
+                <a:ea typeface="Inter" pitchFamily="34" charset="-122"/>
+                <a:cs typeface="Inter" pitchFamily="34" charset="-120"/>
+              </a:rPr>
+              <a:t>How will we shift instruction to address this student need?</a:t>
+            </a:r>
+            <a:endParaRPr lang="en-US" sz="2100" dirty="0"/>
+          </a:p>
+        </p:txBody>
+      </p:sp>
+      <p:sp>
+        <p:nvSpPr>
+          <p:cNvPr id="7" name="plan-shape-6"/>
+          <p:cNvSpPr/>
+          <p:nvPr/>
+        </p:nvSpPr>
+        <p:spPr>
+          <a:xfrm>
+            <a:off x="508000" y="2336800"/>
+            <a:ext cx="4902200" cy="4089400"/>
+          </a:xfrm>
+          <a:prstGeom prst="rect">
+            <a:avLst/>
+          </a:prstGeom>
+          <a:solidFill>
+            <a:srgbClr val="FCE8EA"/>
+          </a:solidFill>
+          <a:ln w="25400">
+            <a:solidFill>
+              <a:srgbClr val="C41220"/>
+            </a:solidFill>
+            <a:prstDash val="solid"/>
+          </a:ln>
+        </p:spPr>
+      </p:sp>
+      <p:sp>
+        <p:nvSpPr>
+          <p:cNvPr id="8" name="one-label"/>
+          <p:cNvSpPr/>
+          <p:nvPr/>
+        </p:nvSpPr>
+        <p:spPr>
+          <a:xfrm>
+            <a:off x="889000" y="2667000"/>
+            <a:ext cx="4191000" cy="254000"/>
+          </a:xfrm>
+          <a:prstGeom prst="rect">
+            <a:avLst/>
+          </a:prstGeom>
+          <a:noFill/>
+          <a:ln/>
+        </p:spPr>
+        <p:txBody>
+          <a:bodyPr wrap="square" lIns="0" tIns="0" rIns="0" bIns="0" rtlCol="0" anchor="t"/>
+          <a:lstStyle/>
+          <a:p>
+            <a:pPr algn="l" indent="0" marL="0">
+              <a:buNone/>
+            </a:pPr>
+            <a:r>
+              <a:rPr lang="en-US" altLang="en-US" sz="1400" dirty="0">
+                <a:solidFill>
+                  <a:srgbClr val="C41220"/>
+                </a:solidFill>
+                <a:latin typeface="Inter" pitchFamily="34" charset="0"/>
+                <a:ea typeface="Inter" pitchFamily="34" charset="-122"/>
+                <a:cs typeface="Inter" pitchFamily="34" charset="-120"/>
+              </a:rPr>
+              <a:t>1</a:t>
+            </a:r>
+            <a:endParaRPr lang="en-US" sz="1400" dirty="0"/>
+          </a:p>
+        </p:txBody>
+      </p:sp>
+      <p:sp>
+        <p:nvSpPr>
+          <p:cNvPr id="9" name="one-title"/>
+          <p:cNvSpPr/>
+          <p:nvPr/>
+        </p:nvSpPr>
+        <p:spPr>
+          <a:xfrm>
+            <a:off x="889000" y="3124200"/>
+            <a:ext cx="4191000" cy="431800"/>
+          </a:xfrm>
+          <a:prstGeom prst="rect">
+            <a:avLst/>
+          </a:prstGeom>
+          <a:noFill/>
+          <a:ln/>
+        </p:spPr>
+        <p:txBody>
+          <a:bodyPr wrap="square" lIns="0" tIns="0" rIns="0" bIns="0" rtlCol="0" anchor="t"/>
+          <a:lstStyle/>
+          <a:p>
+            <a:pPr algn="l" indent="0" marL="0">
+              <a:buNone/>
+            </a:pPr>
+            <a:r>
+              <a:rPr lang="en-US" altLang="en-US" sz="2500" dirty="0">
+                <a:solidFill>
+                  <a:srgbClr val="202124"/>
+                </a:solidFill>
+                <a:latin typeface="Inter" pitchFamily="34" charset="0"/>
+                <a:ea typeface="Inter" pitchFamily="34" charset="-122"/>
+                <a:cs typeface="Inter" pitchFamily="34" charset="-120"/>
+              </a:rPr>
+              <a:t>Choose one move</a:t>
+            </a:r>
+            <a:endParaRPr lang="en-US" sz="2500" dirty="0"/>
+          </a:p>
+        </p:txBody>
+      </p:sp>
+      <p:sp>
+        <p:nvSpPr>
+          <p:cNvPr id="10" name="one-body"/>
+          <p:cNvSpPr/>
+          <p:nvPr/>
+        </p:nvSpPr>
+        <p:spPr>
+          <a:xfrm>
+            <a:off x="889000" y="4064000"/>
+            <a:ext cx="4191000" cy="1625600"/>
+          </a:xfrm>
+          <a:prstGeom prst="rect">
+            <a:avLst/>
+          </a:prstGeom>
+          <a:noFill/>
+          <a:ln/>
+        </p:spPr>
+        <p:txBody>
+          <a:bodyPr wrap="square" lIns="0" tIns="0" rIns="0" bIns="0" rtlCol="0" anchor="t"/>
+          <a:lstStyle/>
+          <a:p>
+            <a:pPr algn="l" indent="0" marL="0">
+              <a:lnSpc>
+                <a:spcPts val="2816"/>
+              </a:lnSpc>
               <a:buNone/>
             </a:pPr>
             <a:r>
@@ -6299,7 +6875,7 @@
                 <a:ea typeface="Inter" pitchFamily="34" charset="-122"/>
                 <a:cs typeface="Inter" pitchFamily="34" charset="-120"/>
               </a:rPr>
-              <a:t>Choose one step that targets the priority criterion. Keep it small enough to teach in the next lesson or two.</a:t>
+              <a:t>Model it, practice it, or run a short revision cycle.</a:t>
             </a:r>
             <a:endParaRPr lang="en-US" sz="2200" dirty="0"/>
           </a:p>
@@ -6307,14 +6883,14 @@
       </p:sp>
       <p:sp>
         <p:nvSpPr>
-          <p:cNvPr id="6" name="plan-shape-5"/>
-          <p:cNvSpPr/>
-          <p:nvPr/>
-        </p:nvSpPr>
-        <p:spPr>
-          <a:xfrm>
-            <a:off x="508000" y="2286000"/>
-            <a:ext cx="7366000" cy="4191000"/>
+          <p:cNvPr id="11" name="plan-shape-10"/>
+          <p:cNvSpPr/>
+          <p:nvPr/>
+        </p:nvSpPr>
+        <p:spPr>
+          <a:xfrm>
+            <a:off x="5676900" y="2336800"/>
+            <a:ext cx="4902200" cy="4089400"/>
           </a:xfrm>
           <a:prstGeom prst="rect">
             <a:avLst/>
@@ -6332,14 +6908,53 @@
       </p:sp>
       <p:sp>
         <p:nvSpPr>
-          <p:cNvPr id="7" name="left-title"/>
-          <p:cNvSpPr/>
-          <p:nvPr/>
-        </p:nvSpPr>
-        <p:spPr>
-          <a:xfrm>
-            <a:off x="889000" y="2616200"/>
-            <a:ext cx="6604000" cy="431800"/>
+          <p:cNvPr id="12" name="two-label"/>
+          <p:cNvSpPr/>
+          <p:nvPr/>
+        </p:nvSpPr>
+        <p:spPr>
+          <a:xfrm>
+            <a:off x="6057900" y="2667000"/>
+            <a:ext cx="4191000" cy="254000"/>
+          </a:xfrm>
+          <a:prstGeom prst="rect">
+            <a:avLst/>
+          </a:prstGeom>
+          <a:noFill/>
+          <a:ln/>
+        </p:spPr>
+        <p:txBody>
+          <a:bodyPr wrap="square" lIns="0" tIns="0" rIns="0" bIns="0" rtlCol="0" anchor="t"/>
+          <a:lstStyle/>
+          <a:p>
+            <a:pPr algn="l" indent="0" marL="0">
+              <a:buNone/>
+            </a:pPr>
+            <a:r>
+              <a:rPr lang="en-US" altLang="en-US" sz="1400" dirty="0">
+                <a:solidFill>
+                  <a:srgbClr val="C41220"/>
+                </a:solidFill>
+                <a:latin typeface="Inter" pitchFamily="34" charset="0"/>
+                <a:ea typeface="Inter" pitchFamily="34" charset="-122"/>
+                <a:cs typeface="Inter" pitchFamily="34" charset="-120"/>
+              </a:rPr>
+              <a:t>2</a:t>
+            </a:r>
+            <a:endParaRPr lang="en-US" sz="1400" dirty="0"/>
+          </a:p>
+        </p:txBody>
+      </p:sp>
+      <p:sp>
+        <p:nvSpPr>
+          <p:cNvPr id="13" name="two-title"/>
+          <p:cNvSpPr/>
+          <p:nvPr/>
+        </p:nvSpPr>
+        <p:spPr>
+          <a:xfrm>
+            <a:off x="6057900" y="3124200"/>
+            <a:ext cx="4191000" cy="431800"/>
           </a:xfrm>
           <a:prstGeom prst="rect">
             <a:avLst/>
@@ -6363,7 +6978,7 @@
                 <a:ea typeface="Inter" pitchFamily="34" charset="-122"/>
                 <a:cs typeface="Inter" pitchFamily="34" charset="-120"/>
               </a:rPr>
-              <a:t>PICK ONE</a:t>
+              <a:t>Plan student work</a:t>
             </a:r>
             <a:endParaRPr lang="en-US" sz="2500" dirty="0"/>
           </a:p>
@@ -6371,37 +6986,33 @@
       </p:sp>
       <p:sp>
         <p:nvSpPr>
-          <p:cNvPr id="8" name="left-body"/>
-          <p:cNvSpPr/>
-          <p:nvPr/>
-        </p:nvSpPr>
-        <p:spPr>
-          <a:xfrm>
-            <a:off x="889000" y="3352800"/>
-            <a:ext cx="6604000" cy="2921000"/>
-          </a:xfrm>
-          <a:prstGeom prst="rect">
-            <a:avLst/>
-          </a:prstGeom>
-          <a:noFill/>
-          <a:ln/>
-        </p:spPr>
-        <p:txBody>
-          <a:bodyPr wrap="square" lIns="0" tIns="0" rIns="0" bIns="0" rtlCol="0" anchor="t"/>
-          <a:lstStyle/>
-          <a:p>
-            <a:pPr algn="l" marL="317500" indent="-317500">
+          <p:cNvPr id="14" name="two-body"/>
+          <p:cNvSpPr/>
+          <p:nvPr/>
+        </p:nvSpPr>
+        <p:spPr>
+          <a:xfrm>
+            <a:off x="6057900" y="4064000"/>
+            <a:ext cx="4191000" cy="1625600"/>
+          </a:xfrm>
+          <a:prstGeom prst="rect">
+            <a:avLst/>
+          </a:prstGeom>
+          <a:noFill/>
+          <a:ln/>
+        </p:spPr>
+        <p:txBody>
+          <a:bodyPr wrap="square" lIns="0" tIns="0" rIns="0" bIns="0" rtlCol="0" anchor="t"/>
+          <a:lstStyle/>
+          <a:p>
+            <a:pPr algn="l" indent="0" marL="0">
               <a:lnSpc>
-                <a:spcPts val="2560"/>
+                <a:spcPts val="2816"/>
               </a:lnSpc>
-              <a:spcBef>
-                <a:spcPts val="10"/>
-              </a:spcBef>
-              <a:buSzPct val="100000"/>
-              <a:buChar char="•"/>
-            </a:pPr>
-            <a:r>
-              <a:rPr lang="en-US" altLang="en-US" sz="2000" dirty="0">
+              <a:buNone/>
+            </a:pPr>
+            <a:r>
+              <a:rPr lang="en-US" altLang="en-US" sz="2200" dirty="0">
                 <a:solidFill>
                   <a:srgbClr val="3C4043"/>
                 </a:solidFill>
@@ -6409,128 +7020,32 @@
                 <a:ea typeface="Inter" pitchFamily="34" charset="-122"/>
                 <a:cs typeface="Inter" pitchFamily="34" charset="-120"/>
               </a:rPr>
-              <a:t>Re-teach one reasoning move with a model</a:t>
-            </a:r>
-            <a:endParaRPr lang="en-US" sz="2000" dirty="0"/>
-          </a:p>
-          <a:p>
-            <a:pPr algn="l" marL="317500" indent="-317500">
-              <a:lnSpc>
-                <a:spcPts val="2560"/>
-              </a:lnSpc>
-              <a:spcBef>
-                <a:spcPts val="10"/>
-              </a:spcBef>
-              <a:buSzPct val="100000"/>
-              <a:buChar char="•"/>
-            </a:pPr>
-            <a:r>
-              <a:rPr lang="en-US" altLang="en-US" sz="2000" dirty="0">
-                <a:solidFill>
-                  <a:srgbClr val="3C4043"/>
-                </a:solidFill>
-                <a:latin typeface="Inter" pitchFamily="34" charset="0"/>
-                <a:ea typeface="Inter" pitchFamily="34" charset="-122"/>
-                <a:cs typeface="Inter" pitchFamily="34" charset="-120"/>
-              </a:rPr>
-              <a:t>Practice selecting the strongest evidence</a:t>
-            </a:r>
-            <a:endParaRPr lang="en-US" sz="2000" dirty="0"/>
-          </a:p>
-          <a:p>
-            <a:pPr algn="l" marL="317500" indent="-317500">
-              <a:lnSpc>
-                <a:spcPts val="2560"/>
-              </a:lnSpc>
-              <a:spcBef>
-                <a:spcPts val="10"/>
-              </a:spcBef>
-              <a:buSzPct val="100000"/>
-              <a:buChar char="•"/>
-            </a:pPr>
-            <a:r>
-              <a:rPr lang="en-US" altLang="en-US" sz="2000" dirty="0">
-                <a:solidFill>
-                  <a:srgbClr val="3C4043"/>
-                </a:solidFill>
-                <a:latin typeface="Inter" pitchFamily="34" charset="0"/>
-                <a:ea typeface="Inter" pitchFamily="34" charset="-122"/>
-                <a:cs typeface="Inter" pitchFamily="34" charset="-120"/>
-              </a:rPr>
-              <a:t>Model how to link evidence to the claim</a:t>
-            </a:r>
-            <a:endParaRPr lang="en-US" sz="2000" dirty="0"/>
-          </a:p>
-          <a:p>
-            <a:pPr algn="l" marL="317500" indent="-317500">
-              <a:lnSpc>
-                <a:spcPts val="2560"/>
-              </a:lnSpc>
-              <a:spcBef>
-                <a:spcPts val="10"/>
-              </a:spcBef>
-              <a:buSzPct val="100000"/>
-              <a:buChar char="•"/>
-            </a:pPr>
-            <a:r>
-              <a:rPr lang="en-US" altLang="en-US" sz="2000" dirty="0">
-                <a:solidFill>
-                  <a:srgbClr val="3C4043"/>
-                </a:solidFill>
-                <a:latin typeface="Inter" pitchFamily="34" charset="0"/>
-                <a:ea typeface="Inter" pitchFamily="34" charset="-122"/>
-                <a:cs typeface="Inter" pitchFamily="34" charset="-120"/>
-              </a:rPr>
-              <a:t>Run a short revision cycle on one paragraph</a:t>
-            </a:r>
-            <a:endParaRPr lang="en-US" sz="2000" dirty="0"/>
-          </a:p>
-          <a:p>
-            <a:pPr algn="l" marL="317500" indent="-317500">
-              <a:lnSpc>
-                <a:spcPts val="2560"/>
-              </a:lnSpc>
-              <a:spcBef>
-                <a:spcPts val="10"/>
-              </a:spcBef>
-              <a:buSzPct val="100000"/>
-              <a:buChar char="•"/>
-            </a:pPr>
-            <a:r>
-              <a:rPr lang="en-US" altLang="en-US" sz="2000" dirty="0">
-                <a:solidFill>
-                  <a:srgbClr val="3C4043"/>
-                </a:solidFill>
-                <a:latin typeface="Inter" pitchFamily="34" charset="0"/>
-                <a:ea typeface="Inter" pitchFamily="34" charset="-122"/>
-                <a:cs typeface="Inter" pitchFamily="34" charset="-120"/>
-              </a:rPr>
-              <a:t>Clarify one science term students misuse</a:t>
-            </a:r>
-            <a:endParaRPr lang="en-US" sz="2000" dirty="0"/>
-          </a:p>
-        </p:txBody>
-      </p:sp>
-      <p:sp>
-        <p:nvSpPr>
-          <p:cNvPr id="9" name="plan-shape-8"/>
-          <p:cNvSpPr/>
-          <p:nvPr/>
-        </p:nvSpPr>
-        <p:spPr>
-          <a:xfrm>
-            <a:off x="8382000" y="2286000"/>
-            <a:ext cx="7366000" cy="4191000"/>
+              <a:t>What will students write, say, revise, or show?</a:t>
+            </a:r>
+            <a:endParaRPr lang="en-US" sz="2200" dirty="0"/>
+          </a:p>
+        </p:txBody>
+      </p:sp>
+      <p:sp>
+        <p:nvSpPr>
+          <p:cNvPr id="15" name="plan-shape-14"/>
+          <p:cNvSpPr/>
+          <p:nvPr/>
+        </p:nvSpPr>
+        <p:spPr>
+          <a:xfrm>
+            <a:off x="10845800" y="2336800"/>
+            <a:ext cx="4902200" cy="4089400"/>
           </a:xfrm>
           <a:prstGeom prst="rect">
             <a:avLst/>
           </a:prstGeom>
           <a:solidFill>
-            <a:srgbClr val="FCE8EA"/>
+            <a:srgbClr val="EAF5EC"/>
           </a:solidFill>
           <a:ln w="25400">
             <a:solidFill>
-              <a:srgbClr val="C41220"/>
+              <a:srgbClr val="238636"/>
             </a:solidFill>
             <a:prstDash val="solid"/>
           </a:ln>
@@ -6538,14 +7053,53 @@
       </p:sp>
       <p:sp>
         <p:nvSpPr>
-          <p:cNvPr id="10" name="right-title"/>
-          <p:cNvSpPr/>
-          <p:nvPr/>
-        </p:nvSpPr>
-        <p:spPr>
-          <a:xfrm>
-            <a:off x="8763000" y="2616200"/>
-            <a:ext cx="6604000" cy="431800"/>
+          <p:cNvPr id="16" name="three-label"/>
+          <p:cNvSpPr/>
+          <p:nvPr/>
+        </p:nvSpPr>
+        <p:spPr>
+          <a:xfrm>
+            <a:off x="11226800" y="2667000"/>
+            <a:ext cx="4191000" cy="254000"/>
+          </a:xfrm>
+          <a:prstGeom prst="rect">
+            <a:avLst/>
+          </a:prstGeom>
+          <a:noFill/>
+          <a:ln/>
+        </p:spPr>
+        <p:txBody>
+          <a:bodyPr wrap="square" lIns="0" tIns="0" rIns="0" bIns="0" rtlCol="0" anchor="t"/>
+          <a:lstStyle/>
+          <a:p>
+            <a:pPr algn="l" indent="0" marL="0">
+              <a:buNone/>
+            </a:pPr>
+            <a:r>
+              <a:rPr lang="en-US" altLang="en-US" sz="1400" dirty="0">
+                <a:solidFill>
+                  <a:srgbClr val="238636"/>
+                </a:solidFill>
+                <a:latin typeface="Inter" pitchFamily="34" charset="0"/>
+                <a:ea typeface="Inter" pitchFamily="34" charset="-122"/>
+                <a:cs typeface="Inter" pitchFamily="34" charset="-120"/>
+              </a:rPr>
+              <a:t>3</a:t>
+            </a:r>
+            <a:endParaRPr lang="en-US" sz="1400" dirty="0"/>
+          </a:p>
+        </p:txBody>
+      </p:sp>
+      <p:sp>
+        <p:nvSpPr>
+          <p:cNvPr id="17" name="three-title"/>
+          <p:cNvSpPr/>
+          <p:nvPr/>
+        </p:nvSpPr>
+        <p:spPr>
+          <a:xfrm>
+            <a:off x="11226800" y="3124200"/>
+            <a:ext cx="4191000" cy="431800"/>
           </a:xfrm>
           <a:prstGeom prst="rect">
             <a:avLst/>
@@ -6569,7 +7123,7 @@
                 <a:ea typeface="Inter" pitchFamily="34" charset="-122"/>
                 <a:cs typeface="Inter" pitchFamily="34" charset="-120"/>
               </a:rPr>
-              <a:t>THEN SAY HOW YOU WILL KNOW</a:t>
+              <a:t>Choose one check</a:t>
             </a:r>
             <a:endParaRPr lang="en-US" sz="2500" dirty="0"/>
           </a:p>
@@ -6577,37 +7131,33 @@
       </p:sp>
       <p:sp>
         <p:nvSpPr>
-          <p:cNvPr id="11" name="right-body"/>
-          <p:cNvSpPr/>
-          <p:nvPr/>
-        </p:nvSpPr>
-        <p:spPr>
-          <a:xfrm>
-            <a:off x="8763000" y="3352800"/>
-            <a:ext cx="6604000" cy="2921000"/>
-          </a:xfrm>
-          <a:prstGeom prst="rect">
-            <a:avLst/>
-          </a:prstGeom>
-          <a:noFill/>
-          <a:ln/>
-        </p:spPr>
-        <p:txBody>
-          <a:bodyPr wrap="square" lIns="0" tIns="0" rIns="0" bIns="0" rtlCol="0" anchor="t"/>
-          <a:lstStyle/>
-          <a:p>
-            <a:pPr algn="l" marL="317500" indent="-317500">
+          <p:cNvPr id="18" name="three-body"/>
+          <p:cNvSpPr/>
+          <p:nvPr/>
+        </p:nvSpPr>
+        <p:spPr>
+          <a:xfrm>
+            <a:off x="11226800" y="4064000"/>
+            <a:ext cx="4191000" cy="1625600"/>
+          </a:xfrm>
+          <a:prstGeom prst="rect">
+            <a:avLst/>
+          </a:prstGeom>
+          <a:noFill/>
+          <a:ln/>
+        </p:spPr>
+        <p:txBody>
+          <a:bodyPr wrap="square" lIns="0" tIns="0" rIns="0" bIns="0" rtlCol="0" anchor="t"/>
+          <a:lstStyle/>
+          <a:p>
+            <a:pPr algn="l" indent="0" marL="0">
               <a:lnSpc>
-                <a:spcPts val="2560"/>
+                <a:spcPts val="2816"/>
               </a:lnSpc>
-              <a:spcBef>
-                <a:spcPts val="10"/>
-              </a:spcBef>
-              <a:buSzPct val="100000"/>
-              <a:buChar char="•"/>
-            </a:pPr>
-            <a:r>
-              <a:rPr lang="en-US" altLang="en-US" sz="2000" dirty="0">
+              <a:buNone/>
+            </a:pPr>
+            <a:r>
+              <a:rPr lang="en-US" altLang="en-US" sz="2200" dirty="0">
                 <a:solidFill>
                   <a:srgbClr val="3C4043"/>
                 </a:solidFill>
@@ -6615,94 +7165,22 @@
                 <a:ea typeface="Inter" pitchFamily="34" charset="-122"/>
                 <a:cs typeface="Inter" pitchFamily="34" charset="-120"/>
               </a:rPr>
-              <a:t>What students will produce</a:t>
-            </a:r>
-            <a:endParaRPr lang="en-US" sz="2000" dirty="0"/>
-          </a:p>
-          <a:p>
-            <a:pPr algn="l" marL="317500" indent="-317500">
-              <a:lnSpc>
-                <a:spcPts val="2560"/>
-              </a:lnSpc>
-              <a:spcBef>
-                <a:spcPts val="10"/>
-              </a:spcBef>
-              <a:buSzPct val="100000"/>
-              <a:buChar char="•"/>
-            </a:pPr>
-            <a:r>
-              <a:rPr lang="en-US" altLang="en-US" sz="2000" dirty="0">
-                <a:solidFill>
-                  <a:srgbClr val="3C4043"/>
-                </a:solidFill>
-                <a:latin typeface="Inter" pitchFamily="34" charset="0"/>
-                <a:ea typeface="Inter" pitchFamily="34" charset="-122"/>
-                <a:cs typeface="Inter" pitchFamily="34" charset="-120"/>
-              </a:rPr>
-              <a:t>Which criterion the work must show</a:t>
-            </a:r>
-            <a:endParaRPr lang="en-US" sz="2000" dirty="0"/>
-          </a:p>
-          <a:p>
-            <a:pPr algn="l" marL="317500" indent="-317500">
-              <a:lnSpc>
-                <a:spcPts val="2560"/>
-              </a:lnSpc>
-              <a:spcBef>
-                <a:spcPts val="10"/>
-              </a:spcBef>
-              <a:buSzPct val="100000"/>
-              <a:buChar char="•"/>
-            </a:pPr>
-            <a:r>
-              <a:rPr lang="en-US" altLang="en-US" sz="2000" dirty="0">
-                <a:solidFill>
-                  <a:srgbClr val="3C4043"/>
-                </a:solidFill>
-                <a:latin typeface="Inter" pitchFamily="34" charset="0"/>
-                <a:ea typeface="Inter" pitchFamily="34" charset="-122"/>
-                <a:cs typeface="Inter" pitchFamily="34" charset="-120"/>
-              </a:rPr>
-              <a:t>When you will collect it</a:t>
-            </a:r>
-            <a:endParaRPr lang="en-US" sz="2000" dirty="0"/>
-          </a:p>
-          <a:p>
-            <a:pPr algn="l" marL="317500" indent="-317500">
-              <a:lnSpc>
-                <a:spcPts val="2560"/>
-              </a:lnSpc>
-              <a:spcBef>
-                <a:spcPts val="10"/>
-              </a:spcBef>
-              <a:buSzPct val="100000"/>
-              <a:buChar char="•"/>
-            </a:pPr>
-            <a:r>
-              <a:rPr lang="en-US" altLang="en-US" sz="2000" dirty="0">
-                <a:solidFill>
-                  <a:srgbClr val="3C4043"/>
-                </a:solidFill>
-                <a:latin typeface="Inter" pitchFamily="34" charset="0"/>
-                <a:ea typeface="Inter" pitchFamily="34" charset="-122"/>
-                <a:cs typeface="Inter" pitchFamily="34" charset="-120"/>
-              </a:rPr>
-              <a:t>What you will look for in the work</a:t>
-            </a:r>
-            <a:endParaRPr lang="en-US" sz="2000" dirty="0"/>
-          </a:p>
-        </p:txBody>
-      </p:sp>
-      <p:sp>
-        <p:nvSpPr>
-          <p:cNvPr id="12" name="plan-shape-11"/>
-          <p:cNvSpPr/>
-          <p:nvPr/>
-        </p:nvSpPr>
-        <p:spPr>
-          <a:xfrm>
-            <a:off x="508000" y="6858000"/>
-            <a:ext cx="15240000" cy="838200"/>
+              <a:t>What will you collect and look for in the next piece of work?</a:t>
+            </a:r>
+            <a:endParaRPr lang="en-US" sz="2200" dirty="0"/>
+          </a:p>
+        </p:txBody>
+      </p:sp>
+      <p:sp>
+        <p:nvSpPr>
+          <p:cNvPr id="19" name="plan-shape-18"/>
+          <p:cNvSpPr/>
+          <p:nvPr/>
+        </p:nvSpPr>
+        <p:spPr>
+          <a:xfrm>
+            <a:off x="508000" y="6959600"/>
+            <a:ext cx="15240000" cy="787400"/>
           </a:xfrm>
           <a:prstGeom prst="rect">
             <a:avLst/>
@@ -6715,13 +7193,13 @@
       </p:sp>
       <p:sp>
         <p:nvSpPr>
-          <p:cNvPr id="13" name="commit"/>
-          <p:cNvSpPr/>
-          <p:nvPr/>
-        </p:nvSpPr>
-        <p:spPr>
-          <a:xfrm>
-            <a:off x="812800" y="7112000"/>
+          <p:cNvPr id="20" name="leave"/>
+          <p:cNvSpPr/>
+          <p:nvPr/>
+        </p:nvSpPr>
+        <p:spPr>
+          <a:xfrm>
+            <a:off x="812800" y="7188200"/>
             <a:ext cx="14605000" cy="355600"/>
           </a:xfrm>
           <a:prstGeom prst="rect">
@@ -6738,6 +7216,17 @@
               <a:buNone/>
             </a:pPr>
             <a:r>
+              <a:rPr lang="en-US" altLang="en-US" sz="2000" b="1" dirty="0">
+                <a:solidFill>
+                  <a:srgbClr val="B6E3BF"/>
+                </a:solidFill>
+                <a:latin typeface="Inter" pitchFamily="34" charset="0"/>
+                <a:ea typeface="Inter" pitchFamily="34" charset="-122"/>
+                <a:cs typeface="Inter" pitchFamily="34" charset="-120"/>
+              </a:rPr>
+              <a:t>Leave this step with:</a:t>
+            </a:r>
+            <a:r>
               <a:rPr lang="en-US" altLang="en-US" sz="2000" dirty="0">
                 <a:solidFill>
                   <a:srgbClr val="FFFFFF"/>
@@ -6746,7 +7235,7 @@
                 <a:ea typeface="Inter" pitchFamily="34" charset="-122"/>
                 <a:cs typeface="Inter" pitchFamily="34" charset="-120"/>
               </a:rPr>
-              <a:t>Complete the one-page writing analysis tool: task and standard, strengths, pattern, priority need, feedback, next step.</a:t>
+              <a:t> one next instructional step and one short evidence check.</a:t>
             </a:r>
             <a:endParaRPr lang="en-US" sz="2000" dirty="0"/>
           </a:p>
@@ -6754,7 +7243,7 @@
       </p:sp>
       <p:sp>
         <p:nvSpPr>
-          <p:cNvPr id="14" name="page"/>
+          <p:cNvPr id="21" name="page"/>
           <p:cNvSpPr/>
           <p:nvPr/>
         </p:nvSpPr>
@@ -6793,7 +7282,7 @@
       </p:sp>
       <p:sp>
         <p:nvSpPr>
-          <p:cNvPr id="15" name="plan-shape-14"/>
+          <p:cNvPr id="22" name="plan-shape-21"/>
           <p:cNvSpPr/>
           <p:nvPr/>
         </p:nvSpPr>
@@ -6911,7 +7400,7 @@
         <p:spPr>
           <a:xfrm>
             <a:off x="736600" y="1600200"/>
-            <a:ext cx="13970000" cy="762000"/>
+            <a:ext cx="13970000" cy="660400"/>
           </a:xfrm>
           <a:prstGeom prst="rect">
             <a:avLst/>
@@ -6935,7 +7424,7 @@
                 <a:ea typeface="Inter" pitchFamily="34" charset="-122"/>
                 <a:cs typeface="Inter" pitchFamily="34" charset="-120"/>
               </a:rPr>
-              <a:t>Rubric → Samples → Pattern → Feedback → Next Step</a:t>
+              <a:t>Before You Leave</a:t>
             </a:r>
             <a:endParaRPr lang="en-US" sz="4000" dirty="0"/>
           </a:p>
@@ -6943,30 +7432,69 @@
       </p:sp>
       <p:sp>
         <p:nvSpPr>
-          <p:cNvPr id="5" name="subtitle"/>
-          <p:cNvSpPr/>
-          <p:nvPr/>
-        </p:nvSpPr>
-        <p:spPr>
-          <a:xfrm>
-            <a:off x="736600" y="2590800"/>
-            <a:ext cx="13970000" cy="508000"/>
-          </a:xfrm>
-          <a:prstGeom prst="rect">
-            <a:avLst/>
-          </a:prstGeom>
-          <a:noFill/>
-          <a:ln/>
-        </p:spPr>
-        <p:txBody>
-          <a:bodyPr wrap="square" lIns="0" tIns="0" rIns="0" bIns="0" rtlCol="0" anchor="t"/>
-          <a:lstStyle/>
-          <a:p>
-            <a:pPr algn="l" indent="0" marL="0">
-              <a:buNone/>
-            </a:pPr>
-            <a:r>
-              <a:rPr lang="en-US" altLang="en-US" sz="2200" dirty="0">
+          <p:cNvPr id="5" name="lit"/>
+          <p:cNvSpPr/>
+          <p:nvPr/>
+        </p:nvSpPr>
+        <p:spPr>
+          <a:xfrm>
+            <a:off x="736600" y="2514600"/>
+            <a:ext cx="13970000" cy="228600"/>
+          </a:xfrm>
+          <a:prstGeom prst="rect">
+            <a:avLst/>
+          </a:prstGeom>
+          <a:noFill/>
+          <a:ln/>
+        </p:spPr>
+        <p:txBody>
+          <a:bodyPr wrap="square" lIns="0" tIns="0" rIns="0" bIns="0" rtlCol="0" anchor="t"/>
+          <a:lstStyle/>
+          <a:p>
+            <a:pPr algn="l" indent="0" marL="0">
+              <a:buNone/>
+            </a:pPr>
+            <a:r>
+              <a:rPr lang="en-US" altLang="en-US" sz="1400" dirty="0">
+                <a:solidFill>
+                  <a:srgbClr val="C41220"/>
+                </a:solidFill>
+                <a:latin typeface="Inter" pitchFamily="34" charset="0"/>
+                <a:ea typeface="Inter" pitchFamily="34" charset="-122"/>
+                <a:cs typeface="Inter" pitchFamily="34" charset="-120"/>
+              </a:rPr>
+              <a:t>AFTER-LESSON REFLECTION + FORWARD PLANNING</a:t>
+            </a:r>
+            <a:endParaRPr lang="en-US" sz="1400" dirty="0"/>
+          </a:p>
+        </p:txBody>
+      </p:sp>
+      <p:sp>
+        <p:nvSpPr>
+          <p:cNvPr id="6" name="subtitle"/>
+          <p:cNvSpPr/>
+          <p:nvPr/>
+        </p:nvSpPr>
+        <p:spPr>
+          <a:xfrm>
+            <a:off x="736600" y="2819400"/>
+            <a:ext cx="13970000" cy="381000"/>
+          </a:xfrm>
+          <a:prstGeom prst="rect">
+            <a:avLst/>
+          </a:prstGeom>
+          <a:noFill/>
+          <a:ln/>
+        </p:spPr>
+        <p:txBody>
+          <a:bodyPr wrap="square" lIns="0" tIns="0" rIns="0" bIns="0" rtlCol="0" anchor="t"/>
+          <a:lstStyle/>
+          <a:p>
+            <a:pPr algn="l" indent="0" marL="0">
+              <a:buNone/>
+            </a:pPr>
+            <a:r>
+              <a:rPr lang="en-US" altLang="en-US" sz="2000" dirty="0">
                 <a:solidFill>
                   <a:srgbClr val="3C4043"/>
                 </a:solidFill>
@@ -6974,22 +7502,22 @@
                 <a:ea typeface="Inter" pitchFamily="34" charset="-122"/>
                 <a:cs typeface="Inter" pitchFamily="34" charset="-120"/>
               </a:rPr>
-              <a:t>Three commitments before leaving, and the form goes with you.</a:t>
-            </a:r>
-            <a:endParaRPr lang="en-US" sz="2200" dirty="0"/>
-          </a:p>
-        </p:txBody>
-      </p:sp>
-      <p:sp>
-        <p:nvSpPr>
-          <p:cNvPr id="6" name="close-shape-5"/>
-          <p:cNvSpPr/>
-          <p:nvPr/>
-        </p:nvSpPr>
-        <p:spPr>
-          <a:xfrm>
-            <a:off x="736600" y="3403600"/>
-            <a:ext cx="4699000" cy="2971800"/>
+              <a:t>Finish these three actions, then keep the form and evidence for the next PLC.</a:t>
+            </a:r>
+            <a:endParaRPr lang="en-US" sz="2000" dirty="0"/>
+          </a:p>
+        </p:txBody>
+      </p:sp>
+      <p:sp>
+        <p:nvSpPr>
+          <p:cNvPr id="7" name="close-shape-6"/>
+          <p:cNvSpPr/>
+          <p:nvPr/>
+        </p:nvSpPr>
+        <p:spPr>
+          <a:xfrm>
+            <a:off x="736600" y="3454400"/>
+            <a:ext cx="4699000" cy="3073400"/>
           </a:xfrm>
           <a:prstGeom prst="rect">
             <a:avLst/>
@@ -7007,14 +7535,92 @@
       </p:sp>
       <p:sp>
         <p:nvSpPr>
-          <p:cNvPr id="7" name="c1"/>
-          <p:cNvSpPr/>
-          <p:nvPr/>
-        </p:nvSpPr>
-        <p:spPr>
-          <a:xfrm>
-            <a:off x="1117600" y="3733800"/>
-            <a:ext cx="3937000" cy="2362200"/>
+          <p:cNvPr id="8" name="one-label"/>
+          <p:cNvSpPr/>
+          <p:nvPr/>
+        </p:nvSpPr>
+        <p:spPr>
+          <a:xfrm>
+            <a:off x="1117600" y="3784600"/>
+            <a:ext cx="3937000" cy="254000"/>
+          </a:xfrm>
+          <a:prstGeom prst="rect">
+            <a:avLst/>
+          </a:prstGeom>
+          <a:noFill/>
+          <a:ln/>
+        </p:spPr>
+        <p:txBody>
+          <a:bodyPr wrap="square" lIns="0" tIns="0" rIns="0" bIns="0" rtlCol="0" anchor="t"/>
+          <a:lstStyle/>
+          <a:p>
+            <a:pPr algn="l" indent="0" marL="0">
+              <a:buNone/>
+            </a:pPr>
+            <a:r>
+              <a:rPr lang="en-US" altLang="en-US" sz="1400" dirty="0">
+                <a:solidFill>
+                  <a:srgbClr val="C41220"/>
+                </a:solidFill>
+                <a:latin typeface="Inter" pitchFamily="34" charset="0"/>
+                <a:ea typeface="Inter" pitchFamily="34" charset="-122"/>
+                <a:cs typeface="Inter" pitchFamily="34" charset="-120"/>
+              </a:rPr>
+              <a:t>1</a:t>
+            </a:r>
+            <a:endParaRPr lang="en-US" sz="1400" dirty="0"/>
+          </a:p>
+        </p:txBody>
+      </p:sp>
+      <p:sp>
+        <p:nvSpPr>
+          <p:cNvPr id="9" name="one-title"/>
+          <p:cNvSpPr/>
+          <p:nvPr/>
+        </p:nvSpPr>
+        <p:spPr>
+          <a:xfrm>
+            <a:off x="1117600" y="4216400"/>
+            <a:ext cx="3937000" cy="431800"/>
+          </a:xfrm>
+          <a:prstGeom prst="rect">
+            <a:avLst/>
+          </a:prstGeom>
+          <a:noFill/>
+          <a:ln/>
+        </p:spPr>
+        <p:txBody>
+          <a:bodyPr wrap="square" lIns="0" tIns="0" rIns="0" bIns="0" rtlCol="0" anchor="t"/>
+          <a:lstStyle/>
+          <a:p>
+            <a:pPr algn="l" indent="0" marL="0">
+              <a:buNone/>
+            </a:pPr>
+            <a:r>
+              <a:rPr lang="en-US" altLang="en-US" sz="2400" dirty="0">
+                <a:solidFill>
+                  <a:srgbClr val="202124"/>
+                </a:solidFill>
+                <a:latin typeface="Inter" pitchFamily="34" charset="0"/>
+                <a:ea typeface="Inter" pitchFamily="34" charset="-122"/>
+                <a:cs typeface="Inter" pitchFamily="34" charset="-120"/>
+              </a:rPr>
+              <a:t>Give the feedback</a:t>
+            </a:r>
+            <a:endParaRPr lang="en-US" sz="2400" dirty="0"/>
+          </a:p>
+        </p:txBody>
+      </p:sp>
+      <p:sp>
+        <p:nvSpPr>
+          <p:cNvPr id="10" name="one-body"/>
+          <p:cNvSpPr/>
+          <p:nvPr/>
+        </p:nvSpPr>
+        <p:spPr>
+          <a:xfrm>
+            <a:off x="1117600" y="5054600"/>
+            <a:ext cx="3937000" cy="1117600"/>
           </a:xfrm>
           <a:prstGeom prst="rect">
             <a:avLst/>
@@ -7028,35 +7634,12 @@
           <a:p>
             <a:pPr algn="l" indent="0" marL="0">
               <a:lnSpc>
-                <a:spcPts val="1890"/>
+                <a:spcPts val="2688"/>
               </a:lnSpc>
               <a:buNone/>
             </a:pPr>
             <a:r>
-              <a:rPr lang="en-US" altLang="en-US" sz="1500" b="1" dirty="0">
-                <a:solidFill>
-                  <a:srgbClr val="C41220"/>
-                </a:solidFill>
-                <a:latin typeface="Inter" pitchFamily="34" charset="0"/>
-                <a:ea typeface="Inter" pitchFamily="34" charset="-122"/>
-                <a:cs typeface="Inter" pitchFamily="34" charset="-120"/>
-              </a:rPr>
-              <a:t>1. RETURN</a:t>
-            </a:r>
-            <a:endParaRPr lang="en-US" sz="2000" dirty="0"/>
-          </a:p>
-          <a:p>
-            <a:pPr algn="l" indent="0" marL="0">
-              <a:lnSpc>
-                <a:spcPts val="2520"/>
-              </a:lnSpc>
-              <a:spcBef>
-                <a:spcPts val="1000"/>
-              </a:spcBef>
-              <a:buNone/>
-            </a:pPr>
-            <a:r>
-              <a:rPr lang="en-US" altLang="en-US" sz="2000" dirty="0">
+              <a:rPr lang="en-US" altLang="en-US" sz="2100" dirty="0">
                 <a:solidFill>
                   <a:srgbClr val="3C4043"/>
                 </a:solidFill>
@@ -7064,22 +7647,22 @@
                 <a:ea typeface="Inter" pitchFamily="34" charset="-122"/>
                 <a:cs typeface="Inter" pitchFamily="34" charset="-120"/>
               </a:rPr>
-              <a:t>Give the written comment back and give students time to revise.</a:t>
-            </a:r>
-            <a:endParaRPr lang="en-US" sz="2000" dirty="0"/>
-          </a:p>
-        </p:txBody>
-      </p:sp>
-      <p:sp>
-        <p:nvSpPr>
-          <p:cNvPr id="8" name="close-shape-7"/>
-          <p:cNvSpPr/>
-          <p:nvPr/>
-        </p:nvSpPr>
-        <p:spPr>
-          <a:xfrm>
-            <a:off x="5778500" y="3403600"/>
-            <a:ext cx="4699000" cy="2971800"/>
+              <a:t>Return the comment and give students time to revise.</a:t>
+            </a:r>
+            <a:endParaRPr lang="en-US" sz="2100" dirty="0"/>
+          </a:p>
+        </p:txBody>
+      </p:sp>
+      <p:sp>
+        <p:nvSpPr>
+          <p:cNvPr id="11" name="close-shape-10"/>
+          <p:cNvSpPr/>
+          <p:nvPr/>
+        </p:nvSpPr>
+        <p:spPr>
+          <a:xfrm>
+            <a:off x="5778500" y="3454400"/>
+            <a:ext cx="4699000" cy="3073400"/>
           </a:xfrm>
           <a:prstGeom prst="rect">
             <a:avLst/>
@@ -7097,14 +7680,92 @@
       </p:sp>
       <p:sp>
         <p:nvSpPr>
-          <p:cNvPr id="9" name="c2"/>
-          <p:cNvSpPr/>
-          <p:nvPr/>
-        </p:nvSpPr>
-        <p:spPr>
-          <a:xfrm>
-            <a:off x="6159500" y="3733800"/>
-            <a:ext cx="3937000" cy="2362200"/>
+          <p:cNvPr id="12" name="two-label"/>
+          <p:cNvSpPr/>
+          <p:nvPr/>
+        </p:nvSpPr>
+        <p:spPr>
+          <a:xfrm>
+            <a:off x="6159500" y="3784600"/>
+            <a:ext cx="3937000" cy="254000"/>
+          </a:xfrm>
+          <a:prstGeom prst="rect">
+            <a:avLst/>
+          </a:prstGeom>
+          <a:noFill/>
+          <a:ln/>
+        </p:spPr>
+        <p:txBody>
+          <a:bodyPr wrap="square" lIns="0" tIns="0" rIns="0" bIns="0" rtlCol="0" anchor="t"/>
+          <a:lstStyle/>
+          <a:p>
+            <a:pPr algn="l" indent="0" marL="0">
+              <a:buNone/>
+            </a:pPr>
+            <a:r>
+              <a:rPr lang="en-US" altLang="en-US" sz="1400" dirty="0">
+                <a:solidFill>
+                  <a:srgbClr val="C41220"/>
+                </a:solidFill>
+                <a:latin typeface="Inter" pitchFamily="34" charset="0"/>
+                <a:ea typeface="Inter" pitchFamily="34" charset="-122"/>
+                <a:cs typeface="Inter" pitchFamily="34" charset="-120"/>
+              </a:rPr>
+              <a:t>2</a:t>
+            </a:r>
+            <a:endParaRPr lang="en-US" sz="1400" dirty="0"/>
+          </a:p>
+        </p:txBody>
+      </p:sp>
+      <p:sp>
+        <p:nvSpPr>
+          <p:cNvPr id="13" name="two-title"/>
+          <p:cNvSpPr/>
+          <p:nvPr/>
+        </p:nvSpPr>
+        <p:spPr>
+          <a:xfrm>
+            <a:off x="6159500" y="4216400"/>
+            <a:ext cx="3937000" cy="431800"/>
+          </a:xfrm>
+          <a:prstGeom prst="rect">
+            <a:avLst/>
+          </a:prstGeom>
+          <a:noFill/>
+          <a:ln/>
+        </p:spPr>
+        <p:txBody>
+          <a:bodyPr wrap="square" lIns="0" tIns="0" rIns="0" bIns="0" rtlCol="0" anchor="t"/>
+          <a:lstStyle/>
+          <a:p>
+            <a:pPr algn="l" indent="0" marL="0">
+              <a:buNone/>
+            </a:pPr>
+            <a:r>
+              <a:rPr lang="en-US" altLang="en-US" sz="2400" dirty="0">
+                <a:solidFill>
+                  <a:srgbClr val="202124"/>
+                </a:solidFill>
+                <a:latin typeface="Inter" pitchFamily="34" charset="0"/>
+                <a:ea typeface="Inter" pitchFamily="34" charset="-122"/>
+                <a:cs typeface="Inter" pitchFamily="34" charset="-120"/>
+              </a:rPr>
+              <a:t>Collect the revision</a:t>
+            </a:r>
+            <a:endParaRPr lang="en-US" sz="2400" dirty="0"/>
+          </a:p>
+        </p:txBody>
+      </p:sp>
+      <p:sp>
+        <p:nvSpPr>
+          <p:cNvPr id="14" name="two-body"/>
+          <p:cNvSpPr/>
+          <p:nvPr/>
+        </p:nvSpPr>
+        <p:spPr>
+          <a:xfrm>
+            <a:off x="6159500" y="5054600"/>
+            <a:ext cx="3937000" cy="1117600"/>
           </a:xfrm>
           <a:prstGeom prst="rect">
             <a:avLst/>
@@ -7118,35 +7779,12 @@
           <a:p>
             <a:pPr algn="l" indent="0" marL="0">
               <a:lnSpc>
-                <a:spcPts val="1890"/>
+                <a:spcPts val="2688"/>
               </a:lnSpc>
               <a:buNone/>
             </a:pPr>
             <a:r>
-              <a:rPr lang="en-US" altLang="en-US" sz="1500" b="1" dirty="0">
-                <a:solidFill>
-                  <a:srgbClr val="C41220"/>
-                </a:solidFill>
-                <a:latin typeface="Inter" pitchFamily="34" charset="0"/>
-                <a:ea typeface="Inter" pitchFamily="34" charset="-122"/>
-                <a:cs typeface="Inter" pitchFamily="34" charset="-120"/>
-              </a:rPr>
-              <a:t>2. LOOK FOR</a:t>
-            </a:r>
-            <a:endParaRPr lang="en-US" sz="2000" dirty="0"/>
-          </a:p>
-          <a:p>
-            <a:pPr algn="l" indent="0" marL="0">
-              <a:lnSpc>
-                <a:spcPts val="2520"/>
-              </a:lnSpc>
-              <a:spcBef>
-                <a:spcPts val="1000"/>
-              </a:spcBef>
-              <a:buNone/>
-            </a:pPr>
-            <a:r>
-              <a:rPr lang="en-US" altLang="en-US" sz="2000" dirty="0">
+              <a:rPr lang="en-US" altLang="en-US" sz="2100" dirty="0">
                 <a:solidFill>
                   <a:srgbClr val="3C4043"/>
                 </a:solidFill>
@@ -7154,22 +7792,22 @@
                 <a:ea typeface="Inter" pitchFamily="34" charset="-122"/>
                 <a:cs typeface="Inter" pitchFamily="34" charset="-120"/>
               </a:rPr>
-              <a:t>Check the same criterion in the revised work, using the rubric.</a:t>
-            </a:r>
-            <a:endParaRPr lang="en-US" sz="2000" dirty="0"/>
-          </a:p>
-        </p:txBody>
-      </p:sp>
-      <p:sp>
-        <p:nvSpPr>
-          <p:cNvPr id="10" name="close-shape-9"/>
-          <p:cNvSpPr/>
-          <p:nvPr/>
-        </p:nvSpPr>
-        <p:spPr>
-          <a:xfrm>
-            <a:off x="10820400" y="3403600"/>
-            <a:ext cx="4927600" cy="2971800"/>
+              <a:t>Look for the same rubric criterion in the revised work.</a:t>
+            </a:r>
+            <a:endParaRPr lang="en-US" sz="2100" dirty="0"/>
+          </a:p>
+        </p:txBody>
+      </p:sp>
+      <p:sp>
+        <p:nvSpPr>
+          <p:cNvPr id="15" name="close-shape-14"/>
+          <p:cNvSpPr/>
+          <p:nvPr/>
+        </p:nvSpPr>
+        <p:spPr>
+          <a:xfrm>
+            <a:off x="10820400" y="3454400"/>
+            <a:ext cx="4927600" cy="3073400"/>
           </a:xfrm>
           <a:prstGeom prst="rect">
             <a:avLst/>
@@ -7187,14 +7825,92 @@
       </p:sp>
       <p:sp>
         <p:nvSpPr>
-          <p:cNvPr id="11" name="c3"/>
-          <p:cNvSpPr/>
-          <p:nvPr/>
-        </p:nvSpPr>
-        <p:spPr>
-          <a:xfrm>
-            <a:off x="11201400" y="3733800"/>
-            <a:ext cx="4165600" cy="2362200"/>
+          <p:cNvPr id="16" name="three-label"/>
+          <p:cNvSpPr/>
+          <p:nvPr/>
+        </p:nvSpPr>
+        <p:spPr>
+          <a:xfrm>
+            <a:off x="11201400" y="3784600"/>
+            <a:ext cx="4165600" cy="254000"/>
+          </a:xfrm>
+          <a:prstGeom prst="rect">
+            <a:avLst/>
+          </a:prstGeom>
+          <a:noFill/>
+          <a:ln/>
+        </p:spPr>
+        <p:txBody>
+          <a:bodyPr wrap="square" lIns="0" tIns="0" rIns="0" bIns="0" rtlCol="0" anchor="t"/>
+          <a:lstStyle/>
+          <a:p>
+            <a:pPr algn="l" indent="0" marL="0">
+              <a:buNone/>
+            </a:pPr>
+            <a:r>
+              <a:rPr lang="en-US" altLang="en-US" sz="1400" dirty="0">
+                <a:solidFill>
+                  <a:srgbClr val="C41220"/>
+                </a:solidFill>
+                <a:latin typeface="Inter" pitchFamily="34" charset="0"/>
+                <a:ea typeface="Inter" pitchFamily="34" charset="-122"/>
+                <a:cs typeface="Inter" pitchFamily="34" charset="-120"/>
+              </a:rPr>
+              <a:t>3</a:t>
+            </a:r>
+            <a:endParaRPr lang="en-US" sz="1400" dirty="0"/>
+          </a:p>
+        </p:txBody>
+      </p:sp>
+      <p:sp>
+        <p:nvSpPr>
+          <p:cNvPr id="17" name="three-title"/>
+          <p:cNvSpPr/>
+          <p:nvPr/>
+        </p:nvSpPr>
+        <p:spPr>
+          <a:xfrm>
+            <a:off x="11201400" y="4216400"/>
+            <a:ext cx="4165600" cy="431800"/>
+          </a:xfrm>
+          <a:prstGeom prst="rect">
+            <a:avLst/>
+          </a:prstGeom>
+          <a:noFill/>
+          <a:ln/>
+        </p:spPr>
+        <p:txBody>
+          <a:bodyPr wrap="square" lIns="0" tIns="0" rIns="0" bIns="0" rtlCol="0" anchor="t"/>
+          <a:lstStyle/>
+          <a:p>
+            <a:pPr algn="l" indent="0" marL="0">
+              <a:buNone/>
+            </a:pPr>
+            <a:r>
+              <a:rPr lang="en-US" altLang="en-US" sz="2400" dirty="0">
+                <a:solidFill>
+                  <a:srgbClr val="202124"/>
+                </a:solidFill>
+                <a:latin typeface="Inter" pitchFamily="34" charset="0"/>
+                <a:ea typeface="Inter" pitchFamily="34" charset="-122"/>
+                <a:cs typeface="Inter" pitchFamily="34" charset="-120"/>
+              </a:rPr>
+              <a:t>Bring back evidence</a:t>
+            </a:r>
+            <a:endParaRPr lang="en-US" sz="2400" dirty="0"/>
+          </a:p>
+        </p:txBody>
+      </p:sp>
+      <p:sp>
+        <p:nvSpPr>
+          <p:cNvPr id="18" name="three-body"/>
+          <p:cNvSpPr/>
+          <p:nvPr/>
+        </p:nvSpPr>
+        <p:spPr>
+          <a:xfrm>
+            <a:off x="11201400" y="5054600"/>
+            <a:ext cx="4165600" cy="1117600"/>
           </a:xfrm>
           <a:prstGeom prst="rect">
             <a:avLst/>
@@ -7208,35 +7924,12 @@
           <a:p>
             <a:pPr algn="l" indent="0" marL="0">
               <a:lnSpc>
-                <a:spcPts val="1890"/>
+                <a:spcPts val="2688"/>
               </a:lnSpc>
               <a:buNone/>
             </a:pPr>
             <a:r>
-              <a:rPr lang="en-US" altLang="en-US" sz="1500" b="1" dirty="0">
-                <a:solidFill>
-                  <a:srgbClr val="C41220"/>
-                </a:solidFill>
-                <a:latin typeface="Inter" pitchFamily="34" charset="0"/>
-                <a:ea typeface="Inter" pitchFamily="34" charset="-122"/>
-                <a:cs typeface="Inter" pitchFamily="34" charset="-120"/>
-              </a:rPr>
-              <a:t>3. BRING BACK</a:t>
-            </a:r>
-            <a:endParaRPr lang="en-US" sz="2000" dirty="0"/>
-          </a:p>
-          <a:p>
-            <a:pPr algn="l" indent="0" marL="0">
-              <a:lnSpc>
-                <a:spcPts val="2520"/>
-              </a:lnSpc>
-              <a:spcBef>
-                <a:spcPts val="1000"/>
-              </a:spcBef>
-              <a:buNone/>
-            </a:pPr>
-            <a:r>
-              <a:rPr lang="en-US" altLang="en-US" sz="2000" dirty="0">
+              <a:rPr lang="en-US" altLang="en-US" sz="2100" dirty="0">
                 <a:solidFill>
                   <a:srgbClr val="3C4043"/>
                 </a:solidFill>
@@ -7244,22 +7937,22 @@
                 <a:ea typeface="Inter" pitchFamily="34" charset="-122"/>
                 <a:cs typeface="Inter" pitchFamily="34" charset="-120"/>
               </a:rPr>
-              <a:t>Bring the form and a few revised samples to the next PLC.</a:t>
-            </a:r>
-            <a:endParaRPr lang="en-US" sz="2000" dirty="0"/>
-          </a:p>
-        </p:txBody>
-      </p:sp>
-      <p:sp>
-        <p:nvSpPr>
-          <p:cNvPr id="12" name="close-shape-11"/>
-          <p:cNvSpPr/>
-          <p:nvPr/>
-        </p:nvSpPr>
-        <p:spPr>
-          <a:xfrm>
-            <a:off x="736600" y="6807200"/>
-            <a:ext cx="15011400" cy="965200"/>
+              <a:t>Bring the completed form and revised work to the next PLC.</a:t>
+            </a:r>
+            <a:endParaRPr lang="en-US" sz="2100" dirty="0"/>
+          </a:p>
+        </p:txBody>
+      </p:sp>
+      <p:sp>
+        <p:nvSpPr>
+          <p:cNvPr id="19" name="close-shape-18"/>
+          <p:cNvSpPr/>
+          <p:nvPr/>
+        </p:nvSpPr>
+        <p:spPr>
+          <a:xfrm>
+            <a:off x="736600" y="7010400"/>
+            <a:ext cx="15011400" cy="812800"/>
           </a:xfrm>
           <a:prstGeom prst="rect">
             <a:avLst/>
@@ -7272,28 +7965,39 @@
       </p:sp>
       <p:sp>
         <p:nvSpPr>
-          <p:cNvPr id="13" name="bottom"/>
-          <p:cNvSpPr/>
-          <p:nvPr/>
-        </p:nvSpPr>
-        <p:spPr>
-          <a:xfrm>
-            <a:off x="1117600" y="7010400"/>
-            <a:ext cx="14224000" cy="609600"/>
-          </a:xfrm>
-          <a:prstGeom prst="rect">
-            <a:avLst/>
-          </a:prstGeom>
-          <a:noFill/>
-          <a:ln/>
-        </p:spPr>
-        <p:txBody>
-          <a:bodyPr wrap="square" lIns="0" tIns="0" rIns="0" bIns="0" rtlCol="0" anchor="t"/>
-          <a:lstStyle/>
-          <a:p>
-            <a:pPr algn="l" indent="0" marL="0">
-              <a:buNone/>
-            </a:pPr>
+          <p:cNvPr id="20" name="bottom"/>
+          <p:cNvSpPr/>
+          <p:nvPr/>
+        </p:nvSpPr>
+        <p:spPr>
+          <a:xfrm>
+            <a:off x="1117600" y="7239000"/>
+            <a:ext cx="14224000" cy="355600"/>
+          </a:xfrm>
+          <a:prstGeom prst="rect">
+            <a:avLst/>
+          </a:prstGeom>
+          <a:noFill/>
+          <a:ln/>
+        </p:spPr>
+        <p:txBody>
+          <a:bodyPr wrap="square" lIns="0" tIns="0" rIns="0" bIns="0" rtlCol="0" anchor="t"/>
+          <a:lstStyle/>
+          <a:p>
+            <a:pPr algn="l" indent="0" marL="0">
+              <a:buNone/>
+            </a:pPr>
+            <a:r>
+              <a:rPr lang="en-US" altLang="en-US" sz="2000" b="1" dirty="0">
+                <a:solidFill>
+                  <a:srgbClr val="F6B4BA"/>
+                </a:solidFill>
+                <a:latin typeface="Inter" pitchFamily="34" charset="0"/>
+                <a:ea typeface="Inter" pitchFamily="34" charset="-122"/>
+                <a:cs typeface="Inter" pitchFamily="34" charset="-120"/>
+              </a:rPr>
+              <a:t>Complete the writing analysis form:</a:t>
+            </a:r>
             <a:r>
               <a:rPr lang="en-US" altLang="en-US" sz="2000" dirty="0">
                 <a:solidFill>
@@ -7303,35 +8007,15 @@
                 <a:ea typeface="Inter" pitchFamily="34" charset="-122"/>
                 <a:cs typeface="Inter" pitchFamily="34" charset="-120"/>
               </a:rPr>
-              <a:t>Today the rubric led the work. Keep the samples and the form — the next PLC starts with your evidence.</a:t>
+              <a:t> feedback, next step, and evidence check.</a:t>
             </a:r>
             <a:endParaRPr lang="en-US" sz="2000" dirty="0"/>
           </a:p>
-          <a:p>
-            <a:pPr algn="l" indent="0" marL="0">
-              <a:spcBef>
-                <a:spcPts val="600"/>
-              </a:spcBef>
-              <a:buNone/>
-            </a:pPr>
-            <a:r>
-              <a:rPr lang="en-US" altLang="en-US" sz="2000" dirty="0">
-                <a:solidFill>
-                  <a:srgbClr val="F6B4BA"/>
-                </a:solidFill>
-                <a:latin typeface="Inter" pitchFamily="34" charset="0"/>
-                <a:ea typeface="Inter" pitchFamily="34" charset="-122"/>
-                <a:cs typeface="Inter" pitchFamily="34" charset="-120"/>
-              </a:rPr>
-              <a:t>Aligned with the Lesson Internalization Protocol.</a:t>
-            </a:r>
-            <a:endParaRPr lang="en-US" sz="2000" dirty="0"/>
-          </a:p>
-        </p:txBody>
-      </p:sp>
-      <p:sp>
-        <p:nvSpPr>
-          <p:cNvPr id="14" name="page"/>
+        </p:txBody>
+      </p:sp>
+      <p:sp>
+        <p:nvSpPr>
+          <p:cNvPr id="21" name="page"/>
           <p:cNvSpPr/>
           <p:nvPr/>
         </p:nvSpPr>
@@ -7370,7 +8054,7 @@
       </p:sp>
       <p:sp>
         <p:nvSpPr>
-          <p:cNvPr id="15" name="close-shape-14"/>
+          <p:cNvPr id="22" name="close-shape-21"/>
           <p:cNvSpPr/>
           <p:nvPr/>
         </p:nvSpPr>
